--- a/银行流水分享_V2.0.pptx
+++ b/银行流水分享_V2.0.pptx
@@ -10136,298 +10136,13 @@
       </p:sp>
       <p:sp>
         <p:nvSpPr>
-          <p:cNvPr id="65" name="用户-g2-bar"/>
-          <p:cNvSpPr/>
-          <p:nvPr/>
-        </p:nvSpPr>
-        <p:spPr>
-          <a:xfrm>
-            <a:off x="566928" y="4823459"/>
-            <a:ext cx="45720" cy="128016"/>
-          </a:xfrm>
-          <a:prstGeom prst="rect">
-            <a:avLst/>
-          </a:prstGeom>
-          <a:solidFill>
-            <a:srgbClr val="D6A000"/>
-          </a:solidFill>
-          <a:ln>
-            <a:noFill/>
-          </a:ln>
-          <a:effectLst/>
-        </p:spPr>
-        <p:style>
-          <a:lnRef idx="1">
-            <a:schemeClr val="accent1"/>
-          </a:lnRef>
-          <a:fillRef idx="3">
-            <a:schemeClr val="accent1"/>
-          </a:fillRef>
-          <a:effectRef idx="2">
-            <a:schemeClr val="accent1"/>
-          </a:effectRef>
-          <a:fontRef idx="minor">
-            <a:schemeClr val="lt1"/>
-          </a:fontRef>
-        </p:style>
-        <p:txBody>
-          <a:bodyPr rtlCol="0" anchor="ctr"/>
-          <a:lstStyle/>
-          <a:p>
-            <a:pPr algn="ctr"/>
-            <a:endParaRPr/>
-          </a:p>
-        </p:txBody>
-      </p:sp>
-      <p:sp>
-        <p:nvSpPr>
-          <p:cNvPr id="66" name="用户-g2-t"/>
-          <p:cNvSpPr txBox="1"/>
-          <p:nvPr/>
-        </p:nvSpPr>
-        <p:spPr>
-          <a:xfrm>
-            <a:off x="658368" y="4809744"/>
-            <a:ext cx="1828800" cy="146304"/>
-          </a:xfrm>
-          <a:prstGeom prst="rect">
-            <a:avLst/>
-          </a:prstGeom>
-          <a:noFill/>
-        </p:spPr>
-        <p:txBody>
-          <a:bodyPr wrap="square" lIns="0" tIns="0" rIns="0" bIns="0">
-            <a:noAutofit/>
-          </a:bodyPr>
-          <a:lstStyle/>
-          <a:p>
-            <a:pPr>
-              <a:lnSpc>
-                <a:spcPct val="100000"/>
-              </a:lnSpc>
-            </a:pPr>
-            <a:r>
-              <a:rPr lang="zh-CN" sz="1000" b="1">
-                <a:solidFill>
-                  <a:srgbClr val="1F4E79"/>
-                </a:solidFill>
-                <a:latin typeface="微软雅黑"/>
-                <a:ea typeface="微软雅黑"/>
-              </a:rPr>
-              <a:t>借贷特征</a:t>
-            </a:r>
-          </a:p>
-        </p:txBody>
-      </p:sp>
-      <p:sp>
-        <p:nvSpPr>
-          <p:cNvPr id="67" name="用户-g2-1"/>
-          <p:cNvSpPr txBox="1"/>
-          <p:nvPr/>
-        </p:nvSpPr>
-        <p:spPr>
-          <a:xfrm>
-            <a:off x="722376" y="5029200"/>
-            <a:ext cx="1197864" cy="274320"/>
-          </a:xfrm>
-          <a:prstGeom prst="rect">
-            <a:avLst/>
-          </a:prstGeom>
-          <a:noFill/>
-        </p:spPr>
-        <p:txBody>
-          <a:bodyPr wrap="square" lIns="0" tIns="0" rIns="0" bIns="0">
-            <a:noAutofit/>
-          </a:bodyPr>
-          <a:lstStyle/>
-          <a:p>
-            <a:pPr>
-              <a:lnSpc>
-                <a:spcPct val="100000"/>
-              </a:lnSpc>
-            </a:pPr>
-            <a:r>
-              <a:rPr lang="zh-CN" sz="1000" b="1">
-                <a:solidFill>
-                  <a:srgbClr val="D6A000"/>
-                </a:solidFill>
-                <a:latin typeface="微软雅黑"/>
-                <a:ea typeface="微软雅黑"/>
-              </a:rPr>
-              <a:t>✓</a:t>
-            </a:r>
-            <a:r>
-              <a:rPr lang="zh-CN" sz="900" b="1">
-                <a:solidFill>
-                  <a:srgbClr val="1F4E79"/>
-                </a:solidFill>
-                <a:latin typeface="微软雅黑"/>
-                <a:ea typeface="微软雅黑"/>
-              </a:rPr>
-              <a:t> 多头借贷</a:t>
-            </a:r>
-          </a:p>
-        </p:txBody>
-      </p:sp>
-      <p:sp>
-        <p:nvSpPr>
-          <p:cNvPr id="68" name="用户-g2-2"/>
-          <p:cNvSpPr txBox="1"/>
-          <p:nvPr/>
-        </p:nvSpPr>
-        <p:spPr>
-          <a:xfrm>
-            <a:off x="1993392" y="5029200"/>
-            <a:ext cx="1197864" cy="274320"/>
-          </a:xfrm>
-          <a:prstGeom prst="rect">
-            <a:avLst/>
-          </a:prstGeom>
-          <a:noFill/>
-        </p:spPr>
-        <p:txBody>
-          <a:bodyPr wrap="square" lIns="0" tIns="0" rIns="0" bIns="0">
-            <a:noAutofit/>
-          </a:bodyPr>
-          <a:lstStyle/>
-          <a:p>
-            <a:pPr>
-              <a:lnSpc>
-                <a:spcPct val="100000"/>
-              </a:lnSpc>
-            </a:pPr>
-            <a:r>
-              <a:rPr lang="zh-CN" sz="1000" b="1">
-                <a:solidFill>
-                  <a:srgbClr val="D6A000"/>
-                </a:solidFill>
-                <a:latin typeface="微软雅黑"/>
-                <a:ea typeface="微软雅黑"/>
-              </a:rPr>
-              <a:t>✓</a:t>
-            </a:r>
-            <a:r>
-              <a:rPr lang="zh-CN" sz="900" b="1">
-                <a:solidFill>
-                  <a:srgbClr val="1F4E79"/>
-                </a:solidFill>
-                <a:latin typeface="微软雅黑"/>
-                <a:ea typeface="微软雅黑"/>
-              </a:rPr>
-              <a:t> 持续还款</a:t>
-            </a:r>
-          </a:p>
-        </p:txBody>
-      </p:sp>
-      <p:sp>
-        <p:nvSpPr>
-          <p:cNvPr id="69" name="用户-g2-3"/>
-          <p:cNvSpPr txBox="1"/>
-          <p:nvPr/>
-        </p:nvSpPr>
-        <p:spPr>
-          <a:xfrm>
-            <a:off x="3264408" y="5029200"/>
-            <a:ext cx="1197864" cy="274320"/>
-          </a:xfrm>
-          <a:prstGeom prst="rect">
-            <a:avLst/>
-          </a:prstGeom>
-          <a:noFill/>
-        </p:spPr>
-        <p:txBody>
-          <a:bodyPr wrap="square" lIns="0" tIns="0" rIns="0" bIns="0">
-            <a:noAutofit/>
-          </a:bodyPr>
-          <a:lstStyle/>
-          <a:p>
-            <a:pPr>
-              <a:lnSpc>
-                <a:spcPct val="100000"/>
-              </a:lnSpc>
-            </a:pPr>
-            <a:r>
-              <a:rPr lang="zh-CN" sz="1000" b="1">
-                <a:solidFill>
-                  <a:srgbClr val="D6A000"/>
-                </a:solidFill>
-                <a:latin typeface="微软雅黑"/>
-                <a:ea typeface="微软雅黑"/>
-              </a:rPr>
-              <a:t>✓</a:t>
-            </a:r>
-            <a:r>
-              <a:rPr lang="zh-CN" sz="900" b="1">
-                <a:solidFill>
-                  <a:srgbClr val="1F4E79"/>
-                </a:solidFill>
-                <a:latin typeface="微软雅黑"/>
-                <a:ea typeface="微软雅黑"/>
-              </a:rPr>
-              <a:t> SACC 贷款</a:t>
-            </a:r>
-          </a:p>
-        </p:txBody>
-      </p:sp>
-      <p:sp>
-        <p:nvSpPr>
-          <p:cNvPr id="70" name="用户-g2-4"/>
-          <p:cNvSpPr txBox="1"/>
-          <p:nvPr/>
-        </p:nvSpPr>
-        <p:spPr>
-          <a:xfrm>
-            <a:off x="4535424" y="5029200"/>
-            <a:ext cx="1197864" cy="274320"/>
-          </a:xfrm>
-          <a:prstGeom prst="rect">
-            <a:avLst/>
-          </a:prstGeom>
-          <a:noFill/>
-        </p:spPr>
-        <p:txBody>
-          <a:bodyPr wrap="square" lIns="0" tIns="0" rIns="0" bIns="0">
-            <a:noAutofit/>
-          </a:bodyPr>
-          <a:lstStyle/>
-          <a:p>
-            <a:pPr>
-              <a:lnSpc>
-                <a:spcPct val="100000"/>
-              </a:lnSpc>
-            </a:pPr>
-            <a:r>
-              <a:rPr lang="zh-CN" sz="1000" b="1">
-                <a:solidFill>
-                  <a:srgbClr val="D6A000"/>
-                </a:solidFill>
-                <a:latin typeface="微软雅黑"/>
-                <a:ea typeface="微软雅黑"/>
-              </a:rPr>
-              <a:t>✓</a:t>
-            </a:r>
-            <a:r>
-              <a:rPr lang="zh-CN" sz="900" b="1">
-                <a:solidFill>
-                  <a:srgbClr val="1F4E79"/>
-                </a:solidFill>
-                <a:latin typeface="微软雅黑"/>
-                <a:ea typeface="微软雅黑"/>
-              </a:rPr>
-              <a:t> 90 天还款 9 次</a:t>
-            </a:r>
-          </a:p>
-        </p:txBody>
-      </p:sp>
-      <p:sp>
-        <p:nvSpPr>
           <p:cNvPr id="71" name="用户-g3-bar"/>
           <p:cNvSpPr/>
           <p:nvPr/>
         </p:nvSpPr>
         <p:spPr>
           <a:xfrm>
-            <a:off x="566928" y="5445252"/>
+            <a:off x="566928" y="4855464"/>
             <a:ext cx="45720" cy="128016"/>
           </a:xfrm>
           <a:prstGeom prst="rect">
@@ -10472,7 +10187,7 @@
         </p:nvSpPr>
         <p:spPr>
           <a:xfrm>
-            <a:off x="658368" y="5431536"/>
+            <a:off x="658368" y="4846320"/>
             <a:ext cx="1828800" cy="146304"/>
           </a:xfrm>
           <a:prstGeom prst="rect">
@@ -10499,7 +10214,7 @@
                 <a:latin typeface="微软雅黑"/>
                 <a:ea typeface="微软雅黑"/>
               </a:rPr>
-              <a:t>还款表现</a:t>
+              <a:t>还款与风险表现</a:t>
             </a:r>
           </a:p>
         </p:txBody>
@@ -11541,7 +11256,7 @@
         </p:nvSpPr>
         <p:spPr>
           <a:xfrm>
-            <a:off x="8092440" y="5522976"/>
+            <a:off x="8092440" y="5669280"/>
             <a:ext cx="1609344" cy="173736"/>
           </a:xfrm>
           <a:prstGeom prst="rect">
@@ -11591,7 +11306,7 @@
         </p:nvSpPr>
         <p:spPr>
           <a:xfrm>
-            <a:off x="8092440" y="5669280"/>
+            <a:off x="8092440" y="5815584"/>
             <a:ext cx="1609344" cy="173736"/>
           </a:xfrm>
           <a:prstGeom prst="rect">
@@ -11668,157 +11383,7 @@
                 <a:latin typeface="微软雅黑"/>
                 <a:ea typeface="微软雅黑"/>
               </a:rPr>
-              <a:t>产品与定价</a:t>
-            </a:r>
-          </a:p>
-        </p:txBody>
-      </p:sp>
-      <p:sp>
-        <p:nvSpPr>
-          <p:cNvPr id="104" name="Fa-g3-1"/>
-          <p:cNvSpPr txBox="1"/>
-          <p:nvPr/>
-        </p:nvSpPr>
-        <p:spPr>
-          <a:xfrm>
-            <a:off x="9811512" y="5230368"/>
-            <a:ext cx="1609344" cy="173736"/>
-          </a:xfrm>
-          <a:prstGeom prst="rect">
-            <a:avLst/>
-          </a:prstGeom>
-          <a:noFill/>
-        </p:spPr>
-        <p:txBody>
-          <a:bodyPr wrap="square" lIns="0" tIns="0" rIns="0" bIns="0">
-            <a:noAutofit/>
-          </a:bodyPr>
-          <a:lstStyle/>
-          <a:p>
-            <a:pPr>
-              <a:lnSpc>
-                <a:spcPct val="100000"/>
-              </a:lnSpc>
-            </a:pPr>
-            <a:r>
-              <a:rPr lang="zh-CN" sz="800" b="0">
-                <a:solidFill>
-                  <a:srgbClr val="1F4E79"/>
-                </a:solidFill>
-                <a:latin typeface="微软雅黑"/>
-                <a:ea typeface="微软雅黑"/>
-              </a:rPr>
-              <a:t>贷款类型 </a:t>
-            </a:r>
-            <a:r>
-              <a:rPr lang="zh-CN" sz="900" b="0">
-                <a:solidFill>
-                  <a:srgbClr val="3D3C3A"/>
-                </a:solidFill>
-                <a:latin typeface="微软雅黑"/>
-                <a:ea typeface="微软雅黑"/>
-              </a:rPr>
-              <a:t>SACC</a:t>
-            </a:r>
-          </a:p>
-        </p:txBody>
-      </p:sp>
-      <p:sp>
-        <p:nvSpPr>
-          <p:cNvPr id="105" name="Fa-g3-2"/>
-          <p:cNvSpPr txBox="1"/>
-          <p:nvPr/>
-        </p:nvSpPr>
-        <p:spPr>
-          <a:xfrm>
-            <a:off x="9811512" y="5376672"/>
-            <a:ext cx="1609344" cy="173736"/>
-          </a:xfrm>
-          <a:prstGeom prst="rect">
-            <a:avLst/>
-          </a:prstGeom>
-          <a:noFill/>
-        </p:spPr>
-        <p:txBody>
-          <a:bodyPr wrap="square" lIns="0" tIns="0" rIns="0" bIns="0">
-            <a:noAutofit/>
-          </a:bodyPr>
-          <a:lstStyle/>
-          <a:p>
-            <a:pPr>
-              <a:lnSpc>
-                <a:spcPct val="100000"/>
-              </a:lnSpc>
-            </a:pPr>
-            <a:r>
-              <a:rPr lang="zh-CN" sz="800" b="0">
-                <a:solidFill>
-                  <a:srgbClr val="1F4E79"/>
-                </a:solidFill>
-                <a:latin typeface="微软雅黑"/>
-                <a:ea typeface="微软雅黑"/>
-              </a:rPr>
-              <a:t>APR </a:t>
-            </a:r>
-            <a:r>
-              <a:rPr lang="zh-CN" sz="1200" b="1">
-                <a:solidFill>
-                  <a:srgbClr val="1F4E79"/>
-                </a:solidFill>
-                <a:latin typeface="微软雅黑"/>
-                <a:ea typeface="微软雅黑"/>
-              </a:rPr>
-              <a:t>42%</a:t>
-            </a:r>
-          </a:p>
-        </p:txBody>
-      </p:sp>
-      <p:sp>
-        <p:nvSpPr>
-          <p:cNvPr id="106" name="Fa-g3-3"/>
-          <p:cNvSpPr txBox="1"/>
-          <p:nvPr/>
-        </p:nvSpPr>
-        <p:spPr>
-          <a:xfrm>
-            <a:off x="9811512" y="5522976"/>
-            <a:ext cx="1609344" cy="173736"/>
-          </a:xfrm>
-          <a:prstGeom prst="rect">
-            <a:avLst/>
-          </a:prstGeom>
-          <a:noFill/>
-        </p:spPr>
-        <p:txBody>
-          <a:bodyPr wrap="square" lIns="0" tIns="0" rIns="0" bIns="0">
-            <a:noAutofit/>
-          </a:bodyPr>
-          <a:lstStyle/>
-          <a:p>
-            <a:pPr>
-              <a:lnSpc>
-                <a:spcPct val="100000"/>
-              </a:lnSpc>
-            </a:pPr>
-            <a:r>
-              <a:rPr lang="zh-CN" sz="800" b="0">
-                <a:solidFill>
-                  <a:srgbClr val="1F4E79"/>
-                </a:solidFill>
-                <a:latin typeface="微软雅黑"/>
-                <a:ea typeface="微软雅黑"/>
-              </a:rPr>
-              <a:t>当前余额 </a:t>
-            </a:r>
-            <a:r>
-              <a:rPr lang="zh-CN" sz="900" b="0">
-                <a:solidFill>
-                  <a:srgbClr val="3D3C3A"/>
-                </a:solidFill>
-                <a:latin typeface="微软雅黑"/>
-                <a:ea typeface="微软雅黑"/>
-              </a:rPr>
-              <a:t>A$564</a:t>
+              <a:t>产品与成本</a:t>
             </a:r>
           </a:p>
         </p:txBody>
@@ -11831,8 +11396,8 @@
         </p:nvSpPr>
         <p:spPr>
           <a:xfrm>
-            <a:off x="722376" y="5614416"/>
-            <a:ext cx="958291" cy="347472"/>
+            <a:off x="722376" y="5212080"/>
+            <a:ext cx="1371600" cy="347472"/>
           </a:xfrm>
           <a:prstGeom prst="rect">
             <a:avLst/>
@@ -11868,7 +11433,7 @@
               </a:lnSpc>
             </a:pPr>
             <a:r>
-              <a:rPr lang="zh-CN" sz="1000" b="0">
+              <a:rPr lang="zh-CN" sz="1100" b="0">
                 <a:solidFill>
                   <a:srgbClr val="3D3C3A"/>
                 </a:solidFill>
@@ -11888,8 +11453,8 @@
         </p:nvSpPr>
         <p:spPr>
           <a:xfrm>
-            <a:off x="1735531" y="5614416"/>
-            <a:ext cx="958291" cy="347472"/>
+            <a:off x="1993392" y="5212080"/>
+            <a:ext cx="1371600" cy="347472"/>
           </a:xfrm>
           <a:prstGeom prst="rect">
             <a:avLst/>
@@ -11925,9 +11490,9 @@
               </a:lnSpc>
             </a:pPr>
             <a:r>
-              <a:rPr lang="zh-CN" sz="1200" b="1">
+              <a:rPr lang="zh-CN" sz="1100" b="1">
                 <a:solidFill>
-                  <a:srgbClr val="D6A000"/>
+                  <a:srgbClr val="3D3C3A"/>
                 </a:solidFill>
                 <a:latin typeface="微软雅黑"/>
                 <a:ea typeface="微软雅黑"/>
@@ -11945,8 +11510,8 @@
         </p:nvSpPr>
         <p:spPr>
           <a:xfrm>
-            <a:off x="2748686" y="5614416"/>
-            <a:ext cx="958291" cy="347472"/>
+            <a:off x="3264408" y="5212080"/>
+            <a:ext cx="1371600" cy="347472"/>
           </a:xfrm>
           <a:prstGeom prst="rect">
             <a:avLst/>
@@ -11972,7 +11537,7 @@
                 <a:latin typeface="微软雅黑"/>
                 <a:ea typeface="微软雅黑"/>
               </a:rPr>
-              <a:t>扣款失败次数</a:t>
+              <a:t>扣款失败</a:t>
             </a:r>
           </a:p>
           <a:p>
@@ -11982,7 +11547,7 @@
               </a:lnSpc>
             </a:pPr>
             <a:r>
-              <a:rPr lang="zh-CN" sz="1000" b="0">
+              <a:rPr lang="zh-CN" sz="1100" b="0">
                 <a:solidFill>
                   <a:srgbClr val="3D3C3A"/>
                 </a:solidFill>
@@ -12002,8 +11567,8 @@
         </p:nvSpPr>
         <p:spPr>
           <a:xfrm>
-            <a:off x="3761841" y="5614416"/>
-            <a:ext cx="958291" cy="347472"/>
+            <a:off x="722376" y="5614416"/>
+            <a:ext cx="1371600" cy="347472"/>
           </a:xfrm>
           <a:prstGeom prst="rect">
             <a:avLst/>
@@ -12039,7 +11604,7 @@
               </a:lnSpc>
             </a:pPr>
             <a:r>
-              <a:rPr lang="zh-CN" sz="1000" b="0">
+              <a:rPr lang="zh-CN" sz="1100" b="0">
                 <a:solidFill>
                   <a:srgbClr val="3D3C3A"/>
                 </a:solidFill>
@@ -12059,8 +11624,8 @@
         </p:nvSpPr>
         <p:spPr>
           <a:xfrm>
-            <a:off x="4774996" y="5614416"/>
-            <a:ext cx="958291" cy="347472"/>
+            <a:off x="1993392" y="5614416"/>
+            <a:ext cx="1371600" cy="347472"/>
           </a:xfrm>
           <a:prstGeom prst="rect">
             <a:avLst/>
@@ -12096,7 +11661,7 @@
               </a:lnSpc>
             </a:pPr>
             <a:r>
-              <a:rPr lang="zh-CN" sz="1000" b="0">
+              <a:rPr lang="zh-CN" sz="1100" b="0">
                 <a:solidFill>
                   <a:srgbClr val="3D3C3A"/>
                 </a:solidFill>
@@ -12166,7 +11731,7 @@
         </p:nvSpPr>
         <p:spPr>
           <a:xfrm>
-            <a:off x="8092440" y="5815584"/>
+            <a:off x="8092440" y="5522976"/>
             <a:ext cx="1609344" cy="146304"/>
           </a:xfrm>
           <a:prstGeom prst="rect">
@@ -12216,7 +11781,7 @@
         </p:nvSpPr>
         <p:spPr>
           <a:xfrm>
-            <a:off x="9811512" y="5669280"/>
+            <a:off x="9811512" y="5230368"/>
             <a:ext cx="1609344" cy="146304"/>
           </a:xfrm>
           <a:prstGeom prst="rect">
@@ -12266,7 +11831,7 @@
         </p:nvSpPr>
         <p:spPr>
           <a:xfrm>
-            <a:off x="9811512" y="5815584"/>
+            <a:off x="9811512" y="5376672"/>
             <a:ext cx="1609344" cy="146304"/>
           </a:xfrm>
           <a:prstGeom prst="rect">
@@ -12304,6 +11869,49 @@
                 <a:ea typeface="微软雅黑"/>
               </a:rPr>
               <a:t>A$372</a:t>
+            </a:r>
+          </a:p>
+        </p:txBody>
+      </p:sp>
+      <p:sp>
+        <p:nvSpPr>
+          <p:cNvPr id="116" name="用户-g3-6"/>
+          <p:cNvSpPr txBox="1"/>
+          <p:nvPr/>
+        </p:nvSpPr>
+        <p:spPr>
+          <a:xfrm>
+            <a:off x="3264408" y="5614416"/>
+            <a:ext cx="1371600" cy="347472"/>
+          </a:xfrm>
+          <a:prstGeom prst="rect">
+            <a:avLst/>
+          </a:prstGeom>
+          <a:noFill/>
+        </p:spPr>
+        <p:txBody>
+          <a:bodyPr wrap="none">
+            <a:spAutoFit/>
+          </a:bodyPr>
+          <a:lstStyle/>
+          <a:p>
+            <a:r>
+              <a:rPr sz="800">
+                <a:solidFill>
+                  <a:srgbClr val="1F4E79"/>
+                </a:solidFill>
+              </a:rPr>
+              <a:t>90 天还款</a:t>
+            </a:r>
+          </a:p>
+          <a:p>
+            <a:r>
+              <a:rPr sz="1100">
+                <a:solidFill>
+                  <a:srgbClr val="3D3C3A"/>
+                </a:solidFill>
+              </a:rPr>
+              <a:t>9 次</a:t>
             </a:r>
           </a:p>
         </p:txBody>

--- a/银行流水分享_V2.0.pptx
+++ b/银行流水分享_V2.0.pptx
@@ -2422,7 +2422,7 @@
           <p:nvPr>
             <p:extLst>
               <p:ext uri="{F5677B7D-0D2A-4D9B-9A5C-6D8D7D0E5A5D}">
-                <pptd:line xmlns:pptd="https://kimi-design.msh.team/pptd/2026" xmlns:mc="http://schemas.openxmlformats.org/markup-compatibility/2006" xmlns:m="http://schemas.openxmlformats.org/officeDocument/2006/math" xmlns:cx="http://schemas.microsoft.com/office/drawing/2014/chartex" xmlns:c="http://schemas.openxmlformats.org/drawingml/2006/chart" xmlns:a14="http://schemas.microsoft.com/office/drawing/2010/main" xmlns="" encoding="base64url">eyJ2aWV3Qm94IjpbMSwzNDBdLCJwb2ludHMiOiIwLDAgMCwzNDAifQ</pptd:line>
+                <pptd:line xmlns="" xmlns:a14="http://schemas.microsoft.com/office/drawing/2010/main" xmlns:c="http://schemas.openxmlformats.org/drawingml/2006/chart" xmlns:cx="http://schemas.microsoft.com/office/drawing/2014/chartex" xmlns:m="http://schemas.openxmlformats.org/officeDocument/2006/math" xmlns:mc="http://schemas.openxmlformats.org/markup-compatibility/2006" xmlns:pptd="https://kimi-design.msh.team/pptd/2026" encoding="base64url">eyJ2aWV3Qm94IjpbMSwzNDBdLCJwb2ludHMiOiIwLDAgMCwzNDAifQ</pptd:line>
               </p:ext>
             </p:extLst>
           </p:nvPr>
@@ -2593,7 +2593,7 @@
           <p:nvPr>
             <p:extLst>
               <p:ext uri="{F5677B7D-0D2A-4D9B-9A5C-6D8D7D0E5A5D}">
-                <pptd:line xmlns:pptd="https://kimi-design.msh.team/pptd/2026" xmlns:mc="http://schemas.openxmlformats.org/markup-compatibility/2006" xmlns:m="http://schemas.openxmlformats.org/officeDocument/2006/math" xmlns:cx="http://schemas.microsoft.com/office/drawing/2014/chartex" xmlns:c="http://schemas.openxmlformats.org/drawingml/2006/chart" xmlns:a14="http://schemas.microsoft.com/office/drawing/2010/main" xmlns="" encoding="base64url">eyJ2aWV3Qm94IjpbMzc2LDFdLCJwb2ludHMiOiIwLDAgMzc2LDAifQ</pptd:line>
+                <pptd:line xmlns="" xmlns:a14="http://schemas.microsoft.com/office/drawing/2010/main" xmlns:c="http://schemas.openxmlformats.org/drawingml/2006/chart" xmlns:cx="http://schemas.microsoft.com/office/drawing/2014/chartex" xmlns:m="http://schemas.openxmlformats.org/officeDocument/2006/math" xmlns:mc="http://schemas.openxmlformats.org/markup-compatibility/2006" xmlns:pptd="https://kimi-design.msh.team/pptd/2026" encoding="base64url">eyJ2aWV3Qm94IjpbMzc2LDFdLCJwb2ludHMiOiIwLDAgMzc2LDAifQ</pptd:line>
               </p:ext>
             </p:extLst>
           </p:nvPr>
@@ -2717,7 +2717,7 @@
           <p:nvPr>
             <p:extLst>
               <p:ext uri="{F5677B7D-0D2A-4D9B-9A5C-6D8D7D0E5A5D}">
-                <pptd:line xmlns:pptd="https://kimi-design.msh.team/pptd/2026" xmlns:mc="http://schemas.openxmlformats.org/markup-compatibility/2006" xmlns:m="http://schemas.openxmlformats.org/officeDocument/2006/math" xmlns:cx="http://schemas.microsoft.com/office/drawing/2014/chartex" xmlns:c="http://schemas.openxmlformats.org/drawingml/2006/chart" xmlns:a14="http://schemas.microsoft.com/office/drawing/2010/main" xmlns="" encoding="base64url">eyJ2aWV3Qm94IjpbMzc2LDFdLCJwb2ludHMiOiIwLDAgMzc2LDAifQ</pptd:line>
+                <pptd:line xmlns="" xmlns:a14="http://schemas.microsoft.com/office/drawing/2010/main" xmlns:c="http://schemas.openxmlformats.org/drawingml/2006/chart" xmlns:cx="http://schemas.microsoft.com/office/drawing/2014/chartex" xmlns:m="http://schemas.openxmlformats.org/officeDocument/2006/math" xmlns:mc="http://schemas.openxmlformats.org/markup-compatibility/2006" xmlns:pptd="https://kimi-design.msh.team/pptd/2026" encoding="base64url">eyJ2aWV3Qm94IjpbMzc2LDFdLCJwb2ludHMiOiIwLDAgMzc2LDAifQ</pptd:line>
               </p:ext>
             </p:extLst>
           </p:nvPr>
@@ -2861,7 +2861,7 @@
           <p:nvPr>
             <p:extLst>
               <p:ext uri="{F5677B7D-0D2A-4D9B-9A5C-6D8D7D0E5A5D}">
-                <pptd:line xmlns:pptd="https://kimi-design.msh.team/pptd/2026" xmlns:mc="http://schemas.openxmlformats.org/markup-compatibility/2006" xmlns:m="http://schemas.openxmlformats.org/officeDocument/2006/math" xmlns:cx="http://schemas.microsoft.com/office/drawing/2014/chartex" xmlns:c="http://schemas.openxmlformats.org/drawingml/2006/chart" xmlns:a14="http://schemas.microsoft.com/office/drawing/2010/main" xmlns="" encoding="base64url">eyJ2aWV3Qm94IjpbMzc2LDFdLCJwb2ludHMiOiIwLDAgMzc2LDAifQ</pptd:line>
+                <pptd:line xmlns="" xmlns:a14="http://schemas.microsoft.com/office/drawing/2010/main" xmlns:c="http://schemas.openxmlformats.org/drawingml/2006/chart" xmlns:cx="http://schemas.microsoft.com/office/drawing/2014/chartex" xmlns:m="http://schemas.openxmlformats.org/officeDocument/2006/math" xmlns:mc="http://schemas.openxmlformats.org/markup-compatibility/2006" xmlns:pptd="https://kimi-design.msh.team/pptd/2026" encoding="base64url">eyJ2aWV3Qm94IjpbMzc2LDFdLCJwb2ludHMiOiIwLDAgMzc2LDAifQ</pptd:line>
               </p:ext>
             </p:extLst>
           </p:nvPr>
@@ -3025,7 +3025,7 @@
             <p:nvPr>
               <p:extLst>
                 <p:ext uri="{F5677B7D-0D2A-4D9B-9A5C-6D8D7D0E5A5D}">
-                  <pptd:line xmlns="" xmlns:a14="http://schemas.microsoft.com/office/drawing/2010/main" xmlns:c="http://schemas.openxmlformats.org/drawingml/2006/chart" xmlns:cx="http://schemas.microsoft.com/office/drawing/2014/chartex" xmlns:m="http://schemas.openxmlformats.org/officeDocument/2006/math" xmlns:mc="http://schemas.openxmlformats.org/markup-compatibility/2006" xmlns:pptd="https://kimi-design.msh.team/pptd/2026" encoding="base64url">eyJ2aWV3Qm94IjpbODU2LDFdLCJwb2ludHMiOiIwLDAgODU2LDAifQ</pptd:line>
+                  <pptd:line xmlns:pptd="https://kimi-design.msh.team/pptd/2026" xmlns:mc="http://schemas.openxmlformats.org/markup-compatibility/2006" xmlns:m="http://schemas.openxmlformats.org/officeDocument/2006/math" xmlns:cx="http://schemas.microsoft.com/office/drawing/2014/chartex" xmlns:c="http://schemas.openxmlformats.org/drawingml/2006/chart" xmlns:a14="http://schemas.microsoft.com/office/drawing/2010/main" xmlns="" encoding="base64url">eyJ2aWV3Qm94IjpbODU2LDFdLCJwb2ludHMiOiIwLDAgODU2LDAifQ</pptd:line>
                 </p:ext>
               </p:extLst>
             </p:nvPr>
@@ -6412,7 +6412,7 @@
         </p:nvSpPr>
         <p:spPr>
           <a:xfrm>
-            <a:off x="512064" y="1216152"/>
+            <a:off x="619506" y="1122401"/>
             <a:ext cx="5943600" cy="228600"/>
           </a:xfrm>
           <a:prstGeom prst="rect">
@@ -6512,7 +6512,7 @@
         </p:nvSpPr>
         <p:spPr>
           <a:xfrm>
-            <a:off x="539495" y="3154578"/>
+            <a:off x="620963" y="2843682"/>
             <a:ext cx="5943600" cy="228600"/>
           </a:xfrm>
           <a:prstGeom prst="rect">
@@ -6613,14 +6613,14 @@
           <p:nvPr>
             <p:extLst>
               <p:ext uri="{D42A27DB-BD31-4B8C-83A1-F6EECF244321}">
-                <p14:modId xmlns:p14="http://schemas.microsoft.com/office/powerpoint/2010/main" val="654561995"/>
+                <p14:modId xmlns:p14="http://schemas.microsoft.com/office/powerpoint/2010/main" val="636743732"/>
               </p:ext>
             </p:extLst>
           </p:nvPr>
         </p:nvGraphicFramePr>
         <p:xfrm>
-          <a:off x="512064" y="1690949"/>
-          <a:ext cx="10901631" cy="1205748"/>
+          <a:off x="617523" y="1533881"/>
+          <a:ext cx="10901631" cy="1113993"/>
         </p:xfrm>
         <a:graphic>
           <a:graphicData uri="http://schemas.openxmlformats.org/drawingml/2006/table">
@@ -6634,35 +6634,35 @@
                     </a:ext>
                   </a:extLst>
                 </a:gridCol>
-                <a:gridCol w="3359677">
+                <a:gridCol w="3003061">
                   <a:extLst>
                     <a:ext uri="{9D8B030D-6E8A-4147-A177-3AD203B41FA5}">
                       <a16:colId xmlns:a16="http://schemas.microsoft.com/office/drawing/2014/main" val="20001"/>
                     </a:ext>
                   </a:extLst>
                 </a:gridCol>
-                <a:gridCol w="1048131">
+                <a:gridCol w="1047750">
                   <a:extLst>
                     <a:ext uri="{9D8B030D-6E8A-4147-A177-3AD203B41FA5}">
                       <a16:colId xmlns:a16="http://schemas.microsoft.com/office/drawing/2014/main" val="3194826296"/>
                     </a:ext>
                   </a:extLst>
                 </a:gridCol>
-                <a:gridCol w="1048131">
+                <a:gridCol w="869950">
                   <a:extLst>
                     <a:ext uri="{9D8B030D-6E8A-4147-A177-3AD203B41FA5}">
                       <a16:colId xmlns:a16="http://schemas.microsoft.com/office/drawing/2014/main" val="2631831465"/>
                     </a:ext>
                   </a:extLst>
                 </a:gridCol>
-                <a:gridCol w="1154425">
+                <a:gridCol w="1397000">
                   <a:extLst>
                     <a:ext uri="{9D8B030D-6E8A-4147-A177-3AD203B41FA5}">
                       <a16:colId xmlns:a16="http://schemas.microsoft.com/office/drawing/2014/main" val="20002"/>
                     </a:ext>
                   </a:extLst>
                 </a:gridCol>
-                <a:gridCol w="834813">
+                <a:gridCol w="1127416">
                   <a:extLst>
                     <a:ext uri="{9D8B030D-6E8A-4147-A177-3AD203B41FA5}">
                       <a16:colId xmlns:a16="http://schemas.microsoft.com/office/drawing/2014/main" val="4140160165"/>
@@ -6690,9 +6690,9 @@
                     <a:bodyPr/>
                     <a:lstStyle/>
                     <a:p>
-                      <a:pPr algn="l"/>
+                      <a:pPr algn="ctr"/>
                       <a:r>
-                        <a:rPr sz="800" b="1">
+                        <a:rPr sz="800" b="1" dirty="0" err="1">
                           <a:solidFill>
                             <a:srgbClr val="0A0A0A"/>
                           </a:solidFill>
@@ -6701,6 +6701,13 @@
                         </a:rPr>
                         <a:t>日期</a:t>
                       </a:r>
+                      <a:endParaRPr sz="800" b="1" dirty="0">
+                        <a:solidFill>
+                          <a:srgbClr val="0A0A0A"/>
+                        </a:solidFill>
+                        <a:latin typeface="微软雅黑"/>
+                        <a:ea typeface="微软雅黑"/>
+                      </a:endParaRPr>
                     </a:p>
                   </a:txBody>
                   <a:tcPr marL="27432" marR="27432" marT="9144" marB="9144">
@@ -6726,7 +6733,7 @@
                     <a:bodyPr/>
                     <a:lstStyle/>
                     <a:p>
-                      <a:pPr algn="l"/>
+                      <a:pPr algn="ctr"/>
                       <a:r>
                         <a:rPr sz="800" b="1" dirty="0" err="1">
                           <a:solidFill>
@@ -6818,7 +6825,7 @@
                     <a:bodyPr/>
                     <a:lstStyle/>
                     <a:p>
-                      <a:pPr algn="l"/>
+                      <a:pPr algn="ctr"/>
                       <a:r>
                         <a:rPr sz="800" b="1" dirty="0" err="1">
                           <a:solidFill>
@@ -6842,8 +6849,14 @@
                     <a:lnL>
                       <a:noFill/>
                     </a:lnL>
-                    <a:lnR>
-                      <a:noFill/>
+                    <a:lnR w="12700" cap="flat" cmpd="sng" algn="ctr">
+                      <a:solidFill>
+                        <a:schemeClr val="tx1"/>
+                      </a:solidFill>
+                      <a:prstDash val="solid"/>
+                      <a:round/>
+                      <a:headEnd type="none" w="med" len="med"/>
+                      <a:tailEnd type="none" w="med" len="med"/>
                     </a:lnR>
                     <a:lnT>
                       <a:noFill/>
@@ -6865,7 +6878,7 @@
                     <a:bodyPr/>
                     <a:lstStyle/>
                     <a:p>
-                      <a:pPr algn="l"/>
+                      <a:pPr algn="ctr"/>
                       <a:r>
                         <a:rPr sz="800" b="1" dirty="0" err="1">
                           <a:solidFill>
@@ -6886,14 +6899,26 @@
                     </a:p>
                   </a:txBody>
                   <a:tcPr marL="27432" marR="27432" marT="9144" marB="9144">
-                    <a:lnL>
-                      <a:noFill/>
+                    <a:lnL w="12700" cap="flat" cmpd="sng" algn="ctr">
+                      <a:solidFill>
+                        <a:schemeClr val="tx1"/>
+                      </a:solidFill>
+                      <a:prstDash val="solid"/>
+                      <a:round/>
+                      <a:headEnd type="none" w="med" len="med"/>
+                      <a:tailEnd type="none" w="med" len="med"/>
                     </a:lnL>
                     <a:lnR>
                       <a:noFill/>
                     </a:lnR>
-                    <a:lnT>
-                      <a:noFill/>
+                    <a:lnT w="12700" cap="flat" cmpd="sng" algn="ctr">
+                      <a:solidFill>
+                        <a:schemeClr val="tx1"/>
+                      </a:solidFill>
+                      <a:prstDash val="solid"/>
+                      <a:round/>
+                      <a:headEnd type="none" w="med" len="med"/>
+                      <a:tailEnd type="none" w="med" len="med"/>
                     </a:lnT>
                     <a:lnB w="19050">
                       <a:solidFill>
@@ -6908,7 +6933,7 @@
                     <a:bodyPr/>
                     <a:lstStyle/>
                     <a:p>
-                      <a:pPr algn="l"/>
+                      <a:pPr algn="ctr"/>
                       <a:r>
                         <a:rPr sz="800" b="1" dirty="0" err="1">
                           <a:solidFill>
@@ -6935,8 +6960,14 @@
                     <a:lnR>
                       <a:noFill/>
                     </a:lnR>
-                    <a:lnT>
-                      <a:noFill/>
+                    <a:lnT w="12700" cap="flat" cmpd="sng" algn="ctr">
+                      <a:solidFill>
+                        <a:schemeClr val="tx1"/>
+                      </a:solidFill>
+                      <a:prstDash val="solid"/>
+                      <a:round/>
+                      <a:headEnd type="none" w="med" len="med"/>
+                      <a:tailEnd type="none" w="med" len="med"/>
                     </a:lnT>
                     <a:lnB w="19050" cap="flat" cmpd="sng" algn="ctr">
                       <a:solidFill>
@@ -6955,7 +6986,7 @@
                     <a:bodyPr/>
                     <a:lstStyle/>
                     <a:p>
-                      <a:pPr algn="l"/>
+                      <a:pPr algn="ctr"/>
                       <a:r>
                         <a:rPr sz="800" b="1">
                           <a:solidFill>
@@ -6975,8 +7006,14 @@
                     <a:lnR>
                       <a:noFill/>
                     </a:lnR>
-                    <a:lnT>
-                      <a:noFill/>
+                    <a:lnT w="12700" cap="flat" cmpd="sng" algn="ctr">
+                      <a:solidFill>
+                        <a:schemeClr val="tx1"/>
+                      </a:solidFill>
+                      <a:prstDash val="solid"/>
+                      <a:round/>
+                      <a:headEnd type="none" w="med" len="med"/>
+                      <a:tailEnd type="none" w="med" len="med"/>
                     </a:lnT>
                     <a:lnB w="19050" cap="flat" cmpd="sng" algn="ctr">
                       <a:solidFill>
@@ -6995,9 +7032,9 @@
                     <a:bodyPr/>
                     <a:lstStyle/>
                     <a:p>
-                      <a:pPr algn="l"/>
+                      <a:pPr algn="ctr"/>
                       <a:r>
-                        <a:rPr sz="800" b="1">
+                        <a:rPr sz="800" b="1" dirty="0" err="1">
                           <a:solidFill>
                             <a:srgbClr val="D6A000"/>
                           </a:solidFill>
@@ -7006,17 +7043,36 @@
                         </a:rPr>
                         <a:t>分类依据</a:t>
                       </a:r>
+                      <a:endParaRPr sz="800" b="1" dirty="0">
+                        <a:solidFill>
+                          <a:srgbClr val="D6A000"/>
+                        </a:solidFill>
+                        <a:latin typeface="微软雅黑"/>
+                        <a:ea typeface="微软雅黑"/>
+                      </a:endParaRPr>
                     </a:p>
                   </a:txBody>
                   <a:tcPr marL="27432" marR="27432" marT="9144" marB="9144">
                     <a:lnL>
                       <a:noFill/>
                     </a:lnL>
-                    <a:lnR>
-                      <a:noFill/>
+                    <a:lnR w="12700" cap="flat" cmpd="sng" algn="ctr">
+                      <a:solidFill>
+                        <a:schemeClr val="tx1"/>
+                      </a:solidFill>
+                      <a:prstDash val="solid"/>
+                      <a:round/>
+                      <a:headEnd type="none" w="med" len="med"/>
+                      <a:tailEnd type="none" w="med" len="med"/>
                     </a:lnR>
-                    <a:lnT>
-                      <a:noFill/>
+                    <a:lnT w="12700" cap="flat" cmpd="sng" algn="ctr">
+                      <a:solidFill>
+                        <a:schemeClr val="tx1"/>
+                      </a:solidFill>
+                      <a:prstDash val="solid"/>
+                      <a:round/>
+                      <a:headEnd type="none" w="med" len="med"/>
+                      <a:tailEnd type="none" w="med" len="med"/>
                     </a:lnT>
                     <a:lnB w="19050" cap="flat" cmpd="sng" algn="ctr">
                       <a:solidFill>
@@ -7042,7 +7098,7 @@
                     <a:bodyPr/>
                     <a:lstStyle/>
                     <a:p>
-                      <a:pPr marL="0" algn="l" defTabSz="914400" rtl="0" eaLnBrk="1" latinLnBrk="0" hangingPunct="1"/>
+                      <a:pPr marL="0" algn="ctr" defTabSz="914400" rtl="0" eaLnBrk="1" latinLnBrk="0" hangingPunct="1"/>
                       <a:r>
                         <a:rPr sz="800" b="0" kern="1200" dirty="0">
                           <a:solidFill>
@@ -7085,7 +7141,7 @@
                     <a:bodyPr/>
                     <a:lstStyle/>
                     <a:p>
-                      <a:pPr marL="0" algn="l" defTabSz="914400" rtl="0" eaLnBrk="1" latinLnBrk="0" hangingPunct="1"/>
+                      <a:pPr marL="0" algn="ctr" defTabSz="914400" rtl="0" eaLnBrk="1" latinLnBrk="0" hangingPunct="1"/>
                       <a:r>
                         <a:rPr sz="800" b="0" kern="1200" dirty="0">
                           <a:solidFill>
@@ -7175,7 +7231,7 @@
                     <a:bodyPr/>
                     <a:lstStyle/>
                     <a:p>
-                      <a:pPr marL="0" algn="l" defTabSz="914400" rtl="0" eaLnBrk="1" latinLnBrk="0" hangingPunct="1"/>
+                      <a:pPr marL="0" algn="ctr" defTabSz="914400" rtl="0" eaLnBrk="1" latinLnBrk="0" hangingPunct="1"/>
                       <a:r>
                         <a:rPr sz="800" b="0" kern="1200" dirty="0">
                           <a:solidFill>
@@ -7193,8 +7249,14 @@
                     <a:lnL>
                       <a:noFill/>
                     </a:lnL>
-                    <a:lnR>
-                      <a:noFill/>
+                    <a:lnR w="12700" cap="flat" cmpd="sng" algn="ctr">
+                      <a:solidFill>
+                        <a:schemeClr val="tx1"/>
+                      </a:solidFill>
+                      <a:prstDash val="solid"/>
+                      <a:round/>
+                      <a:headEnd type="none" w="med" len="med"/>
+                      <a:tailEnd type="none" w="med" len="med"/>
                     </a:lnR>
                     <a:lnT w="19050" cap="flat" cmpd="sng" algn="ctr">
                       <a:solidFill>
@@ -7222,9 +7284,9 @@
                     <a:bodyPr/>
                     <a:lstStyle/>
                     <a:p>
-                      <a:pPr marL="0" algn="l" defTabSz="914400" rtl="0" eaLnBrk="1" latinLnBrk="0" hangingPunct="1"/>
+                      <a:pPr marL="0" algn="ctr" defTabSz="914400" rtl="0" eaLnBrk="1" latinLnBrk="0" hangingPunct="1"/>
                       <a:r>
-                        <a:rPr sz="800" b="0" kern="1200">
+                        <a:rPr sz="800" b="0" kern="1200" dirty="0">
                           <a:solidFill>
                             <a:srgbClr val="0A0A0A"/>
                           </a:solidFill>
@@ -7237,8 +7299,14 @@
                     </a:p>
                   </a:txBody>
                   <a:tcPr marL="27432" marR="27432" marT="9144" marB="9144">
-                    <a:lnL>
-                      <a:noFill/>
+                    <a:lnL w="12700" cap="flat" cmpd="sng" algn="ctr">
+                      <a:solidFill>
+                        <a:schemeClr val="tx1"/>
+                      </a:solidFill>
+                      <a:prstDash val="solid"/>
+                      <a:round/>
+                      <a:headEnd type="none" w="med" len="med"/>
+                      <a:tailEnd type="none" w="med" len="med"/>
                     </a:lnL>
                     <a:lnR>
                       <a:noFill/>
@@ -7265,7 +7333,7 @@
                     <a:bodyPr/>
                     <a:lstStyle/>
                     <a:p>
-                      <a:pPr marL="0" algn="l" defTabSz="914400" rtl="0" eaLnBrk="1" latinLnBrk="0" hangingPunct="1"/>
+                      <a:pPr marL="0" algn="ctr" defTabSz="914400" rtl="0" eaLnBrk="1" latinLnBrk="0" hangingPunct="1"/>
                       <a:r>
                         <a:rPr sz="800" b="0" kern="1200" dirty="0" err="1">
                           <a:solidFill>
@@ -7320,9 +7388,9 @@
                     <a:bodyPr/>
                     <a:lstStyle/>
                     <a:p>
-                      <a:pPr marL="0" algn="l" defTabSz="914400" rtl="0" eaLnBrk="1" latinLnBrk="0" hangingPunct="1"/>
+                      <a:pPr marL="0" algn="ctr" defTabSz="914400" rtl="0" eaLnBrk="1" latinLnBrk="0" hangingPunct="1"/>
                       <a:r>
-                        <a:rPr sz="800" b="0" kern="1200">
+                        <a:rPr sz="800" b="0" kern="1200" dirty="0" err="1">
                           <a:solidFill>
                             <a:srgbClr val="0A0A0A"/>
                           </a:solidFill>
@@ -7332,6 +7400,14 @@
                         </a:rPr>
                         <a:t>贷款及还款</a:t>
                       </a:r>
+                      <a:endParaRPr sz="800" b="0" kern="1200" dirty="0">
+                        <a:solidFill>
+                          <a:srgbClr val="0A0A0A"/>
+                        </a:solidFill>
+                        <a:latin typeface="微软雅黑" panose="020B0503020204020204" pitchFamily="34" charset="-122"/>
+                        <a:ea typeface="微软雅黑" panose="020B0503020204020204" pitchFamily="34" charset="-122"/>
+                        <a:cs typeface="+mn-cs"/>
+                      </a:endParaRPr>
                     </a:p>
                   </a:txBody>
                   <a:tcPr marL="27432" marR="27432" marT="9144" marB="9144">
@@ -7367,9 +7443,9 @@
                     <a:bodyPr/>
                     <a:lstStyle/>
                     <a:p>
-                      <a:pPr marL="0" algn="l" defTabSz="914400" rtl="0" eaLnBrk="1" latinLnBrk="0" hangingPunct="1"/>
+                      <a:pPr marL="0" algn="ctr" defTabSz="914400" rtl="0" eaLnBrk="1" latinLnBrk="0" hangingPunct="1"/>
                       <a:r>
-                        <a:rPr sz="800" b="0" kern="1200">
+                        <a:rPr sz="800" b="0" kern="1200" dirty="0" err="1">
                           <a:solidFill>
                             <a:srgbClr val="0A0A0A"/>
                           </a:solidFill>
@@ -7379,14 +7455,28 @@
                         </a:rPr>
                         <a:t>交易方向、机构名称、产品关键词及历史交易模式</a:t>
                       </a:r>
+                      <a:endParaRPr sz="800" b="0" kern="1200" dirty="0">
+                        <a:solidFill>
+                          <a:srgbClr val="0A0A0A"/>
+                        </a:solidFill>
+                        <a:latin typeface="微软雅黑" panose="020B0503020204020204" pitchFamily="34" charset="-122"/>
+                        <a:ea typeface="微软雅黑" panose="020B0503020204020204" pitchFamily="34" charset="-122"/>
+                        <a:cs typeface="+mn-cs"/>
+                      </a:endParaRPr>
                     </a:p>
                   </a:txBody>
                   <a:tcPr marL="27432" marR="27432" marT="9144" marB="9144">
                     <a:lnL>
                       <a:noFill/>
                     </a:lnL>
-                    <a:lnR>
-                      <a:noFill/>
+                    <a:lnR w="12700" cap="flat" cmpd="sng" algn="ctr">
+                      <a:solidFill>
+                        <a:schemeClr val="tx1"/>
+                      </a:solidFill>
+                      <a:prstDash val="solid"/>
+                      <a:round/>
+                      <a:headEnd type="none" w="med" len="med"/>
+                      <a:tailEnd type="none" w="med" len="med"/>
                     </a:lnR>
                     <a:lnT w="19050" cap="flat" cmpd="sng" algn="ctr">
                       <a:solidFill>
@@ -7421,7 +7511,7 @@
                     <a:bodyPr/>
                     <a:lstStyle/>
                     <a:p>
-                      <a:pPr marL="0" algn="l" defTabSz="914400" rtl="0" eaLnBrk="1" latinLnBrk="0" hangingPunct="1"/>
+                      <a:pPr marL="0" algn="ctr" defTabSz="914400" rtl="0" eaLnBrk="1" latinLnBrk="0" hangingPunct="1"/>
                       <a:r>
                         <a:rPr sz="800" b="0" kern="1200">
                           <a:solidFill>
@@ -7464,7 +7554,7 @@
                     <a:bodyPr/>
                     <a:lstStyle/>
                     <a:p>
-                      <a:pPr marL="0" algn="l" defTabSz="914400" rtl="0" eaLnBrk="1" latinLnBrk="0" hangingPunct="1"/>
+                      <a:pPr marL="0" algn="ctr" defTabSz="914400" rtl="0" eaLnBrk="1" latinLnBrk="0" hangingPunct="1"/>
                       <a:r>
                         <a:rPr sz="800" b="0" kern="1200" dirty="0">
                           <a:solidFill>
@@ -7554,7 +7644,7 @@
                     <a:bodyPr/>
                     <a:lstStyle/>
                     <a:p>
-                      <a:pPr marL="0" algn="l" defTabSz="914400" rtl="0" eaLnBrk="1" latinLnBrk="0" hangingPunct="1"/>
+                      <a:pPr marL="0" algn="ctr" defTabSz="914400" rtl="0" eaLnBrk="1" latinLnBrk="0" hangingPunct="1"/>
                       <a:r>
                         <a:rPr sz="800" b="0" kern="1200" dirty="0">
                           <a:solidFill>
@@ -7572,8 +7662,14 @@
                     <a:lnL>
                       <a:noFill/>
                     </a:lnL>
-                    <a:lnR>
-                      <a:noFill/>
+                    <a:lnR w="12700" cap="flat" cmpd="sng" algn="ctr">
+                      <a:solidFill>
+                        <a:schemeClr val="tx1"/>
+                      </a:solidFill>
+                      <a:prstDash val="solid"/>
+                      <a:round/>
+                      <a:headEnd type="none" w="med" len="med"/>
+                      <a:tailEnd type="none" w="med" len="med"/>
                     </a:lnR>
                     <a:lnT w="9525" cap="flat" cmpd="sng" algn="ctr">
                       <a:solidFill>
@@ -7601,7 +7697,7 @@
                     <a:bodyPr/>
                     <a:lstStyle/>
                     <a:p>
-                      <a:pPr marL="0" algn="l" defTabSz="914400" rtl="0" eaLnBrk="1" latinLnBrk="0" hangingPunct="1"/>
+                      <a:pPr marL="0" algn="ctr" defTabSz="914400" rtl="0" eaLnBrk="1" latinLnBrk="0" hangingPunct="1"/>
                       <a:r>
                         <a:rPr sz="800" b="0" kern="1200" dirty="0">
                           <a:solidFill>
@@ -7616,8 +7712,14 @@
                     </a:p>
                   </a:txBody>
                   <a:tcPr marL="27432" marR="27432" marT="9144" marB="9144">
-                    <a:lnL>
-                      <a:noFill/>
+                    <a:lnL w="12700" cap="flat" cmpd="sng" algn="ctr">
+                      <a:solidFill>
+                        <a:schemeClr val="tx1"/>
+                      </a:solidFill>
+                      <a:prstDash val="solid"/>
+                      <a:round/>
+                      <a:headEnd type="none" w="med" len="med"/>
+                      <a:tailEnd type="none" w="med" len="med"/>
                     </a:lnL>
                     <a:lnR>
                       <a:noFill/>
@@ -7644,7 +7746,7 @@
                     <a:bodyPr/>
                     <a:lstStyle/>
                     <a:p>
-                      <a:pPr marL="0" algn="l" defTabSz="914400" rtl="0" eaLnBrk="1" latinLnBrk="0" hangingPunct="1"/>
+                      <a:pPr marL="0" algn="ctr" defTabSz="914400" rtl="0" eaLnBrk="1" latinLnBrk="0" hangingPunct="1"/>
                       <a:r>
                         <a:rPr sz="800" b="0" kern="1200" dirty="0" err="1">
                           <a:solidFill>
@@ -7699,9 +7801,9 @@
                     <a:bodyPr/>
                     <a:lstStyle/>
                     <a:p>
-                      <a:pPr marL="0" algn="l" defTabSz="914400" rtl="0" eaLnBrk="1" latinLnBrk="0" hangingPunct="1"/>
+                      <a:pPr marL="0" algn="ctr" defTabSz="914400" rtl="0" eaLnBrk="1" latinLnBrk="0" hangingPunct="1"/>
                       <a:r>
-                        <a:rPr sz="800" b="0" kern="1200">
+                        <a:rPr sz="800" b="0" kern="1200" dirty="0" err="1">
                           <a:solidFill>
                             <a:srgbClr val="0A0A0A"/>
                           </a:solidFill>
@@ -7711,6 +7813,14 @@
                         </a:rPr>
                         <a:t>消费</a:t>
                       </a:r>
+                      <a:endParaRPr sz="800" b="0" kern="1200" dirty="0">
+                        <a:solidFill>
+                          <a:srgbClr val="0A0A0A"/>
+                        </a:solidFill>
+                        <a:latin typeface="微软雅黑" panose="020B0503020204020204" pitchFamily="34" charset="-122"/>
+                        <a:ea typeface="微软雅黑" panose="020B0503020204020204" pitchFamily="34" charset="-122"/>
+                        <a:cs typeface="+mn-cs"/>
+                      </a:endParaRPr>
                     </a:p>
                   </a:txBody>
                   <a:tcPr marL="27432" marR="27432" marT="9144" marB="9144">
@@ -7746,7 +7856,7 @@
                     <a:bodyPr/>
                     <a:lstStyle/>
                     <a:p>
-                      <a:pPr marL="0" algn="l" defTabSz="914400" rtl="0" eaLnBrk="1" latinLnBrk="0" hangingPunct="1"/>
+                      <a:pPr marL="0" algn="ctr" defTabSz="914400" rtl="0" eaLnBrk="1" latinLnBrk="0" hangingPunct="1"/>
                       <a:r>
                         <a:rPr sz="800" b="0" kern="1200">
                           <a:solidFill>
@@ -7764,8 +7874,14 @@
                     <a:lnL>
                       <a:noFill/>
                     </a:lnL>
-                    <a:lnR>
-                      <a:noFill/>
+                    <a:lnR w="12700" cap="flat" cmpd="sng" algn="ctr">
+                      <a:solidFill>
+                        <a:schemeClr val="tx1"/>
+                      </a:solidFill>
+                      <a:prstDash val="solid"/>
+                      <a:round/>
+                      <a:headEnd type="none" w="med" len="med"/>
+                      <a:tailEnd type="none" w="med" len="med"/>
                     </a:lnR>
                     <a:lnT w="9525" cap="flat" cmpd="sng" algn="ctr">
                       <a:solidFill>
@@ -7800,7 +7916,7 @@
                     <a:bodyPr/>
                     <a:lstStyle/>
                     <a:p>
-                      <a:pPr marL="0" algn="l" defTabSz="914400" rtl="0" eaLnBrk="1" latinLnBrk="0" hangingPunct="1"/>
+                      <a:pPr marL="0" algn="ctr" defTabSz="914400" rtl="0" eaLnBrk="1" latinLnBrk="0" hangingPunct="1"/>
                       <a:r>
                         <a:rPr sz="800" b="0" kern="1200">
                           <a:solidFill>
@@ -7843,7 +7959,7 @@
                     <a:bodyPr/>
                     <a:lstStyle/>
                     <a:p>
-                      <a:pPr marL="0" algn="l" defTabSz="914400" rtl="0" eaLnBrk="1" latinLnBrk="0" hangingPunct="1"/>
+                      <a:pPr marL="0" algn="ctr" defTabSz="914400" rtl="0" eaLnBrk="1" latinLnBrk="0" hangingPunct="1"/>
                       <a:r>
                         <a:rPr sz="800" b="0" kern="1200" dirty="0">
                           <a:solidFill>
@@ -7933,7 +8049,7 @@
                     <a:bodyPr/>
                     <a:lstStyle/>
                     <a:p>
-                      <a:pPr marL="0" algn="l" defTabSz="914400" rtl="0" eaLnBrk="1" latinLnBrk="0" hangingPunct="1"/>
+                      <a:pPr marL="0" algn="ctr" defTabSz="914400" rtl="0" eaLnBrk="1" latinLnBrk="0" hangingPunct="1"/>
                       <a:r>
                         <a:rPr sz="800" b="0" kern="1200" dirty="0">
                           <a:solidFill>
@@ -7951,8 +8067,14 @@
                     <a:lnL>
                       <a:noFill/>
                     </a:lnL>
-                    <a:lnR>
-                      <a:noFill/>
+                    <a:lnR w="12700" cap="flat" cmpd="sng" algn="ctr">
+                      <a:solidFill>
+                        <a:schemeClr val="tx1"/>
+                      </a:solidFill>
+                      <a:prstDash val="solid"/>
+                      <a:round/>
+                      <a:headEnd type="none" w="med" len="med"/>
+                      <a:tailEnd type="none" w="med" len="med"/>
                     </a:lnR>
                     <a:lnT w="9525" cap="flat" cmpd="sng" algn="ctr">
                       <a:solidFill>
@@ -7980,7 +8102,7 @@
                     <a:bodyPr/>
                     <a:lstStyle/>
                     <a:p>
-                      <a:pPr marL="0" algn="l" defTabSz="914400" rtl="0" eaLnBrk="1" latinLnBrk="0" hangingPunct="1"/>
+                      <a:pPr marL="0" algn="ctr" defTabSz="914400" rtl="0" eaLnBrk="1" latinLnBrk="0" hangingPunct="1"/>
                       <a:r>
                         <a:rPr sz="800" b="0" kern="1200">
                           <a:solidFill>
@@ -7995,8 +8117,14 @@
                     </a:p>
                   </a:txBody>
                   <a:tcPr marL="27432" marR="27432" marT="9144" marB="9144">
-                    <a:lnL>
-                      <a:noFill/>
+                    <a:lnL w="12700" cap="flat" cmpd="sng" algn="ctr">
+                      <a:solidFill>
+                        <a:schemeClr val="tx1"/>
+                      </a:solidFill>
+                      <a:prstDash val="solid"/>
+                      <a:round/>
+                      <a:headEnd type="none" w="med" len="med"/>
+                      <a:tailEnd type="none" w="med" len="med"/>
                     </a:lnL>
                     <a:lnR>
                       <a:noFill/>
@@ -8023,7 +8151,7 @@
                     <a:bodyPr/>
                     <a:lstStyle/>
                     <a:p>
-                      <a:pPr marL="0" algn="l" defTabSz="914400" rtl="0" eaLnBrk="1" latinLnBrk="0" hangingPunct="1"/>
+                      <a:pPr marL="0" algn="ctr" defTabSz="914400" rtl="0" eaLnBrk="1" latinLnBrk="0" hangingPunct="1"/>
                       <a:r>
                         <a:rPr sz="800" b="0" kern="1200" dirty="0" err="1">
                           <a:solidFill>
@@ -8078,9 +8206,9 @@
                     <a:bodyPr/>
                     <a:lstStyle/>
                     <a:p>
-                      <a:pPr marL="0" algn="l" defTabSz="914400" rtl="0" eaLnBrk="1" latinLnBrk="0" hangingPunct="1"/>
+                      <a:pPr marL="0" algn="ctr" defTabSz="914400" rtl="0" eaLnBrk="1" latinLnBrk="0" hangingPunct="1"/>
                       <a:r>
-                        <a:rPr sz="800" b="0" kern="1200">
+                        <a:rPr sz="800" b="0" kern="1200" dirty="0" err="1">
                           <a:solidFill>
                             <a:srgbClr val="0A0A0A"/>
                           </a:solidFill>
@@ -8090,6 +8218,14 @@
                         </a:rPr>
                         <a:t>消费</a:t>
                       </a:r>
+                      <a:endParaRPr sz="800" b="0" kern="1200" dirty="0">
+                        <a:solidFill>
+                          <a:srgbClr val="0A0A0A"/>
+                        </a:solidFill>
+                        <a:latin typeface="微软雅黑" panose="020B0503020204020204" pitchFamily="34" charset="-122"/>
+                        <a:ea typeface="微软雅黑" panose="020B0503020204020204" pitchFamily="34" charset="-122"/>
+                        <a:cs typeface="+mn-cs"/>
+                      </a:endParaRPr>
                     </a:p>
                   </a:txBody>
                   <a:tcPr marL="27432" marR="27432" marT="9144" marB="9144">
@@ -8125,9 +8261,9 @@
                     <a:bodyPr/>
                     <a:lstStyle/>
                     <a:p>
-                      <a:pPr marL="0" algn="l" defTabSz="914400" rtl="0" eaLnBrk="1" latinLnBrk="0" hangingPunct="1"/>
+                      <a:pPr marL="0" algn="ctr" defTabSz="914400" rtl="0" eaLnBrk="1" latinLnBrk="0" hangingPunct="1"/>
                       <a:r>
-                        <a:rPr sz="800" b="0" kern="1200">
+                        <a:rPr sz="800" b="0" kern="1200" dirty="0" err="1">
                           <a:solidFill>
                             <a:srgbClr val="0A0A0A"/>
                           </a:solidFill>
@@ -8137,14 +8273,28 @@
                         </a:rPr>
                         <a:t>商户知识库标准名匹配</a:t>
                       </a:r>
+                      <a:endParaRPr sz="800" b="0" kern="1200" dirty="0">
+                        <a:solidFill>
+                          <a:srgbClr val="0A0A0A"/>
+                        </a:solidFill>
+                        <a:latin typeface="微软雅黑" panose="020B0503020204020204" pitchFamily="34" charset="-122"/>
+                        <a:ea typeface="微软雅黑" panose="020B0503020204020204" pitchFamily="34" charset="-122"/>
+                        <a:cs typeface="+mn-cs"/>
+                      </a:endParaRPr>
                     </a:p>
                   </a:txBody>
                   <a:tcPr marL="27432" marR="27432" marT="9144" marB="9144">
                     <a:lnL>
                       <a:noFill/>
                     </a:lnL>
-                    <a:lnR>
-                      <a:noFill/>
+                    <a:lnR w="12700" cap="flat" cmpd="sng" algn="ctr">
+                      <a:solidFill>
+                        <a:schemeClr val="tx1"/>
+                      </a:solidFill>
+                      <a:prstDash val="solid"/>
+                      <a:round/>
+                      <a:headEnd type="none" w="med" len="med"/>
+                      <a:tailEnd type="none" w="med" len="med"/>
                     </a:lnR>
                     <a:lnT w="9525" cap="flat" cmpd="sng" algn="ctr">
                       <a:solidFill>
@@ -8179,7 +8329,7 @@
                     <a:bodyPr/>
                     <a:lstStyle/>
                     <a:p>
-                      <a:pPr marL="0" algn="l" defTabSz="914400" rtl="0" eaLnBrk="1" latinLnBrk="0" hangingPunct="1"/>
+                      <a:pPr marL="0" algn="ctr" defTabSz="914400" rtl="0" eaLnBrk="1" latinLnBrk="0" hangingPunct="1"/>
                       <a:r>
                         <a:rPr sz="800" b="0" kern="1200">
                           <a:solidFill>
@@ -8222,7 +8372,7 @@
                     <a:bodyPr/>
                     <a:lstStyle/>
                     <a:p>
-                      <a:pPr marL="0" algn="l" defTabSz="914400" rtl="0" eaLnBrk="1" latinLnBrk="0" hangingPunct="1"/>
+                      <a:pPr marL="0" algn="ctr" defTabSz="914400" rtl="0" eaLnBrk="1" latinLnBrk="0" hangingPunct="1"/>
                       <a:r>
                         <a:rPr sz="800" b="0" kern="1200" dirty="0">
                           <a:solidFill>
@@ -8312,7 +8462,7 @@
                     <a:bodyPr/>
                     <a:lstStyle/>
                     <a:p>
-                      <a:pPr marL="0" algn="l" defTabSz="914400" rtl="0" eaLnBrk="1" latinLnBrk="0" hangingPunct="1"/>
+                      <a:pPr marL="0" algn="ctr" defTabSz="914400" rtl="0" eaLnBrk="1" latinLnBrk="0" hangingPunct="1"/>
                       <a:r>
                         <a:rPr sz="800" b="0" kern="1200" dirty="0">
                           <a:solidFill>
@@ -8330,8 +8480,14 @@
                     <a:lnL>
                       <a:noFill/>
                     </a:lnL>
-                    <a:lnR>
-                      <a:noFill/>
+                    <a:lnR w="12700" cap="flat" cmpd="sng" algn="ctr">
+                      <a:solidFill>
+                        <a:schemeClr val="tx1"/>
+                      </a:solidFill>
+                      <a:prstDash val="solid"/>
+                      <a:round/>
+                      <a:headEnd type="none" w="med" len="med"/>
+                      <a:tailEnd type="none" w="med" len="med"/>
                     </a:lnR>
                     <a:lnT w="9525" cap="flat" cmpd="sng" algn="ctr">
                       <a:solidFill>
@@ -8359,7 +8515,7 @@
                     <a:bodyPr/>
                     <a:lstStyle/>
                     <a:p>
-                      <a:pPr marL="0" algn="l" defTabSz="914400" rtl="0" eaLnBrk="1" latinLnBrk="0" hangingPunct="1"/>
+                      <a:pPr marL="0" algn="ctr" defTabSz="914400" rtl="0" eaLnBrk="1" latinLnBrk="0" hangingPunct="1"/>
                       <a:r>
                         <a:rPr sz="800" b="0" kern="1200">
                           <a:solidFill>
@@ -8374,8 +8530,14 @@
                     </a:p>
                   </a:txBody>
                   <a:tcPr marL="27432" marR="27432" marT="9144" marB="9144">
-                    <a:lnL>
-                      <a:noFill/>
+                    <a:lnL w="12700" cap="flat" cmpd="sng" algn="ctr">
+                      <a:solidFill>
+                        <a:schemeClr val="tx1"/>
+                      </a:solidFill>
+                      <a:prstDash val="solid"/>
+                      <a:round/>
+                      <a:headEnd type="none" w="med" len="med"/>
+                      <a:tailEnd type="none" w="med" len="med"/>
                     </a:lnL>
                     <a:lnR>
                       <a:noFill/>
@@ -8402,7 +8564,7 @@
                     <a:bodyPr/>
                     <a:lstStyle/>
                     <a:p>
-                      <a:pPr marL="0" algn="l" defTabSz="914400" rtl="0" eaLnBrk="1" latinLnBrk="0" hangingPunct="1"/>
+                      <a:pPr marL="0" algn="ctr" defTabSz="914400" rtl="0" eaLnBrk="1" latinLnBrk="0" hangingPunct="1"/>
                       <a:r>
                         <a:rPr sz="800" b="0" kern="1200" dirty="0" err="1">
                           <a:solidFill>
@@ -8457,7 +8619,7 @@
                     <a:bodyPr/>
                     <a:lstStyle/>
                     <a:p>
-                      <a:pPr marL="0" algn="l" defTabSz="914400" rtl="0" eaLnBrk="1" latinLnBrk="0" hangingPunct="1"/>
+                      <a:pPr marL="0" algn="ctr" defTabSz="914400" rtl="0" eaLnBrk="1" latinLnBrk="0" hangingPunct="1"/>
                       <a:r>
                         <a:rPr sz="800" b="0" kern="1200">
                           <a:solidFill>
@@ -8504,9 +8666,9 @@
                     <a:bodyPr/>
                     <a:lstStyle/>
                     <a:p>
-                      <a:pPr marL="0" algn="l" defTabSz="914400" rtl="0" eaLnBrk="1" latinLnBrk="0" hangingPunct="1"/>
+                      <a:pPr marL="0" algn="ctr" defTabSz="914400" rtl="0" eaLnBrk="1" latinLnBrk="0" hangingPunct="1"/>
                       <a:r>
-                        <a:rPr sz="800" b="0" kern="1200">
+                        <a:rPr sz="800" b="0" kern="1200" dirty="0" err="1">
                           <a:solidFill>
                             <a:srgbClr val="0A0A0A"/>
                           </a:solidFill>
@@ -8516,14 +8678,28 @@
                         </a:rPr>
                         <a:t>商户知识库标准名匹配</a:t>
                       </a:r>
+                      <a:endParaRPr sz="800" b="0" kern="1200" dirty="0">
+                        <a:solidFill>
+                          <a:srgbClr val="0A0A0A"/>
+                        </a:solidFill>
+                        <a:latin typeface="微软雅黑" panose="020B0503020204020204" pitchFamily="34" charset="-122"/>
+                        <a:ea typeface="微软雅黑" panose="020B0503020204020204" pitchFamily="34" charset="-122"/>
+                        <a:cs typeface="+mn-cs"/>
+                      </a:endParaRPr>
                     </a:p>
                   </a:txBody>
                   <a:tcPr marL="27432" marR="27432" marT="9144" marB="9144">
                     <a:lnL>
                       <a:noFill/>
                     </a:lnL>
-                    <a:lnR>
-                      <a:noFill/>
+                    <a:lnR w="12700" cap="flat" cmpd="sng" algn="ctr">
+                      <a:solidFill>
+                        <a:schemeClr val="tx1"/>
+                      </a:solidFill>
+                      <a:prstDash val="solid"/>
+                      <a:round/>
+                      <a:headEnd type="none" w="med" len="med"/>
+                      <a:tailEnd type="none" w="med" len="med"/>
                     </a:lnR>
                     <a:lnT w="9525" cap="flat" cmpd="sng" algn="ctr">
                       <a:solidFill>
@@ -8558,7 +8734,7 @@
                     <a:bodyPr/>
                     <a:lstStyle/>
                     <a:p>
-                      <a:pPr marL="0" algn="l" defTabSz="914400" rtl="0" eaLnBrk="1" latinLnBrk="0" hangingPunct="1"/>
+                      <a:pPr marL="0" algn="ctr" defTabSz="914400" rtl="0" eaLnBrk="1" latinLnBrk="0" hangingPunct="1"/>
                       <a:r>
                         <a:rPr sz="800" b="0" kern="1200">
                           <a:solidFill>
@@ -8601,7 +8777,7 @@
                     <a:bodyPr/>
                     <a:lstStyle/>
                     <a:p>
-                      <a:pPr marL="0" algn="l" defTabSz="914400" rtl="0" eaLnBrk="1" latinLnBrk="0" hangingPunct="1"/>
+                      <a:pPr marL="0" algn="ctr" defTabSz="914400" rtl="0" eaLnBrk="1" latinLnBrk="0" hangingPunct="1"/>
                       <a:r>
                         <a:rPr sz="800" b="0" kern="1200" dirty="0">
                           <a:solidFill>
@@ -8687,7 +8863,7 @@
                     <a:bodyPr/>
                     <a:lstStyle/>
                     <a:p>
-                      <a:pPr marL="0" algn="l" defTabSz="914400" rtl="0" eaLnBrk="1" latinLnBrk="0" hangingPunct="1"/>
+                      <a:pPr marL="0" algn="ctr" defTabSz="914400" rtl="0" eaLnBrk="1" latinLnBrk="0" hangingPunct="1"/>
                       <a:r>
                         <a:rPr sz="800" b="0" kern="1200" dirty="0">
                           <a:solidFill>
@@ -8705,8 +8881,14 @@
                     <a:lnL>
                       <a:noFill/>
                     </a:lnL>
-                    <a:lnR>
-                      <a:noFill/>
+                    <a:lnR w="12700" cap="flat" cmpd="sng" algn="ctr">
+                      <a:solidFill>
+                        <a:schemeClr val="tx1"/>
+                      </a:solidFill>
+                      <a:prstDash val="solid"/>
+                      <a:round/>
+                      <a:headEnd type="none" w="med" len="med"/>
+                      <a:tailEnd type="none" w="med" len="med"/>
                     </a:lnR>
                     <a:lnT w="9525" cap="flat" cmpd="sng" algn="ctr">
                       <a:solidFill>
@@ -8730,7 +8912,7 @@
                     <a:bodyPr/>
                     <a:lstStyle/>
                     <a:p>
-                      <a:pPr marL="0" algn="l" defTabSz="914400" rtl="0" eaLnBrk="1" latinLnBrk="0" hangingPunct="1"/>
+                      <a:pPr marL="0" algn="ctr" defTabSz="914400" rtl="0" eaLnBrk="1" latinLnBrk="0" hangingPunct="1"/>
                       <a:r>
                         <a:rPr sz="800" b="0" kern="1200">
                           <a:solidFill>
@@ -8745,8 +8927,14 @@
                     </a:p>
                   </a:txBody>
                   <a:tcPr marL="27432" marR="27432" marT="9144" marB="9144">
-                    <a:lnL>
-                      <a:noFill/>
+                    <a:lnL w="12700" cap="flat" cmpd="sng" algn="ctr">
+                      <a:solidFill>
+                        <a:schemeClr val="tx1"/>
+                      </a:solidFill>
+                      <a:prstDash val="solid"/>
+                      <a:round/>
+                      <a:headEnd type="none" w="med" len="med"/>
+                      <a:tailEnd type="none" w="med" len="med"/>
                     </a:lnL>
                     <a:lnR>
                       <a:noFill/>
@@ -8760,10 +8948,14 @@
                       <a:headEnd type="none" w="med" len="med"/>
                       <a:tailEnd type="none" w="med" len="med"/>
                     </a:lnT>
-                    <a:lnB w="9525">
-                      <a:solidFill>
-                        <a:srgbClr val="D6D6D6"/>
-                      </a:solidFill>
+                    <a:lnB w="12700" cap="flat" cmpd="sng" algn="ctr">
+                      <a:solidFill>
+                        <a:schemeClr val="tx1"/>
+                      </a:solidFill>
+                      <a:prstDash val="solid"/>
+                      <a:round/>
+                      <a:headEnd type="none" w="med" len="med"/>
+                      <a:tailEnd type="none" w="med" len="med"/>
                     </a:lnB>
                     <a:noFill/>
                   </a:tcPr>
@@ -8773,7 +8965,7 @@
                     <a:bodyPr/>
                     <a:lstStyle/>
                     <a:p>
-                      <a:pPr marL="0" algn="l" defTabSz="914400" rtl="0" eaLnBrk="1" latinLnBrk="0" hangingPunct="1"/>
+                      <a:pPr marL="0" algn="ctr" defTabSz="914400" rtl="0" eaLnBrk="1" latinLnBrk="0" hangingPunct="1"/>
                       <a:r>
                         <a:rPr sz="800" b="0" kern="1200" dirty="0" err="1">
                           <a:solidFill>
@@ -8833,10 +9025,14 @@
                       <a:headEnd type="none" w="med" len="med"/>
                       <a:tailEnd type="none" w="med" len="med"/>
                     </a:lnT>
-                    <a:lnB w="9525">
-                      <a:solidFill>
-                        <a:srgbClr val="D6D6D6"/>
-                      </a:solidFill>
+                    <a:lnB w="12700" cap="flat" cmpd="sng" algn="ctr">
+                      <a:solidFill>
+                        <a:schemeClr val="tx1"/>
+                      </a:solidFill>
+                      <a:prstDash val="solid"/>
+                      <a:round/>
+                      <a:headEnd type="none" w="med" len="med"/>
+                      <a:tailEnd type="none" w="med" len="med"/>
                     </a:lnB>
                     <a:noFill/>
                   </a:tcPr>
@@ -8846,7 +9042,7 @@
                     <a:bodyPr/>
                     <a:lstStyle/>
                     <a:p>
-                      <a:pPr marL="0" algn="l" defTabSz="914400" rtl="0" eaLnBrk="1" latinLnBrk="0" hangingPunct="1"/>
+                      <a:pPr marL="0" algn="ctr" defTabSz="914400" rtl="0" eaLnBrk="1" latinLnBrk="0" hangingPunct="1"/>
                       <a:r>
                         <a:rPr sz="800" b="0" kern="1200">
                           <a:solidFill>
@@ -8876,10 +9072,14 @@
                       <a:headEnd type="none" w="med" len="med"/>
                       <a:tailEnd type="none" w="med" len="med"/>
                     </a:lnT>
-                    <a:lnB w="9525">
-                      <a:solidFill>
-                        <a:srgbClr val="D6D6D6"/>
-                      </a:solidFill>
+                    <a:lnB w="12700" cap="flat" cmpd="sng" algn="ctr">
+                      <a:solidFill>
+                        <a:schemeClr val="tx1"/>
+                      </a:solidFill>
+                      <a:prstDash val="solid"/>
+                      <a:round/>
+                      <a:headEnd type="none" w="med" len="med"/>
+                      <a:tailEnd type="none" w="med" len="med"/>
                     </a:lnB>
                     <a:noFill/>
                   </a:tcPr>
@@ -8889,7 +9089,7 @@
                     <a:bodyPr/>
                     <a:lstStyle/>
                     <a:p>
-                      <a:pPr marL="0" algn="l" defTabSz="914400" rtl="0" eaLnBrk="1" latinLnBrk="0" hangingPunct="1"/>
+                      <a:pPr marL="0" algn="ctr" defTabSz="914400" rtl="0" eaLnBrk="1" latinLnBrk="0" hangingPunct="1"/>
                       <a:r>
                         <a:rPr sz="800" b="0" kern="1200" dirty="0" err="1">
                           <a:solidFill>
@@ -8959,8 +9159,14 @@
                     <a:lnL>
                       <a:noFill/>
                     </a:lnL>
-                    <a:lnR>
-                      <a:noFill/>
+                    <a:lnR w="12700" cap="flat" cmpd="sng" algn="ctr">
+                      <a:solidFill>
+                        <a:schemeClr val="tx1"/>
+                      </a:solidFill>
+                      <a:prstDash val="solid"/>
+                      <a:round/>
+                      <a:headEnd type="none" w="med" len="med"/>
+                      <a:tailEnd type="none" w="med" len="med"/>
                     </a:lnR>
                     <a:lnT w="9525" cap="flat" cmpd="sng" algn="ctr">
                       <a:solidFill>
@@ -8971,10 +9177,14 @@
                       <a:headEnd type="none" w="med" len="med"/>
                       <a:tailEnd type="none" w="med" len="med"/>
                     </a:lnT>
-                    <a:lnB w="9525">
-                      <a:solidFill>
-                        <a:srgbClr val="D6D6D6"/>
-                      </a:solidFill>
+                    <a:lnB w="12700" cap="flat" cmpd="sng" algn="ctr">
+                      <a:solidFill>
+                        <a:schemeClr val="tx1"/>
+                      </a:solidFill>
+                      <a:prstDash val="solid"/>
+                      <a:round/>
+                      <a:headEnd type="none" w="med" len="med"/>
+                      <a:tailEnd type="none" w="med" len="med"/>
                     </a:lnB>
                     <a:noFill/>
                   </a:tcPr>
@@ -8997,7 +9207,7 @@
         </p:nvSpPr>
         <p:spPr>
           <a:xfrm>
-            <a:off x="538038" y="3462934"/>
+            <a:off x="619506" y="3152038"/>
             <a:ext cx="5376672" cy="2542032"/>
           </a:xfrm>
           <a:prstGeom prst="rect">
@@ -9044,7 +9254,7 @@
         </p:nvSpPr>
         <p:spPr>
           <a:xfrm>
-            <a:off x="538038" y="3462934"/>
+            <a:off x="619506" y="3152038"/>
             <a:ext cx="5376672" cy="54864"/>
           </a:xfrm>
           <a:prstGeom prst="rect">
@@ -9089,7 +9299,7 @@
         </p:nvSpPr>
         <p:spPr>
           <a:xfrm>
-            <a:off x="720918" y="3563518"/>
+            <a:off x="802386" y="3252622"/>
             <a:ext cx="5010912" cy="201168"/>
           </a:xfrm>
           <a:prstGeom prst="rect">
@@ -9125,7 +9335,7 @@
         </p:nvSpPr>
         <p:spPr>
           <a:xfrm>
-            <a:off x="6189030" y="3462934"/>
+            <a:off x="6270498" y="3152038"/>
             <a:ext cx="5376672" cy="2542032"/>
           </a:xfrm>
           <a:prstGeom prst="rect">
@@ -9172,7 +9382,7 @@
         </p:nvSpPr>
         <p:spPr>
           <a:xfrm>
-            <a:off x="6189030" y="3462934"/>
+            <a:off x="6270498" y="3152038"/>
             <a:ext cx="5376672" cy="54864"/>
           </a:xfrm>
           <a:prstGeom prst="rect">
@@ -9217,7 +9427,7 @@
         </p:nvSpPr>
         <p:spPr>
           <a:xfrm>
-            <a:off x="6371910" y="3563518"/>
+            <a:off x="6453378" y="3252622"/>
             <a:ext cx="5010912" cy="201168"/>
           </a:xfrm>
           <a:prstGeom prst="rect">
@@ -9253,7 +9463,7 @@
         </p:nvSpPr>
         <p:spPr>
           <a:xfrm>
-            <a:off x="538038" y="6126480"/>
+            <a:off x="619506" y="5815584"/>
             <a:ext cx="11045952" cy="402336"/>
           </a:xfrm>
           <a:prstGeom prst="rect">
@@ -9298,7 +9508,7 @@
         </p:nvSpPr>
         <p:spPr>
           <a:xfrm>
-            <a:off x="538038" y="6126480"/>
+            <a:off x="619506" y="5815584"/>
             <a:ext cx="64008" cy="402336"/>
           </a:xfrm>
           <a:prstGeom prst="rect">
@@ -9343,8 +9553,8 @@
         </p:nvSpPr>
         <p:spPr>
           <a:xfrm>
-            <a:off x="720918" y="6181344"/>
-            <a:ext cx="10698480" cy="292608"/>
+            <a:off x="802386" y="5927598"/>
+            <a:ext cx="10698480" cy="169277"/>
           </a:xfrm>
           <a:prstGeom prst="rect">
             <a:avLst/>
@@ -9363,7 +9573,7 @@
               </a:lnSpc>
             </a:pPr>
             <a:r>
-              <a:rPr lang="zh-CN" sz="900" b="1">
+              <a:rPr lang="zh-CN" sz="1100" b="1" dirty="0">
                 <a:solidFill>
                   <a:srgbClr val="0A0A0A"/>
                 </a:solidFill>
@@ -9383,7 +9593,7 @@
         </p:nvSpPr>
         <p:spPr>
           <a:xfrm>
-            <a:off x="336870" y="1216640"/>
+            <a:off x="444312" y="1122889"/>
             <a:ext cx="76200" cy="228600"/>
           </a:xfrm>
           <a:prstGeom prst="rect">
@@ -9428,7 +9638,7 @@
         </p:nvSpPr>
         <p:spPr>
           <a:xfrm>
-            <a:off x="364302" y="3152038"/>
+            <a:off x="445770" y="2841142"/>
             <a:ext cx="76200" cy="228600"/>
           </a:xfrm>
           <a:prstGeom prst="rect">
@@ -9473,7 +9683,7 @@
         </p:nvSpPr>
         <p:spPr>
           <a:xfrm>
-            <a:off x="722376" y="3840480"/>
+            <a:off x="803844" y="3529584"/>
             <a:ext cx="1197864" cy="256032"/>
           </a:xfrm>
           <a:prstGeom prst="roundRect">
@@ -9522,7 +9732,7 @@
         </p:nvSpPr>
         <p:spPr>
           <a:xfrm>
-            <a:off x="722376" y="3895344"/>
+            <a:off x="803844" y="3584448"/>
             <a:ext cx="1197864" cy="164592"/>
           </a:xfrm>
           <a:prstGeom prst="rect">
@@ -9562,7 +9772,7 @@
         </p:nvSpPr>
         <p:spPr>
           <a:xfrm>
-            <a:off x="1993392" y="3840480"/>
+            <a:off x="2074860" y="3529584"/>
             <a:ext cx="1197864" cy="256032"/>
           </a:xfrm>
           <a:prstGeom prst="roundRect">
@@ -9611,7 +9821,7 @@
         </p:nvSpPr>
         <p:spPr>
           <a:xfrm>
-            <a:off x="1993392" y="3895344"/>
+            <a:off x="2074860" y="3584448"/>
             <a:ext cx="1197864" cy="164592"/>
           </a:xfrm>
           <a:prstGeom prst="rect">
@@ -9651,7 +9861,7 @@
         </p:nvSpPr>
         <p:spPr>
           <a:xfrm>
-            <a:off x="3264408" y="3840480"/>
+            <a:off x="3345876" y="3529584"/>
             <a:ext cx="1197864" cy="256032"/>
           </a:xfrm>
           <a:prstGeom prst="roundRect">
@@ -9700,7 +9910,7 @@
         </p:nvSpPr>
         <p:spPr>
           <a:xfrm>
-            <a:off x="3264408" y="3895344"/>
+            <a:off x="3345876" y="3584448"/>
             <a:ext cx="1197864" cy="164592"/>
           </a:xfrm>
           <a:prstGeom prst="rect">
@@ -9740,7 +9950,7 @@
         </p:nvSpPr>
         <p:spPr>
           <a:xfrm>
-            <a:off x="4535424" y="3840480"/>
+            <a:off x="4616892" y="3529584"/>
             <a:ext cx="1197864" cy="256032"/>
           </a:xfrm>
           <a:prstGeom prst="roundRect">
@@ -9789,7 +9999,7 @@
         </p:nvSpPr>
         <p:spPr>
           <a:xfrm>
-            <a:off x="4535424" y="3895344"/>
+            <a:off x="4616892" y="3584448"/>
             <a:ext cx="1197864" cy="164592"/>
           </a:xfrm>
           <a:prstGeom prst="rect">
@@ -9829,7 +10039,7 @@
         </p:nvSpPr>
         <p:spPr>
           <a:xfrm>
-            <a:off x="566928" y="4201668"/>
+            <a:off x="648396" y="3890772"/>
             <a:ext cx="45720" cy="128016"/>
           </a:xfrm>
           <a:prstGeom prst="rect">
@@ -9874,7 +10084,7 @@
         </p:nvSpPr>
         <p:spPr>
           <a:xfrm>
-            <a:off x="658368" y="4187952"/>
+            <a:off x="739836" y="3877056"/>
             <a:ext cx="1828800" cy="146304"/>
           </a:xfrm>
           <a:prstGeom prst="rect">
@@ -9914,7 +10124,7 @@
         </p:nvSpPr>
         <p:spPr>
           <a:xfrm>
-            <a:off x="722376" y="4370832"/>
+            <a:off x="803844" y="4059936"/>
             <a:ext cx="1197864" cy="347472"/>
           </a:xfrm>
           <a:prstGeom prst="rect">
@@ -9971,7 +10181,7 @@
         </p:nvSpPr>
         <p:spPr>
           <a:xfrm>
-            <a:off x="1993392" y="4370832"/>
+            <a:off x="2074860" y="4059936"/>
             <a:ext cx="1197864" cy="347472"/>
           </a:xfrm>
           <a:prstGeom prst="rect">
@@ -10028,7 +10238,7 @@
         </p:nvSpPr>
         <p:spPr>
           <a:xfrm>
-            <a:off x="3264408" y="4370832"/>
+            <a:off x="3345876" y="4059936"/>
             <a:ext cx="1197864" cy="347472"/>
           </a:xfrm>
           <a:prstGeom prst="rect">
@@ -10085,7 +10295,7 @@
         </p:nvSpPr>
         <p:spPr>
           <a:xfrm>
-            <a:off x="4535424" y="4370832"/>
+            <a:off x="4616892" y="4059936"/>
             <a:ext cx="1197864" cy="347472"/>
           </a:xfrm>
           <a:prstGeom prst="rect">
@@ -10142,7 +10352,7 @@
         </p:nvSpPr>
         <p:spPr>
           <a:xfrm>
-            <a:off x="566928" y="4855464"/>
+            <a:off x="648396" y="4544568"/>
             <a:ext cx="45720" cy="128016"/>
           </a:xfrm>
           <a:prstGeom prst="rect">
@@ -10187,7 +10397,7 @@
         </p:nvSpPr>
         <p:spPr>
           <a:xfrm>
-            <a:off x="658368" y="4846320"/>
+            <a:off x="739836" y="4535424"/>
             <a:ext cx="1828800" cy="146304"/>
           </a:xfrm>
           <a:prstGeom prst="rect">
@@ -10227,7 +10437,7 @@
         </p:nvSpPr>
         <p:spPr>
           <a:xfrm>
-            <a:off x="6373368" y="3840480"/>
+            <a:off x="6454836" y="3529584"/>
             <a:ext cx="5010912" cy="237744"/>
           </a:xfrm>
           <a:prstGeom prst="roundRect">
@@ -10276,7 +10486,7 @@
         </p:nvSpPr>
         <p:spPr>
           <a:xfrm>
-            <a:off x="6464807" y="3867912"/>
+            <a:off x="6546275" y="3557016"/>
             <a:ext cx="1417320" cy="182880"/>
           </a:xfrm>
           <a:prstGeom prst="rect">
@@ -10316,7 +10526,7 @@
         </p:nvSpPr>
         <p:spPr>
           <a:xfrm>
-            <a:off x="7973567" y="3886200"/>
+            <a:off x="8055035" y="3575304"/>
             <a:ext cx="640080" cy="164592"/>
           </a:xfrm>
           <a:prstGeom prst="rect">
@@ -10356,7 +10566,7 @@
         </p:nvSpPr>
         <p:spPr>
           <a:xfrm>
-            <a:off x="8750808" y="3886200"/>
+            <a:off x="8832276" y="3575304"/>
             <a:ext cx="548640" cy="164592"/>
           </a:xfrm>
           <a:prstGeom prst="rect">
@@ -10396,7 +10606,7 @@
         </p:nvSpPr>
         <p:spPr>
           <a:xfrm>
-            <a:off x="9619488" y="3867912"/>
+            <a:off x="9700956" y="3557016"/>
             <a:ext cx="1463040" cy="182880"/>
           </a:xfrm>
           <a:prstGeom prst="rect">
@@ -10436,7 +10646,7 @@
         </p:nvSpPr>
         <p:spPr>
           <a:xfrm>
-            <a:off x="6373368" y="4206240"/>
+            <a:off x="6454836" y="3895344"/>
             <a:ext cx="1463040" cy="146304"/>
           </a:xfrm>
           <a:prstGeom prst="rect">
@@ -10476,7 +10686,7 @@
         </p:nvSpPr>
         <p:spPr>
           <a:xfrm>
-            <a:off x="6373368" y="4352544"/>
+            <a:off x="6454836" y="4041648"/>
             <a:ext cx="1463040" cy="219456"/>
           </a:xfrm>
           <a:prstGeom prst="rect">
@@ -10516,7 +10726,7 @@
         </p:nvSpPr>
         <p:spPr>
           <a:xfrm>
-            <a:off x="8046720" y="4206240"/>
+            <a:off x="8128188" y="3895344"/>
             <a:ext cx="1463040" cy="146304"/>
           </a:xfrm>
           <a:prstGeom prst="rect">
@@ -10556,7 +10766,7 @@
         </p:nvSpPr>
         <p:spPr>
           <a:xfrm>
-            <a:off x="8046720" y="4352544"/>
+            <a:off x="8128188" y="4041648"/>
             <a:ext cx="1463040" cy="219456"/>
           </a:xfrm>
           <a:prstGeom prst="rect">
@@ -10596,7 +10806,7 @@
         </p:nvSpPr>
         <p:spPr>
           <a:xfrm>
-            <a:off x="9720072" y="4206240"/>
+            <a:off x="9801540" y="3895344"/>
             <a:ext cx="1463040" cy="146304"/>
           </a:xfrm>
           <a:prstGeom prst="rect">
@@ -10636,7 +10846,7 @@
         </p:nvSpPr>
         <p:spPr>
           <a:xfrm>
-            <a:off x="9720072" y="4352544"/>
+            <a:off x="9801540" y="4041648"/>
             <a:ext cx="1463040" cy="219456"/>
           </a:xfrm>
           <a:prstGeom prst="rect">
@@ -10676,7 +10886,7 @@
         </p:nvSpPr>
         <p:spPr>
           <a:xfrm>
-            <a:off x="7836408" y="4315968"/>
+            <a:off x="7917876" y="4005072"/>
             <a:ext cx="182880" cy="182880"/>
           </a:xfrm>
           <a:prstGeom prst="rect">
@@ -10716,7 +10926,7 @@
         </p:nvSpPr>
         <p:spPr>
           <a:xfrm>
-            <a:off x="9509760" y="4315968"/>
+            <a:off x="9591228" y="4005072"/>
             <a:ext cx="182880" cy="182880"/>
           </a:xfrm>
           <a:prstGeom prst="rect">
@@ -10756,7 +10966,7 @@
         </p:nvSpPr>
         <p:spPr>
           <a:xfrm>
-            <a:off x="6373368" y="4663440"/>
+            <a:off x="6454836" y="4352544"/>
             <a:ext cx="914400" cy="164592"/>
           </a:xfrm>
           <a:prstGeom prst="rect">
@@ -10776,7 +10986,7 @@
               </a:lnSpc>
             </a:pPr>
             <a:r>
-              <a:rPr lang="zh-CN" sz="800" b="0">
+              <a:rPr lang="zh-CN" sz="800" b="0" dirty="0">
                 <a:solidFill>
                   <a:srgbClr val="606060"/>
                 </a:solidFill>
@@ -10796,7 +11006,7 @@
         </p:nvSpPr>
         <p:spPr>
           <a:xfrm>
-            <a:off x="10808208" y="4645152"/>
+            <a:off x="10889676" y="4334256"/>
             <a:ext cx="576072" cy="182880"/>
           </a:xfrm>
           <a:prstGeom prst="rect">
@@ -10836,7 +11046,7 @@
         </p:nvSpPr>
         <p:spPr>
           <a:xfrm>
-            <a:off x="6373368" y="4846320"/>
+            <a:off x="6454836" y="4535424"/>
             <a:ext cx="5010912" cy="128016"/>
           </a:xfrm>
           <a:prstGeom prst="rect">
@@ -10881,7 +11091,7 @@
         </p:nvSpPr>
         <p:spPr>
           <a:xfrm>
-            <a:off x="6373368" y="4846320"/>
+            <a:off x="6454836" y="4535424"/>
             <a:ext cx="3126809" cy="128016"/>
           </a:xfrm>
           <a:prstGeom prst="rect">
@@ -10926,7 +11136,7 @@
         </p:nvSpPr>
         <p:spPr>
           <a:xfrm>
-            <a:off x="6373368" y="5084064"/>
+            <a:off x="6454836" y="4773168"/>
             <a:ext cx="1609344" cy="146304"/>
           </a:xfrm>
           <a:prstGeom prst="rect">
@@ -10966,7 +11176,7 @@
         </p:nvSpPr>
         <p:spPr>
           <a:xfrm>
-            <a:off x="6373368" y="5230368"/>
+            <a:off x="6454836" y="4919472"/>
             <a:ext cx="1609344" cy="173736"/>
           </a:xfrm>
           <a:prstGeom prst="rect">
@@ -11016,7 +11226,7 @@
         </p:nvSpPr>
         <p:spPr>
           <a:xfrm>
-            <a:off x="6373368" y="5376672"/>
+            <a:off x="6454836" y="5065776"/>
             <a:ext cx="1609344" cy="173736"/>
           </a:xfrm>
           <a:prstGeom prst="rect">
@@ -11066,7 +11276,7 @@
         </p:nvSpPr>
         <p:spPr>
           <a:xfrm>
-            <a:off x="6373368" y="5522976"/>
+            <a:off x="6454836" y="5212080"/>
             <a:ext cx="1609344" cy="173736"/>
           </a:xfrm>
           <a:prstGeom prst="rect">
@@ -11116,7 +11326,7 @@
         </p:nvSpPr>
         <p:spPr>
           <a:xfrm>
-            <a:off x="8092440" y="5084064"/>
+            <a:off x="8173908" y="4773168"/>
             <a:ext cx="1609344" cy="146304"/>
           </a:xfrm>
           <a:prstGeom prst="rect">
@@ -11156,7 +11366,7 @@
         </p:nvSpPr>
         <p:spPr>
           <a:xfrm>
-            <a:off x="8092440" y="5230368"/>
+            <a:off x="8173908" y="4919472"/>
             <a:ext cx="1609344" cy="173736"/>
           </a:xfrm>
           <a:prstGeom prst="rect">
@@ -11206,7 +11416,7 @@
         </p:nvSpPr>
         <p:spPr>
           <a:xfrm>
-            <a:off x="8092440" y="5376672"/>
+            <a:off x="8173908" y="5065776"/>
             <a:ext cx="1609344" cy="173736"/>
           </a:xfrm>
           <a:prstGeom prst="rect">
@@ -11256,7 +11466,7 @@
         </p:nvSpPr>
         <p:spPr>
           <a:xfrm>
-            <a:off x="8092440" y="5669280"/>
+            <a:off x="8173908" y="5358384"/>
             <a:ext cx="1609344" cy="173736"/>
           </a:xfrm>
           <a:prstGeom prst="rect">
@@ -11306,7 +11516,7 @@
         </p:nvSpPr>
         <p:spPr>
           <a:xfrm>
-            <a:off x="8092440" y="5815584"/>
+            <a:off x="8173908" y="5504688"/>
             <a:ext cx="1609344" cy="173736"/>
           </a:xfrm>
           <a:prstGeom prst="rect">
@@ -11356,7 +11566,7 @@
         </p:nvSpPr>
         <p:spPr>
           <a:xfrm>
-            <a:off x="9811512" y="5084064"/>
+            <a:off x="9892980" y="4773168"/>
             <a:ext cx="1609344" cy="146304"/>
           </a:xfrm>
           <a:prstGeom prst="rect">
@@ -11396,7 +11606,7 @@
         </p:nvSpPr>
         <p:spPr>
           <a:xfrm>
-            <a:off x="722376" y="5212080"/>
+            <a:off x="803844" y="4901184"/>
             <a:ext cx="1371600" cy="347472"/>
           </a:xfrm>
           <a:prstGeom prst="rect">
@@ -11453,7 +11663,7 @@
         </p:nvSpPr>
         <p:spPr>
           <a:xfrm>
-            <a:off x="1993392" y="5212080"/>
+            <a:off x="2074860" y="4901184"/>
             <a:ext cx="1371600" cy="347472"/>
           </a:xfrm>
           <a:prstGeom prst="rect">
@@ -11510,7 +11720,7 @@
         </p:nvSpPr>
         <p:spPr>
           <a:xfrm>
-            <a:off x="3264408" y="5212080"/>
+            <a:off x="3345876" y="4901184"/>
             <a:ext cx="1371600" cy="347472"/>
           </a:xfrm>
           <a:prstGeom prst="rect">
@@ -11567,7 +11777,7 @@
         </p:nvSpPr>
         <p:spPr>
           <a:xfrm>
-            <a:off x="722376" y="5614416"/>
+            <a:off x="803844" y="5303520"/>
             <a:ext cx="1371600" cy="347472"/>
           </a:xfrm>
           <a:prstGeom prst="rect">
@@ -11587,7 +11797,7 @@
               </a:lnSpc>
             </a:pPr>
             <a:r>
-              <a:rPr lang="zh-CN" sz="800" b="0">
+              <a:rPr lang="zh-CN" sz="800" b="0" dirty="0">
                 <a:solidFill>
                   <a:srgbClr val="1F4E79"/>
                 </a:solidFill>
@@ -11604,7 +11814,7 @@
               </a:lnSpc>
             </a:pPr>
             <a:r>
-              <a:rPr lang="zh-CN" sz="1100" b="0">
+              <a:rPr lang="zh-CN" sz="1100" b="0" dirty="0">
                 <a:solidFill>
                   <a:srgbClr val="3D3C3A"/>
                 </a:solidFill>
@@ -11624,7 +11834,7 @@
         </p:nvSpPr>
         <p:spPr>
           <a:xfrm>
-            <a:off x="1993392" y="5614416"/>
+            <a:off x="2074860" y="5303520"/>
             <a:ext cx="1371600" cy="347472"/>
           </a:xfrm>
           <a:prstGeom prst="rect">
@@ -11644,7 +11854,7 @@
               </a:lnSpc>
             </a:pPr>
             <a:r>
-              <a:rPr lang="zh-CN" sz="800" b="0">
+              <a:rPr lang="zh-CN" sz="800" b="0" dirty="0">
                 <a:solidFill>
                   <a:srgbClr val="1F4E79"/>
                 </a:solidFill>
@@ -11661,7 +11871,7 @@
               </a:lnSpc>
             </a:pPr>
             <a:r>
-              <a:rPr lang="zh-CN" sz="1100" b="0">
+              <a:rPr lang="zh-CN" sz="1100" b="0" dirty="0">
                 <a:solidFill>
                   <a:srgbClr val="3D3C3A"/>
                 </a:solidFill>
@@ -11681,7 +11891,7 @@
         </p:nvSpPr>
         <p:spPr>
           <a:xfrm>
-            <a:off x="6373368" y="5669280"/>
+            <a:off x="6454836" y="5358384"/>
             <a:ext cx="1609344" cy="146304"/>
           </a:xfrm>
           <a:prstGeom prst="rect">
@@ -11731,7 +11941,7 @@
         </p:nvSpPr>
         <p:spPr>
           <a:xfrm>
-            <a:off x="8092440" y="5522976"/>
+            <a:off x="8173908" y="5212080"/>
             <a:ext cx="1609344" cy="146304"/>
           </a:xfrm>
           <a:prstGeom prst="rect">
@@ -11781,7 +11991,7 @@
         </p:nvSpPr>
         <p:spPr>
           <a:xfrm>
-            <a:off x="9811512" y="5230368"/>
+            <a:off x="9892980" y="4919472"/>
             <a:ext cx="1609344" cy="146304"/>
           </a:xfrm>
           <a:prstGeom prst="rect">
@@ -11831,7 +12041,7 @@
         </p:nvSpPr>
         <p:spPr>
           <a:xfrm>
-            <a:off x="9811512" y="5376672"/>
+            <a:off x="9892980" y="5065776"/>
             <a:ext cx="1609344" cy="146304"/>
           </a:xfrm>
           <a:prstGeom prst="rect">
@@ -11881,7 +12091,7 @@
         </p:nvSpPr>
         <p:spPr>
           <a:xfrm>
-            <a:off x="3264408" y="5614416"/>
+            <a:off x="3345876" y="5303520"/>
             <a:ext cx="1371600" cy="347472"/>
           </a:xfrm>
           <a:prstGeom prst="rect">
@@ -11896,17 +12106,30 @@
           <a:lstStyle/>
           <a:p>
             <a:r>
-              <a:rPr sz="800">
+              <a:rPr sz="800" dirty="0">
                 <a:solidFill>
                   <a:srgbClr val="1F4E79"/>
                 </a:solidFill>
               </a:rPr>
-              <a:t>90 天还款</a:t>
+              <a:t>90 </a:t>
             </a:r>
+            <a:r>
+              <a:rPr sz="800" dirty="0" err="1">
+                <a:solidFill>
+                  <a:srgbClr val="1F4E79"/>
+                </a:solidFill>
+              </a:rPr>
+              <a:t>天还款</a:t>
+            </a:r>
+            <a:endParaRPr sz="800" dirty="0">
+              <a:solidFill>
+                <a:srgbClr val="1F4E79"/>
+              </a:solidFill>
+            </a:endParaRPr>
           </a:p>
           <a:p>
             <a:r>
-              <a:rPr sz="1100">
+              <a:rPr sz="1100" dirty="0">
                 <a:solidFill>
                   <a:srgbClr val="3D3C3A"/>
                 </a:solidFill>
@@ -12096,7 +12319,7 @@
         </p:nvSpPr>
         <p:spPr>
           <a:xfrm>
-            <a:off x="568717" y="1732980"/>
+            <a:off x="568717" y="1707580"/>
             <a:ext cx="76200" cy="228600"/>
           </a:xfrm>
           <a:prstGeom prst="rect">
@@ -12146,9 +12369,58 @@
           <a:bodyPr wrap="none" lIns="0" tIns="0" rIns="0" bIns="0" rtlCol="0" anchor="ctr"/>
           <a:lstStyle/>
           <a:p>
+            <a:pPr>
+              <a:lnSpc>
+                <a:spcPct val="125000"/>
+              </a:lnSpc>
+            </a:pPr>
             <a:r>
-              <a:t>1. AI 知识库 Agent：建设与维护</a:t>
+              <a:rPr sz="1400" b="1" dirty="0">
+                <a:solidFill>
+                  <a:srgbClr val="0A0A0A"/>
+                </a:solidFill>
+                <a:latin typeface="微软雅黑"/>
+                <a:ea typeface="微软雅黑"/>
+              </a:rPr>
+              <a:t>1. AI </a:t>
             </a:r>
+            <a:r>
+              <a:rPr sz="1400" b="1" dirty="0" err="1">
+                <a:solidFill>
+                  <a:srgbClr val="0A0A0A"/>
+                </a:solidFill>
+                <a:latin typeface="微软雅黑"/>
+                <a:ea typeface="微软雅黑"/>
+              </a:rPr>
+              <a:t>知识库</a:t>
+            </a:r>
+            <a:r>
+              <a:rPr sz="1400" b="1" dirty="0">
+                <a:solidFill>
+                  <a:srgbClr val="0A0A0A"/>
+                </a:solidFill>
+                <a:latin typeface="微软雅黑"/>
+                <a:ea typeface="微软雅黑"/>
+              </a:rPr>
+              <a:t> </a:t>
+            </a:r>
+            <a:r>
+              <a:rPr sz="1400" b="1" dirty="0" err="1">
+                <a:solidFill>
+                  <a:srgbClr val="0A0A0A"/>
+                </a:solidFill>
+                <a:latin typeface="微软雅黑"/>
+                <a:ea typeface="微软雅黑"/>
+              </a:rPr>
+              <a:t>Agent：建设与维护</a:t>
+            </a:r>
+            <a:endParaRPr sz="1400" b="1" dirty="0">
+              <a:solidFill>
+                <a:srgbClr val="0A0A0A"/>
+              </a:solidFill>
+              <a:latin typeface="微软雅黑"/>
+              <a:ea typeface="微软雅黑"/>
+            </a:endParaRPr>
           </a:p>
         </p:txBody>
       </p:sp>
@@ -14982,14 +15254,44 @@
               </a:lnSpc>
             </a:pPr>
             <a:r>
-              <a:rPr sz="1400" b="1">
+              <a:rPr sz="1400" b="1" dirty="0">
                 <a:solidFill>
                   <a:srgbClr val="0A0A0A"/>
                 </a:solidFill>
                 <a:latin typeface="微软雅黑"/>
                 <a:ea typeface="微软雅黑"/>
               </a:rPr>
-              <a:t>2. AI 质检 Agent：监控分类波动并输出诊断报告</a:t>
+              <a:t>2. AI </a:t>
+            </a:r>
+            <a:r>
+              <a:rPr sz="1400" b="1" dirty="0" err="1">
+                <a:solidFill>
+                  <a:srgbClr val="0A0A0A"/>
+                </a:solidFill>
+                <a:latin typeface="微软雅黑"/>
+                <a:ea typeface="微软雅黑"/>
+              </a:rPr>
+              <a:t>质检</a:t>
+            </a:r>
+            <a:r>
+              <a:rPr sz="1400" b="1" dirty="0">
+                <a:solidFill>
+                  <a:srgbClr val="0A0A0A"/>
+                </a:solidFill>
+                <a:latin typeface="微软雅黑"/>
+                <a:ea typeface="微软雅黑"/>
+              </a:rPr>
+              <a:t> </a:t>
+            </a:r>
+            <a:r>
+              <a:rPr sz="1400" b="1" dirty="0" err="1">
+                <a:solidFill>
+                  <a:srgbClr val="0A0A0A"/>
+                </a:solidFill>
+                <a:latin typeface="微软雅黑"/>
+                <a:ea typeface="微软雅黑"/>
+              </a:rPr>
+              <a:t>Agent：监控分类波动并输出诊断报告</a:t>
             </a:r>
             <a:endParaRPr lang="en-US" sz="1400" noProof="1">
               <a:latin typeface="微软雅黑" panose="020B0503020204020204" pitchFamily="34" charset="-122"/>
@@ -15007,14 +15309,14 @@
           <p:nvPr>
             <p:extLst>
               <p:ext uri="{D42A27DB-BD31-4B8C-83A1-F6EECF244321}">
-                <p14:modId xmlns:p14="http://schemas.microsoft.com/office/powerpoint/2010/main" val="1945025288"/>
+                <p14:modId xmlns:p14="http://schemas.microsoft.com/office/powerpoint/2010/main" val="1119405439"/>
               </p:ext>
             </p:extLst>
           </p:nvPr>
         </p:nvGraphicFramePr>
         <p:xfrm>
-          <a:off x="6311255" y="4049611"/>
-          <a:ext cx="5540236" cy="1042416"/>
+          <a:off x="6311255" y="4100335"/>
+          <a:ext cx="5540236" cy="868680"/>
         </p:xfrm>
         <a:graphic>
           <a:graphicData uri="http://schemas.openxmlformats.org/drawingml/2006/table">
@@ -15427,7 +15729,7 @@
                     <a:p>
                       <a:pPr algn="l"/>
                       <a:r>
-                        <a:rPr sz="800" b="1">
+                        <a:rPr sz="800" b="1" dirty="0" err="1">
                           <a:solidFill>
                             <a:srgbClr val="3D3C3A"/>
                           </a:solidFill>
@@ -15436,95 +15738,13 @@
                         </a:rPr>
                         <a:t>多引擎冲突</a:t>
                       </a:r>
-                    </a:p>
-                  </a:txBody>
-                  <a:tcPr marL="27432" marR="27432" marT="9144" marB="9144">
-                    <a:lnL>
-                      <a:noFill/>
-                    </a:lnL>
-                    <a:lnR>
-                      <a:noFill/>
-                    </a:lnR>
-                    <a:lnT w="9525" cap="flat" cmpd="sng" algn="ctr">
-                      <a:solidFill>
-                        <a:srgbClr val="D6D6D6"/>
-                      </a:solidFill>
-                      <a:prstDash val="solid"/>
-                      <a:round/>
-                      <a:headEnd type="none" w="med" len="med"/>
-                      <a:tailEnd type="none" w="med" len="med"/>
-                    </a:lnT>
-                    <a:lnB w="9525" cap="flat">
-                      <a:solidFill>
-                        <a:srgbClr val="D6D6D6"/>
-                      </a:solidFill>
-                    </a:lnB>
-                  </a:tcPr>
-                </a:tc>
-                <a:tc>
-                  <a:txBody>
-                    <a:bodyPr/>
-                    <a:lstStyle/>
-                    <a:p>
-                      <a:pPr algn="l"/>
-                      <a:r>
-                        <a:rPr sz="800" b="0">
-                          <a:solidFill>
-                            <a:srgbClr val="3D3C3A"/>
-                          </a:solidFill>
-                          <a:latin typeface="微软雅黑"/>
-                          <a:ea typeface="微软雅黑"/>
-                        </a:rPr>
-                        <a:t>同一笔 BPAY ... 被 Transfer 归为转账、被 Liability 识别为还款，需按业务语义裁决</a:t>
-                      </a:r>
-                    </a:p>
-                  </a:txBody>
-                  <a:tcPr marL="27432" marR="27432" marT="9144" marB="9144">
-                    <a:lnL>
-                      <a:noFill/>
-                    </a:lnL>
-                    <a:lnR>
-                      <a:noFill/>
-                    </a:lnR>
-                    <a:lnT w="9525" cap="flat" cmpd="sng" algn="ctr">
-                      <a:solidFill>
-                        <a:srgbClr val="D6D6D6"/>
-                      </a:solidFill>
-                      <a:prstDash val="solid"/>
-                      <a:round/>
-                      <a:headEnd type="none" w="med" len="med"/>
-                      <a:tailEnd type="none" w="med" len="med"/>
-                    </a:lnT>
-                    <a:lnB w="9525" cap="flat">
-                      <a:solidFill>
-                        <a:srgbClr val="D6D6D6"/>
-                      </a:solidFill>
-                    </a:lnB>
-                  </a:tcPr>
-                </a:tc>
-                <a:extLst>
-                  <a:ext uri="{0D108BD9-81ED-4DB2-BD59-A6C34878D82A}">
-                    <a16:rowId xmlns:a16="http://schemas.microsoft.com/office/drawing/2014/main" val="10004"/>
-                  </a:ext>
-                </a:extLst>
-              </a:tr>
-              <a:tr h="173736">
-                <a:tc>
-                  <a:txBody>
-                    <a:bodyPr/>
-                    <a:lstStyle/>
-                    <a:p>
-                      <a:pPr algn="l"/>
-                      <a:r>
-                        <a:rPr sz="800" b="1">
-                          <a:solidFill>
-                            <a:srgbClr val="3D3C3A"/>
-                          </a:solidFill>
-                          <a:latin typeface="微软雅黑"/>
-                          <a:ea typeface="微软雅黑"/>
-                        </a:rPr>
-                        <a:t>正常波动</a:t>
-                      </a:r>
+                      <a:endParaRPr sz="800" b="1" dirty="0">
+                        <a:solidFill>
+                          <a:srgbClr val="3D3C3A"/>
+                        </a:solidFill>
+                        <a:latin typeface="微软雅黑"/>
+                        <a:ea typeface="微软雅黑"/>
+                      </a:endParaRPr>
                     </a:p>
                   </a:txBody>
                   <a:tcPr marL="27432" marR="27432" marT="9144" marB="9144">
@@ -15564,9 +15784,49 @@
                           <a:latin typeface="微软雅黑"/>
                           <a:ea typeface="微软雅黑"/>
                         </a:rPr>
-                        <a:t>月初集中缴费、节假日消费高峰导致某类别占比短期上升，属正常范围，无需干预</a:t>
+                        <a:t>同一笔</a:t>
                       </a:r>
-                      <a:endParaRPr sz="700" b="0" dirty="0">
+                      <a:r>
+                        <a:rPr sz="800" b="0" dirty="0">
+                          <a:solidFill>
+                            <a:srgbClr val="3D3C3A"/>
+                          </a:solidFill>
+                          <a:latin typeface="微软雅黑"/>
+                          <a:ea typeface="微软雅黑"/>
+                        </a:rPr>
+                        <a:t> BPAY ... 被 Transfer </a:t>
+                      </a:r>
+                      <a:r>
+                        <a:rPr sz="800" b="0" dirty="0" err="1">
+                          <a:solidFill>
+                            <a:srgbClr val="3D3C3A"/>
+                          </a:solidFill>
+                          <a:latin typeface="微软雅黑"/>
+                          <a:ea typeface="微软雅黑"/>
+                        </a:rPr>
+                        <a:t>归为转账、被</a:t>
+                      </a:r>
+                      <a:r>
+                        <a:rPr sz="800" b="0" dirty="0">
+                          <a:solidFill>
+                            <a:srgbClr val="3D3C3A"/>
+                          </a:solidFill>
+                          <a:latin typeface="微软雅黑"/>
+                          <a:ea typeface="微软雅黑"/>
+                        </a:rPr>
+                        <a:t> Liability </a:t>
+                      </a:r>
+                      <a:r>
+                        <a:rPr sz="800" b="0" dirty="0" err="1">
+                          <a:solidFill>
+                            <a:srgbClr val="3D3C3A"/>
+                          </a:solidFill>
+                          <a:latin typeface="微软雅黑"/>
+                          <a:ea typeface="微软雅黑"/>
+                        </a:rPr>
+                        <a:t>识别为还款，需按业务语义裁决</a:t>
+                      </a:r>
+                      <a:endParaRPr sz="800" b="0" dirty="0">
                         <a:solidFill>
                           <a:srgbClr val="3D3C3A"/>
                         </a:solidFill>
@@ -15600,7 +15860,7 @@
                 </a:tc>
                 <a:extLst>
                   <a:ext uri="{0D108BD9-81ED-4DB2-BD59-A6C34878D82A}">
-                    <a16:rowId xmlns:a16="http://schemas.microsoft.com/office/drawing/2014/main" val="10005"/>
+                    <a16:rowId xmlns:a16="http://schemas.microsoft.com/office/drawing/2014/main" val="10004"/>
                   </a:ext>
                 </a:extLst>
               </a:tr>
@@ -15616,8 +15876,8 @@
         </p:nvSpPr>
         <p:spPr>
           <a:xfrm>
-            <a:off x="6281928" y="5285232"/>
-            <a:ext cx="5029200" cy="256032"/>
+            <a:off x="6309360" y="5109134"/>
+            <a:ext cx="5029200" cy="261610"/>
           </a:xfrm>
           <a:prstGeom prst="rect">
             <a:avLst/>
@@ -15632,7 +15892,7 @@
           <a:p>
             <a:pPr algn="l"/>
             <a:r>
-              <a:rPr sz="1200" b="1" dirty="0" err="1">
+              <a:rPr sz="1100" b="1" dirty="0" err="1">
                 <a:solidFill>
                   <a:srgbClr val="0A0A0A"/>
                 </a:solidFill>
@@ -15641,7 +15901,7 @@
               </a:rPr>
               <a:t>诊断报告输出示例</a:t>
             </a:r>
-            <a:endParaRPr sz="900" b="1" dirty="0">
+            <a:endParaRPr sz="1100" b="1" dirty="0">
               <a:solidFill>
                 <a:srgbClr val="0A0A0A"/>
               </a:solidFill>
@@ -15657,10 +15917,16 @@
           <p:cNvGraphicFramePr>
             <a:graphicFrameLocks noGrp="1"/>
           </p:cNvGraphicFramePr>
-          <p:nvPr/>
+          <p:nvPr>
+            <p:extLst>
+              <p:ext uri="{D42A27DB-BD31-4B8C-83A1-F6EECF244321}">
+                <p14:modId xmlns:p14="http://schemas.microsoft.com/office/powerpoint/2010/main" val="667604934"/>
+              </p:ext>
+            </p:extLst>
+          </p:nvPr>
         </p:nvGraphicFramePr>
         <p:xfrm>
-          <a:off x="6311257" y="5556879"/>
+          <a:off x="6338689" y="5380781"/>
           <a:ext cx="5540234" cy="694944"/>
         </p:xfrm>
         <a:graphic>
@@ -16366,8 +16632,8 @@
         </p:nvSpPr>
         <p:spPr>
           <a:xfrm>
-            <a:off x="6281928" y="3776472"/>
-            <a:ext cx="5029200" cy="256032"/>
+            <a:off x="6281928" y="3827196"/>
+            <a:ext cx="5029200" cy="261610"/>
           </a:xfrm>
           <a:prstGeom prst="rect">
             <a:avLst/>
@@ -16386,7 +16652,7 @@
               </a:spcAft>
             </a:pPr>
             <a:r>
-              <a:rPr lang="zh-CN" altLang="en-US" sz="1200" b="1" dirty="0">
+              <a:rPr lang="zh-CN" altLang="en-US" sz="1100" b="1" dirty="0">
                 <a:solidFill>
                   <a:srgbClr val="0A0A0A"/>
                 </a:solidFill>
@@ -16406,7 +16672,7 @@
         </p:nvSpPr>
         <p:spPr>
           <a:xfrm>
-            <a:off x="6217920" y="3776472"/>
+            <a:off x="6217920" y="3827196"/>
             <a:ext cx="76200" cy="228600"/>
           </a:xfrm>
           <a:prstGeom prst="rect">
@@ -16451,7 +16717,7 @@
         </p:nvSpPr>
         <p:spPr>
           <a:xfrm>
-            <a:off x="6217920" y="5285232"/>
+            <a:off x="6245352" y="5109134"/>
             <a:ext cx="76200" cy="228600"/>
           </a:xfrm>
           <a:prstGeom prst="rect">
@@ -16496,7 +16762,7 @@
         </p:nvSpPr>
         <p:spPr>
           <a:xfrm>
-            <a:off x="6281928" y="6327648"/>
+            <a:off x="6309360" y="6151550"/>
             <a:ext cx="5541264" cy="384048"/>
           </a:xfrm>
           <a:prstGeom prst="rect">
@@ -16541,7 +16807,7 @@
         </p:nvSpPr>
         <p:spPr>
           <a:xfrm>
-            <a:off x="6217920" y="6327648"/>
+            <a:off x="6245352" y="6151550"/>
             <a:ext cx="54864" cy="384048"/>
           </a:xfrm>
           <a:prstGeom prst="rect">
@@ -16586,7 +16852,7 @@
         </p:nvSpPr>
         <p:spPr>
           <a:xfrm>
-            <a:off x="6373368" y="6327648"/>
+            <a:off x="6400800" y="6151550"/>
             <a:ext cx="5349240" cy="384048"/>
           </a:xfrm>
           <a:prstGeom prst="rect">
@@ -16656,7 +16922,7 @@
           <a:p>
             <a:pPr latinLnBrk="1"/>
             <a:r>
-              <a:rPr lang="zh-CN" sz="1100" b="1">
+              <a:rPr lang="zh-CN" sz="1100" b="1" dirty="0">
                 <a:solidFill>
                   <a:srgbClr val="1F4E79"/>
                 </a:solidFill>
@@ -16665,11 +16931,18 @@
               </a:rPr>
               <a:t>① 监控</a:t>
             </a:r>
-          </a:p>
-          <a:p>
-            <a:pPr latinLnBrk="1"/>
             <a:r>
-              <a:rPr lang="zh-CN" sz="850" b="0">
+              <a:rPr lang="zh-CN" altLang="en-US" sz="1100" b="1" dirty="0">
+                <a:solidFill>
+                  <a:srgbClr val="1F4E79"/>
+                </a:solidFill>
+                <a:latin typeface="微软雅黑"/>
+                <a:ea typeface="微软雅黑"/>
+              </a:rPr>
+              <a:t>：</a:t>
+            </a:r>
+            <a:r>
+              <a:rPr lang="zh-CN" sz="850" b="0" dirty="0">
                 <a:solidFill>
                   <a:srgbClr val="3D3C3A"/>
                 </a:solidFill>
@@ -16768,7 +17041,7 @@
           <a:p>
             <a:pPr latinLnBrk="1"/>
             <a:r>
-              <a:rPr lang="zh-CN" sz="1100" b="1">
+              <a:rPr lang="zh-CN" sz="1100" b="1" dirty="0">
                 <a:solidFill>
                   <a:srgbClr val="1F4E79"/>
                 </a:solidFill>
@@ -16777,11 +17050,18 @@
               </a:rPr>
               <a:t>② 定位</a:t>
             </a:r>
-          </a:p>
-          <a:p>
-            <a:pPr latinLnBrk="1"/>
             <a:r>
-              <a:rPr lang="zh-CN" sz="850" b="0">
+              <a:rPr lang="zh-CN" altLang="en-US" sz="1100" b="1" dirty="0">
+                <a:solidFill>
+                  <a:srgbClr val="1F4E79"/>
+                </a:solidFill>
+                <a:latin typeface="微软雅黑"/>
+                <a:ea typeface="微软雅黑"/>
+              </a:rPr>
+              <a:t>：</a:t>
+            </a:r>
+            <a:r>
+              <a:rPr lang="zh-CN" sz="850" b="0" dirty="0">
                 <a:solidFill>
                   <a:srgbClr val="3D3C3A"/>
                 </a:solidFill>
@@ -16880,7 +17160,7 @@
           <a:p>
             <a:pPr latinLnBrk="1"/>
             <a:r>
-              <a:rPr lang="zh-CN" sz="1100" b="1">
+              <a:rPr lang="zh-CN" sz="1100" b="1" dirty="0">
                 <a:solidFill>
                   <a:srgbClr val="1F4E79"/>
                 </a:solidFill>
@@ -16889,11 +17169,18 @@
               </a:rPr>
               <a:t>③ 输出</a:t>
             </a:r>
-          </a:p>
-          <a:p>
-            <a:pPr latinLnBrk="1"/>
             <a:r>
-              <a:rPr lang="zh-CN" sz="850" b="0">
+              <a:rPr lang="zh-CN" altLang="en-US" sz="1100" b="1" dirty="0">
+                <a:solidFill>
+                  <a:srgbClr val="1F4E79"/>
+                </a:solidFill>
+                <a:latin typeface="微软雅黑"/>
+                <a:ea typeface="微软雅黑"/>
+              </a:rPr>
+              <a:t>：</a:t>
+            </a:r>
+            <a:r>
+              <a:rPr lang="zh-CN" sz="850" b="0" dirty="0">
                 <a:solidFill>
                   <a:srgbClr val="3D3C3A"/>
                 </a:solidFill>
@@ -20522,215 +20809,6 @@
                 <a:cs typeface="+mn-cs"/>
               </a:rPr>
               <a:t>1. 贷款识别覆盖交集：我方漏识别更少</a:t>
-            </a:r>
-          </a:p>
-        </p:txBody>
-      </p:sp>
-      <p:sp>
-        <p:nvSpPr>
-          <p:cNvPr id="40" name="Rectangle 39"/>
-          <p:cNvSpPr/>
-          <p:nvPr/>
-        </p:nvSpPr>
-        <p:spPr>
-          <a:xfrm>
-            <a:off x="429768" y="5650992"/>
-            <a:ext cx="4114800" cy="457200"/>
-          </a:xfrm>
-          <a:prstGeom prst="rect">
-            <a:avLst/>
-          </a:prstGeom>
-          <a:solidFill>
-            <a:srgbClr val="FAF3E0"/>
-          </a:solidFill>
-          <a:ln>
-            <a:noFill/>
-          </a:ln>
-          <a:effectLst/>
-        </p:spPr>
-        <p:style>
-          <a:lnRef idx="1">
-            <a:schemeClr val="accent1"/>
-          </a:lnRef>
-          <a:fillRef idx="3">
-            <a:schemeClr val="accent1"/>
-          </a:fillRef>
-          <a:effectRef idx="2">
-            <a:schemeClr val="accent1"/>
-          </a:effectRef>
-          <a:fontRef idx="minor">
-            <a:schemeClr val="lt1"/>
-          </a:fontRef>
-        </p:style>
-        <p:txBody>
-          <a:bodyPr rtlCol="0" anchor="ctr"/>
-          <a:lstStyle/>
-          <a:p>
-            <a:pPr marL="0" marR="0" lvl="0" indent="0" algn="ctr" defTabSz="914400" rtl="0" eaLnBrk="1" fontAlgn="auto" latinLnBrk="0" hangingPunct="1">
-              <a:lnSpc>
-                <a:spcPct val="100000"/>
-              </a:lnSpc>
-              <a:spcBef>
-                <a:spcPts val="0"/>
-              </a:spcBef>
-              <a:spcAft>
-                <a:spcPts val="0"/>
-              </a:spcAft>
-              <a:buClrTx/>
-              <a:buSzTx/>
-              <a:buFontTx/>
-              <a:buNone/>
-              <a:tabLst/>
-              <a:defRPr>
-                <a:latin typeface="微软雅黑"/>
-                <a:ea typeface="微软雅黑"/>
-              </a:defRPr>
-            </a:pPr>
-            <a:endParaRPr kumimoji="0" sz="1800" b="0" i="0" u="none" strike="noStrike" kern="1200" cap="none" spc="0" normalizeH="0" baseline="0" noProof="0">
-              <a:ln>
-                <a:noFill/>
-              </a:ln>
-              <a:solidFill>
-                <a:prstClr val="white"/>
-              </a:solidFill>
-              <a:effectLst/>
-              <a:uLnTx/>
-              <a:uFillTx/>
-              <a:latin typeface="等线"/>
-              <a:ea typeface="+mn-ea"/>
-              <a:cs typeface="+mn-cs"/>
-            </a:endParaRPr>
-          </a:p>
-        </p:txBody>
-      </p:sp>
-      <p:sp>
-        <p:nvSpPr>
-          <p:cNvPr id="41" name="Rectangle 40"/>
-          <p:cNvSpPr/>
-          <p:nvPr/>
-        </p:nvSpPr>
-        <p:spPr>
-          <a:xfrm>
-            <a:off x="429767" y="5650992"/>
-            <a:ext cx="64008" cy="457200"/>
-          </a:xfrm>
-          <a:prstGeom prst="rect">
-            <a:avLst/>
-          </a:prstGeom>
-          <a:solidFill>
-            <a:srgbClr val="D6A000"/>
-          </a:solidFill>
-          <a:ln>
-            <a:noFill/>
-          </a:ln>
-          <a:effectLst/>
-        </p:spPr>
-        <p:style>
-          <a:lnRef idx="1">
-            <a:schemeClr val="accent1"/>
-          </a:lnRef>
-          <a:fillRef idx="3">
-            <a:schemeClr val="accent1"/>
-          </a:fillRef>
-          <a:effectRef idx="2">
-            <a:schemeClr val="accent1"/>
-          </a:effectRef>
-          <a:fontRef idx="minor">
-            <a:schemeClr val="lt1"/>
-          </a:fontRef>
-        </p:style>
-        <p:txBody>
-          <a:bodyPr rtlCol="0" anchor="ctr"/>
-          <a:lstStyle/>
-          <a:p>
-            <a:pPr marL="0" marR="0" lvl="0" indent="0" algn="ctr" defTabSz="914400" rtl="0" eaLnBrk="1" fontAlgn="auto" latinLnBrk="0" hangingPunct="1">
-              <a:lnSpc>
-                <a:spcPct val="100000"/>
-              </a:lnSpc>
-              <a:spcBef>
-                <a:spcPts val="0"/>
-              </a:spcBef>
-              <a:spcAft>
-                <a:spcPts val="0"/>
-              </a:spcAft>
-              <a:buClrTx/>
-              <a:buSzTx/>
-              <a:buFontTx/>
-              <a:buNone/>
-              <a:tabLst/>
-              <a:defRPr>
-                <a:latin typeface="微软雅黑"/>
-                <a:ea typeface="微软雅黑"/>
-              </a:defRPr>
-            </a:pPr>
-            <a:endParaRPr kumimoji="0" sz="1800" b="0" i="0" u="none" strike="noStrike" kern="1200" cap="none" spc="0" normalizeH="0" baseline="0" noProof="0">
-              <a:ln>
-                <a:noFill/>
-              </a:ln>
-              <a:solidFill>
-                <a:prstClr val="white"/>
-              </a:solidFill>
-              <a:effectLst/>
-              <a:uLnTx/>
-              <a:uFillTx/>
-              <a:latin typeface="等线"/>
-              <a:ea typeface="+mn-ea"/>
-              <a:cs typeface="+mn-cs"/>
-            </a:endParaRPr>
-          </a:p>
-        </p:txBody>
-      </p:sp>
-      <p:sp>
-        <p:nvSpPr>
-          <p:cNvPr id="42" name="TextBox 41"/>
-          <p:cNvSpPr txBox="1"/>
-          <p:nvPr/>
-        </p:nvSpPr>
-        <p:spPr>
-          <a:xfrm>
-            <a:off x="603503" y="5724144"/>
-            <a:ext cx="4059936" cy="329184"/>
-          </a:xfrm>
-          <a:prstGeom prst="rect">
-            <a:avLst/>
-          </a:prstGeom>
-          <a:noFill/>
-        </p:spPr>
-        <p:txBody>
-          <a:bodyPr wrap="square" anchor="t">
-            <a:spAutoFit/>
-          </a:bodyPr>
-          <a:lstStyle/>
-          <a:p>
-            <a:pPr marL="0" marR="0" lvl="0" indent="0" algn="l" defTabSz="914400" rtl="0" eaLnBrk="1" fontAlgn="auto" latinLnBrk="0" hangingPunct="1">
-              <a:lnSpc>
-                <a:spcPct val="100000"/>
-              </a:lnSpc>
-              <a:spcBef>
-                <a:spcPts val="0"/>
-              </a:spcBef>
-              <a:spcAft>
-                <a:spcPts val="0"/>
-              </a:spcAft>
-              <a:buClrTx/>
-              <a:buSzTx/>
-              <a:buFontTx/>
-              <a:buNone/>
-              <a:tabLst/>
-              <a:defRPr>
-                <a:latin typeface="微软雅黑"/>
-                <a:ea typeface="微软雅黑"/>
-              </a:defRPr>
-            </a:pPr>
-            <a:r>
-              <a:rPr lang="zh-CN" sz="950" b="1">
-                <a:solidFill>
-                  <a:srgbClr val="0A0A0A"/>
-                </a:solidFill>
-                <a:latin typeface="微软雅黑"/>
-                <a:ea typeface="微软雅黑"/>
-              </a:rPr>
-              <a:t>双方识别高度重合；Finv 在保持 98.5% illion 覆盖的同时，实现更高整体覆盖。</a:t>
             </a:r>
           </a:p>
         </p:txBody>
@@ -21485,7 +21563,7 @@
         </p:nvSpPr>
         <p:spPr>
           <a:xfrm>
-            <a:off x="4681727" y="4425696"/>
+            <a:off x="4681727" y="4407154"/>
             <a:ext cx="6958584" cy="274320"/>
           </a:xfrm>
           <a:prstGeom prst="rect">
@@ -21562,7 +21640,7 @@
         </p:nvSpPr>
         <p:spPr>
           <a:xfrm>
-            <a:off x="4681727" y="4425696"/>
+            <a:off x="4681727" y="4407154"/>
             <a:ext cx="76200" cy="228600"/>
           </a:xfrm>
           <a:prstGeom prst="rect">
@@ -21639,7 +21717,7 @@
         </p:nvSpPr>
         <p:spPr>
           <a:xfrm>
-            <a:off x="4809743" y="4462272"/>
+            <a:off x="4809743" y="4443730"/>
             <a:ext cx="6775704" cy="219456"/>
           </a:xfrm>
           <a:prstGeom prst="rect">
@@ -21964,7 +22042,7 @@
         </p:nvSpPr>
         <p:spPr>
           <a:xfrm>
-            <a:off x="4681727" y="6327647"/>
+            <a:off x="4718304" y="6453632"/>
             <a:ext cx="6958584" cy="274320"/>
           </a:xfrm>
           <a:prstGeom prst="rect">
@@ -22041,7 +22119,7 @@
         </p:nvSpPr>
         <p:spPr>
           <a:xfrm>
-            <a:off x="4681727" y="6327647"/>
+            <a:off x="4718304" y="6453632"/>
             <a:ext cx="76200" cy="228600"/>
           </a:xfrm>
           <a:prstGeom prst="rect">
@@ -22118,7 +22196,7 @@
         </p:nvSpPr>
         <p:spPr>
           <a:xfrm>
-            <a:off x="4809743" y="6364223"/>
+            <a:off x="4846320" y="6490208"/>
             <a:ext cx="6775704" cy="219456"/>
           </a:xfrm>
           <a:prstGeom prst="rect">
@@ -22180,7 +22258,7 @@
         </p:nvSpPr>
         <p:spPr>
           <a:xfrm>
-            <a:off x="841248" y="1609344"/>
+            <a:off x="498349" y="2470405"/>
             <a:ext cx="2578608" cy="2578608"/>
           </a:xfrm>
           <a:prstGeom prst="ellipse">
@@ -22229,7 +22307,7 @@
         </p:nvSpPr>
         <p:spPr>
           <a:xfrm>
-            <a:off x="1947671" y="1609344"/>
+            <a:off x="1604772" y="2470405"/>
             <a:ext cx="2487168" cy="2487168"/>
           </a:xfrm>
           <a:prstGeom prst="ellipse">
@@ -22278,7 +22356,7 @@
         </p:nvSpPr>
         <p:spPr>
           <a:xfrm>
-            <a:off x="841248" y="1298448"/>
+            <a:off x="841248" y="1954785"/>
             <a:ext cx="1463040" cy="402336"/>
           </a:xfrm>
           <a:prstGeom prst="rect">
@@ -22327,7 +22405,7 @@
         </p:nvSpPr>
         <p:spPr>
           <a:xfrm>
-            <a:off x="2971799" y="1298448"/>
+            <a:off x="2711449" y="1930909"/>
             <a:ext cx="1463040" cy="402336"/>
           </a:xfrm>
           <a:prstGeom prst="rect">
@@ -22343,7 +22421,7 @@
           <a:p>
             <a:pPr algn="r"/>
             <a:r>
-              <a:rPr lang="zh-CN" sz="900" b="1">
+              <a:rPr lang="zh-CN" sz="900" b="1" dirty="0">
                 <a:solidFill>
                   <a:srgbClr val="D6A000"/>
                 </a:solidFill>
@@ -22356,7 +22434,7 @@
           <a:p>
             <a:pPr algn="r"/>
             <a:r>
-              <a:rPr lang="zh-CN" sz="800" b="0">
+              <a:rPr lang="zh-CN" sz="800" b="0" dirty="0">
                 <a:solidFill>
                   <a:srgbClr val="606060"/>
                 </a:solidFill>
@@ -22376,7 +22454,7 @@
         </p:nvSpPr>
         <p:spPr>
           <a:xfrm>
-            <a:off x="987552" y="2743200"/>
+            <a:off x="644653" y="3604261"/>
             <a:ext cx="822960" cy="365760"/>
           </a:xfrm>
           <a:prstGeom prst="rect">
@@ -22426,7 +22504,7 @@
         </p:nvSpPr>
         <p:spPr>
           <a:xfrm>
-            <a:off x="3520440" y="2743200"/>
+            <a:off x="3177541" y="3604261"/>
             <a:ext cx="822960" cy="365760"/>
           </a:xfrm>
           <a:prstGeom prst="rect">
@@ -22476,7 +22554,7 @@
         </p:nvSpPr>
         <p:spPr>
           <a:xfrm>
-            <a:off x="2276856" y="2670048"/>
+            <a:off x="1933957" y="3531109"/>
             <a:ext cx="822960" cy="365760"/>
           </a:xfrm>
           <a:prstGeom prst="rect">
@@ -22564,7 +22642,7 @@
         </p:nvSpPr>
         <p:spPr>
           <a:xfrm>
-            <a:off x="429768" y="4480560"/>
+            <a:off x="841247" y="5200904"/>
             <a:ext cx="1965960" cy="822960"/>
           </a:xfrm>
           <a:prstGeom prst="rect">
@@ -22638,7 +22716,7 @@
         </p:nvSpPr>
         <p:spPr>
           <a:xfrm>
-            <a:off x="2560320" y="4480560"/>
+            <a:off x="2971799" y="5200904"/>
             <a:ext cx="1965960" cy="822960"/>
           </a:xfrm>
           <a:prstGeom prst="rect">

--- a/银行流水分享_V2.0.pptx
+++ b/银行流水分享_V2.0.pptx
@@ -10125,7 +10125,7 @@
         <p:spPr>
           <a:xfrm>
             <a:off x="803844" y="4059936"/>
-            <a:ext cx="1197864" cy="347472"/>
+            <a:ext cx="1280160" cy="347472"/>
           </a:xfrm>
           <a:prstGeom prst="rect">
             <a:avLst/>
@@ -10144,29 +10144,18 @@
               </a:lnSpc>
             </a:pPr>
             <a:r>
-              <a:rPr lang="zh-CN" sz="800" b="0">
+              <a:rPr sz="1000" b="1">
                 <a:solidFill>
-                  <a:srgbClr val="1F4E79"/>
+                  <a:srgbClr val="0A0A0A"/>
                 </a:solidFill>
-                <a:latin typeface="微软雅黑"/>
-                <a:ea typeface="微软雅黑"/>
               </a:rPr>
               <a:t>平均月还款金额</a:t>
             </a:r>
-          </a:p>
-          <a:p>
-            <a:pPr>
-              <a:lnSpc>
-                <a:spcPct val="100000"/>
-              </a:lnSpc>
-            </a:pPr>
             <a:r>
-              <a:rPr lang="zh-CN" sz="1200" b="1">
+              <a:rPr sz="800" b="0">
                 <a:solidFill>
-                  <a:srgbClr val="1F4E79"/>
+                  <a:srgbClr val="606060"/>
                 </a:solidFill>
-                <a:latin typeface="微软雅黑"/>
-                <a:ea typeface="微软雅黑"/>
               </a:rPr>
               <a:t>A$428</a:t>
             </a:r>
@@ -10182,7 +10171,7 @@
         <p:spPr>
           <a:xfrm>
             <a:off x="2074860" y="4059936"/>
-            <a:ext cx="1197864" cy="347472"/>
+            <a:ext cx="1280160" cy="347472"/>
           </a:xfrm>
           <a:prstGeom prst="rect">
             <a:avLst/>
@@ -10201,29 +10190,18 @@
               </a:lnSpc>
             </a:pPr>
             <a:r>
-              <a:rPr lang="zh-CN" sz="800" b="0">
+              <a:rPr sz="1000" b="1">
                 <a:solidFill>
-                  <a:srgbClr val="1F4E79"/>
+                  <a:srgbClr val="0A0A0A"/>
                 </a:solidFill>
-                <a:latin typeface="微软雅黑"/>
-                <a:ea typeface="微软雅黑"/>
               </a:rPr>
               <a:t>预计待还金额</a:t>
             </a:r>
-          </a:p>
-          <a:p>
-            <a:pPr>
-              <a:lnSpc>
-                <a:spcPct val="100000"/>
-              </a:lnSpc>
-            </a:pPr>
             <a:r>
-              <a:rPr lang="zh-CN" sz="1200" b="1">
+              <a:rPr sz="800" b="0">
                 <a:solidFill>
-                  <a:srgbClr val="1F4E79"/>
+                  <a:srgbClr val="606060"/>
                 </a:solidFill>
-                <a:latin typeface="微软雅黑"/>
-                <a:ea typeface="微软雅黑"/>
               </a:rPr>
               <a:t>A$1,016</a:t>
             </a:r>
@@ -10239,7 +10217,7 @@
         <p:spPr>
           <a:xfrm>
             <a:off x="3345876" y="4059936"/>
-            <a:ext cx="1197864" cy="347472"/>
+            <a:ext cx="1280160" cy="347472"/>
           </a:xfrm>
           <a:prstGeom prst="rect">
             <a:avLst/>
@@ -10258,29 +10236,18 @@
               </a:lnSpc>
             </a:pPr>
             <a:r>
-              <a:rPr lang="zh-CN" sz="800" b="0">
+              <a:rPr sz="1000" b="1">
                 <a:solidFill>
-                  <a:srgbClr val="1F4E79"/>
+                  <a:srgbClr val="0A0A0A"/>
                 </a:solidFill>
-                <a:latin typeface="微软雅黑"/>
-                <a:ea typeface="微软雅黑"/>
               </a:rPr>
               <a:t>贷款机构数量</a:t>
             </a:r>
-          </a:p>
-          <a:p>
-            <a:pPr>
-              <a:lnSpc>
-                <a:spcPct val="100000"/>
-              </a:lnSpc>
-            </a:pPr>
             <a:r>
-              <a:rPr lang="zh-CN" sz="1200" b="1">
+              <a:rPr sz="800" b="0">
                 <a:solidFill>
-                  <a:srgbClr val="1F4E79"/>
+                  <a:srgbClr val="606060"/>
                 </a:solidFill>
-                <a:latin typeface="微软雅黑"/>
-                <a:ea typeface="微软雅黑"/>
               </a:rPr>
               <a:t>2 家</a:t>
             </a:r>
@@ -10296,7 +10263,7 @@
         <p:spPr>
           <a:xfrm>
             <a:off x="4616892" y="4059936"/>
-            <a:ext cx="1197864" cy="347472"/>
+            <a:ext cx="1280160" cy="347472"/>
           </a:xfrm>
           <a:prstGeom prst="rect">
             <a:avLst/>
@@ -10315,29 +10282,18 @@
               </a:lnSpc>
             </a:pPr>
             <a:r>
-              <a:rPr lang="zh-CN" sz="800" b="0">
+              <a:rPr sz="1000" b="1">
                 <a:solidFill>
-                  <a:srgbClr val="1F4E79"/>
+                  <a:srgbClr val="0A0A0A"/>
                 </a:solidFill>
-                <a:latin typeface="微软雅黑"/>
-                <a:ea typeface="微软雅黑"/>
               </a:rPr>
               <a:t>90 天借款金额</a:t>
             </a:r>
-          </a:p>
-          <a:p>
-            <a:pPr>
-              <a:lnSpc>
-                <a:spcPct val="100000"/>
-              </a:lnSpc>
-            </a:pPr>
             <a:r>
-              <a:rPr lang="zh-CN" sz="1200" b="1">
+              <a:rPr sz="800" b="0">
                 <a:solidFill>
-                  <a:srgbClr val="1F4E79"/>
+                  <a:srgbClr val="606060"/>
                 </a:solidFill>
-                <a:latin typeface="微软雅黑"/>
-                <a:ea typeface="微软雅黑"/>
               </a:rPr>
               <a:t>A$2,300</a:t>
             </a:r>
@@ -10960,183 +10916,13 @@
       </p:sp>
       <p:sp>
         <p:nvSpPr>
-          <p:cNvPr id="90" name="Fa-prog-lab"/>
-          <p:cNvSpPr txBox="1"/>
-          <p:nvPr/>
-        </p:nvSpPr>
-        <p:spPr>
-          <a:xfrm>
-            <a:off x="6454836" y="4352544"/>
-            <a:ext cx="914400" cy="164592"/>
-          </a:xfrm>
-          <a:prstGeom prst="rect">
-            <a:avLst/>
-          </a:prstGeom>
-          <a:noFill/>
-        </p:spPr>
-        <p:txBody>
-          <a:bodyPr wrap="square" lIns="0" tIns="0" rIns="0" bIns="0">
-            <a:noAutofit/>
-          </a:bodyPr>
-          <a:lstStyle/>
-          <a:p>
-            <a:pPr>
-              <a:lnSpc>
-                <a:spcPct val="100000"/>
-              </a:lnSpc>
-            </a:pPr>
-            <a:r>
-              <a:rPr lang="zh-CN" sz="800" b="0" dirty="0">
-                <a:solidFill>
-                  <a:srgbClr val="606060"/>
-                </a:solidFill>
-                <a:latin typeface="微软雅黑"/>
-                <a:ea typeface="微软雅黑"/>
-              </a:rPr>
-              <a:t>还款进度</a:t>
-            </a:r>
-          </a:p>
-        </p:txBody>
-      </p:sp>
-      <p:sp>
-        <p:nvSpPr>
-          <p:cNvPr id="91" name="Fa-prog-pct"/>
-          <p:cNvSpPr txBox="1"/>
-          <p:nvPr/>
-        </p:nvSpPr>
-        <p:spPr>
-          <a:xfrm>
-            <a:off x="10889676" y="4334256"/>
-            <a:ext cx="576072" cy="182880"/>
-          </a:xfrm>
-          <a:prstGeom prst="rect">
-            <a:avLst/>
-          </a:prstGeom>
-          <a:noFill/>
-        </p:spPr>
-        <p:txBody>
-          <a:bodyPr wrap="square" lIns="0" tIns="0" rIns="0" bIns="0">
-            <a:noAutofit/>
-          </a:bodyPr>
-          <a:lstStyle/>
-          <a:p>
-            <a:pPr algn="r">
-              <a:lnSpc>
-                <a:spcPct val="100000"/>
-              </a:lnSpc>
-            </a:pPr>
-            <a:r>
-              <a:rPr lang="zh-CN" sz="1200" b="1">
-                <a:solidFill>
-                  <a:srgbClr val="D6A000"/>
-                </a:solidFill>
-                <a:latin typeface="微软雅黑"/>
-                <a:ea typeface="微软雅黑"/>
-              </a:rPr>
-              <a:t>62%</a:t>
-            </a:r>
-          </a:p>
-        </p:txBody>
-      </p:sp>
-      <p:sp>
-        <p:nvSpPr>
-          <p:cNvPr id="92" name="Fa-prog-bar"/>
-          <p:cNvSpPr/>
-          <p:nvPr/>
-        </p:nvSpPr>
-        <p:spPr>
-          <a:xfrm>
-            <a:off x="6454836" y="4535424"/>
-            <a:ext cx="5010912" cy="128016"/>
-          </a:xfrm>
-          <a:prstGeom prst="rect">
-            <a:avLst/>
-          </a:prstGeom>
-          <a:solidFill>
-            <a:srgbClr val="E0E0E0"/>
-          </a:solidFill>
-          <a:ln>
-            <a:noFill/>
-          </a:ln>
-          <a:effectLst/>
-        </p:spPr>
-        <p:style>
-          <a:lnRef idx="1">
-            <a:schemeClr val="accent1"/>
-          </a:lnRef>
-          <a:fillRef idx="3">
-            <a:schemeClr val="accent1"/>
-          </a:fillRef>
-          <a:effectRef idx="2">
-            <a:schemeClr val="accent1"/>
-          </a:effectRef>
-          <a:fontRef idx="minor">
-            <a:schemeClr val="lt1"/>
-          </a:fontRef>
-        </p:style>
-        <p:txBody>
-          <a:bodyPr rtlCol="0" anchor="ctr"/>
-          <a:lstStyle/>
-          <a:p>
-            <a:pPr algn="ctr"/>
-            <a:endParaRPr/>
-          </a:p>
-        </p:txBody>
-      </p:sp>
-      <p:sp>
-        <p:nvSpPr>
-          <p:cNvPr id="93" name="Fa-prog-fill"/>
-          <p:cNvSpPr/>
-          <p:nvPr/>
-        </p:nvSpPr>
-        <p:spPr>
-          <a:xfrm>
-            <a:off x="6454836" y="4535424"/>
-            <a:ext cx="3126809" cy="128016"/>
-          </a:xfrm>
-          <a:prstGeom prst="rect">
-            <a:avLst/>
-          </a:prstGeom>
-          <a:solidFill>
-            <a:srgbClr val="D6A000"/>
-          </a:solidFill>
-          <a:ln>
-            <a:noFill/>
-          </a:ln>
-          <a:effectLst/>
-        </p:spPr>
-        <p:style>
-          <a:lnRef idx="1">
-            <a:schemeClr val="accent1"/>
-          </a:lnRef>
-          <a:fillRef idx="3">
-            <a:schemeClr val="accent1"/>
-          </a:fillRef>
-          <a:effectRef idx="2">
-            <a:schemeClr val="accent1"/>
-          </a:effectRef>
-          <a:fontRef idx="minor">
-            <a:schemeClr val="lt1"/>
-          </a:fontRef>
-        </p:style>
-        <p:txBody>
-          <a:bodyPr rtlCol="0" anchor="ctr"/>
-          <a:lstStyle/>
-          <a:p>
-            <a:pPr algn="ctr"/>
-            <a:endParaRPr/>
-          </a:p>
-        </p:txBody>
-      </p:sp>
-      <p:sp>
-        <p:nvSpPr>
           <p:cNvPr id="94" name="Fa-g1-t"/>
           <p:cNvSpPr txBox="1"/>
           <p:nvPr/>
         </p:nvSpPr>
         <p:spPr>
           <a:xfrm>
-            <a:off x="6454836" y="4773168"/>
+            <a:off x="6454836" y="4498848"/>
             <a:ext cx="1609344" cy="146304"/>
           </a:xfrm>
           <a:prstGeom prst="rect">
@@ -11176,8 +10962,8 @@
         </p:nvSpPr>
         <p:spPr>
           <a:xfrm>
-            <a:off x="6454836" y="4919472"/>
-            <a:ext cx="1609344" cy="173736"/>
+            <a:off x="6454836" y="4645152"/>
+            <a:ext cx="1609344" cy="182880"/>
           </a:xfrm>
           <a:prstGeom prst="rect">
             <a:avLst/>
@@ -11196,22 +10982,18 @@
               </a:lnSpc>
             </a:pPr>
             <a:r>
-              <a:rPr lang="zh-CN" sz="800" b="0">
+              <a:rPr sz="1000" b="1">
                 <a:solidFill>
-                  <a:srgbClr val="1F4E79"/>
+                  <a:srgbClr val="0A0A0A"/>
                 </a:solidFill>
-                <a:latin typeface="微软雅黑"/>
-                <a:ea typeface="微软雅黑"/>
               </a:rPr>
-              <a:t>月还款 </a:t>
+              <a:t>月还款</a:t>
             </a:r>
             <a:r>
-              <a:rPr lang="zh-CN" sz="900" b="0">
+              <a:rPr sz="800" b="0">
                 <a:solidFill>
-                  <a:srgbClr val="3D3C3A"/>
+                  <a:srgbClr val="606060"/>
                 </a:solidFill>
-                <a:latin typeface="微软雅黑"/>
-                <a:ea typeface="微软雅黑"/>
               </a:rPr>
               <a:t>约 A$338</a:t>
             </a:r>
@@ -11226,8 +11008,8 @@
         </p:nvSpPr>
         <p:spPr>
           <a:xfrm>
-            <a:off x="6454836" y="5065776"/>
-            <a:ext cx="1609344" cy="173736"/>
+            <a:off x="6454836" y="4791456"/>
+            <a:ext cx="1609344" cy="182880"/>
           </a:xfrm>
           <a:prstGeom prst="rect">
             <a:avLst/>
@@ -11246,22 +11028,18 @@
               </a:lnSpc>
             </a:pPr>
             <a:r>
-              <a:rPr lang="zh-CN" sz="800" b="0">
+              <a:rPr sz="1000" b="1">
                 <a:solidFill>
-                  <a:srgbClr val="1F4E79"/>
+                  <a:srgbClr val="0A0A0A"/>
                 </a:solidFill>
-                <a:latin typeface="微软雅黑"/>
-                <a:ea typeface="微软雅黑"/>
               </a:rPr>
-              <a:t>每两周 </a:t>
+              <a:t>每两周</a:t>
             </a:r>
             <a:r>
-              <a:rPr lang="zh-CN" sz="900" b="0">
+              <a:rPr sz="800" b="0">
                 <a:solidFill>
-                  <a:srgbClr val="3D3C3A"/>
+                  <a:srgbClr val="606060"/>
                 </a:solidFill>
-                <a:latin typeface="微软雅黑"/>
-                <a:ea typeface="微软雅黑"/>
               </a:rPr>
               <a:t>A$156</a:t>
             </a:r>
@@ -11276,8 +11054,8 @@
         </p:nvSpPr>
         <p:spPr>
           <a:xfrm>
-            <a:off x="6454836" y="5212080"/>
-            <a:ext cx="1609344" cy="173736"/>
+            <a:off x="6454836" y="4937760"/>
+            <a:ext cx="1609344" cy="182880"/>
           </a:xfrm>
           <a:prstGeom prst="rect">
             <a:avLst/>
@@ -11296,22 +11074,18 @@
               </a:lnSpc>
             </a:pPr>
             <a:r>
-              <a:rPr lang="zh-CN" sz="800" b="0">
+              <a:rPr sz="1000" b="1">
                 <a:solidFill>
-                  <a:srgbClr val="1F4E79"/>
+                  <a:srgbClr val="0A0A0A"/>
                 </a:solidFill>
-                <a:latin typeface="微软雅黑"/>
-                <a:ea typeface="微软雅黑"/>
               </a:rPr>
-              <a:t>90 天还款 </a:t>
+              <a:t>90 天还款</a:t>
             </a:r>
             <a:r>
-              <a:rPr lang="zh-CN" sz="900" b="0">
+              <a:rPr sz="800" b="0">
                 <a:solidFill>
-                  <a:srgbClr val="3D3C3A"/>
+                  <a:srgbClr val="606060"/>
                 </a:solidFill>
-                <a:latin typeface="微软雅黑"/>
-                <a:ea typeface="微软雅黑"/>
               </a:rPr>
               <a:t>6 次</a:t>
             </a:r>
@@ -11326,7 +11100,7 @@
         </p:nvSpPr>
         <p:spPr>
           <a:xfrm>
-            <a:off x="8173908" y="4773168"/>
+            <a:off x="8173908" y="4498848"/>
             <a:ext cx="1609344" cy="146304"/>
           </a:xfrm>
           <a:prstGeom prst="rect">
@@ -11366,8 +11140,8 @@
         </p:nvSpPr>
         <p:spPr>
           <a:xfrm>
-            <a:off x="8173908" y="4919472"/>
-            <a:ext cx="1609344" cy="173736"/>
+            <a:off x="8173908" y="4645152"/>
+            <a:ext cx="1609344" cy="182880"/>
           </a:xfrm>
           <a:prstGeom prst="rect">
             <a:avLst/>
@@ -11386,22 +11160,18 @@
               </a:lnSpc>
             </a:pPr>
             <a:r>
-              <a:rPr lang="zh-CN" sz="800" b="0">
+              <a:rPr sz="1000" b="1">
                 <a:solidFill>
-                  <a:srgbClr val="1F4E79"/>
+                  <a:srgbClr val="0A0A0A"/>
                 </a:solidFill>
-                <a:latin typeface="微软雅黑"/>
-                <a:ea typeface="微软雅黑"/>
               </a:rPr>
-              <a:t>轻微逾期 </a:t>
+              <a:t>轻微逾期</a:t>
             </a:r>
             <a:r>
-              <a:rPr lang="zh-CN" sz="1200" b="1">
+              <a:rPr sz="800" b="0">
                 <a:solidFill>
-                  <a:srgbClr val="D6A000"/>
+                  <a:srgbClr val="606060"/>
                 </a:solidFill>
-                <a:latin typeface="微软雅黑"/>
-                <a:ea typeface="微软雅黑"/>
               </a:rPr>
               <a:t>1 次</a:t>
             </a:r>
@@ -11416,8 +11186,8 @@
         </p:nvSpPr>
         <p:spPr>
           <a:xfrm>
-            <a:off x="8173908" y="5065776"/>
-            <a:ext cx="1609344" cy="173736"/>
+            <a:off x="8173908" y="4791456"/>
+            <a:ext cx="1609344" cy="182880"/>
           </a:xfrm>
           <a:prstGeom prst="rect">
             <a:avLst/>
@@ -11436,22 +11206,18 @@
               </a:lnSpc>
             </a:pPr>
             <a:r>
-              <a:rPr lang="zh-CN" sz="800" b="0">
+              <a:rPr sz="1000" b="1">
                 <a:solidFill>
-                  <a:srgbClr val="1F4E79"/>
+                  <a:srgbClr val="0A0A0A"/>
                 </a:solidFill>
-                <a:latin typeface="微软雅黑"/>
-                <a:ea typeface="微软雅黑"/>
               </a:rPr>
-              <a:t>扣款失败 </a:t>
+              <a:t>扣款失败</a:t>
             </a:r>
             <a:r>
-              <a:rPr lang="zh-CN" sz="900" b="0">
+              <a:rPr sz="800" b="0">
                 <a:solidFill>
-                  <a:srgbClr val="3D3C3A"/>
+                  <a:srgbClr val="606060"/>
                 </a:solidFill>
-                <a:latin typeface="微软雅黑"/>
-                <a:ea typeface="微软雅黑"/>
               </a:rPr>
               <a:t>1 次</a:t>
             </a:r>
@@ -11466,8 +11232,8 @@
         </p:nvSpPr>
         <p:spPr>
           <a:xfrm>
-            <a:off x="8173908" y="5358384"/>
-            <a:ext cx="1609344" cy="173736"/>
+            <a:off x="8173908" y="5084064"/>
+            <a:ext cx="1609344" cy="182880"/>
           </a:xfrm>
           <a:prstGeom prst="rect">
             <a:avLst/>
@@ -11486,22 +11252,18 @@
               </a:lnSpc>
             </a:pPr>
             <a:r>
-              <a:rPr lang="zh-CN" sz="800" b="0">
+              <a:rPr sz="1000" b="1">
                 <a:solidFill>
-                  <a:srgbClr val="1F4E79"/>
+                  <a:srgbClr val="0A0A0A"/>
                 </a:solidFill>
-                <a:latin typeface="微软雅黑"/>
-                <a:ea typeface="微软雅黑"/>
               </a:rPr>
-              <a:t>还款中断 </a:t>
+              <a:t>还款中断</a:t>
             </a:r>
             <a:r>
-              <a:rPr lang="zh-CN" sz="900" b="0">
+              <a:rPr sz="800" b="0">
                 <a:solidFill>
-                  <a:srgbClr val="3D3C3A"/>
+                  <a:srgbClr val="606060"/>
                 </a:solidFill>
-                <a:latin typeface="微软雅黑"/>
-                <a:ea typeface="微软雅黑"/>
               </a:rPr>
               <a:t>无</a:t>
             </a:r>
@@ -11516,8 +11278,8 @@
         </p:nvSpPr>
         <p:spPr>
           <a:xfrm>
-            <a:off x="8173908" y="5504688"/>
-            <a:ext cx="1609344" cy="173736"/>
+            <a:off x="8173908" y="5230368"/>
+            <a:ext cx="1609344" cy="182880"/>
           </a:xfrm>
           <a:prstGeom prst="rect">
             <a:avLst/>
@@ -11536,22 +11298,18 @@
               </a:lnSpc>
             </a:pPr>
             <a:r>
-              <a:rPr lang="zh-CN" sz="800" b="0">
+              <a:rPr sz="1000" b="1">
                 <a:solidFill>
-                  <a:srgbClr val="1F4E79"/>
+                  <a:srgbClr val="0A0A0A"/>
                 </a:solidFill>
-                <a:latin typeface="微软雅黑"/>
-                <a:ea typeface="微软雅黑"/>
               </a:rPr>
-              <a:t>连续正常还款 </a:t>
+              <a:t>连续正常还款</a:t>
             </a:r>
             <a:r>
-              <a:rPr lang="zh-CN" sz="900" b="0">
+              <a:rPr sz="800" b="0">
                 <a:solidFill>
-                  <a:srgbClr val="3D3C3A"/>
+                  <a:srgbClr val="606060"/>
                 </a:solidFill>
-                <a:latin typeface="微软雅黑"/>
-                <a:ea typeface="微软雅黑"/>
               </a:rPr>
               <a:t>5 期</a:t>
             </a:r>
@@ -11566,7 +11324,7 @@
         </p:nvSpPr>
         <p:spPr>
           <a:xfrm>
-            <a:off x="9892980" y="4773168"/>
+            <a:off x="9892980" y="4498848"/>
             <a:ext cx="1609344" cy="146304"/>
           </a:xfrm>
           <a:prstGeom prst="rect">
@@ -11607,7 +11365,7 @@
         <p:spPr>
           <a:xfrm>
             <a:off x="803844" y="4901184"/>
-            <a:ext cx="1371600" cy="347472"/>
+            <a:ext cx="1463040" cy="347472"/>
           </a:xfrm>
           <a:prstGeom prst="rect">
             <a:avLst/>
@@ -11626,29 +11384,18 @@
               </a:lnSpc>
             </a:pPr>
             <a:r>
-              <a:rPr lang="zh-CN" sz="800" b="0">
+              <a:rPr sz="1000" b="1">
                 <a:solidFill>
-                  <a:srgbClr val="1F4E79"/>
+                  <a:srgbClr val="0A0A0A"/>
                 </a:solidFill>
-                <a:latin typeface="微软雅黑"/>
-                <a:ea typeface="微软雅黑"/>
               </a:rPr>
               <a:t>90 天还款金额</a:t>
             </a:r>
-          </a:p>
-          <a:p>
-            <a:pPr>
-              <a:lnSpc>
-                <a:spcPct val="100000"/>
-              </a:lnSpc>
-            </a:pPr>
             <a:r>
-              <a:rPr lang="zh-CN" sz="1100" b="0">
+              <a:rPr sz="800" b="0">
                 <a:solidFill>
-                  <a:srgbClr val="3D3C3A"/>
+                  <a:srgbClr val="606060"/>
                 </a:solidFill>
-                <a:latin typeface="微软雅黑"/>
-                <a:ea typeface="微软雅黑"/>
               </a:rPr>
               <a:t>A$1,284</a:t>
             </a:r>
@@ -11664,7 +11411,7 @@
         <p:spPr>
           <a:xfrm>
             <a:off x="2074860" y="4901184"/>
-            <a:ext cx="1371600" cy="347472"/>
+            <a:ext cx="1463040" cy="347472"/>
           </a:xfrm>
           <a:prstGeom prst="rect">
             <a:avLst/>
@@ -11683,29 +11430,18 @@
               </a:lnSpc>
             </a:pPr>
             <a:r>
-              <a:rPr lang="zh-CN" sz="800" b="0">
+              <a:rPr sz="1000" b="1">
                 <a:solidFill>
-                  <a:srgbClr val="1F4E79"/>
+                  <a:srgbClr val="0A0A0A"/>
                 </a:solidFill>
-                <a:latin typeface="微软雅黑"/>
-                <a:ea typeface="微软雅黑"/>
               </a:rPr>
               <a:t>轻微逾期</a:t>
             </a:r>
-          </a:p>
-          <a:p>
-            <a:pPr>
-              <a:lnSpc>
-                <a:spcPct val="100000"/>
-              </a:lnSpc>
-            </a:pPr>
             <a:r>
-              <a:rPr lang="zh-CN" sz="1100" b="1">
+              <a:rPr sz="800" b="0">
                 <a:solidFill>
-                  <a:srgbClr val="3D3C3A"/>
+                  <a:srgbClr val="606060"/>
                 </a:solidFill>
-                <a:latin typeface="微软雅黑"/>
-                <a:ea typeface="微软雅黑"/>
               </a:rPr>
               <a:t>1 次</a:t>
             </a:r>
@@ -11721,7 +11457,7 @@
         <p:spPr>
           <a:xfrm>
             <a:off x="3345876" y="4901184"/>
-            <a:ext cx="1371600" cy="347472"/>
+            <a:ext cx="1463040" cy="347472"/>
           </a:xfrm>
           <a:prstGeom prst="rect">
             <a:avLst/>
@@ -11740,29 +11476,18 @@
               </a:lnSpc>
             </a:pPr>
             <a:r>
-              <a:rPr lang="zh-CN" sz="800" b="0">
+              <a:rPr sz="1000" b="1">
                 <a:solidFill>
-                  <a:srgbClr val="1F4E79"/>
+                  <a:srgbClr val="0A0A0A"/>
                 </a:solidFill>
-                <a:latin typeface="微软雅黑"/>
-                <a:ea typeface="微软雅黑"/>
               </a:rPr>
               <a:t>扣款失败</a:t>
             </a:r>
-          </a:p>
-          <a:p>
-            <a:pPr>
-              <a:lnSpc>
-                <a:spcPct val="100000"/>
-              </a:lnSpc>
-            </a:pPr>
             <a:r>
-              <a:rPr lang="zh-CN" sz="1100" b="0">
+              <a:rPr sz="800" b="0">
                 <a:solidFill>
-                  <a:srgbClr val="3D3C3A"/>
+                  <a:srgbClr val="606060"/>
                 </a:solidFill>
-                <a:latin typeface="微软雅黑"/>
-                <a:ea typeface="微软雅黑"/>
               </a:rPr>
               <a:t>1 次</a:t>
             </a:r>
@@ -11778,7 +11503,7 @@
         <p:spPr>
           <a:xfrm>
             <a:off x="803844" y="5303520"/>
-            <a:ext cx="1371600" cy="347472"/>
+            <a:ext cx="1463040" cy="347472"/>
           </a:xfrm>
           <a:prstGeom prst="rect">
             <a:avLst/>
@@ -11797,29 +11522,18 @@
               </a:lnSpc>
             </a:pPr>
             <a:r>
-              <a:rPr lang="zh-CN" sz="800" b="0" dirty="0">
+              <a:rPr sz="1000" b="1">
                 <a:solidFill>
-                  <a:srgbClr val="1F4E79"/>
+                  <a:srgbClr val="0A0A0A"/>
                 </a:solidFill>
-                <a:latin typeface="微软雅黑"/>
-                <a:ea typeface="微软雅黑"/>
               </a:rPr>
               <a:t>还款中断</a:t>
             </a:r>
-          </a:p>
-          <a:p>
-            <a:pPr>
-              <a:lnSpc>
-                <a:spcPct val="100000"/>
-              </a:lnSpc>
-            </a:pPr>
             <a:r>
-              <a:rPr lang="zh-CN" sz="1100" b="0" dirty="0">
+              <a:rPr sz="800" b="0">
                 <a:solidFill>
-                  <a:srgbClr val="3D3C3A"/>
+                  <a:srgbClr val="606060"/>
                 </a:solidFill>
-                <a:latin typeface="微软雅黑"/>
-                <a:ea typeface="微软雅黑"/>
               </a:rPr>
               <a:t>无</a:t>
             </a:r>
@@ -11835,7 +11549,7 @@
         <p:spPr>
           <a:xfrm>
             <a:off x="2074860" y="5303520"/>
-            <a:ext cx="1371600" cy="347472"/>
+            <a:ext cx="1463040" cy="347472"/>
           </a:xfrm>
           <a:prstGeom prst="rect">
             <a:avLst/>
@@ -11854,29 +11568,18 @@
               </a:lnSpc>
             </a:pPr>
             <a:r>
-              <a:rPr lang="zh-CN" sz="800" b="0" dirty="0">
+              <a:rPr sz="1000" b="1">
                 <a:solidFill>
-                  <a:srgbClr val="1F4E79"/>
+                  <a:srgbClr val="0A0A0A"/>
                 </a:solidFill>
-                <a:latin typeface="微软雅黑"/>
-                <a:ea typeface="微软雅黑"/>
               </a:rPr>
               <a:t>近 90 天新增借款</a:t>
             </a:r>
-          </a:p>
-          <a:p>
-            <a:pPr>
-              <a:lnSpc>
-                <a:spcPct val="100000"/>
-              </a:lnSpc>
-            </a:pPr>
             <a:r>
-              <a:rPr lang="zh-CN" sz="1100" b="0" dirty="0">
+              <a:rPr sz="800" b="0">
                 <a:solidFill>
-                  <a:srgbClr val="3D3C3A"/>
+                  <a:srgbClr val="606060"/>
                 </a:solidFill>
-                <a:latin typeface="微软雅黑"/>
-                <a:ea typeface="微软雅黑"/>
               </a:rPr>
               <a:t>1 笔</a:t>
             </a:r>
@@ -11891,8 +11594,8 @@
         </p:nvSpPr>
         <p:spPr>
           <a:xfrm>
-            <a:off x="6454836" y="5358384"/>
-            <a:ext cx="1609344" cy="146304"/>
+            <a:off x="6454836" y="5084064"/>
+            <a:ext cx="1609344" cy="182880"/>
           </a:xfrm>
           <a:prstGeom prst="rect">
             <a:avLst/>
@@ -11911,22 +11614,18 @@
               </a:lnSpc>
             </a:pPr>
             <a:r>
-              <a:rPr lang="zh-CN" sz="800" b="0">
+              <a:rPr sz="1000" b="1">
                 <a:solidFill>
-                  <a:srgbClr val="1F4E79"/>
+                  <a:srgbClr val="0A0A0A"/>
                 </a:solidFill>
-                <a:latin typeface="微软雅黑"/>
-                <a:ea typeface="微软雅黑"/>
               </a:rPr>
-              <a:t>预计剩余 </a:t>
+              <a:t>预计剩余</a:t>
             </a:r>
             <a:r>
-              <a:rPr lang="zh-CN" sz="900" b="0">
+              <a:rPr sz="800" b="0">
                 <a:solidFill>
-                  <a:srgbClr val="3D3C3A"/>
+                  <a:srgbClr val="606060"/>
                 </a:solidFill>
-                <a:latin typeface="微软雅黑"/>
-                <a:ea typeface="微软雅黑"/>
               </a:rPr>
               <a:t>4 期</a:t>
             </a:r>
@@ -11941,8 +11640,8 @@
         </p:nvSpPr>
         <p:spPr>
           <a:xfrm>
-            <a:off x="8173908" y="5212080"/>
-            <a:ext cx="1609344" cy="146304"/>
+            <a:off x="8173908" y="4937760"/>
+            <a:ext cx="1609344" cy="182880"/>
           </a:xfrm>
           <a:prstGeom prst="rect">
             <a:avLst/>
@@ -11961,22 +11660,18 @@
               </a:lnSpc>
             </a:pPr>
             <a:r>
-              <a:rPr lang="zh-CN" sz="800" b="0">
+              <a:rPr sz="1000" b="1">
                 <a:solidFill>
-                  <a:srgbClr val="1F4E79"/>
+                  <a:srgbClr val="0A0A0A"/>
                 </a:solidFill>
-                <a:latin typeface="微软雅黑"/>
-                <a:ea typeface="微软雅黑"/>
               </a:rPr>
-              <a:t>最长逾期 </a:t>
+              <a:t>最长逾期</a:t>
             </a:r>
             <a:r>
-              <a:rPr lang="zh-CN" sz="1200" b="1">
+              <a:rPr sz="800" b="0">
                 <a:solidFill>
-                  <a:srgbClr val="D6A000"/>
+                  <a:srgbClr val="606060"/>
                 </a:solidFill>
-                <a:latin typeface="微软雅黑"/>
-                <a:ea typeface="微软雅黑"/>
               </a:rPr>
               <a:t>3 天</a:t>
             </a:r>
@@ -11991,8 +11686,8 @@
         </p:nvSpPr>
         <p:spPr>
           <a:xfrm>
-            <a:off x="9892980" y="4919472"/>
-            <a:ext cx="1609344" cy="146304"/>
+            <a:off x="9892980" y="4645152"/>
+            <a:ext cx="1609344" cy="182880"/>
           </a:xfrm>
           <a:prstGeom prst="rect">
             <a:avLst/>
@@ -12011,22 +11706,18 @@
               </a:lnSpc>
             </a:pPr>
             <a:r>
-              <a:rPr lang="zh-CN" sz="800" b="0">
+              <a:rPr sz="1000" b="1">
                 <a:solidFill>
-                  <a:srgbClr val="1F4E79"/>
+                  <a:srgbClr val="0A0A0A"/>
                 </a:solidFill>
-                <a:latin typeface="微软雅黑"/>
-                <a:ea typeface="微软雅黑"/>
               </a:rPr>
-              <a:t>预计总还款 </a:t>
+              <a:t>预计总还款</a:t>
             </a:r>
             <a:r>
-              <a:rPr lang="zh-CN" sz="900" b="0">
+              <a:rPr sz="800" b="0">
                 <a:solidFill>
-                  <a:srgbClr val="3D3C3A"/>
+                  <a:srgbClr val="606060"/>
                 </a:solidFill>
-                <a:latin typeface="微软雅黑"/>
-                <a:ea typeface="微软雅黑"/>
               </a:rPr>
               <a:t>A$1,872</a:t>
             </a:r>
@@ -12041,8 +11732,8 @@
         </p:nvSpPr>
         <p:spPr>
           <a:xfrm>
-            <a:off x="9892980" y="5065776"/>
-            <a:ext cx="1609344" cy="146304"/>
+            <a:off x="9892980" y="4791456"/>
+            <a:ext cx="1609344" cy="182880"/>
           </a:xfrm>
           <a:prstGeom prst="rect">
             <a:avLst/>
@@ -12061,22 +11752,18 @@
               </a:lnSpc>
             </a:pPr>
             <a:r>
-              <a:rPr lang="zh-CN" sz="800" b="0">
+              <a:rPr sz="1000" b="1">
                 <a:solidFill>
-                  <a:srgbClr val="1F4E79"/>
+                  <a:srgbClr val="0A0A0A"/>
                 </a:solidFill>
-                <a:latin typeface="微软雅黑"/>
-                <a:ea typeface="微软雅黑"/>
               </a:rPr>
-              <a:t>融资成本 </a:t>
+              <a:t>融资成本</a:t>
             </a:r>
             <a:r>
-              <a:rPr lang="zh-CN" sz="900" b="0">
+              <a:rPr sz="800" b="0">
                 <a:solidFill>
-                  <a:srgbClr val="3D3C3A"/>
+                  <a:srgbClr val="606060"/>
                 </a:solidFill>
-                <a:latin typeface="微软雅黑"/>
-                <a:ea typeface="微软雅黑"/>
               </a:rPr>
               <a:t>A$372</a:t>
             </a:r>
@@ -12092,7 +11779,7 @@
         <p:spPr>
           <a:xfrm>
             <a:off x="3345876" y="5303520"/>
-            <a:ext cx="1371600" cy="347472"/>
+            <a:ext cx="1463040" cy="347472"/>
           </a:xfrm>
           <a:prstGeom prst="rect">
             <a:avLst/>
@@ -12106,36 +11793,26 @@
           <a:lstStyle/>
           <a:p>
             <a:r>
-              <a:rPr sz="800" dirty="0">
+              <a:rPr sz="1000" b="1">
                 <a:solidFill>
-                  <a:srgbClr val="1F4E79"/>
+                  <a:srgbClr val="0A0A0A"/>
                 </a:solidFill>
               </a:rPr>
-              <a:t>90 </a:t>
+              <a:t>90 天还款</a:t>
             </a:r>
             <a:r>
-              <a:rPr sz="800" dirty="0" err="1">
+              <a:rPr sz="800" b="0">
                 <a:solidFill>
-                  <a:srgbClr val="1F4E79"/>
+                  <a:srgbClr val="606060"/>
                 </a:solidFill>
               </a:rPr>
-              <a:t>天还款</a:t>
+              <a:t>9 次</a:t>
             </a:r>
             <a:endParaRPr sz="800" dirty="0">
               <a:solidFill>
                 <a:srgbClr val="1F4E79"/>
               </a:solidFill>
             </a:endParaRPr>
-          </a:p>
-          <a:p>
-            <a:r>
-              <a:rPr sz="1100" dirty="0">
-                <a:solidFill>
-                  <a:srgbClr val="3D3C3A"/>
-                </a:solidFill>
-              </a:rPr>
-              <a:t>9 次</a:t>
-            </a:r>
           </a:p>
         </p:txBody>
       </p:sp>

--- a/银行流水分享_V2.0.pptx
+++ b/银行流水分享_V2.0.pptx
@@ -17583,7 +17583,7 @@
         </p:nvGraphicFramePr>
         <p:xfrm>
           <a:off x="4681727" y="3108960"/>
-          <a:ext cx="7004304" cy="1225296"/>
+          <a:ext cx="7004304" cy="822960"/>
         </p:xfrm>
         <a:graphic>
           <a:graphicData uri="http://schemas.openxmlformats.org/drawingml/2006/table">
@@ -18423,7 +18423,7 @@
                           <a:latin typeface="微软雅黑"/>
                           <a:ea typeface="微软雅黑"/>
                         </a:rPr>
-                        <a:t>2026/05/11</a:t>
+                        <a:t>2026/07/20</a:t>
                       </a:r>
                     </a:p>
                   </a:txBody>
@@ -18558,7 +18558,52 @@
                           <a:latin typeface="微软雅黑"/>
                           <a:ea typeface="微软雅黑"/>
                         </a:rPr>
-                        <a:t>MONEYSPOT REPAY REF 3001876543</a:t>
+                        <a:t>MONEYSPOT REPAY REF 5009876543</a:t>
+                      </a:r>
+                    </a:p>
+                  </a:txBody>
+                  <a:tcPr marL="45720" marR="45720" marT="18288" marB="18288" anchor="ctr">
+                    <a:lnL>
+                      <a:noFill/>
+                    </a:lnL>
+                    <a:lnR>
+                      <a:noFill/>
+                    </a:lnR>
+                    <a:lnT w="9525" cap="flat" cmpd="sng" algn="ctr">
+                      <a:solidFill>
+                        <a:srgbClr val="D6D6D6"/>
+                      </a:solidFill>
+                      <a:prstDash val="solid"/>
+                      <a:round/>
+                      <a:headEnd type="none" w="med" len="med"/>
+                      <a:tailEnd type="none" w="med" len="med"/>
+                    </a:lnT>
+                    <a:lnB w="9525">
+                      <a:solidFill>
+                        <a:srgbClr val="D6D6D6"/>
+                      </a:solidFill>
+                    </a:lnB>
+                  </a:tcPr>
+                </a:tc>
+                <a:tc>
+                  <a:txBody>
+                    <a:bodyPr/>
+                    <a:lstStyle/>
+                    <a:p>
+                      <a:pPr algn="l">
+                        <a:lnSpc>
+                          <a:spcPct val="100000"/>
+                        </a:lnSpc>
+                        <a:spcAft>
+                          <a:spcPts val="0"/>
+                        </a:spcAft>
+                      </a:pPr>
+                      <a:r>
+                        <a:rPr sz="800" b="0">
+                          <a:latin typeface="微软雅黑"/>
+                          <a:ea typeface="微软雅黑"/>
+                        </a:rPr>
+                        <a:t>Non-SACC Loans</a:t>
                       </a:r>
                     </a:p>
                   </a:txBody>
@@ -18630,605 +18675,6 @@
                     </a:lnB>
                   </a:tcPr>
                 </a:tc>
-                <a:tc>
-                  <a:txBody>
-                    <a:bodyPr/>
-                    <a:lstStyle/>
-                    <a:p>
-                      <a:pPr algn="l">
-                        <a:lnSpc>
-                          <a:spcPct val="100000"/>
-                        </a:lnSpc>
-                        <a:spcAft>
-                          <a:spcPts val="0"/>
-                        </a:spcAft>
-                      </a:pPr>
-                      <a:r>
-                        <a:rPr sz="800" b="0">
-                          <a:latin typeface="微软雅黑"/>
-                          <a:ea typeface="微软雅黑"/>
-                        </a:rPr>
-                        <a:t>SACC Loans</a:t>
-                      </a:r>
-                    </a:p>
-                  </a:txBody>
-                  <a:tcPr marL="45720" marR="45720" marT="18288" marB="18288" anchor="ctr">
-                    <a:lnL>
-                      <a:noFill/>
-                    </a:lnL>
-                    <a:lnR>
-                      <a:noFill/>
-                    </a:lnR>
-                    <a:lnT w="9525" cap="flat" cmpd="sng" algn="ctr">
-                      <a:solidFill>
-                        <a:srgbClr val="D6D6D6"/>
-                      </a:solidFill>
-                      <a:prstDash val="solid"/>
-                      <a:round/>
-                      <a:headEnd type="none" w="med" len="med"/>
-                      <a:tailEnd type="none" w="med" len="med"/>
-                    </a:lnT>
-                    <a:lnB w="9525">
-                      <a:solidFill>
-                        <a:srgbClr val="D6D6D6"/>
-                      </a:solidFill>
-                    </a:lnB>
-                  </a:tcPr>
-                </a:tc>
-                <a:extLst>
-                  <a:ext uri="{0D108BD9-81ED-4DB2-BD59-A6C34878D82A}">
-                    <a16:rowId xmlns:a16="http://schemas.microsoft.com/office/drawing/2014/main" val="10003"/>
-                  </a:ext>
-                </a:extLst>
-              </a:tr>
-              <a:tr h="201168">
-                <a:tc>
-                  <a:txBody>
-                    <a:bodyPr/>
-                    <a:lstStyle/>
-                    <a:p>
-                      <a:pPr algn="l">
-                        <a:lnSpc>
-                          <a:spcPct val="100000"/>
-                        </a:lnSpc>
-                        <a:spcAft>
-                          <a:spcPts val="0"/>
-                        </a:spcAft>
-                      </a:pPr>
-                      <a:r>
-                        <a:rPr sz="800" b="1">
-                          <a:latin typeface="微软雅黑"/>
-                          <a:ea typeface="微软雅黑"/>
-                        </a:rPr>
-                        <a:t>2026/05/25</a:t>
-                      </a:r>
-                    </a:p>
-                  </a:txBody>
-                  <a:tcPr marL="45720" marR="45720" marT="18288" marB="18288" anchor="ctr">
-                    <a:lnL>
-                      <a:noFill/>
-                    </a:lnL>
-                    <a:lnR>
-                      <a:noFill/>
-                    </a:lnR>
-                    <a:lnT w="9525" cap="flat" cmpd="sng" algn="ctr">
-                      <a:solidFill>
-                        <a:srgbClr val="D6D6D6"/>
-                      </a:solidFill>
-                      <a:prstDash val="solid"/>
-                      <a:round/>
-                      <a:headEnd type="none" w="med" len="med"/>
-                      <a:tailEnd type="none" w="med" len="med"/>
-                    </a:lnT>
-                    <a:lnB w="9525">
-                      <a:solidFill>
-                        <a:srgbClr val="D6D6D6"/>
-                      </a:solidFill>
-                    </a:lnB>
-                  </a:tcPr>
-                </a:tc>
-                <a:tc>
-                  <a:txBody>
-                    <a:bodyPr/>
-                    <a:lstStyle/>
-                    <a:p>
-                      <a:pPr algn="l">
-                        <a:lnSpc>
-                          <a:spcPct val="100000"/>
-                        </a:lnSpc>
-                        <a:spcAft>
-                          <a:spcPts val="0"/>
-                        </a:spcAft>
-                      </a:pPr>
-                      <a:r>
-                        <a:rPr sz="800" b="0">
-                          <a:latin typeface="微软雅黑"/>
-                          <a:ea typeface="微软雅黑"/>
-                        </a:rPr>
-                        <a:t>A$49.09</a:t>
-                      </a:r>
-                    </a:p>
-                  </a:txBody>
-                  <a:tcPr marL="45720" marR="45720" marT="18288" marB="18288" anchor="ctr">
-                    <a:lnL>
-                      <a:noFill/>
-                    </a:lnL>
-                    <a:lnR>
-                      <a:noFill/>
-                    </a:lnR>
-                    <a:lnT w="9525" cap="flat" cmpd="sng" algn="ctr">
-                      <a:solidFill>
-                        <a:srgbClr val="D6D6D6"/>
-                      </a:solidFill>
-                      <a:prstDash val="solid"/>
-                      <a:round/>
-                      <a:headEnd type="none" w="med" len="med"/>
-                      <a:tailEnd type="none" w="med" len="med"/>
-                    </a:lnT>
-                    <a:lnB w="9525">
-                      <a:solidFill>
-                        <a:srgbClr val="D6D6D6"/>
-                      </a:solidFill>
-                    </a:lnB>
-                  </a:tcPr>
-                </a:tc>
-                <a:tc>
-                  <a:txBody>
-                    <a:bodyPr/>
-                    <a:lstStyle/>
-                    <a:p>
-                      <a:pPr algn="l">
-                        <a:lnSpc>
-                          <a:spcPct val="100000"/>
-                        </a:lnSpc>
-                        <a:spcAft>
-                          <a:spcPts val="0"/>
-                        </a:spcAft>
-                      </a:pPr>
-                      <a:r>
-                        <a:rPr sz="800" b="0">
-                          <a:latin typeface="微软雅黑"/>
-                          <a:ea typeface="微软雅黑"/>
-                        </a:rPr>
-                        <a:t>Debit</a:t>
-                      </a:r>
-                    </a:p>
-                  </a:txBody>
-                  <a:tcPr marL="45720" marR="45720" marT="18288" marB="18288" anchor="ctr">
-                    <a:lnL>
-                      <a:noFill/>
-                    </a:lnL>
-                    <a:lnR>
-                      <a:noFill/>
-                    </a:lnR>
-                    <a:lnT w="9525" cap="flat" cmpd="sng" algn="ctr">
-                      <a:solidFill>
-                        <a:srgbClr val="D6D6D6"/>
-                      </a:solidFill>
-                      <a:prstDash val="solid"/>
-                      <a:round/>
-                      <a:headEnd type="none" w="med" len="med"/>
-                      <a:tailEnd type="none" w="med" len="med"/>
-                    </a:lnT>
-                    <a:lnB w="9525">
-                      <a:solidFill>
-                        <a:srgbClr val="D6D6D6"/>
-                      </a:solidFill>
-                    </a:lnB>
-                  </a:tcPr>
-                </a:tc>
-                <a:tc>
-                  <a:txBody>
-                    <a:bodyPr/>
-                    <a:lstStyle/>
-                    <a:p>
-                      <a:pPr algn="l">
-                        <a:lnSpc>
-                          <a:spcPct val="100000"/>
-                        </a:lnSpc>
-                        <a:spcAft>
-                          <a:spcPts val="0"/>
-                        </a:spcAft>
-                      </a:pPr>
-                      <a:r>
-                        <a:rPr sz="800" b="0">
-                          <a:latin typeface="微软雅黑"/>
-                          <a:ea typeface="微软雅黑"/>
-                        </a:rPr>
-                        <a:t>MONEYSPOT REPAY REF 4002233445</a:t>
-                      </a:r>
-                    </a:p>
-                  </a:txBody>
-                  <a:tcPr marL="45720" marR="45720" marT="18288" marB="18288" anchor="ctr">
-                    <a:lnL>
-                      <a:noFill/>
-                    </a:lnL>
-                    <a:lnR>
-                      <a:noFill/>
-                    </a:lnR>
-                    <a:lnT w="9525" cap="flat" cmpd="sng" algn="ctr">
-                      <a:solidFill>
-                        <a:srgbClr val="D6D6D6"/>
-                      </a:solidFill>
-                      <a:prstDash val="solid"/>
-                      <a:round/>
-                      <a:headEnd type="none" w="med" len="med"/>
-                      <a:tailEnd type="none" w="med" len="med"/>
-                    </a:lnT>
-                    <a:lnB w="9525">
-                      <a:solidFill>
-                        <a:srgbClr val="D6D6D6"/>
-                      </a:solidFill>
-                    </a:lnB>
-                  </a:tcPr>
-                </a:tc>
-                <a:tc>
-                  <a:txBody>
-                    <a:bodyPr/>
-                    <a:lstStyle/>
-                    <a:p>
-                      <a:pPr algn="l">
-                        <a:lnSpc>
-                          <a:spcPct val="100000"/>
-                        </a:lnSpc>
-                        <a:spcAft>
-                          <a:spcPts val="0"/>
-                        </a:spcAft>
-                      </a:pPr>
-                      <a:r>
-                        <a:rPr sz="800" b="0">
-                          <a:latin typeface="微软雅黑"/>
-                          <a:ea typeface="微软雅黑"/>
-                        </a:rPr>
-                        <a:t>Non-SACC Loans</a:t>
-                      </a:r>
-                    </a:p>
-                  </a:txBody>
-                  <a:tcPr marL="45720" marR="45720" marT="18288" marB="18288" anchor="ctr">
-                    <a:lnL>
-                      <a:noFill/>
-                    </a:lnL>
-                    <a:lnR>
-                      <a:noFill/>
-                    </a:lnR>
-                    <a:lnT w="9525" cap="flat" cmpd="sng" algn="ctr">
-                      <a:solidFill>
-                        <a:srgbClr val="D6D6D6"/>
-                      </a:solidFill>
-                      <a:prstDash val="solid"/>
-                      <a:round/>
-                      <a:headEnd type="none" w="med" len="med"/>
-                      <a:tailEnd type="none" w="med" len="med"/>
-                    </a:lnT>
-                    <a:lnB w="9525">
-                      <a:solidFill>
-                        <a:srgbClr val="D6D6D6"/>
-                      </a:solidFill>
-                    </a:lnB>
-                  </a:tcPr>
-                </a:tc>
-                <a:tc>
-                  <a:txBody>
-                    <a:bodyPr/>
-                    <a:lstStyle/>
-                    <a:p>
-                      <a:pPr algn="l">
-                        <a:lnSpc>
-                          <a:spcPct val="100000"/>
-                        </a:lnSpc>
-                        <a:spcAft>
-                          <a:spcPts val="0"/>
-                        </a:spcAft>
-                      </a:pPr>
-                      <a:r>
-                        <a:rPr sz="800" b="0">
-                          <a:latin typeface="微软雅黑"/>
-                          <a:ea typeface="微软雅黑"/>
-                        </a:rPr>
-                        <a:t>SACC Loans</a:t>
-                      </a:r>
-                    </a:p>
-                  </a:txBody>
-                  <a:tcPr marL="45720" marR="45720" marT="18288" marB="18288" anchor="ctr">
-                    <a:lnL>
-                      <a:noFill/>
-                    </a:lnL>
-                    <a:lnR>
-                      <a:noFill/>
-                    </a:lnR>
-                    <a:lnT w="9525" cap="flat" cmpd="sng" algn="ctr">
-                      <a:solidFill>
-                        <a:srgbClr val="D6D6D6"/>
-                      </a:solidFill>
-                      <a:prstDash val="solid"/>
-                      <a:round/>
-                      <a:headEnd type="none" w="med" len="med"/>
-                      <a:tailEnd type="none" w="med" len="med"/>
-                    </a:lnT>
-                    <a:lnB w="9525">
-                      <a:solidFill>
-                        <a:srgbClr val="D6D6D6"/>
-                      </a:solidFill>
-                    </a:lnB>
-                  </a:tcPr>
-                </a:tc>
-                <a:extLst>
-                  <a:ext uri="{0D108BD9-81ED-4DB2-BD59-A6C34878D82A}">
-                    <a16:rowId xmlns:a16="http://schemas.microsoft.com/office/drawing/2014/main" val="10004"/>
-                  </a:ext>
-                </a:extLst>
-              </a:tr>
-              <a:tr h="201168">
-                <a:tc>
-                  <a:txBody>
-                    <a:bodyPr/>
-                    <a:lstStyle/>
-                    <a:p>
-                      <a:pPr algn="l">
-                        <a:lnSpc>
-                          <a:spcPct val="100000"/>
-                        </a:lnSpc>
-                        <a:spcAft>
-                          <a:spcPts val="0"/>
-                        </a:spcAft>
-                      </a:pPr>
-                      <a:r>
-                        <a:rPr sz="800" b="1">
-                          <a:latin typeface="微软雅黑"/>
-                          <a:ea typeface="微软雅黑"/>
-                        </a:rPr>
-                        <a:t>2026/07/20</a:t>
-                      </a:r>
-                    </a:p>
-                  </a:txBody>
-                  <a:tcPr marL="45720" marR="45720" marT="18288" marB="18288" anchor="ctr">
-                    <a:lnL>
-                      <a:noFill/>
-                    </a:lnL>
-                    <a:lnR>
-                      <a:noFill/>
-                    </a:lnR>
-                    <a:lnT w="9525" cap="flat" cmpd="sng" algn="ctr">
-                      <a:solidFill>
-                        <a:srgbClr val="D6D6D6"/>
-                      </a:solidFill>
-                      <a:prstDash val="solid"/>
-                      <a:round/>
-                      <a:headEnd type="none" w="med" len="med"/>
-                      <a:tailEnd type="none" w="med" len="med"/>
-                    </a:lnT>
-                    <a:lnB w="9525">
-                      <a:solidFill>
-                        <a:srgbClr val="D6D6D6"/>
-                      </a:solidFill>
-                    </a:lnB>
-                  </a:tcPr>
-                </a:tc>
-                <a:tc>
-                  <a:txBody>
-                    <a:bodyPr/>
-                    <a:lstStyle/>
-                    <a:p>
-                      <a:pPr algn="l">
-                        <a:lnSpc>
-                          <a:spcPct val="100000"/>
-                        </a:lnSpc>
-                        <a:spcAft>
-                          <a:spcPts val="0"/>
-                        </a:spcAft>
-                      </a:pPr>
-                      <a:r>
-                        <a:rPr sz="800" b="0">
-                          <a:latin typeface="微软雅黑"/>
-                          <a:ea typeface="微软雅黑"/>
-                        </a:rPr>
-                        <a:t>A$49.09</a:t>
-                      </a:r>
-                    </a:p>
-                  </a:txBody>
-                  <a:tcPr marL="45720" marR="45720" marT="18288" marB="18288" anchor="ctr">
-                    <a:lnL>
-                      <a:noFill/>
-                    </a:lnL>
-                    <a:lnR>
-                      <a:noFill/>
-                    </a:lnR>
-                    <a:lnT w="9525" cap="flat" cmpd="sng" algn="ctr">
-                      <a:solidFill>
-                        <a:srgbClr val="D6D6D6"/>
-                      </a:solidFill>
-                      <a:prstDash val="solid"/>
-                      <a:round/>
-                      <a:headEnd type="none" w="med" len="med"/>
-                      <a:tailEnd type="none" w="med" len="med"/>
-                    </a:lnT>
-                    <a:lnB w="9525">
-                      <a:solidFill>
-                        <a:srgbClr val="D6D6D6"/>
-                      </a:solidFill>
-                    </a:lnB>
-                  </a:tcPr>
-                </a:tc>
-                <a:tc>
-                  <a:txBody>
-                    <a:bodyPr/>
-                    <a:lstStyle/>
-                    <a:p>
-                      <a:pPr algn="l">
-                        <a:lnSpc>
-                          <a:spcPct val="100000"/>
-                        </a:lnSpc>
-                        <a:spcAft>
-                          <a:spcPts val="0"/>
-                        </a:spcAft>
-                      </a:pPr>
-                      <a:r>
-                        <a:rPr sz="800" b="0">
-                          <a:latin typeface="微软雅黑"/>
-                          <a:ea typeface="微软雅黑"/>
-                        </a:rPr>
-                        <a:t>Debit</a:t>
-                      </a:r>
-                    </a:p>
-                  </a:txBody>
-                  <a:tcPr marL="45720" marR="45720" marT="18288" marB="18288" anchor="ctr">
-                    <a:lnL>
-                      <a:noFill/>
-                    </a:lnL>
-                    <a:lnR>
-                      <a:noFill/>
-                    </a:lnR>
-                    <a:lnT w="9525" cap="flat" cmpd="sng" algn="ctr">
-                      <a:solidFill>
-                        <a:srgbClr val="D6D6D6"/>
-                      </a:solidFill>
-                      <a:prstDash val="solid"/>
-                      <a:round/>
-                      <a:headEnd type="none" w="med" len="med"/>
-                      <a:tailEnd type="none" w="med" len="med"/>
-                    </a:lnT>
-                    <a:lnB w="9525">
-                      <a:solidFill>
-                        <a:srgbClr val="D6D6D6"/>
-                      </a:solidFill>
-                    </a:lnB>
-                  </a:tcPr>
-                </a:tc>
-                <a:tc>
-                  <a:txBody>
-                    <a:bodyPr/>
-                    <a:lstStyle/>
-                    <a:p>
-                      <a:pPr algn="l">
-                        <a:lnSpc>
-                          <a:spcPct val="100000"/>
-                        </a:lnSpc>
-                        <a:spcAft>
-                          <a:spcPts val="0"/>
-                        </a:spcAft>
-                      </a:pPr>
-                      <a:r>
-                        <a:rPr sz="800" b="0">
-                          <a:latin typeface="微软雅黑"/>
-                          <a:ea typeface="微软雅黑"/>
-                        </a:rPr>
-                        <a:t>MONEYSPOT REPAY REF 5009876543</a:t>
-                      </a:r>
-                    </a:p>
-                  </a:txBody>
-                  <a:tcPr marL="45720" marR="45720" marT="18288" marB="18288" anchor="ctr">
-                    <a:lnL>
-                      <a:noFill/>
-                    </a:lnL>
-                    <a:lnR>
-                      <a:noFill/>
-                    </a:lnR>
-                    <a:lnT w="9525" cap="flat" cmpd="sng" algn="ctr">
-                      <a:solidFill>
-                        <a:srgbClr val="D6D6D6"/>
-                      </a:solidFill>
-                      <a:prstDash val="solid"/>
-                      <a:round/>
-                      <a:headEnd type="none" w="med" len="med"/>
-                      <a:tailEnd type="none" w="med" len="med"/>
-                    </a:lnT>
-                    <a:lnB w="9525">
-                      <a:solidFill>
-                        <a:srgbClr val="D6D6D6"/>
-                      </a:solidFill>
-                    </a:lnB>
-                  </a:tcPr>
-                </a:tc>
-                <a:tc>
-                  <a:txBody>
-                    <a:bodyPr/>
-                    <a:lstStyle/>
-                    <a:p>
-                      <a:pPr algn="l">
-                        <a:lnSpc>
-                          <a:spcPct val="100000"/>
-                        </a:lnSpc>
-                        <a:spcAft>
-                          <a:spcPts val="0"/>
-                        </a:spcAft>
-                      </a:pPr>
-                      <a:r>
-                        <a:rPr sz="800" b="0">
-                          <a:latin typeface="微软雅黑"/>
-                          <a:ea typeface="微软雅黑"/>
-                        </a:rPr>
-                        <a:t>Non-SACC Loans</a:t>
-                      </a:r>
-                    </a:p>
-                  </a:txBody>
-                  <a:tcPr marL="45720" marR="45720" marT="18288" marB="18288" anchor="ctr">
-                    <a:lnL>
-                      <a:noFill/>
-                    </a:lnL>
-                    <a:lnR>
-                      <a:noFill/>
-                    </a:lnR>
-                    <a:lnT w="9525" cap="flat" cmpd="sng" algn="ctr">
-                      <a:solidFill>
-                        <a:srgbClr val="D6D6D6"/>
-                      </a:solidFill>
-                      <a:prstDash val="solid"/>
-                      <a:round/>
-                      <a:headEnd type="none" w="med" len="med"/>
-                      <a:tailEnd type="none" w="med" len="med"/>
-                    </a:lnT>
-                    <a:lnB w="9525">
-                      <a:solidFill>
-                        <a:srgbClr val="D6D6D6"/>
-                      </a:solidFill>
-                    </a:lnB>
-                  </a:tcPr>
-                </a:tc>
-                <a:tc>
-                  <a:txBody>
-                    <a:bodyPr/>
-                    <a:lstStyle/>
-                    <a:p>
-                      <a:pPr algn="l">
-                        <a:lnSpc>
-                          <a:spcPct val="100000"/>
-                        </a:lnSpc>
-                        <a:spcAft>
-                          <a:spcPts val="0"/>
-                        </a:spcAft>
-                      </a:pPr>
-                      <a:r>
-                        <a:rPr sz="800" b="0">
-                          <a:latin typeface="微软雅黑"/>
-                          <a:ea typeface="微软雅黑"/>
-                        </a:rPr>
-                        <a:t>SACC Loans</a:t>
-                      </a:r>
-                    </a:p>
-                  </a:txBody>
-                  <a:tcPr marL="45720" marR="45720" marT="18288" marB="18288" anchor="ctr">
-                    <a:lnL>
-                      <a:noFill/>
-                    </a:lnL>
-                    <a:lnR>
-                      <a:noFill/>
-                    </a:lnR>
-                    <a:lnT w="9525" cap="flat" cmpd="sng" algn="ctr">
-                      <a:solidFill>
-                        <a:srgbClr val="D6D6D6"/>
-                      </a:solidFill>
-                      <a:prstDash val="solid"/>
-                      <a:round/>
-                      <a:headEnd type="none" w="med" len="med"/>
-                      <a:tailEnd type="none" w="med" len="med"/>
-                    </a:lnT>
-                    <a:lnB w="9525">
-                      <a:solidFill>
-                        <a:srgbClr val="D6D6D6"/>
-                      </a:solidFill>
-                    </a:lnB>
-                  </a:tcPr>
-                </a:tc>
                 <a:extLst>
                   <a:ext uri="{0D108BD9-81ED-4DB2-BD59-A6C34878D82A}">
                     <a16:rowId xmlns:a16="http://schemas.microsoft.com/office/drawing/2014/main" val="10005"/>
@@ -19248,8 +18694,8 @@
           <p:nvPr/>
         </p:nvGraphicFramePr>
         <p:xfrm>
-          <a:off x="4681727" y="5413247"/>
-          <a:ext cx="7004304" cy="1042416"/>
+          <a:off x="4681727" y="5010910"/>
+          <a:ext cx="7004304" cy="1207008"/>
         </p:xfrm>
         <a:graphic>
           <a:graphicData uri="http://schemas.openxmlformats.org/drawingml/2006/table">
@@ -19277,7 +18723,7 @@
                     </a:ext>
                   </a:extLst>
                 </a:gridCol>
-                <a:gridCol w="2468880">
+                <a:gridCol w="2020824">
                   <a:extLst>
                     <a:ext uri="{9D8B030D-6E8A-4147-A177-3AD203B41FA5}">
                       <a16:colId xmlns:a16="http://schemas.microsoft.com/office/drawing/2014/main" val="20003"/>
@@ -19291,7 +18737,7 @@
                     </a:ext>
                   </a:extLst>
                 </a:gridCol>
-                <a:gridCol w="1197864">
+                <a:gridCol w="1645920">
                   <a:extLst>
                     <a:ext uri="{9D8B030D-6E8A-4147-A177-3AD203B41FA5}">
                       <a16:colId xmlns:a16="http://schemas.microsoft.com/office/drawing/2014/main" val="20005"/>
@@ -19540,7 +18986,7 @@
                   </a:ext>
                 </a:extLst>
               </a:tr>
-              <a:tr h="173736">
+              <a:tr h="201168">
                 <a:tc>
                   <a:txBody>
                     <a:bodyPr/>
@@ -19764,7 +19210,7 @@
                           <a:latin typeface="微软雅黑"/>
                           <a:ea typeface="微软雅黑"/>
                         </a:rPr>
-                        <a:t>Non-SACC Loans（LOC 循环授信）</a:t>
+                        <a:t>Non-SACC（LOC 循环授信）</a:t>
                       </a:r>
                     </a:p>
                   </a:txBody>
@@ -19793,7 +19239,284 @@
                   </a:ext>
                 </a:extLst>
               </a:tr>
-              <a:tr h="173736">
+              <a:tr h="201168">
+                <a:tc>
+                  <a:txBody>
+                    <a:bodyPr/>
+                    <a:lstStyle/>
+                    <a:p>
+                      <a:pPr algn="l">
+                        <a:lnSpc>
+                          <a:spcPct val="100000"/>
+                        </a:lnSpc>
+                        <a:spcAft>
+                          <a:spcPts val="0"/>
+                        </a:spcAft>
+                      </a:pPr>
+                      <a:r>
+                        <a:rPr sz="800" b="1">
+                          <a:latin typeface="微软雅黑"/>
+                          <a:ea typeface="微软雅黑"/>
+                        </a:rPr>
+                        <a:t>2026/03/18</a:t>
+                      </a:r>
+                    </a:p>
+                  </a:txBody>
+                  <a:tcPr marL="45720" marR="45720" marT="18288" marB="18288" anchor="ctr">
+                    <a:lnL>
+                      <a:noFill/>
+                    </a:lnL>
+                    <a:lnR>
+                      <a:noFill/>
+                    </a:lnR>
+                    <a:lnT w="9525" cap="flat" cmpd="sng" algn="ctr">
+                      <a:solidFill>
+                        <a:srgbClr val="D6D6D6"/>
+                      </a:solidFill>
+                      <a:prstDash val="solid"/>
+                      <a:round/>
+                      <a:headEnd type="none" w="med" len="med"/>
+                      <a:tailEnd type="none" w="med" len="med"/>
+                    </a:lnT>
+                    <a:lnB w="9525">
+                      <a:solidFill>
+                        <a:srgbClr val="D6D6D6"/>
+                      </a:solidFill>
+                    </a:lnB>
+                  </a:tcPr>
+                </a:tc>
+                <a:tc>
+                  <a:txBody>
+                    <a:bodyPr/>
+                    <a:lstStyle/>
+                    <a:p>
+                      <a:pPr algn="l">
+                        <a:lnSpc>
+                          <a:spcPct val="100000"/>
+                        </a:lnSpc>
+                        <a:spcAft>
+                          <a:spcPts val="0"/>
+                        </a:spcAft>
+                      </a:pPr>
+                      <a:r>
+                        <a:rPr sz="800" b="0">
+                          <a:latin typeface="微软雅黑"/>
+                          <a:ea typeface="微软雅黑"/>
+                        </a:rPr>
+                        <a:t>A$260.00</a:t>
+                      </a:r>
+                    </a:p>
+                  </a:txBody>
+                  <a:tcPr marL="45720" marR="45720" marT="18288" marB="18288" anchor="ctr">
+                    <a:lnL>
+                      <a:noFill/>
+                    </a:lnL>
+                    <a:lnR>
+                      <a:noFill/>
+                    </a:lnR>
+                    <a:lnT w="9525" cap="flat" cmpd="sng" algn="ctr">
+                      <a:solidFill>
+                        <a:srgbClr val="D6D6D6"/>
+                      </a:solidFill>
+                      <a:prstDash val="solid"/>
+                      <a:round/>
+                      <a:headEnd type="none" w="med" len="med"/>
+                      <a:tailEnd type="none" w="med" len="med"/>
+                    </a:lnT>
+                    <a:lnB w="9525">
+                      <a:solidFill>
+                        <a:srgbClr val="D6D6D6"/>
+                      </a:solidFill>
+                    </a:lnB>
+                  </a:tcPr>
+                </a:tc>
+                <a:tc>
+                  <a:txBody>
+                    <a:bodyPr/>
+                    <a:lstStyle/>
+                    <a:p>
+                      <a:pPr algn="l">
+                        <a:lnSpc>
+                          <a:spcPct val="100000"/>
+                        </a:lnSpc>
+                        <a:spcAft>
+                          <a:spcPts val="0"/>
+                        </a:spcAft>
+                      </a:pPr>
+                      <a:r>
+                        <a:rPr sz="800" b="0">
+                          <a:latin typeface="微软雅黑"/>
+                          <a:ea typeface="微软雅黑"/>
+                        </a:rPr>
+                        <a:t>Credit</a:t>
+                      </a:r>
+                    </a:p>
+                  </a:txBody>
+                  <a:tcPr marL="45720" marR="45720" marT="18288" marB="18288" anchor="ctr">
+                    <a:lnL>
+                      <a:noFill/>
+                    </a:lnL>
+                    <a:lnR>
+                      <a:noFill/>
+                    </a:lnR>
+                    <a:lnT w="9525" cap="flat" cmpd="sng" algn="ctr">
+                      <a:solidFill>
+                        <a:srgbClr val="D6D6D6"/>
+                      </a:solidFill>
+                      <a:prstDash val="solid"/>
+                      <a:round/>
+                      <a:headEnd type="none" w="med" len="med"/>
+                      <a:tailEnd type="none" w="med" len="med"/>
+                    </a:lnT>
+                    <a:lnB w="9525">
+                      <a:solidFill>
+                        <a:srgbClr val="D6D6D6"/>
+                      </a:solidFill>
+                    </a:lnB>
+                  </a:tcPr>
+                </a:tc>
+                <a:tc>
+                  <a:txBody>
+                    <a:bodyPr/>
+                    <a:lstStyle/>
+                    <a:p>
+                      <a:pPr algn="l">
+                        <a:lnSpc>
+                          <a:spcPct val="100000"/>
+                        </a:lnSpc>
+                        <a:spcAft>
+                          <a:spcPts val="0"/>
+                        </a:spcAft>
+                      </a:pPr>
+                      <a:r>
+                        <a:rPr sz="800" b="0" dirty="0">
+                          <a:latin typeface="微软雅黑"/>
+                          <a:ea typeface="微软雅黑"/>
+                        </a:rPr>
+                        <a:t>CREDIT24 ADVANCE REF 9004455667</a:t>
+                      </a:r>
+                    </a:p>
+                  </a:txBody>
+                  <a:tcPr marL="45720" marR="45720" marT="18288" marB="18288" anchor="ctr">
+                    <a:lnL>
+                      <a:noFill/>
+                    </a:lnL>
+                    <a:lnR>
+                      <a:noFill/>
+                    </a:lnR>
+                    <a:lnT w="9525" cap="flat" cmpd="sng" algn="ctr">
+                      <a:solidFill>
+                        <a:srgbClr val="D6D6D6"/>
+                      </a:solidFill>
+                      <a:prstDash val="solid"/>
+                      <a:round/>
+                      <a:headEnd type="none" w="med" len="med"/>
+                      <a:tailEnd type="none" w="med" len="med"/>
+                    </a:lnT>
+                    <a:lnB w="9525">
+                      <a:solidFill>
+                        <a:srgbClr val="D6D6D6"/>
+                      </a:solidFill>
+                    </a:lnB>
+                  </a:tcPr>
+                </a:tc>
+                <a:tc>
+                  <a:txBody>
+                    <a:bodyPr/>
+                    <a:lstStyle/>
+                    <a:p>
+                      <a:pPr algn="l">
+                        <a:lnSpc>
+                          <a:spcPct val="100000"/>
+                        </a:lnSpc>
+                        <a:spcAft>
+                          <a:spcPts val="0"/>
+                        </a:spcAft>
+                      </a:pPr>
+                      <a:r>
+                        <a:rPr sz="800" b="0">
+                          <a:latin typeface="微软雅黑"/>
+                          <a:ea typeface="微软雅黑"/>
+                        </a:rPr>
+                        <a:t>SACC Loans</a:t>
+                      </a:r>
+                    </a:p>
+                  </a:txBody>
+                  <a:tcPr marL="45720" marR="45720" marT="18288" marB="18288" anchor="ctr">
+                    <a:lnL>
+                      <a:noFill/>
+                    </a:lnL>
+                    <a:lnR>
+                      <a:noFill/>
+                    </a:lnR>
+                    <a:lnT w="9525" cap="flat" cmpd="sng" algn="ctr">
+                      <a:solidFill>
+                        <a:srgbClr val="D6D6D6"/>
+                      </a:solidFill>
+                      <a:prstDash val="solid"/>
+                      <a:round/>
+                      <a:headEnd type="none" w="med" len="med"/>
+                      <a:tailEnd type="none" w="med" len="med"/>
+                    </a:lnT>
+                    <a:lnB w="9525">
+                      <a:solidFill>
+                        <a:srgbClr val="D6D6D6"/>
+                      </a:solidFill>
+                    </a:lnB>
+                  </a:tcPr>
+                </a:tc>
+                <a:tc>
+                  <a:txBody>
+                    <a:bodyPr/>
+                    <a:lstStyle/>
+                    <a:p>
+                      <a:pPr algn="l">
+                        <a:lnSpc>
+                          <a:spcPct val="100000"/>
+                        </a:lnSpc>
+                        <a:spcAft>
+                          <a:spcPts val="0"/>
+                        </a:spcAft>
+                      </a:pPr>
+                      <a:r>
+                        <a:rPr sz="800" b="0">
+                          <a:latin typeface="微软雅黑"/>
+                          <a:ea typeface="微软雅黑"/>
+                        </a:rPr>
+                        <a:t>Non-SACC（LOC 循环授信）</a:t>
+                      </a:r>
+                    </a:p>
+                  </a:txBody>
+                  <a:tcPr marL="45720" marR="45720" marT="18288" marB="18288" anchor="ctr">
+                    <a:lnL>
+                      <a:noFill/>
+                    </a:lnL>
+                    <a:lnR>
+                      <a:noFill/>
+                    </a:lnR>
+                    <a:lnT w="9525" cap="flat" cmpd="sng" algn="ctr">
+                      <a:solidFill>
+                        <a:srgbClr val="D6D6D6"/>
+                      </a:solidFill>
+                      <a:prstDash val="solid"/>
+                      <a:round/>
+                      <a:headEnd type="none" w="med" len="med"/>
+                      <a:tailEnd type="none" w="med" len="med"/>
+                    </a:lnT>
+                    <a:lnB w="9525">
+                      <a:solidFill>
+                        <a:srgbClr val="D6D6D6"/>
+                      </a:solidFill>
+                    </a:lnB>
+                  </a:tcPr>
+                </a:tc>
+                <a:extLst>
+                  <a:ext uri="{0D108BD9-81ED-4DB2-BD59-A6C34878D82A}">
+                    <a16:rowId xmlns:a16="http://schemas.microsoft.com/office/drawing/2014/main" val="10002"/>
+                  </a:ext>
+                </a:extLst>
+              </a:tr>
+              <a:tr h="201168">
                 <a:tc>
                   <a:txBody>
                     <a:bodyPr/>
@@ -20037,7 +19760,7 @@
                           <a:latin typeface="微软雅黑"/>
                           <a:ea typeface="微软雅黑"/>
                         </a:rPr>
-                        <a:t>Non-SACC Loans（LOC 循环授信）</a:t>
+                        <a:t>Non-SACC（LOC 循环授信）</a:t>
                       </a:r>
                     </a:p>
                   </a:txBody>
@@ -20070,7 +19793,7 @@
                   </a:ext>
                 </a:extLst>
               </a:tr>
-              <a:tr h="173736">
+              <a:tr h="201168">
                 <a:tc>
                   <a:txBody>
                     <a:bodyPr/>
@@ -20314,7 +20037,7 @@
                           <a:latin typeface="微软雅黑"/>
                           <a:ea typeface="微软雅黑"/>
                         </a:rPr>
-                        <a:t>Non-SACC Loans（LOC 循环授信）</a:t>
+                        <a:t>Non-SACC（LOC 循环授信）</a:t>
                       </a:r>
                     </a:p>
                   </a:txBody>
@@ -20344,6 +20067,283 @@
                 <a:extLst>
                   <a:ext uri="{0D108BD9-81ED-4DB2-BD59-A6C34878D82A}">
                     <a16:rowId xmlns:a16="http://schemas.microsoft.com/office/drawing/2014/main" val="10003"/>
+                  </a:ext>
+                </a:extLst>
+              </a:tr>
+              <a:tr h="201168">
+                <a:tc>
+                  <a:txBody>
+                    <a:bodyPr/>
+                    <a:lstStyle/>
+                    <a:p>
+                      <a:pPr algn="l">
+                        <a:lnSpc>
+                          <a:spcPct val="100000"/>
+                        </a:lnSpc>
+                        <a:spcAft>
+                          <a:spcPts val="0"/>
+                        </a:spcAft>
+                      </a:pPr>
+                      <a:r>
+                        <a:rPr sz="800" b="1">
+                          <a:latin typeface="微软雅黑"/>
+                          <a:ea typeface="微软雅黑"/>
+                        </a:rPr>
+                        <a:t>2026/06/24</a:t>
+                      </a:r>
+                    </a:p>
+                  </a:txBody>
+                  <a:tcPr marL="45720" marR="45720" marT="18288" marB="18288" anchor="ctr">
+                    <a:lnL>
+                      <a:noFill/>
+                    </a:lnL>
+                    <a:lnR>
+                      <a:noFill/>
+                    </a:lnR>
+                    <a:lnT w="9525" cap="flat" cmpd="sng" algn="ctr">
+                      <a:solidFill>
+                        <a:srgbClr val="D6D6D6"/>
+                      </a:solidFill>
+                      <a:prstDash val="solid"/>
+                      <a:round/>
+                      <a:headEnd type="none" w="med" len="med"/>
+                      <a:tailEnd type="none" w="med" len="med"/>
+                    </a:lnT>
+                    <a:lnB w="9525">
+                      <a:solidFill>
+                        <a:srgbClr val="D6D6D6"/>
+                      </a:solidFill>
+                    </a:lnB>
+                  </a:tcPr>
+                </a:tc>
+                <a:tc>
+                  <a:txBody>
+                    <a:bodyPr/>
+                    <a:lstStyle/>
+                    <a:p>
+                      <a:pPr algn="l">
+                        <a:lnSpc>
+                          <a:spcPct val="100000"/>
+                        </a:lnSpc>
+                        <a:spcAft>
+                          <a:spcPts val="0"/>
+                        </a:spcAft>
+                      </a:pPr>
+                      <a:r>
+                        <a:rPr sz="800" b="0">
+                          <a:latin typeface="微软雅黑"/>
+                          <a:ea typeface="微软雅黑"/>
+                        </a:rPr>
+                        <a:t>A$48.30</a:t>
+                      </a:r>
+                    </a:p>
+                  </a:txBody>
+                  <a:tcPr marL="45720" marR="45720" marT="18288" marB="18288" anchor="ctr">
+                    <a:lnL>
+                      <a:noFill/>
+                    </a:lnL>
+                    <a:lnR>
+                      <a:noFill/>
+                    </a:lnR>
+                    <a:lnT w="9525" cap="flat" cmpd="sng" algn="ctr">
+                      <a:solidFill>
+                        <a:srgbClr val="D6D6D6"/>
+                      </a:solidFill>
+                      <a:prstDash val="solid"/>
+                      <a:round/>
+                      <a:headEnd type="none" w="med" len="med"/>
+                      <a:tailEnd type="none" w="med" len="med"/>
+                    </a:lnT>
+                    <a:lnB w="9525">
+                      <a:solidFill>
+                        <a:srgbClr val="D6D6D6"/>
+                      </a:solidFill>
+                    </a:lnB>
+                  </a:tcPr>
+                </a:tc>
+                <a:tc>
+                  <a:txBody>
+                    <a:bodyPr/>
+                    <a:lstStyle/>
+                    <a:p>
+                      <a:pPr algn="l">
+                        <a:lnSpc>
+                          <a:spcPct val="100000"/>
+                        </a:lnSpc>
+                        <a:spcAft>
+                          <a:spcPts val="0"/>
+                        </a:spcAft>
+                      </a:pPr>
+                      <a:r>
+                        <a:rPr sz="800" b="0">
+                          <a:latin typeface="微软雅黑"/>
+                          <a:ea typeface="微软雅黑"/>
+                        </a:rPr>
+                        <a:t>Debit</a:t>
+                      </a:r>
+                    </a:p>
+                  </a:txBody>
+                  <a:tcPr marL="45720" marR="45720" marT="18288" marB="18288" anchor="ctr">
+                    <a:lnL>
+                      <a:noFill/>
+                    </a:lnL>
+                    <a:lnR>
+                      <a:noFill/>
+                    </a:lnR>
+                    <a:lnT w="9525" cap="flat" cmpd="sng" algn="ctr">
+                      <a:solidFill>
+                        <a:srgbClr val="D6D6D6"/>
+                      </a:solidFill>
+                      <a:prstDash val="solid"/>
+                      <a:round/>
+                      <a:headEnd type="none" w="med" len="med"/>
+                      <a:tailEnd type="none" w="med" len="med"/>
+                    </a:lnT>
+                    <a:lnB w="9525">
+                      <a:solidFill>
+                        <a:srgbClr val="D6D6D6"/>
+                      </a:solidFill>
+                    </a:lnB>
+                  </a:tcPr>
+                </a:tc>
+                <a:tc>
+                  <a:txBody>
+                    <a:bodyPr/>
+                    <a:lstStyle/>
+                    <a:p>
+                      <a:pPr algn="l">
+                        <a:lnSpc>
+                          <a:spcPct val="100000"/>
+                        </a:lnSpc>
+                        <a:spcAft>
+                          <a:spcPts val="0"/>
+                        </a:spcAft>
+                      </a:pPr>
+                      <a:r>
+                        <a:rPr sz="800" b="0" dirty="0">
+                          <a:latin typeface="微软雅黑"/>
+                          <a:ea typeface="微软雅黑"/>
+                        </a:rPr>
+                        <a:t>CREDIT24 REPAY REF 9102233445</a:t>
+                      </a:r>
+                    </a:p>
+                  </a:txBody>
+                  <a:tcPr marL="45720" marR="45720" marT="18288" marB="18288" anchor="ctr">
+                    <a:lnL>
+                      <a:noFill/>
+                    </a:lnL>
+                    <a:lnR>
+                      <a:noFill/>
+                    </a:lnR>
+                    <a:lnT w="9525" cap="flat" cmpd="sng" algn="ctr">
+                      <a:solidFill>
+                        <a:srgbClr val="D6D6D6"/>
+                      </a:solidFill>
+                      <a:prstDash val="solid"/>
+                      <a:round/>
+                      <a:headEnd type="none" w="med" len="med"/>
+                      <a:tailEnd type="none" w="med" len="med"/>
+                    </a:lnT>
+                    <a:lnB w="9525">
+                      <a:solidFill>
+                        <a:srgbClr val="D6D6D6"/>
+                      </a:solidFill>
+                    </a:lnB>
+                  </a:tcPr>
+                </a:tc>
+                <a:tc>
+                  <a:txBody>
+                    <a:bodyPr/>
+                    <a:lstStyle/>
+                    <a:p>
+                      <a:pPr algn="l">
+                        <a:lnSpc>
+                          <a:spcPct val="100000"/>
+                        </a:lnSpc>
+                        <a:spcAft>
+                          <a:spcPts val="0"/>
+                        </a:spcAft>
+                      </a:pPr>
+                      <a:r>
+                        <a:rPr sz="800" b="0">
+                          <a:latin typeface="微软雅黑"/>
+                          <a:ea typeface="微软雅黑"/>
+                        </a:rPr>
+                        <a:t>SACC Loans</a:t>
+                      </a:r>
+                    </a:p>
+                  </a:txBody>
+                  <a:tcPr marL="45720" marR="45720" marT="18288" marB="18288" anchor="ctr">
+                    <a:lnL>
+                      <a:noFill/>
+                    </a:lnL>
+                    <a:lnR>
+                      <a:noFill/>
+                    </a:lnR>
+                    <a:lnT w="9525" cap="flat" cmpd="sng" algn="ctr">
+                      <a:solidFill>
+                        <a:srgbClr val="D6D6D6"/>
+                      </a:solidFill>
+                      <a:prstDash val="solid"/>
+                      <a:round/>
+                      <a:headEnd type="none" w="med" len="med"/>
+                      <a:tailEnd type="none" w="med" len="med"/>
+                    </a:lnT>
+                    <a:lnB w="9525">
+                      <a:solidFill>
+                        <a:srgbClr val="D6D6D6"/>
+                      </a:solidFill>
+                    </a:lnB>
+                  </a:tcPr>
+                </a:tc>
+                <a:tc>
+                  <a:txBody>
+                    <a:bodyPr/>
+                    <a:lstStyle/>
+                    <a:p>
+                      <a:pPr algn="l">
+                        <a:lnSpc>
+                          <a:spcPct val="100000"/>
+                        </a:lnSpc>
+                        <a:spcAft>
+                          <a:spcPts val="0"/>
+                        </a:spcAft>
+                      </a:pPr>
+                      <a:r>
+                        <a:rPr sz="800" b="0">
+                          <a:latin typeface="微软雅黑"/>
+                          <a:ea typeface="微软雅黑"/>
+                        </a:rPr>
+                        <a:t>Non-SACC（LOC 循环授信）</a:t>
+                      </a:r>
+                    </a:p>
+                  </a:txBody>
+                  <a:tcPr marL="45720" marR="45720" marT="18288" marB="18288" anchor="ctr">
+                    <a:lnL>
+                      <a:noFill/>
+                    </a:lnL>
+                    <a:lnR>
+                      <a:noFill/>
+                    </a:lnR>
+                    <a:lnT w="9525" cap="flat" cmpd="sng" algn="ctr">
+                      <a:solidFill>
+                        <a:srgbClr val="D6D6D6"/>
+                      </a:solidFill>
+                      <a:prstDash val="solid"/>
+                      <a:round/>
+                      <a:headEnd type="none" w="med" len="med"/>
+                      <a:tailEnd type="none" w="med" len="med"/>
+                    </a:lnT>
+                    <a:lnB w="9525">
+                      <a:solidFill>
+                        <a:srgbClr val="D6D6D6"/>
+                      </a:solidFill>
+                    </a:lnB>
+                  </a:tcPr>
+                </a:tc>
+                <a:extLst>
+                  <a:ext uri="{0D108BD9-81ED-4DB2-BD59-A6C34878D82A}">
+                    <a16:rowId xmlns:a16="http://schemas.microsoft.com/office/drawing/2014/main" val="10002"/>
                   </a:ext>
                 </a:extLst>
               </a:tr>
@@ -21240,7 +21240,7 @@
         </p:nvSpPr>
         <p:spPr>
           <a:xfrm>
-            <a:off x="4681727" y="4407154"/>
+            <a:off x="4681727" y="4004818"/>
             <a:ext cx="6958584" cy="274320"/>
           </a:xfrm>
           <a:prstGeom prst="rect">
@@ -21317,7 +21317,7 @@
         </p:nvSpPr>
         <p:spPr>
           <a:xfrm>
-            <a:off x="4681727" y="4407154"/>
+            <a:off x="4681727" y="4004818"/>
             <a:ext cx="76200" cy="228600"/>
           </a:xfrm>
           <a:prstGeom prst="rect">
@@ -21394,7 +21394,7 @@
         </p:nvSpPr>
         <p:spPr>
           <a:xfrm>
-            <a:off x="4809743" y="4443730"/>
+            <a:off x="4809743" y="4041394"/>
             <a:ext cx="6775704" cy="219456"/>
           </a:xfrm>
           <a:prstGeom prst="rect">
@@ -21456,7 +21456,7 @@
         </p:nvSpPr>
         <p:spPr>
           <a:xfrm>
-            <a:off x="4663440" y="4901183"/>
+            <a:off x="4663440" y="4498847"/>
             <a:ext cx="566928" cy="237744"/>
           </a:xfrm>
           <a:prstGeom prst="rect">
@@ -21533,7 +21533,7 @@
         </p:nvSpPr>
         <p:spPr>
           <a:xfrm>
-            <a:off x="4663440" y="4901183"/>
+            <a:off x="4663440" y="4498847"/>
             <a:ext cx="566928" cy="237744"/>
           </a:xfrm>
           <a:prstGeom prst="rect">
@@ -21595,7 +21595,7 @@
         </p:nvSpPr>
         <p:spPr>
           <a:xfrm>
-            <a:off x="5303520" y="4882896"/>
+            <a:off x="5303520" y="4480559"/>
             <a:ext cx="6318504" cy="274320"/>
           </a:xfrm>
           <a:prstGeom prst="rect">
@@ -21657,7 +21657,7 @@
         </p:nvSpPr>
         <p:spPr>
           <a:xfrm>
-            <a:off x="4681727" y="5175503"/>
+            <a:off x="4681727" y="4773167"/>
             <a:ext cx="6958584" cy="219456"/>
           </a:xfrm>
           <a:prstGeom prst="rect">
@@ -21719,7 +21719,7 @@
         </p:nvSpPr>
         <p:spPr>
           <a:xfrm>
-            <a:off x="4718304" y="6453632"/>
+            <a:off x="4718304" y="6215888"/>
             <a:ext cx="6958584" cy="274320"/>
           </a:xfrm>
           <a:prstGeom prst="rect">
@@ -21796,7 +21796,7 @@
         </p:nvSpPr>
         <p:spPr>
           <a:xfrm>
-            <a:off x="4718304" y="6453632"/>
+            <a:off x="4718304" y="6215888"/>
             <a:ext cx="76200" cy="228600"/>
           </a:xfrm>
           <a:prstGeom prst="rect">
@@ -21873,7 +21873,7 @@
         </p:nvSpPr>
         <p:spPr>
           <a:xfrm>
-            <a:off x="4846320" y="6490208"/>
+            <a:off x="4846320" y="6252464"/>
             <a:ext cx="6775704" cy="219456"/>
           </a:xfrm>
           <a:prstGeom prst="rect">

--- a/银行流水分享_V2.0.pptx
+++ b/银行流水分享_V2.0.pptx
@@ -1616,7 +1616,7 @@
             <a:fld id="{4B68A51D-33DD-5B4A-A86B-549782FCD6DF}" type="datetimeFigureOut">
               <a:rPr kumimoji="1" lang="zh-CN" altLang="en-US" smtClean="0"/>
               <a:pPr/>
-              <a:t>2026/8/10</a:t>
+              <a:t>2026/8/11</a:t>
             </a:fld>
             <a:endParaRPr kumimoji="1" lang="zh-CN" altLang="en-US" dirty="0"/>
           </a:p>
@@ -2422,7 +2422,7 @@
           <p:nvPr>
             <p:extLst>
               <p:ext uri="{F5677B7D-0D2A-4D9B-9A5C-6D8D7D0E5A5D}">
-                <pptd:line xmlns="" xmlns:a14="http://schemas.microsoft.com/office/drawing/2010/main" xmlns:c="http://schemas.openxmlformats.org/drawingml/2006/chart" xmlns:cx="http://schemas.microsoft.com/office/drawing/2014/chartex" xmlns:m="http://schemas.openxmlformats.org/officeDocument/2006/math" xmlns:mc="http://schemas.openxmlformats.org/markup-compatibility/2006" xmlns:pptd="https://kimi-design.msh.team/pptd/2026" encoding="base64url">eyJ2aWV3Qm94IjpbMSwzNDBdLCJwb2ludHMiOiIwLDAgMCwzNDAifQ</pptd:line>
+                <pptd:line xmlns:pptd="https://kimi-design.msh.team/pptd/2026" xmlns:mc="http://schemas.openxmlformats.org/markup-compatibility/2006" xmlns:m="http://schemas.openxmlformats.org/officeDocument/2006/math" xmlns:cx="http://schemas.microsoft.com/office/drawing/2014/chartex" xmlns:c="http://schemas.openxmlformats.org/drawingml/2006/chart" xmlns:a14="http://schemas.microsoft.com/office/drawing/2010/main" xmlns="" encoding="base64url">eyJ2aWV3Qm94IjpbMSwzNDBdLCJwb2ludHMiOiIwLDAgMCwzNDAifQ</pptd:line>
               </p:ext>
             </p:extLst>
           </p:nvPr>
@@ -2593,7 +2593,7 @@
           <p:nvPr>
             <p:extLst>
               <p:ext uri="{F5677B7D-0D2A-4D9B-9A5C-6D8D7D0E5A5D}">
-                <pptd:line xmlns="" xmlns:a14="http://schemas.microsoft.com/office/drawing/2010/main" xmlns:c="http://schemas.openxmlformats.org/drawingml/2006/chart" xmlns:cx="http://schemas.microsoft.com/office/drawing/2014/chartex" xmlns:m="http://schemas.openxmlformats.org/officeDocument/2006/math" xmlns:mc="http://schemas.openxmlformats.org/markup-compatibility/2006" xmlns:pptd="https://kimi-design.msh.team/pptd/2026" encoding="base64url">eyJ2aWV3Qm94IjpbMzc2LDFdLCJwb2ludHMiOiIwLDAgMzc2LDAifQ</pptd:line>
+                <pptd:line xmlns:pptd="https://kimi-design.msh.team/pptd/2026" xmlns:mc="http://schemas.openxmlformats.org/markup-compatibility/2006" xmlns:m="http://schemas.openxmlformats.org/officeDocument/2006/math" xmlns:cx="http://schemas.microsoft.com/office/drawing/2014/chartex" xmlns:c="http://schemas.openxmlformats.org/drawingml/2006/chart" xmlns:a14="http://schemas.microsoft.com/office/drawing/2010/main" xmlns="" encoding="base64url">eyJ2aWV3Qm94IjpbMzc2LDFdLCJwb2ludHMiOiIwLDAgMzc2LDAifQ</pptd:line>
               </p:ext>
             </p:extLst>
           </p:nvPr>
@@ -2717,7 +2717,7 @@
           <p:nvPr>
             <p:extLst>
               <p:ext uri="{F5677B7D-0D2A-4D9B-9A5C-6D8D7D0E5A5D}">
-                <pptd:line xmlns="" xmlns:a14="http://schemas.microsoft.com/office/drawing/2010/main" xmlns:c="http://schemas.openxmlformats.org/drawingml/2006/chart" xmlns:cx="http://schemas.microsoft.com/office/drawing/2014/chartex" xmlns:m="http://schemas.openxmlformats.org/officeDocument/2006/math" xmlns:mc="http://schemas.openxmlformats.org/markup-compatibility/2006" xmlns:pptd="https://kimi-design.msh.team/pptd/2026" encoding="base64url">eyJ2aWV3Qm94IjpbMzc2LDFdLCJwb2ludHMiOiIwLDAgMzc2LDAifQ</pptd:line>
+                <pptd:line xmlns:pptd="https://kimi-design.msh.team/pptd/2026" xmlns:mc="http://schemas.openxmlformats.org/markup-compatibility/2006" xmlns:m="http://schemas.openxmlformats.org/officeDocument/2006/math" xmlns:cx="http://schemas.microsoft.com/office/drawing/2014/chartex" xmlns:c="http://schemas.openxmlformats.org/drawingml/2006/chart" xmlns:a14="http://schemas.microsoft.com/office/drawing/2010/main" xmlns="" encoding="base64url">eyJ2aWV3Qm94IjpbMzc2LDFdLCJwb2ludHMiOiIwLDAgMzc2LDAifQ</pptd:line>
               </p:ext>
             </p:extLst>
           </p:nvPr>
@@ -2861,7 +2861,7 @@
           <p:nvPr>
             <p:extLst>
               <p:ext uri="{F5677B7D-0D2A-4D9B-9A5C-6D8D7D0E5A5D}">
-                <pptd:line xmlns="" xmlns:a14="http://schemas.microsoft.com/office/drawing/2010/main" xmlns:c="http://schemas.openxmlformats.org/drawingml/2006/chart" xmlns:cx="http://schemas.microsoft.com/office/drawing/2014/chartex" xmlns:m="http://schemas.openxmlformats.org/officeDocument/2006/math" xmlns:mc="http://schemas.openxmlformats.org/markup-compatibility/2006" xmlns:pptd="https://kimi-design.msh.team/pptd/2026" encoding="base64url">eyJ2aWV3Qm94IjpbMzc2LDFdLCJwb2ludHMiOiIwLDAgMzc2LDAifQ</pptd:line>
+                <pptd:line xmlns:pptd="https://kimi-design.msh.team/pptd/2026" xmlns:mc="http://schemas.openxmlformats.org/markup-compatibility/2006" xmlns:m="http://schemas.openxmlformats.org/officeDocument/2006/math" xmlns:cx="http://schemas.microsoft.com/office/drawing/2014/chartex" xmlns:c="http://schemas.openxmlformats.org/drawingml/2006/chart" xmlns:a14="http://schemas.microsoft.com/office/drawing/2010/main" xmlns="" encoding="base64url">eyJ2aWV3Qm94IjpbMzc2LDFdLCJwb2ludHMiOiIwLDAgMzc2LDAifQ</pptd:line>
               </p:ext>
             </p:extLst>
           </p:nvPr>
@@ -3025,7 +3025,7 @@
             <p:nvPr>
               <p:extLst>
                 <p:ext uri="{F5677B7D-0D2A-4D9B-9A5C-6D8D7D0E5A5D}">
-                  <pptd:line xmlns:pptd="https://kimi-design.msh.team/pptd/2026" xmlns:mc="http://schemas.openxmlformats.org/markup-compatibility/2006" xmlns:m="http://schemas.openxmlformats.org/officeDocument/2006/math" xmlns:cx="http://schemas.microsoft.com/office/drawing/2014/chartex" xmlns:c="http://schemas.openxmlformats.org/drawingml/2006/chart" xmlns:a14="http://schemas.microsoft.com/office/drawing/2010/main" xmlns="" encoding="base64url">eyJ2aWV3Qm94IjpbODU2LDFdLCJwb2ludHMiOiIwLDAgODU2LDAifQ</pptd:line>
+                  <pptd:line xmlns="" xmlns:a14="http://schemas.microsoft.com/office/drawing/2010/main" xmlns:c="http://schemas.openxmlformats.org/drawingml/2006/chart" xmlns:cx="http://schemas.microsoft.com/office/drawing/2014/chartex" xmlns:m="http://schemas.openxmlformats.org/officeDocument/2006/math" xmlns:mc="http://schemas.openxmlformats.org/markup-compatibility/2006" xmlns:pptd="https://kimi-design.msh.team/pptd/2026" encoding="base64url">eyJ2aWV3Qm94IjpbODU2LDFdLCJwb2ludHMiOiIwLDAgODU2LDAifQ</pptd:line>
                 </p:ext>
               </p:extLst>
             </p:nvPr>
@@ -9683,8 +9683,8 @@
         </p:nvSpPr>
         <p:spPr>
           <a:xfrm>
-            <a:off x="803844" y="3529584"/>
-            <a:ext cx="1197864" cy="256032"/>
+            <a:off x="803844" y="3593592"/>
+            <a:ext cx="1197864" cy="182880"/>
           </a:xfrm>
           <a:prstGeom prst="roundRect">
             <a:avLst>
@@ -9732,8 +9732,8 @@
         </p:nvSpPr>
         <p:spPr>
           <a:xfrm>
-            <a:off x="803844" y="3584448"/>
-            <a:ext cx="1197864" cy="164592"/>
+            <a:off x="803844" y="3611880"/>
+            <a:ext cx="1197864" cy="146304"/>
           </a:xfrm>
           <a:prstGeom prst="rect">
             <a:avLst/>
@@ -9746,18 +9746,11 @@
           </a:bodyPr>
           <a:lstStyle/>
           <a:p>
-            <a:pPr algn="ctr">
-              <a:lnSpc>
-                <a:spcPct val="100000"/>
-              </a:lnSpc>
-            </a:pPr>
             <a:r>
-              <a:rPr lang="zh-CN" sz="900" b="1">
+              <a:rPr sz="800" b="1">
                 <a:solidFill>
                   <a:srgbClr val="1F4E79"/>
                 </a:solidFill>
-                <a:latin typeface="微软雅黑"/>
-                <a:ea typeface="微软雅黑"/>
               </a:rPr>
               <a:t>多头借贷</a:t>
             </a:r>
@@ -9772,8 +9765,8 @@
         </p:nvSpPr>
         <p:spPr>
           <a:xfrm>
-            <a:off x="2074860" y="3529584"/>
-            <a:ext cx="1197864" cy="256032"/>
+            <a:off x="2074860" y="3593592"/>
+            <a:ext cx="1197864" cy="182880"/>
           </a:xfrm>
           <a:prstGeom prst="roundRect">
             <a:avLst>
@@ -9821,8 +9814,8 @@
         </p:nvSpPr>
         <p:spPr>
           <a:xfrm>
-            <a:off x="2074860" y="3584448"/>
-            <a:ext cx="1197864" cy="164592"/>
+            <a:off x="2074860" y="3611880"/>
+            <a:ext cx="1197864" cy="146304"/>
           </a:xfrm>
           <a:prstGeom prst="rect">
             <a:avLst/>
@@ -9835,20 +9828,13 @@
           </a:bodyPr>
           <a:lstStyle/>
           <a:p>
-            <a:pPr algn="ctr">
-              <a:lnSpc>
-                <a:spcPct val="100000"/>
-              </a:lnSpc>
-            </a:pPr>
             <a:r>
-              <a:rPr lang="zh-CN" sz="900" b="1">
+              <a:rPr sz="800" b="1">
                 <a:solidFill>
                   <a:srgbClr val="1F4E79"/>
                 </a:solidFill>
-                <a:latin typeface="微软雅黑"/>
-                <a:ea typeface="微软雅黑"/>
               </a:rPr>
-              <a:t>近期借贷活跃</a:t>
+              <a:t>近期新增贷款</a:t>
             </a:r>
           </a:p>
         </p:txBody>
@@ -9861,8 +9847,8 @@
         </p:nvSpPr>
         <p:spPr>
           <a:xfrm>
-            <a:off x="3345876" y="3529584"/>
-            <a:ext cx="1197864" cy="256032"/>
+            <a:off x="3345876" y="3593592"/>
+            <a:ext cx="1197864" cy="182880"/>
           </a:xfrm>
           <a:prstGeom prst="roundRect">
             <a:avLst>
@@ -9910,8 +9896,8 @@
         </p:nvSpPr>
         <p:spPr>
           <a:xfrm>
-            <a:off x="3345876" y="3584448"/>
-            <a:ext cx="1197864" cy="164592"/>
+            <a:off x="3345876" y="3611880"/>
+            <a:ext cx="1197864" cy="146304"/>
           </a:xfrm>
           <a:prstGeom prst="rect">
             <a:avLst/>
@@ -9924,20 +9910,13 @@
           </a:bodyPr>
           <a:lstStyle/>
           <a:p>
-            <a:pPr algn="ctr">
-              <a:lnSpc>
-                <a:spcPct val="100000"/>
-              </a:lnSpc>
-            </a:pPr>
             <a:r>
-              <a:rPr lang="zh-CN" sz="900" b="1">
+              <a:rPr sz="800" b="1">
                 <a:solidFill>
                   <a:srgbClr val="1F4E79"/>
                 </a:solidFill>
-                <a:latin typeface="微软雅黑"/>
-                <a:ea typeface="微软雅黑"/>
               </a:rPr>
-              <a:t>整体持续还款</a:t>
+              <a:t>高成本借贷</a:t>
             </a:r>
           </a:p>
         </p:txBody>
@@ -9950,8 +9929,8 @@
         </p:nvSpPr>
         <p:spPr>
           <a:xfrm>
-            <a:off x="4616892" y="3529584"/>
-            <a:ext cx="1197864" cy="256032"/>
+            <a:off x="4616892" y="3593592"/>
+            <a:ext cx="1197864" cy="182880"/>
           </a:xfrm>
           <a:prstGeom prst="roundRect">
             <a:avLst>
@@ -9999,8 +9978,8 @@
         </p:nvSpPr>
         <p:spPr>
           <a:xfrm>
-            <a:off x="4616892" y="3584448"/>
-            <a:ext cx="1197864" cy="164592"/>
+            <a:off x="4616892" y="3611880"/>
+            <a:ext cx="1197864" cy="146304"/>
           </a:xfrm>
           <a:prstGeom prst="rect">
             <a:avLst/>
@@ -10013,583 +9992,13 @@
           </a:bodyPr>
           <a:lstStyle/>
           <a:p>
-            <a:pPr algn="ctr">
-              <a:lnSpc>
-                <a:spcPct val="100000"/>
-              </a:lnSpc>
-            </a:pPr>
             <a:r>
-              <a:rPr lang="zh-CN" sz="900" b="1">
+              <a:rPr sz="800" b="1">
                 <a:solidFill>
                   <a:srgbClr val="1F4E79"/>
                 </a:solidFill>
-                <a:latin typeface="微软雅黑"/>
-                <a:ea typeface="微软雅黑"/>
               </a:rPr>
-              <a:t>存在轻微还款波动</a:t>
-            </a:r>
-          </a:p>
-        </p:txBody>
-      </p:sp>
-      <p:sp>
-        <p:nvSpPr>
-          <p:cNvPr id="59" name="用户-g1-bar"/>
-          <p:cNvSpPr/>
-          <p:nvPr/>
-        </p:nvSpPr>
-        <p:spPr>
-          <a:xfrm>
-            <a:off x="648396" y="3890772"/>
-            <a:ext cx="45720" cy="128016"/>
-          </a:xfrm>
-          <a:prstGeom prst="rect">
-            <a:avLst/>
-          </a:prstGeom>
-          <a:solidFill>
-            <a:srgbClr val="D6A000"/>
-          </a:solidFill>
-          <a:ln>
-            <a:noFill/>
-          </a:ln>
-          <a:effectLst/>
-        </p:spPr>
-        <p:style>
-          <a:lnRef idx="1">
-            <a:schemeClr val="accent1"/>
-          </a:lnRef>
-          <a:fillRef idx="3">
-            <a:schemeClr val="accent1"/>
-          </a:fillRef>
-          <a:effectRef idx="2">
-            <a:schemeClr val="accent1"/>
-          </a:effectRef>
-          <a:fontRef idx="minor">
-            <a:schemeClr val="lt1"/>
-          </a:fontRef>
-        </p:style>
-        <p:txBody>
-          <a:bodyPr rtlCol="0" anchor="ctr"/>
-          <a:lstStyle/>
-          <a:p>
-            <a:pPr algn="ctr"/>
-            <a:endParaRPr/>
-          </a:p>
-        </p:txBody>
-      </p:sp>
-      <p:sp>
-        <p:nvSpPr>
-          <p:cNvPr id="60" name="用户-g1-t"/>
-          <p:cNvSpPr txBox="1"/>
-          <p:nvPr/>
-        </p:nvSpPr>
-        <p:spPr>
-          <a:xfrm>
-            <a:off x="739836" y="3877056"/>
-            <a:ext cx="1828800" cy="146304"/>
-          </a:xfrm>
-          <a:prstGeom prst="rect">
-            <a:avLst/>
-          </a:prstGeom>
-          <a:noFill/>
-        </p:spPr>
-        <p:txBody>
-          <a:bodyPr wrap="square" lIns="0" tIns="0" rIns="0" bIns="0">
-            <a:noAutofit/>
-          </a:bodyPr>
-          <a:lstStyle/>
-          <a:p>
-            <a:pPr>
-              <a:lnSpc>
-                <a:spcPct val="100000"/>
-              </a:lnSpc>
-            </a:pPr>
-            <a:r>
-              <a:rPr lang="zh-CN" sz="1000" b="1">
-                <a:solidFill>
-                  <a:srgbClr val="1F4E79"/>
-                </a:solidFill>
-                <a:latin typeface="微软雅黑"/>
-                <a:ea typeface="微软雅黑"/>
-              </a:rPr>
-              <a:t>负债压力</a:t>
-            </a:r>
-          </a:p>
-        </p:txBody>
-      </p:sp>
-      <p:sp>
-        <p:nvSpPr>
-          <p:cNvPr id="61" name="用户-g1-1"/>
-          <p:cNvSpPr txBox="1"/>
-          <p:nvPr/>
-        </p:nvSpPr>
-        <p:spPr>
-          <a:xfrm>
-            <a:off x="803844" y="4059936"/>
-            <a:ext cx="1280160" cy="347472"/>
-          </a:xfrm>
-          <a:prstGeom prst="rect">
-            <a:avLst/>
-          </a:prstGeom>
-          <a:noFill/>
-        </p:spPr>
-        <p:txBody>
-          <a:bodyPr wrap="square" lIns="0" tIns="0" rIns="0" bIns="0">
-            <a:noAutofit/>
-          </a:bodyPr>
-          <a:lstStyle/>
-          <a:p>
-            <a:pPr>
-              <a:lnSpc>
-                <a:spcPct val="100000"/>
-              </a:lnSpc>
-            </a:pPr>
-            <a:r>
-              <a:rPr sz="1000" b="1">
-                <a:solidFill>
-                  <a:srgbClr val="0A0A0A"/>
-                </a:solidFill>
-              </a:rPr>
-              <a:t>平均月还款金额</a:t>
-            </a:r>
-            <a:r>
-              <a:rPr sz="800" b="0">
-                <a:solidFill>
-                  <a:srgbClr val="606060"/>
-                </a:solidFill>
-              </a:rPr>
-              <a:t>A$428</a:t>
-            </a:r>
-          </a:p>
-        </p:txBody>
-      </p:sp>
-      <p:sp>
-        <p:nvSpPr>
-          <p:cNvPr id="62" name="用户-g1-2"/>
-          <p:cNvSpPr txBox="1"/>
-          <p:nvPr/>
-        </p:nvSpPr>
-        <p:spPr>
-          <a:xfrm>
-            <a:off x="2074860" y="4059936"/>
-            <a:ext cx="1280160" cy="347472"/>
-          </a:xfrm>
-          <a:prstGeom prst="rect">
-            <a:avLst/>
-          </a:prstGeom>
-          <a:noFill/>
-        </p:spPr>
-        <p:txBody>
-          <a:bodyPr wrap="square" lIns="0" tIns="0" rIns="0" bIns="0">
-            <a:noAutofit/>
-          </a:bodyPr>
-          <a:lstStyle/>
-          <a:p>
-            <a:pPr>
-              <a:lnSpc>
-                <a:spcPct val="100000"/>
-              </a:lnSpc>
-            </a:pPr>
-            <a:r>
-              <a:rPr sz="1000" b="1">
-                <a:solidFill>
-                  <a:srgbClr val="0A0A0A"/>
-                </a:solidFill>
-              </a:rPr>
-              <a:t>预计待还金额</a:t>
-            </a:r>
-            <a:r>
-              <a:rPr sz="800" b="0">
-                <a:solidFill>
-                  <a:srgbClr val="606060"/>
-                </a:solidFill>
-              </a:rPr>
-              <a:t>A$1,016</a:t>
-            </a:r>
-          </a:p>
-        </p:txBody>
-      </p:sp>
-      <p:sp>
-        <p:nvSpPr>
-          <p:cNvPr id="63" name="用户-g1-3"/>
-          <p:cNvSpPr txBox="1"/>
-          <p:nvPr/>
-        </p:nvSpPr>
-        <p:spPr>
-          <a:xfrm>
-            <a:off x="3345876" y="4059936"/>
-            <a:ext cx="1280160" cy="347472"/>
-          </a:xfrm>
-          <a:prstGeom prst="rect">
-            <a:avLst/>
-          </a:prstGeom>
-          <a:noFill/>
-        </p:spPr>
-        <p:txBody>
-          <a:bodyPr wrap="square" lIns="0" tIns="0" rIns="0" bIns="0">
-            <a:noAutofit/>
-          </a:bodyPr>
-          <a:lstStyle/>
-          <a:p>
-            <a:pPr>
-              <a:lnSpc>
-                <a:spcPct val="100000"/>
-              </a:lnSpc>
-            </a:pPr>
-            <a:r>
-              <a:rPr sz="1000" b="1">
-                <a:solidFill>
-                  <a:srgbClr val="0A0A0A"/>
-                </a:solidFill>
-              </a:rPr>
-              <a:t>贷款机构数量</a:t>
-            </a:r>
-            <a:r>
-              <a:rPr sz="800" b="0">
-                <a:solidFill>
-                  <a:srgbClr val="606060"/>
-                </a:solidFill>
-              </a:rPr>
-              <a:t>2 家</a:t>
-            </a:r>
-          </a:p>
-        </p:txBody>
-      </p:sp>
-      <p:sp>
-        <p:nvSpPr>
-          <p:cNvPr id="64" name="用户-g1-4"/>
-          <p:cNvSpPr txBox="1"/>
-          <p:nvPr/>
-        </p:nvSpPr>
-        <p:spPr>
-          <a:xfrm>
-            <a:off x="4616892" y="4059936"/>
-            <a:ext cx="1280160" cy="347472"/>
-          </a:xfrm>
-          <a:prstGeom prst="rect">
-            <a:avLst/>
-          </a:prstGeom>
-          <a:noFill/>
-        </p:spPr>
-        <p:txBody>
-          <a:bodyPr wrap="square" lIns="0" tIns="0" rIns="0" bIns="0">
-            <a:noAutofit/>
-          </a:bodyPr>
-          <a:lstStyle/>
-          <a:p>
-            <a:pPr>
-              <a:lnSpc>
-                <a:spcPct val="100000"/>
-              </a:lnSpc>
-            </a:pPr>
-            <a:r>
-              <a:rPr sz="1000" b="1">
-                <a:solidFill>
-                  <a:srgbClr val="0A0A0A"/>
-                </a:solidFill>
-              </a:rPr>
-              <a:t>90 天借款金额</a:t>
-            </a:r>
-            <a:r>
-              <a:rPr sz="800" b="0">
-                <a:solidFill>
-                  <a:srgbClr val="606060"/>
-                </a:solidFill>
-              </a:rPr>
-              <a:t>A$2,300</a:t>
-            </a:r>
-          </a:p>
-        </p:txBody>
-      </p:sp>
-      <p:sp>
-        <p:nvSpPr>
-          <p:cNvPr id="71" name="用户-g3-bar"/>
-          <p:cNvSpPr/>
-          <p:nvPr/>
-        </p:nvSpPr>
-        <p:spPr>
-          <a:xfrm>
-            <a:off x="648396" y="4544568"/>
-            <a:ext cx="45720" cy="128016"/>
-          </a:xfrm>
-          <a:prstGeom prst="rect">
-            <a:avLst/>
-          </a:prstGeom>
-          <a:solidFill>
-            <a:srgbClr val="D6A000"/>
-          </a:solidFill>
-          <a:ln>
-            <a:noFill/>
-          </a:ln>
-          <a:effectLst/>
-        </p:spPr>
-        <p:style>
-          <a:lnRef idx="1">
-            <a:schemeClr val="accent1"/>
-          </a:lnRef>
-          <a:fillRef idx="3">
-            <a:schemeClr val="accent1"/>
-          </a:fillRef>
-          <a:effectRef idx="2">
-            <a:schemeClr val="accent1"/>
-          </a:effectRef>
-          <a:fontRef idx="minor">
-            <a:schemeClr val="lt1"/>
-          </a:fontRef>
-        </p:style>
-        <p:txBody>
-          <a:bodyPr rtlCol="0" anchor="ctr"/>
-          <a:lstStyle/>
-          <a:p>
-            <a:pPr algn="ctr"/>
-            <a:endParaRPr/>
-          </a:p>
-        </p:txBody>
-      </p:sp>
-      <p:sp>
-        <p:nvSpPr>
-          <p:cNvPr id="72" name="用户-g3-t"/>
-          <p:cNvSpPr txBox="1"/>
-          <p:nvPr/>
-        </p:nvSpPr>
-        <p:spPr>
-          <a:xfrm>
-            <a:off x="739836" y="4535424"/>
-            <a:ext cx="1828800" cy="146304"/>
-          </a:xfrm>
-          <a:prstGeom prst="rect">
-            <a:avLst/>
-          </a:prstGeom>
-          <a:noFill/>
-        </p:spPr>
-        <p:txBody>
-          <a:bodyPr wrap="square" lIns="0" tIns="0" rIns="0" bIns="0">
-            <a:noAutofit/>
-          </a:bodyPr>
-          <a:lstStyle/>
-          <a:p>
-            <a:pPr>
-              <a:lnSpc>
-                <a:spcPct val="100000"/>
-              </a:lnSpc>
-            </a:pPr>
-            <a:r>
-              <a:rPr lang="zh-CN" sz="1000" b="1">
-                <a:solidFill>
-                  <a:srgbClr val="1F4E79"/>
-                </a:solidFill>
-                <a:latin typeface="微软雅黑"/>
-                <a:ea typeface="微软雅黑"/>
-              </a:rPr>
-              <a:t>还款与风险表现</a:t>
-            </a:r>
-          </a:p>
-        </p:txBody>
-      </p:sp>
-      <p:sp>
-        <p:nvSpPr>
-          <p:cNvPr id="77" name="Fa-head"/>
-          <p:cNvSpPr/>
-          <p:nvPr/>
-        </p:nvSpPr>
-        <p:spPr>
-          <a:xfrm>
-            <a:off x="6454836" y="3529584"/>
-            <a:ext cx="5010912" cy="237744"/>
-          </a:xfrm>
-          <a:prstGeom prst="roundRect">
-            <a:avLst>
-              <a:gd name="adj" fmla="val 10000"/>
-            </a:avLst>
-          </a:prstGeom>
-          <a:solidFill>
-            <a:srgbClr val="FAF3E0"/>
-          </a:solidFill>
-          <a:ln w="12700">
-            <a:solidFill>
-              <a:srgbClr val="D6A000"/>
-            </a:solidFill>
-          </a:ln>
-          <a:effectLst/>
-        </p:spPr>
-        <p:style>
-          <a:lnRef idx="1">
-            <a:schemeClr val="accent1"/>
-          </a:lnRef>
-          <a:fillRef idx="3">
-            <a:schemeClr val="accent1"/>
-          </a:fillRef>
-          <a:effectRef idx="2">
-            <a:schemeClr val="accent1"/>
-          </a:effectRef>
-          <a:fontRef idx="minor">
-            <a:schemeClr val="lt1"/>
-          </a:fontRef>
-        </p:style>
-        <p:txBody>
-          <a:bodyPr rtlCol="0" anchor="ctr"/>
-          <a:lstStyle/>
-          <a:p>
-            <a:pPr algn="ctr"/>
-            <a:endParaRPr/>
-          </a:p>
-        </p:txBody>
-      </p:sp>
-      <p:sp>
-        <p:nvSpPr>
-          <p:cNvPr id="78" name="Fa-h1"/>
-          <p:cNvSpPr txBox="1"/>
-          <p:nvPr/>
-        </p:nvSpPr>
-        <p:spPr>
-          <a:xfrm>
-            <a:off x="6546275" y="3557016"/>
-            <a:ext cx="1417320" cy="182880"/>
-          </a:xfrm>
-          <a:prstGeom prst="rect">
-            <a:avLst/>
-          </a:prstGeom>
-          <a:noFill/>
-        </p:spPr>
-        <p:txBody>
-          <a:bodyPr wrap="square" lIns="0" tIns="0" rIns="0" bIns="0">
-            <a:noAutofit/>
-          </a:bodyPr>
-          <a:lstStyle/>
-          <a:p>
-            <a:pPr>
-              <a:lnSpc>
-                <a:spcPct val="100000"/>
-              </a:lnSpc>
-            </a:pPr>
-            <a:r>
-              <a:rPr lang="zh-CN" sz="1000" b="1">
-                <a:solidFill>
-                  <a:srgbClr val="1F4E79"/>
-                </a:solidFill>
-                <a:latin typeface="微软雅黑"/>
-                <a:ea typeface="微软雅黑"/>
-              </a:rPr>
-              <a:t>Fair Go Finance</a:t>
-            </a:r>
-          </a:p>
-        </p:txBody>
-      </p:sp>
-      <p:sp>
-        <p:nvSpPr>
-          <p:cNvPr id="79" name="Fa-h2"/>
-          <p:cNvSpPr txBox="1"/>
-          <p:nvPr/>
-        </p:nvSpPr>
-        <p:spPr>
-          <a:xfrm>
-            <a:off x="8055035" y="3575304"/>
-            <a:ext cx="640080" cy="164592"/>
-          </a:xfrm>
-          <a:prstGeom prst="rect">
-            <a:avLst/>
-          </a:prstGeom>
-          <a:noFill/>
-        </p:spPr>
-        <p:txBody>
-          <a:bodyPr wrap="square" lIns="0" tIns="0" rIns="0" bIns="0">
-            <a:noAutofit/>
-          </a:bodyPr>
-          <a:lstStyle/>
-          <a:p>
-            <a:pPr>
-              <a:lnSpc>
-                <a:spcPct val="100000"/>
-              </a:lnSpc>
-            </a:pPr>
-            <a:r>
-              <a:rPr lang="zh-CN" sz="900" b="0">
-                <a:solidFill>
-                  <a:srgbClr val="3D3C3A"/>
-                </a:solidFill>
-                <a:latin typeface="微软雅黑"/>
-                <a:ea typeface="微软雅黑"/>
-              </a:rPr>
-              <a:t>SACC</a:t>
-            </a:r>
-          </a:p>
-        </p:txBody>
-      </p:sp>
-      <p:sp>
-        <p:nvSpPr>
-          <p:cNvPr id="80" name="Fa-h3"/>
-          <p:cNvSpPr txBox="1"/>
-          <p:nvPr/>
-        </p:nvSpPr>
-        <p:spPr>
-          <a:xfrm>
-            <a:off x="8832276" y="3575304"/>
-            <a:ext cx="548640" cy="164592"/>
-          </a:xfrm>
-          <a:prstGeom prst="rect">
-            <a:avLst/>
-          </a:prstGeom>
-          <a:noFill/>
-        </p:spPr>
-        <p:txBody>
-          <a:bodyPr wrap="square" lIns="0" tIns="0" rIns="0" bIns="0">
-            <a:noAutofit/>
-          </a:bodyPr>
-          <a:lstStyle/>
-          <a:p>
-            <a:pPr>
-              <a:lnSpc>
-                <a:spcPct val="100000"/>
-              </a:lnSpc>
-            </a:pPr>
-            <a:r>
-              <a:rPr lang="zh-CN" sz="900" b="0">
-                <a:solidFill>
-                  <a:srgbClr val="3D3C3A"/>
-                </a:solidFill>
-                <a:latin typeface="微软雅黑"/>
-                <a:ea typeface="微软雅黑"/>
-              </a:rPr>
-              <a:t>在贷</a:t>
-            </a:r>
-          </a:p>
-        </p:txBody>
-      </p:sp>
-      <p:sp>
-        <p:nvSpPr>
-          <p:cNvPr id="81" name="Fa-h4"/>
-          <p:cNvSpPr txBox="1"/>
-          <p:nvPr/>
-        </p:nvSpPr>
-        <p:spPr>
-          <a:xfrm>
-            <a:off x="9700956" y="3557016"/>
-            <a:ext cx="1463040" cy="182880"/>
-          </a:xfrm>
-          <a:prstGeom prst="rect">
-            <a:avLst/>
-          </a:prstGeom>
-          <a:noFill/>
-        </p:spPr>
-        <p:txBody>
-          <a:bodyPr wrap="square" lIns="0" tIns="0" rIns="0" bIns="0">
-            <a:noAutofit/>
-          </a:bodyPr>
-          <a:lstStyle/>
-          <a:p>
-            <a:pPr algn="r">
-              <a:lnSpc>
-                <a:spcPct val="100000"/>
-              </a:lnSpc>
-            </a:pPr>
-            <a:r>
-              <a:rPr lang="zh-CN" sz="1100" b="1">
-                <a:solidFill>
-                  <a:srgbClr val="D6A000"/>
-                </a:solidFill>
-                <a:latin typeface="微软雅黑"/>
-                <a:ea typeface="微软雅黑"/>
-              </a:rPr>
-              <a:t>APR 42%</a:t>
+              <a:t>存在轻微逾期</a:t>
             </a:r>
           </a:p>
         </p:txBody>
@@ -10602,7 +10011,7 @@
         </p:nvSpPr>
         <p:spPr>
           <a:xfrm>
-            <a:off x="6454836" y="3895344"/>
+            <a:off x="6454836" y="4261104"/>
             <a:ext cx="1463040" cy="146304"/>
           </a:xfrm>
           <a:prstGeom prst="rect">
@@ -10616,20 +10025,13 @@
           </a:bodyPr>
           <a:lstStyle/>
           <a:p>
-            <a:pPr>
-              <a:lnSpc>
-                <a:spcPct val="100000"/>
-              </a:lnSpc>
-            </a:pPr>
             <a:r>
-              <a:rPr lang="zh-CN" sz="800" b="0">
+              <a:rPr sz="800" b="0">
                 <a:solidFill>
                   <a:srgbClr val="606060"/>
                 </a:solidFill>
-                <a:latin typeface="微软雅黑"/>
-                <a:ea typeface="微软雅黑"/>
               </a:rPr>
-              <a:t>借款</a:t>
+              <a:t>借款金额</a:t>
             </a:r>
           </a:p>
         </p:txBody>
@@ -10642,8 +10044,8 @@
         </p:nvSpPr>
         <p:spPr>
           <a:xfrm>
-            <a:off x="6454836" y="4041648"/>
-            <a:ext cx="1463040" cy="219456"/>
+            <a:off x="6454836" y="3913632"/>
+            <a:ext cx="1463040" cy="292608"/>
           </a:xfrm>
           <a:prstGeom prst="rect">
             <a:avLst/>
@@ -10656,18 +10058,11 @@
           </a:bodyPr>
           <a:lstStyle/>
           <a:p>
-            <a:pPr>
-              <a:lnSpc>
-                <a:spcPct val="100000"/>
-              </a:lnSpc>
-            </a:pPr>
             <a:r>
-              <a:rPr lang="zh-CN" sz="1400" b="1">
+              <a:rPr sz="1800" b="1">
                 <a:solidFill>
                   <a:srgbClr val="1F4E79"/>
                 </a:solidFill>
-                <a:latin typeface="微软雅黑"/>
-                <a:ea typeface="微软雅黑"/>
               </a:rPr>
               <a:t>A$1,500</a:t>
             </a:r>
@@ -10682,7 +10077,7 @@
         </p:nvSpPr>
         <p:spPr>
           <a:xfrm>
-            <a:off x="8128188" y="3895344"/>
+            <a:off x="8128188" y="4261104"/>
             <a:ext cx="1463040" cy="146304"/>
           </a:xfrm>
           <a:prstGeom prst="rect">
@@ -10696,20 +10091,13 @@
           </a:bodyPr>
           <a:lstStyle/>
           <a:p>
-            <a:pPr>
-              <a:lnSpc>
-                <a:spcPct val="100000"/>
-              </a:lnSpc>
-            </a:pPr>
             <a:r>
-              <a:rPr lang="zh-CN" sz="800" b="0">
+              <a:rPr sz="800" b="0">
                 <a:solidFill>
                   <a:srgbClr val="606060"/>
                 </a:solidFill>
-                <a:latin typeface="微软雅黑"/>
-                <a:ea typeface="微软雅黑"/>
               </a:rPr>
-              <a:t>已还</a:t>
+              <a:t>已还本金</a:t>
             </a:r>
           </a:p>
         </p:txBody>
@@ -10722,8 +10110,8 @@
         </p:nvSpPr>
         <p:spPr>
           <a:xfrm>
-            <a:off x="8128188" y="4041648"/>
-            <a:ext cx="1463040" cy="219456"/>
+            <a:off x="8128188" y="3913632"/>
+            <a:ext cx="1463040" cy="292608"/>
           </a:xfrm>
           <a:prstGeom prst="rect">
             <a:avLst/>
@@ -10736,18 +10124,11 @@
           </a:bodyPr>
           <a:lstStyle/>
           <a:p>
-            <a:pPr>
-              <a:lnSpc>
-                <a:spcPct val="100000"/>
-              </a:lnSpc>
-            </a:pPr>
             <a:r>
-              <a:rPr lang="zh-CN" sz="1400" b="1">
+              <a:rPr sz="1800" b="1">
                 <a:solidFill>
                   <a:srgbClr val="1F4E79"/>
                 </a:solidFill>
-                <a:latin typeface="微软雅黑"/>
-                <a:ea typeface="微软雅黑"/>
               </a:rPr>
               <a:t>A$936</a:t>
             </a:r>
@@ -10762,7 +10143,7 @@
         </p:nvSpPr>
         <p:spPr>
           <a:xfrm>
-            <a:off x="9801540" y="3895344"/>
+            <a:off x="9801540" y="4261104"/>
             <a:ext cx="1463040" cy="146304"/>
           </a:xfrm>
           <a:prstGeom prst="rect">
@@ -10776,20 +10157,13 @@
           </a:bodyPr>
           <a:lstStyle/>
           <a:p>
-            <a:pPr>
-              <a:lnSpc>
-                <a:spcPct val="100000"/>
-              </a:lnSpc>
-            </a:pPr>
             <a:r>
-              <a:rPr lang="zh-CN" sz="800" b="0">
+              <a:rPr sz="800" b="0">
                 <a:solidFill>
                   <a:srgbClr val="606060"/>
                 </a:solidFill>
-                <a:latin typeface="微软雅黑"/>
-                <a:ea typeface="微软雅黑"/>
               </a:rPr>
-              <a:t>待还</a:t>
+              <a:t>剩余本金</a:t>
             </a:r>
           </a:p>
         </p:txBody>
@@ -10802,8 +10176,8 @@
         </p:nvSpPr>
         <p:spPr>
           <a:xfrm>
-            <a:off x="9801540" y="4041648"/>
-            <a:ext cx="1463040" cy="219456"/>
+            <a:off x="9801540" y="3913632"/>
+            <a:ext cx="1463040" cy="292608"/>
           </a:xfrm>
           <a:prstGeom prst="rect">
             <a:avLst/>
@@ -10816,18 +10190,11 @@
           </a:bodyPr>
           <a:lstStyle/>
           <a:p>
-            <a:pPr>
-              <a:lnSpc>
-                <a:spcPct val="100000"/>
-              </a:lnSpc>
-            </a:pPr>
             <a:r>
-              <a:rPr lang="zh-CN" sz="1400" b="1">
+              <a:rPr sz="1800" b="1">
                 <a:solidFill>
                   <a:srgbClr val="1F4E79"/>
                 </a:solidFill>
-                <a:latin typeface="微软雅黑"/>
-                <a:ea typeface="微软雅黑"/>
               </a:rPr>
               <a:t>A$564</a:t>
             </a:r>
@@ -10916,14 +10283,14 @@
       </p:sp>
       <p:sp>
         <p:nvSpPr>
-          <p:cNvPr id="94" name="Fa-g1-t"/>
+          <p:cNvPr id="116" name="用户-m1-t"/>
           <p:cNvSpPr txBox="1"/>
           <p:nvPr/>
         </p:nvSpPr>
         <p:spPr>
           <a:xfrm>
-            <a:off x="6454836" y="4498848"/>
-            <a:ext cx="1609344" cy="146304"/>
+            <a:off x="739749" y="3931920"/>
+            <a:ext cx="1645920" cy="182880"/>
           </a:xfrm>
           <a:prstGeom prst="rect">
             <a:avLst/>
@@ -10932,22 +10299,632 @@
         </p:spPr>
         <p:txBody>
           <a:bodyPr wrap="square" lIns="0" tIns="0" rIns="0" bIns="0">
-            <a:noAutofit/>
+            <a:spAutoFit/>
           </a:bodyPr>
           <a:lstStyle/>
           <a:p>
-            <a:pPr>
-              <a:lnSpc>
-                <a:spcPct val="100000"/>
-              </a:lnSpc>
+            <a:pPr algn="l">
+              <a:spcAft>
+                <a:spcPts val="0"/>
+              </a:spcAft>
             </a:pPr>
             <a:r>
-              <a:rPr lang="zh-CN" sz="1000" b="1">
+              <a:rPr sz="1000" b="1">
                 <a:solidFill>
                   <a:srgbClr val="1F4E79"/>
                 </a:solidFill>
-                <a:latin typeface="微软雅黑"/>
-                <a:ea typeface="微软雅黑"/>
+              </a:rPr>
+              <a:t>负债情况</a:t>
+            </a:r>
+          </a:p>
+        </p:txBody>
+      </p:sp>
+      <p:sp>
+        <p:nvSpPr>
+          <p:cNvPr id="117" name="用户-m1-1"/>
+          <p:cNvSpPr txBox="1"/>
+          <p:nvPr/>
+        </p:nvSpPr>
+        <p:spPr>
+          <a:xfrm>
+            <a:off x="739749" y="4133087"/>
+            <a:ext cx="1737360" cy="201168"/>
+          </a:xfrm>
+          <a:prstGeom prst="rect">
+            <a:avLst/>
+          </a:prstGeom>
+          <a:noFill/>
+        </p:spPr>
+        <p:txBody>
+          <a:bodyPr wrap="square" lIns="0" tIns="0" rIns="0" bIns="0">
+            <a:spAutoFit/>
+          </a:bodyPr>
+          <a:lstStyle/>
+          <a:p>
+            <a:pPr algn="l">
+              <a:spcAft>
+                <a:spcPts val="0"/>
+              </a:spcAft>
+            </a:pPr>
+            <a:r>
+              <a:rPr sz="900" b="0">
+                <a:solidFill>
+                  <a:srgbClr val="606060"/>
+                </a:solidFill>
+              </a:rPr>
+              <a:t>预计待还</a:t>
+            </a:r>
+            <a:r>
+              <a:rPr sz="1500" b="1">
+                <a:solidFill>
+                  <a:srgbClr val="1F4E79"/>
+                </a:solidFill>
+              </a:rPr>
+              <a:t>A$1,016</a:t>
+            </a:r>
+          </a:p>
+        </p:txBody>
+      </p:sp>
+      <p:sp>
+        <p:nvSpPr>
+          <p:cNvPr id="118" name="用户-m1-2"/>
+          <p:cNvSpPr txBox="1"/>
+          <p:nvPr/>
+        </p:nvSpPr>
+        <p:spPr>
+          <a:xfrm>
+            <a:off x="739749" y="4370831"/>
+            <a:ext cx="1737360" cy="201168"/>
+          </a:xfrm>
+          <a:prstGeom prst="rect">
+            <a:avLst/>
+          </a:prstGeom>
+          <a:noFill/>
+        </p:spPr>
+        <p:txBody>
+          <a:bodyPr wrap="square" lIns="0" tIns="0" rIns="0" bIns="0">
+            <a:spAutoFit/>
+          </a:bodyPr>
+          <a:lstStyle/>
+          <a:p>
+            <a:pPr algn="l">
+              <a:spcAft>
+                <a:spcPts val="0"/>
+              </a:spcAft>
+            </a:pPr>
+            <a:r>
+              <a:rPr sz="900" b="0">
+                <a:solidFill>
+                  <a:srgbClr val="606060"/>
+                </a:solidFill>
+              </a:rPr>
+              <a:t>平均月还款</a:t>
+            </a:r>
+            <a:r>
+              <a:rPr sz="1500" b="1">
+                <a:solidFill>
+                  <a:srgbClr val="1F4E79"/>
+                </a:solidFill>
+              </a:rPr>
+              <a:t>A$428</a:t>
+            </a:r>
+          </a:p>
+        </p:txBody>
+      </p:sp>
+      <p:sp>
+        <p:nvSpPr>
+          <p:cNvPr id="119" name="用户-m1-3"/>
+          <p:cNvSpPr txBox="1"/>
+          <p:nvPr/>
+        </p:nvSpPr>
+        <p:spPr>
+          <a:xfrm>
+            <a:off x="739749" y="4608575"/>
+            <a:ext cx="1737360" cy="201168"/>
+          </a:xfrm>
+          <a:prstGeom prst="rect">
+            <a:avLst/>
+          </a:prstGeom>
+          <a:noFill/>
+        </p:spPr>
+        <p:txBody>
+          <a:bodyPr wrap="square" lIns="0" tIns="0" rIns="0" bIns="0">
+            <a:spAutoFit/>
+          </a:bodyPr>
+          <a:lstStyle/>
+          <a:p>
+            <a:pPr algn="l">
+              <a:spcAft>
+                <a:spcPts val="0"/>
+              </a:spcAft>
+            </a:pPr>
+            <a:r>
+              <a:rPr sz="900" b="0">
+                <a:solidFill>
+                  <a:srgbClr val="606060"/>
+                </a:solidFill>
+              </a:rPr>
+              <a:t>贷款机构2 家</a:t>
+            </a:r>
+          </a:p>
+        </p:txBody>
+      </p:sp>
+      <p:cxnSp>
+        <p:nvCxnSpPr>
+          <p:cNvPr id="120" name="用户-sep1"/>
+          <p:cNvCxnSpPr/>
+          <p:nvPr/>
+        </p:nvCxnSpPr>
+        <p:spPr>
+          <a:xfrm>
+            <a:off x="2422245" y="4023360"/>
+            <a:ext cx="0" cy="1051560"/>
+          </a:xfrm>
+          <a:prstGeom prst="line">
+            <a:avLst/>
+          </a:prstGeom>
+          <a:ln w="12700">
+            <a:solidFill>
+              <a:srgbClr val="D6D6D6"/>
+            </a:solidFill>
+          </a:ln>
+        </p:spPr>
+        <p:style>
+          <a:lnRef idx="2">
+            <a:schemeClr val="accent1"/>
+          </a:lnRef>
+          <a:fillRef idx="0">
+            <a:schemeClr val="accent1"/>
+          </a:fillRef>
+          <a:effectRef idx="1">
+            <a:schemeClr val="accent1"/>
+          </a:effectRef>
+          <a:fontRef idx="minor">
+            <a:schemeClr val="tx1"/>
+          </a:fontRef>
+        </p:style>
+      </p:cxnSp>
+      <p:sp>
+        <p:nvSpPr>
+          <p:cNvPr id="121" name="用户-m2-t"/>
+          <p:cNvSpPr txBox="1"/>
+          <p:nvPr/>
+        </p:nvSpPr>
+        <p:spPr>
+          <a:xfrm>
+            <a:off x="2513685" y="3931920"/>
+            <a:ext cx="1645920" cy="182880"/>
+          </a:xfrm>
+          <a:prstGeom prst="rect">
+            <a:avLst/>
+          </a:prstGeom>
+          <a:noFill/>
+        </p:spPr>
+        <p:txBody>
+          <a:bodyPr wrap="square" lIns="0" tIns="0" rIns="0" bIns="0">
+            <a:spAutoFit/>
+          </a:bodyPr>
+          <a:lstStyle/>
+          <a:p>
+            <a:pPr algn="l">
+              <a:spcAft>
+                <a:spcPts val="0"/>
+              </a:spcAft>
+            </a:pPr>
+            <a:r>
+              <a:rPr sz="1000" b="1">
+                <a:solidFill>
+                  <a:srgbClr val="1F4E79"/>
+                </a:solidFill>
+              </a:rPr>
+              <a:t>履约表现</a:t>
+            </a:r>
+          </a:p>
+        </p:txBody>
+      </p:sp>
+      <p:sp>
+        <p:nvSpPr>
+          <p:cNvPr id="122" name="用户-m2-1"/>
+          <p:cNvSpPr txBox="1"/>
+          <p:nvPr/>
+        </p:nvSpPr>
+        <p:spPr>
+          <a:xfrm>
+            <a:off x="2513685" y="4133087"/>
+            <a:ext cx="1737360" cy="201168"/>
+          </a:xfrm>
+          <a:prstGeom prst="rect">
+            <a:avLst/>
+          </a:prstGeom>
+          <a:noFill/>
+        </p:spPr>
+        <p:txBody>
+          <a:bodyPr wrap="square" lIns="0" tIns="0" rIns="0" bIns="0">
+            <a:spAutoFit/>
+          </a:bodyPr>
+          <a:lstStyle/>
+          <a:p>
+            <a:pPr algn="l">
+              <a:spcAft>
+                <a:spcPts val="0"/>
+              </a:spcAft>
+            </a:pPr>
+            <a:r>
+              <a:rPr sz="900" b="0">
+                <a:solidFill>
+                  <a:srgbClr val="606060"/>
+                </a:solidFill>
+              </a:rPr>
+              <a:t>90 天还款</a:t>
+            </a:r>
+            <a:r>
+              <a:rPr sz="1500" b="1">
+                <a:solidFill>
+                  <a:srgbClr val="1F4E79"/>
+                </a:solidFill>
+              </a:rPr>
+              <a:t>9 次</a:t>
+            </a:r>
+          </a:p>
+        </p:txBody>
+      </p:sp>
+      <p:sp>
+        <p:nvSpPr>
+          <p:cNvPr id="123" name="用户-m2-2"/>
+          <p:cNvSpPr txBox="1"/>
+          <p:nvPr/>
+        </p:nvSpPr>
+        <p:spPr>
+          <a:xfrm>
+            <a:off x="2513685" y="4370831"/>
+            <a:ext cx="1737360" cy="201168"/>
+          </a:xfrm>
+          <a:prstGeom prst="rect">
+            <a:avLst/>
+          </a:prstGeom>
+          <a:noFill/>
+        </p:spPr>
+        <p:txBody>
+          <a:bodyPr wrap="square" lIns="0" tIns="0" rIns="0" bIns="0">
+            <a:spAutoFit/>
+          </a:bodyPr>
+          <a:lstStyle/>
+          <a:p>
+            <a:pPr algn="l">
+              <a:spcAft>
+                <a:spcPts val="0"/>
+              </a:spcAft>
+            </a:pPr>
+            <a:r>
+              <a:rPr sz="900" b="0">
+                <a:solidFill>
+                  <a:srgbClr val="606060"/>
+                </a:solidFill>
+              </a:rPr>
+              <a:t>还款中断无</a:t>
+            </a:r>
+          </a:p>
+        </p:txBody>
+      </p:sp>
+      <p:sp>
+        <p:nvSpPr>
+          <p:cNvPr id="124" name="用户-m2-3"/>
+          <p:cNvSpPr txBox="1"/>
+          <p:nvPr/>
+        </p:nvSpPr>
+        <p:spPr>
+          <a:xfrm>
+            <a:off x="2513685" y="4608575"/>
+            <a:ext cx="1737360" cy="201168"/>
+          </a:xfrm>
+          <a:prstGeom prst="rect">
+            <a:avLst/>
+          </a:prstGeom>
+          <a:noFill/>
+        </p:spPr>
+        <p:txBody>
+          <a:bodyPr wrap="square" lIns="0" tIns="0" rIns="0" bIns="0">
+            <a:spAutoFit/>
+          </a:bodyPr>
+          <a:lstStyle/>
+          <a:p>
+            <a:pPr algn="l">
+              <a:spcAft>
+                <a:spcPts val="0"/>
+              </a:spcAft>
+            </a:pPr>
+            <a:r>
+              <a:rPr sz="900" b="0">
+                <a:solidFill>
+                  <a:srgbClr val="606060"/>
+                </a:solidFill>
+              </a:rPr>
+              <a:t>近 90 天新增借款1 笔</a:t>
+            </a:r>
+          </a:p>
+        </p:txBody>
+      </p:sp>
+      <p:cxnSp>
+        <p:nvCxnSpPr>
+          <p:cNvPr id="125" name="用户-sep2"/>
+          <p:cNvCxnSpPr/>
+          <p:nvPr/>
+        </p:nvCxnSpPr>
+        <p:spPr>
+          <a:xfrm>
+            <a:off x="4196181" y="4023360"/>
+            <a:ext cx="0" cy="1051560"/>
+          </a:xfrm>
+          <a:prstGeom prst="line">
+            <a:avLst/>
+          </a:prstGeom>
+          <a:ln w="12700">
+            <a:solidFill>
+              <a:srgbClr val="D6D6D6"/>
+            </a:solidFill>
+          </a:ln>
+        </p:spPr>
+        <p:style>
+          <a:lnRef idx="2">
+            <a:schemeClr val="accent1"/>
+          </a:lnRef>
+          <a:fillRef idx="0">
+            <a:schemeClr val="accent1"/>
+          </a:fillRef>
+          <a:effectRef idx="1">
+            <a:schemeClr val="accent1"/>
+          </a:effectRef>
+          <a:fontRef idx="minor">
+            <a:schemeClr val="tx1"/>
+          </a:fontRef>
+        </p:style>
+      </p:cxnSp>
+      <p:sp>
+        <p:nvSpPr>
+          <p:cNvPr id="126" name="用户-m3-t"/>
+          <p:cNvSpPr txBox="1"/>
+          <p:nvPr/>
+        </p:nvSpPr>
+        <p:spPr>
+          <a:xfrm>
+            <a:off x="4287621" y="3931920"/>
+            <a:ext cx="1645920" cy="182880"/>
+          </a:xfrm>
+          <a:prstGeom prst="rect">
+            <a:avLst/>
+          </a:prstGeom>
+          <a:noFill/>
+        </p:spPr>
+        <p:txBody>
+          <a:bodyPr wrap="square" lIns="0" tIns="0" rIns="0" bIns="0">
+            <a:spAutoFit/>
+          </a:bodyPr>
+          <a:lstStyle/>
+          <a:p>
+            <a:pPr algn="l">
+              <a:spcAft>
+                <a:spcPts val="0"/>
+              </a:spcAft>
+            </a:pPr>
+            <a:r>
+              <a:rPr sz="1000" b="1">
+                <a:solidFill>
+                  <a:srgbClr val="1F4E79"/>
+                </a:solidFill>
+              </a:rPr>
+              <a:t>风险信号</a:t>
+            </a:r>
+          </a:p>
+        </p:txBody>
+      </p:sp>
+      <p:sp>
+        <p:nvSpPr>
+          <p:cNvPr id="127" name="用户-m3-1"/>
+          <p:cNvSpPr txBox="1"/>
+          <p:nvPr/>
+        </p:nvSpPr>
+        <p:spPr>
+          <a:xfrm>
+            <a:off x="4287621" y="4133087"/>
+            <a:ext cx="1737360" cy="201168"/>
+          </a:xfrm>
+          <a:prstGeom prst="rect">
+            <a:avLst/>
+          </a:prstGeom>
+          <a:noFill/>
+        </p:spPr>
+        <p:txBody>
+          <a:bodyPr wrap="square" lIns="0" tIns="0" rIns="0" bIns="0">
+            <a:spAutoFit/>
+          </a:bodyPr>
+          <a:lstStyle/>
+          <a:p>
+            <a:pPr algn="l">
+              <a:spcAft>
+                <a:spcPts val="0"/>
+              </a:spcAft>
+            </a:pPr>
+            <a:r>
+              <a:rPr sz="900" b="0">
+                <a:solidFill>
+                  <a:srgbClr val="606060"/>
+                </a:solidFill>
+              </a:rPr>
+              <a:t>轻微逾期</a:t>
+            </a:r>
+            <a:r>
+              <a:rPr sz="1500" b="1">
+                <a:solidFill>
+                  <a:srgbClr val="D6A000"/>
+                </a:solidFill>
+              </a:rPr>
+              <a:t>1 次</a:t>
+            </a:r>
+          </a:p>
+        </p:txBody>
+      </p:sp>
+      <p:sp>
+        <p:nvSpPr>
+          <p:cNvPr id="128" name="用户-m3-2"/>
+          <p:cNvSpPr txBox="1"/>
+          <p:nvPr/>
+        </p:nvSpPr>
+        <p:spPr>
+          <a:xfrm>
+            <a:off x="4287621" y="4370831"/>
+            <a:ext cx="1737360" cy="201168"/>
+          </a:xfrm>
+          <a:prstGeom prst="rect">
+            <a:avLst/>
+          </a:prstGeom>
+          <a:noFill/>
+        </p:spPr>
+        <p:txBody>
+          <a:bodyPr wrap="square" lIns="0" tIns="0" rIns="0" bIns="0">
+            <a:spAutoFit/>
+          </a:bodyPr>
+          <a:lstStyle/>
+          <a:p>
+            <a:pPr algn="l">
+              <a:spcAft>
+                <a:spcPts val="0"/>
+              </a:spcAft>
+            </a:pPr>
+            <a:r>
+              <a:rPr sz="900" b="0">
+                <a:solidFill>
+                  <a:srgbClr val="606060"/>
+                </a:solidFill>
+              </a:rPr>
+              <a:t>扣款失败</a:t>
+            </a:r>
+            <a:r>
+              <a:rPr sz="1500" b="1">
+                <a:solidFill>
+                  <a:srgbClr val="D6A000"/>
+                </a:solidFill>
+              </a:rPr>
+              <a:t>1 次</a:t>
+            </a:r>
+          </a:p>
+        </p:txBody>
+      </p:sp>
+      <p:sp>
+        <p:nvSpPr>
+          <p:cNvPr id="129" name="用户-m3-3"/>
+          <p:cNvSpPr txBox="1"/>
+          <p:nvPr/>
+        </p:nvSpPr>
+        <p:spPr>
+          <a:xfrm>
+            <a:off x="4287621" y="4608575"/>
+            <a:ext cx="1737360" cy="201168"/>
+          </a:xfrm>
+          <a:prstGeom prst="rect">
+            <a:avLst/>
+          </a:prstGeom>
+          <a:noFill/>
+        </p:spPr>
+        <p:txBody>
+          <a:bodyPr wrap="square" lIns="0" tIns="0" rIns="0" bIns="0">
+            <a:spAutoFit/>
+          </a:bodyPr>
+          <a:lstStyle/>
+          <a:p>
+            <a:pPr algn="l">
+              <a:spcAft>
+                <a:spcPts val="0"/>
+              </a:spcAft>
+            </a:pPr>
+            <a:r>
+              <a:rPr sz="900" b="0">
+                <a:solidFill>
+                  <a:srgbClr val="606060"/>
+                </a:solidFill>
+              </a:rPr>
+              <a:t>90 天借款A$2,300</a:t>
+            </a:r>
+          </a:p>
+        </p:txBody>
+      </p:sp>
+      <p:sp>
+        <p:nvSpPr>
+          <p:cNvPr id="130" name="Fa-sub"/>
+          <p:cNvSpPr txBox="1"/>
+          <p:nvPr/>
+        </p:nvSpPr>
+        <p:spPr>
+          <a:xfrm>
+            <a:off x="6454749" y="3538728"/>
+            <a:ext cx="5029200" cy="201168"/>
+          </a:xfrm>
+          <a:prstGeom prst="rect">
+            <a:avLst/>
+          </a:prstGeom>
+          <a:noFill/>
+        </p:spPr>
+        <p:txBody>
+          <a:bodyPr wrap="square" lIns="0" tIns="0" rIns="0" bIns="0">
+            <a:spAutoFit/>
+          </a:bodyPr>
+          <a:lstStyle/>
+          <a:p>
+            <a:pPr algn="l">
+              <a:spcAft>
+                <a:spcPts val="0"/>
+              </a:spcAft>
+            </a:pPr>
+            <a:r>
+              <a:rPr sz="1100" b="1">
+                <a:solidFill>
+                  <a:srgbClr val="1F4E79"/>
+                </a:solidFill>
+              </a:rPr>
+              <a:t>SACC</a:t>
+            </a:r>
+            <a:r>
+              <a:rPr sz="1100" b="0">
+                <a:solidFill>
+                  <a:srgbClr val="606060"/>
+                </a:solidFill>
+              </a:rPr>
+              <a:t>   ｜  在贷</a:t>
+            </a:r>
+          </a:p>
+        </p:txBody>
+      </p:sp>
+      <p:sp>
+        <p:nvSpPr>
+          <p:cNvPr id="131" name="Fa-c-还款计划-t"/>
+          <p:cNvSpPr txBox="1"/>
+          <p:nvPr/>
+        </p:nvSpPr>
+        <p:spPr>
+          <a:xfrm>
+            <a:off x="6454749" y="4590288"/>
+            <a:ext cx="1609344" cy="164592"/>
+          </a:xfrm>
+          <a:prstGeom prst="rect">
+            <a:avLst/>
+          </a:prstGeom>
+          <a:noFill/>
+        </p:spPr>
+        <p:txBody>
+          <a:bodyPr wrap="square" lIns="0" tIns="0" rIns="0" bIns="0">
+            <a:spAutoFit/>
+          </a:bodyPr>
+          <a:lstStyle/>
+          <a:p>
+            <a:pPr algn="l">
+              <a:spcAft>
+                <a:spcPts val="0"/>
+              </a:spcAft>
+            </a:pPr>
+            <a:r>
+              <a:rPr sz="1000" b="1">
+                <a:solidFill>
+                  <a:srgbClr val="1F4E79"/>
+                </a:solidFill>
               </a:rPr>
               <a:t>还款计划</a:t>
             </a:r>
@@ -10956,13 +10933,13 @@
       </p:sp>
       <p:sp>
         <p:nvSpPr>
-          <p:cNvPr id="95" name="Fa-g1-1"/>
+          <p:cNvPr id="132" name="Fa-c-还款计划-1"/>
           <p:cNvSpPr txBox="1"/>
           <p:nvPr/>
         </p:nvSpPr>
         <p:spPr>
           <a:xfrm>
-            <a:off x="6454836" y="4645152"/>
+            <a:off x="6454749" y="4791456"/>
             <a:ext cx="1609344" cy="182880"/>
           </a:xfrm>
           <a:prstGeom prst="rect">
@@ -10972,27 +10949,27 @@
         </p:spPr>
         <p:txBody>
           <a:bodyPr wrap="square" lIns="0" tIns="0" rIns="0" bIns="0">
-            <a:noAutofit/>
+            <a:spAutoFit/>
           </a:bodyPr>
           <a:lstStyle/>
           <a:p>
-            <a:pPr>
-              <a:lnSpc>
-                <a:spcPct val="100000"/>
-              </a:lnSpc>
+            <a:pPr algn="l">
+              <a:spcAft>
+                <a:spcPts val="0"/>
+              </a:spcAft>
             </a:pPr>
             <a:r>
-              <a:rPr sz="1000" b="1">
+              <a:rPr sz="900" b="0">
                 <a:solidFill>
-                  <a:srgbClr val="0A0A0A"/>
+                  <a:srgbClr val="606060"/>
                 </a:solidFill>
               </a:rPr>
               <a:t>月还款</a:t>
             </a:r>
             <a:r>
-              <a:rPr sz="800" b="0">
+              <a:rPr sz="900" b="1">
                 <a:solidFill>
-                  <a:srgbClr val="606060"/>
+                  <a:srgbClr val="3D3C3A"/>
                 </a:solidFill>
               </a:rPr>
               <a:t>约 A$338</a:t>
@@ -11002,13 +10979,13 @@
       </p:sp>
       <p:sp>
         <p:nvSpPr>
-          <p:cNvPr id="96" name="Fa-g1-2"/>
+          <p:cNvPr id="133" name="Fa-c-还款计划-2"/>
           <p:cNvSpPr txBox="1"/>
           <p:nvPr/>
         </p:nvSpPr>
         <p:spPr>
           <a:xfrm>
-            <a:off x="6454836" y="4791456"/>
+            <a:off x="6454749" y="5010912"/>
             <a:ext cx="1609344" cy="182880"/>
           </a:xfrm>
           <a:prstGeom prst="rect">
@@ -11018,27 +10995,27 @@
         </p:spPr>
         <p:txBody>
           <a:bodyPr wrap="square" lIns="0" tIns="0" rIns="0" bIns="0">
-            <a:noAutofit/>
+            <a:spAutoFit/>
           </a:bodyPr>
           <a:lstStyle/>
           <a:p>
-            <a:pPr>
-              <a:lnSpc>
-                <a:spcPct val="100000"/>
-              </a:lnSpc>
+            <a:pPr algn="l">
+              <a:spcAft>
+                <a:spcPts val="0"/>
+              </a:spcAft>
             </a:pPr>
             <a:r>
-              <a:rPr sz="1000" b="1">
+              <a:rPr sz="900" b="0">
                 <a:solidFill>
-                  <a:srgbClr val="0A0A0A"/>
+                  <a:srgbClr val="606060"/>
                 </a:solidFill>
               </a:rPr>
               <a:t>每两周</a:t>
             </a:r>
             <a:r>
-              <a:rPr sz="800" b="0">
+              <a:rPr sz="900" b="1">
                 <a:solidFill>
-                  <a:srgbClr val="606060"/>
+                  <a:srgbClr val="3D3C3A"/>
                 </a:solidFill>
               </a:rPr>
               <a:t>A$156</a:t>
@@ -11048,13 +11025,13 @@
       </p:sp>
       <p:sp>
         <p:nvSpPr>
-          <p:cNvPr id="97" name="Fa-g1-3"/>
+          <p:cNvPr id="134" name="Fa-c-还款计划-3"/>
           <p:cNvSpPr txBox="1"/>
           <p:nvPr/>
         </p:nvSpPr>
         <p:spPr>
           <a:xfrm>
-            <a:off x="6454836" y="4937760"/>
+            <a:off x="6454749" y="5230368"/>
             <a:ext cx="1609344" cy="182880"/>
           </a:xfrm>
           <a:prstGeom prst="rect">
@@ -11064,27 +11041,27 @@
         </p:spPr>
         <p:txBody>
           <a:bodyPr wrap="square" lIns="0" tIns="0" rIns="0" bIns="0">
-            <a:noAutofit/>
+            <a:spAutoFit/>
           </a:bodyPr>
           <a:lstStyle/>
           <a:p>
-            <a:pPr>
-              <a:lnSpc>
-                <a:spcPct val="100000"/>
-              </a:lnSpc>
+            <a:pPr algn="l">
+              <a:spcAft>
+                <a:spcPts val="0"/>
+              </a:spcAft>
             </a:pPr>
             <a:r>
-              <a:rPr sz="1000" b="1">
+              <a:rPr sz="900" b="0">
                 <a:solidFill>
-                  <a:srgbClr val="0A0A0A"/>
+                  <a:srgbClr val="606060"/>
                 </a:solidFill>
               </a:rPr>
               <a:t>90 天还款</a:t>
             </a:r>
             <a:r>
-              <a:rPr sz="800" b="0">
+              <a:rPr sz="900" b="1">
                 <a:solidFill>
-                  <a:srgbClr val="606060"/>
+                  <a:srgbClr val="3D3C3A"/>
                 </a:solidFill>
               </a:rPr>
               <a:t>6 次</a:t>
@@ -11094,53 +11071,13 @@
       </p:sp>
       <p:sp>
         <p:nvSpPr>
-          <p:cNvPr id="98" name="Fa-g2-t"/>
+          <p:cNvPr id="135" name="Fa-c-还款计划-4"/>
           <p:cNvSpPr txBox="1"/>
           <p:nvPr/>
         </p:nvSpPr>
         <p:spPr>
           <a:xfrm>
-            <a:off x="8173908" y="4498848"/>
-            <a:ext cx="1609344" cy="146304"/>
-          </a:xfrm>
-          <a:prstGeom prst="rect">
-            <a:avLst/>
-          </a:prstGeom>
-          <a:noFill/>
-        </p:spPr>
-        <p:txBody>
-          <a:bodyPr wrap="square" lIns="0" tIns="0" rIns="0" bIns="0">
-            <a:noAutofit/>
-          </a:bodyPr>
-          <a:lstStyle/>
-          <a:p>
-            <a:pPr>
-              <a:lnSpc>
-                <a:spcPct val="100000"/>
-              </a:lnSpc>
-            </a:pPr>
-            <a:r>
-              <a:rPr lang="zh-CN" sz="1000" b="1">
-                <a:solidFill>
-                  <a:srgbClr val="1F4E79"/>
-                </a:solidFill>
-                <a:latin typeface="微软雅黑"/>
-                <a:ea typeface="微软雅黑"/>
-              </a:rPr>
-              <a:t>风险表现</a:t>
-            </a:r>
-          </a:p>
-        </p:txBody>
-      </p:sp>
-      <p:sp>
-        <p:nvSpPr>
-          <p:cNvPr id="99" name="Fa-g2-1"/>
-          <p:cNvSpPr txBox="1"/>
-          <p:nvPr/>
-        </p:nvSpPr>
-        <p:spPr>
-          <a:xfrm>
-            <a:off x="8173908" y="4645152"/>
+            <a:off x="6454749" y="5449824"/>
             <a:ext cx="1609344" cy="182880"/>
           </a:xfrm>
           <a:prstGeom prst="rect">
@@ -11150,27 +11087,111 @@
         </p:spPr>
         <p:txBody>
           <a:bodyPr wrap="square" lIns="0" tIns="0" rIns="0" bIns="0">
-            <a:noAutofit/>
+            <a:spAutoFit/>
           </a:bodyPr>
           <a:lstStyle/>
           <a:p>
-            <a:pPr>
-              <a:lnSpc>
-                <a:spcPct val="100000"/>
-              </a:lnSpc>
+            <a:pPr algn="l">
+              <a:spcAft>
+                <a:spcPts val="0"/>
+              </a:spcAft>
+            </a:pPr>
+            <a:r>
+              <a:rPr sz="900" b="0">
+                <a:solidFill>
+                  <a:srgbClr val="606060"/>
+                </a:solidFill>
+              </a:rPr>
+              <a:t>预计剩余</a:t>
+            </a:r>
+            <a:r>
+              <a:rPr sz="900" b="1">
+                <a:solidFill>
+                  <a:srgbClr val="3D3C3A"/>
+                </a:solidFill>
+              </a:rPr>
+              <a:t>4 期</a:t>
+            </a:r>
+          </a:p>
+        </p:txBody>
+      </p:sp>
+      <p:sp>
+        <p:nvSpPr>
+          <p:cNvPr id="136" name="Fa-c-履约表现-t"/>
+          <p:cNvSpPr txBox="1"/>
+          <p:nvPr/>
+        </p:nvSpPr>
+        <p:spPr>
+          <a:xfrm>
+            <a:off x="8173821" y="4590288"/>
+            <a:ext cx="1609344" cy="164592"/>
+          </a:xfrm>
+          <a:prstGeom prst="rect">
+            <a:avLst/>
+          </a:prstGeom>
+          <a:noFill/>
+        </p:spPr>
+        <p:txBody>
+          <a:bodyPr wrap="square" lIns="0" tIns="0" rIns="0" bIns="0">
+            <a:spAutoFit/>
+          </a:bodyPr>
+          <a:lstStyle/>
+          <a:p>
+            <a:pPr algn="l">
+              <a:spcAft>
+                <a:spcPts val="0"/>
+              </a:spcAft>
             </a:pPr>
             <a:r>
               <a:rPr sz="1000" b="1">
                 <a:solidFill>
-                  <a:srgbClr val="0A0A0A"/>
+                  <a:srgbClr val="1F4E79"/>
+                </a:solidFill>
+              </a:rPr>
+              <a:t>履约表现</a:t>
+            </a:r>
+          </a:p>
+        </p:txBody>
+      </p:sp>
+      <p:sp>
+        <p:nvSpPr>
+          <p:cNvPr id="137" name="Fa-c-履约表现-1"/>
+          <p:cNvSpPr txBox="1"/>
+          <p:nvPr/>
+        </p:nvSpPr>
+        <p:spPr>
+          <a:xfrm>
+            <a:off x="8173821" y="4791456"/>
+            <a:ext cx="1609344" cy="182880"/>
+          </a:xfrm>
+          <a:prstGeom prst="rect">
+            <a:avLst/>
+          </a:prstGeom>
+          <a:noFill/>
+        </p:spPr>
+        <p:txBody>
+          <a:bodyPr wrap="square" lIns="0" tIns="0" rIns="0" bIns="0">
+            <a:spAutoFit/>
+          </a:bodyPr>
+          <a:lstStyle/>
+          <a:p>
+            <a:pPr algn="l">
+              <a:spcAft>
+                <a:spcPts val="0"/>
+              </a:spcAft>
+            </a:pPr>
+            <a:r>
+              <a:rPr sz="900" b="0">
+                <a:solidFill>
+                  <a:srgbClr val="606060"/>
                 </a:solidFill>
               </a:rPr>
               <a:t>轻微逾期</a:t>
             </a:r>
             <a:r>
-              <a:rPr sz="800" b="0">
+              <a:rPr sz="1000" b="1">
                 <a:solidFill>
-                  <a:srgbClr val="606060"/>
+                  <a:srgbClr val="D6A000"/>
                 </a:solidFill>
               </a:rPr>
               <a:t>1 次</a:t>
@@ -11180,13 +11201,13 @@
       </p:sp>
       <p:sp>
         <p:nvSpPr>
-          <p:cNvPr id="100" name="Fa-g2-2"/>
+          <p:cNvPr id="138" name="Fa-c-履约表现-2"/>
           <p:cNvSpPr txBox="1"/>
           <p:nvPr/>
         </p:nvSpPr>
         <p:spPr>
           <a:xfrm>
-            <a:off x="8173908" y="4791456"/>
+            <a:off x="8173821" y="5010912"/>
             <a:ext cx="1609344" cy="182880"/>
           </a:xfrm>
           <a:prstGeom prst="rect">
@@ -11196,27 +11217,27 @@
         </p:spPr>
         <p:txBody>
           <a:bodyPr wrap="square" lIns="0" tIns="0" rIns="0" bIns="0">
-            <a:noAutofit/>
+            <a:spAutoFit/>
           </a:bodyPr>
           <a:lstStyle/>
           <a:p>
-            <a:pPr>
-              <a:lnSpc>
-                <a:spcPct val="100000"/>
-              </a:lnSpc>
+            <a:pPr algn="l">
+              <a:spcAft>
+                <a:spcPts val="0"/>
+              </a:spcAft>
             </a:pPr>
             <a:r>
-              <a:rPr sz="1000" b="1">
+              <a:rPr sz="900" b="0">
                 <a:solidFill>
-                  <a:srgbClr val="0A0A0A"/>
+                  <a:srgbClr val="606060"/>
                 </a:solidFill>
               </a:rPr>
               <a:t>扣款失败</a:t>
             </a:r>
             <a:r>
-              <a:rPr sz="800" b="0">
+              <a:rPr sz="1000" b="1">
                 <a:solidFill>
-                  <a:srgbClr val="606060"/>
+                  <a:srgbClr val="D6A000"/>
                 </a:solidFill>
               </a:rPr>
               <a:t>1 次</a:t>
@@ -11226,13 +11247,13 @@
       </p:sp>
       <p:sp>
         <p:nvSpPr>
-          <p:cNvPr id="101" name="Fa-g2-3"/>
+          <p:cNvPr id="139" name="Fa-c-履约表现-3"/>
           <p:cNvSpPr txBox="1"/>
           <p:nvPr/>
         </p:nvSpPr>
         <p:spPr>
           <a:xfrm>
-            <a:off x="8173908" y="5084064"/>
+            <a:off x="8173821" y="5230368"/>
             <a:ext cx="1609344" cy="182880"/>
           </a:xfrm>
           <a:prstGeom prst="rect">
@@ -11242,27 +11263,73 @@
         </p:spPr>
         <p:txBody>
           <a:bodyPr wrap="square" lIns="0" tIns="0" rIns="0" bIns="0">
-            <a:noAutofit/>
+            <a:spAutoFit/>
           </a:bodyPr>
           <a:lstStyle/>
           <a:p>
-            <a:pPr>
-              <a:lnSpc>
-                <a:spcPct val="100000"/>
-              </a:lnSpc>
+            <a:pPr algn="l">
+              <a:spcAft>
+                <a:spcPts val="0"/>
+              </a:spcAft>
             </a:pPr>
+            <a:r>
+              <a:rPr sz="900" b="0">
+                <a:solidFill>
+                  <a:srgbClr val="606060"/>
+                </a:solidFill>
+              </a:rPr>
+              <a:t>最长逾期</a:t>
+            </a:r>
             <a:r>
               <a:rPr sz="1000" b="1">
                 <a:solidFill>
-                  <a:srgbClr val="0A0A0A"/>
+                  <a:srgbClr val="D6A000"/>
+                </a:solidFill>
+              </a:rPr>
+              <a:t>3 天</a:t>
+            </a:r>
+          </a:p>
+        </p:txBody>
+      </p:sp>
+      <p:sp>
+        <p:nvSpPr>
+          <p:cNvPr id="140" name="Fa-c-履约表现-4"/>
+          <p:cNvSpPr txBox="1"/>
+          <p:nvPr/>
+        </p:nvSpPr>
+        <p:spPr>
+          <a:xfrm>
+            <a:off x="8173821" y="5449824"/>
+            <a:ext cx="1609344" cy="182880"/>
+          </a:xfrm>
+          <a:prstGeom prst="rect">
+            <a:avLst/>
+          </a:prstGeom>
+          <a:noFill/>
+        </p:spPr>
+        <p:txBody>
+          <a:bodyPr wrap="square" lIns="0" tIns="0" rIns="0" bIns="0">
+            <a:spAutoFit/>
+          </a:bodyPr>
+          <a:lstStyle/>
+          <a:p>
+            <a:pPr algn="l">
+              <a:spcAft>
+                <a:spcPts val="0"/>
+              </a:spcAft>
+            </a:pPr>
+            <a:r>
+              <a:rPr sz="900" b="0">
+                <a:solidFill>
+                  <a:srgbClr val="606060"/>
                 </a:solidFill>
               </a:rPr>
               <a:t>还款中断</a:t>
             </a:r>
             <a:r>
-              <a:rPr sz="800" b="0">
+              <a:rPr sz="900" b="1">
                 <a:solidFill>
-                  <a:srgbClr val="606060"/>
+                  <a:srgbClr val="3D3C3A"/>
                 </a:solidFill>
               </a:rPr>
               <a:t>无</a:t>
@@ -11272,13 +11339,51 @@
       </p:sp>
       <p:sp>
         <p:nvSpPr>
-          <p:cNvPr id="102" name="Fa-g2-4"/>
+          <p:cNvPr id="141" name="Fa-c-产品成本-t"/>
           <p:cNvSpPr txBox="1"/>
           <p:nvPr/>
         </p:nvSpPr>
         <p:spPr>
           <a:xfrm>
-            <a:off x="8173908" y="5230368"/>
+            <a:off x="9892893" y="4590288"/>
+            <a:ext cx="1609344" cy="164592"/>
+          </a:xfrm>
+          <a:prstGeom prst="rect">
+            <a:avLst/>
+          </a:prstGeom>
+          <a:noFill/>
+        </p:spPr>
+        <p:txBody>
+          <a:bodyPr wrap="square" lIns="0" tIns="0" rIns="0" bIns="0">
+            <a:spAutoFit/>
+          </a:bodyPr>
+          <a:lstStyle/>
+          <a:p>
+            <a:pPr algn="l">
+              <a:spcAft>
+                <a:spcPts val="0"/>
+              </a:spcAft>
+            </a:pPr>
+            <a:r>
+              <a:rPr sz="1000" b="1">
+                <a:solidFill>
+                  <a:srgbClr val="1F4E79"/>
+                </a:solidFill>
+              </a:rPr>
+              <a:t>产品成本</a:t>
+            </a:r>
+          </a:p>
+        </p:txBody>
+      </p:sp>
+      <p:sp>
+        <p:nvSpPr>
+          <p:cNvPr id="142" name="Fa-c-产品成本-1"/>
+          <p:cNvSpPr txBox="1"/>
+          <p:nvPr/>
+        </p:nvSpPr>
+        <p:spPr>
+          <a:xfrm>
+            <a:off x="9892893" y="4791456"/>
             <a:ext cx="1609344" cy="182880"/>
           </a:xfrm>
           <a:prstGeom prst="rect">
@@ -11288,313 +11393,43 @@
         </p:spPr>
         <p:txBody>
           <a:bodyPr wrap="square" lIns="0" tIns="0" rIns="0" bIns="0">
-            <a:noAutofit/>
+            <a:spAutoFit/>
           </a:bodyPr>
           <a:lstStyle/>
           <a:p>
-            <a:pPr>
-              <a:lnSpc>
-                <a:spcPct val="100000"/>
-              </a:lnSpc>
+            <a:pPr algn="l">
+              <a:spcAft>
+                <a:spcPts val="0"/>
+              </a:spcAft>
             </a:pPr>
             <a:r>
-              <a:rPr sz="1000" b="1">
-                <a:solidFill>
-                  <a:srgbClr val="0A0A0A"/>
-                </a:solidFill>
-              </a:rPr>
-              <a:t>连续正常还款</a:t>
-            </a:r>
-            <a:r>
-              <a:rPr sz="800" b="0">
+              <a:rPr sz="900" b="0">
                 <a:solidFill>
                   <a:srgbClr val="606060"/>
                 </a:solidFill>
               </a:rPr>
-              <a:t>5 期</a:t>
+              <a:t>APR</a:t>
+            </a:r>
+            <a:r>
+              <a:rPr sz="1000" b="1">
+                <a:solidFill>
+                  <a:srgbClr val="D6A000"/>
+                </a:solidFill>
+              </a:rPr>
+              <a:t>42%</a:t>
             </a:r>
           </a:p>
         </p:txBody>
       </p:sp>
       <p:sp>
         <p:nvSpPr>
-          <p:cNvPr id="103" name="Fa-g3-t"/>
+          <p:cNvPr id="143" name="Fa-c-产品成本-2"/>
           <p:cNvSpPr txBox="1"/>
           <p:nvPr/>
         </p:nvSpPr>
         <p:spPr>
           <a:xfrm>
-            <a:off x="9892980" y="4498848"/>
-            <a:ext cx="1609344" cy="146304"/>
-          </a:xfrm>
-          <a:prstGeom prst="rect">
-            <a:avLst/>
-          </a:prstGeom>
-          <a:noFill/>
-        </p:spPr>
-        <p:txBody>
-          <a:bodyPr wrap="square" lIns="0" tIns="0" rIns="0" bIns="0">
-            <a:noAutofit/>
-          </a:bodyPr>
-          <a:lstStyle/>
-          <a:p>
-            <a:pPr>
-              <a:lnSpc>
-                <a:spcPct val="100000"/>
-              </a:lnSpc>
-            </a:pPr>
-            <a:r>
-              <a:rPr lang="zh-CN" sz="1000" b="1">
-                <a:solidFill>
-                  <a:srgbClr val="1F4E79"/>
-                </a:solidFill>
-                <a:latin typeface="微软雅黑"/>
-                <a:ea typeface="微软雅黑"/>
-              </a:rPr>
-              <a:t>产品与成本</a:t>
-            </a:r>
-          </a:p>
-        </p:txBody>
-      </p:sp>
-      <p:sp>
-        <p:nvSpPr>
-          <p:cNvPr id="107" name="用户-g3-1"/>
-          <p:cNvSpPr txBox="1"/>
-          <p:nvPr/>
-        </p:nvSpPr>
-        <p:spPr>
-          <a:xfrm>
-            <a:off x="803844" y="4901184"/>
-            <a:ext cx="1463040" cy="347472"/>
-          </a:xfrm>
-          <a:prstGeom prst="rect">
-            <a:avLst/>
-          </a:prstGeom>
-          <a:noFill/>
-        </p:spPr>
-        <p:txBody>
-          <a:bodyPr wrap="square" lIns="0" tIns="0" rIns="0" bIns="0">
-            <a:noAutofit/>
-          </a:bodyPr>
-          <a:lstStyle/>
-          <a:p>
-            <a:pPr>
-              <a:lnSpc>
-                <a:spcPct val="100000"/>
-              </a:lnSpc>
-            </a:pPr>
-            <a:r>
-              <a:rPr sz="1000" b="1">
-                <a:solidFill>
-                  <a:srgbClr val="0A0A0A"/>
-                </a:solidFill>
-              </a:rPr>
-              <a:t>90 天还款金额</a:t>
-            </a:r>
-            <a:r>
-              <a:rPr sz="800" b="0">
-                <a:solidFill>
-                  <a:srgbClr val="606060"/>
-                </a:solidFill>
-              </a:rPr>
-              <a:t>A$1,284</a:t>
-            </a:r>
-          </a:p>
-        </p:txBody>
-      </p:sp>
-      <p:sp>
-        <p:nvSpPr>
-          <p:cNvPr id="108" name="用户-g3-2"/>
-          <p:cNvSpPr txBox="1"/>
-          <p:nvPr/>
-        </p:nvSpPr>
-        <p:spPr>
-          <a:xfrm>
-            <a:off x="2074860" y="4901184"/>
-            <a:ext cx="1463040" cy="347472"/>
-          </a:xfrm>
-          <a:prstGeom prst="rect">
-            <a:avLst/>
-          </a:prstGeom>
-          <a:noFill/>
-        </p:spPr>
-        <p:txBody>
-          <a:bodyPr wrap="square" lIns="0" tIns="0" rIns="0" bIns="0">
-            <a:noAutofit/>
-          </a:bodyPr>
-          <a:lstStyle/>
-          <a:p>
-            <a:pPr>
-              <a:lnSpc>
-                <a:spcPct val="100000"/>
-              </a:lnSpc>
-            </a:pPr>
-            <a:r>
-              <a:rPr sz="1000" b="1">
-                <a:solidFill>
-                  <a:srgbClr val="0A0A0A"/>
-                </a:solidFill>
-              </a:rPr>
-              <a:t>轻微逾期</a:t>
-            </a:r>
-            <a:r>
-              <a:rPr sz="800" b="0">
-                <a:solidFill>
-                  <a:srgbClr val="606060"/>
-                </a:solidFill>
-              </a:rPr>
-              <a:t>1 次</a:t>
-            </a:r>
-          </a:p>
-        </p:txBody>
-      </p:sp>
-      <p:sp>
-        <p:nvSpPr>
-          <p:cNvPr id="109" name="用户-g3-3"/>
-          <p:cNvSpPr txBox="1"/>
-          <p:nvPr/>
-        </p:nvSpPr>
-        <p:spPr>
-          <a:xfrm>
-            <a:off x="3345876" y="4901184"/>
-            <a:ext cx="1463040" cy="347472"/>
-          </a:xfrm>
-          <a:prstGeom prst="rect">
-            <a:avLst/>
-          </a:prstGeom>
-          <a:noFill/>
-        </p:spPr>
-        <p:txBody>
-          <a:bodyPr wrap="square" lIns="0" tIns="0" rIns="0" bIns="0">
-            <a:noAutofit/>
-          </a:bodyPr>
-          <a:lstStyle/>
-          <a:p>
-            <a:pPr>
-              <a:lnSpc>
-                <a:spcPct val="100000"/>
-              </a:lnSpc>
-            </a:pPr>
-            <a:r>
-              <a:rPr sz="1000" b="1">
-                <a:solidFill>
-                  <a:srgbClr val="0A0A0A"/>
-                </a:solidFill>
-              </a:rPr>
-              <a:t>扣款失败</a:t>
-            </a:r>
-            <a:r>
-              <a:rPr sz="800" b="0">
-                <a:solidFill>
-                  <a:srgbClr val="606060"/>
-                </a:solidFill>
-              </a:rPr>
-              <a:t>1 次</a:t>
-            </a:r>
-          </a:p>
-        </p:txBody>
-      </p:sp>
-      <p:sp>
-        <p:nvSpPr>
-          <p:cNvPr id="110" name="用户-g3-4"/>
-          <p:cNvSpPr txBox="1"/>
-          <p:nvPr/>
-        </p:nvSpPr>
-        <p:spPr>
-          <a:xfrm>
-            <a:off x="803844" y="5303520"/>
-            <a:ext cx="1463040" cy="347472"/>
-          </a:xfrm>
-          <a:prstGeom prst="rect">
-            <a:avLst/>
-          </a:prstGeom>
-          <a:noFill/>
-        </p:spPr>
-        <p:txBody>
-          <a:bodyPr wrap="square" lIns="0" tIns="0" rIns="0" bIns="0">
-            <a:noAutofit/>
-          </a:bodyPr>
-          <a:lstStyle/>
-          <a:p>
-            <a:pPr>
-              <a:lnSpc>
-                <a:spcPct val="100000"/>
-              </a:lnSpc>
-            </a:pPr>
-            <a:r>
-              <a:rPr sz="1000" b="1">
-                <a:solidFill>
-                  <a:srgbClr val="0A0A0A"/>
-                </a:solidFill>
-              </a:rPr>
-              <a:t>还款中断</a:t>
-            </a:r>
-            <a:r>
-              <a:rPr sz="800" b="0">
-                <a:solidFill>
-                  <a:srgbClr val="606060"/>
-                </a:solidFill>
-              </a:rPr>
-              <a:t>无</a:t>
-            </a:r>
-          </a:p>
-        </p:txBody>
-      </p:sp>
-      <p:sp>
-        <p:nvSpPr>
-          <p:cNvPr id="111" name="用户-g3-5"/>
-          <p:cNvSpPr txBox="1"/>
-          <p:nvPr/>
-        </p:nvSpPr>
-        <p:spPr>
-          <a:xfrm>
-            <a:off x="2074860" y="5303520"/>
-            <a:ext cx="1463040" cy="347472"/>
-          </a:xfrm>
-          <a:prstGeom prst="rect">
-            <a:avLst/>
-          </a:prstGeom>
-          <a:noFill/>
-        </p:spPr>
-        <p:txBody>
-          <a:bodyPr wrap="square" lIns="0" tIns="0" rIns="0" bIns="0">
-            <a:noAutofit/>
-          </a:bodyPr>
-          <a:lstStyle/>
-          <a:p>
-            <a:pPr>
-              <a:lnSpc>
-                <a:spcPct val="100000"/>
-              </a:lnSpc>
-            </a:pPr>
-            <a:r>
-              <a:rPr sz="1000" b="1">
-                <a:solidFill>
-                  <a:srgbClr val="0A0A0A"/>
-                </a:solidFill>
-              </a:rPr>
-              <a:t>近 90 天新增借款</a:t>
-            </a:r>
-            <a:r>
-              <a:rPr sz="800" b="0">
-                <a:solidFill>
-                  <a:srgbClr val="606060"/>
-                </a:solidFill>
-              </a:rPr>
-              <a:t>1 笔</a:t>
-            </a:r>
-          </a:p>
-        </p:txBody>
-      </p:sp>
-      <p:sp>
-        <p:nvSpPr>
-          <p:cNvPr id="112" name="Fa-g1-4"/>
-          <p:cNvSpPr txBox="1"/>
-          <p:nvPr/>
-        </p:nvSpPr>
-        <p:spPr>
-          <a:xfrm>
-            <a:off x="6454836" y="5084064"/>
+            <a:off x="9892893" y="5010912"/>
             <a:ext cx="1609344" cy="182880"/>
           </a:xfrm>
           <a:prstGeom prst="rect">
@@ -11604,43 +11439,43 @@
         </p:spPr>
         <p:txBody>
           <a:bodyPr wrap="square" lIns="0" tIns="0" rIns="0" bIns="0">
-            <a:noAutofit/>
+            <a:spAutoFit/>
           </a:bodyPr>
           <a:lstStyle/>
           <a:p>
-            <a:pPr>
-              <a:lnSpc>
-                <a:spcPct val="100000"/>
-              </a:lnSpc>
+            <a:pPr algn="l">
+              <a:spcAft>
+                <a:spcPts val="0"/>
+              </a:spcAft>
             </a:pPr>
             <a:r>
-              <a:rPr sz="1000" b="1">
-                <a:solidFill>
-                  <a:srgbClr val="0A0A0A"/>
-                </a:solidFill>
-              </a:rPr>
-              <a:t>预计剩余</a:t>
-            </a:r>
-            <a:r>
-              <a:rPr sz="800" b="0">
+              <a:rPr sz="900" b="0">
                 <a:solidFill>
                   <a:srgbClr val="606060"/>
                 </a:solidFill>
               </a:rPr>
-              <a:t>4 期</a:t>
+              <a:t>预计总还款</a:t>
+            </a:r>
+            <a:r>
+              <a:rPr sz="900" b="1">
+                <a:solidFill>
+                  <a:srgbClr val="3D3C3A"/>
+                </a:solidFill>
+              </a:rPr>
+              <a:t>A$1,872</a:t>
             </a:r>
           </a:p>
         </p:txBody>
       </p:sp>
       <p:sp>
         <p:nvSpPr>
-          <p:cNvPr id="113" name="Fa-g2-5"/>
+          <p:cNvPr id="144" name="Fa-c-产品成本-3"/>
           <p:cNvSpPr txBox="1"/>
           <p:nvPr/>
         </p:nvSpPr>
         <p:spPr>
           <a:xfrm>
-            <a:off x="8173908" y="4937760"/>
+            <a:off x="9892893" y="5230368"/>
             <a:ext cx="1609344" cy="182880"/>
           </a:xfrm>
           <a:prstGeom prst="rect">
@@ -11650,169 +11485,31 @@
         </p:spPr>
         <p:txBody>
           <a:bodyPr wrap="square" lIns="0" tIns="0" rIns="0" bIns="0">
-            <a:noAutofit/>
+            <a:spAutoFit/>
           </a:bodyPr>
           <a:lstStyle/>
           <a:p>
-            <a:pPr>
-              <a:lnSpc>
-                <a:spcPct val="100000"/>
-              </a:lnSpc>
+            <a:pPr algn="l">
+              <a:spcAft>
+                <a:spcPts val="0"/>
+              </a:spcAft>
             </a:pPr>
             <a:r>
-              <a:rPr sz="1000" b="1">
-                <a:solidFill>
-                  <a:srgbClr val="0A0A0A"/>
-                </a:solidFill>
-              </a:rPr>
-              <a:t>最长逾期</a:t>
-            </a:r>
-            <a:r>
-              <a:rPr sz="800" b="0">
+              <a:rPr sz="900" b="0">
                 <a:solidFill>
                   <a:srgbClr val="606060"/>
-                </a:solidFill>
-              </a:rPr>
-              <a:t>3 天</a:t>
-            </a:r>
-          </a:p>
-        </p:txBody>
-      </p:sp>
-      <p:sp>
-        <p:nvSpPr>
-          <p:cNvPr id="114" name="Fa-g3-4"/>
-          <p:cNvSpPr txBox="1"/>
-          <p:nvPr/>
-        </p:nvSpPr>
-        <p:spPr>
-          <a:xfrm>
-            <a:off x="9892980" y="4645152"/>
-            <a:ext cx="1609344" cy="182880"/>
-          </a:xfrm>
-          <a:prstGeom prst="rect">
-            <a:avLst/>
-          </a:prstGeom>
-          <a:noFill/>
-        </p:spPr>
-        <p:txBody>
-          <a:bodyPr wrap="square" lIns="0" tIns="0" rIns="0" bIns="0">
-            <a:noAutofit/>
-          </a:bodyPr>
-          <a:lstStyle/>
-          <a:p>
-            <a:pPr>
-              <a:lnSpc>
-                <a:spcPct val="100000"/>
-              </a:lnSpc>
-            </a:pPr>
-            <a:r>
-              <a:rPr sz="1000" b="1">
-                <a:solidFill>
-                  <a:srgbClr val="0A0A0A"/>
-                </a:solidFill>
-              </a:rPr>
-              <a:t>预计总还款</a:t>
-            </a:r>
-            <a:r>
-              <a:rPr sz="800" b="0">
-                <a:solidFill>
-                  <a:srgbClr val="606060"/>
-                </a:solidFill>
-              </a:rPr>
-              <a:t>A$1,872</a:t>
-            </a:r>
-          </a:p>
-        </p:txBody>
-      </p:sp>
-      <p:sp>
-        <p:nvSpPr>
-          <p:cNvPr id="115" name="Fa-g3-5"/>
-          <p:cNvSpPr txBox="1"/>
-          <p:nvPr/>
-        </p:nvSpPr>
-        <p:spPr>
-          <a:xfrm>
-            <a:off x="9892980" y="4791456"/>
-            <a:ext cx="1609344" cy="182880"/>
-          </a:xfrm>
-          <a:prstGeom prst="rect">
-            <a:avLst/>
-          </a:prstGeom>
-          <a:noFill/>
-        </p:spPr>
-        <p:txBody>
-          <a:bodyPr wrap="square" lIns="0" tIns="0" rIns="0" bIns="0">
-            <a:noAutofit/>
-          </a:bodyPr>
-          <a:lstStyle/>
-          <a:p>
-            <a:pPr>
-              <a:lnSpc>
-                <a:spcPct val="100000"/>
-              </a:lnSpc>
-            </a:pPr>
-            <a:r>
-              <a:rPr sz="1000" b="1">
-                <a:solidFill>
-                  <a:srgbClr val="0A0A0A"/>
                 </a:solidFill>
               </a:rPr>
               <a:t>融资成本</a:t>
             </a:r>
             <a:r>
-              <a:rPr sz="800" b="0">
+              <a:rPr sz="900" b="1">
                 <a:solidFill>
-                  <a:srgbClr val="606060"/>
+                  <a:srgbClr val="3D3C3A"/>
                 </a:solidFill>
               </a:rPr>
               <a:t>A$372</a:t>
             </a:r>
-          </a:p>
-        </p:txBody>
-      </p:sp>
-      <p:sp>
-        <p:nvSpPr>
-          <p:cNvPr id="116" name="用户-g3-6"/>
-          <p:cNvSpPr txBox="1"/>
-          <p:nvPr/>
-        </p:nvSpPr>
-        <p:spPr>
-          <a:xfrm>
-            <a:off x="3345876" y="5303520"/>
-            <a:ext cx="1463040" cy="347472"/>
-          </a:xfrm>
-          <a:prstGeom prst="rect">
-            <a:avLst/>
-          </a:prstGeom>
-          <a:noFill/>
-        </p:spPr>
-        <p:txBody>
-          <a:bodyPr wrap="none">
-            <a:spAutoFit/>
-          </a:bodyPr>
-          <a:lstStyle/>
-          <a:p>
-            <a:r>
-              <a:rPr sz="1000" b="1">
-                <a:solidFill>
-                  <a:srgbClr val="0A0A0A"/>
-                </a:solidFill>
-              </a:rPr>
-              <a:t>90 天还款</a:t>
-            </a:r>
-            <a:r>
-              <a:rPr sz="800" b="0">
-                <a:solidFill>
-                  <a:srgbClr val="606060"/>
-                </a:solidFill>
-              </a:rPr>
-              <a:t>9 次</a:t>
-            </a:r>
-            <a:endParaRPr sz="800" dirty="0">
-              <a:solidFill>
-                <a:srgbClr val="1F4E79"/>
-              </a:solidFill>
-            </a:endParaRPr>
           </a:p>
         </p:txBody>
       </p:sp>
@@ -19789,7 +19486,7 @@
                 </a:tc>
                 <a:extLst>
                   <a:ext uri="{0D108BD9-81ED-4DB2-BD59-A6C34878D82A}">
-                    <a16:rowId xmlns:a16="http://schemas.microsoft.com/office/drawing/2014/main" val="10002"/>
+                    <a16:rowId xmlns:a16="http://schemas.microsoft.com/office/drawing/2014/main" val="34564052"/>
                   </a:ext>
                 </a:extLst>
               </a:tr>
@@ -20343,7 +20040,7 @@
                 </a:tc>
                 <a:extLst>
                   <a:ext uri="{0D108BD9-81ED-4DB2-BD59-A6C34878D82A}">
-                    <a16:rowId xmlns:a16="http://schemas.microsoft.com/office/drawing/2014/main" val="10002"/>
+                    <a16:rowId xmlns:a16="http://schemas.microsoft.com/office/drawing/2014/main" val="3674256046"/>
                   </a:ext>
                 </a:extLst>
               </a:tr>

--- a/银行流水分享_V2.0.pptx
+++ b/银行流水分享_V2.0.pptx
@@ -10347,17 +10347,17 @@
               </a:spcAft>
             </a:pPr>
             <a:r>
-              <a:rPr sz="900" b="0">
+              <a:rPr sz="1000" b="1">
                 <a:solidFill>
-                  <a:srgbClr val="606060"/>
+                  <a:srgbClr val="0A0A0A"/>
                 </a:solidFill>
               </a:rPr>
               <a:t>预计待还</a:t>
             </a:r>
             <a:r>
-              <a:rPr sz="1500" b="1">
+              <a:rPr sz="800" b="0">
                 <a:solidFill>
-                  <a:srgbClr val="1F4E79"/>
+                  <a:srgbClr val="606060"/>
                 </a:solidFill>
               </a:rPr>
               <a:t>A$1,016</a:t>
@@ -10393,17 +10393,17 @@
               </a:spcAft>
             </a:pPr>
             <a:r>
-              <a:rPr sz="900" b="0">
+              <a:rPr sz="1000" b="1">
                 <a:solidFill>
-                  <a:srgbClr val="606060"/>
+                  <a:srgbClr val="0A0A0A"/>
                 </a:solidFill>
               </a:rPr>
               <a:t>平均月还款</a:t>
             </a:r>
             <a:r>
-              <a:rPr sz="1500" b="1">
+              <a:rPr sz="800" b="0">
                 <a:solidFill>
-                  <a:srgbClr val="1F4E79"/>
+                  <a:srgbClr val="606060"/>
                 </a:solidFill>
               </a:rPr>
               <a:t>A$428</a:t>
@@ -10439,12 +10439,20 @@
               </a:spcAft>
             </a:pPr>
             <a:r>
-              <a:rPr sz="900" b="0">
+              <a:rPr sz="1000" b="1">
+                <a:solidFill>
+                  <a:srgbClr val="0A0A0A"/>
+                </a:solidFill>
+              </a:rPr>
+              <a:t>贷款机构</a:t>
+            </a:r>
+            <a:r>
+              <a:rPr sz="800" b="0">
                 <a:solidFill>
                   <a:srgbClr val="606060"/>
                 </a:solidFill>
               </a:rPr>
-              <a:t>贷款机构2 家</a:t>
+              <a:t>2 家</a:t>
             </a:r>
           </a:p>
         </p:txBody>
@@ -10550,17 +10558,17 @@
               </a:spcAft>
             </a:pPr>
             <a:r>
-              <a:rPr sz="900" b="0">
+              <a:rPr sz="1000" b="1">
                 <a:solidFill>
-                  <a:srgbClr val="606060"/>
+                  <a:srgbClr val="0A0A0A"/>
                 </a:solidFill>
               </a:rPr>
               <a:t>90 天还款</a:t>
             </a:r>
             <a:r>
-              <a:rPr sz="1500" b="1">
+              <a:rPr sz="800" b="0">
                 <a:solidFill>
-                  <a:srgbClr val="1F4E79"/>
+                  <a:srgbClr val="606060"/>
                 </a:solidFill>
               </a:rPr>
               <a:t>9 次</a:t>
@@ -10596,12 +10604,20 @@
               </a:spcAft>
             </a:pPr>
             <a:r>
-              <a:rPr sz="900" b="0">
+              <a:rPr sz="1000" b="1">
+                <a:solidFill>
+                  <a:srgbClr val="0A0A0A"/>
+                </a:solidFill>
+              </a:rPr>
+              <a:t>还款中断</a:t>
+            </a:r>
+            <a:r>
+              <a:rPr sz="800" b="0">
                 <a:solidFill>
                   <a:srgbClr val="606060"/>
                 </a:solidFill>
               </a:rPr>
-              <a:t>还款中断无</a:t>
+              <a:t>无</a:t>
             </a:r>
           </a:p>
         </p:txBody>
@@ -10634,12 +10650,20 @@
               </a:spcAft>
             </a:pPr>
             <a:r>
-              <a:rPr sz="900" b="0">
+              <a:rPr sz="1000" b="1">
+                <a:solidFill>
+                  <a:srgbClr val="0A0A0A"/>
+                </a:solidFill>
+              </a:rPr>
+              <a:t>近 90 天新增借款</a:t>
+            </a:r>
+            <a:r>
+              <a:rPr sz="800" b="0">
                 <a:solidFill>
                   <a:srgbClr val="606060"/>
                 </a:solidFill>
               </a:rPr>
-              <a:t>近 90 天新增借款1 笔</a:t>
+              <a:t>1 笔</a:t>
             </a:r>
           </a:p>
         </p:txBody>
@@ -10745,15 +10769,15 @@
               </a:spcAft>
             </a:pPr>
             <a:r>
-              <a:rPr sz="900" b="0">
+              <a:rPr sz="1000" b="1">
                 <a:solidFill>
-                  <a:srgbClr val="606060"/>
+                  <a:srgbClr val="0A0A0A"/>
                 </a:solidFill>
               </a:rPr>
               <a:t>轻微逾期</a:t>
             </a:r>
             <a:r>
-              <a:rPr sz="1500" b="1">
+              <a:rPr sz="800" b="1">
                 <a:solidFill>
                   <a:srgbClr val="D6A000"/>
                 </a:solidFill>
@@ -10791,15 +10815,15 @@
               </a:spcAft>
             </a:pPr>
             <a:r>
-              <a:rPr sz="900" b="0">
+              <a:rPr sz="1000" b="1">
                 <a:solidFill>
-                  <a:srgbClr val="606060"/>
+                  <a:srgbClr val="0A0A0A"/>
                 </a:solidFill>
               </a:rPr>
               <a:t>扣款失败</a:t>
             </a:r>
             <a:r>
-              <a:rPr sz="1500" b="1">
+              <a:rPr sz="800" b="1">
                 <a:solidFill>
                   <a:srgbClr val="D6A000"/>
                 </a:solidFill>
@@ -10837,12 +10861,20 @@
               </a:spcAft>
             </a:pPr>
             <a:r>
-              <a:rPr sz="900" b="0">
+              <a:rPr sz="1000" b="1">
+                <a:solidFill>
+                  <a:srgbClr val="0A0A0A"/>
+                </a:solidFill>
+              </a:rPr>
+              <a:t>90 天借款</a:t>
+            </a:r>
+            <a:r>
+              <a:rPr sz="800" b="0">
                 <a:solidFill>
                   <a:srgbClr val="606060"/>
                 </a:solidFill>
               </a:rPr>
-              <a:t>90 天借款A$2,300</a:t>
+              <a:t>A$2,300</a:t>
             </a:r>
           </a:p>
         </p:txBody>
@@ -10959,17 +10991,17 @@
               </a:spcAft>
             </a:pPr>
             <a:r>
-              <a:rPr sz="900" b="0">
+              <a:rPr sz="1000" b="1">
                 <a:solidFill>
-                  <a:srgbClr val="606060"/>
+                  <a:srgbClr val="0A0A0A"/>
                 </a:solidFill>
               </a:rPr>
               <a:t>月还款</a:t>
             </a:r>
             <a:r>
-              <a:rPr sz="900" b="1">
+              <a:rPr sz="800" b="0">
                 <a:solidFill>
-                  <a:srgbClr val="3D3C3A"/>
+                  <a:srgbClr val="606060"/>
                 </a:solidFill>
               </a:rPr>
               <a:t>约 A$338</a:t>
@@ -11005,17 +11037,17 @@
               </a:spcAft>
             </a:pPr>
             <a:r>
-              <a:rPr sz="900" b="0">
+              <a:rPr sz="1000" b="1">
                 <a:solidFill>
-                  <a:srgbClr val="606060"/>
+                  <a:srgbClr val="0A0A0A"/>
                 </a:solidFill>
               </a:rPr>
               <a:t>每两周</a:t>
             </a:r>
             <a:r>
-              <a:rPr sz="900" b="1">
+              <a:rPr sz="800" b="0">
                 <a:solidFill>
-                  <a:srgbClr val="3D3C3A"/>
+                  <a:srgbClr val="606060"/>
                 </a:solidFill>
               </a:rPr>
               <a:t>A$156</a:t>
@@ -11051,17 +11083,17 @@
               </a:spcAft>
             </a:pPr>
             <a:r>
-              <a:rPr sz="900" b="0">
+              <a:rPr sz="1000" b="1">
                 <a:solidFill>
-                  <a:srgbClr val="606060"/>
+                  <a:srgbClr val="0A0A0A"/>
                 </a:solidFill>
               </a:rPr>
               <a:t>90 天还款</a:t>
             </a:r>
             <a:r>
-              <a:rPr sz="900" b="1">
+              <a:rPr sz="800" b="0">
                 <a:solidFill>
-                  <a:srgbClr val="3D3C3A"/>
+                  <a:srgbClr val="606060"/>
                 </a:solidFill>
               </a:rPr>
               <a:t>6 次</a:t>
@@ -11097,17 +11129,17 @@
               </a:spcAft>
             </a:pPr>
             <a:r>
-              <a:rPr sz="900" b="0">
+              <a:rPr sz="1000" b="1">
                 <a:solidFill>
-                  <a:srgbClr val="606060"/>
+                  <a:srgbClr val="0A0A0A"/>
                 </a:solidFill>
               </a:rPr>
               <a:t>预计剩余</a:t>
             </a:r>
             <a:r>
-              <a:rPr sz="900" b="1">
+              <a:rPr sz="800" b="0">
                 <a:solidFill>
-                  <a:srgbClr val="3D3C3A"/>
+                  <a:srgbClr val="606060"/>
                 </a:solidFill>
               </a:rPr>
               <a:t>4 期</a:t>
@@ -11181,15 +11213,15 @@
               </a:spcAft>
             </a:pPr>
             <a:r>
-              <a:rPr sz="900" b="0">
+              <a:rPr sz="1000" b="1">
                 <a:solidFill>
-                  <a:srgbClr val="606060"/>
+                  <a:srgbClr val="0A0A0A"/>
                 </a:solidFill>
               </a:rPr>
               <a:t>轻微逾期</a:t>
             </a:r>
             <a:r>
-              <a:rPr sz="1000" b="1">
+              <a:rPr sz="800" b="1">
                 <a:solidFill>
                   <a:srgbClr val="D6A000"/>
                 </a:solidFill>
@@ -11227,15 +11259,15 @@
               </a:spcAft>
             </a:pPr>
             <a:r>
-              <a:rPr sz="900" b="0">
+              <a:rPr sz="1000" b="1">
                 <a:solidFill>
-                  <a:srgbClr val="606060"/>
+                  <a:srgbClr val="0A0A0A"/>
                 </a:solidFill>
               </a:rPr>
               <a:t>扣款失败</a:t>
             </a:r>
             <a:r>
-              <a:rPr sz="1000" b="1">
+              <a:rPr sz="800" b="1">
                 <a:solidFill>
                   <a:srgbClr val="D6A000"/>
                 </a:solidFill>
@@ -11273,15 +11305,15 @@
               </a:spcAft>
             </a:pPr>
             <a:r>
-              <a:rPr sz="900" b="0">
+              <a:rPr sz="1000" b="1">
                 <a:solidFill>
-                  <a:srgbClr val="606060"/>
+                  <a:srgbClr val="0A0A0A"/>
                 </a:solidFill>
               </a:rPr>
               <a:t>最长逾期</a:t>
             </a:r>
             <a:r>
-              <a:rPr sz="1000" b="1">
+              <a:rPr sz="800" b="1">
                 <a:solidFill>
                   <a:srgbClr val="D6A000"/>
                 </a:solidFill>
@@ -11319,17 +11351,17 @@
               </a:spcAft>
             </a:pPr>
             <a:r>
-              <a:rPr sz="900" b="0">
+              <a:rPr sz="1000" b="1">
                 <a:solidFill>
-                  <a:srgbClr val="606060"/>
+                  <a:srgbClr val="0A0A0A"/>
                 </a:solidFill>
               </a:rPr>
               <a:t>还款中断</a:t>
             </a:r>
             <a:r>
-              <a:rPr sz="900" b="1">
+              <a:rPr sz="800" b="0">
                 <a:solidFill>
-                  <a:srgbClr val="3D3C3A"/>
+                  <a:srgbClr val="606060"/>
                 </a:solidFill>
               </a:rPr>
               <a:t>无</a:t>
@@ -11403,15 +11435,15 @@
               </a:spcAft>
             </a:pPr>
             <a:r>
-              <a:rPr sz="900" b="0">
+              <a:rPr sz="1000" b="1">
                 <a:solidFill>
-                  <a:srgbClr val="606060"/>
+                  <a:srgbClr val="0A0A0A"/>
                 </a:solidFill>
               </a:rPr>
               <a:t>APR</a:t>
             </a:r>
             <a:r>
-              <a:rPr sz="1000" b="1">
+              <a:rPr sz="800" b="1">
                 <a:solidFill>
                   <a:srgbClr val="D6A000"/>
                 </a:solidFill>
@@ -11449,17 +11481,17 @@
               </a:spcAft>
             </a:pPr>
             <a:r>
-              <a:rPr sz="900" b="0">
+              <a:rPr sz="1000" b="1">
                 <a:solidFill>
-                  <a:srgbClr val="606060"/>
+                  <a:srgbClr val="0A0A0A"/>
                 </a:solidFill>
               </a:rPr>
               <a:t>预计总还款</a:t>
             </a:r>
             <a:r>
-              <a:rPr sz="900" b="1">
+              <a:rPr sz="800" b="0">
                 <a:solidFill>
-                  <a:srgbClr val="3D3C3A"/>
+                  <a:srgbClr val="606060"/>
                 </a:solidFill>
               </a:rPr>
               <a:t>A$1,872</a:t>
@@ -11495,17 +11527,17 @@
               </a:spcAft>
             </a:pPr>
             <a:r>
-              <a:rPr sz="900" b="0">
+              <a:rPr sz="1000" b="1">
                 <a:solidFill>
-                  <a:srgbClr val="606060"/>
+                  <a:srgbClr val="0A0A0A"/>
                 </a:solidFill>
               </a:rPr>
               <a:t>融资成本</a:t>
             </a:r>
             <a:r>
-              <a:rPr sz="900" b="1">
+              <a:rPr sz="800" b="0">
                 <a:solidFill>
-                  <a:srgbClr val="3D3C3A"/>
+                  <a:srgbClr val="606060"/>
                 </a:solidFill>
               </a:rPr>
               <a:t>A$372</a:t>

--- a/银行流水分享_V2.0.pptx
+++ b/银行流水分享_V2.0.pptx
@@ -2422,7 +2422,7 @@
           <p:nvPr>
             <p:extLst>
               <p:ext uri="{F5677B7D-0D2A-4D9B-9A5C-6D8D7D0E5A5D}">
-                <pptd:line xmlns:pptd="https://kimi-design.msh.team/pptd/2026" xmlns:mc="http://schemas.openxmlformats.org/markup-compatibility/2006" xmlns:m="http://schemas.openxmlformats.org/officeDocument/2006/math" xmlns:cx="http://schemas.microsoft.com/office/drawing/2014/chartex" xmlns:c="http://schemas.openxmlformats.org/drawingml/2006/chart" xmlns:a14="http://schemas.microsoft.com/office/drawing/2010/main" xmlns="" encoding="base64url">eyJ2aWV3Qm94IjpbMSwzNDBdLCJwb2ludHMiOiIwLDAgMCwzNDAifQ</pptd:line>
+                <pptd:line xmlns="" xmlns:a14="http://schemas.microsoft.com/office/drawing/2010/main" xmlns:c="http://schemas.openxmlformats.org/drawingml/2006/chart" xmlns:cx="http://schemas.microsoft.com/office/drawing/2014/chartex" xmlns:m="http://schemas.openxmlformats.org/officeDocument/2006/math" xmlns:mc="http://schemas.openxmlformats.org/markup-compatibility/2006" xmlns:pptd="https://kimi-design.msh.team/pptd/2026" encoding="base64url">eyJ2aWV3Qm94IjpbMSwzNDBdLCJwb2ludHMiOiIwLDAgMCwzNDAifQ</pptd:line>
               </p:ext>
             </p:extLst>
           </p:nvPr>
@@ -2593,7 +2593,7 @@
           <p:nvPr>
             <p:extLst>
               <p:ext uri="{F5677B7D-0D2A-4D9B-9A5C-6D8D7D0E5A5D}">
-                <pptd:line xmlns:pptd="https://kimi-design.msh.team/pptd/2026" xmlns:mc="http://schemas.openxmlformats.org/markup-compatibility/2006" xmlns:m="http://schemas.openxmlformats.org/officeDocument/2006/math" xmlns:cx="http://schemas.microsoft.com/office/drawing/2014/chartex" xmlns:c="http://schemas.openxmlformats.org/drawingml/2006/chart" xmlns:a14="http://schemas.microsoft.com/office/drawing/2010/main" xmlns="" encoding="base64url">eyJ2aWV3Qm94IjpbMzc2LDFdLCJwb2ludHMiOiIwLDAgMzc2LDAifQ</pptd:line>
+                <pptd:line xmlns="" xmlns:a14="http://schemas.microsoft.com/office/drawing/2010/main" xmlns:c="http://schemas.openxmlformats.org/drawingml/2006/chart" xmlns:cx="http://schemas.microsoft.com/office/drawing/2014/chartex" xmlns:m="http://schemas.openxmlformats.org/officeDocument/2006/math" xmlns:mc="http://schemas.openxmlformats.org/markup-compatibility/2006" xmlns:pptd="https://kimi-design.msh.team/pptd/2026" encoding="base64url">eyJ2aWV3Qm94IjpbMzc2LDFdLCJwb2ludHMiOiIwLDAgMzc2LDAifQ</pptd:line>
               </p:ext>
             </p:extLst>
           </p:nvPr>
@@ -2717,7 +2717,7 @@
           <p:nvPr>
             <p:extLst>
               <p:ext uri="{F5677B7D-0D2A-4D9B-9A5C-6D8D7D0E5A5D}">
-                <pptd:line xmlns:pptd="https://kimi-design.msh.team/pptd/2026" xmlns:mc="http://schemas.openxmlformats.org/markup-compatibility/2006" xmlns:m="http://schemas.openxmlformats.org/officeDocument/2006/math" xmlns:cx="http://schemas.microsoft.com/office/drawing/2014/chartex" xmlns:c="http://schemas.openxmlformats.org/drawingml/2006/chart" xmlns:a14="http://schemas.microsoft.com/office/drawing/2010/main" xmlns="" encoding="base64url">eyJ2aWV3Qm94IjpbMzc2LDFdLCJwb2ludHMiOiIwLDAgMzc2LDAifQ</pptd:line>
+                <pptd:line xmlns="" xmlns:a14="http://schemas.microsoft.com/office/drawing/2010/main" xmlns:c="http://schemas.openxmlformats.org/drawingml/2006/chart" xmlns:cx="http://schemas.microsoft.com/office/drawing/2014/chartex" xmlns:m="http://schemas.openxmlformats.org/officeDocument/2006/math" xmlns:mc="http://schemas.openxmlformats.org/markup-compatibility/2006" xmlns:pptd="https://kimi-design.msh.team/pptd/2026" encoding="base64url">eyJ2aWV3Qm94IjpbMzc2LDFdLCJwb2ludHMiOiIwLDAgMzc2LDAifQ</pptd:line>
               </p:ext>
             </p:extLst>
           </p:nvPr>
@@ -2861,7 +2861,7 @@
           <p:nvPr>
             <p:extLst>
               <p:ext uri="{F5677B7D-0D2A-4D9B-9A5C-6D8D7D0E5A5D}">
-                <pptd:line xmlns:pptd="https://kimi-design.msh.team/pptd/2026" xmlns:mc="http://schemas.openxmlformats.org/markup-compatibility/2006" xmlns:m="http://schemas.openxmlformats.org/officeDocument/2006/math" xmlns:cx="http://schemas.microsoft.com/office/drawing/2014/chartex" xmlns:c="http://schemas.openxmlformats.org/drawingml/2006/chart" xmlns:a14="http://schemas.microsoft.com/office/drawing/2010/main" xmlns="" encoding="base64url">eyJ2aWV3Qm94IjpbMzc2LDFdLCJwb2ludHMiOiIwLDAgMzc2LDAifQ</pptd:line>
+                <pptd:line xmlns="" xmlns:a14="http://schemas.microsoft.com/office/drawing/2010/main" xmlns:c="http://schemas.openxmlformats.org/drawingml/2006/chart" xmlns:cx="http://schemas.microsoft.com/office/drawing/2014/chartex" xmlns:m="http://schemas.openxmlformats.org/officeDocument/2006/math" xmlns:mc="http://schemas.openxmlformats.org/markup-compatibility/2006" xmlns:pptd="https://kimi-design.msh.team/pptd/2026" encoding="base64url">eyJ2aWV3Qm94IjpbMzc2LDFdLCJwb2ludHMiOiIwLDAgMzc2LDAifQ</pptd:line>
               </p:ext>
             </p:extLst>
           </p:nvPr>
@@ -3025,7 +3025,7 @@
             <p:nvPr>
               <p:extLst>
                 <p:ext uri="{F5677B7D-0D2A-4D9B-9A5C-6D8D7D0E5A5D}">
-                  <pptd:line xmlns="" xmlns:a14="http://schemas.microsoft.com/office/drawing/2010/main" xmlns:c="http://schemas.openxmlformats.org/drawingml/2006/chart" xmlns:cx="http://schemas.microsoft.com/office/drawing/2014/chartex" xmlns:m="http://schemas.openxmlformats.org/officeDocument/2006/math" xmlns:mc="http://schemas.openxmlformats.org/markup-compatibility/2006" xmlns:pptd="https://kimi-design.msh.team/pptd/2026" encoding="base64url">eyJ2aWV3Qm94IjpbODU2LDFdLCJwb2ludHMiOiIwLDAgODU2LDAifQ</pptd:line>
+                  <pptd:line xmlns:pptd="https://kimi-design.msh.team/pptd/2026" xmlns:mc="http://schemas.openxmlformats.org/markup-compatibility/2006" xmlns:m="http://schemas.openxmlformats.org/officeDocument/2006/math" xmlns:cx="http://schemas.microsoft.com/office/drawing/2014/chartex" xmlns:c="http://schemas.openxmlformats.org/drawingml/2006/chart" xmlns:a14="http://schemas.microsoft.com/office/drawing/2010/main" xmlns="" encoding="base64url">eyJ2aWV3Qm94IjpbODU2LDFdLCJwb2ludHMiOiIwLDAgODU2LDAifQ</pptd:line>
                 </p:ext>
               </p:extLst>
             </p:nvPr>
@@ -6263,6 +6263,53 @@
       </p:grpSpPr>
       <p:sp>
         <p:nvSpPr>
+          <p:cNvPr id="24" name="Fa-bg"/>
+          <p:cNvSpPr/>
+          <p:nvPr/>
+        </p:nvSpPr>
+        <p:spPr>
+          <a:xfrm>
+            <a:off x="620963" y="3242564"/>
+            <a:ext cx="5376672" cy="2542032"/>
+          </a:xfrm>
+          <a:prstGeom prst="rect">
+            <a:avLst/>
+          </a:prstGeom>
+          <a:solidFill>
+            <a:srgbClr val="FFFFFF"/>
+          </a:solidFill>
+          <a:ln w="9525">
+            <a:solidFill>
+              <a:srgbClr val="B0B0B0"/>
+            </a:solidFill>
+          </a:ln>
+          <a:effectLst/>
+        </p:spPr>
+        <p:style>
+          <a:lnRef idx="1">
+            <a:schemeClr val="accent1"/>
+          </a:lnRef>
+          <a:fillRef idx="3">
+            <a:schemeClr val="accent1"/>
+          </a:fillRef>
+          <a:effectRef idx="2">
+            <a:schemeClr val="accent1"/>
+          </a:effectRef>
+          <a:fontRef idx="minor">
+            <a:schemeClr val="lt1"/>
+          </a:fontRef>
+        </p:style>
+        <p:txBody>
+          <a:bodyPr rtlCol="0" anchor="ctr"/>
+          <a:lstStyle/>
+          <a:p>
+            <a:pPr algn="ctr"/>
+            <a:endParaRPr/>
+          </a:p>
+        </p:txBody>
+      </p:sp>
+      <p:sp>
+        <p:nvSpPr>
           <p:cNvPr id="2" name="title">
             <a:extLst>
               <a:ext uri="{FF2B5EF4-FFF2-40B4-BE49-F238E27FC236}">
@@ -9201,262 +9248,6 @@
       </p:graphicFrame>
       <p:sp>
         <p:nvSpPr>
-          <p:cNvPr id="17" name="用户-bg"/>
-          <p:cNvSpPr/>
-          <p:nvPr/>
-        </p:nvSpPr>
-        <p:spPr>
-          <a:xfrm>
-            <a:off x="619506" y="3152038"/>
-            <a:ext cx="5376672" cy="2542032"/>
-          </a:xfrm>
-          <a:prstGeom prst="rect">
-            <a:avLst/>
-          </a:prstGeom>
-          <a:solidFill>
-            <a:srgbClr val="FFFFFF"/>
-          </a:solidFill>
-          <a:ln w="9525">
-            <a:solidFill>
-              <a:srgbClr val="B0B0B0"/>
-            </a:solidFill>
-          </a:ln>
-          <a:effectLst/>
-        </p:spPr>
-        <p:style>
-          <a:lnRef idx="1">
-            <a:schemeClr val="accent1"/>
-          </a:lnRef>
-          <a:fillRef idx="3">
-            <a:schemeClr val="accent1"/>
-          </a:fillRef>
-          <a:effectRef idx="2">
-            <a:schemeClr val="accent1"/>
-          </a:effectRef>
-          <a:fontRef idx="minor">
-            <a:schemeClr val="lt1"/>
-          </a:fontRef>
-        </p:style>
-        <p:txBody>
-          <a:bodyPr rtlCol="0" anchor="ctr"/>
-          <a:lstStyle/>
-          <a:p>
-            <a:pPr algn="ctr"/>
-            <a:endParaRPr/>
-          </a:p>
-        </p:txBody>
-      </p:sp>
-      <p:sp>
-        <p:nvSpPr>
-          <p:cNvPr id="18" name="用户-bar"/>
-          <p:cNvSpPr/>
-          <p:nvPr/>
-        </p:nvSpPr>
-        <p:spPr>
-          <a:xfrm>
-            <a:off x="619506" y="3152038"/>
-            <a:ext cx="5376672" cy="54864"/>
-          </a:xfrm>
-          <a:prstGeom prst="rect">
-            <a:avLst/>
-          </a:prstGeom>
-          <a:solidFill>
-            <a:srgbClr val="1F4E79"/>
-          </a:solidFill>
-          <a:ln>
-            <a:noFill/>
-          </a:ln>
-          <a:effectLst/>
-        </p:spPr>
-        <p:style>
-          <a:lnRef idx="1">
-            <a:schemeClr val="accent1"/>
-          </a:lnRef>
-          <a:fillRef idx="3">
-            <a:schemeClr val="accent1"/>
-          </a:fillRef>
-          <a:effectRef idx="2">
-            <a:schemeClr val="accent1"/>
-          </a:effectRef>
-          <a:fontRef idx="minor">
-            <a:schemeClr val="lt1"/>
-          </a:fontRef>
-        </p:style>
-        <p:txBody>
-          <a:bodyPr rtlCol="0" anchor="ctr"/>
-          <a:lstStyle/>
-          <a:p>
-            <a:pPr algn="ctr"/>
-            <a:endParaRPr/>
-          </a:p>
-        </p:txBody>
-      </p:sp>
-      <p:sp>
-        <p:nvSpPr>
-          <p:cNvPr id="19" name="用户-title"/>
-          <p:cNvSpPr txBox="1"/>
-          <p:nvPr/>
-        </p:nvSpPr>
-        <p:spPr>
-          <a:xfrm>
-            <a:off x="802386" y="3252622"/>
-            <a:ext cx="5010912" cy="201168"/>
-          </a:xfrm>
-          <a:prstGeom prst="rect">
-            <a:avLst/>
-          </a:prstGeom>
-          <a:noFill/>
-        </p:spPr>
-        <p:txBody>
-          <a:bodyPr wrap="square" lIns="0" tIns="0" rIns="0" bIns="0">
-            <a:spAutoFit/>
-          </a:bodyPr>
-          <a:lstStyle/>
-          <a:p>
-            <a:pPr algn="l"/>
-            <a:r>
-              <a:rPr lang="zh-CN" sz="1050" b="1">
-                <a:solidFill>
-                  <a:srgbClr val="0A0A0A"/>
-                </a:solidFill>
-                <a:latin typeface="微软雅黑"/>
-                <a:ea typeface="微软雅黑"/>
-              </a:rPr>
-              <a:t>用户整体负债画像</a:t>
-            </a:r>
-          </a:p>
-        </p:txBody>
-      </p:sp>
-      <p:sp>
-        <p:nvSpPr>
-          <p:cNvPr id="24" name="Fa-bg"/>
-          <p:cNvSpPr/>
-          <p:nvPr/>
-        </p:nvSpPr>
-        <p:spPr>
-          <a:xfrm>
-            <a:off x="6270498" y="3152038"/>
-            <a:ext cx="5376672" cy="2542032"/>
-          </a:xfrm>
-          <a:prstGeom prst="rect">
-            <a:avLst/>
-          </a:prstGeom>
-          <a:solidFill>
-            <a:srgbClr val="FFFFFF"/>
-          </a:solidFill>
-          <a:ln w="9525">
-            <a:solidFill>
-              <a:srgbClr val="B0B0B0"/>
-            </a:solidFill>
-          </a:ln>
-          <a:effectLst/>
-        </p:spPr>
-        <p:style>
-          <a:lnRef idx="1">
-            <a:schemeClr val="accent1"/>
-          </a:lnRef>
-          <a:fillRef idx="3">
-            <a:schemeClr val="accent1"/>
-          </a:fillRef>
-          <a:effectRef idx="2">
-            <a:schemeClr val="accent1"/>
-          </a:effectRef>
-          <a:fontRef idx="minor">
-            <a:schemeClr val="lt1"/>
-          </a:fontRef>
-        </p:style>
-        <p:txBody>
-          <a:bodyPr rtlCol="0" anchor="ctr"/>
-          <a:lstStyle/>
-          <a:p>
-            <a:pPr algn="ctr"/>
-            <a:endParaRPr/>
-          </a:p>
-        </p:txBody>
-      </p:sp>
-      <p:sp>
-        <p:nvSpPr>
-          <p:cNvPr id="25" name="Fa-bar"/>
-          <p:cNvSpPr/>
-          <p:nvPr/>
-        </p:nvSpPr>
-        <p:spPr>
-          <a:xfrm>
-            <a:off x="6270498" y="3152038"/>
-            <a:ext cx="5376672" cy="54864"/>
-          </a:xfrm>
-          <a:prstGeom prst="rect">
-            <a:avLst/>
-          </a:prstGeom>
-          <a:solidFill>
-            <a:srgbClr val="1F4E79"/>
-          </a:solidFill>
-          <a:ln>
-            <a:noFill/>
-          </a:ln>
-          <a:effectLst/>
-        </p:spPr>
-        <p:style>
-          <a:lnRef idx="1">
-            <a:schemeClr val="accent1"/>
-          </a:lnRef>
-          <a:fillRef idx="3">
-            <a:schemeClr val="accent1"/>
-          </a:fillRef>
-          <a:effectRef idx="2">
-            <a:schemeClr val="accent1"/>
-          </a:effectRef>
-          <a:fontRef idx="minor">
-            <a:schemeClr val="lt1"/>
-          </a:fontRef>
-        </p:style>
-        <p:txBody>
-          <a:bodyPr rtlCol="0" anchor="ctr"/>
-          <a:lstStyle/>
-          <a:p>
-            <a:pPr algn="ctr"/>
-            <a:endParaRPr/>
-          </a:p>
-        </p:txBody>
-      </p:sp>
-      <p:sp>
-        <p:nvSpPr>
-          <p:cNvPr id="26" name="Fa-title"/>
-          <p:cNvSpPr txBox="1"/>
-          <p:nvPr/>
-        </p:nvSpPr>
-        <p:spPr>
-          <a:xfrm>
-            <a:off x="6453378" y="3252622"/>
-            <a:ext cx="5010912" cy="201168"/>
-          </a:xfrm>
-          <a:prstGeom prst="rect">
-            <a:avLst/>
-          </a:prstGeom>
-          <a:noFill/>
-        </p:spPr>
-        <p:txBody>
-          <a:bodyPr wrap="square" lIns="0" tIns="0" rIns="0" bIns="0">
-            <a:spAutoFit/>
-          </a:bodyPr>
-          <a:lstStyle/>
-          <a:p>
-            <a:pPr algn="l"/>
-            <a:r>
-              <a:rPr lang="zh-CN" sz="1050" b="1">
-                <a:solidFill>
-                  <a:srgbClr val="0A0A0A"/>
-                </a:solidFill>
-                <a:latin typeface="微软雅黑"/>
-                <a:ea typeface="微软雅黑"/>
-              </a:rPr>
-              <a:t>Fair Go Finance 单笔贷款画像</a:t>
-            </a:r>
-          </a:p>
-        </p:txBody>
-      </p:sp>
-      <p:sp>
-        <p:nvSpPr>
           <p:cNvPr id="31" name="concl-bar"/>
           <p:cNvSpPr/>
           <p:nvPr/>
@@ -9675,29 +9466,1100 @@
           </a:p>
         </p:txBody>
       </p:sp>
+      <p:grpSp>
+        <p:nvGrpSpPr>
+          <p:cNvPr id="4" name="组合 3">
+            <a:extLst>
+              <a:ext uri="{FF2B5EF4-FFF2-40B4-BE49-F238E27FC236}">
+                <a16:creationId xmlns:a16="http://schemas.microsoft.com/office/drawing/2014/main" id="{A0665F73-0893-40CB-94FD-2F9096BDBD02}"/>
+              </a:ext>
+            </a:extLst>
+          </p:cNvPr>
+          <p:cNvGrpSpPr/>
+          <p:nvPr/>
+        </p:nvGrpSpPr>
+        <p:grpSpPr>
+          <a:xfrm>
+            <a:off x="6133526" y="3179140"/>
+            <a:ext cx="5405475" cy="2542032"/>
+            <a:chOff x="619506" y="3152038"/>
+            <a:chExt cx="5405475" cy="2542032"/>
+          </a:xfrm>
+        </p:grpSpPr>
+        <p:sp>
+          <p:nvSpPr>
+            <p:cNvPr id="17" name="用户-bg"/>
+            <p:cNvSpPr/>
+            <p:nvPr/>
+          </p:nvSpPr>
+          <p:spPr>
+            <a:xfrm>
+              <a:off x="619506" y="3152038"/>
+              <a:ext cx="5376672" cy="2542032"/>
+            </a:xfrm>
+            <a:prstGeom prst="rect">
+              <a:avLst/>
+            </a:prstGeom>
+            <a:solidFill>
+              <a:srgbClr val="FFFFFF"/>
+            </a:solidFill>
+            <a:ln w="9525">
+              <a:solidFill>
+                <a:srgbClr val="B0B0B0"/>
+              </a:solidFill>
+            </a:ln>
+            <a:effectLst/>
+          </p:spPr>
+          <p:style>
+            <a:lnRef idx="1">
+              <a:schemeClr val="accent1"/>
+            </a:lnRef>
+            <a:fillRef idx="3">
+              <a:schemeClr val="accent1"/>
+            </a:fillRef>
+            <a:effectRef idx="2">
+              <a:schemeClr val="accent1"/>
+            </a:effectRef>
+            <a:fontRef idx="minor">
+              <a:schemeClr val="lt1"/>
+            </a:fontRef>
+          </p:style>
+          <p:txBody>
+            <a:bodyPr rtlCol="0" anchor="ctr"/>
+            <a:lstStyle/>
+            <a:p>
+              <a:pPr algn="ctr"/>
+              <a:endParaRPr/>
+            </a:p>
+          </p:txBody>
+        </p:sp>
+        <p:sp>
+          <p:nvSpPr>
+            <p:cNvPr id="18" name="用户-bar"/>
+            <p:cNvSpPr/>
+            <p:nvPr/>
+          </p:nvSpPr>
+          <p:spPr>
+            <a:xfrm>
+              <a:off x="619506" y="3152038"/>
+              <a:ext cx="5376672" cy="54864"/>
+            </a:xfrm>
+            <a:prstGeom prst="rect">
+              <a:avLst/>
+            </a:prstGeom>
+            <a:solidFill>
+              <a:srgbClr val="1F4E79"/>
+            </a:solidFill>
+            <a:ln>
+              <a:noFill/>
+            </a:ln>
+            <a:effectLst/>
+          </p:spPr>
+          <p:style>
+            <a:lnRef idx="1">
+              <a:schemeClr val="accent1"/>
+            </a:lnRef>
+            <a:fillRef idx="3">
+              <a:schemeClr val="accent1"/>
+            </a:fillRef>
+            <a:effectRef idx="2">
+              <a:schemeClr val="accent1"/>
+            </a:effectRef>
+            <a:fontRef idx="minor">
+              <a:schemeClr val="lt1"/>
+            </a:fontRef>
+          </p:style>
+          <p:txBody>
+            <a:bodyPr rtlCol="0" anchor="ctr"/>
+            <a:lstStyle/>
+            <a:p>
+              <a:pPr algn="ctr"/>
+              <a:endParaRPr/>
+            </a:p>
+          </p:txBody>
+        </p:sp>
+        <p:sp>
+          <p:nvSpPr>
+            <p:cNvPr id="19" name="用户-title"/>
+            <p:cNvSpPr txBox="1"/>
+            <p:nvPr/>
+          </p:nvSpPr>
+          <p:spPr>
+            <a:xfrm>
+              <a:off x="802386" y="3252622"/>
+              <a:ext cx="5010912" cy="201168"/>
+            </a:xfrm>
+            <a:prstGeom prst="rect">
+              <a:avLst/>
+            </a:prstGeom>
+            <a:noFill/>
+          </p:spPr>
+          <p:txBody>
+            <a:bodyPr wrap="square" lIns="0" tIns="0" rIns="0" bIns="0">
+              <a:spAutoFit/>
+            </a:bodyPr>
+            <a:lstStyle/>
+            <a:p>
+              <a:pPr algn="l"/>
+              <a:r>
+                <a:rPr lang="zh-CN" sz="1050" b="1">
+                  <a:solidFill>
+                    <a:srgbClr val="0A0A0A"/>
+                  </a:solidFill>
+                  <a:latin typeface="微软雅黑"/>
+                  <a:ea typeface="微软雅黑"/>
+                </a:rPr>
+                <a:t>用户整体负债画像</a:t>
+              </a:r>
+            </a:p>
+          </p:txBody>
+        </p:sp>
+        <p:sp>
+          <p:nvSpPr>
+            <p:cNvPr id="51" name="用户-tag1"/>
+            <p:cNvSpPr/>
+            <p:nvPr/>
+          </p:nvSpPr>
+          <p:spPr>
+            <a:xfrm>
+              <a:off x="803844" y="3593592"/>
+              <a:ext cx="1197864" cy="182880"/>
+            </a:xfrm>
+            <a:prstGeom prst="roundRect">
+              <a:avLst>
+                <a:gd name="adj" fmla="val 10000"/>
+              </a:avLst>
+            </a:prstGeom>
+            <a:solidFill>
+              <a:srgbClr val="FAF3E0"/>
+            </a:solidFill>
+            <a:ln w="12700">
+              <a:solidFill>
+                <a:srgbClr val="D6A000"/>
+              </a:solidFill>
+            </a:ln>
+            <a:effectLst/>
+          </p:spPr>
+          <p:style>
+            <a:lnRef idx="1">
+              <a:schemeClr val="accent1"/>
+            </a:lnRef>
+            <a:fillRef idx="3">
+              <a:schemeClr val="accent1"/>
+            </a:fillRef>
+            <a:effectRef idx="2">
+              <a:schemeClr val="accent1"/>
+            </a:effectRef>
+            <a:fontRef idx="minor">
+              <a:schemeClr val="lt1"/>
+            </a:fontRef>
+          </p:style>
+          <p:txBody>
+            <a:bodyPr rtlCol="0" anchor="ctr"/>
+            <a:lstStyle/>
+            <a:p>
+              <a:pPr algn="ctr"/>
+              <a:endParaRPr/>
+            </a:p>
+          </p:txBody>
+        </p:sp>
+        <p:sp>
+          <p:nvSpPr>
+            <p:cNvPr id="52" name="用户-tag1-t"/>
+            <p:cNvSpPr txBox="1"/>
+            <p:nvPr/>
+          </p:nvSpPr>
+          <p:spPr>
+            <a:xfrm>
+              <a:off x="803844" y="3611880"/>
+              <a:ext cx="1197864" cy="146304"/>
+            </a:xfrm>
+            <a:prstGeom prst="rect">
+              <a:avLst/>
+            </a:prstGeom>
+            <a:noFill/>
+          </p:spPr>
+          <p:txBody>
+            <a:bodyPr wrap="square" lIns="0" tIns="0" rIns="0" bIns="0">
+              <a:noAutofit/>
+            </a:bodyPr>
+            <a:lstStyle/>
+            <a:p>
+              <a:r>
+                <a:rPr sz="800" b="1">
+                  <a:solidFill>
+                    <a:srgbClr val="1F4E79"/>
+                  </a:solidFill>
+                </a:rPr>
+                <a:t>多头借贷</a:t>
+              </a:r>
+            </a:p>
+          </p:txBody>
+        </p:sp>
+        <p:sp>
+          <p:nvSpPr>
+            <p:cNvPr id="53" name="用户-tag2"/>
+            <p:cNvSpPr/>
+            <p:nvPr/>
+          </p:nvSpPr>
+          <p:spPr>
+            <a:xfrm>
+              <a:off x="2074860" y="3593592"/>
+              <a:ext cx="1197864" cy="182880"/>
+            </a:xfrm>
+            <a:prstGeom prst="roundRect">
+              <a:avLst>
+                <a:gd name="adj" fmla="val 10000"/>
+              </a:avLst>
+            </a:prstGeom>
+            <a:solidFill>
+              <a:srgbClr val="FAF3E0"/>
+            </a:solidFill>
+            <a:ln w="12700">
+              <a:solidFill>
+                <a:srgbClr val="D6A000"/>
+              </a:solidFill>
+            </a:ln>
+            <a:effectLst/>
+          </p:spPr>
+          <p:style>
+            <a:lnRef idx="1">
+              <a:schemeClr val="accent1"/>
+            </a:lnRef>
+            <a:fillRef idx="3">
+              <a:schemeClr val="accent1"/>
+            </a:fillRef>
+            <a:effectRef idx="2">
+              <a:schemeClr val="accent1"/>
+            </a:effectRef>
+            <a:fontRef idx="minor">
+              <a:schemeClr val="lt1"/>
+            </a:fontRef>
+          </p:style>
+          <p:txBody>
+            <a:bodyPr rtlCol="0" anchor="ctr"/>
+            <a:lstStyle/>
+            <a:p>
+              <a:pPr algn="ctr"/>
+              <a:endParaRPr/>
+            </a:p>
+          </p:txBody>
+        </p:sp>
+        <p:sp>
+          <p:nvSpPr>
+            <p:cNvPr id="54" name="用户-tag2-t"/>
+            <p:cNvSpPr txBox="1"/>
+            <p:nvPr/>
+          </p:nvSpPr>
+          <p:spPr>
+            <a:xfrm>
+              <a:off x="2074860" y="3611880"/>
+              <a:ext cx="1197864" cy="146304"/>
+            </a:xfrm>
+            <a:prstGeom prst="rect">
+              <a:avLst/>
+            </a:prstGeom>
+            <a:noFill/>
+          </p:spPr>
+          <p:txBody>
+            <a:bodyPr wrap="square" lIns="0" tIns="0" rIns="0" bIns="0">
+              <a:noAutofit/>
+            </a:bodyPr>
+            <a:lstStyle/>
+            <a:p>
+              <a:r>
+                <a:rPr sz="800" b="1">
+                  <a:solidFill>
+                    <a:srgbClr val="1F4E79"/>
+                  </a:solidFill>
+                </a:rPr>
+                <a:t>近期新增贷款</a:t>
+              </a:r>
+            </a:p>
+          </p:txBody>
+        </p:sp>
+        <p:sp>
+          <p:nvSpPr>
+            <p:cNvPr id="55" name="用户-tag3"/>
+            <p:cNvSpPr/>
+            <p:nvPr/>
+          </p:nvSpPr>
+          <p:spPr>
+            <a:xfrm>
+              <a:off x="3345876" y="3593592"/>
+              <a:ext cx="1197864" cy="182880"/>
+            </a:xfrm>
+            <a:prstGeom prst="roundRect">
+              <a:avLst>
+                <a:gd name="adj" fmla="val 10000"/>
+              </a:avLst>
+            </a:prstGeom>
+            <a:solidFill>
+              <a:srgbClr val="FAF3E0"/>
+            </a:solidFill>
+            <a:ln w="12700">
+              <a:solidFill>
+                <a:srgbClr val="D6A000"/>
+              </a:solidFill>
+            </a:ln>
+            <a:effectLst/>
+          </p:spPr>
+          <p:style>
+            <a:lnRef idx="1">
+              <a:schemeClr val="accent1"/>
+            </a:lnRef>
+            <a:fillRef idx="3">
+              <a:schemeClr val="accent1"/>
+            </a:fillRef>
+            <a:effectRef idx="2">
+              <a:schemeClr val="accent1"/>
+            </a:effectRef>
+            <a:fontRef idx="minor">
+              <a:schemeClr val="lt1"/>
+            </a:fontRef>
+          </p:style>
+          <p:txBody>
+            <a:bodyPr rtlCol="0" anchor="ctr"/>
+            <a:lstStyle/>
+            <a:p>
+              <a:pPr algn="ctr"/>
+              <a:endParaRPr/>
+            </a:p>
+          </p:txBody>
+        </p:sp>
+        <p:sp>
+          <p:nvSpPr>
+            <p:cNvPr id="56" name="用户-tag3-t"/>
+            <p:cNvSpPr txBox="1"/>
+            <p:nvPr/>
+          </p:nvSpPr>
+          <p:spPr>
+            <a:xfrm>
+              <a:off x="3345876" y="3611880"/>
+              <a:ext cx="1197864" cy="146304"/>
+            </a:xfrm>
+            <a:prstGeom prst="rect">
+              <a:avLst/>
+            </a:prstGeom>
+            <a:noFill/>
+          </p:spPr>
+          <p:txBody>
+            <a:bodyPr wrap="square" lIns="0" tIns="0" rIns="0" bIns="0">
+              <a:noAutofit/>
+            </a:bodyPr>
+            <a:lstStyle/>
+            <a:p>
+              <a:r>
+                <a:rPr sz="800" b="1">
+                  <a:solidFill>
+                    <a:srgbClr val="1F4E79"/>
+                  </a:solidFill>
+                </a:rPr>
+                <a:t>高成本借贷</a:t>
+              </a:r>
+            </a:p>
+          </p:txBody>
+        </p:sp>
+        <p:sp>
+          <p:nvSpPr>
+            <p:cNvPr id="57" name="用户-tag4"/>
+            <p:cNvSpPr/>
+            <p:nvPr/>
+          </p:nvSpPr>
+          <p:spPr>
+            <a:xfrm>
+              <a:off x="4616892" y="3593592"/>
+              <a:ext cx="1197864" cy="182880"/>
+            </a:xfrm>
+            <a:prstGeom prst="roundRect">
+              <a:avLst>
+                <a:gd name="adj" fmla="val 10000"/>
+              </a:avLst>
+            </a:prstGeom>
+            <a:solidFill>
+              <a:srgbClr val="FAF3E0"/>
+            </a:solidFill>
+            <a:ln w="12700">
+              <a:solidFill>
+                <a:srgbClr val="D6A000"/>
+              </a:solidFill>
+            </a:ln>
+            <a:effectLst/>
+          </p:spPr>
+          <p:style>
+            <a:lnRef idx="1">
+              <a:schemeClr val="accent1"/>
+            </a:lnRef>
+            <a:fillRef idx="3">
+              <a:schemeClr val="accent1"/>
+            </a:fillRef>
+            <a:effectRef idx="2">
+              <a:schemeClr val="accent1"/>
+            </a:effectRef>
+            <a:fontRef idx="minor">
+              <a:schemeClr val="lt1"/>
+            </a:fontRef>
+          </p:style>
+          <p:txBody>
+            <a:bodyPr rtlCol="0" anchor="ctr"/>
+            <a:lstStyle/>
+            <a:p>
+              <a:pPr algn="ctr"/>
+              <a:endParaRPr/>
+            </a:p>
+          </p:txBody>
+        </p:sp>
+        <p:sp>
+          <p:nvSpPr>
+            <p:cNvPr id="58" name="用户-tag4-t"/>
+            <p:cNvSpPr txBox="1"/>
+            <p:nvPr/>
+          </p:nvSpPr>
+          <p:spPr>
+            <a:xfrm>
+              <a:off x="4616892" y="3611880"/>
+              <a:ext cx="1197864" cy="146304"/>
+            </a:xfrm>
+            <a:prstGeom prst="rect">
+              <a:avLst/>
+            </a:prstGeom>
+            <a:noFill/>
+          </p:spPr>
+          <p:txBody>
+            <a:bodyPr wrap="square" lIns="0" tIns="0" rIns="0" bIns="0">
+              <a:noAutofit/>
+            </a:bodyPr>
+            <a:lstStyle/>
+            <a:p>
+              <a:r>
+                <a:rPr sz="800" b="1">
+                  <a:solidFill>
+                    <a:srgbClr val="1F4E79"/>
+                  </a:solidFill>
+                </a:rPr>
+                <a:t>存在轻微逾期</a:t>
+              </a:r>
+            </a:p>
+          </p:txBody>
+        </p:sp>
+        <p:sp>
+          <p:nvSpPr>
+            <p:cNvPr id="116" name="用户-m1-t"/>
+            <p:cNvSpPr txBox="1"/>
+            <p:nvPr/>
+          </p:nvSpPr>
+          <p:spPr>
+            <a:xfrm>
+              <a:off x="739749" y="3931920"/>
+              <a:ext cx="1645920" cy="182880"/>
+            </a:xfrm>
+            <a:prstGeom prst="rect">
+              <a:avLst/>
+            </a:prstGeom>
+            <a:noFill/>
+          </p:spPr>
+          <p:txBody>
+            <a:bodyPr wrap="square" lIns="0" tIns="0" rIns="0" bIns="0">
+              <a:spAutoFit/>
+            </a:bodyPr>
+            <a:lstStyle/>
+            <a:p>
+              <a:pPr algn="l">
+                <a:spcAft>
+                  <a:spcPts val="0"/>
+                </a:spcAft>
+              </a:pPr>
+              <a:r>
+                <a:rPr sz="1000" b="1">
+                  <a:solidFill>
+                    <a:srgbClr val="1F4E79"/>
+                  </a:solidFill>
+                </a:rPr>
+                <a:t>负债情况</a:t>
+              </a:r>
+            </a:p>
+          </p:txBody>
+        </p:sp>
+        <p:sp>
+          <p:nvSpPr>
+            <p:cNvPr id="117" name="用户-m1-1"/>
+            <p:cNvSpPr txBox="1"/>
+            <p:nvPr/>
+          </p:nvSpPr>
+          <p:spPr>
+            <a:xfrm>
+              <a:off x="739749" y="4133087"/>
+              <a:ext cx="1737360" cy="201168"/>
+            </a:xfrm>
+            <a:prstGeom prst="rect">
+              <a:avLst/>
+            </a:prstGeom>
+            <a:noFill/>
+          </p:spPr>
+          <p:txBody>
+            <a:bodyPr wrap="square" lIns="0" tIns="0" rIns="0" bIns="0">
+              <a:spAutoFit/>
+            </a:bodyPr>
+            <a:lstStyle/>
+            <a:p>
+              <a:pPr algn="l">
+                <a:spcAft>
+                  <a:spcPts val="0"/>
+                </a:spcAft>
+              </a:pPr>
+              <a:r>
+                <a:rPr sz="1000" b="1">
+                  <a:solidFill>
+                    <a:srgbClr val="0A0A0A"/>
+                  </a:solidFill>
+                </a:rPr>
+                <a:t>预计待还</a:t>
+              </a:r>
+              <a:r>
+                <a:rPr sz="800" b="0">
+                  <a:solidFill>
+                    <a:srgbClr val="606060"/>
+                  </a:solidFill>
+                </a:rPr>
+                <a:t>A$1,016</a:t>
+              </a:r>
+            </a:p>
+          </p:txBody>
+        </p:sp>
+        <p:sp>
+          <p:nvSpPr>
+            <p:cNvPr id="118" name="用户-m1-2"/>
+            <p:cNvSpPr txBox="1"/>
+            <p:nvPr/>
+          </p:nvSpPr>
+          <p:spPr>
+            <a:xfrm>
+              <a:off x="739749" y="4370831"/>
+              <a:ext cx="1737360" cy="201168"/>
+            </a:xfrm>
+            <a:prstGeom prst="rect">
+              <a:avLst/>
+            </a:prstGeom>
+            <a:noFill/>
+          </p:spPr>
+          <p:txBody>
+            <a:bodyPr wrap="square" lIns="0" tIns="0" rIns="0" bIns="0">
+              <a:spAutoFit/>
+            </a:bodyPr>
+            <a:lstStyle/>
+            <a:p>
+              <a:pPr algn="l">
+                <a:spcAft>
+                  <a:spcPts val="0"/>
+                </a:spcAft>
+              </a:pPr>
+              <a:r>
+                <a:rPr sz="1000" b="1">
+                  <a:solidFill>
+                    <a:srgbClr val="0A0A0A"/>
+                  </a:solidFill>
+                </a:rPr>
+                <a:t>平均月还款</a:t>
+              </a:r>
+              <a:r>
+                <a:rPr sz="800" b="0">
+                  <a:solidFill>
+                    <a:srgbClr val="606060"/>
+                  </a:solidFill>
+                </a:rPr>
+                <a:t>A$428</a:t>
+              </a:r>
+            </a:p>
+          </p:txBody>
+        </p:sp>
+        <p:sp>
+          <p:nvSpPr>
+            <p:cNvPr id="119" name="用户-m1-3"/>
+            <p:cNvSpPr txBox="1"/>
+            <p:nvPr/>
+          </p:nvSpPr>
+          <p:spPr>
+            <a:xfrm>
+              <a:off x="739749" y="4608575"/>
+              <a:ext cx="1737360" cy="201168"/>
+            </a:xfrm>
+            <a:prstGeom prst="rect">
+              <a:avLst/>
+            </a:prstGeom>
+            <a:noFill/>
+          </p:spPr>
+          <p:txBody>
+            <a:bodyPr wrap="square" lIns="0" tIns="0" rIns="0" bIns="0">
+              <a:spAutoFit/>
+            </a:bodyPr>
+            <a:lstStyle/>
+            <a:p>
+              <a:pPr algn="l">
+                <a:spcAft>
+                  <a:spcPts val="0"/>
+                </a:spcAft>
+              </a:pPr>
+              <a:r>
+                <a:rPr sz="1000" b="1">
+                  <a:solidFill>
+                    <a:srgbClr val="0A0A0A"/>
+                  </a:solidFill>
+                </a:rPr>
+                <a:t>贷款机构</a:t>
+              </a:r>
+              <a:r>
+                <a:rPr sz="800" b="0">
+                  <a:solidFill>
+                    <a:srgbClr val="606060"/>
+                  </a:solidFill>
+                </a:rPr>
+                <a:t>2 家</a:t>
+              </a:r>
+            </a:p>
+          </p:txBody>
+        </p:sp>
+        <p:cxnSp>
+          <p:nvCxnSpPr>
+            <p:cNvPr id="120" name="用户-sep1"/>
+            <p:cNvCxnSpPr/>
+            <p:nvPr/>
+          </p:nvCxnSpPr>
+          <p:spPr>
+            <a:xfrm>
+              <a:off x="2422245" y="4023360"/>
+              <a:ext cx="0" cy="1051560"/>
+            </a:xfrm>
+            <a:prstGeom prst="line">
+              <a:avLst/>
+            </a:prstGeom>
+            <a:ln w="12700">
+              <a:solidFill>
+                <a:srgbClr val="D6D6D6"/>
+              </a:solidFill>
+            </a:ln>
+          </p:spPr>
+          <p:style>
+            <a:lnRef idx="2">
+              <a:schemeClr val="accent1"/>
+            </a:lnRef>
+            <a:fillRef idx="0">
+              <a:schemeClr val="accent1"/>
+            </a:fillRef>
+            <a:effectRef idx="1">
+              <a:schemeClr val="accent1"/>
+            </a:effectRef>
+            <a:fontRef idx="minor">
+              <a:schemeClr val="tx1"/>
+            </a:fontRef>
+          </p:style>
+        </p:cxnSp>
+        <p:sp>
+          <p:nvSpPr>
+            <p:cNvPr id="121" name="用户-m2-t"/>
+            <p:cNvSpPr txBox="1"/>
+            <p:nvPr/>
+          </p:nvSpPr>
+          <p:spPr>
+            <a:xfrm>
+              <a:off x="2513685" y="3931920"/>
+              <a:ext cx="1645920" cy="182880"/>
+            </a:xfrm>
+            <a:prstGeom prst="rect">
+              <a:avLst/>
+            </a:prstGeom>
+            <a:noFill/>
+          </p:spPr>
+          <p:txBody>
+            <a:bodyPr wrap="square" lIns="0" tIns="0" rIns="0" bIns="0">
+              <a:spAutoFit/>
+            </a:bodyPr>
+            <a:lstStyle/>
+            <a:p>
+              <a:pPr algn="l">
+                <a:spcAft>
+                  <a:spcPts val="0"/>
+                </a:spcAft>
+              </a:pPr>
+              <a:r>
+                <a:rPr sz="1000" b="1">
+                  <a:solidFill>
+                    <a:srgbClr val="1F4E79"/>
+                  </a:solidFill>
+                </a:rPr>
+                <a:t>履约表现</a:t>
+              </a:r>
+            </a:p>
+          </p:txBody>
+        </p:sp>
+        <p:sp>
+          <p:nvSpPr>
+            <p:cNvPr id="122" name="用户-m2-1"/>
+            <p:cNvSpPr txBox="1"/>
+            <p:nvPr/>
+          </p:nvSpPr>
+          <p:spPr>
+            <a:xfrm>
+              <a:off x="2513685" y="4133087"/>
+              <a:ext cx="1737360" cy="201168"/>
+            </a:xfrm>
+            <a:prstGeom prst="rect">
+              <a:avLst/>
+            </a:prstGeom>
+            <a:noFill/>
+          </p:spPr>
+          <p:txBody>
+            <a:bodyPr wrap="square" lIns="0" tIns="0" rIns="0" bIns="0">
+              <a:spAutoFit/>
+            </a:bodyPr>
+            <a:lstStyle/>
+            <a:p>
+              <a:pPr algn="l">
+                <a:spcAft>
+                  <a:spcPts val="0"/>
+                </a:spcAft>
+              </a:pPr>
+              <a:r>
+                <a:rPr sz="1000" b="1">
+                  <a:solidFill>
+                    <a:srgbClr val="0A0A0A"/>
+                  </a:solidFill>
+                </a:rPr>
+                <a:t>90 天还款</a:t>
+              </a:r>
+              <a:r>
+                <a:rPr sz="800" b="0">
+                  <a:solidFill>
+                    <a:srgbClr val="606060"/>
+                  </a:solidFill>
+                </a:rPr>
+                <a:t>9 次</a:t>
+              </a:r>
+            </a:p>
+          </p:txBody>
+        </p:sp>
+        <p:sp>
+          <p:nvSpPr>
+            <p:cNvPr id="123" name="用户-m2-2"/>
+            <p:cNvSpPr txBox="1"/>
+            <p:nvPr/>
+          </p:nvSpPr>
+          <p:spPr>
+            <a:xfrm>
+              <a:off x="2513685" y="4370831"/>
+              <a:ext cx="1737360" cy="201168"/>
+            </a:xfrm>
+            <a:prstGeom prst="rect">
+              <a:avLst/>
+            </a:prstGeom>
+            <a:noFill/>
+          </p:spPr>
+          <p:txBody>
+            <a:bodyPr wrap="square" lIns="0" tIns="0" rIns="0" bIns="0">
+              <a:spAutoFit/>
+            </a:bodyPr>
+            <a:lstStyle/>
+            <a:p>
+              <a:pPr algn="l">
+                <a:spcAft>
+                  <a:spcPts val="0"/>
+                </a:spcAft>
+              </a:pPr>
+              <a:r>
+                <a:rPr sz="1000" b="1">
+                  <a:solidFill>
+                    <a:srgbClr val="0A0A0A"/>
+                  </a:solidFill>
+                </a:rPr>
+                <a:t>还款中断</a:t>
+              </a:r>
+              <a:r>
+                <a:rPr sz="800" b="0">
+                  <a:solidFill>
+                    <a:srgbClr val="606060"/>
+                  </a:solidFill>
+                </a:rPr>
+                <a:t>无</a:t>
+              </a:r>
+            </a:p>
+          </p:txBody>
+        </p:sp>
+        <p:sp>
+          <p:nvSpPr>
+            <p:cNvPr id="124" name="用户-m2-3"/>
+            <p:cNvSpPr txBox="1"/>
+            <p:nvPr/>
+          </p:nvSpPr>
+          <p:spPr>
+            <a:xfrm>
+              <a:off x="2513685" y="4608575"/>
+              <a:ext cx="1737360" cy="201168"/>
+            </a:xfrm>
+            <a:prstGeom prst="rect">
+              <a:avLst/>
+            </a:prstGeom>
+            <a:noFill/>
+          </p:spPr>
+          <p:txBody>
+            <a:bodyPr wrap="square" lIns="0" tIns="0" rIns="0" bIns="0">
+              <a:spAutoFit/>
+            </a:bodyPr>
+            <a:lstStyle/>
+            <a:p>
+              <a:pPr algn="l">
+                <a:spcAft>
+                  <a:spcPts val="0"/>
+                </a:spcAft>
+              </a:pPr>
+              <a:r>
+                <a:rPr sz="1000" b="1">
+                  <a:solidFill>
+                    <a:srgbClr val="0A0A0A"/>
+                  </a:solidFill>
+                </a:rPr>
+                <a:t>近 90 天新增借款</a:t>
+              </a:r>
+              <a:r>
+                <a:rPr sz="800" b="0">
+                  <a:solidFill>
+                    <a:srgbClr val="606060"/>
+                  </a:solidFill>
+                </a:rPr>
+                <a:t>1 笔</a:t>
+              </a:r>
+            </a:p>
+          </p:txBody>
+        </p:sp>
+        <p:cxnSp>
+          <p:nvCxnSpPr>
+            <p:cNvPr id="125" name="用户-sep2"/>
+            <p:cNvCxnSpPr/>
+            <p:nvPr/>
+          </p:nvCxnSpPr>
+          <p:spPr>
+            <a:xfrm>
+              <a:off x="4196181" y="4023360"/>
+              <a:ext cx="0" cy="1051560"/>
+            </a:xfrm>
+            <a:prstGeom prst="line">
+              <a:avLst/>
+            </a:prstGeom>
+            <a:ln w="12700">
+              <a:solidFill>
+                <a:srgbClr val="D6D6D6"/>
+              </a:solidFill>
+            </a:ln>
+          </p:spPr>
+          <p:style>
+            <a:lnRef idx="2">
+              <a:schemeClr val="accent1"/>
+            </a:lnRef>
+            <a:fillRef idx="0">
+              <a:schemeClr val="accent1"/>
+            </a:fillRef>
+            <a:effectRef idx="1">
+              <a:schemeClr val="accent1"/>
+            </a:effectRef>
+            <a:fontRef idx="minor">
+              <a:schemeClr val="tx1"/>
+            </a:fontRef>
+          </p:style>
+        </p:cxnSp>
+        <p:sp>
+          <p:nvSpPr>
+            <p:cNvPr id="126" name="用户-m3-t"/>
+            <p:cNvSpPr txBox="1"/>
+            <p:nvPr/>
+          </p:nvSpPr>
+          <p:spPr>
+            <a:xfrm>
+              <a:off x="4287621" y="3931920"/>
+              <a:ext cx="1645920" cy="182880"/>
+            </a:xfrm>
+            <a:prstGeom prst="rect">
+              <a:avLst/>
+            </a:prstGeom>
+            <a:noFill/>
+          </p:spPr>
+          <p:txBody>
+            <a:bodyPr wrap="square" lIns="0" tIns="0" rIns="0" bIns="0">
+              <a:spAutoFit/>
+            </a:bodyPr>
+            <a:lstStyle/>
+            <a:p>
+              <a:pPr algn="l">
+                <a:spcAft>
+                  <a:spcPts val="0"/>
+                </a:spcAft>
+              </a:pPr>
+              <a:r>
+                <a:rPr sz="1000" b="1">
+                  <a:solidFill>
+                    <a:srgbClr val="1F4E79"/>
+                  </a:solidFill>
+                </a:rPr>
+                <a:t>风险信号</a:t>
+              </a:r>
+            </a:p>
+          </p:txBody>
+        </p:sp>
+        <p:sp>
+          <p:nvSpPr>
+            <p:cNvPr id="127" name="用户-m3-1"/>
+            <p:cNvSpPr txBox="1"/>
+            <p:nvPr/>
+          </p:nvSpPr>
+          <p:spPr>
+            <a:xfrm>
+              <a:off x="4287621" y="4133087"/>
+              <a:ext cx="1737360" cy="201168"/>
+            </a:xfrm>
+            <a:prstGeom prst="rect">
+              <a:avLst/>
+            </a:prstGeom>
+            <a:noFill/>
+          </p:spPr>
+          <p:txBody>
+            <a:bodyPr wrap="square" lIns="0" tIns="0" rIns="0" bIns="0">
+              <a:spAutoFit/>
+            </a:bodyPr>
+            <a:lstStyle/>
+            <a:p>
+              <a:pPr algn="l">
+                <a:spcAft>
+                  <a:spcPts val="0"/>
+                </a:spcAft>
+              </a:pPr>
+              <a:r>
+                <a:rPr sz="1000" b="1">
+                  <a:solidFill>
+                    <a:srgbClr val="0A0A0A"/>
+                  </a:solidFill>
+                </a:rPr>
+                <a:t>轻微逾期</a:t>
+              </a:r>
+              <a:r>
+                <a:rPr sz="800" b="1">
+                  <a:solidFill>
+                    <a:srgbClr val="D6A000"/>
+                  </a:solidFill>
+                </a:rPr>
+                <a:t>1 次</a:t>
+              </a:r>
+            </a:p>
+          </p:txBody>
+        </p:sp>
+        <p:sp>
+          <p:nvSpPr>
+            <p:cNvPr id="128" name="用户-m3-2"/>
+            <p:cNvSpPr txBox="1"/>
+            <p:nvPr/>
+          </p:nvSpPr>
+          <p:spPr>
+            <a:xfrm>
+              <a:off x="4287621" y="4370831"/>
+              <a:ext cx="1737360" cy="201168"/>
+            </a:xfrm>
+            <a:prstGeom prst="rect">
+              <a:avLst/>
+            </a:prstGeom>
+            <a:noFill/>
+          </p:spPr>
+          <p:txBody>
+            <a:bodyPr wrap="square" lIns="0" tIns="0" rIns="0" bIns="0">
+              <a:spAutoFit/>
+            </a:bodyPr>
+            <a:lstStyle/>
+            <a:p>
+              <a:pPr algn="l">
+                <a:spcAft>
+                  <a:spcPts val="0"/>
+                </a:spcAft>
+              </a:pPr>
+              <a:r>
+                <a:rPr sz="1000" b="1">
+                  <a:solidFill>
+                    <a:srgbClr val="0A0A0A"/>
+                  </a:solidFill>
+                </a:rPr>
+                <a:t>扣款失败</a:t>
+              </a:r>
+              <a:r>
+                <a:rPr sz="800" b="1">
+                  <a:solidFill>
+                    <a:srgbClr val="D6A000"/>
+                  </a:solidFill>
+                </a:rPr>
+                <a:t>1 次</a:t>
+              </a:r>
+            </a:p>
+          </p:txBody>
+        </p:sp>
+        <p:sp>
+          <p:nvSpPr>
+            <p:cNvPr id="129" name="用户-m3-3"/>
+            <p:cNvSpPr txBox="1"/>
+            <p:nvPr/>
+          </p:nvSpPr>
+          <p:spPr>
+            <a:xfrm>
+              <a:off x="4287621" y="4608575"/>
+              <a:ext cx="1737360" cy="201168"/>
+            </a:xfrm>
+            <a:prstGeom prst="rect">
+              <a:avLst/>
+            </a:prstGeom>
+            <a:noFill/>
+          </p:spPr>
+          <p:txBody>
+            <a:bodyPr wrap="square" lIns="0" tIns="0" rIns="0" bIns="0">
+              <a:spAutoFit/>
+            </a:bodyPr>
+            <a:lstStyle/>
+            <a:p>
+              <a:pPr algn="l">
+                <a:spcAft>
+                  <a:spcPts val="0"/>
+                </a:spcAft>
+              </a:pPr>
+              <a:r>
+                <a:rPr sz="1000" b="1">
+                  <a:solidFill>
+                    <a:srgbClr val="0A0A0A"/>
+                  </a:solidFill>
+                </a:rPr>
+                <a:t>90 天借款</a:t>
+              </a:r>
+              <a:r>
+                <a:rPr sz="800" b="0">
+                  <a:solidFill>
+                    <a:srgbClr val="606060"/>
+                  </a:solidFill>
+                </a:rPr>
+                <a:t>A$2,300</a:t>
+              </a:r>
+            </a:p>
+          </p:txBody>
+        </p:sp>
+      </p:grpSp>
       <p:sp>
         <p:nvSpPr>
-          <p:cNvPr id="51" name="用户-tag1"/>
+          <p:cNvPr id="25" name="Fa-bar"/>
           <p:cNvSpPr/>
           <p:nvPr/>
         </p:nvSpPr>
         <p:spPr>
           <a:xfrm>
-            <a:off x="803844" y="3593592"/>
-            <a:ext cx="1197864" cy="182880"/>
+            <a:off x="620963" y="3179140"/>
+            <a:ext cx="5376672" cy="54864"/>
           </a:xfrm>
-          <a:prstGeom prst="roundRect">
-            <a:avLst>
-              <a:gd name="adj" fmla="val 10000"/>
-            </a:avLst>
+          <a:prstGeom prst="rect">
+            <a:avLst/>
           </a:prstGeom>
           <a:solidFill>
-            <a:srgbClr val="FAF3E0"/>
+            <a:srgbClr val="1F4E79"/>
           </a:solidFill>
-          <a:ln w="12700">
-            <a:solidFill>
-              <a:srgbClr val="D6A000"/>
-            </a:solidFill>
+          <a:ln>
+            <a:noFill/>
           </a:ln>
           <a:effectLst/>
         </p:spPr>
@@ -9726,14 +10588,14 @@
       </p:sp>
       <p:sp>
         <p:nvSpPr>
-          <p:cNvPr id="52" name="用户-tag1-t"/>
+          <p:cNvPr id="26" name="Fa-title"/>
           <p:cNvSpPr txBox="1"/>
           <p:nvPr/>
         </p:nvSpPr>
         <p:spPr>
           <a:xfrm>
-            <a:off x="803844" y="3611880"/>
-            <a:ext cx="1197864" cy="146304"/>
+            <a:off x="803843" y="3279724"/>
+            <a:ext cx="5010912" cy="201168"/>
           </a:xfrm>
           <a:prstGeom prst="rect">
             <a:avLst/>
@@ -9742,263 +10604,20 @@
         </p:spPr>
         <p:txBody>
           <a:bodyPr wrap="square" lIns="0" tIns="0" rIns="0" bIns="0">
-            <a:noAutofit/>
+            <a:spAutoFit/>
           </a:bodyPr>
           <a:lstStyle/>
           <a:p>
+            <a:pPr algn="l"/>
             <a:r>
-              <a:rPr sz="800" b="1">
+              <a:rPr lang="zh-CN" sz="1050" b="1">
                 <a:solidFill>
-                  <a:srgbClr val="1F4E79"/>
+                  <a:srgbClr val="0A0A0A"/>
                 </a:solidFill>
+                <a:latin typeface="微软雅黑"/>
+                <a:ea typeface="微软雅黑"/>
               </a:rPr>
-              <a:t>多头借贷</a:t>
-            </a:r>
-          </a:p>
-        </p:txBody>
-      </p:sp>
-      <p:sp>
-        <p:nvSpPr>
-          <p:cNvPr id="53" name="用户-tag2"/>
-          <p:cNvSpPr/>
-          <p:nvPr/>
-        </p:nvSpPr>
-        <p:spPr>
-          <a:xfrm>
-            <a:off x="2074860" y="3593592"/>
-            <a:ext cx="1197864" cy="182880"/>
-          </a:xfrm>
-          <a:prstGeom prst="roundRect">
-            <a:avLst>
-              <a:gd name="adj" fmla="val 10000"/>
-            </a:avLst>
-          </a:prstGeom>
-          <a:solidFill>
-            <a:srgbClr val="FAF3E0"/>
-          </a:solidFill>
-          <a:ln w="12700">
-            <a:solidFill>
-              <a:srgbClr val="D6A000"/>
-            </a:solidFill>
-          </a:ln>
-          <a:effectLst/>
-        </p:spPr>
-        <p:style>
-          <a:lnRef idx="1">
-            <a:schemeClr val="accent1"/>
-          </a:lnRef>
-          <a:fillRef idx="3">
-            <a:schemeClr val="accent1"/>
-          </a:fillRef>
-          <a:effectRef idx="2">
-            <a:schemeClr val="accent1"/>
-          </a:effectRef>
-          <a:fontRef idx="minor">
-            <a:schemeClr val="lt1"/>
-          </a:fontRef>
-        </p:style>
-        <p:txBody>
-          <a:bodyPr rtlCol="0" anchor="ctr"/>
-          <a:lstStyle/>
-          <a:p>
-            <a:pPr algn="ctr"/>
-            <a:endParaRPr/>
-          </a:p>
-        </p:txBody>
-      </p:sp>
-      <p:sp>
-        <p:nvSpPr>
-          <p:cNvPr id="54" name="用户-tag2-t"/>
-          <p:cNvSpPr txBox="1"/>
-          <p:nvPr/>
-        </p:nvSpPr>
-        <p:spPr>
-          <a:xfrm>
-            <a:off x="2074860" y="3611880"/>
-            <a:ext cx="1197864" cy="146304"/>
-          </a:xfrm>
-          <a:prstGeom prst="rect">
-            <a:avLst/>
-          </a:prstGeom>
-          <a:noFill/>
-        </p:spPr>
-        <p:txBody>
-          <a:bodyPr wrap="square" lIns="0" tIns="0" rIns="0" bIns="0">
-            <a:noAutofit/>
-          </a:bodyPr>
-          <a:lstStyle/>
-          <a:p>
-            <a:r>
-              <a:rPr sz="800" b="1">
-                <a:solidFill>
-                  <a:srgbClr val="1F4E79"/>
-                </a:solidFill>
-              </a:rPr>
-              <a:t>近期新增贷款</a:t>
-            </a:r>
-          </a:p>
-        </p:txBody>
-      </p:sp>
-      <p:sp>
-        <p:nvSpPr>
-          <p:cNvPr id="55" name="用户-tag3"/>
-          <p:cNvSpPr/>
-          <p:nvPr/>
-        </p:nvSpPr>
-        <p:spPr>
-          <a:xfrm>
-            <a:off x="3345876" y="3593592"/>
-            <a:ext cx="1197864" cy="182880"/>
-          </a:xfrm>
-          <a:prstGeom prst="roundRect">
-            <a:avLst>
-              <a:gd name="adj" fmla="val 10000"/>
-            </a:avLst>
-          </a:prstGeom>
-          <a:solidFill>
-            <a:srgbClr val="FAF3E0"/>
-          </a:solidFill>
-          <a:ln w="12700">
-            <a:solidFill>
-              <a:srgbClr val="D6A000"/>
-            </a:solidFill>
-          </a:ln>
-          <a:effectLst/>
-        </p:spPr>
-        <p:style>
-          <a:lnRef idx="1">
-            <a:schemeClr val="accent1"/>
-          </a:lnRef>
-          <a:fillRef idx="3">
-            <a:schemeClr val="accent1"/>
-          </a:fillRef>
-          <a:effectRef idx="2">
-            <a:schemeClr val="accent1"/>
-          </a:effectRef>
-          <a:fontRef idx="minor">
-            <a:schemeClr val="lt1"/>
-          </a:fontRef>
-        </p:style>
-        <p:txBody>
-          <a:bodyPr rtlCol="0" anchor="ctr"/>
-          <a:lstStyle/>
-          <a:p>
-            <a:pPr algn="ctr"/>
-            <a:endParaRPr/>
-          </a:p>
-        </p:txBody>
-      </p:sp>
-      <p:sp>
-        <p:nvSpPr>
-          <p:cNvPr id="56" name="用户-tag3-t"/>
-          <p:cNvSpPr txBox="1"/>
-          <p:nvPr/>
-        </p:nvSpPr>
-        <p:spPr>
-          <a:xfrm>
-            <a:off x="3345876" y="3611880"/>
-            <a:ext cx="1197864" cy="146304"/>
-          </a:xfrm>
-          <a:prstGeom prst="rect">
-            <a:avLst/>
-          </a:prstGeom>
-          <a:noFill/>
-        </p:spPr>
-        <p:txBody>
-          <a:bodyPr wrap="square" lIns="0" tIns="0" rIns="0" bIns="0">
-            <a:noAutofit/>
-          </a:bodyPr>
-          <a:lstStyle/>
-          <a:p>
-            <a:r>
-              <a:rPr sz="800" b="1">
-                <a:solidFill>
-                  <a:srgbClr val="1F4E79"/>
-                </a:solidFill>
-              </a:rPr>
-              <a:t>高成本借贷</a:t>
-            </a:r>
-          </a:p>
-        </p:txBody>
-      </p:sp>
-      <p:sp>
-        <p:nvSpPr>
-          <p:cNvPr id="57" name="用户-tag4"/>
-          <p:cNvSpPr/>
-          <p:nvPr/>
-        </p:nvSpPr>
-        <p:spPr>
-          <a:xfrm>
-            <a:off x="4616892" y="3593592"/>
-            <a:ext cx="1197864" cy="182880"/>
-          </a:xfrm>
-          <a:prstGeom prst="roundRect">
-            <a:avLst>
-              <a:gd name="adj" fmla="val 10000"/>
-            </a:avLst>
-          </a:prstGeom>
-          <a:solidFill>
-            <a:srgbClr val="FAF3E0"/>
-          </a:solidFill>
-          <a:ln w="12700">
-            <a:solidFill>
-              <a:srgbClr val="D6A000"/>
-            </a:solidFill>
-          </a:ln>
-          <a:effectLst/>
-        </p:spPr>
-        <p:style>
-          <a:lnRef idx="1">
-            <a:schemeClr val="accent1"/>
-          </a:lnRef>
-          <a:fillRef idx="3">
-            <a:schemeClr val="accent1"/>
-          </a:fillRef>
-          <a:effectRef idx="2">
-            <a:schemeClr val="accent1"/>
-          </a:effectRef>
-          <a:fontRef idx="minor">
-            <a:schemeClr val="lt1"/>
-          </a:fontRef>
-        </p:style>
-        <p:txBody>
-          <a:bodyPr rtlCol="0" anchor="ctr"/>
-          <a:lstStyle/>
-          <a:p>
-            <a:pPr algn="ctr"/>
-            <a:endParaRPr/>
-          </a:p>
-        </p:txBody>
-      </p:sp>
-      <p:sp>
-        <p:nvSpPr>
-          <p:cNvPr id="58" name="用户-tag4-t"/>
-          <p:cNvSpPr txBox="1"/>
-          <p:nvPr/>
-        </p:nvSpPr>
-        <p:spPr>
-          <a:xfrm>
-            <a:off x="4616892" y="3611880"/>
-            <a:ext cx="1197864" cy="146304"/>
-          </a:xfrm>
-          <a:prstGeom prst="rect">
-            <a:avLst/>
-          </a:prstGeom>
-          <a:noFill/>
-        </p:spPr>
-        <p:txBody>
-          <a:bodyPr wrap="square" lIns="0" tIns="0" rIns="0" bIns="0">
-            <a:noAutofit/>
-          </a:bodyPr>
-          <a:lstStyle/>
-          <a:p>
-            <a:r>
-              <a:rPr sz="800" b="1">
-                <a:solidFill>
-                  <a:srgbClr val="1F4E79"/>
-                </a:solidFill>
-              </a:rPr>
-              <a:t>存在轻微逾期</a:t>
+              <a:t>Fair Go Finance 单笔贷款画像</a:t>
             </a:r>
           </a:p>
         </p:txBody>
@@ -10011,7 +10630,7 @@
         </p:nvSpPr>
         <p:spPr>
           <a:xfrm>
-            <a:off x="6454836" y="4261104"/>
+            <a:off x="805301" y="4245331"/>
             <a:ext cx="1463040" cy="146304"/>
           </a:xfrm>
           <a:prstGeom prst="rect">
@@ -10026,13 +10645,18 @@
           <a:lstStyle/>
           <a:p>
             <a:r>
-              <a:rPr sz="800" b="0">
+              <a:rPr sz="900" b="0" dirty="0" err="1">
                 <a:solidFill>
                   <a:srgbClr val="606060"/>
                 </a:solidFill>
               </a:rPr>
               <a:t>借款金额</a:t>
             </a:r>
+            <a:endParaRPr sz="900" b="0" dirty="0">
+              <a:solidFill>
+                <a:srgbClr val="606060"/>
+              </a:solidFill>
+            </a:endParaRPr>
           </a:p>
         </p:txBody>
       </p:sp>
@@ -10044,7 +10668,7 @@
         </p:nvSpPr>
         <p:spPr>
           <a:xfrm>
-            <a:off x="6454836" y="3913632"/>
+            <a:off x="805301" y="3940734"/>
             <a:ext cx="1463040" cy="292608"/>
           </a:xfrm>
           <a:prstGeom prst="rect">
@@ -10059,7 +10683,7 @@
           <a:lstStyle/>
           <a:p>
             <a:r>
-              <a:rPr sz="1800" b="1">
+              <a:rPr sz="1200" b="1" dirty="0">
                 <a:solidFill>
                   <a:srgbClr val="1F4E79"/>
                 </a:solidFill>
@@ -10077,7 +10701,7 @@
         </p:nvSpPr>
         <p:spPr>
           <a:xfrm>
-            <a:off x="8128188" y="4261104"/>
+            <a:off x="2478653" y="4245331"/>
             <a:ext cx="1463040" cy="146304"/>
           </a:xfrm>
           <a:prstGeom prst="rect">
@@ -10092,13 +10716,18 @@
           <a:lstStyle/>
           <a:p>
             <a:r>
-              <a:rPr sz="800" b="0">
+              <a:rPr sz="900" b="0" dirty="0" err="1">
                 <a:solidFill>
                   <a:srgbClr val="606060"/>
                 </a:solidFill>
               </a:rPr>
               <a:t>已还本金</a:t>
             </a:r>
+            <a:endParaRPr sz="900" b="0" dirty="0">
+              <a:solidFill>
+                <a:srgbClr val="606060"/>
+              </a:solidFill>
+            </a:endParaRPr>
           </a:p>
         </p:txBody>
       </p:sp>
@@ -10110,7 +10739,7 @@
         </p:nvSpPr>
         <p:spPr>
           <a:xfrm>
-            <a:off x="8128188" y="3913632"/>
+            <a:off x="2478653" y="3940734"/>
             <a:ext cx="1463040" cy="292608"/>
           </a:xfrm>
           <a:prstGeom prst="rect">
@@ -10125,7 +10754,7 @@
           <a:lstStyle/>
           <a:p>
             <a:r>
-              <a:rPr sz="1800" b="1">
+              <a:rPr sz="1200" b="1" dirty="0">
                 <a:solidFill>
                   <a:srgbClr val="1F4E79"/>
                 </a:solidFill>
@@ -10143,7 +10772,7 @@
         </p:nvSpPr>
         <p:spPr>
           <a:xfrm>
-            <a:off x="9801540" y="4261104"/>
+            <a:off x="4152005" y="4245331"/>
             <a:ext cx="1463040" cy="146304"/>
           </a:xfrm>
           <a:prstGeom prst="rect">
@@ -10158,7 +10787,7 @@
           <a:lstStyle/>
           <a:p>
             <a:r>
-              <a:rPr sz="800" b="0">
+              <a:rPr sz="900" b="0">
                 <a:solidFill>
                   <a:srgbClr val="606060"/>
                 </a:solidFill>
@@ -10176,7 +10805,7 @@
         </p:nvSpPr>
         <p:spPr>
           <a:xfrm>
-            <a:off x="9801540" y="3913632"/>
+            <a:off x="4152005" y="3940734"/>
             <a:ext cx="1463040" cy="292608"/>
           </a:xfrm>
           <a:prstGeom prst="rect">
@@ -10191,7 +10820,7 @@
           <a:lstStyle/>
           <a:p>
             <a:r>
-              <a:rPr sz="1800" b="1">
+              <a:rPr sz="1200" b="1">
                 <a:solidFill>
                   <a:srgbClr val="1F4E79"/>
                 </a:solidFill>
@@ -10209,7 +10838,47 @@
         </p:nvSpPr>
         <p:spPr>
           <a:xfrm>
-            <a:off x="7917876" y="4005072"/>
+            <a:off x="2268341" y="4032174"/>
+            <a:ext cx="182880" cy="182880"/>
+          </a:xfrm>
+          <a:prstGeom prst="rect">
+            <a:avLst/>
+          </a:prstGeom>
+          <a:noFill/>
+        </p:spPr>
+        <p:txBody>
+          <a:bodyPr wrap="square" lIns="0" tIns="0" rIns="0" bIns="0">
+            <a:noAutofit/>
+          </a:bodyPr>
+          <a:lstStyle/>
+          <a:p>
+            <a:pPr>
+              <a:lnSpc>
+                <a:spcPct val="100000"/>
+              </a:lnSpc>
+            </a:pPr>
+            <a:r>
+              <a:rPr lang="zh-CN" sz="1200" b="1" dirty="0">
+                <a:solidFill>
+                  <a:srgbClr val="606060"/>
+                </a:solidFill>
+                <a:latin typeface="微软雅黑"/>
+                <a:ea typeface="微软雅黑"/>
+              </a:rPr>
+              <a:t>→</a:t>
+            </a:r>
+          </a:p>
+        </p:txBody>
+      </p:sp>
+      <p:sp>
+        <p:nvSpPr>
+          <p:cNvPr id="89" name="Fa-arr2"/>
+          <p:cNvSpPr txBox="1"/>
+          <p:nvPr/>
+        </p:nvSpPr>
+        <p:spPr>
+          <a:xfrm>
+            <a:off x="3941693" y="4032174"/>
             <a:ext cx="182880" cy="182880"/>
           </a:xfrm>
           <a:prstGeom prst="rect">
@@ -10243,651 +10912,13 @@
       </p:sp>
       <p:sp>
         <p:nvSpPr>
-          <p:cNvPr id="89" name="Fa-arr2"/>
-          <p:cNvSpPr txBox="1"/>
-          <p:nvPr/>
-        </p:nvSpPr>
-        <p:spPr>
-          <a:xfrm>
-            <a:off x="9591228" y="4005072"/>
-            <a:ext cx="182880" cy="182880"/>
-          </a:xfrm>
-          <a:prstGeom prst="rect">
-            <a:avLst/>
-          </a:prstGeom>
-          <a:noFill/>
-        </p:spPr>
-        <p:txBody>
-          <a:bodyPr wrap="square" lIns="0" tIns="0" rIns="0" bIns="0">
-            <a:noAutofit/>
-          </a:bodyPr>
-          <a:lstStyle/>
-          <a:p>
-            <a:pPr>
-              <a:lnSpc>
-                <a:spcPct val="100000"/>
-              </a:lnSpc>
-            </a:pPr>
-            <a:r>
-              <a:rPr lang="zh-CN" sz="1200" b="1">
-                <a:solidFill>
-                  <a:srgbClr val="606060"/>
-                </a:solidFill>
-                <a:latin typeface="微软雅黑"/>
-                <a:ea typeface="微软雅黑"/>
-              </a:rPr>
-              <a:t>→</a:t>
-            </a:r>
-          </a:p>
-        </p:txBody>
-      </p:sp>
-      <p:sp>
-        <p:nvSpPr>
-          <p:cNvPr id="116" name="用户-m1-t"/>
-          <p:cNvSpPr txBox="1"/>
-          <p:nvPr/>
-        </p:nvSpPr>
-        <p:spPr>
-          <a:xfrm>
-            <a:off x="739749" y="3931920"/>
-            <a:ext cx="1645920" cy="182880"/>
-          </a:xfrm>
-          <a:prstGeom prst="rect">
-            <a:avLst/>
-          </a:prstGeom>
-          <a:noFill/>
-        </p:spPr>
-        <p:txBody>
-          <a:bodyPr wrap="square" lIns="0" tIns="0" rIns="0" bIns="0">
-            <a:spAutoFit/>
-          </a:bodyPr>
-          <a:lstStyle/>
-          <a:p>
-            <a:pPr algn="l">
-              <a:spcAft>
-                <a:spcPts val="0"/>
-              </a:spcAft>
-            </a:pPr>
-            <a:r>
-              <a:rPr sz="1000" b="1">
-                <a:solidFill>
-                  <a:srgbClr val="1F4E79"/>
-                </a:solidFill>
-              </a:rPr>
-              <a:t>负债情况</a:t>
-            </a:r>
-          </a:p>
-        </p:txBody>
-      </p:sp>
-      <p:sp>
-        <p:nvSpPr>
-          <p:cNvPr id="117" name="用户-m1-1"/>
-          <p:cNvSpPr txBox="1"/>
-          <p:nvPr/>
-        </p:nvSpPr>
-        <p:spPr>
-          <a:xfrm>
-            <a:off x="739749" y="4133087"/>
-            <a:ext cx="1737360" cy="201168"/>
-          </a:xfrm>
-          <a:prstGeom prst="rect">
-            <a:avLst/>
-          </a:prstGeom>
-          <a:noFill/>
-        </p:spPr>
-        <p:txBody>
-          <a:bodyPr wrap="square" lIns="0" tIns="0" rIns="0" bIns="0">
-            <a:spAutoFit/>
-          </a:bodyPr>
-          <a:lstStyle/>
-          <a:p>
-            <a:pPr algn="l">
-              <a:spcAft>
-                <a:spcPts val="0"/>
-              </a:spcAft>
-            </a:pPr>
-            <a:r>
-              <a:rPr sz="1000" b="1">
-                <a:solidFill>
-                  <a:srgbClr val="0A0A0A"/>
-                </a:solidFill>
-              </a:rPr>
-              <a:t>预计待还</a:t>
-            </a:r>
-            <a:r>
-              <a:rPr sz="800" b="0">
-                <a:solidFill>
-                  <a:srgbClr val="606060"/>
-                </a:solidFill>
-              </a:rPr>
-              <a:t>A$1,016</a:t>
-            </a:r>
-          </a:p>
-        </p:txBody>
-      </p:sp>
-      <p:sp>
-        <p:nvSpPr>
-          <p:cNvPr id="118" name="用户-m1-2"/>
-          <p:cNvSpPr txBox="1"/>
-          <p:nvPr/>
-        </p:nvSpPr>
-        <p:spPr>
-          <a:xfrm>
-            <a:off x="739749" y="4370831"/>
-            <a:ext cx="1737360" cy="201168"/>
-          </a:xfrm>
-          <a:prstGeom prst="rect">
-            <a:avLst/>
-          </a:prstGeom>
-          <a:noFill/>
-        </p:spPr>
-        <p:txBody>
-          <a:bodyPr wrap="square" lIns="0" tIns="0" rIns="0" bIns="0">
-            <a:spAutoFit/>
-          </a:bodyPr>
-          <a:lstStyle/>
-          <a:p>
-            <a:pPr algn="l">
-              <a:spcAft>
-                <a:spcPts val="0"/>
-              </a:spcAft>
-            </a:pPr>
-            <a:r>
-              <a:rPr sz="1000" b="1">
-                <a:solidFill>
-                  <a:srgbClr val="0A0A0A"/>
-                </a:solidFill>
-              </a:rPr>
-              <a:t>平均月还款</a:t>
-            </a:r>
-            <a:r>
-              <a:rPr sz="800" b="0">
-                <a:solidFill>
-                  <a:srgbClr val="606060"/>
-                </a:solidFill>
-              </a:rPr>
-              <a:t>A$428</a:t>
-            </a:r>
-          </a:p>
-        </p:txBody>
-      </p:sp>
-      <p:sp>
-        <p:nvSpPr>
-          <p:cNvPr id="119" name="用户-m1-3"/>
-          <p:cNvSpPr txBox="1"/>
-          <p:nvPr/>
-        </p:nvSpPr>
-        <p:spPr>
-          <a:xfrm>
-            <a:off x="739749" y="4608575"/>
-            <a:ext cx="1737360" cy="201168"/>
-          </a:xfrm>
-          <a:prstGeom prst="rect">
-            <a:avLst/>
-          </a:prstGeom>
-          <a:noFill/>
-        </p:spPr>
-        <p:txBody>
-          <a:bodyPr wrap="square" lIns="0" tIns="0" rIns="0" bIns="0">
-            <a:spAutoFit/>
-          </a:bodyPr>
-          <a:lstStyle/>
-          <a:p>
-            <a:pPr algn="l">
-              <a:spcAft>
-                <a:spcPts val="0"/>
-              </a:spcAft>
-            </a:pPr>
-            <a:r>
-              <a:rPr sz="1000" b="1">
-                <a:solidFill>
-                  <a:srgbClr val="0A0A0A"/>
-                </a:solidFill>
-              </a:rPr>
-              <a:t>贷款机构</a:t>
-            </a:r>
-            <a:r>
-              <a:rPr sz="800" b="0">
-                <a:solidFill>
-                  <a:srgbClr val="606060"/>
-                </a:solidFill>
-              </a:rPr>
-              <a:t>2 家</a:t>
-            </a:r>
-          </a:p>
-        </p:txBody>
-      </p:sp>
-      <p:cxnSp>
-        <p:nvCxnSpPr>
-          <p:cNvPr id="120" name="用户-sep1"/>
-          <p:cNvCxnSpPr/>
-          <p:nvPr/>
-        </p:nvCxnSpPr>
-        <p:spPr>
-          <a:xfrm>
-            <a:off x="2422245" y="4023360"/>
-            <a:ext cx="0" cy="1051560"/>
-          </a:xfrm>
-          <a:prstGeom prst="line">
-            <a:avLst/>
-          </a:prstGeom>
-          <a:ln w="12700">
-            <a:solidFill>
-              <a:srgbClr val="D6D6D6"/>
-            </a:solidFill>
-          </a:ln>
-        </p:spPr>
-        <p:style>
-          <a:lnRef idx="2">
-            <a:schemeClr val="accent1"/>
-          </a:lnRef>
-          <a:fillRef idx="0">
-            <a:schemeClr val="accent1"/>
-          </a:fillRef>
-          <a:effectRef idx="1">
-            <a:schemeClr val="accent1"/>
-          </a:effectRef>
-          <a:fontRef idx="minor">
-            <a:schemeClr val="tx1"/>
-          </a:fontRef>
-        </p:style>
-      </p:cxnSp>
-      <p:sp>
-        <p:nvSpPr>
-          <p:cNvPr id="121" name="用户-m2-t"/>
-          <p:cNvSpPr txBox="1"/>
-          <p:nvPr/>
-        </p:nvSpPr>
-        <p:spPr>
-          <a:xfrm>
-            <a:off x="2513685" y="3931920"/>
-            <a:ext cx="1645920" cy="182880"/>
-          </a:xfrm>
-          <a:prstGeom prst="rect">
-            <a:avLst/>
-          </a:prstGeom>
-          <a:noFill/>
-        </p:spPr>
-        <p:txBody>
-          <a:bodyPr wrap="square" lIns="0" tIns="0" rIns="0" bIns="0">
-            <a:spAutoFit/>
-          </a:bodyPr>
-          <a:lstStyle/>
-          <a:p>
-            <a:pPr algn="l">
-              <a:spcAft>
-                <a:spcPts val="0"/>
-              </a:spcAft>
-            </a:pPr>
-            <a:r>
-              <a:rPr sz="1000" b="1">
-                <a:solidFill>
-                  <a:srgbClr val="1F4E79"/>
-                </a:solidFill>
-              </a:rPr>
-              <a:t>履约表现</a:t>
-            </a:r>
-          </a:p>
-        </p:txBody>
-      </p:sp>
-      <p:sp>
-        <p:nvSpPr>
-          <p:cNvPr id="122" name="用户-m2-1"/>
-          <p:cNvSpPr txBox="1"/>
-          <p:nvPr/>
-        </p:nvSpPr>
-        <p:spPr>
-          <a:xfrm>
-            <a:off x="2513685" y="4133087"/>
-            <a:ext cx="1737360" cy="201168"/>
-          </a:xfrm>
-          <a:prstGeom prst="rect">
-            <a:avLst/>
-          </a:prstGeom>
-          <a:noFill/>
-        </p:spPr>
-        <p:txBody>
-          <a:bodyPr wrap="square" lIns="0" tIns="0" rIns="0" bIns="0">
-            <a:spAutoFit/>
-          </a:bodyPr>
-          <a:lstStyle/>
-          <a:p>
-            <a:pPr algn="l">
-              <a:spcAft>
-                <a:spcPts val="0"/>
-              </a:spcAft>
-            </a:pPr>
-            <a:r>
-              <a:rPr sz="1000" b="1">
-                <a:solidFill>
-                  <a:srgbClr val="0A0A0A"/>
-                </a:solidFill>
-              </a:rPr>
-              <a:t>90 天还款</a:t>
-            </a:r>
-            <a:r>
-              <a:rPr sz="800" b="0">
-                <a:solidFill>
-                  <a:srgbClr val="606060"/>
-                </a:solidFill>
-              </a:rPr>
-              <a:t>9 次</a:t>
-            </a:r>
-          </a:p>
-        </p:txBody>
-      </p:sp>
-      <p:sp>
-        <p:nvSpPr>
-          <p:cNvPr id="123" name="用户-m2-2"/>
-          <p:cNvSpPr txBox="1"/>
-          <p:nvPr/>
-        </p:nvSpPr>
-        <p:spPr>
-          <a:xfrm>
-            <a:off x="2513685" y="4370831"/>
-            <a:ext cx="1737360" cy="201168"/>
-          </a:xfrm>
-          <a:prstGeom prst="rect">
-            <a:avLst/>
-          </a:prstGeom>
-          <a:noFill/>
-        </p:spPr>
-        <p:txBody>
-          <a:bodyPr wrap="square" lIns="0" tIns="0" rIns="0" bIns="0">
-            <a:spAutoFit/>
-          </a:bodyPr>
-          <a:lstStyle/>
-          <a:p>
-            <a:pPr algn="l">
-              <a:spcAft>
-                <a:spcPts val="0"/>
-              </a:spcAft>
-            </a:pPr>
-            <a:r>
-              <a:rPr sz="1000" b="1">
-                <a:solidFill>
-                  <a:srgbClr val="0A0A0A"/>
-                </a:solidFill>
-              </a:rPr>
-              <a:t>还款中断</a:t>
-            </a:r>
-            <a:r>
-              <a:rPr sz="800" b="0">
-                <a:solidFill>
-                  <a:srgbClr val="606060"/>
-                </a:solidFill>
-              </a:rPr>
-              <a:t>无</a:t>
-            </a:r>
-          </a:p>
-        </p:txBody>
-      </p:sp>
-      <p:sp>
-        <p:nvSpPr>
-          <p:cNvPr id="124" name="用户-m2-3"/>
-          <p:cNvSpPr txBox="1"/>
-          <p:nvPr/>
-        </p:nvSpPr>
-        <p:spPr>
-          <a:xfrm>
-            <a:off x="2513685" y="4608575"/>
-            <a:ext cx="1737360" cy="201168"/>
-          </a:xfrm>
-          <a:prstGeom prst="rect">
-            <a:avLst/>
-          </a:prstGeom>
-          <a:noFill/>
-        </p:spPr>
-        <p:txBody>
-          <a:bodyPr wrap="square" lIns="0" tIns="0" rIns="0" bIns="0">
-            <a:spAutoFit/>
-          </a:bodyPr>
-          <a:lstStyle/>
-          <a:p>
-            <a:pPr algn="l">
-              <a:spcAft>
-                <a:spcPts val="0"/>
-              </a:spcAft>
-            </a:pPr>
-            <a:r>
-              <a:rPr sz="1000" b="1">
-                <a:solidFill>
-                  <a:srgbClr val="0A0A0A"/>
-                </a:solidFill>
-              </a:rPr>
-              <a:t>近 90 天新增借款</a:t>
-            </a:r>
-            <a:r>
-              <a:rPr sz="800" b="0">
-                <a:solidFill>
-                  <a:srgbClr val="606060"/>
-                </a:solidFill>
-              </a:rPr>
-              <a:t>1 笔</a:t>
-            </a:r>
-          </a:p>
-        </p:txBody>
-      </p:sp>
-      <p:cxnSp>
-        <p:nvCxnSpPr>
-          <p:cNvPr id="125" name="用户-sep2"/>
-          <p:cNvCxnSpPr/>
-          <p:nvPr/>
-        </p:nvCxnSpPr>
-        <p:spPr>
-          <a:xfrm>
-            <a:off x="4196181" y="4023360"/>
-            <a:ext cx="0" cy="1051560"/>
-          </a:xfrm>
-          <a:prstGeom prst="line">
-            <a:avLst/>
-          </a:prstGeom>
-          <a:ln w="12700">
-            <a:solidFill>
-              <a:srgbClr val="D6D6D6"/>
-            </a:solidFill>
-          </a:ln>
-        </p:spPr>
-        <p:style>
-          <a:lnRef idx="2">
-            <a:schemeClr val="accent1"/>
-          </a:lnRef>
-          <a:fillRef idx="0">
-            <a:schemeClr val="accent1"/>
-          </a:fillRef>
-          <a:effectRef idx="1">
-            <a:schemeClr val="accent1"/>
-          </a:effectRef>
-          <a:fontRef idx="minor">
-            <a:schemeClr val="tx1"/>
-          </a:fontRef>
-        </p:style>
-      </p:cxnSp>
-      <p:sp>
-        <p:nvSpPr>
-          <p:cNvPr id="126" name="用户-m3-t"/>
-          <p:cNvSpPr txBox="1"/>
-          <p:nvPr/>
-        </p:nvSpPr>
-        <p:spPr>
-          <a:xfrm>
-            <a:off x="4287621" y="3931920"/>
-            <a:ext cx="1645920" cy="182880"/>
-          </a:xfrm>
-          <a:prstGeom prst="rect">
-            <a:avLst/>
-          </a:prstGeom>
-          <a:noFill/>
-        </p:spPr>
-        <p:txBody>
-          <a:bodyPr wrap="square" lIns="0" tIns="0" rIns="0" bIns="0">
-            <a:spAutoFit/>
-          </a:bodyPr>
-          <a:lstStyle/>
-          <a:p>
-            <a:pPr algn="l">
-              <a:spcAft>
-                <a:spcPts val="0"/>
-              </a:spcAft>
-            </a:pPr>
-            <a:r>
-              <a:rPr sz="1000" b="1">
-                <a:solidFill>
-                  <a:srgbClr val="1F4E79"/>
-                </a:solidFill>
-              </a:rPr>
-              <a:t>风险信号</a:t>
-            </a:r>
-          </a:p>
-        </p:txBody>
-      </p:sp>
-      <p:sp>
-        <p:nvSpPr>
-          <p:cNvPr id="127" name="用户-m3-1"/>
-          <p:cNvSpPr txBox="1"/>
-          <p:nvPr/>
-        </p:nvSpPr>
-        <p:spPr>
-          <a:xfrm>
-            <a:off x="4287621" y="4133087"/>
-            <a:ext cx="1737360" cy="201168"/>
-          </a:xfrm>
-          <a:prstGeom prst="rect">
-            <a:avLst/>
-          </a:prstGeom>
-          <a:noFill/>
-        </p:spPr>
-        <p:txBody>
-          <a:bodyPr wrap="square" lIns="0" tIns="0" rIns="0" bIns="0">
-            <a:spAutoFit/>
-          </a:bodyPr>
-          <a:lstStyle/>
-          <a:p>
-            <a:pPr algn="l">
-              <a:spcAft>
-                <a:spcPts val="0"/>
-              </a:spcAft>
-            </a:pPr>
-            <a:r>
-              <a:rPr sz="1000" b="1">
-                <a:solidFill>
-                  <a:srgbClr val="0A0A0A"/>
-                </a:solidFill>
-              </a:rPr>
-              <a:t>轻微逾期</a:t>
-            </a:r>
-            <a:r>
-              <a:rPr sz="800" b="1">
-                <a:solidFill>
-                  <a:srgbClr val="D6A000"/>
-                </a:solidFill>
-              </a:rPr>
-              <a:t>1 次</a:t>
-            </a:r>
-          </a:p>
-        </p:txBody>
-      </p:sp>
-      <p:sp>
-        <p:nvSpPr>
-          <p:cNvPr id="128" name="用户-m3-2"/>
-          <p:cNvSpPr txBox="1"/>
-          <p:nvPr/>
-        </p:nvSpPr>
-        <p:spPr>
-          <a:xfrm>
-            <a:off x="4287621" y="4370831"/>
-            <a:ext cx="1737360" cy="201168"/>
-          </a:xfrm>
-          <a:prstGeom prst="rect">
-            <a:avLst/>
-          </a:prstGeom>
-          <a:noFill/>
-        </p:spPr>
-        <p:txBody>
-          <a:bodyPr wrap="square" lIns="0" tIns="0" rIns="0" bIns="0">
-            <a:spAutoFit/>
-          </a:bodyPr>
-          <a:lstStyle/>
-          <a:p>
-            <a:pPr algn="l">
-              <a:spcAft>
-                <a:spcPts val="0"/>
-              </a:spcAft>
-            </a:pPr>
-            <a:r>
-              <a:rPr sz="1000" b="1">
-                <a:solidFill>
-                  <a:srgbClr val="0A0A0A"/>
-                </a:solidFill>
-              </a:rPr>
-              <a:t>扣款失败</a:t>
-            </a:r>
-            <a:r>
-              <a:rPr sz="800" b="1">
-                <a:solidFill>
-                  <a:srgbClr val="D6A000"/>
-                </a:solidFill>
-              </a:rPr>
-              <a:t>1 次</a:t>
-            </a:r>
-          </a:p>
-        </p:txBody>
-      </p:sp>
-      <p:sp>
-        <p:nvSpPr>
-          <p:cNvPr id="129" name="用户-m3-3"/>
-          <p:cNvSpPr txBox="1"/>
-          <p:nvPr/>
-        </p:nvSpPr>
-        <p:spPr>
-          <a:xfrm>
-            <a:off x="4287621" y="4608575"/>
-            <a:ext cx="1737360" cy="201168"/>
-          </a:xfrm>
-          <a:prstGeom prst="rect">
-            <a:avLst/>
-          </a:prstGeom>
-          <a:noFill/>
-        </p:spPr>
-        <p:txBody>
-          <a:bodyPr wrap="square" lIns="0" tIns="0" rIns="0" bIns="0">
-            <a:spAutoFit/>
-          </a:bodyPr>
-          <a:lstStyle/>
-          <a:p>
-            <a:pPr algn="l">
-              <a:spcAft>
-                <a:spcPts val="0"/>
-              </a:spcAft>
-            </a:pPr>
-            <a:r>
-              <a:rPr sz="1000" b="1">
-                <a:solidFill>
-                  <a:srgbClr val="0A0A0A"/>
-                </a:solidFill>
-              </a:rPr>
-              <a:t>90 天借款</a:t>
-            </a:r>
-            <a:r>
-              <a:rPr sz="800" b="0">
-                <a:solidFill>
-                  <a:srgbClr val="606060"/>
-                </a:solidFill>
-              </a:rPr>
-              <a:t>A$2,300</a:t>
-            </a:r>
-          </a:p>
-        </p:txBody>
-      </p:sp>
-      <p:sp>
-        <p:nvSpPr>
           <p:cNvPr id="130" name="Fa-sub"/>
           <p:cNvSpPr txBox="1"/>
           <p:nvPr/>
         </p:nvSpPr>
         <p:spPr>
           <a:xfrm>
-            <a:off x="6454749" y="3538728"/>
+            <a:off x="805214" y="3565830"/>
             <a:ext cx="5029200" cy="201168"/>
           </a:xfrm>
           <a:prstGeom prst="rect">
@@ -10933,7 +10964,7 @@
         </p:nvSpPr>
         <p:spPr>
           <a:xfrm>
-            <a:off x="6454749" y="4590288"/>
+            <a:off x="805214" y="4617390"/>
             <a:ext cx="1609344" cy="164592"/>
           </a:xfrm>
           <a:prstGeom prst="rect">
@@ -10971,7 +11002,7 @@
         </p:nvSpPr>
         <p:spPr>
           <a:xfrm>
-            <a:off x="6454749" y="4791456"/>
+            <a:off x="805214" y="4818558"/>
             <a:ext cx="1609344" cy="182880"/>
           </a:xfrm>
           <a:prstGeom prst="rect">
@@ -11017,7 +11048,7 @@
         </p:nvSpPr>
         <p:spPr>
           <a:xfrm>
-            <a:off x="6454749" y="5010912"/>
+            <a:off x="805214" y="5038014"/>
             <a:ext cx="1609344" cy="182880"/>
           </a:xfrm>
           <a:prstGeom prst="rect">
@@ -11063,7 +11094,7 @@
         </p:nvSpPr>
         <p:spPr>
           <a:xfrm>
-            <a:off x="6454749" y="5230368"/>
+            <a:off x="805214" y="5257470"/>
             <a:ext cx="1609344" cy="182880"/>
           </a:xfrm>
           <a:prstGeom prst="rect">
@@ -11109,7 +11140,7 @@
         </p:nvSpPr>
         <p:spPr>
           <a:xfrm>
-            <a:off x="6454749" y="5449824"/>
+            <a:off x="805214" y="5476926"/>
             <a:ext cx="1609344" cy="182880"/>
           </a:xfrm>
           <a:prstGeom prst="rect">
@@ -11155,7 +11186,7 @@
         </p:nvSpPr>
         <p:spPr>
           <a:xfrm>
-            <a:off x="8173821" y="4590288"/>
+            <a:off x="2524286" y="4617390"/>
             <a:ext cx="1609344" cy="164592"/>
           </a:xfrm>
           <a:prstGeom prst="rect">
@@ -11193,7 +11224,7 @@
         </p:nvSpPr>
         <p:spPr>
           <a:xfrm>
-            <a:off x="8173821" y="4791456"/>
+            <a:off x="2524286" y="4818558"/>
             <a:ext cx="1609344" cy="182880"/>
           </a:xfrm>
           <a:prstGeom prst="rect">
@@ -11239,7 +11270,7 @@
         </p:nvSpPr>
         <p:spPr>
           <a:xfrm>
-            <a:off x="8173821" y="5010912"/>
+            <a:off x="2524286" y="5038014"/>
             <a:ext cx="1609344" cy="182880"/>
           </a:xfrm>
           <a:prstGeom prst="rect">
@@ -11285,7 +11316,7 @@
         </p:nvSpPr>
         <p:spPr>
           <a:xfrm>
-            <a:off x="8173821" y="5230368"/>
+            <a:off x="2524286" y="5257470"/>
             <a:ext cx="1609344" cy="182880"/>
           </a:xfrm>
           <a:prstGeom prst="rect">
@@ -11331,7 +11362,7 @@
         </p:nvSpPr>
         <p:spPr>
           <a:xfrm>
-            <a:off x="8173821" y="5449824"/>
+            <a:off x="2524286" y="5476926"/>
             <a:ext cx="1609344" cy="182880"/>
           </a:xfrm>
           <a:prstGeom prst="rect">
@@ -11377,7 +11408,7 @@
         </p:nvSpPr>
         <p:spPr>
           <a:xfrm>
-            <a:off x="9892893" y="4590288"/>
+            <a:off x="4243358" y="4617390"/>
             <a:ext cx="1609344" cy="164592"/>
           </a:xfrm>
           <a:prstGeom prst="rect">
@@ -11415,7 +11446,7 @@
         </p:nvSpPr>
         <p:spPr>
           <a:xfrm>
-            <a:off x="9892893" y="4791456"/>
+            <a:off x="4243358" y="4818558"/>
             <a:ext cx="1609344" cy="182880"/>
           </a:xfrm>
           <a:prstGeom prst="rect">
@@ -11461,7 +11492,7 @@
         </p:nvSpPr>
         <p:spPr>
           <a:xfrm>
-            <a:off x="9892893" y="5010912"/>
+            <a:off x="4243358" y="5038014"/>
             <a:ext cx="1609344" cy="182880"/>
           </a:xfrm>
           <a:prstGeom prst="rect">
@@ -11507,7 +11538,7 @@
         </p:nvSpPr>
         <p:spPr>
           <a:xfrm>
-            <a:off x="9892893" y="5230368"/>
+            <a:off x="4243358" y="5257470"/>
             <a:ext cx="1609344" cy="182880"/>
           </a:xfrm>
           <a:prstGeom prst="rect">

--- a/银行流水分享_V2.0.pptx
+++ b/银行流水分享_V2.0.pptx
@@ -2422,7 +2422,7 @@
           <p:nvPr>
             <p:extLst>
               <p:ext uri="{F5677B7D-0D2A-4D9B-9A5C-6D8D7D0E5A5D}">
-                <pptd:line xmlns="" xmlns:a14="http://schemas.microsoft.com/office/drawing/2010/main" xmlns:c="http://schemas.openxmlformats.org/drawingml/2006/chart" xmlns:cx="http://schemas.microsoft.com/office/drawing/2014/chartex" xmlns:m="http://schemas.openxmlformats.org/officeDocument/2006/math" xmlns:mc="http://schemas.openxmlformats.org/markup-compatibility/2006" xmlns:pptd="https://kimi-design.msh.team/pptd/2026" encoding="base64url">eyJ2aWV3Qm94IjpbMSwzNDBdLCJwb2ludHMiOiIwLDAgMCwzNDAifQ</pptd:line>
+                <pptd:line xmlns:pptd="https://kimi-design.msh.team/pptd/2026" xmlns:mc="http://schemas.openxmlformats.org/markup-compatibility/2006" xmlns:m="http://schemas.openxmlformats.org/officeDocument/2006/math" xmlns:cx="http://schemas.microsoft.com/office/drawing/2014/chartex" xmlns:c="http://schemas.openxmlformats.org/drawingml/2006/chart" xmlns:a14="http://schemas.microsoft.com/office/drawing/2010/main" xmlns="" encoding="base64url">eyJ2aWV3Qm94IjpbMSwzNDBdLCJwb2ludHMiOiIwLDAgMCwzNDAifQ</pptd:line>
               </p:ext>
             </p:extLst>
           </p:nvPr>
@@ -2593,7 +2593,7 @@
           <p:nvPr>
             <p:extLst>
               <p:ext uri="{F5677B7D-0D2A-4D9B-9A5C-6D8D7D0E5A5D}">
-                <pptd:line xmlns="" xmlns:a14="http://schemas.microsoft.com/office/drawing/2010/main" xmlns:c="http://schemas.openxmlformats.org/drawingml/2006/chart" xmlns:cx="http://schemas.microsoft.com/office/drawing/2014/chartex" xmlns:m="http://schemas.openxmlformats.org/officeDocument/2006/math" xmlns:mc="http://schemas.openxmlformats.org/markup-compatibility/2006" xmlns:pptd="https://kimi-design.msh.team/pptd/2026" encoding="base64url">eyJ2aWV3Qm94IjpbMzc2LDFdLCJwb2ludHMiOiIwLDAgMzc2LDAifQ</pptd:line>
+                <pptd:line xmlns:pptd="https://kimi-design.msh.team/pptd/2026" xmlns:mc="http://schemas.openxmlformats.org/markup-compatibility/2006" xmlns:m="http://schemas.openxmlformats.org/officeDocument/2006/math" xmlns:cx="http://schemas.microsoft.com/office/drawing/2014/chartex" xmlns:c="http://schemas.openxmlformats.org/drawingml/2006/chart" xmlns:a14="http://schemas.microsoft.com/office/drawing/2010/main" xmlns="" encoding="base64url">eyJ2aWV3Qm94IjpbMzc2LDFdLCJwb2ludHMiOiIwLDAgMzc2LDAifQ</pptd:line>
               </p:ext>
             </p:extLst>
           </p:nvPr>
@@ -2717,7 +2717,7 @@
           <p:nvPr>
             <p:extLst>
               <p:ext uri="{F5677B7D-0D2A-4D9B-9A5C-6D8D7D0E5A5D}">
-                <pptd:line xmlns="" xmlns:a14="http://schemas.microsoft.com/office/drawing/2010/main" xmlns:c="http://schemas.openxmlformats.org/drawingml/2006/chart" xmlns:cx="http://schemas.microsoft.com/office/drawing/2014/chartex" xmlns:m="http://schemas.openxmlformats.org/officeDocument/2006/math" xmlns:mc="http://schemas.openxmlformats.org/markup-compatibility/2006" xmlns:pptd="https://kimi-design.msh.team/pptd/2026" encoding="base64url">eyJ2aWV3Qm94IjpbMzc2LDFdLCJwb2ludHMiOiIwLDAgMzc2LDAifQ</pptd:line>
+                <pptd:line xmlns:pptd="https://kimi-design.msh.team/pptd/2026" xmlns:mc="http://schemas.openxmlformats.org/markup-compatibility/2006" xmlns:m="http://schemas.openxmlformats.org/officeDocument/2006/math" xmlns:cx="http://schemas.microsoft.com/office/drawing/2014/chartex" xmlns:c="http://schemas.openxmlformats.org/drawingml/2006/chart" xmlns:a14="http://schemas.microsoft.com/office/drawing/2010/main" xmlns="" encoding="base64url">eyJ2aWV3Qm94IjpbMzc2LDFdLCJwb2ludHMiOiIwLDAgMzc2LDAifQ</pptd:line>
               </p:ext>
             </p:extLst>
           </p:nvPr>
@@ -2861,7 +2861,7 @@
           <p:nvPr>
             <p:extLst>
               <p:ext uri="{F5677B7D-0D2A-4D9B-9A5C-6D8D7D0E5A5D}">
-                <pptd:line xmlns="" xmlns:a14="http://schemas.microsoft.com/office/drawing/2010/main" xmlns:c="http://schemas.openxmlformats.org/drawingml/2006/chart" xmlns:cx="http://schemas.microsoft.com/office/drawing/2014/chartex" xmlns:m="http://schemas.openxmlformats.org/officeDocument/2006/math" xmlns:mc="http://schemas.openxmlformats.org/markup-compatibility/2006" xmlns:pptd="https://kimi-design.msh.team/pptd/2026" encoding="base64url">eyJ2aWV3Qm94IjpbMzc2LDFdLCJwb2ludHMiOiIwLDAgMzc2LDAifQ</pptd:line>
+                <pptd:line xmlns:pptd="https://kimi-design.msh.team/pptd/2026" xmlns:mc="http://schemas.openxmlformats.org/markup-compatibility/2006" xmlns:m="http://schemas.openxmlformats.org/officeDocument/2006/math" xmlns:cx="http://schemas.microsoft.com/office/drawing/2014/chartex" xmlns:c="http://schemas.openxmlformats.org/drawingml/2006/chart" xmlns:a14="http://schemas.microsoft.com/office/drawing/2010/main" xmlns="" encoding="base64url">eyJ2aWV3Qm94IjpbMzc2LDFdLCJwb2ludHMiOiIwLDAgMzc2LDAifQ</pptd:line>
               </p:ext>
             </p:extLst>
           </p:nvPr>
@@ -3025,7 +3025,7 @@
             <p:nvPr>
               <p:extLst>
                 <p:ext uri="{F5677B7D-0D2A-4D9B-9A5C-6D8D7D0E5A5D}">
-                  <pptd:line xmlns:pptd="https://kimi-design.msh.team/pptd/2026" xmlns:mc="http://schemas.openxmlformats.org/markup-compatibility/2006" xmlns:m="http://schemas.openxmlformats.org/officeDocument/2006/math" xmlns:cx="http://schemas.microsoft.com/office/drawing/2014/chartex" xmlns:c="http://schemas.openxmlformats.org/drawingml/2006/chart" xmlns:a14="http://schemas.microsoft.com/office/drawing/2010/main" xmlns="" encoding="base64url">eyJ2aWV3Qm94IjpbODU2LDFdLCJwb2ludHMiOiIwLDAgODU2LDAifQ</pptd:line>
+                  <pptd:line xmlns="" xmlns:a14="http://schemas.microsoft.com/office/drawing/2010/main" xmlns:c="http://schemas.openxmlformats.org/drawingml/2006/chart" xmlns:cx="http://schemas.microsoft.com/office/drawing/2014/chartex" xmlns:m="http://schemas.openxmlformats.org/officeDocument/2006/math" xmlns:mc="http://schemas.openxmlformats.org/markup-compatibility/2006" xmlns:pptd="https://kimi-design.msh.team/pptd/2026" encoding="base64url">eyJ2aWV3Qm94IjpbODU2LDFdLCJwb2ludHMiOiIwLDAgODU2LDAifQ</pptd:line>
                 </p:ext>
               </p:extLst>
             </p:nvPr>
@@ -6660,13 +6660,13 @@
           <p:nvPr>
             <p:extLst>
               <p:ext uri="{D42A27DB-BD31-4B8C-83A1-F6EECF244321}">
-                <p14:modId xmlns:p14="http://schemas.microsoft.com/office/powerpoint/2010/main" val="636743732"/>
+                <p14:modId xmlns:p14="http://schemas.microsoft.com/office/powerpoint/2010/main" val="2068648027"/>
               </p:ext>
             </p:extLst>
           </p:nvPr>
         </p:nvGraphicFramePr>
         <p:xfrm>
-          <a:off x="617523" y="1533881"/>
+          <a:off x="617523" y="1630401"/>
           <a:ext cx="10901631" cy="1113993"/>
         </p:xfrm>
         <a:graphic>
@@ -10630,7 +10630,7 @@
         </p:nvSpPr>
         <p:spPr>
           <a:xfrm>
-            <a:off x="805301" y="4245331"/>
+            <a:off x="805301" y="4288206"/>
             <a:ext cx="1463040" cy="146304"/>
           </a:xfrm>
           <a:prstGeom prst="rect">
@@ -10701,7 +10701,7 @@
         </p:nvSpPr>
         <p:spPr>
           <a:xfrm>
-            <a:off x="2478653" y="4245331"/>
+            <a:off x="2478653" y="4288206"/>
             <a:ext cx="1463040" cy="146304"/>
           </a:xfrm>
           <a:prstGeom prst="rect">
@@ -10772,7 +10772,7 @@
         </p:nvSpPr>
         <p:spPr>
           <a:xfrm>
-            <a:off x="4152005" y="4245331"/>
+            <a:off x="4152005" y="4288206"/>
             <a:ext cx="1463040" cy="146304"/>
           </a:xfrm>
           <a:prstGeom prst="rect">

--- a/银行流水分享_V2.0.pptx
+++ b/银行流水分享_V2.0.pptx
@@ -2422,7 +2422,7 @@
           <p:nvPr>
             <p:extLst>
               <p:ext uri="{F5677B7D-0D2A-4D9B-9A5C-6D8D7D0E5A5D}">
-                <pptd:line xmlns:pptd="https://kimi-design.msh.team/pptd/2026" xmlns:mc="http://schemas.openxmlformats.org/markup-compatibility/2006" xmlns:m="http://schemas.openxmlformats.org/officeDocument/2006/math" xmlns:cx="http://schemas.microsoft.com/office/drawing/2014/chartex" xmlns:c="http://schemas.openxmlformats.org/drawingml/2006/chart" xmlns:a14="http://schemas.microsoft.com/office/drawing/2010/main" xmlns="" encoding="base64url">eyJ2aWV3Qm94IjpbMSwzNDBdLCJwb2ludHMiOiIwLDAgMCwzNDAifQ</pptd:line>
+                <pptd:line xmlns="" xmlns:a14="http://schemas.microsoft.com/office/drawing/2010/main" xmlns:c="http://schemas.openxmlformats.org/drawingml/2006/chart" xmlns:cx="http://schemas.microsoft.com/office/drawing/2014/chartex" xmlns:m="http://schemas.openxmlformats.org/officeDocument/2006/math" xmlns:mc="http://schemas.openxmlformats.org/markup-compatibility/2006" xmlns:pptd="https://kimi-design.msh.team/pptd/2026" encoding="base64url">eyJ2aWV3Qm94IjpbMSwzNDBdLCJwb2ludHMiOiIwLDAgMCwzNDAifQ</pptd:line>
               </p:ext>
             </p:extLst>
           </p:nvPr>
@@ -2540,7 +2540,7 @@
               </a:lnSpc>
             </a:pPr>
             <a:r>
-              <a:rPr lang="en-US" sz="900" b="1" noProof="1">
+              <a:rPr lang="en-US" sz="1100" b="1" noProof="1">
                 <a:solidFill>
                   <a:srgbClr val="0A0A0A"/>
                 </a:solidFill>
@@ -2549,7 +2549,7 @@
               </a:rPr>
               <a:t>1. 分类逻辑不透明，问题难以定位</a:t>
             </a:r>
-            <a:endParaRPr lang="en-US" sz="900" noProof="1">
+            <a:endParaRPr lang="en-US" sz="1100" noProof="1">
               <a:latin typeface="微软雅黑" panose="020B0503020204020204" pitchFamily="34" charset="-122"/>
               <a:ea typeface="微软雅黑" panose="020B0503020204020204" pitchFamily="34" charset="-122"/>
             </a:endParaRPr>
@@ -2593,7 +2593,7 @@
           <p:nvPr>
             <p:extLst>
               <p:ext uri="{F5677B7D-0D2A-4D9B-9A5C-6D8D7D0E5A5D}">
-                <pptd:line xmlns:pptd="https://kimi-design.msh.team/pptd/2026" xmlns:mc="http://schemas.openxmlformats.org/markup-compatibility/2006" xmlns:m="http://schemas.openxmlformats.org/officeDocument/2006/math" xmlns:cx="http://schemas.microsoft.com/office/drawing/2014/chartex" xmlns:c="http://schemas.openxmlformats.org/drawingml/2006/chart" xmlns:a14="http://schemas.microsoft.com/office/drawing/2010/main" xmlns="" encoding="base64url">eyJ2aWV3Qm94IjpbMzc2LDFdLCJwb2ludHMiOiIwLDAgMzc2LDAifQ</pptd:line>
+                <pptd:line xmlns="" xmlns:a14="http://schemas.microsoft.com/office/drawing/2010/main" xmlns:c="http://schemas.openxmlformats.org/drawingml/2006/chart" xmlns:cx="http://schemas.microsoft.com/office/drawing/2014/chartex" xmlns:m="http://schemas.openxmlformats.org/officeDocument/2006/math" xmlns:mc="http://schemas.openxmlformats.org/markup-compatibility/2006" xmlns:pptd="https://kimi-design.msh.team/pptd/2026" encoding="base64url">eyJ2aWV3Qm94IjpbMzc2LDFdLCJwb2ludHMiOiIwLDAgMzc2LDAifQ</pptd:line>
               </p:ext>
             </p:extLst>
           </p:nvPr>
@@ -2658,13 +2658,13 @@
           <a:bodyPr wrap="square" lIns="0" tIns="0" rIns="0" bIns="0" rtlCol="0" anchor="t"/>
           <a:lstStyle/>
           <a:p>
-            <a:pPr algn="l">
+            <a:pPr>
               <a:lnSpc>
                 <a:spcPct val="150000"/>
               </a:lnSpc>
             </a:pPr>
             <a:r>
-              <a:rPr lang="en-US" sz="900" b="1" noProof="1">
+              <a:rPr lang="en-US" sz="1100" b="1" noProof="1">
                 <a:solidFill>
                   <a:srgbClr val="0A0A0A"/>
                 </a:solidFill>
@@ -2673,10 +2673,6 @@
               </a:rPr>
               <a:t>2. 分类粒度与覆盖不足，难以满足下游需求</a:t>
             </a:r>
-            <a:endParaRPr lang="en-US" sz="900" noProof="1">
-              <a:latin typeface="微软雅黑" panose="020B0503020204020204" pitchFamily="34" charset="-122"/>
-              <a:ea typeface="微软雅黑" panose="020B0503020204020204" pitchFamily="34" charset="-122"/>
-            </a:endParaRPr>
           </a:p>
           <a:p>
             <a:pPr algn="l">
@@ -2717,7 +2713,7 @@
           <p:nvPr>
             <p:extLst>
               <p:ext uri="{F5677B7D-0D2A-4D9B-9A5C-6D8D7D0E5A5D}">
-                <pptd:line xmlns:pptd="https://kimi-design.msh.team/pptd/2026" xmlns:mc="http://schemas.openxmlformats.org/markup-compatibility/2006" xmlns:m="http://schemas.openxmlformats.org/officeDocument/2006/math" xmlns:cx="http://schemas.microsoft.com/office/drawing/2014/chartex" xmlns:c="http://schemas.openxmlformats.org/drawingml/2006/chart" xmlns:a14="http://schemas.microsoft.com/office/drawing/2010/main" xmlns="" encoding="base64url">eyJ2aWV3Qm94IjpbMzc2LDFdLCJwb2ludHMiOiIwLDAgMzc2LDAifQ</pptd:line>
+                <pptd:line xmlns="" xmlns:a14="http://schemas.microsoft.com/office/drawing/2010/main" xmlns:c="http://schemas.openxmlformats.org/drawingml/2006/chart" xmlns:cx="http://schemas.microsoft.com/office/drawing/2014/chartex" xmlns:m="http://schemas.openxmlformats.org/officeDocument/2006/math" xmlns:mc="http://schemas.openxmlformats.org/markup-compatibility/2006" xmlns:pptd="https://kimi-design.msh.team/pptd/2026" encoding="base64url">eyJ2aWV3Qm94IjpbMzc2LDFdLCJwb2ludHMiOiIwLDAgMzc2LDAifQ</pptd:line>
               </p:ext>
             </p:extLst>
           </p:nvPr>
@@ -2782,13 +2778,13 @@
           <a:bodyPr wrap="square" lIns="0" tIns="0" rIns="0" bIns="0" rtlCol="0" anchor="t"/>
           <a:lstStyle/>
           <a:p>
-            <a:pPr algn="l">
+            <a:pPr>
               <a:lnSpc>
                 <a:spcPct val="150000"/>
               </a:lnSpc>
             </a:pPr>
             <a:r>
-              <a:rPr lang="en-US" sz="900" b="1" noProof="1">
+              <a:rPr lang="en-US" sz="1100" b="1" noProof="1">
                 <a:solidFill>
                   <a:srgbClr val="0A0A0A"/>
                 </a:solidFill>
@@ -2797,10 +2793,6 @@
               </a:rPr>
               <a:t>3. 输出字段与计算口径缺乏控制权</a:t>
             </a:r>
-            <a:endParaRPr lang="en-US" sz="900" noProof="1">
-              <a:latin typeface="微软雅黑" panose="020B0503020204020204" pitchFamily="34" charset="-122"/>
-              <a:ea typeface="微软雅黑" panose="020B0503020204020204" pitchFamily="34" charset="-122"/>
-            </a:endParaRPr>
           </a:p>
           <a:p>
             <a:pPr algn="l">
@@ -2861,7 +2853,7 @@
           <p:nvPr>
             <p:extLst>
               <p:ext uri="{F5677B7D-0D2A-4D9B-9A5C-6D8D7D0E5A5D}">
-                <pptd:line xmlns:pptd="https://kimi-design.msh.team/pptd/2026" xmlns:mc="http://schemas.openxmlformats.org/markup-compatibility/2006" xmlns:m="http://schemas.openxmlformats.org/officeDocument/2006/math" xmlns:cx="http://schemas.microsoft.com/office/drawing/2014/chartex" xmlns:c="http://schemas.openxmlformats.org/drawingml/2006/chart" xmlns:a14="http://schemas.microsoft.com/office/drawing/2010/main" xmlns="" encoding="base64url">eyJ2aWV3Qm94IjpbMzc2LDFdLCJwb2ludHMiOiIwLDAgMzc2LDAifQ</pptd:line>
+                <pptd:line xmlns="" xmlns:a14="http://schemas.microsoft.com/office/drawing/2010/main" xmlns:c="http://schemas.openxmlformats.org/drawingml/2006/chart" xmlns:cx="http://schemas.microsoft.com/office/drawing/2014/chartex" xmlns:m="http://schemas.openxmlformats.org/officeDocument/2006/math" xmlns:mc="http://schemas.openxmlformats.org/markup-compatibility/2006" xmlns:pptd="https://kimi-design.msh.team/pptd/2026" encoding="base64url">eyJ2aWV3Qm94IjpbMzc2LDFdLCJwb2ludHMiOiIwLDAgMzc2LDAifQ</pptd:line>
               </p:ext>
             </p:extLst>
           </p:nvPr>
@@ -2926,13 +2918,13 @@
           <a:bodyPr wrap="square" lIns="0" tIns="0" rIns="0" bIns="0" rtlCol="0" anchor="t"/>
           <a:lstStyle/>
           <a:p>
-            <a:pPr algn="l">
+            <a:pPr>
               <a:lnSpc>
                 <a:spcPct val="150000"/>
               </a:lnSpc>
             </a:pPr>
             <a:r>
-              <a:rPr lang="en-US" sz="900" b="1" noProof="1">
+              <a:rPr lang="en-US" sz="1100" b="1" noProof="1">
                 <a:solidFill>
                   <a:srgbClr val="0A0A0A"/>
                 </a:solidFill>
@@ -2942,7 +2934,7 @@
               <a:t>4. </a:t>
             </a:r>
             <a:r>
-              <a:rPr lang="zh-CN" altLang="en-US" sz="900" b="1" noProof="1">
+              <a:rPr lang="zh-CN" altLang="en-US" sz="1100" b="1" noProof="1">
                 <a:solidFill>
                   <a:srgbClr val="0A0A0A"/>
                 </a:solidFill>
@@ -2952,7 +2944,7 @@
               <a:t>合规应对</a:t>
             </a:r>
             <a:r>
-              <a:rPr lang="en-US" sz="900" b="1" noProof="1">
+              <a:rPr lang="en-US" sz="1100" b="1" noProof="1">
                 <a:solidFill>
                   <a:srgbClr val="0A0A0A"/>
                 </a:solidFill>
@@ -2961,10 +2953,6 @@
               </a:rPr>
               <a:t>能力受制于外部供应商</a:t>
             </a:r>
-            <a:endParaRPr lang="en-US" sz="900" noProof="1">
-              <a:latin typeface="微软雅黑" panose="020B0503020204020204" pitchFamily="34" charset="-122"/>
-              <a:ea typeface="微软雅黑" panose="020B0503020204020204" pitchFamily="34" charset="-122"/>
-            </a:endParaRPr>
           </a:p>
           <a:p>
             <a:pPr algn="l">
@@ -3025,7 +3013,7 @@
             <p:nvPr>
               <p:extLst>
                 <p:ext uri="{F5677B7D-0D2A-4D9B-9A5C-6D8D7D0E5A5D}">
-                  <pptd:line xmlns="" xmlns:a14="http://schemas.microsoft.com/office/drawing/2010/main" xmlns:c="http://schemas.openxmlformats.org/drawingml/2006/chart" xmlns:cx="http://schemas.microsoft.com/office/drawing/2014/chartex" xmlns:m="http://schemas.openxmlformats.org/officeDocument/2006/math" xmlns:mc="http://schemas.openxmlformats.org/markup-compatibility/2006" xmlns:pptd="https://kimi-design.msh.team/pptd/2026" encoding="base64url">eyJ2aWV3Qm94IjpbODU2LDFdLCJwb2ludHMiOiIwLDAgODU2LDAifQ</pptd:line>
+                  <pptd:line xmlns:pptd="https://kimi-design.msh.team/pptd/2026" xmlns:mc="http://schemas.openxmlformats.org/markup-compatibility/2006" xmlns:m="http://schemas.openxmlformats.org/officeDocument/2006/math" xmlns:cx="http://schemas.microsoft.com/office/drawing/2014/chartex" xmlns:c="http://schemas.openxmlformats.org/drawingml/2006/chart" xmlns:a14="http://schemas.microsoft.com/office/drawing/2010/main" xmlns="" encoding="base64url">eyJ2aWV3Qm94IjpbODU2LDFdLCJwb2ludHMiOiIwLDAgODU2LDAifQ</pptd:line>
                 </p:ext>
               </p:extLst>
             </p:nvPr>
@@ -6263,53 +6251,6 @@
       </p:grpSpPr>
       <p:sp>
         <p:nvSpPr>
-          <p:cNvPr id="24" name="Fa-bg"/>
-          <p:cNvSpPr/>
-          <p:nvPr/>
-        </p:nvSpPr>
-        <p:spPr>
-          <a:xfrm>
-            <a:off x="620963" y="3242564"/>
-            <a:ext cx="5376672" cy="2542032"/>
-          </a:xfrm>
-          <a:prstGeom prst="rect">
-            <a:avLst/>
-          </a:prstGeom>
-          <a:solidFill>
-            <a:srgbClr val="FFFFFF"/>
-          </a:solidFill>
-          <a:ln w="9525">
-            <a:solidFill>
-              <a:srgbClr val="B0B0B0"/>
-            </a:solidFill>
-          </a:ln>
-          <a:effectLst/>
-        </p:spPr>
-        <p:style>
-          <a:lnRef idx="1">
-            <a:schemeClr val="accent1"/>
-          </a:lnRef>
-          <a:fillRef idx="3">
-            <a:schemeClr val="accent1"/>
-          </a:fillRef>
-          <a:effectRef idx="2">
-            <a:schemeClr val="accent1"/>
-          </a:effectRef>
-          <a:fontRef idx="minor">
-            <a:schemeClr val="lt1"/>
-          </a:fontRef>
-        </p:style>
-        <p:txBody>
-          <a:bodyPr rtlCol="0" anchor="ctr"/>
-          <a:lstStyle/>
-          <a:p>
-            <a:pPr algn="ctr"/>
-            <a:endParaRPr/>
-          </a:p>
-        </p:txBody>
-      </p:sp>
-      <p:sp>
-        <p:nvSpPr>
           <p:cNvPr id="2" name="title">
             <a:extLst>
               <a:ext uri="{FF2B5EF4-FFF2-40B4-BE49-F238E27FC236}">
@@ -6419,7 +6360,7 @@
               </a:defRPr>
             </a:pPr>
             <a:r>
-              <a:rPr lang="zh-CN" sz="1800" b="0">
+              <a:rPr lang="zh-CN" sz="1800" b="0" dirty="0">
                 <a:solidFill>
                   <a:srgbClr val="606060"/>
                 </a:solidFill>
@@ -6559,7 +6500,7 @@
         </p:nvSpPr>
         <p:spPr>
           <a:xfrm>
-            <a:off x="620963" y="2843682"/>
+            <a:off x="687257" y="3124973"/>
             <a:ext cx="5943600" cy="228600"/>
           </a:xfrm>
           <a:prstGeom prst="rect">
@@ -6660,70 +6601,63 @@
           <p:nvPr>
             <p:extLst>
               <p:ext uri="{D42A27DB-BD31-4B8C-83A1-F6EECF244321}">
-                <p14:modId xmlns:p14="http://schemas.microsoft.com/office/powerpoint/2010/main" val="2068648027"/>
+                <p14:modId xmlns:p14="http://schemas.microsoft.com/office/powerpoint/2010/main" val="3084545460"/>
               </p:ext>
             </p:extLst>
           </p:nvPr>
         </p:nvGraphicFramePr>
         <p:xfrm>
-          <a:off x="617523" y="1630401"/>
-          <a:ext cx="10901631" cy="1113993"/>
+          <a:off x="617523" y="1630400"/>
+          <a:ext cx="10883342" cy="1335402"/>
         </p:xfrm>
         <a:graphic>
           <a:graphicData uri="http://schemas.openxmlformats.org/drawingml/2006/table">
             <a:tbl>
               <a:tblPr/>
               <a:tblGrid>
-                <a:gridCol w="720325">
+                <a:gridCol w="795579">
                   <a:extLst>
                     <a:ext uri="{9D8B030D-6E8A-4147-A177-3AD203B41FA5}">
                       <a16:colId xmlns:a16="http://schemas.microsoft.com/office/drawing/2014/main" val="20000"/>
                     </a:ext>
                   </a:extLst>
                 </a:gridCol>
-                <a:gridCol w="3003061">
+                <a:gridCol w="3316799">
                   <a:extLst>
                     <a:ext uri="{9D8B030D-6E8A-4147-A177-3AD203B41FA5}">
                       <a16:colId xmlns:a16="http://schemas.microsoft.com/office/drawing/2014/main" val="20001"/>
                     </a:ext>
                   </a:extLst>
                 </a:gridCol>
-                <a:gridCol w="1047750">
-                  <a:extLst>
-                    <a:ext uri="{9D8B030D-6E8A-4147-A177-3AD203B41FA5}">
-                      <a16:colId xmlns:a16="http://schemas.microsoft.com/office/drawing/2014/main" val="3194826296"/>
-                    </a:ext>
-                  </a:extLst>
-                </a:gridCol>
-                <a:gridCol w="869950">
+                <a:gridCol w="960836">
                   <a:extLst>
                     <a:ext uri="{9D8B030D-6E8A-4147-A177-3AD203B41FA5}">
                       <a16:colId xmlns:a16="http://schemas.microsoft.com/office/drawing/2014/main" val="2631831465"/>
                     </a:ext>
                   </a:extLst>
                 </a:gridCol>
-                <a:gridCol w="1397000">
+                <a:gridCol w="1542948">
                   <a:extLst>
                     <a:ext uri="{9D8B030D-6E8A-4147-A177-3AD203B41FA5}">
                       <a16:colId xmlns:a16="http://schemas.microsoft.com/office/drawing/2014/main" val="20002"/>
                     </a:ext>
                   </a:extLst>
                 </a:gridCol>
-                <a:gridCol w="1127416">
+                <a:gridCol w="1245200">
                   <a:extLst>
                     <a:ext uri="{9D8B030D-6E8A-4147-A177-3AD203B41FA5}">
                       <a16:colId xmlns:a16="http://schemas.microsoft.com/office/drawing/2014/main" val="4140160165"/>
                     </a:ext>
                   </a:extLst>
                 </a:gridCol>
-                <a:gridCol w="611711">
+                <a:gridCol w="675618">
                   <a:extLst>
                     <a:ext uri="{9D8B030D-6E8A-4147-A177-3AD203B41FA5}">
                       <a16:colId xmlns:a16="http://schemas.microsoft.com/office/drawing/2014/main" val="2534051383"/>
                     </a:ext>
                   </a:extLst>
                 </a:gridCol>
-                <a:gridCol w="2124418">
+                <a:gridCol w="2346362">
                   <a:extLst>
                     <a:ext uri="{9D8B030D-6E8A-4147-A177-3AD203B41FA5}">
                       <a16:colId xmlns:a16="http://schemas.microsoft.com/office/drawing/2014/main" val="994888910"/>
@@ -6731,7 +6665,7 @@
                   </a:extLst>
                 </a:gridCol>
               </a:tblGrid>
-              <a:tr h="170373">
+              <a:tr h="222567">
                 <a:tc>
                   <a:txBody>
                     <a:bodyPr/>
@@ -6814,55 +6748,6 @@
                       <a:solidFill>
                         <a:srgbClr val="0A0A0A"/>
                       </a:solidFill>
-                    </a:lnB>
-                    <a:noFill/>
-                  </a:tcPr>
-                </a:tc>
-                <a:tc>
-                  <a:txBody>
-                    <a:bodyPr/>
-                    <a:lstStyle/>
-                    <a:p>
-                      <a:pPr marL="0" algn="ctr" defTabSz="914400" rtl="0" eaLnBrk="1" latinLnBrk="0" hangingPunct="1"/>
-                      <a:r>
-                        <a:rPr sz="800" b="1" kern="1200" dirty="0" err="1">
-                          <a:solidFill>
-                            <a:srgbClr val="0A0A0A"/>
-                          </a:solidFill>
-                          <a:latin typeface="微软雅黑" panose="020B0503020204020204" pitchFamily="34" charset="-122"/>
-                          <a:ea typeface="微软雅黑" panose="020B0503020204020204" pitchFamily="34" charset="-122"/>
-                          <a:cs typeface="+mn-cs"/>
-                        </a:rPr>
-                        <a:t>方向</a:t>
-                      </a:r>
-                      <a:endParaRPr sz="800" b="1" kern="1200" dirty="0">
-                        <a:solidFill>
-                          <a:srgbClr val="0A0A0A"/>
-                        </a:solidFill>
-                        <a:latin typeface="微软雅黑" panose="020B0503020204020204" pitchFamily="34" charset="-122"/>
-                        <a:ea typeface="微软雅黑" panose="020B0503020204020204" pitchFamily="34" charset="-122"/>
-                        <a:cs typeface="+mn-cs"/>
-                      </a:endParaRPr>
-                    </a:p>
-                  </a:txBody>
-                  <a:tcPr marL="27432" marR="27432" marT="9144" marB="9144">
-                    <a:lnL>
-                      <a:noFill/>
-                    </a:lnL>
-                    <a:lnR>
-                      <a:noFill/>
-                    </a:lnR>
-                    <a:lnT>
-                      <a:noFill/>
-                    </a:lnT>
-                    <a:lnB w="19050" cap="flat" cmpd="sng" algn="ctr">
-                      <a:solidFill>
-                        <a:srgbClr val="0A0A0A"/>
-                      </a:solidFill>
-                      <a:prstDash val="solid"/>
-                      <a:round/>
-                      <a:headEnd type="none" w="med" len="med"/>
-                      <a:tailEnd type="none" w="med" len="med"/>
                     </a:lnB>
                     <a:noFill/>
                   </a:tcPr>
@@ -7139,7 +7024,7 @@
                   </a:ext>
                 </a:extLst>
               </a:tr>
-              <a:tr h="170373">
+              <a:tr h="222567">
                 <a:tc>
                   <a:txBody>
                     <a:bodyPr/>
@@ -7222,53 +7107,6 @@
                       <a:solidFill>
                         <a:srgbClr val="D6D6D6"/>
                       </a:solidFill>
-                    </a:lnB>
-                    <a:noFill/>
-                  </a:tcPr>
-                </a:tc>
-                <a:tc>
-                  <a:txBody>
-                    <a:bodyPr/>
-                    <a:lstStyle/>
-                    <a:p>
-                      <a:pPr marL="0" algn="ctr" defTabSz="914400" rtl="0" eaLnBrk="1" latinLnBrk="0" hangingPunct="1"/>
-                      <a:r>
-                        <a:rPr sz="800" b="0" kern="1200" dirty="0">
-                          <a:solidFill>
-                            <a:srgbClr val="0A0A0A"/>
-                          </a:solidFill>
-                          <a:latin typeface="微软雅黑" panose="020B0503020204020204" pitchFamily="34" charset="-122"/>
-                          <a:ea typeface="微软雅黑" panose="020B0503020204020204" pitchFamily="34" charset="-122"/>
-                          <a:cs typeface="+mn-cs"/>
-                        </a:rPr>
-                        <a:t>Debit</a:t>
-                      </a:r>
-                    </a:p>
-                  </a:txBody>
-                  <a:tcPr marL="27432" marR="27432" marT="9144" marB="9144">
-                    <a:lnL>
-                      <a:noFill/>
-                    </a:lnL>
-                    <a:lnR>
-                      <a:noFill/>
-                    </a:lnR>
-                    <a:lnT w="19050" cap="flat" cmpd="sng" algn="ctr">
-                      <a:solidFill>
-                        <a:srgbClr val="0A0A0A"/>
-                      </a:solidFill>
-                      <a:prstDash val="solid"/>
-                      <a:round/>
-                      <a:headEnd type="none" w="med" len="med"/>
-                      <a:tailEnd type="none" w="med" len="med"/>
-                    </a:lnT>
-                    <a:lnB w="9525" cap="flat" cmpd="sng" algn="ctr">
-                      <a:solidFill>
-                        <a:srgbClr val="D6D6D6"/>
-                      </a:solidFill>
-                      <a:prstDash val="solid"/>
-                      <a:round/>
-                      <a:headEnd type="none" w="med" len="med"/>
-                      <a:tailEnd type="none" w="med" len="med"/>
                     </a:lnB>
                     <a:noFill/>
                   </a:tcPr>
@@ -7552,7 +7390,7 @@
                   </a:ext>
                 </a:extLst>
               </a:tr>
-              <a:tr h="170373">
+              <a:tr h="222567">
                 <a:tc>
                   <a:txBody>
                     <a:bodyPr/>
@@ -7635,53 +7473,6 @@
                       <a:solidFill>
                         <a:srgbClr val="D6D6D6"/>
                       </a:solidFill>
-                    </a:lnB>
-                    <a:noFill/>
-                  </a:tcPr>
-                </a:tc>
-                <a:tc>
-                  <a:txBody>
-                    <a:bodyPr/>
-                    <a:lstStyle/>
-                    <a:p>
-                      <a:pPr marL="0" algn="ctr" defTabSz="914400" rtl="0" eaLnBrk="1" latinLnBrk="0" hangingPunct="1"/>
-                      <a:r>
-                        <a:rPr sz="800" b="0" kern="1200" dirty="0">
-                          <a:solidFill>
-                            <a:srgbClr val="0A0A0A"/>
-                          </a:solidFill>
-                          <a:latin typeface="微软雅黑" panose="020B0503020204020204" pitchFamily="34" charset="-122"/>
-                          <a:ea typeface="微软雅黑" panose="020B0503020204020204" pitchFamily="34" charset="-122"/>
-                          <a:cs typeface="+mn-cs"/>
-                        </a:rPr>
-                        <a:t>Debit</a:t>
-                      </a:r>
-                    </a:p>
-                  </a:txBody>
-                  <a:tcPr marL="27432" marR="27432" marT="9144" marB="9144">
-                    <a:lnL>
-                      <a:noFill/>
-                    </a:lnL>
-                    <a:lnR>
-                      <a:noFill/>
-                    </a:lnR>
-                    <a:lnT w="9525" cap="flat" cmpd="sng" algn="ctr">
-                      <a:solidFill>
-                        <a:srgbClr val="D6D6D6"/>
-                      </a:solidFill>
-                      <a:prstDash val="solid"/>
-                      <a:round/>
-                      <a:headEnd type="none" w="med" len="med"/>
-                      <a:tailEnd type="none" w="med" len="med"/>
-                    </a:lnT>
-                    <a:lnB w="9525" cap="flat" cmpd="sng" algn="ctr">
-                      <a:solidFill>
-                        <a:srgbClr val="D6D6D6"/>
-                      </a:solidFill>
-                      <a:prstDash val="solid"/>
-                      <a:round/>
-                      <a:headEnd type="none" w="med" len="med"/>
-                      <a:tailEnd type="none" w="med" len="med"/>
                     </a:lnB>
                     <a:noFill/>
                   </a:tcPr>
@@ -7905,7 +7696,7 @@
                     <a:p>
                       <a:pPr marL="0" algn="ctr" defTabSz="914400" rtl="0" eaLnBrk="1" latinLnBrk="0" hangingPunct="1"/>
                       <a:r>
-                        <a:rPr sz="800" b="0" kern="1200">
+                        <a:rPr sz="800" b="0" kern="1200" dirty="0" err="1">
                           <a:solidFill>
                             <a:srgbClr val="0A0A0A"/>
                           </a:solidFill>
@@ -7915,6 +7706,14 @@
                         </a:rPr>
                         <a:t>商户知识库标准名匹配</a:t>
                       </a:r>
+                      <a:endParaRPr sz="800" b="0" kern="1200" dirty="0">
+                        <a:solidFill>
+                          <a:srgbClr val="0A0A0A"/>
+                        </a:solidFill>
+                        <a:latin typeface="微软雅黑" panose="020B0503020204020204" pitchFamily="34" charset="-122"/>
+                        <a:ea typeface="微软雅黑" panose="020B0503020204020204" pitchFamily="34" charset="-122"/>
+                        <a:cs typeface="+mn-cs"/>
+                      </a:endParaRPr>
                     </a:p>
                   </a:txBody>
                   <a:tcPr marL="27432" marR="27432" marT="9144" marB="9144">
@@ -7957,7 +7756,7 @@
                   </a:ext>
                 </a:extLst>
               </a:tr>
-              <a:tr h="170373">
+              <a:tr h="222567">
                 <a:tc>
                   <a:txBody>
                     <a:bodyPr/>
@@ -8040,53 +7839,6 @@
                       <a:solidFill>
                         <a:srgbClr val="D6D6D6"/>
                       </a:solidFill>
-                    </a:lnB>
-                    <a:noFill/>
-                  </a:tcPr>
-                </a:tc>
-                <a:tc>
-                  <a:txBody>
-                    <a:bodyPr/>
-                    <a:lstStyle/>
-                    <a:p>
-                      <a:pPr marL="0" algn="ctr" defTabSz="914400" rtl="0" eaLnBrk="1" latinLnBrk="0" hangingPunct="1"/>
-                      <a:r>
-                        <a:rPr sz="800" b="0" kern="1200" dirty="0">
-                          <a:solidFill>
-                            <a:srgbClr val="0A0A0A"/>
-                          </a:solidFill>
-                          <a:latin typeface="微软雅黑" panose="020B0503020204020204" pitchFamily="34" charset="-122"/>
-                          <a:ea typeface="微软雅黑" panose="020B0503020204020204" pitchFamily="34" charset="-122"/>
-                          <a:cs typeface="+mn-cs"/>
-                        </a:rPr>
-                        <a:t>Debit</a:t>
-                      </a:r>
-                    </a:p>
-                  </a:txBody>
-                  <a:tcPr marL="27432" marR="27432" marT="9144" marB="9144">
-                    <a:lnL>
-                      <a:noFill/>
-                    </a:lnL>
-                    <a:lnR>
-                      <a:noFill/>
-                    </a:lnR>
-                    <a:lnT w="9525" cap="flat" cmpd="sng" algn="ctr">
-                      <a:solidFill>
-                        <a:srgbClr val="D6D6D6"/>
-                      </a:solidFill>
-                      <a:prstDash val="solid"/>
-                      <a:round/>
-                      <a:headEnd type="none" w="med" len="med"/>
-                      <a:tailEnd type="none" w="med" len="med"/>
-                    </a:lnT>
-                    <a:lnB w="9525" cap="flat" cmpd="sng" algn="ctr">
-                      <a:solidFill>
-                        <a:srgbClr val="D6D6D6"/>
-                      </a:solidFill>
-                      <a:prstDash val="solid"/>
-                      <a:round/>
-                      <a:headEnd type="none" w="med" len="med"/>
-                      <a:tailEnd type="none" w="med" len="med"/>
                     </a:lnB>
                     <a:noFill/>
                   </a:tcPr>
@@ -8370,7 +8122,7 @@
                   </a:ext>
                 </a:extLst>
               </a:tr>
-              <a:tr h="170373">
+              <a:tr h="222567">
                 <a:tc>
                   <a:txBody>
                     <a:bodyPr/>
@@ -8453,53 +8205,6 @@
                       <a:solidFill>
                         <a:srgbClr val="D6D6D6"/>
                       </a:solidFill>
-                    </a:lnB>
-                    <a:noFill/>
-                  </a:tcPr>
-                </a:tc>
-                <a:tc>
-                  <a:txBody>
-                    <a:bodyPr/>
-                    <a:lstStyle/>
-                    <a:p>
-                      <a:pPr marL="0" algn="ctr" defTabSz="914400" rtl="0" eaLnBrk="1" latinLnBrk="0" hangingPunct="1"/>
-                      <a:r>
-                        <a:rPr sz="800" b="0" kern="1200" dirty="0">
-                          <a:solidFill>
-                            <a:srgbClr val="0A0A0A"/>
-                          </a:solidFill>
-                          <a:latin typeface="微软雅黑" panose="020B0503020204020204" pitchFamily="34" charset="-122"/>
-                          <a:ea typeface="微软雅黑" panose="020B0503020204020204" pitchFamily="34" charset="-122"/>
-                          <a:cs typeface="+mn-cs"/>
-                        </a:rPr>
-                        <a:t>Debit</a:t>
-                      </a:r>
-                    </a:p>
-                  </a:txBody>
-                  <a:tcPr marL="27432" marR="27432" marT="9144" marB="9144">
-                    <a:lnL>
-                      <a:noFill/>
-                    </a:lnL>
-                    <a:lnR>
-                      <a:noFill/>
-                    </a:lnR>
-                    <a:lnT w="9525" cap="flat" cmpd="sng" algn="ctr">
-                      <a:solidFill>
-                        <a:srgbClr val="D6D6D6"/>
-                      </a:solidFill>
-                      <a:prstDash val="solid"/>
-                      <a:round/>
-                      <a:headEnd type="none" w="med" len="med"/>
-                      <a:tailEnd type="none" w="med" len="med"/>
-                    </a:lnT>
-                    <a:lnB w="9525" cap="flat" cmpd="sng" algn="ctr">
-                      <a:solidFill>
-                        <a:srgbClr val="D6D6D6"/>
-                      </a:solidFill>
-                      <a:prstDash val="solid"/>
-                      <a:round/>
-                      <a:headEnd type="none" w="med" len="med"/>
-                      <a:tailEnd type="none" w="med" len="med"/>
                     </a:lnB>
                     <a:noFill/>
                   </a:tcPr>
@@ -8775,7 +8480,7 @@
                   </a:ext>
                 </a:extLst>
               </a:tr>
-              <a:tr h="170373">
+              <a:tr h="222567">
                 <a:tc>
                   <a:txBody>
                     <a:bodyPr/>
@@ -8835,49 +8540,6 @@
                           <a:cs typeface="+mn-cs"/>
                         </a:rPr>
                         <a:t>WAGES ACME PTY LTD FORTNIGHTLY PAY</a:t>
-                      </a:r>
-                    </a:p>
-                  </a:txBody>
-                  <a:tcPr marL="27432" marR="27432" marT="9144" marB="9144">
-                    <a:lnL>
-                      <a:noFill/>
-                    </a:lnL>
-                    <a:lnR>
-                      <a:noFill/>
-                    </a:lnR>
-                    <a:lnT w="9525" cap="flat" cmpd="sng" algn="ctr">
-                      <a:solidFill>
-                        <a:srgbClr val="D6D6D6"/>
-                      </a:solidFill>
-                      <a:prstDash val="solid"/>
-                      <a:round/>
-                      <a:headEnd type="none" w="med" len="med"/>
-                      <a:tailEnd type="none" w="med" len="med"/>
-                    </a:lnT>
-                    <a:lnB w="9525">
-                      <a:solidFill>
-                        <a:srgbClr val="D6D6D6"/>
-                      </a:solidFill>
-                    </a:lnB>
-                    <a:noFill/>
-                  </a:tcPr>
-                </a:tc>
-                <a:tc>
-                  <a:txBody>
-                    <a:bodyPr/>
-                    <a:lstStyle/>
-                    <a:p>
-                      <a:pPr marL="0" algn="ctr" defTabSz="914400" rtl="0" eaLnBrk="1" latinLnBrk="0" hangingPunct="1"/>
-                      <a:r>
-                        <a:rPr sz="800" b="0" kern="1200" dirty="0">
-                          <a:solidFill>
-                            <a:srgbClr val="0A0A0A"/>
-                          </a:solidFill>
-                          <a:latin typeface="微软雅黑" panose="020B0503020204020204" pitchFamily="34" charset="-122"/>
-                          <a:ea typeface="微软雅黑" panose="020B0503020204020204" pitchFamily="34" charset="-122"/>
-                          <a:cs typeface="+mn-cs"/>
-                        </a:rPr>
-                        <a:t>Credit</a:t>
                       </a:r>
                     </a:p>
                   </a:txBody>
@@ -9254,7 +8916,7 @@
         </p:nvSpPr>
         <p:spPr>
           <a:xfrm>
-            <a:off x="619506" y="5815584"/>
+            <a:off x="685800" y="6096875"/>
             <a:ext cx="11045952" cy="402336"/>
           </a:xfrm>
           <a:prstGeom prst="rect">
@@ -9299,7 +8961,7 @@
         </p:nvSpPr>
         <p:spPr>
           <a:xfrm>
-            <a:off x="619506" y="5815584"/>
+            <a:off x="685800" y="6096875"/>
             <a:ext cx="64008" cy="402336"/>
           </a:xfrm>
           <a:prstGeom prst="rect">
@@ -9344,7 +9006,7 @@
         </p:nvSpPr>
         <p:spPr>
           <a:xfrm>
-            <a:off x="802386" y="5927598"/>
+            <a:off x="868680" y="6208889"/>
             <a:ext cx="10698480" cy="169277"/>
           </a:xfrm>
           <a:prstGeom prst="rect">
@@ -9429,7 +9091,7 @@
         </p:nvSpPr>
         <p:spPr>
           <a:xfrm>
-            <a:off x="445770" y="2841142"/>
+            <a:off x="512064" y="3122433"/>
             <a:ext cx="76200" cy="228600"/>
           </a:xfrm>
           <a:prstGeom prst="rect">
@@ -9466,1081 +9128,620 @@
           </a:p>
         </p:txBody>
       </p:sp>
-      <p:grpSp>
-        <p:nvGrpSpPr>
-          <p:cNvPr id="4" name="组合 3">
-            <a:extLst>
-              <a:ext uri="{FF2B5EF4-FFF2-40B4-BE49-F238E27FC236}">
-                <a16:creationId xmlns:a16="http://schemas.microsoft.com/office/drawing/2014/main" id="{A0665F73-0893-40CB-94FD-2F9096BDBD02}"/>
-              </a:ext>
-            </a:extLst>
-          </p:cNvPr>
-          <p:cNvGrpSpPr/>
+      <p:sp>
+        <p:nvSpPr>
+          <p:cNvPr id="18" name="用户-bar"/>
+          <p:cNvSpPr/>
           <p:nvPr/>
-        </p:nvGrpSpPr>
-        <p:grpSpPr>
+        </p:nvSpPr>
+        <p:spPr>
           <a:xfrm>
-            <a:off x="6133526" y="3179140"/>
-            <a:ext cx="5405475" cy="2542032"/>
-            <a:chOff x="619506" y="3152038"/>
-            <a:chExt cx="5405475" cy="2542032"/>
+            <a:off x="6199820" y="3460431"/>
+            <a:ext cx="5376672" cy="54864"/>
           </a:xfrm>
-        </p:grpSpPr>
-        <p:sp>
-          <p:nvSpPr>
-            <p:cNvPr id="17" name="用户-bg"/>
-            <p:cNvSpPr/>
-            <p:nvPr/>
-          </p:nvSpPr>
-          <p:spPr>
-            <a:xfrm>
-              <a:off x="619506" y="3152038"/>
-              <a:ext cx="5376672" cy="2542032"/>
-            </a:xfrm>
-            <a:prstGeom prst="rect">
-              <a:avLst/>
-            </a:prstGeom>
-            <a:solidFill>
-              <a:srgbClr val="FFFFFF"/>
-            </a:solidFill>
-            <a:ln w="9525">
+          <a:prstGeom prst="rect">
+            <a:avLst/>
+          </a:prstGeom>
+          <a:solidFill>
+            <a:srgbClr val="1F4E79"/>
+          </a:solidFill>
+          <a:ln>
+            <a:noFill/>
+          </a:ln>
+          <a:effectLst/>
+        </p:spPr>
+        <p:style>
+          <a:lnRef idx="1">
+            <a:schemeClr val="accent1"/>
+          </a:lnRef>
+          <a:fillRef idx="3">
+            <a:schemeClr val="accent1"/>
+          </a:fillRef>
+          <a:effectRef idx="2">
+            <a:schemeClr val="accent1"/>
+          </a:effectRef>
+          <a:fontRef idx="minor">
+            <a:schemeClr val="lt1"/>
+          </a:fontRef>
+        </p:style>
+        <p:txBody>
+          <a:bodyPr rtlCol="0" anchor="ctr"/>
+          <a:lstStyle/>
+          <a:p>
+            <a:pPr algn="ctr"/>
+            <a:endParaRPr/>
+          </a:p>
+        </p:txBody>
+      </p:sp>
+      <p:sp>
+        <p:nvSpPr>
+          <p:cNvPr id="19" name="用户-title"/>
+          <p:cNvSpPr txBox="1"/>
+          <p:nvPr/>
+        </p:nvSpPr>
+        <p:spPr>
+          <a:xfrm>
+            <a:off x="6382700" y="3561015"/>
+            <a:ext cx="5010912" cy="201168"/>
+          </a:xfrm>
+          <a:prstGeom prst="rect">
+            <a:avLst/>
+          </a:prstGeom>
+          <a:noFill/>
+        </p:spPr>
+        <p:txBody>
+          <a:bodyPr wrap="square" lIns="0" tIns="0" rIns="0" bIns="0">
+            <a:spAutoFit/>
+          </a:bodyPr>
+          <a:lstStyle/>
+          <a:p>
+            <a:pPr algn="l"/>
+            <a:r>
+              <a:rPr lang="zh-CN" sz="1050" b="1">
+                <a:solidFill>
+                  <a:srgbClr val="0A0A0A"/>
+                </a:solidFill>
+                <a:latin typeface="微软雅黑"/>
+                <a:ea typeface="微软雅黑"/>
+              </a:rPr>
+              <a:t>用户整体负债画像</a:t>
+            </a:r>
+          </a:p>
+        </p:txBody>
+      </p:sp>
+      <p:sp>
+        <p:nvSpPr>
+          <p:cNvPr id="116" name="用户-m1-t"/>
+          <p:cNvSpPr txBox="1"/>
+          <p:nvPr/>
+        </p:nvSpPr>
+        <p:spPr>
+          <a:xfrm>
+            <a:off x="6400989" y="3949836"/>
+            <a:ext cx="1645920" cy="182880"/>
+          </a:xfrm>
+          <a:prstGeom prst="rect">
+            <a:avLst/>
+          </a:prstGeom>
+          <a:noFill/>
+        </p:spPr>
+        <p:txBody>
+          <a:bodyPr wrap="square" lIns="0" tIns="0" rIns="0" bIns="0">
+            <a:spAutoFit/>
+          </a:bodyPr>
+          <a:lstStyle/>
+          <a:p>
+            <a:pPr algn="l">
+              <a:spcAft>
+                <a:spcPts val="0"/>
+              </a:spcAft>
+            </a:pPr>
+            <a:r>
+              <a:rPr sz="1000" b="1" dirty="0" err="1">
+                <a:solidFill>
+                  <a:srgbClr val="1F4E79"/>
+                </a:solidFill>
+              </a:rPr>
+              <a:t>负债情况</a:t>
+            </a:r>
+            <a:endParaRPr sz="1000" b="1" dirty="0">
               <a:solidFill>
-                <a:srgbClr val="B0B0B0"/>
+                <a:srgbClr val="1F4E79"/>
               </a:solidFill>
-            </a:ln>
-            <a:effectLst/>
-          </p:spPr>
-          <p:style>
-            <a:lnRef idx="1">
-              <a:schemeClr val="accent1"/>
-            </a:lnRef>
-            <a:fillRef idx="3">
-              <a:schemeClr val="accent1"/>
-            </a:fillRef>
-            <a:effectRef idx="2">
-              <a:schemeClr val="accent1"/>
-            </a:effectRef>
-            <a:fontRef idx="minor">
-              <a:schemeClr val="lt1"/>
-            </a:fontRef>
-          </p:style>
-          <p:txBody>
-            <a:bodyPr rtlCol="0" anchor="ctr"/>
-            <a:lstStyle/>
-            <a:p>
-              <a:pPr algn="ctr"/>
-              <a:endParaRPr/>
-            </a:p>
-          </p:txBody>
-        </p:sp>
-        <p:sp>
-          <p:nvSpPr>
-            <p:cNvPr id="18" name="用户-bar"/>
-            <p:cNvSpPr/>
-            <p:nvPr/>
-          </p:nvSpPr>
-          <p:spPr>
-            <a:xfrm>
-              <a:off x="619506" y="3152038"/>
-              <a:ext cx="5376672" cy="54864"/>
-            </a:xfrm>
-            <a:prstGeom prst="rect">
-              <a:avLst/>
-            </a:prstGeom>
-            <a:solidFill>
-              <a:srgbClr val="1F4E79"/>
-            </a:solidFill>
-            <a:ln>
-              <a:noFill/>
-            </a:ln>
-            <a:effectLst/>
-          </p:spPr>
-          <p:style>
-            <a:lnRef idx="1">
-              <a:schemeClr val="accent1"/>
-            </a:lnRef>
-            <a:fillRef idx="3">
-              <a:schemeClr val="accent1"/>
-            </a:fillRef>
-            <a:effectRef idx="2">
-              <a:schemeClr val="accent1"/>
-            </a:effectRef>
-            <a:fontRef idx="minor">
-              <a:schemeClr val="lt1"/>
-            </a:fontRef>
-          </p:style>
-          <p:txBody>
-            <a:bodyPr rtlCol="0" anchor="ctr"/>
-            <a:lstStyle/>
-            <a:p>
-              <a:pPr algn="ctr"/>
-              <a:endParaRPr/>
-            </a:p>
-          </p:txBody>
-        </p:sp>
-        <p:sp>
-          <p:nvSpPr>
-            <p:cNvPr id="19" name="用户-title"/>
-            <p:cNvSpPr txBox="1"/>
-            <p:nvPr/>
-          </p:nvSpPr>
-          <p:spPr>
-            <a:xfrm>
-              <a:off x="802386" y="3252622"/>
-              <a:ext cx="5010912" cy="201168"/>
-            </a:xfrm>
-            <a:prstGeom prst="rect">
-              <a:avLst/>
-            </a:prstGeom>
-            <a:noFill/>
-          </p:spPr>
-          <p:txBody>
-            <a:bodyPr wrap="square" lIns="0" tIns="0" rIns="0" bIns="0">
-              <a:spAutoFit/>
-            </a:bodyPr>
-            <a:lstStyle/>
-            <a:p>
-              <a:pPr algn="l"/>
-              <a:r>
-                <a:rPr lang="zh-CN" sz="1050" b="1">
-                  <a:solidFill>
-                    <a:srgbClr val="0A0A0A"/>
-                  </a:solidFill>
-                  <a:latin typeface="微软雅黑"/>
-                  <a:ea typeface="微软雅黑"/>
-                </a:rPr>
-                <a:t>用户整体负债画像</a:t>
-              </a:r>
-            </a:p>
-          </p:txBody>
-        </p:sp>
-        <p:sp>
-          <p:nvSpPr>
-            <p:cNvPr id="51" name="用户-tag1"/>
-            <p:cNvSpPr/>
-            <p:nvPr/>
-          </p:nvSpPr>
-          <p:spPr>
-            <a:xfrm>
-              <a:off x="803844" y="3593592"/>
-              <a:ext cx="1197864" cy="182880"/>
-            </a:xfrm>
-            <a:prstGeom prst="roundRect">
-              <a:avLst>
-                <a:gd name="adj" fmla="val 10000"/>
-              </a:avLst>
-            </a:prstGeom>
-            <a:solidFill>
-              <a:srgbClr val="FAF3E0"/>
-            </a:solidFill>
-            <a:ln w="12700">
-              <a:solidFill>
-                <a:srgbClr val="D6A000"/>
-              </a:solidFill>
-            </a:ln>
-            <a:effectLst/>
-          </p:spPr>
-          <p:style>
-            <a:lnRef idx="1">
-              <a:schemeClr val="accent1"/>
-            </a:lnRef>
-            <a:fillRef idx="3">
-              <a:schemeClr val="accent1"/>
-            </a:fillRef>
-            <a:effectRef idx="2">
-              <a:schemeClr val="accent1"/>
-            </a:effectRef>
-            <a:fontRef idx="minor">
-              <a:schemeClr val="lt1"/>
-            </a:fontRef>
-          </p:style>
-          <p:txBody>
-            <a:bodyPr rtlCol="0" anchor="ctr"/>
-            <a:lstStyle/>
-            <a:p>
-              <a:pPr algn="ctr"/>
-              <a:endParaRPr/>
-            </a:p>
-          </p:txBody>
-        </p:sp>
-        <p:sp>
-          <p:nvSpPr>
-            <p:cNvPr id="52" name="用户-tag1-t"/>
-            <p:cNvSpPr txBox="1"/>
-            <p:nvPr/>
-          </p:nvSpPr>
-          <p:spPr>
-            <a:xfrm>
-              <a:off x="803844" y="3611880"/>
-              <a:ext cx="1197864" cy="146304"/>
-            </a:xfrm>
-            <a:prstGeom prst="rect">
-              <a:avLst/>
-            </a:prstGeom>
-            <a:noFill/>
-          </p:spPr>
-          <p:txBody>
-            <a:bodyPr wrap="square" lIns="0" tIns="0" rIns="0" bIns="0">
-              <a:noAutofit/>
-            </a:bodyPr>
-            <a:lstStyle/>
-            <a:p>
-              <a:r>
-                <a:rPr sz="800" b="1">
-                  <a:solidFill>
-                    <a:srgbClr val="1F4E79"/>
-                  </a:solidFill>
-                </a:rPr>
-                <a:t>多头借贷</a:t>
-              </a:r>
-            </a:p>
-          </p:txBody>
-        </p:sp>
-        <p:sp>
-          <p:nvSpPr>
-            <p:cNvPr id="53" name="用户-tag2"/>
-            <p:cNvSpPr/>
-            <p:nvPr/>
-          </p:nvSpPr>
-          <p:spPr>
-            <a:xfrm>
-              <a:off x="2074860" y="3593592"/>
-              <a:ext cx="1197864" cy="182880"/>
-            </a:xfrm>
-            <a:prstGeom prst="roundRect">
-              <a:avLst>
-                <a:gd name="adj" fmla="val 10000"/>
-              </a:avLst>
-            </a:prstGeom>
-            <a:solidFill>
-              <a:srgbClr val="FAF3E0"/>
-            </a:solidFill>
-            <a:ln w="12700">
-              <a:solidFill>
-                <a:srgbClr val="D6A000"/>
-              </a:solidFill>
-            </a:ln>
-            <a:effectLst/>
-          </p:spPr>
-          <p:style>
-            <a:lnRef idx="1">
-              <a:schemeClr val="accent1"/>
-            </a:lnRef>
-            <a:fillRef idx="3">
-              <a:schemeClr val="accent1"/>
-            </a:fillRef>
-            <a:effectRef idx="2">
-              <a:schemeClr val="accent1"/>
-            </a:effectRef>
-            <a:fontRef idx="minor">
-              <a:schemeClr val="lt1"/>
-            </a:fontRef>
-          </p:style>
-          <p:txBody>
-            <a:bodyPr rtlCol="0" anchor="ctr"/>
-            <a:lstStyle/>
-            <a:p>
-              <a:pPr algn="ctr"/>
-              <a:endParaRPr/>
-            </a:p>
-          </p:txBody>
-        </p:sp>
-        <p:sp>
-          <p:nvSpPr>
-            <p:cNvPr id="54" name="用户-tag2-t"/>
-            <p:cNvSpPr txBox="1"/>
-            <p:nvPr/>
-          </p:nvSpPr>
-          <p:spPr>
-            <a:xfrm>
-              <a:off x="2074860" y="3611880"/>
-              <a:ext cx="1197864" cy="146304"/>
-            </a:xfrm>
-            <a:prstGeom prst="rect">
-              <a:avLst/>
-            </a:prstGeom>
-            <a:noFill/>
-          </p:spPr>
-          <p:txBody>
-            <a:bodyPr wrap="square" lIns="0" tIns="0" rIns="0" bIns="0">
-              <a:noAutofit/>
-            </a:bodyPr>
-            <a:lstStyle/>
-            <a:p>
-              <a:r>
-                <a:rPr sz="800" b="1">
-                  <a:solidFill>
-                    <a:srgbClr val="1F4E79"/>
-                  </a:solidFill>
-                </a:rPr>
-                <a:t>近期新增贷款</a:t>
-              </a:r>
-            </a:p>
-          </p:txBody>
-        </p:sp>
-        <p:sp>
-          <p:nvSpPr>
-            <p:cNvPr id="55" name="用户-tag3"/>
-            <p:cNvSpPr/>
-            <p:nvPr/>
-          </p:nvSpPr>
-          <p:spPr>
-            <a:xfrm>
-              <a:off x="3345876" y="3593592"/>
-              <a:ext cx="1197864" cy="182880"/>
-            </a:xfrm>
-            <a:prstGeom prst="roundRect">
-              <a:avLst>
-                <a:gd name="adj" fmla="val 10000"/>
-              </a:avLst>
-            </a:prstGeom>
-            <a:solidFill>
-              <a:srgbClr val="FAF3E0"/>
-            </a:solidFill>
-            <a:ln w="12700">
-              <a:solidFill>
-                <a:srgbClr val="D6A000"/>
-              </a:solidFill>
-            </a:ln>
-            <a:effectLst/>
-          </p:spPr>
-          <p:style>
-            <a:lnRef idx="1">
-              <a:schemeClr val="accent1"/>
-            </a:lnRef>
-            <a:fillRef idx="3">
-              <a:schemeClr val="accent1"/>
-            </a:fillRef>
-            <a:effectRef idx="2">
-              <a:schemeClr val="accent1"/>
-            </a:effectRef>
-            <a:fontRef idx="minor">
-              <a:schemeClr val="lt1"/>
-            </a:fontRef>
-          </p:style>
-          <p:txBody>
-            <a:bodyPr rtlCol="0" anchor="ctr"/>
-            <a:lstStyle/>
-            <a:p>
-              <a:pPr algn="ctr"/>
-              <a:endParaRPr/>
-            </a:p>
-          </p:txBody>
-        </p:sp>
-        <p:sp>
-          <p:nvSpPr>
-            <p:cNvPr id="56" name="用户-tag3-t"/>
-            <p:cNvSpPr txBox="1"/>
-            <p:nvPr/>
-          </p:nvSpPr>
-          <p:spPr>
-            <a:xfrm>
-              <a:off x="3345876" y="3611880"/>
-              <a:ext cx="1197864" cy="146304"/>
-            </a:xfrm>
-            <a:prstGeom prst="rect">
-              <a:avLst/>
-            </a:prstGeom>
-            <a:noFill/>
-          </p:spPr>
-          <p:txBody>
-            <a:bodyPr wrap="square" lIns="0" tIns="0" rIns="0" bIns="0">
-              <a:noAutofit/>
-            </a:bodyPr>
-            <a:lstStyle/>
-            <a:p>
-              <a:r>
-                <a:rPr sz="800" b="1">
-                  <a:solidFill>
-                    <a:srgbClr val="1F4E79"/>
-                  </a:solidFill>
-                </a:rPr>
-                <a:t>高成本借贷</a:t>
-              </a:r>
-            </a:p>
-          </p:txBody>
-        </p:sp>
-        <p:sp>
-          <p:nvSpPr>
-            <p:cNvPr id="57" name="用户-tag4"/>
-            <p:cNvSpPr/>
-            <p:nvPr/>
-          </p:nvSpPr>
-          <p:spPr>
-            <a:xfrm>
-              <a:off x="4616892" y="3593592"/>
-              <a:ext cx="1197864" cy="182880"/>
-            </a:xfrm>
-            <a:prstGeom prst="roundRect">
-              <a:avLst>
-                <a:gd name="adj" fmla="val 10000"/>
-              </a:avLst>
-            </a:prstGeom>
-            <a:solidFill>
-              <a:srgbClr val="FAF3E0"/>
-            </a:solidFill>
-            <a:ln w="12700">
-              <a:solidFill>
-                <a:srgbClr val="D6A000"/>
-              </a:solidFill>
-            </a:ln>
-            <a:effectLst/>
-          </p:spPr>
-          <p:style>
-            <a:lnRef idx="1">
-              <a:schemeClr val="accent1"/>
-            </a:lnRef>
-            <a:fillRef idx="3">
-              <a:schemeClr val="accent1"/>
-            </a:fillRef>
-            <a:effectRef idx="2">
-              <a:schemeClr val="accent1"/>
-            </a:effectRef>
-            <a:fontRef idx="minor">
-              <a:schemeClr val="lt1"/>
-            </a:fontRef>
-          </p:style>
-          <p:txBody>
-            <a:bodyPr rtlCol="0" anchor="ctr"/>
-            <a:lstStyle/>
-            <a:p>
-              <a:pPr algn="ctr"/>
-              <a:endParaRPr/>
-            </a:p>
-          </p:txBody>
-        </p:sp>
-        <p:sp>
-          <p:nvSpPr>
-            <p:cNvPr id="58" name="用户-tag4-t"/>
-            <p:cNvSpPr txBox="1"/>
-            <p:nvPr/>
-          </p:nvSpPr>
-          <p:spPr>
-            <a:xfrm>
-              <a:off x="4616892" y="3611880"/>
-              <a:ext cx="1197864" cy="146304"/>
-            </a:xfrm>
-            <a:prstGeom prst="rect">
-              <a:avLst/>
-            </a:prstGeom>
-            <a:noFill/>
-          </p:spPr>
-          <p:txBody>
-            <a:bodyPr wrap="square" lIns="0" tIns="0" rIns="0" bIns="0">
-              <a:noAutofit/>
-            </a:bodyPr>
-            <a:lstStyle/>
-            <a:p>
-              <a:r>
-                <a:rPr sz="800" b="1">
-                  <a:solidFill>
-                    <a:srgbClr val="1F4E79"/>
-                  </a:solidFill>
-                </a:rPr>
-                <a:t>存在轻微逾期</a:t>
-              </a:r>
-            </a:p>
-          </p:txBody>
-        </p:sp>
-        <p:sp>
-          <p:nvSpPr>
-            <p:cNvPr id="116" name="用户-m1-t"/>
-            <p:cNvSpPr txBox="1"/>
-            <p:nvPr/>
-          </p:nvSpPr>
-          <p:spPr>
-            <a:xfrm>
-              <a:off x="739749" y="3931920"/>
-              <a:ext cx="1645920" cy="182880"/>
-            </a:xfrm>
-            <a:prstGeom prst="rect">
-              <a:avLst/>
-            </a:prstGeom>
-            <a:noFill/>
-          </p:spPr>
-          <p:txBody>
-            <a:bodyPr wrap="square" lIns="0" tIns="0" rIns="0" bIns="0">
-              <a:spAutoFit/>
-            </a:bodyPr>
-            <a:lstStyle/>
-            <a:p>
-              <a:pPr algn="l">
-                <a:spcAft>
-                  <a:spcPts val="0"/>
-                </a:spcAft>
-              </a:pPr>
-              <a:r>
-                <a:rPr sz="1000" b="1">
-                  <a:solidFill>
-                    <a:srgbClr val="1F4E79"/>
-                  </a:solidFill>
-                </a:rPr>
-                <a:t>负债情况</a:t>
-              </a:r>
-            </a:p>
-          </p:txBody>
-        </p:sp>
-        <p:sp>
-          <p:nvSpPr>
-            <p:cNvPr id="117" name="用户-m1-1"/>
-            <p:cNvSpPr txBox="1"/>
-            <p:nvPr/>
-          </p:nvSpPr>
-          <p:spPr>
-            <a:xfrm>
-              <a:off x="739749" y="4133087"/>
-              <a:ext cx="1737360" cy="201168"/>
-            </a:xfrm>
-            <a:prstGeom prst="rect">
-              <a:avLst/>
-            </a:prstGeom>
-            <a:noFill/>
-          </p:spPr>
-          <p:txBody>
-            <a:bodyPr wrap="square" lIns="0" tIns="0" rIns="0" bIns="0">
-              <a:spAutoFit/>
-            </a:bodyPr>
-            <a:lstStyle/>
-            <a:p>
-              <a:pPr algn="l">
-                <a:spcAft>
-                  <a:spcPts val="0"/>
-                </a:spcAft>
-              </a:pPr>
-              <a:r>
-                <a:rPr sz="1000" b="1">
-                  <a:solidFill>
-                    <a:srgbClr val="0A0A0A"/>
-                  </a:solidFill>
-                </a:rPr>
-                <a:t>预计待还</a:t>
-              </a:r>
-              <a:r>
-                <a:rPr sz="800" b="0">
-                  <a:solidFill>
-                    <a:srgbClr val="606060"/>
-                  </a:solidFill>
-                </a:rPr>
-                <a:t>A$1,016</a:t>
-              </a:r>
-            </a:p>
-          </p:txBody>
-        </p:sp>
-        <p:sp>
-          <p:nvSpPr>
-            <p:cNvPr id="118" name="用户-m1-2"/>
-            <p:cNvSpPr txBox="1"/>
-            <p:nvPr/>
-          </p:nvSpPr>
-          <p:spPr>
-            <a:xfrm>
-              <a:off x="739749" y="4370831"/>
-              <a:ext cx="1737360" cy="201168"/>
-            </a:xfrm>
-            <a:prstGeom prst="rect">
-              <a:avLst/>
-            </a:prstGeom>
-            <a:noFill/>
-          </p:spPr>
-          <p:txBody>
-            <a:bodyPr wrap="square" lIns="0" tIns="0" rIns="0" bIns="0">
-              <a:spAutoFit/>
-            </a:bodyPr>
-            <a:lstStyle/>
-            <a:p>
-              <a:pPr algn="l">
-                <a:spcAft>
-                  <a:spcPts val="0"/>
-                </a:spcAft>
-              </a:pPr>
-              <a:r>
-                <a:rPr sz="1000" b="1">
-                  <a:solidFill>
-                    <a:srgbClr val="0A0A0A"/>
-                  </a:solidFill>
-                </a:rPr>
-                <a:t>平均月还款</a:t>
-              </a:r>
-              <a:r>
-                <a:rPr sz="800" b="0">
-                  <a:solidFill>
-                    <a:srgbClr val="606060"/>
-                  </a:solidFill>
-                </a:rPr>
-                <a:t>A$428</a:t>
-              </a:r>
-            </a:p>
-          </p:txBody>
-        </p:sp>
-        <p:sp>
-          <p:nvSpPr>
-            <p:cNvPr id="119" name="用户-m1-3"/>
-            <p:cNvSpPr txBox="1"/>
-            <p:nvPr/>
-          </p:nvSpPr>
-          <p:spPr>
-            <a:xfrm>
-              <a:off x="739749" y="4608575"/>
-              <a:ext cx="1737360" cy="201168"/>
-            </a:xfrm>
-            <a:prstGeom prst="rect">
-              <a:avLst/>
-            </a:prstGeom>
-            <a:noFill/>
-          </p:spPr>
-          <p:txBody>
-            <a:bodyPr wrap="square" lIns="0" tIns="0" rIns="0" bIns="0">
-              <a:spAutoFit/>
-            </a:bodyPr>
-            <a:lstStyle/>
-            <a:p>
-              <a:pPr algn="l">
-                <a:spcAft>
-                  <a:spcPts val="0"/>
-                </a:spcAft>
-              </a:pPr>
-              <a:r>
-                <a:rPr sz="1000" b="1">
-                  <a:solidFill>
-                    <a:srgbClr val="0A0A0A"/>
-                  </a:solidFill>
-                </a:rPr>
-                <a:t>贷款机构</a:t>
-              </a:r>
-              <a:r>
-                <a:rPr sz="800" b="0">
-                  <a:solidFill>
-                    <a:srgbClr val="606060"/>
-                  </a:solidFill>
-                </a:rPr>
-                <a:t>2 家</a:t>
-              </a:r>
-            </a:p>
-          </p:txBody>
-        </p:sp>
-        <p:cxnSp>
-          <p:nvCxnSpPr>
-            <p:cNvPr id="120" name="用户-sep1"/>
-            <p:cNvCxnSpPr/>
-            <p:nvPr/>
-          </p:nvCxnSpPr>
-          <p:spPr>
-            <a:xfrm>
-              <a:off x="2422245" y="4023360"/>
-              <a:ext cx="0" cy="1051560"/>
-            </a:xfrm>
-            <a:prstGeom prst="line">
-              <a:avLst/>
-            </a:prstGeom>
-            <a:ln w="12700">
-              <a:solidFill>
-                <a:srgbClr val="D6D6D6"/>
-              </a:solidFill>
-            </a:ln>
-          </p:spPr>
-          <p:style>
-            <a:lnRef idx="2">
-              <a:schemeClr val="accent1"/>
-            </a:lnRef>
-            <a:fillRef idx="0">
-              <a:schemeClr val="accent1"/>
-            </a:fillRef>
-            <a:effectRef idx="1">
-              <a:schemeClr val="accent1"/>
-            </a:effectRef>
-            <a:fontRef idx="minor">
-              <a:schemeClr val="tx1"/>
-            </a:fontRef>
-          </p:style>
-        </p:cxnSp>
-        <p:sp>
-          <p:nvSpPr>
-            <p:cNvPr id="121" name="用户-m2-t"/>
-            <p:cNvSpPr txBox="1"/>
-            <p:nvPr/>
-          </p:nvSpPr>
-          <p:spPr>
-            <a:xfrm>
-              <a:off x="2513685" y="3931920"/>
-              <a:ext cx="1645920" cy="182880"/>
-            </a:xfrm>
-            <a:prstGeom prst="rect">
-              <a:avLst/>
-            </a:prstGeom>
-            <a:noFill/>
-          </p:spPr>
-          <p:txBody>
-            <a:bodyPr wrap="square" lIns="0" tIns="0" rIns="0" bIns="0">
-              <a:spAutoFit/>
-            </a:bodyPr>
-            <a:lstStyle/>
-            <a:p>
-              <a:pPr algn="l">
-                <a:spcAft>
-                  <a:spcPts val="0"/>
-                </a:spcAft>
-              </a:pPr>
-              <a:r>
-                <a:rPr sz="1000" b="1">
-                  <a:solidFill>
-                    <a:srgbClr val="1F4E79"/>
-                  </a:solidFill>
-                </a:rPr>
-                <a:t>履约表现</a:t>
-              </a:r>
-            </a:p>
-          </p:txBody>
-        </p:sp>
-        <p:sp>
-          <p:nvSpPr>
-            <p:cNvPr id="122" name="用户-m2-1"/>
-            <p:cNvSpPr txBox="1"/>
-            <p:nvPr/>
-          </p:nvSpPr>
-          <p:spPr>
-            <a:xfrm>
-              <a:off x="2513685" y="4133087"/>
-              <a:ext cx="1737360" cy="201168"/>
-            </a:xfrm>
-            <a:prstGeom prst="rect">
-              <a:avLst/>
-            </a:prstGeom>
-            <a:noFill/>
-          </p:spPr>
-          <p:txBody>
-            <a:bodyPr wrap="square" lIns="0" tIns="0" rIns="0" bIns="0">
-              <a:spAutoFit/>
-            </a:bodyPr>
-            <a:lstStyle/>
-            <a:p>
-              <a:pPr algn="l">
-                <a:spcAft>
-                  <a:spcPts val="0"/>
-                </a:spcAft>
-              </a:pPr>
-              <a:r>
-                <a:rPr sz="1000" b="1">
-                  <a:solidFill>
-                    <a:srgbClr val="0A0A0A"/>
-                  </a:solidFill>
-                </a:rPr>
-                <a:t>90 天还款</a:t>
-              </a:r>
-              <a:r>
-                <a:rPr sz="800" b="0">
-                  <a:solidFill>
-                    <a:srgbClr val="606060"/>
-                  </a:solidFill>
-                </a:rPr>
-                <a:t>9 次</a:t>
-              </a:r>
-            </a:p>
-          </p:txBody>
-        </p:sp>
-        <p:sp>
-          <p:nvSpPr>
-            <p:cNvPr id="123" name="用户-m2-2"/>
-            <p:cNvSpPr txBox="1"/>
-            <p:nvPr/>
-          </p:nvSpPr>
-          <p:spPr>
-            <a:xfrm>
-              <a:off x="2513685" y="4370831"/>
-              <a:ext cx="1737360" cy="201168"/>
-            </a:xfrm>
-            <a:prstGeom prst="rect">
-              <a:avLst/>
-            </a:prstGeom>
-            <a:noFill/>
-          </p:spPr>
-          <p:txBody>
-            <a:bodyPr wrap="square" lIns="0" tIns="0" rIns="0" bIns="0">
-              <a:spAutoFit/>
-            </a:bodyPr>
-            <a:lstStyle/>
-            <a:p>
-              <a:pPr algn="l">
-                <a:spcAft>
-                  <a:spcPts val="0"/>
-                </a:spcAft>
-              </a:pPr>
-              <a:r>
-                <a:rPr sz="1000" b="1">
-                  <a:solidFill>
-                    <a:srgbClr val="0A0A0A"/>
-                  </a:solidFill>
-                </a:rPr>
-                <a:t>还款中断</a:t>
-              </a:r>
-              <a:r>
-                <a:rPr sz="800" b="0">
-                  <a:solidFill>
-                    <a:srgbClr val="606060"/>
-                  </a:solidFill>
-                </a:rPr>
-                <a:t>无</a:t>
-              </a:r>
-            </a:p>
-          </p:txBody>
-        </p:sp>
-        <p:sp>
-          <p:nvSpPr>
-            <p:cNvPr id="124" name="用户-m2-3"/>
-            <p:cNvSpPr txBox="1"/>
-            <p:nvPr/>
-          </p:nvSpPr>
-          <p:spPr>
-            <a:xfrm>
-              <a:off x="2513685" y="4608575"/>
-              <a:ext cx="1737360" cy="201168"/>
-            </a:xfrm>
-            <a:prstGeom prst="rect">
-              <a:avLst/>
-            </a:prstGeom>
-            <a:noFill/>
-          </p:spPr>
-          <p:txBody>
-            <a:bodyPr wrap="square" lIns="0" tIns="0" rIns="0" bIns="0">
-              <a:spAutoFit/>
-            </a:bodyPr>
-            <a:lstStyle/>
-            <a:p>
-              <a:pPr algn="l">
-                <a:spcAft>
-                  <a:spcPts val="0"/>
-                </a:spcAft>
-              </a:pPr>
-              <a:r>
-                <a:rPr sz="1000" b="1">
-                  <a:solidFill>
-                    <a:srgbClr val="0A0A0A"/>
-                  </a:solidFill>
-                </a:rPr>
-                <a:t>近 90 天新增借款</a:t>
-              </a:r>
-              <a:r>
-                <a:rPr sz="800" b="0">
-                  <a:solidFill>
-                    <a:srgbClr val="606060"/>
-                  </a:solidFill>
-                </a:rPr>
-                <a:t>1 笔</a:t>
-              </a:r>
-            </a:p>
-          </p:txBody>
-        </p:sp>
-        <p:cxnSp>
-          <p:nvCxnSpPr>
-            <p:cNvPr id="125" name="用户-sep2"/>
-            <p:cNvCxnSpPr/>
-            <p:nvPr/>
-          </p:nvCxnSpPr>
-          <p:spPr>
-            <a:xfrm>
-              <a:off x="4196181" y="4023360"/>
-              <a:ext cx="0" cy="1051560"/>
-            </a:xfrm>
-            <a:prstGeom prst="line">
-              <a:avLst/>
-            </a:prstGeom>
-            <a:ln w="12700">
-              <a:solidFill>
-                <a:srgbClr val="D6D6D6"/>
-              </a:solidFill>
-            </a:ln>
-          </p:spPr>
-          <p:style>
-            <a:lnRef idx="2">
-              <a:schemeClr val="accent1"/>
-            </a:lnRef>
-            <a:fillRef idx="0">
-              <a:schemeClr val="accent1"/>
-            </a:fillRef>
-            <a:effectRef idx="1">
-              <a:schemeClr val="accent1"/>
-            </a:effectRef>
-            <a:fontRef idx="minor">
-              <a:schemeClr val="tx1"/>
-            </a:fontRef>
-          </p:style>
-        </p:cxnSp>
-        <p:sp>
-          <p:nvSpPr>
-            <p:cNvPr id="126" name="用户-m3-t"/>
-            <p:cNvSpPr txBox="1"/>
-            <p:nvPr/>
-          </p:nvSpPr>
-          <p:spPr>
-            <a:xfrm>
-              <a:off x="4287621" y="3931920"/>
-              <a:ext cx="1645920" cy="182880"/>
-            </a:xfrm>
-            <a:prstGeom prst="rect">
-              <a:avLst/>
-            </a:prstGeom>
-            <a:noFill/>
-          </p:spPr>
-          <p:txBody>
-            <a:bodyPr wrap="square" lIns="0" tIns="0" rIns="0" bIns="0">
-              <a:spAutoFit/>
-            </a:bodyPr>
-            <a:lstStyle/>
-            <a:p>
-              <a:pPr algn="l">
-                <a:spcAft>
-                  <a:spcPts val="0"/>
-                </a:spcAft>
-              </a:pPr>
-              <a:r>
-                <a:rPr sz="1000" b="1">
-                  <a:solidFill>
-                    <a:srgbClr val="1F4E79"/>
-                  </a:solidFill>
-                </a:rPr>
-                <a:t>风险信号</a:t>
-              </a:r>
-            </a:p>
-          </p:txBody>
-        </p:sp>
-        <p:sp>
-          <p:nvSpPr>
-            <p:cNvPr id="127" name="用户-m3-1"/>
-            <p:cNvSpPr txBox="1"/>
-            <p:nvPr/>
-          </p:nvSpPr>
-          <p:spPr>
-            <a:xfrm>
-              <a:off x="4287621" y="4133087"/>
-              <a:ext cx="1737360" cy="201168"/>
-            </a:xfrm>
-            <a:prstGeom prst="rect">
-              <a:avLst/>
-            </a:prstGeom>
-            <a:noFill/>
-          </p:spPr>
-          <p:txBody>
-            <a:bodyPr wrap="square" lIns="0" tIns="0" rIns="0" bIns="0">
-              <a:spAutoFit/>
-            </a:bodyPr>
-            <a:lstStyle/>
-            <a:p>
-              <a:pPr algn="l">
-                <a:spcAft>
-                  <a:spcPts val="0"/>
-                </a:spcAft>
-              </a:pPr>
-              <a:r>
-                <a:rPr sz="1000" b="1">
-                  <a:solidFill>
-                    <a:srgbClr val="0A0A0A"/>
-                  </a:solidFill>
-                </a:rPr>
-                <a:t>轻微逾期</a:t>
-              </a:r>
-              <a:r>
-                <a:rPr sz="800" b="1">
-                  <a:solidFill>
-                    <a:srgbClr val="D6A000"/>
-                  </a:solidFill>
-                </a:rPr>
-                <a:t>1 次</a:t>
-              </a:r>
-            </a:p>
-          </p:txBody>
-        </p:sp>
-        <p:sp>
-          <p:nvSpPr>
-            <p:cNvPr id="128" name="用户-m3-2"/>
-            <p:cNvSpPr txBox="1"/>
-            <p:nvPr/>
-          </p:nvSpPr>
-          <p:spPr>
-            <a:xfrm>
-              <a:off x="4287621" y="4370831"/>
-              <a:ext cx="1737360" cy="201168"/>
-            </a:xfrm>
-            <a:prstGeom prst="rect">
-              <a:avLst/>
-            </a:prstGeom>
-            <a:noFill/>
-          </p:spPr>
-          <p:txBody>
-            <a:bodyPr wrap="square" lIns="0" tIns="0" rIns="0" bIns="0">
-              <a:spAutoFit/>
-            </a:bodyPr>
-            <a:lstStyle/>
-            <a:p>
-              <a:pPr algn="l">
-                <a:spcAft>
-                  <a:spcPts val="0"/>
-                </a:spcAft>
-              </a:pPr>
-              <a:r>
-                <a:rPr sz="1000" b="1">
-                  <a:solidFill>
-                    <a:srgbClr val="0A0A0A"/>
-                  </a:solidFill>
-                </a:rPr>
-                <a:t>扣款失败</a:t>
-              </a:r>
-              <a:r>
-                <a:rPr sz="800" b="1">
-                  <a:solidFill>
-                    <a:srgbClr val="D6A000"/>
-                  </a:solidFill>
-                </a:rPr>
-                <a:t>1 次</a:t>
-              </a:r>
-            </a:p>
-          </p:txBody>
-        </p:sp>
-        <p:sp>
-          <p:nvSpPr>
-            <p:cNvPr id="129" name="用户-m3-3"/>
-            <p:cNvSpPr txBox="1"/>
-            <p:nvPr/>
-          </p:nvSpPr>
-          <p:spPr>
-            <a:xfrm>
-              <a:off x="4287621" y="4608575"/>
-              <a:ext cx="1737360" cy="201168"/>
-            </a:xfrm>
-            <a:prstGeom prst="rect">
-              <a:avLst/>
-            </a:prstGeom>
-            <a:noFill/>
-          </p:spPr>
-          <p:txBody>
-            <a:bodyPr wrap="square" lIns="0" tIns="0" rIns="0" bIns="0">
-              <a:spAutoFit/>
-            </a:bodyPr>
-            <a:lstStyle/>
-            <a:p>
-              <a:pPr algn="l">
-                <a:spcAft>
-                  <a:spcPts val="0"/>
-                </a:spcAft>
-              </a:pPr>
-              <a:r>
-                <a:rPr sz="1000" b="1">
-                  <a:solidFill>
-                    <a:srgbClr val="0A0A0A"/>
-                  </a:solidFill>
-                </a:rPr>
-                <a:t>90 天借款</a:t>
-              </a:r>
-              <a:r>
-                <a:rPr sz="800" b="0">
-                  <a:solidFill>
-                    <a:srgbClr val="606060"/>
-                  </a:solidFill>
-                </a:rPr>
-                <a:t>A$2,300</a:t>
-              </a:r>
-            </a:p>
-          </p:txBody>
-        </p:sp>
-      </p:grpSp>
+            </a:endParaRPr>
+          </a:p>
+        </p:txBody>
+      </p:sp>
+      <p:sp>
+        <p:nvSpPr>
+          <p:cNvPr id="117" name="用户-m1-1"/>
+          <p:cNvSpPr txBox="1"/>
+          <p:nvPr/>
+        </p:nvSpPr>
+        <p:spPr>
+          <a:xfrm>
+            <a:off x="6400989" y="4151003"/>
+            <a:ext cx="1737360" cy="201168"/>
+          </a:xfrm>
+          <a:prstGeom prst="rect">
+            <a:avLst/>
+          </a:prstGeom>
+          <a:noFill/>
+        </p:spPr>
+        <p:txBody>
+          <a:bodyPr wrap="square" lIns="0" tIns="0" rIns="0" bIns="0">
+            <a:spAutoFit/>
+          </a:bodyPr>
+          <a:lstStyle/>
+          <a:p>
+            <a:pPr algn="l">
+              <a:spcAft>
+                <a:spcPts val="0"/>
+              </a:spcAft>
+            </a:pPr>
+            <a:r>
+              <a:rPr sz="1000" b="1">
+                <a:solidFill>
+                  <a:srgbClr val="0A0A0A"/>
+                </a:solidFill>
+              </a:rPr>
+              <a:t>预计待还</a:t>
+            </a:r>
+            <a:r>
+              <a:rPr sz="800" b="0">
+                <a:solidFill>
+                  <a:srgbClr val="606060"/>
+                </a:solidFill>
+              </a:rPr>
+              <a:t>A$1,016</a:t>
+            </a:r>
+          </a:p>
+        </p:txBody>
+      </p:sp>
+      <p:sp>
+        <p:nvSpPr>
+          <p:cNvPr id="118" name="用户-m1-2"/>
+          <p:cNvSpPr txBox="1"/>
+          <p:nvPr/>
+        </p:nvSpPr>
+        <p:spPr>
+          <a:xfrm>
+            <a:off x="6400989" y="4388747"/>
+            <a:ext cx="1737360" cy="201168"/>
+          </a:xfrm>
+          <a:prstGeom prst="rect">
+            <a:avLst/>
+          </a:prstGeom>
+          <a:noFill/>
+        </p:spPr>
+        <p:txBody>
+          <a:bodyPr wrap="square" lIns="0" tIns="0" rIns="0" bIns="0">
+            <a:spAutoFit/>
+          </a:bodyPr>
+          <a:lstStyle/>
+          <a:p>
+            <a:pPr algn="l">
+              <a:spcAft>
+                <a:spcPts val="0"/>
+              </a:spcAft>
+            </a:pPr>
+            <a:r>
+              <a:rPr sz="1000" b="1">
+                <a:solidFill>
+                  <a:srgbClr val="0A0A0A"/>
+                </a:solidFill>
+              </a:rPr>
+              <a:t>平均月还款</a:t>
+            </a:r>
+            <a:r>
+              <a:rPr sz="800" b="0">
+                <a:solidFill>
+                  <a:srgbClr val="606060"/>
+                </a:solidFill>
+              </a:rPr>
+              <a:t>A$428</a:t>
+            </a:r>
+          </a:p>
+        </p:txBody>
+      </p:sp>
+      <p:sp>
+        <p:nvSpPr>
+          <p:cNvPr id="119" name="用户-m1-3"/>
+          <p:cNvSpPr txBox="1"/>
+          <p:nvPr/>
+        </p:nvSpPr>
+        <p:spPr>
+          <a:xfrm>
+            <a:off x="6400989" y="4626491"/>
+            <a:ext cx="1737360" cy="201168"/>
+          </a:xfrm>
+          <a:prstGeom prst="rect">
+            <a:avLst/>
+          </a:prstGeom>
+          <a:noFill/>
+        </p:spPr>
+        <p:txBody>
+          <a:bodyPr wrap="square" lIns="0" tIns="0" rIns="0" bIns="0">
+            <a:spAutoFit/>
+          </a:bodyPr>
+          <a:lstStyle/>
+          <a:p>
+            <a:pPr algn="l">
+              <a:spcAft>
+                <a:spcPts val="0"/>
+              </a:spcAft>
+            </a:pPr>
+            <a:r>
+              <a:rPr sz="1000" b="1">
+                <a:solidFill>
+                  <a:srgbClr val="0A0A0A"/>
+                </a:solidFill>
+              </a:rPr>
+              <a:t>贷款机构</a:t>
+            </a:r>
+            <a:r>
+              <a:rPr sz="800" b="0">
+                <a:solidFill>
+                  <a:srgbClr val="606060"/>
+                </a:solidFill>
+              </a:rPr>
+              <a:t>2 家</a:t>
+            </a:r>
+          </a:p>
+        </p:txBody>
+      </p:sp>
+      <p:sp>
+        <p:nvSpPr>
+          <p:cNvPr id="121" name="用户-m2-t"/>
+          <p:cNvSpPr txBox="1"/>
+          <p:nvPr/>
+        </p:nvSpPr>
+        <p:spPr>
+          <a:xfrm>
+            <a:off x="8165780" y="3949836"/>
+            <a:ext cx="1645920" cy="182880"/>
+          </a:xfrm>
+          <a:prstGeom prst="rect">
+            <a:avLst/>
+          </a:prstGeom>
+          <a:noFill/>
+        </p:spPr>
+        <p:txBody>
+          <a:bodyPr wrap="square" lIns="0" tIns="0" rIns="0" bIns="0">
+            <a:spAutoFit/>
+          </a:bodyPr>
+          <a:lstStyle/>
+          <a:p>
+            <a:pPr algn="l">
+              <a:spcAft>
+                <a:spcPts val="0"/>
+              </a:spcAft>
+            </a:pPr>
+            <a:r>
+              <a:rPr sz="1000" b="1">
+                <a:solidFill>
+                  <a:srgbClr val="1F4E79"/>
+                </a:solidFill>
+              </a:rPr>
+              <a:t>履约表现</a:t>
+            </a:r>
+          </a:p>
+        </p:txBody>
+      </p:sp>
+      <p:sp>
+        <p:nvSpPr>
+          <p:cNvPr id="122" name="用户-m2-1"/>
+          <p:cNvSpPr txBox="1"/>
+          <p:nvPr/>
+        </p:nvSpPr>
+        <p:spPr>
+          <a:xfrm>
+            <a:off x="8165780" y="4151003"/>
+            <a:ext cx="1737360" cy="201168"/>
+          </a:xfrm>
+          <a:prstGeom prst="rect">
+            <a:avLst/>
+          </a:prstGeom>
+          <a:noFill/>
+        </p:spPr>
+        <p:txBody>
+          <a:bodyPr wrap="square" lIns="0" tIns="0" rIns="0" bIns="0">
+            <a:spAutoFit/>
+          </a:bodyPr>
+          <a:lstStyle/>
+          <a:p>
+            <a:pPr algn="l">
+              <a:spcAft>
+                <a:spcPts val="0"/>
+              </a:spcAft>
+            </a:pPr>
+            <a:r>
+              <a:rPr sz="1000" b="1" dirty="0">
+                <a:solidFill>
+                  <a:srgbClr val="0A0A0A"/>
+                </a:solidFill>
+              </a:rPr>
+              <a:t>90 天还款</a:t>
+            </a:r>
+            <a:r>
+              <a:rPr sz="800" b="0" dirty="0">
+                <a:solidFill>
+                  <a:srgbClr val="606060"/>
+                </a:solidFill>
+              </a:rPr>
+              <a:t>9 次</a:t>
+            </a:r>
+          </a:p>
+        </p:txBody>
+      </p:sp>
+      <p:sp>
+        <p:nvSpPr>
+          <p:cNvPr id="123" name="用户-m2-2"/>
+          <p:cNvSpPr txBox="1"/>
+          <p:nvPr/>
+        </p:nvSpPr>
+        <p:spPr>
+          <a:xfrm>
+            <a:off x="8165780" y="4388747"/>
+            <a:ext cx="1737360" cy="201168"/>
+          </a:xfrm>
+          <a:prstGeom prst="rect">
+            <a:avLst/>
+          </a:prstGeom>
+          <a:noFill/>
+        </p:spPr>
+        <p:txBody>
+          <a:bodyPr wrap="square" lIns="0" tIns="0" rIns="0" bIns="0">
+            <a:spAutoFit/>
+          </a:bodyPr>
+          <a:lstStyle/>
+          <a:p>
+            <a:pPr algn="l">
+              <a:spcAft>
+                <a:spcPts val="0"/>
+              </a:spcAft>
+            </a:pPr>
+            <a:r>
+              <a:rPr sz="1000" b="1">
+                <a:solidFill>
+                  <a:srgbClr val="0A0A0A"/>
+                </a:solidFill>
+              </a:rPr>
+              <a:t>还款中断</a:t>
+            </a:r>
+            <a:r>
+              <a:rPr sz="800" b="0">
+                <a:solidFill>
+                  <a:srgbClr val="606060"/>
+                </a:solidFill>
+              </a:rPr>
+              <a:t>无</a:t>
+            </a:r>
+          </a:p>
+        </p:txBody>
+      </p:sp>
+      <p:sp>
+        <p:nvSpPr>
+          <p:cNvPr id="124" name="用户-m2-3"/>
+          <p:cNvSpPr txBox="1"/>
+          <p:nvPr/>
+        </p:nvSpPr>
+        <p:spPr>
+          <a:xfrm>
+            <a:off x="8165780" y="4626491"/>
+            <a:ext cx="1737360" cy="201168"/>
+          </a:xfrm>
+          <a:prstGeom prst="rect">
+            <a:avLst/>
+          </a:prstGeom>
+          <a:noFill/>
+        </p:spPr>
+        <p:txBody>
+          <a:bodyPr wrap="square" lIns="0" tIns="0" rIns="0" bIns="0">
+            <a:spAutoFit/>
+          </a:bodyPr>
+          <a:lstStyle/>
+          <a:p>
+            <a:pPr algn="l">
+              <a:spcAft>
+                <a:spcPts val="0"/>
+              </a:spcAft>
+            </a:pPr>
+            <a:r>
+              <a:rPr sz="1000" b="1" dirty="0">
+                <a:solidFill>
+                  <a:srgbClr val="0A0A0A"/>
+                </a:solidFill>
+              </a:rPr>
+              <a:t>近 90 天新增借款</a:t>
+            </a:r>
+            <a:r>
+              <a:rPr sz="800" b="0" dirty="0">
+                <a:solidFill>
+                  <a:srgbClr val="606060"/>
+                </a:solidFill>
+              </a:rPr>
+              <a:t>1 笔</a:t>
+            </a:r>
+          </a:p>
+        </p:txBody>
+      </p:sp>
+      <p:sp>
+        <p:nvSpPr>
+          <p:cNvPr id="126" name="用户-m3-t"/>
+          <p:cNvSpPr txBox="1"/>
+          <p:nvPr/>
+        </p:nvSpPr>
+        <p:spPr>
+          <a:xfrm>
+            <a:off x="9994392" y="3941978"/>
+            <a:ext cx="1645920" cy="182880"/>
+          </a:xfrm>
+          <a:prstGeom prst="rect">
+            <a:avLst/>
+          </a:prstGeom>
+          <a:noFill/>
+        </p:spPr>
+        <p:txBody>
+          <a:bodyPr wrap="square" lIns="0" tIns="0" rIns="0" bIns="0">
+            <a:spAutoFit/>
+          </a:bodyPr>
+          <a:lstStyle/>
+          <a:p>
+            <a:pPr algn="l">
+              <a:spcAft>
+                <a:spcPts val="0"/>
+              </a:spcAft>
+            </a:pPr>
+            <a:r>
+              <a:rPr sz="1000" b="1">
+                <a:solidFill>
+                  <a:srgbClr val="1F4E79"/>
+                </a:solidFill>
+              </a:rPr>
+              <a:t>风险信号</a:t>
+            </a:r>
+          </a:p>
+        </p:txBody>
+      </p:sp>
+      <p:sp>
+        <p:nvSpPr>
+          <p:cNvPr id="127" name="用户-m3-1"/>
+          <p:cNvSpPr txBox="1"/>
+          <p:nvPr/>
+        </p:nvSpPr>
+        <p:spPr>
+          <a:xfrm>
+            <a:off x="9994392" y="4143145"/>
+            <a:ext cx="1737360" cy="201168"/>
+          </a:xfrm>
+          <a:prstGeom prst="rect">
+            <a:avLst/>
+          </a:prstGeom>
+          <a:noFill/>
+        </p:spPr>
+        <p:txBody>
+          <a:bodyPr wrap="square" lIns="0" tIns="0" rIns="0" bIns="0">
+            <a:spAutoFit/>
+          </a:bodyPr>
+          <a:lstStyle/>
+          <a:p>
+            <a:pPr algn="l">
+              <a:spcAft>
+                <a:spcPts val="0"/>
+              </a:spcAft>
+            </a:pPr>
+            <a:r>
+              <a:rPr sz="1000" b="1">
+                <a:solidFill>
+                  <a:srgbClr val="0A0A0A"/>
+                </a:solidFill>
+              </a:rPr>
+              <a:t>轻微逾期</a:t>
+            </a:r>
+            <a:r>
+              <a:rPr sz="800" b="1">
+                <a:solidFill>
+                  <a:srgbClr val="D6A000"/>
+                </a:solidFill>
+              </a:rPr>
+              <a:t>1 次</a:t>
+            </a:r>
+          </a:p>
+        </p:txBody>
+      </p:sp>
+      <p:sp>
+        <p:nvSpPr>
+          <p:cNvPr id="128" name="用户-m3-2"/>
+          <p:cNvSpPr txBox="1"/>
+          <p:nvPr/>
+        </p:nvSpPr>
+        <p:spPr>
+          <a:xfrm>
+            <a:off x="9994392" y="4380889"/>
+            <a:ext cx="1737360" cy="201168"/>
+          </a:xfrm>
+          <a:prstGeom prst="rect">
+            <a:avLst/>
+          </a:prstGeom>
+          <a:noFill/>
+        </p:spPr>
+        <p:txBody>
+          <a:bodyPr wrap="square" lIns="0" tIns="0" rIns="0" bIns="0">
+            <a:spAutoFit/>
+          </a:bodyPr>
+          <a:lstStyle/>
+          <a:p>
+            <a:pPr algn="l">
+              <a:spcAft>
+                <a:spcPts val="0"/>
+              </a:spcAft>
+            </a:pPr>
+            <a:r>
+              <a:rPr sz="1000" b="1">
+                <a:solidFill>
+                  <a:srgbClr val="0A0A0A"/>
+                </a:solidFill>
+              </a:rPr>
+              <a:t>扣款失败</a:t>
+            </a:r>
+            <a:r>
+              <a:rPr sz="800" b="1">
+                <a:solidFill>
+                  <a:srgbClr val="D6A000"/>
+                </a:solidFill>
+              </a:rPr>
+              <a:t>1 次</a:t>
+            </a:r>
+          </a:p>
+        </p:txBody>
+      </p:sp>
+      <p:sp>
+        <p:nvSpPr>
+          <p:cNvPr id="129" name="用户-m3-3"/>
+          <p:cNvSpPr txBox="1"/>
+          <p:nvPr/>
+        </p:nvSpPr>
+        <p:spPr>
+          <a:xfrm>
+            <a:off x="9994392" y="4618633"/>
+            <a:ext cx="1737360" cy="201168"/>
+          </a:xfrm>
+          <a:prstGeom prst="rect">
+            <a:avLst/>
+          </a:prstGeom>
+          <a:noFill/>
+        </p:spPr>
+        <p:txBody>
+          <a:bodyPr wrap="square" lIns="0" tIns="0" rIns="0" bIns="0">
+            <a:spAutoFit/>
+          </a:bodyPr>
+          <a:lstStyle/>
+          <a:p>
+            <a:pPr algn="l">
+              <a:spcAft>
+                <a:spcPts val="0"/>
+              </a:spcAft>
+            </a:pPr>
+            <a:r>
+              <a:rPr sz="1000" b="1" dirty="0">
+                <a:solidFill>
+                  <a:srgbClr val="0A0A0A"/>
+                </a:solidFill>
+              </a:rPr>
+              <a:t>90 天借款</a:t>
+            </a:r>
+            <a:r>
+              <a:rPr sz="800" b="0" dirty="0">
+                <a:solidFill>
+                  <a:srgbClr val="606060"/>
+                </a:solidFill>
+              </a:rPr>
+              <a:t>A$2,300</a:t>
+            </a:r>
+          </a:p>
+        </p:txBody>
+      </p:sp>
       <p:sp>
         <p:nvSpPr>
           <p:cNvPr id="25" name="Fa-bar"/>
@@ -10549,7 +9750,7 @@
         </p:nvSpPr>
         <p:spPr>
           <a:xfrm>
-            <a:off x="620963" y="3179140"/>
+            <a:off x="687257" y="3460431"/>
             <a:ext cx="5376672" cy="54864"/>
           </a:xfrm>
           <a:prstGeom prst="rect">
@@ -10594,7 +9795,7 @@
         </p:nvSpPr>
         <p:spPr>
           <a:xfrm>
-            <a:off x="803843" y="3279724"/>
+            <a:off x="870137" y="3561015"/>
             <a:ext cx="5010912" cy="201168"/>
           </a:xfrm>
           <a:prstGeom prst="rect">
@@ -10630,7 +9831,7 @@
         </p:nvSpPr>
         <p:spPr>
           <a:xfrm>
-            <a:off x="805301" y="4288206"/>
+            <a:off x="825242" y="4966143"/>
             <a:ext cx="1463040" cy="146304"/>
           </a:xfrm>
           <a:prstGeom prst="rect">
@@ -10645,18 +9846,10 @@
           <a:lstStyle/>
           <a:p>
             <a:r>
-              <a:rPr sz="900" b="0" dirty="0" err="1">
-                <a:solidFill>
-                  <a:srgbClr val="606060"/>
-                </a:solidFill>
-              </a:rPr>
+              <a:rPr sz="900" b="1" dirty="0" err="1"/>
               <a:t>借款金额</a:t>
             </a:r>
-            <a:endParaRPr sz="900" b="0" dirty="0">
-              <a:solidFill>
-                <a:srgbClr val="606060"/>
-              </a:solidFill>
-            </a:endParaRPr>
+            <a:endParaRPr sz="900" b="1" dirty="0"/>
           </a:p>
         </p:txBody>
       </p:sp>
@@ -10668,7 +9861,7 @@
         </p:nvSpPr>
         <p:spPr>
           <a:xfrm>
-            <a:off x="805301" y="3940734"/>
+            <a:off x="1375291" y="4943038"/>
             <a:ext cx="1463040" cy="292608"/>
           </a:xfrm>
           <a:prstGeom prst="rect">
@@ -10701,7 +9894,7 @@
         </p:nvSpPr>
         <p:spPr>
           <a:xfrm>
-            <a:off x="2478653" y="4288206"/>
+            <a:off x="883885" y="5166319"/>
             <a:ext cx="1463040" cy="146304"/>
           </a:xfrm>
           <a:prstGeom prst="rect">
@@ -10716,18 +9909,10 @@
           <a:lstStyle/>
           <a:p>
             <a:r>
-              <a:rPr sz="900" b="0" dirty="0" err="1">
-                <a:solidFill>
-                  <a:srgbClr val="606060"/>
-                </a:solidFill>
-              </a:rPr>
+              <a:rPr sz="900" b="1" dirty="0" err="1"/>
               <a:t>已还本金</a:t>
             </a:r>
-            <a:endParaRPr sz="900" b="0" dirty="0">
-              <a:solidFill>
-                <a:srgbClr val="606060"/>
-              </a:solidFill>
-            </a:endParaRPr>
+            <a:endParaRPr sz="900" b="1" dirty="0"/>
           </a:p>
         </p:txBody>
       </p:sp>
@@ -10739,7 +9924,7 @@
         </p:nvSpPr>
         <p:spPr>
           <a:xfrm>
-            <a:off x="2478653" y="3940734"/>
+            <a:off x="1421322" y="5159023"/>
             <a:ext cx="1463040" cy="292608"/>
           </a:xfrm>
           <a:prstGeom prst="rect">
@@ -10772,7 +9957,7 @@
         </p:nvSpPr>
         <p:spPr>
           <a:xfrm>
-            <a:off x="4152005" y="4288206"/>
+            <a:off x="871273" y="5394506"/>
             <a:ext cx="1463040" cy="146304"/>
           </a:xfrm>
           <a:prstGeom prst="rect">
@@ -10787,11 +9972,7 @@
           <a:lstStyle/>
           <a:p>
             <a:r>
-              <a:rPr sz="900" b="0">
-                <a:solidFill>
-                  <a:srgbClr val="606060"/>
-                </a:solidFill>
-              </a:rPr>
+              <a:rPr sz="900" b="1"/>
               <a:t>剩余本金</a:t>
             </a:r>
           </a:p>
@@ -10805,7 +9986,7 @@
         </p:nvSpPr>
         <p:spPr>
           <a:xfrm>
-            <a:off x="4152005" y="3940734"/>
+            <a:off x="1421322" y="5390007"/>
             <a:ext cx="1463040" cy="292608"/>
           </a:xfrm>
           <a:prstGeom prst="rect">
@@ -10820,92 +10001,12 @@
           <a:lstStyle/>
           <a:p>
             <a:r>
-              <a:rPr sz="1200" b="1">
+              <a:rPr sz="1200" b="1" dirty="0">
                 <a:solidFill>
                   <a:srgbClr val="1F4E79"/>
                 </a:solidFill>
               </a:rPr>
               <a:t>A$564</a:t>
-            </a:r>
-          </a:p>
-        </p:txBody>
-      </p:sp>
-      <p:sp>
-        <p:nvSpPr>
-          <p:cNvPr id="88" name="Fa-arr1"/>
-          <p:cNvSpPr txBox="1"/>
-          <p:nvPr/>
-        </p:nvSpPr>
-        <p:spPr>
-          <a:xfrm>
-            <a:off x="2268341" y="4032174"/>
-            <a:ext cx="182880" cy="182880"/>
-          </a:xfrm>
-          <a:prstGeom prst="rect">
-            <a:avLst/>
-          </a:prstGeom>
-          <a:noFill/>
-        </p:spPr>
-        <p:txBody>
-          <a:bodyPr wrap="square" lIns="0" tIns="0" rIns="0" bIns="0">
-            <a:noAutofit/>
-          </a:bodyPr>
-          <a:lstStyle/>
-          <a:p>
-            <a:pPr>
-              <a:lnSpc>
-                <a:spcPct val="100000"/>
-              </a:lnSpc>
-            </a:pPr>
-            <a:r>
-              <a:rPr lang="zh-CN" sz="1200" b="1" dirty="0">
-                <a:solidFill>
-                  <a:srgbClr val="606060"/>
-                </a:solidFill>
-                <a:latin typeface="微软雅黑"/>
-                <a:ea typeface="微软雅黑"/>
-              </a:rPr>
-              <a:t>→</a:t>
-            </a:r>
-          </a:p>
-        </p:txBody>
-      </p:sp>
-      <p:sp>
-        <p:nvSpPr>
-          <p:cNvPr id="89" name="Fa-arr2"/>
-          <p:cNvSpPr txBox="1"/>
-          <p:nvPr/>
-        </p:nvSpPr>
-        <p:spPr>
-          <a:xfrm>
-            <a:off x="3941693" y="4032174"/>
-            <a:ext cx="182880" cy="182880"/>
-          </a:xfrm>
-          <a:prstGeom prst="rect">
-            <a:avLst/>
-          </a:prstGeom>
-          <a:noFill/>
-        </p:spPr>
-        <p:txBody>
-          <a:bodyPr wrap="square" lIns="0" tIns="0" rIns="0" bIns="0">
-            <a:noAutofit/>
-          </a:bodyPr>
-          <a:lstStyle/>
-          <a:p>
-            <a:pPr>
-              <a:lnSpc>
-                <a:spcPct val="100000"/>
-              </a:lnSpc>
-            </a:pPr>
-            <a:r>
-              <a:rPr lang="zh-CN" sz="1200" b="1">
-                <a:solidFill>
-                  <a:srgbClr val="606060"/>
-                </a:solidFill>
-                <a:latin typeface="微软雅黑"/>
-                <a:ea typeface="微软雅黑"/>
-              </a:rPr>
-              <a:t>→</a:t>
             </a:r>
           </a:p>
         </p:txBody>
@@ -10918,7 +10019,7 @@
         </p:nvSpPr>
         <p:spPr>
           <a:xfrm>
-            <a:off x="805214" y="3565830"/>
+            <a:off x="4528566" y="3170795"/>
             <a:ext cx="5029200" cy="201168"/>
           </a:xfrm>
           <a:prstGeom prst="rect">
@@ -10938,7 +10039,7 @@
               </a:spcAft>
             </a:pPr>
             <a:r>
-              <a:rPr sz="1100" b="1">
+              <a:rPr sz="1100" b="1" dirty="0">
                 <a:solidFill>
                   <a:srgbClr val="1F4E79"/>
                 </a:solidFill>
@@ -10946,13 +10047,26 @@
               <a:t>SACC</a:t>
             </a:r>
             <a:r>
-              <a:rPr sz="1100" b="0">
+              <a:rPr sz="1100" b="0" dirty="0">
                 <a:solidFill>
                   <a:srgbClr val="606060"/>
                 </a:solidFill>
               </a:rPr>
-              <a:t>   ｜  在贷</a:t>
+              <a:t>   ｜  </a:t>
             </a:r>
+            <a:r>
+              <a:rPr sz="1100" b="0" dirty="0" err="1">
+                <a:solidFill>
+                  <a:srgbClr val="606060"/>
+                </a:solidFill>
+              </a:rPr>
+              <a:t>在贷</a:t>
+            </a:r>
+            <a:endParaRPr sz="1100" b="0" dirty="0">
+              <a:solidFill>
+                <a:srgbClr val="606060"/>
+              </a:solidFill>
+            </a:endParaRPr>
           </a:p>
         </p:txBody>
       </p:sp>
@@ -10964,8 +10078,8 @@
         </p:nvSpPr>
         <p:spPr>
           <a:xfrm>
-            <a:off x="805214" y="4617390"/>
-            <a:ext cx="1609344" cy="164592"/>
+            <a:off x="810733" y="3914252"/>
+            <a:ext cx="1609344" cy="153888"/>
           </a:xfrm>
           <a:prstGeom prst="rect">
             <a:avLst/>
@@ -10984,13 +10098,18 @@
               </a:spcAft>
             </a:pPr>
             <a:r>
-              <a:rPr sz="1000" b="1">
+              <a:rPr sz="1000" b="1" dirty="0" err="1">
                 <a:solidFill>
                   <a:srgbClr val="1F4E79"/>
                 </a:solidFill>
               </a:rPr>
               <a:t>还款计划</a:t>
             </a:r>
+            <a:endParaRPr sz="1000" b="1" dirty="0">
+              <a:solidFill>
+                <a:srgbClr val="1F4E79"/>
+              </a:solidFill>
+            </a:endParaRPr>
           </a:p>
         </p:txBody>
       </p:sp>
@@ -11002,7 +10121,7 @@
         </p:nvSpPr>
         <p:spPr>
           <a:xfrm>
-            <a:off x="805214" y="4818558"/>
+            <a:off x="810733" y="4115420"/>
             <a:ext cx="1609344" cy="182880"/>
           </a:xfrm>
           <a:prstGeom prst="rect">
@@ -11022,7 +10141,7 @@
               </a:spcAft>
             </a:pPr>
             <a:r>
-              <a:rPr sz="1000" b="1">
+              <a:rPr sz="1000" b="1" dirty="0" err="1">
                 <a:solidFill>
                   <a:srgbClr val="0A0A0A"/>
                 </a:solidFill>
@@ -11030,12 +10149,20 @@
               <a:t>月还款</a:t>
             </a:r>
             <a:r>
-              <a:rPr sz="800" b="0">
+              <a:rPr sz="800" b="0" dirty="0" err="1">
                 <a:solidFill>
                   <a:srgbClr val="606060"/>
                 </a:solidFill>
               </a:rPr>
-              <a:t>约 A$338</a:t>
+              <a:t>约</a:t>
+            </a:r>
+            <a:r>
+              <a:rPr sz="800" b="0" dirty="0">
+                <a:solidFill>
+                  <a:srgbClr val="606060"/>
+                </a:solidFill>
+              </a:rPr>
+              <a:t> A$338</a:t>
             </a:r>
           </a:p>
         </p:txBody>
@@ -11048,7 +10175,7 @@
         </p:nvSpPr>
         <p:spPr>
           <a:xfrm>
-            <a:off x="805214" y="5038014"/>
+            <a:off x="810733" y="4334876"/>
             <a:ext cx="1609344" cy="182880"/>
           </a:xfrm>
           <a:prstGeom prst="rect">
@@ -11094,7 +10221,7 @@
         </p:nvSpPr>
         <p:spPr>
           <a:xfrm>
-            <a:off x="805214" y="5257470"/>
+            <a:off x="810733" y="4554332"/>
             <a:ext cx="1609344" cy="182880"/>
           </a:xfrm>
           <a:prstGeom prst="rect">
@@ -11140,7 +10267,7 @@
         </p:nvSpPr>
         <p:spPr>
           <a:xfrm>
-            <a:off x="805214" y="5476926"/>
+            <a:off x="810733" y="4773788"/>
             <a:ext cx="1609344" cy="182880"/>
           </a:xfrm>
           <a:prstGeom prst="rect">
@@ -11160,7 +10287,7 @@
               </a:spcAft>
             </a:pPr>
             <a:r>
-              <a:rPr sz="1000" b="1">
+              <a:rPr sz="1000" b="1" dirty="0">
                 <a:solidFill>
                   <a:srgbClr val="0A0A0A"/>
                 </a:solidFill>
@@ -11168,7 +10295,7 @@
               <a:t>预计剩余</a:t>
             </a:r>
             <a:r>
-              <a:rPr sz="800" b="0">
+              <a:rPr sz="800" b="0" dirty="0">
                 <a:solidFill>
                   <a:srgbClr val="606060"/>
                 </a:solidFill>
@@ -11186,8 +10313,8 @@
         </p:nvSpPr>
         <p:spPr>
           <a:xfrm>
-            <a:off x="2524286" y="4617390"/>
-            <a:ext cx="1609344" cy="164592"/>
+            <a:off x="2383501" y="3993338"/>
+            <a:ext cx="1609344" cy="153888"/>
           </a:xfrm>
           <a:prstGeom prst="rect">
             <a:avLst/>
@@ -11218,13 +10345,13 @@
       </p:sp>
       <p:sp>
         <p:nvSpPr>
-          <p:cNvPr id="137" name="Fa-c-履约表现-1"/>
+          <p:cNvPr id="138" name="Fa-c-履约表现-2"/>
           <p:cNvSpPr txBox="1"/>
           <p:nvPr/>
         </p:nvSpPr>
         <p:spPr>
           <a:xfrm>
-            <a:off x="2524286" y="4818558"/>
+            <a:off x="2383501" y="4233961"/>
             <a:ext cx="1609344" cy="182880"/>
           </a:xfrm>
           <a:prstGeom prst="rect">
@@ -11244,53 +10371,7 @@
               </a:spcAft>
             </a:pPr>
             <a:r>
-              <a:rPr sz="1000" b="1">
-                <a:solidFill>
-                  <a:srgbClr val="0A0A0A"/>
-                </a:solidFill>
-              </a:rPr>
-              <a:t>轻微逾期</a:t>
-            </a:r>
-            <a:r>
-              <a:rPr sz="800" b="1">
-                <a:solidFill>
-                  <a:srgbClr val="D6A000"/>
-                </a:solidFill>
-              </a:rPr>
-              <a:t>1 次</a:t>
-            </a:r>
-          </a:p>
-        </p:txBody>
-      </p:sp>
-      <p:sp>
-        <p:nvSpPr>
-          <p:cNvPr id="138" name="Fa-c-履约表现-2"/>
-          <p:cNvSpPr txBox="1"/>
-          <p:nvPr/>
-        </p:nvSpPr>
-        <p:spPr>
-          <a:xfrm>
-            <a:off x="2524286" y="5038014"/>
-            <a:ext cx="1609344" cy="182880"/>
-          </a:xfrm>
-          <a:prstGeom prst="rect">
-            <a:avLst/>
-          </a:prstGeom>
-          <a:noFill/>
-        </p:spPr>
-        <p:txBody>
-          <a:bodyPr wrap="square" lIns="0" tIns="0" rIns="0" bIns="0">
-            <a:spAutoFit/>
-          </a:bodyPr>
-          <a:lstStyle/>
-          <a:p>
-            <a:pPr algn="l">
-              <a:spcAft>
-                <a:spcPts val="0"/>
-              </a:spcAft>
-            </a:pPr>
-            <a:r>
-              <a:rPr sz="1000" b="1">
+              <a:rPr sz="1000" b="1" dirty="0">
                 <a:solidFill>
                   <a:srgbClr val="0A0A0A"/>
                 </a:solidFill>
@@ -11298,7 +10379,7 @@
               <a:t>扣款失败</a:t>
             </a:r>
             <a:r>
-              <a:rPr sz="800" b="1">
+              <a:rPr sz="800" b="1" dirty="0">
                 <a:solidFill>
                   <a:srgbClr val="D6A000"/>
                 </a:solidFill>
@@ -11316,7 +10397,7 @@
         </p:nvSpPr>
         <p:spPr>
           <a:xfrm>
-            <a:off x="2524286" y="5257470"/>
+            <a:off x="2383501" y="4453417"/>
             <a:ext cx="1609344" cy="182880"/>
           </a:xfrm>
           <a:prstGeom prst="rect">
@@ -11362,7 +10443,7 @@
         </p:nvSpPr>
         <p:spPr>
           <a:xfrm>
-            <a:off x="2524286" y="5476926"/>
+            <a:off x="2383501" y="4672873"/>
             <a:ext cx="1609344" cy="182880"/>
           </a:xfrm>
           <a:prstGeom prst="rect">
@@ -11408,8 +10489,8 @@
         </p:nvSpPr>
         <p:spPr>
           <a:xfrm>
-            <a:off x="4243358" y="4617390"/>
-            <a:ext cx="1609344" cy="164592"/>
+            <a:off x="4102517" y="3936772"/>
+            <a:ext cx="1609344" cy="153888"/>
           </a:xfrm>
           <a:prstGeom prst="rect">
             <a:avLst/>
@@ -11428,13 +10509,26 @@
               </a:spcAft>
             </a:pPr>
             <a:r>
-              <a:rPr sz="1000" b="1">
+              <a:rPr sz="1000" b="1" dirty="0" err="1">
                 <a:solidFill>
                   <a:srgbClr val="1F4E79"/>
                 </a:solidFill>
               </a:rPr>
-              <a:t>产品成本</a:t>
+              <a:t>产品</a:t>
             </a:r>
+            <a:r>
+              <a:rPr lang="zh-CN" altLang="en-US" sz="1000" b="1" dirty="0">
+                <a:solidFill>
+                  <a:srgbClr val="1F4E79"/>
+                </a:solidFill>
+              </a:rPr>
+              <a:t>要素</a:t>
+            </a:r>
+            <a:endParaRPr sz="1000" b="1" dirty="0">
+              <a:solidFill>
+                <a:srgbClr val="1F4E79"/>
+              </a:solidFill>
+            </a:endParaRPr>
           </a:p>
         </p:txBody>
       </p:sp>
@@ -11446,7 +10540,7 @@
         </p:nvSpPr>
         <p:spPr>
           <a:xfrm>
-            <a:off x="4243358" y="4818558"/>
+            <a:off x="4102517" y="4137940"/>
             <a:ext cx="1609344" cy="182880"/>
           </a:xfrm>
           <a:prstGeom prst="rect">
@@ -11492,7 +10586,7 @@
         </p:nvSpPr>
         <p:spPr>
           <a:xfrm>
-            <a:off x="4243358" y="5038014"/>
+            <a:off x="4102517" y="4357396"/>
             <a:ext cx="1609344" cy="182880"/>
           </a:xfrm>
           <a:prstGeom prst="rect">
@@ -11512,7 +10606,7 @@
               </a:spcAft>
             </a:pPr>
             <a:r>
-              <a:rPr sz="1000" b="1">
+              <a:rPr sz="1000" b="1" dirty="0">
                 <a:solidFill>
                   <a:srgbClr val="0A0A0A"/>
                 </a:solidFill>
@@ -11520,7 +10614,7 @@
               <a:t>预计总还款</a:t>
             </a:r>
             <a:r>
-              <a:rPr sz="800" b="0">
+              <a:rPr sz="800" b="0" dirty="0">
                 <a:solidFill>
                   <a:srgbClr val="606060"/>
                 </a:solidFill>
@@ -11538,7 +10632,119 @@
         </p:nvSpPr>
         <p:spPr>
           <a:xfrm>
-            <a:off x="4243358" y="5257470"/>
+            <a:off x="4102517" y="4576852"/>
+            <a:ext cx="1609344" cy="153888"/>
+          </a:xfrm>
+          <a:prstGeom prst="rect">
+            <a:avLst/>
+          </a:prstGeom>
+          <a:noFill/>
+        </p:spPr>
+        <p:txBody>
+          <a:bodyPr wrap="square" lIns="0" tIns="0" rIns="0" bIns="0">
+            <a:spAutoFit/>
+          </a:bodyPr>
+          <a:lstStyle/>
+          <a:p>
+            <a:pPr algn="l">
+              <a:spcAft>
+                <a:spcPts val="0"/>
+              </a:spcAft>
+            </a:pPr>
+            <a:r>
+              <a:rPr lang="zh-CN" altLang="en-US" sz="1000" b="1" dirty="0">
+                <a:solidFill>
+                  <a:srgbClr val="0A0A0A"/>
+                </a:solidFill>
+              </a:rPr>
+              <a:t>利息</a:t>
+            </a:r>
+            <a:r>
+              <a:rPr sz="1000" b="1" dirty="0">
+                <a:solidFill>
+                  <a:srgbClr val="0A0A0A"/>
+                </a:solidFill>
+              </a:rPr>
+              <a:t>成本</a:t>
+            </a:r>
+            <a:r>
+              <a:rPr sz="800" b="0" dirty="0">
+                <a:solidFill>
+                  <a:srgbClr val="606060"/>
+                </a:solidFill>
+              </a:rPr>
+              <a:t>A$372</a:t>
+            </a:r>
+          </a:p>
+        </p:txBody>
+      </p:sp>
+      <p:sp>
+        <p:nvSpPr>
+          <p:cNvPr id="64" name="Fa-c-产品成本-3">
+            <a:extLst>
+              <a:ext uri="{FF2B5EF4-FFF2-40B4-BE49-F238E27FC236}">
+                <a16:creationId xmlns:a16="http://schemas.microsoft.com/office/drawing/2014/main" id="{E1EE7A53-B95F-4A01-A89A-78606CEC2339}"/>
+              </a:ext>
+            </a:extLst>
+          </p:cNvPr>
+          <p:cNvSpPr txBox="1"/>
+          <p:nvPr/>
+        </p:nvSpPr>
+        <p:spPr>
+          <a:xfrm>
+            <a:off x="4102517" y="4814151"/>
+            <a:ext cx="1609344" cy="153888"/>
+          </a:xfrm>
+          <a:prstGeom prst="rect">
+            <a:avLst/>
+          </a:prstGeom>
+          <a:noFill/>
+        </p:spPr>
+        <p:txBody>
+          <a:bodyPr wrap="square" lIns="0" tIns="0" rIns="0" bIns="0">
+            <a:spAutoFit/>
+          </a:bodyPr>
+          <a:lstStyle/>
+          <a:p>
+            <a:pPr algn="l">
+              <a:spcAft>
+                <a:spcPts val="0"/>
+              </a:spcAft>
+            </a:pPr>
+            <a:r>
+              <a:rPr lang="zh-CN" altLang="en-US" sz="1000" b="1" dirty="0">
+                <a:solidFill>
+                  <a:srgbClr val="0A0A0A"/>
+                </a:solidFill>
+              </a:rPr>
+              <a:t>产品类型 </a:t>
+            </a:r>
+            <a:r>
+              <a:rPr sz="800" b="0" dirty="0">
+                <a:solidFill>
+                  <a:srgbClr val="606060"/>
+                </a:solidFill>
+              </a:rPr>
+              <a:t>A$372</a:t>
+            </a:r>
+          </a:p>
+        </p:txBody>
+      </p:sp>
+      <p:sp>
+        <p:nvSpPr>
+          <p:cNvPr id="65" name="Fa-c-产品成本-3">
+            <a:extLst>
+              <a:ext uri="{FF2B5EF4-FFF2-40B4-BE49-F238E27FC236}">
+                <a16:creationId xmlns:a16="http://schemas.microsoft.com/office/drawing/2014/main" id="{AE3F2A52-5712-4660-91BB-683DAAEC473B}"/>
+              </a:ext>
+            </a:extLst>
+          </p:cNvPr>
+          <p:cNvSpPr txBox="1"/>
+          <p:nvPr/>
+        </p:nvSpPr>
+        <p:spPr>
+          <a:xfrm>
+            <a:off x="4095984" y="5067583"/>
             <a:ext cx="1609344" cy="182880"/>
           </a:xfrm>
           <a:prstGeom prst="rect">
@@ -11558,7 +10764,7 @@
               </a:spcAft>
             </a:pPr>
             <a:r>
-              <a:rPr sz="1000" b="1">
+              <a:rPr sz="1000" b="1" dirty="0">
                 <a:solidFill>
                   <a:srgbClr val="0A0A0A"/>
                 </a:solidFill>
@@ -11566,7 +10772,7 @@
               <a:t>融资成本</a:t>
             </a:r>
             <a:r>
-              <a:rPr sz="800" b="0">
+              <a:rPr sz="800" b="0" dirty="0">
                 <a:solidFill>
                   <a:srgbClr val="606060"/>
                 </a:solidFill>
@@ -16096,7 +15302,7 @@
                 <a:latin typeface="微软雅黑"/>
                 <a:ea typeface="微软雅黑"/>
               </a:rPr>
-              <a:t>五类定位原因示例</a:t>
+              <a:t>四类定位原因示例</a:t>
             </a:r>
           </a:p>
         </p:txBody>
@@ -16325,7 +15531,7 @@
         </p:nvSpPr>
         <p:spPr>
           <a:xfrm>
-            <a:off x="6309360" y="1975104"/>
+            <a:off x="6294120" y="2024460"/>
             <a:ext cx="5541264" cy="530352"/>
           </a:xfrm>
           <a:prstGeom prst="rect">
@@ -17214,7 +16420,7 @@
                         </a:spcAft>
                       </a:pPr>
                       <a:r>
-                        <a:rPr sz="800" b="0">
+                        <a:rPr sz="800" b="0" dirty="0">
                           <a:latin typeface="微软雅黑"/>
                           <a:ea typeface="微软雅黑"/>
                         </a:rPr>
@@ -17296,12 +16502,51 @@
                         </a:spcAft>
                       </a:pPr>
                       <a:r>
-                        <a:rPr sz="800" b="0">
+                        <a:rPr sz="800" b="0" dirty="0">
                           <a:latin typeface="微软雅黑"/>
                           <a:ea typeface="微软雅黑"/>
                         </a:rPr>
-                        <a:t>Non-SACC Loans（Home Loan）&lt;br&gt;按产品关键词判定为贷款</a:t>
+                        <a:t>Non-SACC </a:t>
                       </a:r>
+                      <a:r>
+                        <a:rPr sz="800" b="0" dirty="0" err="1">
+                          <a:latin typeface="微软雅黑"/>
+                          <a:ea typeface="微软雅黑"/>
+                        </a:rPr>
+                        <a:t>Loans（Home</a:t>
+                      </a:r>
+                      <a:r>
+                        <a:rPr sz="800" b="0" dirty="0">
+                          <a:latin typeface="微软雅黑"/>
+                          <a:ea typeface="微软雅黑"/>
+                        </a:rPr>
+                        <a:t> Loan）&lt;</a:t>
+                      </a:r>
+                      <a:r>
+                        <a:rPr sz="800" b="0" dirty="0" err="1">
+                          <a:latin typeface="微软雅黑"/>
+                          <a:ea typeface="微软雅黑"/>
+                        </a:rPr>
+                        <a:t>br</a:t>
+                      </a:r>
+                      <a:r>
+                        <a:rPr sz="800" b="0" dirty="0">
+                          <a:latin typeface="微软雅黑"/>
+                          <a:ea typeface="微软雅黑"/>
+                        </a:rPr>
+                        <a:t>&gt;</a:t>
+                      </a:r>
+                      <a:r>
+                        <a:rPr sz="800" b="0" dirty="0" err="1">
+                          <a:latin typeface="微软雅黑"/>
+                          <a:ea typeface="微软雅黑"/>
+                        </a:rPr>
+                        <a:t>按产品关键词判定为贷款</a:t>
+                      </a:r>
+                      <a:endParaRPr sz="800" b="0" dirty="0">
+                        <a:latin typeface="微软雅黑"/>
+                        <a:ea typeface="微软雅黑"/>
+                      </a:endParaRPr>
                     </a:p>
                   </a:txBody>
                   <a:tcPr marL="45720" marR="45720" marT="18288" marB="18288" anchor="ctr">
@@ -18404,7 +17649,7 @@
                         </a:spcAft>
                       </a:pPr>
                       <a:r>
-                        <a:rPr sz="800" b="0">
+                        <a:rPr sz="800" b="0" dirty="0">
                           <a:latin typeface="微软雅黑"/>
                           <a:ea typeface="微软雅黑"/>
                         </a:rPr>
@@ -19014,7 +18259,7 @@
                         </a:spcAft>
                       </a:pPr>
                       <a:r>
-                        <a:rPr sz="800" b="1">
+                        <a:rPr sz="800" b="1" dirty="0">
                           <a:latin typeface="微软雅黑"/>
                           <a:ea typeface="微软雅黑"/>
                         </a:rPr>
@@ -19059,7 +18304,7 @@
                         </a:spcAft>
                       </a:pPr>
                       <a:r>
-                        <a:rPr sz="800" b="0">
+                        <a:rPr sz="800" b="0" dirty="0">
                           <a:latin typeface="微软雅黑"/>
                           <a:ea typeface="微软雅黑"/>
                         </a:rPr>
@@ -19104,7 +18349,7 @@
                         </a:spcAft>
                       </a:pPr>
                       <a:r>
-                        <a:rPr sz="800" b="0">
+                        <a:rPr sz="800" b="0" dirty="0">
                           <a:latin typeface="微软雅黑"/>
                           <a:ea typeface="微软雅黑"/>
                         </a:rPr>
@@ -19748,7 +18993,7 @@
                         </a:spcAft>
                       </a:pPr>
                       <a:r>
-                        <a:rPr sz="800" b="0">
+                        <a:rPr sz="800" b="0" dirty="0">
                           <a:latin typeface="微软雅黑"/>
                           <a:ea typeface="微软雅黑"/>
                         </a:rPr>
@@ -20070,11 +19315,25 @@
                         </a:spcAft>
                       </a:pPr>
                       <a:r>
-                        <a:rPr sz="800" b="0">
+                        <a:rPr sz="800" b="0" dirty="0">
                           <a:latin typeface="微软雅黑"/>
                           <a:ea typeface="微软雅黑"/>
                         </a:rPr>
-                        <a:t>Non-SACC（LOC 循环授信）</a:t>
+                        <a:t>Non-SACC（LOC </a:t>
+                      </a:r>
+                      <a:r>
+                        <a:rPr sz="800" b="0" dirty="0" err="1">
+                          <a:latin typeface="微软雅黑"/>
+                          <a:ea typeface="微软雅黑"/>
+                        </a:rPr>
+                        <a:t>循环授信</a:t>
+                      </a:r>
+                      <a:r>
+                        <a:rPr sz="800" b="0" dirty="0">
+                          <a:latin typeface="微软雅黑"/>
+                          <a:ea typeface="微软雅黑"/>
+                        </a:rPr>
+                        <a:t>）</a:t>
                       </a:r>
                     </a:p>
                   </a:txBody>
@@ -20877,7 +20136,7 @@
         <p:spPr>
           <a:xfrm>
             <a:off x="5303520" y="2578608"/>
-            <a:ext cx="6318504" cy="274320"/>
+            <a:ext cx="6318504" cy="253916"/>
           </a:xfrm>
           <a:prstGeom prst="rect">
             <a:avLst/>
@@ -20911,7 +20170,17 @@
               </a:defRPr>
             </a:pPr>
             <a:r>
-              <a:rPr kumimoji="0" sz="1050" b="1" i="0" u="none" strike="noStrike" kern="1200" cap="none" spc="0" normalizeH="0" baseline="0" noProof="0">
+              <a:rPr lang="zh-CN" altLang="en-US" sz="1050" b="1" dirty="0">
+                <a:solidFill>
+                  <a:srgbClr val="0A0A0A"/>
+                </a:solidFill>
+                <a:latin typeface="微软雅黑"/>
+                <a:ea typeface="微软雅黑"/>
+              </a:rPr>
+              <a:t>准确</a:t>
+            </a:r>
+            <a:r>
+              <a:rPr kumimoji="0" sz="1050" b="1" i="0" u="none" strike="noStrike" kern="1200" cap="none" spc="0" normalizeH="0" baseline="0" noProof="0" dirty="0" err="1">
                 <a:ln>
                   <a:noFill/>
                 </a:ln>
@@ -20925,7 +20194,92 @@
                 <a:ea typeface="微软雅黑"/>
                 <a:cs typeface="+mn-cs"/>
               </a:rPr>
-              <a:t>一致性：同一贷款流内 illion 标签自相矛盾（MoneySpot）</a:t>
+              <a:t>性：同一贷款流内</a:t>
+            </a:r>
+            <a:r>
+              <a:rPr kumimoji="0" sz="1050" b="1" i="0" u="none" strike="noStrike" kern="1200" cap="none" spc="0" normalizeH="0" baseline="0" noProof="0" dirty="0">
+                <a:ln>
+                  <a:noFill/>
+                </a:ln>
+                <a:solidFill>
+                  <a:srgbClr val="0A0A0A"/>
+                </a:solidFill>
+                <a:effectLst/>
+                <a:uLnTx/>
+                <a:uFillTx/>
+                <a:latin typeface="微软雅黑"/>
+                <a:ea typeface="微软雅黑"/>
+                <a:cs typeface="+mn-cs"/>
+              </a:rPr>
+              <a:t> </a:t>
+            </a:r>
+            <a:r>
+              <a:rPr kumimoji="0" sz="1050" b="1" i="0" u="none" strike="noStrike" kern="1200" cap="none" spc="0" normalizeH="0" baseline="0" noProof="0" dirty="0" err="1">
+                <a:ln>
+                  <a:noFill/>
+                </a:ln>
+                <a:solidFill>
+                  <a:srgbClr val="0A0A0A"/>
+                </a:solidFill>
+                <a:effectLst/>
+                <a:uLnTx/>
+                <a:uFillTx/>
+                <a:latin typeface="微软雅黑"/>
+                <a:ea typeface="微软雅黑"/>
+                <a:cs typeface="+mn-cs"/>
+              </a:rPr>
+              <a:t>illion</a:t>
+            </a:r>
+            <a:r>
+              <a:rPr kumimoji="0" sz="1050" b="1" i="0" u="none" strike="noStrike" kern="1200" cap="none" spc="0" normalizeH="0" baseline="0" noProof="0" dirty="0">
+                <a:ln>
+                  <a:noFill/>
+                </a:ln>
+                <a:solidFill>
+                  <a:srgbClr val="0A0A0A"/>
+                </a:solidFill>
+                <a:effectLst/>
+                <a:uLnTx/>
+                <a:uFillTx/>
+                <a:latin typeface="微软雅黑"/>
+                <a:ea typeface="微软雅黑"/>
+                <a:cs typeface="+mn-cs"/>
+              </a:rPr>
+              <a:t> </a:t>
+            </a:r>
+            <a:r>
+              <a:rPr kumimoji="0" sz="1050" b="1" i="0" u="none" strike="noStrike" kern="1200" cap="none" spc="0" normalizeH="0" baseline="0" noProof="0" dirty="0" err="1">
+                <a:ln>
+                  <a:noFill/>
+                </a:ln>
+                <a:solidFill>
+                  <a:srgbClr val="0A0A0A"/>
+                </a:solidFill>
+                <a:effectLst/>
+                <a:uLnTx/>
+                <a:uFillTx/>
+                <a:latin typeface="微软雅黑"/>
+                <a:ea typeface="微软雅黑"/>
+                <a:cs typeface="+mn-cs"/>
+              </a:rPr>
+              <a:t>标签自相矛盾（MoneySpot</a:t>
+            </a:r>
+            <a:r>
+              <a:rPr kumimoji="0" sz="1050" b="1" i="0" u="none" strike="noStrike" kern="1200" cap="none" spc="0" normalizeH="0" baseline="0" noProof="0" dirty="0">
+                <a:ln>
+                  <a:noFill/>
+                </a:ln>
+                <a:solidFill>
+                  <a:srgbClr val="0A0A0A"/>
+                </a:solidFill>
+                <a:effectLst/>
+                <a:uLnTx/>
+                <a:uFillTx/>
+                <a:latin typeface="微软雅黑"/>
+                <a:ea typeface="微软雅黑"/>
+                <a:cs typeface="+mn-cs"/>
+              </a:rPr>
+              <a:t>）</a:t>
             </a:r>
           </a:p>
         </p:txBody>
@@ -21744,7 +21098,7 @@
         </p:nvSpPr>
         <p:spPr>
           <a:xfrm>
-            <a:off x="1604772" y="2470405"/>
+            <a:off x="1604772" y="2447545"/>
             <a:ext cx="2487168" cy="2487168"/>
           </a:xfrm>
           <a:prstGeom prst="ellipse">
@@ -21809,7 +21163,7 @@
           <a:p>
             <a:pPr algn="l"/>
             <a:r>
-              <a:rPr lang="zh-CN" sz="900" b="1">
+              <a:rPr lang="zh-CN" sz="900" b="1" dirty="0">
                 <a:solidFill>
                   <a:srgbClr val="1F4E79"/>
                 </a:solidFill>
@@ -21822,7 +21176,7 @@
           <a:p>
             <a:pPr algn="l"/>
             <a:r>
-              <a:rPr lang="zh-CN" sz="800" b="0">
+              <a:rPr lang="zh-CN" sz="800" b="0" dirty="0">
                 <a:solidFill>
                   <a:srgbClr val="606060"/>
                 </a:solidFill>
@@ -22011,7 +21365,7 @@
               </a:lnSpc>
             </a:pPr>
             <a:r>
-              <a:rPr lang="zh-CN" sz="1200" b="1">
+              <a:rPr lang="zh-CN" sz="1200" b="1" dirty="0">
                 <a:solidFill>
                   <a:srgbClr val="1F4E79"/>
                 </a:solidFill>
@@ -22021,7 +21375,7 @@
               <a:t>91.8%</a:t>
             </a:r>
             <a:r>
-              <a:rPr lang="zh-CN" sz="800" b="0">
+              <a:rPr lang="zh-CN" sz="800" b="0" dirty="0">
                 <a:solidFill>
                   <a:srgbClr val="606060"/>
                 </a:solidFill>
@@ -22099,7 +21453,7 @@
               </a:lnSpc>
             </a:pPr>
             <a:r>
-              <a:rPr lang="zh-CN" sz="1600" b="1">
+              <a:rPr lang="zh-CN" sz="1600" b="1" dirty="0">
                 <a:solidFill>
                   <a:srgbClr val="1F4E79"/>
                 </a:solidFill>
@@ -22116,7 +21470,7 @@
               </a:lnSpc>
             </a:pPr>
             <a:r>
-              <a:rPr lang="zh-CN" sz="900" b="0">
+              <a:rPr lang="zh-CN" sz="900" b="0" dirty="0">
                 <a:solidFill>
                   <a:srgbClr val="0A0A0A"/>
                 </a:solidFill>
@@ -22133,7 +21487,7 @@
               </a:lnSpc>
             </a:pPr>
             <a:r>
-              <a:rPr lang="zh-CN" sz="800" b="0">
+              <a:rPr lang="zh-CN" sz="800" b="0" dirty="0">
                 <a:solidFill>
                   <a:srgbClr val="606060"/>
                 </a:solidFill>
@@ -22173,7 +21527,7 @@
               </a:lnSpc>
             </a:pPr>
             <a:r>
-              <a:rPr lang="zh-CN" sz="1600" b="1">
+              <a:rPr lang="zh-CN" sz="1600" b="1" dirty="0">
                 <a:solidFill>
                   <a:srgbClr val="1F4E79"/>
                 </a:solidFill>
@@ -22190,7 +21544,7 @@
               </a:lnSpc>
             </a:pPr>
             <a:r>
-              <a:rPr lang="zh-CN" sz="900" b="0">
+              <a:rPr lang="zh-CN" sz="900" b="0" dirty="0">
                 <a:solidFill>
                   <a:srgbClr val="0A0A0A"/>
                 </a:solidFill>
@@ -22207,7 +21561,7 @@
               </a:lnSpc>
             </a:pPr>
             <a:r>
-              <a:rPr lang="zh-CN" sz="800" b="0">
+              <a:rPr lang="zh-CN" sz="800" b="0" dirty="0">
                 <a:solidFill>
                   <a:srgbClr val="606060"/>
                 </a:solidFill>

--- a/银行流水分享_V2.0.pptx
+++ b/银行流水分享_V2.0.pptx
@@ -9683,7 +9683,7 @@
                   <a:srgbClr val="0A0A0A"/>
                 </a:solidFill>
               </a:rPr>
-              <a:t>扣款失败</a:t>
+              <a:t>扣款失败率</a:t>
             </a:r>
             <a:r>
               <a:rPr sz="800" b="1">
@@ -9691,7 +9691,7 @@
                   <a:srgbClr val="D6A000"/>
                 </a:solidFill>
               </a:rPr>
-              <a:t>1 次</a:t>
+              <a:t>11%</a:t>
             </a:r>
           </a:p>
         </p:txBody>
@@ -10725,27 +10725,21 @@
                   <a:srgbClr val="606060"/>
                 </a:solidFill>
               </a:rPr>
-              <a:t>A$372</a:t>
+              <a:t>SACC</a:t>
             </a:r>
           </a:p>
         </p:txBody>
       </p:sp>
       <p:sp>
         <p:nvSpPr>
-          <p:cNvPr id="65" name="Fa-c-产品成本-3">
-            <a:extLst>
-              <a:ext uri="{FF2B5EF4-FFF2-40B4-BE49-F238E27FC236}">
-                <a16:creationId xmlns:a16="http://schemas.microsoft.com/office/drawing/2014/main" id="{AE3F2A52-5712-4660-91BB-683DAAEC473B}"/>
-              </a:ext>
-            </a:extLst>
-          </p:cNvPr>
+          <p:cNvPr id="145" name="用户-m1-4"/>
           <p:cNvSpPr txBox="1"/>
           <p:nvPr/>
         </p:nvSpPr>
         <p:spPr>
           <a:xfrm>
-            <a:off x="4095984" y="5067583"/>
-            <a:ext cx="1609344" cy="182880"/>
+            <a:off x="6400989" y="4856377"/>
+            <a:ext cx="1737360" cy="201168"/>
           </a:xfrm>
           <a:prstGeom prst="rect">
             <a:avLst/>
@@ -10764,20 +10758,446 @@
               </a:spcAft>
             </a:pPr>
             <a:r>
-              <a:rPr sz="1000" b="1" dirty="0">
+              <a:rPr sz="1000" b="1">
                 <a:solidFill>
                   <a:srgbClr val="0A0A0A"/>
                 </a:solidFill>
               </a:rPr>
-              <a:t>融资成本</a:t>
+              <a:t>在贷笔数</a:t>
             </a:r>
             <a:r>
-              <a:rPr sz="800" b="0" dirty="0">
+              <a:rPr sz="800" b="0">
                 <a:solidFill>
                   <a:srgbClr val="606060"/>
                 </a:solidFill>
               </a:rPr>
-              <a:t>A$372</a:t>
+              <a:t>3 笔</a:t>
+            </a:r>
+          </a:p>
+        </p:txBody>
+      </p:sp>
+      <p:sp>
+        <p:nvSpPr>
+          <p:cNvPr id="146" name="用户-m2-4"/>
+          <p:cNvSpPr txBox="1"/>
+          <p:nvPr/>
+        </p:nvSpPr>
+        <p:spPr>
+          <a:xfrm>
+            <a:off x="8165780" y="4856377"/>
+            <a:ext cx="1737360" cy="201168"/>
+          </a:xfrm>
+          <a:prstGeom prst="rect">
+            <a:avLst/>
+          </a:prstGeom>
+          <a:noFill/>
+        </p:spPr>
+        <p:txBody>
+          <a:bodyPr wrap="square" lIns="0" tIns="0" rIns="0" bIns="0">
+            <a:spAutoFit/>
+          </a:bodyPr>
+          <a:lstStyle/>
+          <a:p>
+            <a:pPr algn="l">
+              <a:spcAft>
+                <a:spcPts val="0"/>
+              </a:spcAft>
+            </a:pPr>
+            <a:r>
+              <a:rPr sz="1000" b="1">
+                <a:solidFill>
+                  <a:srgbClr val="0A0A0A"/>
+                </a:solidFill>
+              </a:rPr>
+              <a:t>最近借款</a:t>
+            </a:r>
+            <a:r>
+              <a:rPr sz="800" b="0">
+                <a:solidFill>
+                  <a:srgbClr val="606060"/>
+                </a:solidFill>
+              </a:rPr>
+              <a:t>45 天前</a:t>
+            </a:r>
+          </a:p>
+        </p:txBody>
+      </p:sp>
+      <p:sp>
+        <p:nvSpPr>
+          <p:cNvPr id="147" name="用户-m3-4"/>
+          <p:cNvSpPr txBox="1"/>
+          <p:nvPr/>
+        </p:nvSpPr>
+        <p:spPr>
+          <a:xfrm>
+            <a:off x="9994392" y="4856377"/>
+            <a:ext cx="1737360" cy="201168"/>
+          </a:xfrm>
+          <a:prstGeom prst="rect">
+            <a:avLst/>
+          </a:prstGeom>
+          <a:noFill/>
+        </p:spPr>
+        <p:txBody>
+          <a:bodyPr wrap="square" lIns="0" tIns="0" rIns="0" bIns="0">
+            <a:spAutoFit/>
+          </a:bodyPr>
+          <a:lstStyle/>
+          <a:p>
+            <a:pPr algn="l">
+              <a:spcAft>
+                <a:spcPts val="0"/>
+              </a:spcAft>
+            </a:pPr>
+            <a:r>
+              <a:rPr sz="1000" b="1">
+                <a:solidFill>
+                  <a:srgbClr val="0A0A0A"/>
+                </a:solidFill>
+              </a:rPr>
+              <a:t>历史违约</a:t>
+            </a:r>
+            <a:r>
+              <a:rPr sz="800" b="0">
+                <a:solidFill>
+                  <a:srgbClr val="606060"/>
+                </a:solidFill>
+              </a:rPr>
+              <a:t>0 次</a:t>
+            </a:r>
+          </a:p>
+        </p:txBody>
+      </p:sp>
+      <p:sp>
+        <p:nvSpPr>
+          <p:cNvPr id="148" name="用户-b-t"/>
+          <p:cNvSpPr txBox="1"/>
+          <p:nvPr/>
+        </p:nvSpPr>
+        <p:spPr>
+          <a:xfrm>
+            <a:off x="6400989" y="5148985"/>
+            <a:ext cx="1645920" cy="182880"/>
+          </a:xfrm>
+          <a:prstGeom prst="rect">
+            <a:avLst/>
+          </a:prstGeom>
+          <a:noFill/>
+        </p:spPr>
+        <p:txBody>
+          <a:bodyPr wrap="square" lIns="0" tIns="0" rIns="0" bIns="0">
+            <a:spAutoFit/>
+          </a:bodyPr>
+          <a:lstStyle/>
+          <a:p>
+            <a:pPr algn="l">
+              <a:spcAft>
+                <a:spcPts val="0"/>
+              </a:spcAft>
+            </a:pPr>
+            <a:r>
+              <a:rPr sz="1000" b="1" dirty="0" err="1">
+                <a:solidFill>
+                  <a:srgbClr val="1F4E79"/>
+                </a:solidFill>
+              </a:rPr>
+              <a:t>偿债能力</a:t>
+            </a:r>
+            <a:endParaRPr sz="1000" b="1" dirty="0">
+              <a:solidFill>
+                <a:srgbClr val="1F4E79"/>
+              </a:solidFill>
+            </a:endParaRPr>
+          </a:p>
+        </p:txBody>
+      </p:sp>
+      <p:sp>
+        <p:nvSpPr>
+          <p:cNvPr id="149" name="用户-b1-1"/>
+          <p:cNvSpPr txBox="1"/>
+          <p:nvPr/>
+        </p:nvSpPr>
+        <p:spPr>
+          <a:xfrm>
+            <a:off x="6400989" y="5342294"/>
+            <a:ext cx="1737360" cy="201168"/>
+          </a:xfrm>
+          <a:prstGeom prst="rect">
+            <a:avLst/>
+          </a:prstGeom>
+          <a:noFill/>
+        </p:spPr>
+        <p:txBody>
+          <a:bodyPr wrap="square" lIns="0" tIns="0" rIns="0" bIns="0">
+            <a:spAutoFit/>
+          </a:bodyPr>
+          <a:lstStyle/>
+          <a:p>
+            <a:pPr algn="l">
+              <a:spcAft>
+                <a:spcPts val="0"/>
+              </a:spcAft>
+            </a:pPr>
+            <a:r>
+              <a:rPr sz="1000" b="1">
+                <a:solidFill>
+                  <a:srgbClr val="0A0A0A"/>
+                </a:solidFill>
+              </a:rPr>
+              <a:t>月还款/月收入</a:t>
+            </a:r>
+            <a:r>
+              <a:rPr sz="800" b="1">
+                <a:solidFill>
+                  <a:srgbClr val="D6A000"/>
+                </a:solidFill>
+              </a:rPr>
+              <a:t>5.8%</a:t>
+            </a:r>
+          </a:p>
+        </p:txBody>
+      </p:sp>
+      <p:sp>
+        <p:nvSpPr>
+          <p:cNvPr id="150" name="用户-b1-2"/>
+          <p:cNvSpPr txBox="1"/>
+          <p:nvPr/>
+        </p:nvSpPr>
+        <p:spPr>
+          <a:xfrm>
+            <a:off x="8165780" y="5342294"/>
+            <a:ext cx="1737360" cy="201168"/>
+          </a:xfrm>
+          <a:prstGeom prst="rect">
+            <a:avLst/>
+          </a:prstGeom>
+          <a:noFill/>
+        </p:spPr>
+        <p:txBody>
+          <a:bodyPr wrap="square" lIns="0" tIns="0" rIns="0" bIns="0">
+            <a:spAutoFit/>
+          </a:bodyPr>
+          <a:lstStyle/>
+          <a:p>
+            <a:pPr algn="l">
+              <a:spcAft>
+                <a:spcPts val="0"/>
+              </a:spcAft>
+            </a:pPr>
+            <a:r>
+              <a:rPr sz="1000" b="1">
+                <a:solidFill>
+                  <a:srgbClr val="0A0A0A"/>
+                </a:solidFill>
+              </a:rPr>
+              <a:t>总负债/月收入</a:t>
+            </a:r>
+            <a:r>
+              <a:rPr sz="800" b="1">
+                <a:solidFill>
+                  <a:srgbClr val="D6A000"/>
+                </a:solidFill>
+              </a:rPr>
+              <a:t>13.7%</a:t>
+            </a:r>
+          </a:p>
+        </p:txBody>
+      </p:sp>
+      <p:sp>
+        <p:nvSpPr>
+          <p:cNvPr id="151" name="用户-b1-3"/>
+          <p:cNvSpPr txBox="1"/>
+          <p:nvPr/>
+        </p:nvSpPr>
+        <p:spPr>
+          <a:xfrm>
+            <a:off x="9994392" y="5342294"/>
+            <a:ext cx="1737360" cy="201168"/>
+          </a:xfrm>
+          <a:prstGeom prst="rect">
+            <a:avLst/>
+          </a:prstGeom>
+          <a:noFill/>
+        </p:spPr>
+        <p:txBody>
+          <a:bodyPr wrap="square" lIns="0" tIns="0" rIns="0" bIns="0">
+            <a:spAutoFit/>
+          </a:bodyPr>
+          <a:lstStyle/>
+          <a:p>
+            <a:pPr algn="l">
+              <a:spcAft>
+                <a:spcPts val="0"/>
+              </a:spcAft>
+            </a:pPr>
+            <a:r>
+              <a:rPr sz="1000" b="1">
+                <a:solidFill>
+                  <a:srgbClr val="0A0A0A"/>
+                </a:solidFill>
+              </a:rPr>
+              <a:t>近 90 天负债变化率</a:t>
+            </a:r>
+            <a:r>
+              <a:rPr sz="800" b="1">
+                <a:solidFill>
+                  <a:srgbClr val="D6A000"/>
+                </a:solidFill>
+              </a:rPr>
+              <a:t>+12%</a:t>
+            </a:r>
+          </a:p>
+        </p:txBody>
+      </p:sp>
+      <p:sp>
+        <p:nvSpPr>
+          <p:cNvPr id="152" name="用户-b2-1"/>
+          <p:cNvSpPr txBox="1"/>
+          <p:nvPr/>
+        </p:nvSpPr>
+        <p:spPr>
+          <a:xfrm>
+            <a:off x="6400989" y="5580038"/>
+            <a:ext cx="1737360" cy="201168"/>
+          </a:xfrm>
+          <a:prstGeom prst="rect">
+            <a:avLst/>
+          </a:prstGeom>
+          <a:noFill/>
+        </p:spPr>
+        <p:txBody>
+          <a:bodyPr wrap="square" lIns="0" tIns="0" rIns="0" bIns="0">
+            <a:spAutoFit/>
+          </a:bodyPr>
+          <a:lstStyle/>
+          <a:p>
+            <a:pPr algn="l">
+              <a:spcAft>
+                <a:spcPts val="0"/>
+              </a:spcAft>
+            </a:pPr>
+            <a:r>
+              <a:rPr sz="1000" b="1">
+                <a:solidFill>
+                  <a:srgbClr val="0A0A0A"/>
+                </a:solidFill>
+              </a:rPr>
+              <a:t>正常还款率</a:t>
+            </a:r>
+            <a:r>
+              <a:rPr sz="800" b="0">
+                <a:solidFill>
+                  <a:srgbClr val="606060"/>
+                </a:solidFill>
+              </a:rPr>
+              <a:t>89%</a:t>
+            </a:r>
+          </a:p>
+        </p:txBody>
+      </p:sp>
+      <p:sp>
+        <p:nvSpPr>
+          <p:cNvPr id="153" name="用户-b2-2"/>
+          <p:cNvSpPr txBox="1"/>
+          <p:nvPr/>
+        </p:nvSpPr>
+        <p:spPr>
+          <a:xfrm>
+            <a:off x="8165780" y="5580038"/>
+            <a:ext cx="1737360" cy="201168"/>
+          </a:xfrm>
+          <a:prstGeom prst="rect">
+            <a:avLst/>
+          </a:prstGeom>
+          <a:noFill/>
+        </p:spPr>
+        <p:txBody>
+          <a:bodyPr wrap="square" lIns="0" tIns="0" rIns="0" bIns="0">
+            <a:spAutoFit/>
+          </a:bodyPr>
+          <a:lstStyle/>
+          <a:p>
+            <a:pPr algn="l">
+              <a:spcAft>
+                <a:spcPts val="0"/>
+              </a:spcAft>
+            </a:pPr>
+            <a:r>
+              <a:rPr sz="1000" b="1">
+                <a:solidFill>
+                  <a:srgbClr val="0A0A0A"/>
+                </a:solidFill>
+              </a:rPr>
+              <a:t>历史贷款笔数</a:t>
+            </a:r>
+            <a:r>
+              <a:rPr sz="800" b="0">
+                <a:solidFill>
+                  <a:srgbClr val="606060"/>
+                </a:solidFill>
+              </a:rPr>
+              <a:t>5 笔</a:t>
+            </a:r>
+          </a:p>
+        </p:txBody>
+      </p:sp>
+      <p:sp>
+        <p:nvSpPr>
+          <p:cNvPr id="154" name="用户-b2-3"/>
+          <p:cNvSpPr txBox="1"/>
+          <p:nvPr/>
+        </p:nvSpPr>
+        <p:spPr>
+          <a:xfrm>
+            <a:off x="9994392" y="5580038"/>
+            <a:ext cx="1737360" cy="201168"/>
+          </a:xfrm>
+          <a:prstGeom prst="rect">
+            <a:avLst/>
+          </a:prstGeom>
+          <a:noFill/>
+        </p:spPr>
+        <p:txBody>
+          <a:bodyPr wrap="square" lIns="0" tIns="0" rIns="0" bIns="0">
+            <a:spAutoFit/>
+          </a:bodyPr>
+          <a:lstStyle/>
+          <a:p>
+            <a:pPr algn="l">
+              <a:spcAft>
+                <a:spcPts val="0"/>
+              </a:spcAft>
+            </a:pPr>
+            <a:r>
+              <a:rPr sz="1000" b="1">
+                <a:solidFill>
+                  <a:srgbClr val="0A0A0A"/>
+                </a:solidFill>
+              </a:rPr>
+              <a:t>负债结构</a:t>
+            </a:r>
+            <a:r>
+              <a:rPr sz="800" b="0">
+                <a:solidFill>
+                  <a:srgbClr val="606060"/>
+                </a:solidFill>
+              </a:rPr>
+              <a:t>SACC 65% / Non-SACC 15%</a:t>
+            </a:r>
+            <a:br>
+              <a:rPr sz="800" b="0">
+                <a:solidFill>
+                  <a:srgbClr val="606060"/>
+                </a:solidFill>
+              </a:rPr>
+            </a:br>
+            <a:r>
+              <a:rPr sz="800" b="0">
+                <a:solidFill>
+                  <a:srgbClr val="606060"/>
+                </a:solidFill>
+              </a:rPr>
+              <a:t>BNPL 20%</a:t>
             </a:r>
           </a:p>
         </p:txBody>

--- a/银行流水分享_V2.0.pptx
+++ b/银行流水分享_V2.0.pptx
@@ -2422,7 +2422,7 @@
           <p:nvPr>
             <p:extLst>
               <p:ext uri="{F5677B7D-0D2A-4D9B-9A5C-6D8D7D0E5A5D}">
-                <pptd:line xmlns="" xmlns:a14="http://schemas.microsoft.com/office/drawing/2010/main" xmlns:c="http://schemas.openxmlformats.org/drawingml/2006/chart" xmlns:cx="http://schemas.microsoft.com/office/drawing/2014/chartex" xmlns:m="http://schemas.openxmlformats.org/officeDocument/2006/math" xmlns:mc="http://schemas.openxmlformats.org/markup-compatibility/2006" xmlns:pptd="https://kimi-design.msh.team/pptd/2026" encoding="base64url">eyJ2aWV3Qm94IjpbMSwzNDBdLCJwb2ludHMiOiIwLDAgMCwzNDAifQ</pptd:line>
+                <pptd:line xmlns:pptd="https://kimi-design.msh.team/pptd/2026" xmlns:mc="http://schemas.openxmlformats.org/markup-compatibility/2006" xmlns:m="http://schemas.openxmlformats.org/officeDocument/2006/math" xmlns:cx="http://schemas.microsoft.com/office/drawing/2014/chartex" xmlns:c="http://schemas.openxmlformats.org/drawingml/2006/chart" xmlns:a14="http://schemas.microsoft.com/office/drawing/2010/main" xmlns="" encoding="base64url">eyJ2aWV3Qm94IjpbMSwzNDBdLCJwb2ludHMiOiIwLDAgMCwzNDAifQ</pptd:line>
               </p:ext>
             </p:extLst>
           </p:nvPr>
@@ -2593,7 +2593,7 @@
           <p:nvPr>
             <p:extLst>
               <p:ext uri="{F5677B7D-0D2A-4D9B-9A5C-6D8D7D0E5A5D}">
-                <pptd:line xmlns="" xmlns:a14="http://schemas.microsoft.com/office/drawing/2010/main" xmlns:c="http://schemas.openxmlformats.org/drawingml/2006/chart" xmlns:cx="http://schemas.microsoft.com/office/drawing/2014/chartex" xmlns:m="http://schemas.openxmlformats.org/officeDocument/2006/math" xmlns:mc="http://schemas.openxmlformats.org/markup-compatibility/2006" xmlns:pptd="https://kimi-design.msh.team/pptd/2026" encoding="base64url">eyJ2aWV3Qm94IjpbMzc2LDFdLCJwb2ludHMiOiIwLDAgMzc2LDAifQ</pptd:line>
+                <pptd:line xmlns:pptd="https://kimi-design.msh.team/pptd/2026" xmlns:mc="http://schemas.openxmlformats.org/markup-compatibility/2006" xmlns:m="http://schemas.openxmlformats.org/officeDocument/2006/math" xmlns:cx="http://schemas.microsoft.com/office/drawing/2014/chartex" xmlns:c="http://schemas.openxmlformats.org/drawingml/2006/chart" xmlns:a14="http://schemas.microsoft.com/office/drawing/2010/main" xmlns="" encoding="base64url">eyJ2aWV3Qm94IjpbMzc2LDFdLCJwb2ludHMiOiIwLDAgMzc2LDAifQ</pptd:line>
               </p:ext>
             </p:extLst>
           </p:nvPr>
@@ -2713,7 +2713,7 @@
           <p:nvPr>
             <p:extLst>
               <p:ext uri="{F5677B7D-0D2A-4D9B-9A5C-6D8D7D0E5A5D}">
-                <pptd:line xmlns="" xmlns:a14="http://schemas.microsoft.com/office/drawing/2010/main" xmlns:c="http://schemas.openxmlformats.org/drawingml/2006/chart" xmlns:cx="http://schemas.microsoft.com/office/drawing/2014/chartex" xmlns:m="http://schemas.openxmlformats.org/officeDocument/2006/math" xmlns:mc="http://schemas.openxmlformats.org/markup-compatibility/2006" xmlns:pptd="https://kimi-design.msh.team/pptd/2026" encoding="base64url">eyJ2aWV3Qm94IjpbMzc2LDFdLCJwb2ludHMiOiIwLDAgMzc2LDAifQ</pptd:line>
+                <pptd:line xmlns:pptd="https://kimi-design.msh.team/pptd/2026" xmlns:mc="http://schemas.openxmlformats.org/markup-compatibility/2006" xmlns:m="http://schemas.openxmlformats.org/officeDocument/2006/math" xmlns:cx="http://schemas.microsoft.com/office/drawing/2014/chartex" xmlns:c="http://schemas.openxmlformats.org/drawingml/2006/chart" xmlns:a14="http://schemas.microsoft.com/office/drawing/2010/main" xmlns="" encoding="base64url">eyJ2aWV3Qm94IjpbMzc2LDFdLCJwb2ludHMiOiIwLDAgMzc2LDAifQ</pptd:line>
               </p:ext>
             </p:extLst>
           </p:nvPr>
@@ -2853,7 +2853,7 @@
           <p:nvPr>
             <p:extLst>
               <p:ext uri="{F5677B7D-0D2A-4D9B-9A5C-6D8D7D0E5A5D}">
-                <pptd:line xmlns="" xmlns:a14="http://schemas.microsoft.com/office/drawing/2010/main" xmlns:c="http://schemas.openxmlformats.org/drawingml/2006/chart" xmlns:cx="http://schemas.microsoft.com/office/drawing/2014/chartex" xmlns:m="http://schemas.openxmlformats.org/officeDocument/2006/math" xmlns:mc="http://schemas.openxmlformats.org/markup-compatibility/2006" xmlns:pptd="https://kimi-design.msh.team/pptd/2026" encoding="base64url">eyJ2aWV3Qm94IjpbMzc2LDFdLCJwb2ludHMiOiIwLDAgMzc2LDAifQ</pptd:line>
+                <pptd:line xmlns:pptd="https://kimi-design.msh.team/pptd/2026" xmlns:mc="http://schemas.openxmlformats.org/markup-compatibility/2006" xmlns:m="http://schemas.openxmlformats.org/officeDocument/2006/math" xmlns:cx="http://schemas.microsoft.com/office/drawing/2014/chartex" xmlns:c="http://schemas.openxmlformats.org/drawingml/2006/chart" xmlns:a14="http://schemas.microsoft.com/office/drawing/2010/main" xmlns="" encoding="base64url">eyJ2aWV3Qm94IjpbMzc2LDFdLCJwb2ludHMiOiIwLDAgMzc2LDAifQ</pptd:line>
               </p:ext>
             </p:extLst>
           </p:nvPr>
@@ -3013,7 +3013,7 @@
             <p:nvPr>
               <p:extLst>
                 <p:ext uri="{F5677B7D-0D2A-4D9B-9A5C-6D8D7D0E5A5D}">
-                  <pptd:line xmlns:pptd="https://kimi-design.msh.team/pptd/2026" xmlns:mc="http://schemas.openxmlformats.org/markup-compatibility/2006" xmlns:m="http://schemas.openxmlformats.org/officeDocument/2006/math" xmlns:cx="http://schemas.microsoft.com/office/drawing/2014/chartex" xmlns:c="http://schemas.openxmlformats.org/drawingml/2006/chart" xmlns:a14="http://schemas.microsoft.com/office/drawing/2010/main" xmlns="" encoding="base64url">eyJ2aWV3Qm94IjpbODU2LDFdLCJwb2ludHMiOiIwLDAgODU2LDAifQ</pptd:line>
+                  <pptd:line xmlns="" xmlns:a14="http://schemas.microsoft.com/office/drawing/2010/main" xmlns:c="http://schemas.openxmlformats.org/drawingml/2006/chart" xmlns:cx="http://schemas.microsoft.com/office/drawing/2014/chartex" xmlns:m="http://schemas.openxmlformats.org/officeDocument/2006/math" xmlns:mc="http://schemas.openxmlformats.org/markup-compatibility/2006" xmlns:pptd="https://kimi-design.msh.team/pptd/2026" encoding="base64url">eyJ2aWV3Qm94IjpbODU2LDFdLCJwb2ludHMiOiIwLDAgODU2LDAifQ</pptd:line>
                 </p:ext>
               </p:extLst>
             </p:nvPr>
@@ -11169,12 +11169,127 @@
               </a:spcAft>
             </a:pPr>
             <a:r>
+              <a:rPr sz="1000" b="1" dirty="0" err="1">
+                <a:solidFill>
+                  <a:srgbClr val="0A0A0A"/>
+                </a:solidFill>
+              </a:rPr>
+              <a:t>负债结构</a:t>
+            </a:r>
+            <a:r>
+              <a:rPr sz="800" b="0" dirty="0" err="1">
+                <a:solidFill>
+                  <a:srgbClr val="606060"/>
+                </a:solidFill>
+              </a:rPr>
+              <a:t>SACC</a:t>
+            </a:r>
+            <a:r>
+              <a:rPr sz="800" b="0" dirty="0">
+                <a:solidFill>
+                  <a:srgbClr val="606060"/>
+                </a:solidFill>
+              </a:rPr>
+              <a:t> 65% / Non-SACC 15%</a:t>
+            </a:r>
+            <a:br>
+              <a:rPr sz="800" b="0" dirty="0">
+                <a:solidFill>
+                  <a:srgbClr val="606060"/>
+                </a:solidFill>
+              </a:rPr>
+            </a:br>
+            <a:r>
+              <a:rPr sz="800" b="0" dirty="0">
+                <a:solidFill>
+                  <a:srgbClr val="606060"/>
+                </a:solidFill>
+              </a:rPr>
+              <a:t>BNPL 20%</a:t>
+            </a:r>
+          </a:p>
+        </p:txBody>
+      </p:sp>
+      <p:sp>
+        <p:nvSpPr>
+          <p:cNvPr id="155" name="Fa-c-履约表现-5"/>
+          <p:cNvSpPr txBox="1"/>
+          <p:nvPr/>
+        </p:nvSpPr>
+        <p:spPr>
+          <a:xfrm>
+            <a:off x="2383501" y="4892329"/>
+            <a:ext cx="1609344" cy="182880"/>
+          </a:xfrm>
+          <a:prstGeom prst="rect">
+            <a:avLst/>
+          </a:prstGeom>
+          <a:noFill/>
+        </p:spPr>
+        <p:txBody>
+          <a:bodyPr wrap="square" lIns="0" tIns="0" rIns="0" bIns="0">
+            <a:spAutoFit/>
+          </a:bodyPr>
+          <a:lstStyle/>
+          <a:p>
+            <a:pPr algn="l">
+              <a:spcAft>
+                <a:spcPts val="0"/>
+              </a:spcAft>
+            </a:pPr>
+            <a:r>
               <a:rPr sz="1000" b="1">
                 <a:solidFill>
                   <a:srgbClr val="0A0A0A"/>
                 </a:solidFill>
               </a:rPr>
-              <a:t>负债结构</a:t>
+              <a:t>累计逾期</a:t>
+            </a:r>
+            <a:r>
+              <a:rPr sz="800" b="1">
+                <a:solidFill>
+                  <a:srgbClr val="D6A000"/>
+                </a:solidFill>
+              </a:rPr>
+              <a:t>1 次</a:t>
+            </a:r>
+          </a:p>
+        </p:txBody>
+      </p:sp>
+      <p:sp>
+        <p:nvSpPr>
+          <p:cNvPr id="156" name="Fa-life-进度"/>
+          <p:cNvSpPr txBox="1"/>
+          <p:nvPr/>
+        </p:nvSpPr>
+        <p:spPr>
+          <a:xfrm>
+            <a:off x="810733" y="5595747"/>
+            <a:ext cx="1609344" cy="182880"/>
+          </a:xfrm>
+          <a:prstGeom prst="rect">
+            <a:avLst/>
+          </a:prstGeom>
+          <a:noFill/>
+        </p:spPr>
+        <p:txBody>
+          <a:bodyPr wrap="square" lIns="0" tIns="0" rIns="0" bIns="0">
+            <a:spAutoFit/>
+          </a:bodyPr>
+          <a:lstStyle/>
+          <a:p>
+            <a:pPr algn="l">
+              <a:spcAft>
+                <a:spcPts val="0"/>
+              </a:spcAft>
+            </a:pPr>
+            <a:r>
+              <a:rPr sz="1000" b="1">
+                <a:solidFill>
+                  <a:srgbClr val="0A0A0A"/>
+                </a:solidFill>
+              </a:rPr>
+              <a:t>本金偿还进度</a:t>
             </a:r>
             <a:r>
               <a:rPr sz="800" b="0">
@@ -11182,22 +11297,237 @@
                   <a:srgbClr val="606060"/>
                 </a:solidFill>
               </a:rPr>
-              <a:t>SACC 65% / Non-SACC 15%</a:t>
-            </a:r>
-            <a:br>
+              <a:t>62%</a:t>
+            </a:r>
+          </a:p>
+        </p:txBody>
+      </p:sp>
+      <p:sp>
+        <p:nvSpPr>
+          <p:cNvPr id="157" name="Fa-life-期数"/>
+          <p:cNvSpPr txBox="1"/>
+          <p:nvPr/>
+        </p:nvSpPr>
+        <p:spPr>
+          <a:xfrm>
+            <a:off x="2383501" y="5595747"/>
+            <a:ext cx="1609344" cy="182880"/>
+          </a:xfrm>
+          <a:prstGeom prst="rect">
+            <a:avLst/>
+          </a:prstGeom>
+          <a:noFill/>
+        </p:spPr>
+        <p:txBody>
+          <a:bodyPr wrap="square" lIns="0" tIns="0" rIns="0" bIns="0">
+            <a:spAutoFit/>
+          </a:bodyPr>
+          <a:lstStyle/>
+          <a:p>
+            <a:pPr algn="l">
+              <a:spcAft>
+                <a:spcPts val="0"/>
+              </a:spcAft>
+            </a:pPr>
+            <a:r>
+              <a:rPr sz="1000" b="1">
+                <a:solidFill>
+                  <a:srgbClr val="0A0A0A"/>
+                </a:solidFill>
+              </a:rPr>
+              <a:t>总期数</a:t>
+            </a:r>
+            <a:r>
               <a:rPr sz="800" b="0">
                 <a:solidFill>
                   <a:srgbClr val="606060"/>
                 </a:solidFill>
               </a:rPr>
-            </a:br>
+              <a:t>12 · 已还 8</a:t>
+            </a:r>
+          </a:p>
+        </p:txBody>
+      </p:sp>
+      <p:sp>
+        <p:nvSpPr>
+          <p:cNvPr id="158" name="Fa-life-按时率"/>
+          <p:cNvSpPr txBox="1"/>
+          <p:nvPr/>
+        </p:nvSpPr>
+        <p:spPr>
+          <a:xfrm>
+            <a:off x="4102517" y="5595747"/>
+            <a:ext cx="1609344" cy="182880"/>
+          </a:xfrm>
+          <a:prstGeom prst="rect">
+            <a:avLst/>
+          </a:prstGeom>
+          <a:noFill/>
+        </p:spPr>
+        <p:txBody>
+          <a:bodyPr wrap="square" lIns="0" tIns="0" rIns="0" bIns="0">
+            <a:spAutoFit/>
+          </a:bodyPr>
+          <a:lstStyle/>
+          <a:p>
+            <a:pPr algn="l">
+              <a:spcAft>
+                <a:spcPts val="0"/>
+              </a:spcAft>
+            </a:pPr>
+            <a:r>
+              <a:rPr sz="1000" b="1">
+                <a:solidFill>
+                  <a:srgbClr val="0A0A0A"/>
+                </a:solidFill>
+              </a:rPr>
+              <a:t>按时还款率</a:t>
+            </a:r>
+            <a:r>
+              <a:rPr sz="800" b="1">
+                <a:solidFill>
+                  <a:srgbClr val="D6A000"/>
+                </a:solidFill>
+              </a:rPr>
+              <a:t>83%</a:t>
+            </a:r>
+          </a:p>
+        </p:txBody>
+      </p:sp>
+      <p:sp>
+        <p:nvSpPr>
+          <p:cNvPr id="159" name="Fa-life-还款日"/>
+          <p:cNvSpPr txBox="1"/>
+          <p:nvPr/>
+        </p:nvSpPr>
+        <p:spPr>
+          <a:xfrm>
+            <a:off x="810733" y="5815203"/>
+            <a:ext cx="1609344" cy="182880"/>
+          </a:xfrm>
+          <a:prstGeom prst="rect">
+            <a:avLst/>
+          </a:prstGeom>
+          <a:noFill/>
+        </p:spPr>
+        <p:txBody>
+          <a:bodyPr wrap="square" lIns="0" tIns="0" rIns="0" bIns="0">
+            <a:spAutoFit/>
+          </a:bodyPr>
+          <a:lstStyle/>
+          <a:p>
+            <a:pPr algn="l">
+              <a:spcAft>
+                <a:spcPts val="0"/>
+              </a:spcAft>
+            </a:pPr>
+            <a:r>
+              <a:rPr sz="1000" b="1">
+                <a:solidFill>
+                  <a:srgbClr val="0A0A0A"/>
+                </a:solidFill>
+              </a:rPr>
+              <a:t>下一还款日</a:t>
+            </a:r>
             <a:r>
               <a:rPr sz="800" b="0">
                 <a:solidFill>
                   <a:srgbClr val="606060"/>
                 </a:solidFill>
               </a:rPr>
-              <a:t>BNPL 20%</a:t>
+              <a:t>2026/05/02</a:t>
+            </a:r>
+          </a:p>
+        </p:txBody>
+      </p:sp>
+      <p:sp>
+        <p:nvSpPr>
+          <p:cNvPr id="160" name="Fa-life-逾期额"/>
+          <p:cNvSpPr txBox="1"/>
+          <p:nvPr/>
+        </p:nvSpPr>
+        <p:spPr>
+          <a:xfrm>
+            <a:off x="2383501" y="5815203"/>
+            <a:ext cx="1609344" cy="182880"/>
+          </a:xfrm>
+          <a:prstGeom prst="rect">
+            <a:avLst/>
+          </a:prstGeom>
+          <a:noFill/>
+        </p:spPr>
+        <p:txBody>
+          <a:bodyPr wrap="square" lIns="0" tIns="0" rIns="0" bIns="0">
+            <a:spAutoFit/>
+          </a:bodyPr>
+          <a:lstStyle/>
+          <a:p>
+            <a:pPr algn="l">
+              <a:spcAft>
+                <a:spcPts val="0"/>
+              </a:spcAft>
+            </a:pPr>
+            <a:r>
+              <a:rPr sz="1000" b="1">
+                <a:solidFill>
+                  <a:srgbClr val="0A0A0A"/>
+                </a:solidFill>
+              </a:rPr>
+              <a:t>当前逾期金额</a:t>
+            </a:r>
+            <a:r>
+              <a:rPr sz="800" b="0">
+                <a:solidFill>
+                  <a:srgbClr val="606060"/>
+                </a:solidFill>
+              </a:rPr>
+              <a:t>A$0</a:t>
+            </a:r>
+          </a:p>
+        </p:txBody>
+      </p:sp>
+      <p:sp>
+        <p:nvSpPr>
+          <p:cNvPr id="161" name="Fa-life-状态"/>
+          <p:cNvSpPr txBox="1"/>
+          <p:nvPr/>
+        </p:nvSpPr>
+        <p:spPr>
+          <a:xfrm>
+            <a:off x="4102517" y="5815203"/>
+            <a:ext cx="1609344" cy="182880"/>
+          </a:xfrm>
+          <a:prstGeom prst="rect">
+            <a:avLst/>
+          </a:prstGeom>
+          <a:noFill/>
+        </p:spPr>
+        <p:txBody>
+          <a:bodyPr wrap="square" lIns="0" tIns="0" rIns="0" bIns="0">
+            <a:spAutoFit/>
+          </a:bodyPr>
+          <a:lstStyle/>
+          <a:p>
+            <a:pPr algn="l">
+              <a:spcAft>
+                <a:spcPts val="0"/>
+              </a:spcAft>
+            </a:pPr>
+            <a:r>
+              <a:rPr sz="1000" b="1">
+                <a:solidFill>
+                  <a:srgbClr val="0A0A0A"/>
+                </a:solidFill>
+              </a:rPr>
+              <a:t>贷款状态</a:t>
+            </a:r>
+            <a:r>
+              <a:rPr sz="800" b="0">
+                <a:solidFill>
+                  <a:srgbClr val="606060"/>
+                </a:solidFill>
+              </a:rPr>
+              <a:t>在贷</a:t>
             </a:r>
           </a:p>
         </p:txBody>

--- a/银行流水分享_V2.0.pptx
+++ b/银行流水分享_V2.0.pptx
@@ -2184,14 +2184,24 @@
               </a:lnSpc>
             </a:pPr>
             <a:r>
-              <a:rPr sz="1400" b="1">
+              <a:rPr sz="1400" b="1" dirty="0">
                 <a:solidFill>
                   <a:srgbClr val="0A0A0A"/>
                 </a:solidFill>
                 <a:latin typeface="微软雅黑"/>
                 <a:ea typeface="微软雅黑"/>
               </a:rPr>
-              <a:t>1. 银行流水在信贷决策中的位置</a:t>
+              <a:t>1. </a:t>
+            </a:r>
+            <a:r>
+              <a:rPr sz="1400" b="1" dirty="0" err="1">
+                <a:solidFill>
+                  <a:srgbClr val="0A0A0A"/>
+                </a:solidFill>
+                <a:latin typeface="微软雅黑"/>
+                <a:ea typeface="微软雅黑"/>
+              </a:rPr>
+              <a:t>银行流水在信贷决策中的位置</a:t>
             </a:r>
             <a:endParaRPr lang="en-US" sz="1400" noProof="1">
               <a:latin typeface="微软雅黑" panose="020B0503020204020204" pitchFamily="34" charset="-122"/>
@@ -2422,7 +2432,7 @@
           <p:nvPr>
             <p:extLst>
               <p:ext uri="{F5677B7D-0D2A-4D9B-9A5C-6D8D7D0E5A5D}">
-                <pptd:line xmlns:pptd="https://kimi-design.msh.team/pptd/2026" xmlns:mc="http://schemas.openxmlformats.org/markup-compatibility/2006" xmlns:m="http://schemas.openxmlformats.org/officeDocument/2006/math" xmlns:cx="http://schemas.microsoft.com/office/drawing/2014/chartex" xmlns:c="http://schemas.openxmlformats.org/drawingml/2006/chart" xmlns:a14="http://schemas.microsoft.com/office/drawing/2010/main" xmlns="" encoding="base64url">eyJ2aWV3Qm94IjpbMSwzNDBdLCJwb2ludHMiOiIwLDAgMCwzNDAifQ</pptd:line>
+                <pptd:line xmlns="" xmlns:a14="http://schemas.microsoft.com/office/drawing/2010/main" xmlns:c="http://schemas.openxmlformats.org/drawingml/2006/chart" xmlns:cx="http://schemas.microsoft.com/office/drawing/2014/chartex" xmlns:m="http://schemas.openxmlformats.org/officeDocument/2006/math" xmlns:mc="http://schemas.openxmlformats.org/markup-compatibility/2006" xmlns:pptd="https://kimi-design.msh.team/pptd/2026" encoding="base64url">eyJ2aWV3Qm94IjpbMSwzNDBdLCJwb2ludHMiOiIwLDAgMCwzNDAifQ</pptd:line>
               </p:ext>
             </p:extLst>
           </p:nvPr>
@@ -2593,7 +2603,7 @@
           <p:nvPr>
             <p:extLst>
               <p:ext uri="{F5677B7D-0D2A-4D9B-9A5C-6D8D7D0E5A5D}">
-                <pptd:line xmlns:pptd="https://kimi-design.msh.team/pptd/2026" xmlns:mc="http://schemas.openxmlformats.org/markup-compatibility/2006" xmlns:m="http://schemas.openxmlformats.org/officeDocument/2006/math" xmlns:cx="http://schemas.microsoft.com/office/drawing/2014/chartex" xmlns:c="http://schemas.openxmlformats.org/drawingml/2006/chart" xmlns:a14="http://schemas.microsoft.com/office/drawing/2010/main" xmlns="" encoding="base64url">eyJ2aWV3Qm94IjpbMzc2LDFdLCJwb2ludHMiOiIwLDAgMzc2LDAifQ</pptd:line>
+                <pptd:line xmlns="" xmlns:a14="http://schemas.microsoft.com/office/drawing/2010/main" xmlns:c="http://schemas.openxmlformats.org/drawingml/2006/chart" xmlns:cx="http://schemas.microsoft.com/office/drawing/2014/chartex" xmlns:m="http://schemas.openxmlformats.org/officeDocument/2006/math" xmlns:mc="http://schemas.openxmlformats.org/markup-compatibility/2006" xmlns:pptd="https://kimi-design.msh.team/pptd/2026" encoding="base64url">eyJ2aWV3Qm94IjpbMzc2LDFdLCJwb2ludHMiOiIwLDAgMzc2LDAifQ</pptd:line>
               </p:ext>
             </p:extLst>
           </p:nvPr>
@@ -2713,7 +2723,7 @@
           <p:nvPr>
             <p:extLst>
               <p:ext uri="{F5677B7D-0D2A-4D9B-9A5C-6D8D7D0E5A5D}">
-                <pptd:line xmlns:pptd="https://kimi-design.msh.team/pptd/2026" xmlns:mc="http://schemas.openxmlformats.org/markup-compatibility/2006" xmlns:m="http://schemas.openxmlformats.org/officeDocument/2006/math" xmlns:cx="http://schemas.microsoft.com/office/drawing/2014/chartex" xmlns:c="http://schemas.openxmlformats.org/drawingml/2006/chart" xmlns:a14="http://schemas.microsoft.com/office/drawing/2010/main" xmlns="" encoding="base64url">eyJ2aWV3Qm94IjpbMzc2LDFdLCJwb2ludHMiOiIwLDAgMzc2LDAifQ</pptd:line>
+                <pptd:line xmlns="" xmlns:a14="http://schemas.microsoft.com/office/drawing/2010/main" xmlns:c="http://schemas.openxmlformats.org/drawingml/2006/chart" xmlns:cx="http://schemas.microsoft.com/office/drawing/2014/chartex" xmlns:m="http://schemas.openxmlformats.org/officeDocument/2006/math" xmlns:mc="http://schemas.openxmlformats.org/markup-compatibility/2006" xmlns:pptd="https://kimi-design.msh.team/pptd/2026" encoding="base64url">eyJ2aWV3Qm94IjpbMzc2LDFdLCJwb2ludHMiOiIwLDAgMzc2LDAifQ</pptd:line>
               </p:ext>
             </p:extLst>
           </p:nvPr>
@@ -2853,7 +2863,7 @@
           <p:nvPr>
             <p:extLst>
               <p:ext uri="{F5677B7D-0D2A-4D9B-9A5C-6D8D7D0E5A5D}">
-                <pptd:line xmlns:pptd="https://kimi-design.msh.team/pptd/2026" xmlns:mc="http://schemas.openxmlformats.org/markup-compatibility/2006" xmlns:m="http://schemas.openxmlformats.org/officeDocument/2006/math" xmlns:cx="http://schemas.microsoft.com/office/drawing/2014/chartex" xmlns:c="http://schemas.openxmlformats.org/drawingml/2006/chart" xmlns:a14="http://schemas.microsoft.com/office/drawing/2010/main" xmlns="" encoding="base64url">eyJ2aWV3Qm94IjpbMzc2LDFdLCJwb2ludHMiOiIwLDAgMzc2LDAifQ</pptd:line>
+                <pptd:line xmlns="" xmlns:a14="http://schemas.microsoft.com/office/drawing/2010/main" xmlns:c="http://schemas.openxmlformats.org/drawingml/2006/chart" xmlns:cx="http://schemas.microsoft.com/office/drawing/2014/chartex" xmlns:m="http://schemas.openxmlformats.org/officeDocument/2006/math" xmlns:mc="http://schemas.openxmlformats.org/markup-compatibility/2006" xmlns:pptd="https://kimi-design.msh.team/pptd/2026" encoding="base64url">eyJ2aWV3Qm94IjpbMzc2LDFdLCJwb2ludHMiOiIwLDAgMzc2LDAifQ</pptd:line>
               </p:ext>
             </p:extLst>
           </p:nvPr>
@@ -3013,7 +3023,7 @@
             <p:nvPr>
               <p:extLst>
                 <p:ext uri="{F5677B7D-0D2A-4D9B-9A5C-6D8D7D0E5A5D}">
-                  <pptd:line xmlns="" xmlns:a14="http://schemas.microsoft.com/office/drawing/2010/main" xmlns:c="http://schemas.openxmlformats.org/drawingml/2006/chart" xmlns:cx="http://schemas.microsoft.com/office/drawing/2014/chartex" xmlns:m="http://schemas.openxmlformats.org/officeDocument/2006/math" xmlns:mc="http://schemas.openxmlformats.org/markup-compatibility/2006" xmlns:pptd="https://kimi-design.msh.team/pptd/2026" encoding="base64url">eyJ2aWV3Qm94IjpbODU2LDFdLCJwb2ludHMiOiIwLDAgODU2LDAifQ</pptd:line>
+                  <pptd:line xmlns:pptd="https://kimi-design.msh.team/pptd/2026" xmlns:mc="http://schemas.openxmlformats.org/markup-compatibility/2006" xmlns:m="http://schemas.openxmlformats.org/officeDocument/2006/math" xmlns:cx="http://schemas.microsoft.com/office/drawing/2014/chartex" xmlns:c="http://schemas.openxmlformats.org/drawingml/2006/chart" xmlns:a14="http://schemas.microsoft.com/office/drawing/2010/main" xmlns="" encoding="base64url">eyJ2aWV3Qm94IjpbODU2LDFdLCJwb2ludHMiOiIwLDAgODU2LDAifQ</pptd:line>
                 </p:ext>
               </p:extLst>
             </p:nvPr>
@@ -6436,7 +6446,7 @@
               </a:defRPr>
             </a:pPr>
             <a:r>
-              <a:rPr kumimoji="0" lang="en-US" altLang="zh-CN" sz="1200" b="1" i="0" u="none" strike="noStrike" kern="1200" cap="none" spc="0" normalizeH="0" baseline="0" noProof="0" dirty="0">
+              <a:rPr kumimoji="0" lang="en-US" altLang="zh-CN" sz="1400" b="1" i="0" u="none" strike="noStrike" kern="1200" cap="none" spc="0" normalizeH="0" baseline="0" noProof="0" dirty="0">
                 <a:ln>
                   <a:noFill/>
                 </a:ln>
@@ -6453,7 +6463,7 @@
               <a:t>1. </a:t>
             </a:r>
             <a:r>
-              <a:rPr kumimoji="0" lang="zh-CN" altLang="en-US" sz="1200" b="1" i="0" u="none" strike="noStrike" kern="1200" cap="none" spc="0" normalizeH="0" baseline="0" noProof="0" dirty="0">
+              <a:rPr kumimoji="0" lang="zh-CN" altLang="en-US" sz="1400" b="1" i="0" u="none" strike="noStrike" kern="1200" cap="none" spc="0" normalizeH="0" baseline="0" noProof="0" dirty="0">
                 <a:ln>
                   <a:noFill/>
                 </a:ln>
@@ -6469,7 +6479,7 @@
               </a:rPr>
               <a:t>交易明细维度：理解每一笔交易（输出示例）</a:t>
             </a:r>
-            <a:endParaRPr kumimoji="0" lang="en-US" sz="1200" b="1" i="0" u="none" strike="noStrike" kern="1200" cap="none" spc="0" normalizeH="0" baseline="0" noProof="1">
+            <a:endParaRPr kumimoji="0" lang="en-US" sz="1400" b="1" i="0" u="none" strike="noStrike" kern="1200" cap="none" spc="0" normalizeH="0" baseline="0" noProof="1">
               <a:ln>
                 <a:noFill/>
               </a:ln>
@@ -6500,7 +6510,7 @@
         </p:nvSpPr>
         <p:spPr>
           <a:xfrm>
-            <a:off x="687257" y="3124973"/>
+            <a:off x="619505" y="2970098"/>
             <a:ext cx="5943600" cy="228600"/>
           </a:xfrm>
           <a:prstGeom prst="rect">
@@ -6536,7 +6546,7 @@
               </a:defRPr>
             </a:pPr>
             <a:r>
-              <a:rPr kumimoji="0" lang="en-US" altLang="zh-CN" sz="1200" b="1" i="0" u="none" strike="noStrike" kern="1200" cap="none" spc="0" normalizeH="0" baseline="0" noProof="0" dirty="0">
+              <a:rPr kumimoji="0" lang="en-US" altLang="zh-CN" sz="1400" b="1" i="0" u="none" strike="noStrike" kern="1200" cap="none" spc="0" normalizeH="0" baseline="0" noProof="0" dirty="0">
                 <a:ln>
                   <a:noFill/>
                 </a:ln>
@@ -6553,7 +6563,7 @@
               <a:t>2. </a:t>
             </a:r>
             <a:r>
-              <a:rPr kumimoji="0" lang="zh-CN" altLang="en-US" sz="1200" b="1" i="0" u="none" strike="noStrike" kern="1200" cap="none" spc="0" normalizeH="0" baseline="0" noProof="0" dirty="0">
+              <a:rPr kumimoji="0" lang="zh-CN" altLang="en-US" sz="1400" b="1" i="0" u="none" strike="noStrike" kern="1200" cap="none" spc="0" normalizeH="0" baseline="0" noProof="0" dirty="0">
                 <a:ln>
                   <a:noFill/>
                 </a:ln>
@@ -6569,7 +6579,7 @@
               </a:rPr>
               <a:t>用户汇总维度：形成完整负债画像（输出示例）</a:t>
             </a:r>
-            <a:endParaRPr kumimoji="0" lang="en-US" sz="1200" b="1" i="0" u="none" strike="noStrike" kern="1200" cap="none" spc="0" normalizeH="0" baseline="0" noProof="1">
+            <a:endParaRPr kumimoji="0" lang="en-US" sz="1400" b="1" i="0" u="none" strike="noStrike" kern="1200" cap="none" spc="0" normalizeH="0" baseline="0" noProof="1">
               <a:ln>
                 <a:noFill/>
               </a:ln>
@@ -6601,13 +6611,13 @@
           <p:nvPr>
             <p:extLst>
               <p:ext uri="{D42A27DB-BD31-4B8C-83A1-F6EECF244321}">
-                <p14:modId xmlns:p14="http://schemas.microsoft.com/office/powerpoint/2010/main" val="3084545460"/>
+                <p14:modId xmlns:p14="http://schemas.microsoft.com/office/powerpoint/2010/main" val="2240519333"/>
               </p:ext>
             </p:extLst>
           </p:nvPr>
         </p:nvGraphicFramePr>
         <p:xfrm>
-          <a:off x="617523" y="1630400"/>
+          <a:off x="617523" y="1439101"/>
           <a:ext cx="10883342" cy="1335402"/>
         </p:xfrm>
         <a:graphic>
@@ -8908,136 +8918,157 @@
           </a:graphicData>
         </a:graphic>
       </p:graphicFrame>
-      <p:sp>
-        <p:nvSpPr>
-          <p:cNvPr id="31" name="concl-bar"/>
-          <p:cNvSpPr/>
+      <p:grpSp>
+        <p:nvGrpSpPr>
+          <p:cNvPr id="4" name="组合 3">
+            <a:extLst>
+              <a:ext uri="{FF2B5EF4-FFF2-40B4-BE49-F238E27FC236}">
+                <a16:creationId xmlns:a16="http://schemas.microsoft.com/office/drawing/2014/main" id="{0714094E-D0AD-45FC-B1D7-9DC3D6BC3914}"/>
+              </a:ext>
+            </a:extLst>
+          </p:cNvPr>
+          <p:cNvGrpSpPr/>
           <p:nvPr/>
-        </p:nvSpPr>
-        <p:spPr>
+        </p:nvGrpSpPr>
+        <p:grpSpPr>
           <a:xfrm>
-            <a:off x="685800" y="6096875"/>
+            <a:off x="609092" y="6117909"/>
             <a:ext cx="11045952" cy="402336"/>
+            <a:chOff x="685800" y="6096875"/>
+            <a:chExt cx="11045952" cy="402336"/>
           </a:xfrm>
-          <a:prstGeom prst="rect">
-            <a:avLst/>
-          </a:prstGeom>
-          <a:solidFill>
-            <a:srgbClr val="FAF3E0"/>
-          </a:solidFill>
-          <a:ln>
+        </p:grpSpPr>
+        <p:sp>
+          <p:nvSpPr>
+            <p:cNvPr id="31" name="concl-bar"/>
+            <p:cNvSpPr/>
+            <p:nvPr/>
+          </p:nvSpPr>
+          <p:spPr>
+            <a:xfrm>
+              <a:off x="685800" y="6096875"/>
+              <a:ext cx="11045952" cy="402336"/>
+            </a:xfrm>
+            <a:prstGeom prst="rect">
+              <a:avLst/>
+            </a:prstGeom>
+            <a:solidFill>
+              <a:srgbClr val="FAF3E0"/>
+            </a:solidFill>
+            <a:ln>
+              <a:noFill/>
+            </a:ln>
+            <a:effectLst/>
+          </p:spPr>
+          <p:style>
+            <a:lnRef idx="1">
+              <a:schemeClr val="accent1"/>
+            </a:lnRef>
+            <a:fillRef idx="3">
+              <a:schemeClr val="accent1"/>
+            </a:fillRef>
+            <a:effectRef idx="2">
+              <a:schemeClr val="accent1"/>
+            </a:effectRef>
+            <a:fontRef idx="minor">
+              <a:schemeClr val="lt1"/>
+            </a:fontRef>
+          </p:style>
+          <p:txBody>
+            <a:bodyPr rtlCol="0" anchor="ctr"/>
+            <a:lstStyle/>
+            <a:p>
+              <a:pPr algn="ctr"/>
+              <a:endParaRPr/>
+            </a:p>
+          </p:txBody>
+        </p:sp>
+        <p:sp>
+          <p:nvSpPr>
+            <p:cNvPr id="32" name="concl-bar-line"/>
+            <p:cNvSpPr/>
+            <p:nvPr/>
+          </p:nvSpPr>
+          <p:spPr>
+            <a:xfrm>
+              <a:off x="685800" y="6096875"/>
+              <a:ext cx="64008" cy="402336"/>
+            </a:xfrm>
+            <a:prstGeom prst="rect">
+              <a:avLst/>
+            </a:prstGeom>
+            <a:solidFill>
+              <a:srgbClr val="D6A000"/>
+            </a:solidFill>
+            <a:ln>
+              <a:noFill/>
+            </a:ln>
+            <a:effectLst/>
+          </p:spPr>
+          <p:style>
+            <a:lnRef idx="1">
+              <a:schemeClr val="accent1"/>
+            </a:lnRef>
+            <a:fillRef idx="3">
+              <a:schemeClr val="accent1"/>
+            </a:fillRef>
+            <a:effectRef idx="2">
+              <a:schemeClr val="accent1"/>
+            </a:effectRef>
+            <a:fontRef idx="minor">
+              <a:schemeClr val="lt1"/>
+            </a:fontRef>
+          </p:style>
+          <p:txBody>
+            <a:bodyPr rtlCol="0" anchor="ctr"/>
+            <a:lstStyle/>
+            <a:p>
+              <a:pPr algn="ctr"/>
+              <a:endParaRPr/>
+            </a:p>
+          </p:txBody>
+        </p:sp>
+        <p:sp>
+          <p:nvSpPr>
+            <p:cNvPr id="33" name="concl-text"/>
+            <p:cNvSpPr txBox="1"/>
+            <p:nvPr/>
+          </p:nvSpPr>
+          <p:spPr>
+            <a:xfrm>
+              <a:off x="868680" y="6208889"/>
+              <a:ext cx="10698480" cy="169277"/>
+            </a:xfrm>
+            <a:prstGeom prst="rect">
+              <a:avLst/>
+            </a:prstGeom>
             <a:noFill/>
-          </a:ln>
-          <a:effectLst/>
-        </p:spPr>
-        <p:style>
-          <a:lnRef idx="1">
-            <a:schemeClr val="accent1"/>
-          </a:lnRef>
-          <a:fillRef idx="3">
-            <a:schemeClr val="accent1"/>
-          </a:fillRef>
-          <a:effectRef idx="2">
-            <a:schemeClr val="accent1"/>
-          </a:effectRef>
-          <a:fontRef idx="minor">
-            <a:schemeClr val="lt1"/>
-          </a:fontRef>
-        </p:style>
-        <p:txBody>
-          <a:bodyPr rtlCol="0" anchor="ctr"/>
-          <a:lstStyle/>
-          <a:p>
-            <a:pPr algn="ctr"/>
-            <a:endParaRPr/>
-          </a:p>
-        </p:txBody>
-      </p:sp>
-      <p:sp>
-        <p:nvSpPr>
-          <p:cNvPr id="32" name="concl-bar-line"/>
-          <p:cNvSpPr/>
-          <p:nvPr/>
-        </p:nvSpPr>
-        <p:spPr>
-          <a:xfrm>
-            <a:off x="685800" y="6096875"/>
-            <a:ext cx="64008" cy="402336"/>
-          </a:xfrm>
-          <a:prstGeom prst="rect">
-            <a:avLst/>
-          </a:prstGeom>
-          <a:solidFill>
-            <a:srgbClr val="D6A000"/>
-          </a:solidFill>
-          <a:ln>
-            <a:noFill/>
-          </a:ln>
-          <a:effectLst/>
-        </p:spPr>
-        <p:style>
-          <a:lnRef idx="1">
-            <a:schemeClr val="accent1"/>
-          </a:lnRef>
-          <a:fillRef idx="3">
-            <a:schemeClr val="accent1"/>
-          </a:fillRef>
-          <a:effectRef idx="2">
-            <a:schemeClr val="accent1"/>
-          </a:effectRef>
-          <a:fontRef idx="minor">
-            <a:schemeClr val="lt1"/>
-          </a:fontRef>
-        </p:style>
-        <p:txBody>
-          <a:bodyPr rtlCol="0" anchor="ctr"/>
-          <a:lstStyle/>
-          <a:p>
-            <a:pPr algn="ctr"/>
-            <a:endParaRPr/>
-          </a:p>
-        </p:txBody>
-      </p:sp>
-      <p:sp>
-        <p:nvSpPr>
-          <p:cNvPr id="33" name="concl-text"/>
-          <p:cNvSpPr txBox="1"/>
-          <p:nvPr/>
-        </p:nvSpPr>
-        <p:spPr>
-          <a:xfrm>
-            <a:off x="868680" y="6208889"/>
-            <a:ext cx="10698480" cy="169277"/>
-          </a:xfrm>
-          <a:prstGeom prst="rect">
-            <a:avLst/>
-          </a:prstGeom>
-          <a:noFill/>
-        </p:spPr>
-        <p:txBody>
-          <a:bodyPr wrap="square" lIns="0" tIns="0" rIns="0" bIns="0">
-            <a:spAutoFit/>
-          </a:bodyPr>
-          <a:lstStyle/>
-          <a:p>
-            <a:pPr>
-              <a:lnSpc>
-                <a:spcPct val="100000"/>
-              </a:lnSpc>
-            </a:pPr>
-            <a:r>
-              <a:rPr lang="zh-CN" sz="1100" b="1" dirty="0">
-                <a:solidFill>
-                  <a:srgbClr val="0A0A0A"/>
-                </a:solidFill>
-                <a:latin typeface="微软雅黑"/>
-                <a:ea typeface="微软雅黑"/>
-              </a:rPr>
-              <a:t>负债金额 + 借贷行为 + 还款表现 + 产品定价，共同还原客户真实偿债压力与信用行为。</a:t>
-            </a:r>
-          </a:p>
-        </p:txBody>
-      </p:sp>
+          </p:spPr>
+          <p:txBody>
+            <a:bodyPr wrap="square" lIns="0" tIns="0" rIns="0" bIns="0">
+              <a:spAutoFit/>
+            </a:bodyPr>
+            <a:lstStyle/>
+            <a:p>
+              <a:pPr>
+                <a:lnSpc>
+                  <a:spcPct val="100000"/>
+                </a:lnSpc>
+              </a:pPr>
+              <a:r>
+                <a:rPr lang="zh-CN" sz="1100" b="1" dirty="0">
+                  <a:solidFill>
+                    <a:srgbClr val="0A0A0A"/>
+                  </a:solidFill>
+                  <a:latin typeface="微软雅黑"/>
+                  <a:ea typeface="微软雅黑"/>
+                </a:rPr>
+                <a:t>负债金额 + 借贷行为 + 还款表现 + 产品定价，共同还原客户真实偿债压力与信用行为。</a:t>
+              </a:r>
+            </a:p>
+          </p:txBody>
+        </p:sp>
+      </p:grpSp>
       <p:sp>
         <p:nvSpPr>
           <p:cNvPr id="49" name="s2-bar"/>
@@ -9091,7 +9122,7 @@
         </p:nvSpPr>
         <p:spPr>
           <a:xfrm>
-            <a:off x="512064" y="3122433"/>
+            <a:off x="444312" y="2967558"/>
             <a:ext cx="76200" cy="228600"/>
           </a:xfrm>
           <a:prstGeom prst="rect">
@@ -9136,7 +9167,7 @@
         </p:nvSpPr>
         <p:spPr>
           <a:xfrm>
-            <a:off x="6199820" y="3460431"/>
+            <a:off x="6132068" y="3374136"/>
             <a:ext cx="5376672" cy="54864"/>
           </a:xfrm>
           <a:prstGeom prst="rect">
@@ -9181,7 +9212,7 @@
         </p:nvSpPr>
         <p:spPr>
           <a:xfrm>
-            <a:off x="6382700" y="3561015"/>
+            <a:off x="6314948" y="3474720"/>
             <a:ext cx="5010912" cy="201168"/>
           </a:xfrm>
           <a:prstGeom prst="rect">
@@ -9211,546 +9242,13 @@
       </p:sp>
       <p:sp>
         <p:nvSpPr>
-          <p:cNvPr id="116" name="用户-m1-t"/>
-          <p:cNvSpPr txBox="1"/>
-          <p:nvPr/>
-        </p:nvSpPr>
-        <p:spPr>
-          <a:xfrm>
-            <a:off x="6400989" y="3949836"/>
-            <a:ext cx="1645920" cy="182880"/>
-          </a:xfrm>
-          <a:prstGeom prst="rect">
-            <a:avLst/>
-          </a:prstGeom>
-          <a:noFill/>
-        </p:spPr>
-        <p:txBody>
-          <a:bodyPr wrap="square" lIns="0" tIns="0" rIns="0" bIns="0">
-            <a:spAutoFit/>
-          </a:bodyPr>
-          <a:lstStyle/>
-          <a:p>
-            <a:pPr algn="l">
-              <a:spcAft>
-                <a:spcPts val="0"/>
-              </a:spcAft>
-            </a:pPr>
-            <a:r>
-              <a:rPr sz="1000" b="1" dirty="0" err="1">
-                <a:solidFill>
-                  <a:srgbClr val="1F4E79"/>
-                </a:solidFill>
-              </a:rPr>
-              <a:t>负债情况</a:t>
-            </a:r>
-            <a:endParaRPr sz="1000" b="1" dirty="0">
-              <a:solidFill>
-                <a:srgbClr val="1F4E79"/>
-              </a:solidFill>
-            </a:endParaRPr>
-          </a:p>
-        </p:txBody>
-      </p:sp>
-      <p:sp>
-        <p:nvSpPr>
-          <p:cNvPr id="117" name="用户-m1-1"/>
-          <p:cNvSpPr txBox="1"/>
-          <p:nvPr/>
-        </p:nvSpPr>
-        <p:spPr>
-          <a:xfrm>
-            <a:off x="6400989" y="4151003"/>
-            <a:ext cx="1737360" cy="201168"/>
-          </a:xfrm>
-          <a:prstGeom prst="rect">
-            <a:avLst/>
-          </a:prstGeom>
-          <a:noFill/>
-        </p:spPr>
-        <p:txBody>
-          <a:bodyPr wrap="square" lIns="0" tIns="0" rIns="0" bIns="0">
-            <a:spAutoFit/>
-          </a:bodyPr>
-          <a:lstStyle/>
-          <a:p>
-            <a:pPr algn="l">
-              <a:spcAft>
-                <a:spcPts val="0"/>
-              </a:spcAft>
-            </a:pPr>
-            <a:r>
-              <a:rPr sz="1000" b="1">
-                <a:solidFill>
-                  <a:srgbClr val="0A0A0A"/>
-                </a:solidFill>
-              </a:rPr>
-              <a:t>预计待还</a:t>
-            </a:r>
-            <a:r>
-              <a:rPr sz="800" b="0">
-                <a:solidFill>
-                  <a:srgbClr val="606060"/>
-                </a:solidFill>
-              </a:rPr>
-              <a:t>A$1,016</a:t>
-            </a:r>
-          </a:p>
-        </p:txBody>
-      </p:sp>
-      <p:sp>
-        <p:nvSpPr>
-          <p:cNvPr id="118" name="用户-m1-2"/>
-          <p:cNvSpPr txBox="1"/>
-          <p:nvPr/>
-        </p:nvSpPr>
-        <p:spPr>
-          <a:xfrm>
-            <a:off x="6400989" y="4388747"/>
-            <a:ext cx="1737360" cy="201168"/>
-          </a:xfrm>
-          <a:prstGeom prst="rect">
-            <a:avLst/>
-          </a:prstGeom>
-          <a:noFill/>
-        </p:spPr>
-        <p:txBody>
-          <a:bodyPr wrap="square" lIns="0" tIns="0" rIns="0" bIns="0">
-            <a:spAutoFit/>
-          </a:bodyPr>
-          <a:lstStyle/>
-          <a:p>
-            <a:pPr algn="l">
-              <a:spcAft>
-                <a:spcPts val="0"/>
-              </a:spcAft>
-            </a:pPr>
-            <a:r>
-              <a:rPr sz="1000" b="1">
-                <a:solidFill>
-                  <a:srgbClr val="0A0A0A"/>
-                </a:solidFill>
-              </a:rPr>
-              <a:t>平均月还款</a:t>
-            </a:r>
-            <a:r>
-              <a:rPr sz="800" b="0">
-                <a:solidFill>
-                  <a:srgbClr val="606060"/>
-                </a:solidFill>
-              </a:rPr>
-              <a:t>A$428</a:t>
-            </a:r>
-          </a:p>
-        </p:txBody>
-      </p:sp>
-      <p:sp>
-        <p:nvSpPr>
-          <p:cNvPr id="119" name="用户-m1-3"/>
-          <p:cNvSpPr txBox="1"/>
-          <p:nvPr/>
-        </p:nvSpPr>
-        <p:spPr>
-          <a:xfrm>
-            <a:off x="6400989" y="4626491"/>
-            <a:ext cx="1737360" cy="201168"/>
-          </a:xfrm>
-          <a:prstGeom prst="rect">
-            <a:avLst/>
-          </a:prstGeom>
-          <a:noFill/>
-        </p:spPr>
-        <p:txBody>
-          <a:bodyPr wrap="square" lIns="0" tIns="0" rIns="0" bIns="0">
-            <a:spAutoFit/>
-          </a:bodyPr>
-          <a:lstStyle/>
-          <a:p>
-            <a:pPr algn="l">
-              <a:spcAft>
-                <a:spcPts val="0"/>
-              </a:spcAft>
-            </a:pPr>
-            <a:r>
-              <a:rPr sz="1000" b="1">
-                <a:solidFill>
-                  <a:srgbClr val="0A0A0A"/>
-                </a:solidFill>
-              </a:rPr>
-              <a:t>贷款机构</a:t>
-            </a:r>
-            <a:r>
-              <a:rPr sz="800" b="0">
-                <a:solidFill>
-                  <a:srgbClr val="606060"/>
-                </a:solidFill>
-              </a:rPr>
-              <a:t>2 家</a:t>
-            </a:r>
-          </a:p>
-        </p:txBody>
-      </p:sp>
-      <p:sp>
-        <p:nvSpPr>
-          <p:cNvPr id="121" name="用户-m2-t"/>
-          <p:cNvSpPr txBox="1"/>
-          <p:nvPr/>
-        </p:nvSpPr>
-        <p:spPr>
-          <a:xfrm>
-            <a:off x="8165780" y="3949836"/>
-            <a:ext cx="1645920" cy="182880"/>
-          </a:xfrm>
-          <a:prstGeom prst="rect">
-            <a:avLst/>
-          </a:prstGeom>
-          <a:noFill/>
-        </p:spPr>
-        <p:txBody>
-          <a:bodyPr wrap="square" lIns="0" tIns="0" rIns="0" bIns="0">
-            <a:spAutoFit/>
-          </a:bodyPr>
-          <a:lstStyle/>
-          <a:p>
-            <a:pPr algn="l">
-              <a:spcAft>
-                <a:spcPts val="0"/>
-              </a:spcAft>
-            </a:pPr>
-            <a:r>
-              <a:rPr sz="1000" b="1">
-                <a:solidFill>
-                  <a:srgbClr val="1F4E79"/>
-                </a:solidFill>
-              </a:rPr>
-              <a:t>履约表现</a:t>
-            </a:r>
-          </a:p>
-        </p:txBody>
-      </p:sp>
-      <p:sp>
-        <p:nvSpPr>
-          <p:cNvPr id="122" name="用户-m2-1"/>
-          <p:cNvSpPr txBox="1"/>
-          <p:nvPr/>
-        </p:nvSpPr>
-        <p:spPr>
-          <a:xfrm>
-            <a:off x="8165780" y="4151003"/>
-            <a:ext cx="1737360" cy="201168"/>
-          </a:xfrm>
-          <a:prstGeom prst="rect">
-            <a:avLst/>
-          </a:prstGeom>
-          <a:noFill/>
-        </p:spPr>
-        <p:txBody>
-          <a:bodyPr wrap="square" lIns="0" tIns="0" rIns="0" bIns="0">
-            <a:spAutoFit/>
-          </a:bodyPr>
-          <a:lstStyle/>
-          <a:p>
-            <a:pPr algn="l">
-              <a:spcAft>
-                <a:spcPts val="0"/>
-              </a:spcAft>
-            </a:pPr>
-            <a:r>
-              <a:rPr sz="1000" b="1" dirty="0">
-                <a:solidFill>
-                  <a:srgbClr val="0A0A0A"/>
-                </a:solidFill>
-              </a:rPr>
-              <a:t>90 天还款</a:t>
-            </a:r>
-            <a:r>
-              <a:rPr sz="800" b="0" dirty="0">
-                <a:solidFill>
-                  <a:srgbClr val="606060"/>
-                </a:solidFill>
-              </a:rPr>
-              <a:t>9 次</a:t>
-            </a:r>
-          </a:p>
-        </p:txBody>
-      </p:sp>
-      <p:sp>
-        <p:nvSpPr>
-          <p:cNvPr id="123" name="用户-m2-2"/>
-          <p:cNvSpPr txBox="1"/>
-          <p:nvPr/>
-        </p:nvSpPr>
-        <p:spPr>
-          <a:xfrm>
-            <a:off x="8165780" y="4388747"/>
-            <a:ext cx="1737360" cy="201168"/>
-          </a:xfrm>
-          <a:prstGeom prst="rect">
-            <a:avLst/>
-          </a:prstGeom>
-          <a:noFill/>
-        </p:spPr>
-        <p:txBody>
-          <a:bodyPr wrap="square" lIns="0" tIns="0" rIns="0" bIns="0">
-            <a:spAutoFit/>
-          </a:bodyPr>
-          <a:lstStyle/>
-          <a:p>
-            <a:pPr algn="l">
-              <a:spcAft>
-                <a:spcPts val="0"/>
-              </a:spcAft>
-            </a:pPr>
-            <a:r>
-              <a:rPr sz="1000" b="1">
-                <a:solidFill>
-                  <a:srgbClr val="0A0A0A"/>
-                </a:solidFill>
-              </a:rPr>
-              <a:t>还款中断</a:t>
-            </a:r>
-            <a:r>
-              <a:rPr sz="800" b="0">
-                <a:solidFill>
-                  <a:srgbClr val="606060"/>
-                </a:solidFill>
-              </a:rPr>
-              <a:t>无</a:t>
-            </a:r>
-          </a:p>
-        </p:txBody>
-      </p:sp>
-      <p:sp>
-        <p:nvSpPr>
-          <p:cNvPr id="124" name="用户-m2-3"/>
-          <p:cNvSpPr txBox="1"/>
-          <p:nvPr/>
-        </p:nvSpPr>
-        <p:spPr>
-          <a:xfrm>
-            <a:off x="8165780" y="4626491"/>
-            <a:ext cx="1737360" cy="201168"/>
-          </a:xfrm>
-          <a:prstGeom prst="rect">
-            <a:avLst/>
-          </a:prstGeom>
-          <a:noFill/>
-        </p:spPr>
-        <p:txBody>
-          <a:bodyPr wrap="square" lIns="0" tIns="0" rIns="0" bIns="0">
-            <a:spAutoFit/>
-          </a:bodyPr>
-          <a:lstStyle/>
-          <a:p>
-            <a:pPr algn="l">
-              <a:spcAft>
-                <a:spcPts val="0"/>
-              </a:spcAft>
-            </a:pPr>
-            <a:r>
-              <a:rPr sz="1000" b="1" dirty="0">
-                <a:solidFill>
-                  <a:srgbClr val="0A0A0A"/>
-                </a:solidFill>
-              </a:rPr>
-              <a:t>近 90 天新增借款</a:t>
-            </a:r>
-            <a:r>
-              <a:rPr sz="800" b="0" dirty="0">
-                <a:solidFill>
-                  <a:srgbClr val="606060"/>
-                </a:solidFill>
-              </a:rPr>
-              <a:t>1 笔</a:t>
-            </a:r>
-          </a:p>
-        </p:txBody>
-      </p:sp>
-      <p:sp>
-        <p:nvSpPr>
-          <p:cNvPr id="126" name="用户-m3-t"/>
-          <p:cNvSpPr txBox="1"/>
-          <p:nvPr/>
-        </p:nvSpPr>
-        <p:spPr>
-          <a:xfrm>
-            <a:off x="9994392" y="3941978"/>
-            <a:ext cx="1645920" cy="182880"/>
-          </a:xfrm>
-          <a:prstGeom prst="rect">
-            <a:avLst/>
-          </a:prstGeom>
-          <a:noFill/>
-        </p:spPr>
-        <p:txBody>
-          <a:bodyPr wrap="square" lIns="0" tIns="0" rIns="0" bIns="0">
-            <a:spAutoFit/>
-          </a:bodyPr>
-          <a:lstStyle/>
-          <a:p>
-            <a:pPr algn="l">
-              <a:spcAft>
-                <a:spcPts val="0"/>
-              </a:spcAft>
-            </a:pPr>
-            <a:r>
-              <a:rPr sz="1000" b="1">
-                <a:solidFill>
-                  <a:srgbClr val="1F4E79"/>
-                </a:solidFill>
-              </a:rPr>
-              <a:t>风险信号</a:t>
-            </a:r>
-          </a:p>
-        </p:txBody>
-      </p:sp>
-      <p:sp>
-        <p:nvSpPr>
-          <p:cNvPr id="127" name="用户-m3-1"/>
-          <p:cNvSpPr txBox="1"/>
-          <p:nvPr/>
-        </p:nvSpPr>
-        <p:spPr>
-          <a:xfrm>
-            <a:off x="9994392" y="4143145"/>
-            <a:ext cx="1737360" cy="201168"/>
-          </a:xfrm>
-          <a:prstGeom prst="rect">
-            <a:avLst/>
-          </a:prstGeom>
-          <a:noFill/>
-        </p:spPr>
-        <p:txBody>
-          <a:bodyPr wrap="square" lIns="0" tIns="0" rIns="0" bIns="0">
-            <a:spAutoFit/>
-          </a:bodyPr>
-          <a:lstStyle/>
-          <a:p>
-            <a:pPr algn="l">
-              <a:spcAft>
-                <a:spcPts val="0"/>
-              </a:spcAft>
-            </a:pPr>
-            <a:r>
-              <a:rPr sz="1000" b="1">
-                <a:solidFill>
-                  <a:srgbClr val="0A0A0A"/>
-                </a:solidFill>
-              </a:rPr>
-              <a:t>轻微逾期</a:t>
-            </a:r>
-            <a:r>
-              <a:rPr sz="800" b="1">
-                <a:solidFill>
-                  <a:srgbClr val="D6A000"/>
-                </a:solidFill>
-              </a:rPr>
-              <a:t>1 次</a:t>
-            </a:r>
-          </a:p>
-        </p:txBody>
-      </p:sp>
-      <p:sp>
-        <p:nvSpPr>
-          <p:cNvPr id="128" name="用户-m3-2"/>
-          <p:cNvSpPr txBox="1"/>
-          <p:nvPr/>
-        </p:nvSpPr>
-        <p:spPr>
-          <a:xfrm>
-            <a:off x="9994392" y="4380889"/>
-            <a:ext cx="1737360" cy="201168"/>
-          </a:xfrm>
-          <a:prstGeom prst="rect">
-            <a:avLst/>
-          </a:prstGeom>
-          <a:noFill/>
-        </p:spPr>
-        <p:txBody>
-          <a:bodyPr wrap="square" lIns="0" tIns="0" rIns="0" bIns="0">
-            <a:spAutoFit/>
-          </a:bodyPr>
-          <a:lstStyle/>
-          <a:p>
-            <a:pPr algn="l">
-              <a:spcAft>
-                <a:spcPts val="0"/>
-              </a:spcAft>
-            </a:pPr>
-            <a:r>
-              <a:rPr sz="1000" b="1">
-                <a:solidFill>
-                  <a:srgbClr val="0A0A0A"/>
-                </a:solidFill>
-              </a:rPr>
-              <a:t>扣款失败率</a:t>
-            </a:r>
-            <a:r>
-              <a:rPr sz="800" b="1">
-                <a:solidFill>
-                  <a:srgbClr val="D6A000"/>
-                </a:solidFill>
-              </a:rPr>
-              <a:t>11%</a:t>
-            </a:r>
-          </a:p>
-        </p:txBody>
-      </p:sp>
-      <p:sp>
-        <p:nvSpPr>
-          <p:cNvPr id="129" name="用户-m3-3"/>
-          <p:cNvSpPr txBox="1"/>
-          <p:nvPr/>
-        </p:nvSpPr>
-        <p:spPr>
-          <a:xfrm>
-            <a:off x="9994392" y="4618633"/>
-            <a:ext cx="1737360" cy="201168"/>
-          </a:xfrm>
-          <a:prstGeom prst="rect">
-            <a:avLst/>
-          </a:prstGeom>
-          <a:noFill/>
-        </p:spPr>
-        <p:txBody>
-          <a:bodyPr wrap="square" lIns="0" tIns="0" rIns="0" bIns="0">
-            <a:spAutoFit/>
-          </a:bodyPr>
-          <a:lstStyle/>
-          <a:p>
-            <a:pPr algn="l">
-              <a:spcAft>
-                <a:spcPts val="0"/>
-              </a:spcAft>
-            </a:pPr>
-            <a:r>
-              <a:rPr sz="1000" b="1" dirty="0">
-                <a:solidFill>
-                  <a:srgbClr val="0A0A0A"/>
-                </a:solidFill>
-              </a:rPr>
-              <a:t>90 天借款</a:t>
-            </a:r>
-            <a:r>
-              <a:rPr sz="800" b="0" dirty="0">
-                <a:solidFill>
-                  <a:srgbClr val="606060"/>
-                </a:solidFill>
-              </a:rPr>
-              <a:t>A$2,300</a:t>
-            </a:r>
-          </a:p>
-        </p:txBody>
-      </p:sp>
-      <p:sp>
-        <p:nvSpPr>
           <p:cNvPr id="25" name="Fa-bar"/>
           <p:cNvSpPr/>
           <p:nvPr/>
         </p:nvSpPr>
         <p:spPr>
           <a:xfrm>
-            <a:off x="687257" y="3460431"/>
+            <a:off x="619505" y="3374136"/>
             <a:ext cx="5376672" cy="54864"/>
           </a:xfrm>
           <a:prstGeom prst="rect">
@@ -9795,7 +9293,7 @@
         </p:nvSpPr>
         <p:spPr>
           <a:xfrm>
-            <a:off x="870137" y="3561015"/>
+            <a:off x="802385" y="3474720"/>
             <a:ext cx="5010912" cy="201168"/>
           </a:xfrm>
           <a:prstGeom prst="rect">
@@ -9825,1713 +9323,4058 @@
       </p:sp>
       <p:sp>
         <p:nvSpPr>
-          <p:cNvPr id="82" name="Fa-life1-lab"/>
-          <p:cNvSpPr txBox="1"/>
+          <p:cNvPr id="68" name="Text 76">
+            <a:extLst>
+              <a:ext uri="{FF2B5EF4-FFF2-40B4-BE49-F238E27FC236}">
+                <a16:creationId xmlns:a16="http://schemas.microsoft.com/office/drawing/2014/main" id="{DA569152-5E9B-44F7-BABB-9AFFF7FA5036}"/>
+              </a:ext>
+            </a:extLst>
+          </p:cNvPr>
+          <p:cNvSpPr/>
           <p:nvPr/>
         </p:nvSpPr>
         <p:spPr>
           <a:xfrm>
-            <a:off x="825242" y="4966143"/>
-            <a:ext cx="1463040" cy="146304"/>
+            <a:off x="747655" y="4138894"/>
+            <a:ext cx="731520" cy="164592"/>
           </a:xfrm>
           <a:prstGeom prst="rect">
             <a:avLst/>
           </a:prstGeom>
           <a:noFill/>
+          <a:ln/>
         </p:spPr>
         <p:txBody>
-          <a:bodyPr wrap="square" lIns="0" tIns="0" rIns="0" bIns="0">
-            <a:noAutofit/>
+          <a:bodyPr wrap="square" lIns="0" tIns="0" rIns="0" bIns="0" rtlCol="0" anchor="ctr">
+            <a:normAutofit/>
           </a:bodyPr>
           <a:lstStyle/>
           <a:p>
-            <a:r>
-              <a:rPr sz="900" b="1" dirty="0" err="1"/>
-              <a:t>借款金额</a:t>
-            </a:r>
-            <a:endParaRPr sz="900" b="1" dirty="0"/>
-          </a:p>
-        </p:txBody>
-      </p:sp>
-      <p:sp>
-        <p:nvSpPr>
-          <p:cNvPr id="83" name="Fa-life1"/>
-          <p:cNvSpPr txBox="1"/>
-          <p:nvPr/>
-        </p:nvSpPr>
-        <p:spPr>
-          <a:xfrm>
-            <a:off x="1375291" y="4943038"/>
-            <a:ext cx="1463040" cy="292608"/>
-          </a:xfrm>
-          <a:prstGeom prst="rect">
-            <a:avLst/>
-          </a:prstGeom>
-          <a:noFill/>
-        </p:spPr>
-        <p:txBody>
-          <a:bodyPr wrap="square" lIns="0" tIns="0" rIns="0" bIns="0">
-            <a:noAutofit/>
-          </a:bodyPr>
-          <a:lstStyle/>
-          <a:p>
-            <a:r>
-              <a:rPr sz="1200" b="1" dirty="0">
-                <a:solidFill>
-                  <a:srgbClr val="1F4E79"/>
-                </a:solidFill>
-              </a:rPr>
-              <a:t>A$1,500</a:t>
-            </a:r>
-          </a:p>
-        </p:txBody>
-      </p:sp>
-      <p:sp>
-        <p:nvSpPr>
-          <p:cNvPr id="84" name="Fa-life2-lab"/>
-          <p:cNvSpPr txBox="1"/>
-          <p:nvPr/>
-        </p:nvSpPr>
-        <p:spPr>
-          <a:xfrm>
-            <a:off x="883885" y="5166319"/>
-            <a:ext cx="1463040" cy="146304"/>
-          </a:xfrm>
-          <a:prstGeom prst="rect">
-            <a:avLst/>
-          </a:prstGeom>
-          <a:noFill/>
-        </p:spPr>
-        <p:txBody>
-          <a:bodyPr wrap="square" lIns="0" tIns="0" rIns="0" bIns="0">
-            <a:noAutofit/>
-          </a:bodyPr>
-          <a:lstStyle/>
-          <a:p>
-            <a:r>
-              <a:rPr sz="900" b="1" dirty="0" err="1"/>
-              <a:t>已还本金</a:t>
-            </a:r>
-            <a:endParaRPr sz="900" b="1" dirty="0"/>
-          </a:p>
-        </p:txBody>
-      </p:sp>
-      <p:sp>
-        <p:nvSpPr>
-          <p:cNvPr id="85" name="Fa-life2"/>
-          <p:cNvSpPr txBox="1"/>
-          <p:nvPr/>
-        </p:nvSpPr>
-        <p:spPr>
-          <a:xfrm>
-            <a:off x="1421322" y="5159023"/>
-            <a:ext cx="1463040" cy="292608"/>
-          </a:xfrm>
-          <a:prstGeom prst="rect">
-            <a:avLst/>
-          </a:prstGeom>
-          <a:noFill/>
-        </p:spPr>
-        <p:txBody>
-          <a:bodyPr wrap="square" lIns="0" tIns="0" rIns="0" bIns="0">
-            <a:noAutofit/>
-          </a:bodyPr>
-          <a:lstStyle/>
-          <a:p>
-            <a:r>
-              <a:rPr sz="1200" b="1" dirty="0">
-                <a:solidFill>
-                  <a:srgbClr val="1F4E79"/>
-                </a:solidFill>
-              </a:rPr>
-              <a:t>A$936</a:t>
-            </a:r>
-          </a:p>
-        </p:txBody>
-      </p:sp>
-      <p:sp>
-        <p:nvSpPr>
-          <p:cNvPr id="86" name="Fa-life3-lab"/>
-          <p:cNvSpPr txBox="1"/>
-          <p:nvPr/>
-        </p:nvSpPr>
-        <p:spPr>
-          <a:xfrm>
-            <a:off x="871273" y="5394506"/>
-            <a:ext cx="1463040" cy="146304"/>
-          </a:xfrm>
-          <a:prstGeom prst="rect">
-            <a:avLst/>
-          </a:prstGeom>
-          <a:noFill/>
-        </p:spPr>
-        <p:txBody>
-          <a:bodyPr wrap="square" lIns="0" tIns="0" rIns="0" bIns="0">
-            <a:noAutofit/>
-          </a:bodyPr>
-          <a:lstStyle/>
-          <a:p>
-            <a:r>
-              <a:rPr sz="900" b="1"/>
-              <a:t>剩余本金</a:t>
-            </a:r>
-          </a:p>
-        </p:txBody>
-      </p:sp>
-      <p:sp>
-        <p:nvSpPr>
-          <p:cNvPr id="87" name="Fa-life3"/>
-          <p:cNvSpPr txBox="1"/>
-          <p:nvPr/>
-        </p:nvSpPr>
-        <p:spPr>
-          <a:xfrm>
-            <a:off x="1421322" y="5390007"/>
-            <a:ext cx="1463040" cy="292608"/>
-          </a:xfrm>
-          <a:prstGeom prst="rect">
-            <a:avLst/>
-          </a:prstGeom>
-          <a:noFill/>
-        </p:spPr>
-        <p:txBody>
-          <a:bodyPr wrap="square" lIns="0" tIns="0" rIns="0" bIns="0">
-            <a:noAutofit/>
-          </a:bodyPr>
-          <a:lstStyle/>
-          <a:p>
-            <a:r>
-              <a:rPr sz="1200" b="1" dirty="0">
-                <a:solidFill>
-                  <a:srgbClr val="1F4E79"/>
-                </a:solidFill>
-              </a:rPr>
-              <a:t>A$564</a:t>
-            </a:r>
-          </a:p>
-        </p:txBody>
-      </p:sp>
-      <p:sp>
-        <p:nvSpPr>
-          <p:cNvPr id="130" name="Fa-sub"/>
-          <p:cNvSpPr txBox="1"/>
-          <p:nvPr/>
-        </p:nvSpPr>
-        <p:spPr>
-          <a:xfrm>
-            <a:off x="4528566" y="3170795"/>
-            <a:ext cx="5029200" cy="201168"/>
-          </a:xfrm>
-          <a:prstGeom prst="rect">
-            <a:avLst/>
-          </a:prstGeom>
-          <a:noFill/>
-        </p:spPr>
-        <p:txBody>
-          <a:bodyPr wrap="square" lIns="0" tIns="0" rIns="0" bIns="0">
-            <a:spAutoFit/>
-          </a:bodyPr>
-          <a:lstStyle/>
-          <a:p>
-            <a:pPr algn="l">
-              <a:spcAft>
-                <a:spcPts val="0"/>
-              </a:spcAft>
+            <a:pPr marL="0" indent="0">
+              <a:buNone/>
             </a:pPr>
             <a:r>
-              <a:rPr sz="1100" b="1" dirty="0">
+              <a:rPr lang="en-US" sz="900" dirty="0">
                 <a:solidFill>
-                  <a:srgbClr val="1F4E79"/>
+                  <a:srgbClr val="111827"/>
                 </a:solidFill>
+                <a:latin typeface="微软雅黑" panose="020B0503020204020204" pitchFamily="34" charset="-122"/>
+                <a:ea typeface="微软雅黑" panose="020B0503020204020204" pitchFamily="34" charset="-122"/>
+                <a:cs typeface="Noto Sans CJK SC" pitchFamily="34" charset="-120"/>
               </a:rPr>
-              <a:t>SACC</a:t>
+              <a:t>月还款约</a:t>
             </a:r>
-            <a:r>
-              <a:rPr sz="1100" b="0" dirty="0">
-                <a:solidFill>
-                  <a:srgbClr val="606060"/>
-                </a:solidFill>
-              </a:rPr>
-              <a:t>   ｜  </a:t>
-            </a:r>
-            <a:r>
-              <a:rPr sz="1100" b="0" dirty="0" err="1">
-                <a:solidFill>
-                  <a:srgbClr val="606060"/>
-                </a:solidFill>
-              </a:rPr>
-              <a:t>在贷</a:t>
-            </a:r>
-            <a:endParaRPr sz="1100" b="0" dirty="0">
-              <a:solidFill>
-                <a:srgbClr val="606060"/>
-              </a:solidFill>
+            <a:endParaRPr lang="en-US" sz="900" dirty="0">
+              <a:latin typeface="微软雅黑" panose="020B0503020204020204" pitchFamily="34" charset="-122"/>
+              <a:ea typeface="微软雅黑" panose="020B0503020204020204" pitchFamily="34" charset="-122"/>
             </a:endParaRPr>
           </a:p>
         </p:txBody>
       </p:sp>
       <p:sp>
         <p:nvSpPr>
-          <p:cNvPr id="131" name="Fa-c-还款计划-t"/>
-          <p:cNvSpPr txBox="1"/>
+          <p:cNvPr id="69" name="Text 77">
+            <a:extLst>
+              <a:ext uri="{FF2B5EF4-FFF2-40B4-BE49-F238E27FC236}">
+                <a16:creationId xmlns:a16="http://schemas.microsoft.com/office/drawing/2014/main" id="{A4B96D27-D2A9-44BA-A99D-7A4FC76243C2}"/>
+              </a:ext>
+            </a:extLst>
+          </p:cNvPr>
+          <p:cNvSpPr/>
           <p:nvPr/>
         </p:nvSpPr>
         <p:spPr>
           <a:xfrm>
-            <a:off x="810733" y="3914252"/>
-            <a:ext cx="1609344" cy="153888"/>
+            <a:off x="1542675" y="4138894"/>
+            <a:ext cx="731520" cy="164592"/>
           </a:xfrm>
           <a:prstGeom prst="rect">
             <a:avLst/>
           </a:prstGeom>
           <a:noFill/>
+          <a:ln/>
         </p:spPr>
         <p:txBody>
-          <a:bodyPr wrap="square" lIns="0" tIns="0" rIns="0" bIns="0">
-            <a:spAutoFit/>
+          <a:bodyPr wrap="square" lIns="0" tIns="0" rIns="0" bIns="0" rtlCol="0" anchor="ctr">
+            <a:normAutofit/>
           </a:bodyPr>
           <a:lstStyle/>
           <a:p>
-            <a:pPr algn="l">
-              <a:spcAft>
-                <a:spcPts val="0"/>
-              </a:spcAft>
+            <a:pPr marL="0" indent="0">
+              <a:buNone/>
             </a:pPr>
             <a:r>
-              <a:rPr sz="1000" b="1" dirty="0" err="1">
+              <a:rPr lang="en-US" sz="900" b="1" dirty="0">
                 <a:solidFill>
-                  <a:srgbClr val="1F4E79"/>
+                  <a:srgbClr val="183F73"/>
                 </a:solidFill>
+                <a:latin typeface="微软雅黑" panose="020B0503020204020204" pitchFamily="34" charset="-122"/>
+                <a:ea typeface="微软雅黑" panose="020B0503020204020204" pitchFamily="34" charset="-122"/>
+                <a:cs typeface="Noto Sans CJK SC" pitchFamily="34" charset="-120"/>
               </a:rPr>
-              <a:t>还款计划</a:t>
+              <a:t>A$338</a:t>
             </a:r>
-            <a:endParaRPr sz="1000" b="1" dirty="0">
-              <a:solidFill>
-                <a:srgbClr val="1F4E79"/>
-              </a:solidFill>
+            <a:endParaRPr lang="en-US" sz="900" dirty="0">
+              <a:latin typeface="微软雅黑" panose="020B0503020204020204" pitchFamily="34" charset="-122"/>
+              <a:ea typeface="微软雅黑" panose="020B0503020204020204" pitchFamily="34" charset="-122"/>
             </a:endParaRPr>
           </a:p>
         </p:txBody>
       </p:sp>
       <p:sp>
         <p:nvSpPr>
-          <p:cNvPr id="132" name="Fa-c-还款计划-1"/>
-          <p:cNvSpPr txBox="1"/>
+          <p:cNvPr id="70" name="Text 78">
+            <a:extLst>
+              <a:ext uri="{FF2B5EF4-FFF2-40B4-BE49-F238E27FC236}">
+                <a16:creationId xmlns:a16="http://schemas.microsoft.com/office/drawing/2014/main" id="{B4D33D6B-B6CF-4AD2-AB88-A108080FF915}"/>
+              </a:ext>
+            </a:extLst>
+          </p:cNvPr>
+          <p:cNvSpPr/>
           <p:nvPr/>
         </p:nvSpPr>
         <p:spPr>
           <a:xfrm>
-            <a:off x="810733" y="4115420"/>
-            <a:ext cx="1609344" cy="182880"/>
+            <a:off x="747655" y="4426930"/>
+            <a:ext cx="731520" cy="164592"/>
           </a:xfrm>
           <a:prstGeom prst="rect">
             <a:avLst/>
           </a:prstGeom>
           <a:noFill/>
+          <a:ln/>
         </p:spPr>
         <p:txBody>
-          <a:bodyPr wrap="square" lIns="0" tIns="0" rIns="0" bIns="0">
-            <a:spAutoFit/>
+          <a:bodyPr wrap="square" lIns="0" tIns="0" rIns="0" bIns="0" rtlCol="0" anchor="ctr">
+            <a:normAutofit/>
           </a:bodyPr>
           <a:lstStyle/>
           <a:p>
-            <a:pPr algn="l">
-              <a:spcAft>
-                <a:spcPts val="0"/>
-              </a:spcAft>
+            <a:pPr marL="0" indent="0">
+              <a:buNone/>
             </a:pPr>
             <a:r>
-              <a:rPr sz="1000" b="1" dirty="0" err="1">
+              <a:rPr lang="en-US" sz="900" dirty="0">
                 <a:solidFill>
-                  <a:srgbClr val="0A0A0A"/>
+                  <a:srgbClr val="111827"/>
                 </a:solidFill>
+                <a:latin typeface="微软雅黑" panose="020B0503020204020204" pitchFamily="34" charset="-122"/>
+                <a:ea typeface="微软雅黑" panose="020B0503020204020204" pitchFamily="34" charset="-122"/>
+                <a:cs typeface="Noto Sans CJK SC" pitchFamily="34" charset="-120"/>
               </a:rPr>
-              <a:t>月还款</a:t>
+              <a:t>每周约</a:t>
             </a:r>
-            <a:r>
-              <a:rPr sz="800" b="0" dirty="0" err="1">
-                <a:solidFill>
-                  <a:srgbClr val="606060"/>
-                </a:solidFill>
-              </a:rPr>
-              <a:t>约</a:t>
-            </a:r>
-            <a:r>
-              <a:rPr sz="800" b="0" dirty="0">
-                <a:solidFill>
-                  <a:srgbClr val="606060"/>
-                </a:solidFill>
-              </a:rPr>
-              <a:t> A$338</a:t>
-            </a:r>
-          </a:p>
-        </p:txBody>
-      </p:sp>
-      <p:sp>
-        <p:nvSpPr>
-          <p:cNvPr id="133" name="Fa-c-还款计划-2"/>
-          <p:cNvSpPr txBox="1"/>
-          <p:nvPr/>
-        </p:nvSpPr>
-        <p:spPr>
-          <a:xfrm>
-            <a:off x="810733" y="4334876"/>
-            <a:ext cx="1609344" cy="182880"/>
-          </a:xfrm>
-          <a:prstGeom prst="rect">
-            <a:avLst/>
-          </a:prstGeom>
-          <a:noFill/>
-        </p:spPr>
-        <p:txBody>
-          <a:bodyPr wrap="square" lIns="0" tIns="0" rIns="0" bIns="0">
-            <a:spAutoFit/>
-          </a:bodyPr>
-          <a:lstStyle/>
-          <a:p>
-            <a:pPr algn="l">
-              <a:spcAft>
-                <a:spcPts val="0"/>
-              </a:spcAft>
-            </a:pPr>
-            <a:r>
-              <a:rPr sz="1000" b="1">
-                <a:solidFill>
-                  <a:srgbClr val="0A0A0A"/>
-                </a:solidFill>
-              </a:rPr>
-              <a:t>每两周</a:t>
-            </a:r>
-            <a:r>
-              <a:rPr sz="800" b="0">
-                <a:solidFill>
-                  <a:srgbClr val="606060"/>
-                </a:solidFill>
-              </a:rPr>
-              <a:t>A$156</a:t>
-            </a:r>
-          </a:p>
-        </p:txBody>
-      </p:sp>
-      <p:sp>
-        <p:nvSpPr>
-          <p:cNvPr id="134" name="Fa-c-还款计划-3"/>
-          <p:cNvSpPr txBox="1"/>
-          <p:nvPr/>
-        </p:nvSpPr>
-        <p:spPr>
-          <a:xfrm>
-            <a:off x="810733" y="4554332"/>
-            <a:ext cx="1609344" cy="182880"/>
-          </a:xfrm>
-          <a:prstGeom prst="rect">
-            <a:avLst/>
-          </a:prstGeom>
-          <a:noFill/>
-        </p:spPr>
-        <p:txBody>
-          <a:bodyPr wrap="square" lIns="0" tIns="0" rIns="0" bIns="0">
-            <a:spAutoFit/>
-          </a:bodyPr>
-          <a:lstStyle/>
-          <a:p>
-            <a:pPr algn="l">
-              <a:spcAft>
-                <a:spcPts val="0"/>
-              </a:spcAft>
-            </a:pPr>
-            <a:r>
-              <a:rPr sz="1000" b="1">
-                <a:solidFill>
-                  <a:srgbClr val="0A0A0A"/>
-                </a:solidFill>
-              </a:rPr>
-              <a:t>90 天还款</a:t>
-            </a:r>
-            <a:r>
-              <a:rPr sz="800" b="0">
-                <a:solidFill>
-                  <a:srgbClr val="606060"/>
-                </a:solidFill>
-              </a:rPr>
-              <a:t>6 次</a:t>
-            </a:r>
-          </a:p>
-        </p:txBody>
-      </p:sp>
-      <p:sp>
-        <p:nvSpPr>
-          <p:cNvPr id="135" name="Fa-c-还款计划-4"/>
-          <p:cNvSpPr txBox="1"/>
-          <p:nvPr/>
-        </p:nvSpPr>
-        <p:spPr>
-          <a:xfrm>
-            <a:off x="810733" y="4773788"/>
-            <a:ext cx="1609344" cy="182880"/>
-          </a:xfrm>
-          <a:prstGeom prst="rect">
-            <a:avLst/>
-          </a:prstGeom>
-          <a:noFill/>
-        </p:spPr>
-        <p:txBody>
-          <a:bodyPr wrap="square" lIns="0" tIns="0" rIns="0" bIns="0">
-            <a:spAutoFit/>
-          </a:bodyPr>
-          <a:lstStyle/>
-          <a:p>
-            <a:pPr algn="l">
-              <a:spcAft>
-                <a:spcPts val="0"/>
-              </a:spcAft>
-            </a:pPr>
-            <a:r>
-              <a:rPr sz="1000" b="1" dirty="0">
-                <a:solidFill>
-                  <a:srgbClr val="0A0A0A"/>
-                </a:solidFill>
-              </a:rPr>
-              <a:t>预计剩余</a:t>
-            </a:r>
-            <a:r>
-              <a:rPr sz="800" b="0" dirty="0">
-                <a:solidFill>
-                  <a:srgbClr val="606060"/>
-                </a:solidFill>
-              </a:rPr>
-              <a:t>4 期</a:t>
-            </a:r>
-          </a:p>
-        </p:txBody>
-      </p:sp>
-      <p:sp>
-        <p:nvSpPr>
-          <p:cNvPr id="136" name="Fa-c-履约表现-t"/>
-          <p:cNvSpPr txBox="1"/>
-          <p:nvPr/>
-        </p:nvSpPr>
-        <p:spPr>
-          <a:xfrm>
-            <a:off x="2383501" y="3993338"/>
-            <a:ext cx="1609344" cy="153888"/>
-          </a:xfrm>
-          <a:prstGeom prst="rect">
-            <a:avLst/>
-          </a:prstGeom>
-          <a:noFill/>
-        </p:spPr>
-        <p:txBody>
-          <a:bodyPr wrap="square" lIns="0" tIns="0" rIns="0" bIns="0">
-            <a:spAutoFit/>
-          </a:bodyPr>
-          <a:lstStyle/>
-          <a:p>
-            <a:pPr algn="l">
-              <a:spcAft>
-                <a:spcPts val="0"/>
-              </a:spcAft>
-            </a:pPr>
-            <a:r>
-              <a:rPr sz="1000" b="1">
-                <a:solidFill>
-                  <a:srgbClr val="1F4E79"/>
-                </a:solidFill>
-              </a:rPr>
-              <a:t>履约表现</a:t>
-            </a:r>
-          </a:p>
-        </p:txBody>
-      </p:sp>
-      <p:sp>
-        <p:nvSpPr>
-          <p:cNvPr id="138" name="Fa-c-履约表现-2"/>
-          <p:cNvSpPr txBox="1"/>
-          <p:nvPr/>
-        </p:nvSpPr>
-        <p:spPr>
-          <a:xfrm>
-            <a:off x="2383501" y="4233961"/>
-            <a:ext cx="1609344" cy="182880"/>
-          </a:xfrm>
-          <a:prstGeom prst="rect">
-            <a:avLst/>
-          </a:prstGeom>
-          <a:noFill/>
-        </p:spPr>
-        <p:txBody>
-          <a:bodyPr wrap="square" lIns="0" tIns="0" rIns="0" bIns="0">
-            <a:spAutoFit/>
-          </a:bodyPr>
-          <a:lstStyle/>
-          <a:p>
-            <a:pPr algn="l">
-              <a:spcAft>
-                <a:spcPts val="0"/>
-              </a:spcAft>
-            </a:pPr>
-            <a:r>
-              <a:rPr sz="1000" b="1" dirty="0">
-                <a:solidFill>
-                  <a:srgbClr val="0A0A0A"/>
-                </a:solidFill>
-              </a:rPr>
-              <a:t>扣款失败</a:t>
-            </a:r>
-            <a:r>
-              <a:rPr sz="800" b="1" dirty="0">
-                <a:solidFill>
-                  <a:srgbClr val="D6A000"/>
-                </a:solidFill>
-              </a:rPr>
-              <a:t>1 次</a:t>
-            </a:r>
-          </a:p>
-        </p:txBody>
-      </p:sp>
-      <p:sp>
-        <p:nvSpPr>
-          <p:cNvPr id="139" name="Fa-c-履约表现-3"/>
-          <p:cNvSpPr txBox="1"/>
-          <p:nvPr/>
-        </p:nvSpPr>
-        <p:spPr>
-          <a:xfrm>
-            <a:off x="2383501" y="4453417"/>
-            <a:ext cx="1609344" cy="182880"/>
-          </a:xfrm>
-          <a:prstGeom prst="rect">
-            <a:avLst/>
-          </a:prstGeom>
-          <a:noFill/>
-        </p:spPr>
-        <p:txBody>
-          <a:bodyPr wrap="square" lIns="0" tIns="0" rIns="0" bIns="0">
-            <a:spAutoFit/>
-          </a:bodyPr>
-          <a:lstStyle/>
-          <a:p>
-            <a:pPr algn="l">
-              <a:spcAft>
-                <a:spcPts val="0"/>
-              </a:spcAft>
-            </a:pPr>
-            <a:r>
-              <a:rPr sz="1000" b="1">
-                <a:solidFill>
-                  <a:srgbClr val="0A0A0A"/>
-                </a:solidFill>
-              </a:rPr>
-              <a:t>最长逾期</a:t>
-            </a:r>
-            <a:r>
-              <a:rPr sz="800" b="1">
-                <a:solidFill>
-                  <a:srgbClr val="D6A000"/>
-                </a:solidFill>
-              </a:rPr>
-              <a:t>3 天</a:t>
-            </a:r>
-          </a:p>
-        </p:txBody>
-      </p:sp>
-      <p:sp>
-        <p:nvSpPr>
-          <p:cNvPr id="140" name="Fa-c-履约表现-4"/>
-          <p:cNvSpPr txBox="1"/>
-          <p:nvPr/>
-        </p:nvSpPr>
-        <p:spPr>
-          <a:xfrm>
-            <a:off x="2383501" y="4672873"/>
-            <a:ext cx="1609344" cy="182880"/>
-          </a:xfrm>
-          <a:prstGeom prst="rect">
-            <a:avLst/>
-          </a:prstGeom>
-          <a:noFill/>
-        </p:spPr>
-        <p:txBody>
-          <a:bodyPr wrap="square" lIns="0" tIns="0" rIns="0" bIns="0">
-            <a:spAutoFit/>
-          </a:bodyPr>
-          <a:lstStyle/>
-          <a:p>
-            <a:pPr algn="l">
-              <a:spcAft>
-                <a:spcPts val="0"/>
-              </a:spcAft>
-            </a:pPr>
-            <a:r>
-              <a:rPr sz="1000" b="1">
-                <a:solidFill>
-                  <a:srgbClr val="0A0A0A"/>
-                </a:solidFill>
-              </a:rPr>
-              <a:t>还款中断</a:t>
-            </a:r>
-            <a:r>
-              <a:rPr sz="800" b="0">
-                <a:solidFill>
-                  <a:srgbClr val="606060"/>
-                </a:solidFill>
-              </a:rPr>
-              <a:t>无</a:t>
-            </a:r>
-          </a:p>
-        </p:txBody>
-      </p:sp>
-      <p:sp>
-        <p:nvSpPr>
-          <p:cNvPr id="141" name="Fa-c-产品成本-t"/>
-          <p:cNvSpPr txBox="1"/>
-          <p:nvPr/>
-        </p:nvSpPr>
-        <p:spPr>
-          <a:xfrm>
-            <a:off x="4102517" y="3936772"/>
-            <a:ext cx="1609344" cy="153888"/>
-          </a:xfrm>
-          <a:prstGeom prst="rect">
-            <a:avLst/>
-          </a:prstGeom>
-          <a:noFill/>
-        </p:spPr>
-        <p:txBody>
-          <a:bodyPr wrap="square" lIns="0" tIns="0" rIns="0" bIns="0">
-            <a:spAutoFit/>
-          </a:bodyPr>
-          <a:lstStyle/>
-          <a:p>
-            <a:pPr algn="l">
-              <a:spcAft>
-                <a:spcPts val="0"/>
-              </a:spcAft>
-            </a:pPr>
-            <a:r>
-              <a:rPr sz="1000" b="1" dirty="0" err="1">
-                <a:solidFill>
-                  <a:srgbClr val="1F4E79"/>
-                </a:solidFill>
-              </a:rPr>
-              <a:t>产品</a:t>
-            </a:r>
-            <a:r>
-              <a:rPr lang="zh-CN" altLang="en-US" sz="1000" b="1" dirty="0">
-                <a:solidFill>
-                  <a:srgbClr val="1F4E79"/>
-                </a:solidFill>
-              </a:rPr>
-              <a:t>要素</a:t>
-            </a:r>
-            <a:endParaRPr sz="1000" b="1" dirty="0">
-              <a:solidFill>
-                <a:srgbClr val="1F4E79"/>
-              </a:solidFill>
+            <a:endParaRPr lang="en-US" sz="900" dirty="0">
+              <a:latin typeface="微软雅黑" panose="020B0503020204020204" pitchFamily="34" charset="-122"/>
+              <a:ea typeface="微软雅黑" panose="020B0503020204020204" pitchFamily="34" charset="-122"/>
             </a:endParaRPr>
           </a:p>
         </p:txBody>
       </p:sp>
       <p:sp>
         <p:nvSpPr>
-          <p:cNvPr id="142" name="Fa-c-产品成本-1"/>
-          <p:cNvSpPr txBox="1"/>
+          <p:cNvPr id="71" name="Text 79">
+            <a:extLst>
+              <a:ext uri="{FF2B5EF4-FFF2-40B4-BE49-F238E27FC236}">
+                <a16:creationId xmlns:a16="http://schemas.microsoft.com/office/drawing/2014/main" id="{97D3AF39-5694-4A88-96E2-327F8425281E}"/>
+              </a:ext>
+            </a:extLst>
+          </p:cNvPr>
+          <p:cNvSpPr/>
           <p:nvPr/>
         </p:nvSpPr>
         <p:spPr>
           <a:xfrm>
-            <a:off x="4102517" y="4137940"/>
-            <a:ext cx="1609344" cy="182880"/>
+            <a:off x="1542675" y="4426930"/>
+            <a:ext cx="731520" cy="164592"/>
           </a:xfrm>
           <a:prstGeom prst="rect">
             <a:avLst/>
           </a:prstGeom>
           <a:noFill/>
+          <a:ln/>
         </p:spPr>
         <p:txBody>
-          <a:bodyPr wrap="square" lIns="0" tIns="0" rIns="0" bIns="0">
-            <a:spAutoFit/>
+          <a:bodyPr wrap="square" lIns="0" tIns="0" rIns="0" bIns="0" rtlCol="0" anchor="ctr">
+            <a:normAutofit/>
           </a:bodyPr>
           <a:lstStyle/>
           <a:p>
-            <a:pPr algn="l">
-              <a:spcAft>
-                <a:spcPts val="0"/>
-              </a:spcAft>
+            <a:pPr marL="0" indent="0">
+              <a:buNone/>
             </a:pPr>
             <a:r>
-              <a:rPr sz="1000" b="1">
+              <a:rPr lang="en-US" sz="900" b="1" dirty="0">
                 <a:solidFill>
-                  <a:srgbClr val="0A0A0A"/>
+                  <a:srgbClr val="183F73"/>
                 </a:solidFill>
+                <a:latin typeface="微软雅黑" panose="020B0503020204020204" pitchFamily="34" charset="-122"/>
+                <a:ea typeface="微软雅黑" panose="020B0503020204020204" pitchFamily="34" charset="-122"/>
+                <a:cs typeface="Noto Sans CJK SC" pitchFamily="34" charset="-120"/>
               </a:rPr>
-              <a:t>APR</a:t>
+              <a:t>A$156</a:t>
             </a:r>
-            <a:r>
-              <a:rPr sz="800" b="1">
-                <a:solidFill>
-                  <a:srgbClr val="D6A000"/>
-                </a:solidFill>
-              </a:rPr>
-              <a:t>42%</a:t>
-            </a:r>
-          </a:p>
-        </p:txBody>
-      </p:sp>
-      <p:sp>
-        <p:nvSpPr>
-          <p:cNvPr id="143" name="Fa-c-产品成本-2"/>
-          <p:cNvSpPr txBox="1"/>
-          <p:nvPr/>
-        </p:nvSpPr>
-        <p:spPr>
-          <a:xfrm>
-            <a:off x="4102517" y="4357396"/>
-            <a:ext cx="1609344" cy="182880"/>
-          </a:xfrm>
-          <a:prstGeom prst="rect">
-            <a:avLst/>
-          </a:prstGeom>
-          <a:noFill/>
-        </p:spPr>
-        <p:txBody>
-          <a:bodyPr wrap="square" lIns="0" tIns="0" rIns="0" bIns="0">
-            <a:spAutoFit/>
-          </a:bodyPr>
-          <a:lstStyle/>
-          <a:p>
-            <a:pPr algn="l">
-              <a:spcAft>
-                <a:spcPts val="0"/>
-              </a:spcAft>
-            </a:pPr>
-            <a:r>
-              <a:rPr sz="1000" b="1" dirty="0">
-                <a:solidFill>
-                  <a:srgbClr val="0A0A0A"/>
-                </a:solidFill>
-              </a:rPr>
-              <a:t>预计总还款</a:t>
-            </a:r>
-            <a:r>
-              <a:rPr sz="800" b="0" dirty="0">
-                <a:solidFill>
-                  <a:srgbClr val="606060"/>
-                </a:solidFill>
-              </a:rPr>
-              <a:t>A$1,872</a:t>
-            </a:r>
-          </a:p>
-        </p:txBody>
-      </p:sp>
-      <p:sp>
-        <p:nvSpPr>
-          <p:cNvPr id="144" name="Fa-c-产品成本-3"/>
-          <p:cNvSpPr txBox="1"/>
-          <p:nvPr/>
-        </p:nvSpPr>
-        <p:spPr>
-          <a:xfrm>
-            <a:off x="4102517" y="4576852"/>
-            <a:ext cx="1609344" cy="153888"/>
-          </a:xfrm>
-          <a:prstGeom prst="rect">
-            <a:avLst/>
-          </a:prstGeom>
-          <a:noFill/>
-        </p:spPr>
-        <p:txBody>
-          <a:bodyPr wrap="square" lIns="0" tIns="0" rIns="0" bIns="0">
-            <a:spAutoFit/>
-          </a:bodyPr>
-          <a:lstStyle/>
-          <a:p>
-            <a:pPr algn="l">
-              <a:spcAft>
-                <a:spcPts val="0"/>
-              </a:spcAft>
-            </a:pPr>
-            <a:r>
-              <a:rPr lang="zh-CN" altLang="en-US" sz="1000" b="1" dirty="0">
-                <a:solidFill>
-                  <a:srgbClr val="0A0A0A"/>
-                </a:solidFill>
-              </a:rPr>
-              <a:t>利息</a:t>
-            </a:r>
-            <a:r>
-              <a:rPr sz="1000" b="1" dirty="0">
-                <a:solidFill>
-                  <a:srgbClr val="0A0A0A"/>
-                </a:solidFill>
-              </a:rPr>
-              <a:t>成本</a:t>
-            </a:r>
-            <a:r>
-              <a:rPr sz="800" b="0" dirty="0">
-                <a:solidFill>
-                  <a:srgbClr val="606060"/>
-                </a:solidFill>
-              </a:rPr>
-              <a:t>A$372</a:t>
-            </a:r>
-          </a:p>
-        </p:txBody>
-      </p:sp>
-      <p:sp>
-        <p:nvSpPr>
-          <p:cNvPr id="64" name="Fa-c-产品成本-3">
-            <a:extLst>
-              <a:ext uri="{FF2B5EF4-FFF2-40B4-BE49-F238E27FC236}">
-                <a16:creationId xmlns:a16="http://schemas.microsoft.com/office/drawing/2014/main" id="{E1EE7A53-B95F-4A01-A89A-78606CEC2339}"/>
-              </a:ext>
-            </a:extLst>
-          </p:cNvPr>
-          <p:cNvSpPr txBox="1"/>
-          <p:nvPr/>
-        </p:nvSpPr>
-        <p:spPr>
-          <a:xfrm>
-            <a:off x="4102517" y="4814151"/>
-            <a:ext cx="1609344" cy="153888"/>
-          </a:xfrm>
-          <a:prstGeom prst="rect">
-            <a:avLst/>
-          </a:prstGeom>
-          <a:noFill/>
-        </p:spPr>
-        <p:txBody>
-          <a:bodyPr wrap="square" lIns="0" tIns="0" rIns="0" bIns="0">
-            <a:spAutoFit/>
-          </a:bodyPr>
-          <a:lstStyle/>
-          <a:p>
-            <a:pPr algn="l">
-              <a:spcAft>
-                <a:spcPts val="0"/>
-              </a:spcAft>
-            </a:pPr>
-            <a:r>
-              <a:rPr lang="zh-CN" altLang="en-US" sz="1000" b="1" dirty="0">
-                <a:solidFill>
-                  <a:srgbClr val="0A0A0A"/>
-                </a:solidFill>
-              </a:rPr>
-              <a:t>产品类型 </a:t>
-            </a:r>
-            <a:r>
-              <a:rPr sz="800" b="0" dirty="0">
-                <a:solidFill>
-                  <a:srgbClr val="606060"/>
-                </a:solidFill>
-              </a:rPr>
-              <a:t>SACC</a:t>
-            </a:r>
-          </a:p>
-        </p:txBody>
-      </p:sp>
-      <p:sp>
-        <p:nvSpPr>
-          <p:cNvPr id="145" name="用户-m1-4"/>
-          <p:cNvSpPr txBox="1"/>
-          <p:nvPr/>
-        </p:nvSpPr>
-        <p:spPr>
-          <a:xfrm>
-            <a:off x="6400989" y="4856377"/>
-            <a:ext cx="1737360" cy="201168"/>
-          </a:xfrm>
-          <a:prstGeom prst="rect">
-            <a:avLst/>
-          </a:prstGeom>
-          <a:noFill/>
-        </p:spPr>
-        <p:txBody>
-          <a:bodyPr wrap="square" lIns="0" tIns="0" rIns="0" bIns="0">
-            <a:spAutoFit/>
-          </a:bodyPr>
-          <a:lstStyle/>
-          <a:p>
-            <a:pPr algn="l">
-              <a:spcAft>
-                <a:spcPts val="0"/>
-              </a:spcAft>
-            </a:pPr>
-            <a:r>
-              <a:rPr sz="1000" b="1">
-                <a:solidFill>
-                  <a:srgbClr val="0A0A0A"/>
-                </a:solidFill>
-              </a:rPr>
-              <a:t>在贷笔数</a:t>
-            </a:r>
-            <a:r>
-              <a:rPr sz="800" b="0">
-                <a:solidFill>
-                  <a:srgbClr val="606060"/>
-                </a:solidFill>
-              </a:rPr>
-              <a:t>3 笔</a:t>
-            </a:r>
-          </a:p>
-        </p:txBody>
-      </p:sp>
-      <p:sp>
-        <p:nvSpPr>
-          <p:cNvPr id="146" name="用户-m2-4"/>
-          <p:cNvSpPr txBox="1"/>
-          <p:nvPr/>
-        </p:nvSpPr>
-        <p:spPr>
-          <a:xfrm>
-            <a:off x="8165780" y="4856377"/>
-            <a:ext cx="1737360" cy="201168"/>
-          </a:xfrm>
-          <a:prstGeom prst="rect">
-            <a:avLst/>
-          </a:prstGeom>
-          <a:noFill/>
-        </p:spPr>
-        <p:txBody>
-          <a:bodyPr wrap="square" lIns="0" tIns="0" rIns="0" bIns="0">
-            <a:spAutoFit/>
-          </a:bodyPr>
-          <a:lstStyle/>
-          <a:p>
-            <a:pPr algn="l">
-              <a:spcAft>
-                <a:spcPts val="0"/>
-              </a:spcAft>
-            </a:pPr>
-            <a:r>
-              <a:rPr sz="1000" b="1">
-                <a:solidFill>
-                  <a:srgbClr val="0A0A0A"/>
-                </a:solidFill>
-              </a:rPr>
-              <a:t>最近借款</a:t>
-            </a:r>
-            <a:r>
-              <a:rPr sz="800" b="0">
-                <a:solidFill>
-                  <a:srgbClr val="606060"/>
-                </a:solidFill>
-              </a:rPr>
-              <a:t>45 天前</a:t>
-            </a:r>
-          </a:p>
-        </p:txBody>
-      </p:sp>
-      <p:sp>
-        <p:nvSpPr>
-          <p:cNvPr id="147" name="用户-m3-4"/>
-          <p:cNvSpPr txBox="1"/>
-          <p:nvPr/>
-        </p:nvSpPr>
-        <p:spPr>
-          <a:xfrm>
-            <a:off x="9994392" y="4856377"/>
-            <a:ext cx="1737360" cy="201168"/>
-          </a:xfrm>
-          <a:prstGeom prst="rect">
-            <a:avLst/>
-          </a:prstGeom>
-          <a:noFill/>
-        </p:spPr>
-        <p:txBody>
-          <a:bodyPr wrap="square" lIns="0" tIns="0" rIns="0" bIns="0">
-            <a:spAutoFit/>
-          </a:bodyPr>
-          <a:lstStyle/>
-          <a:p>
-            <a:pPr algn="l">
-              <a:spcAft>
-                <a:spcPts val="0"/>
-              </a:spcAft>
-            </a:pPr>
-            <a:r>
-              <a:rPr sz="1000" b="1">
-                <a:solidFill>
-                  <a:srgbClr val="0A0A0A"/>
-                </a:solidFill>
-              </a:rPr>
-              <a:t>历史违约</a:t>
-            </a:r>
-            <a:r>
-              <a:rPr sz="800" b="0">
-                <a:solidFill>
-                  <a:srgbClr val="606060"/>
-                </a:solidFill>
-              </a:rPr>
-              <a:t>0 次</a:t>
-            </a:r>
-          </a:p>
-        </p:txBody>
-      </p:sp>
-      <p:sp>
-        <p:nvSpPr>
-          <p:cNvPr id="148" name="用户-b-t"/>
-          <p:cNvSpPr txBox="1"/>
-          <p:nvPr/>
-        </p:nvSpPr>
-        <p:spPr>
-          <a:xfrm>
-            <a:off x="6400989" y="5148985"/>
-            <a:ext cx="1645920" cy="182880"/>
-          </a:xfrm>
-          <a:prstGeom prst="rect">
-            <a:avLst/>
-          </a:prstGeom>
-          <a:noFill/>
-        </p:spPr>
-        <p:txBody>
-          <a:bodyPr wrap="square" lIns="0" tIns="0" rIns="0" bIns="0">
-            <a:spAutoFit/>
-          </a:bodyPr>
-          <a:lstStyle/>
-          <a:p>
-            <a:pPr algn="l">
-              <a:spcAft>
-                <a:spcPts val="0"/>
-              </a:spcAft>
-            </a:pPr>
-            <a:r>
-              <a:rPr sz="1000" b="1" dirty="0" err="1">
-                <a:solidFill>
-                  <a:srgbClr val="1F4E79"/>
-                </a:solidFill>
-              </a:rPr>
-              <a:t>偿债能力</a:t>
-            </a:r>
-            <a:endParaRPr sz="1000" b="1" dirty="0">
-              <a:solidFill>
-                <a:srgbClr val="1F4E79"/>
-              </a:solidFill>
+            <a:endParaRPr lang="en-US" sz="900" dirty="0">
+              <a:latin typeface="微软雅黑" panose="020B0503020204020204" pitchFamily="34" charset="-122"/>
+              <a:ea typeface="微软雅黑" panose="020B0503020204020204" pitchFamily="34" charset="-122"/>
             </a:endParaRPr>
           </a:p>
         </p:txBody>
       </p:sp>
       <p:sp>
         <p:nvSpPr>
-          <p:cNvPr id="149" name="用户-b1-1"/>
-          <p:cNvSpPr txBox="1"/>
+          <p:cNvPr id="72" name="Text 80">
+            <a:extLst>
+              <a:ext uri="{FF2B5EF4-FFF2-40B4-BE49-F238E27FC236}">
+                <a16:creationId xmlns:a16="http://schemas.microsoft.com/office/drawing/2014/main" id="{70392FEF-76B3-41BF-9358-1C7821FDBC57}"/>
+              </a:ext>
+            </a:extLst>
+          </p:cNvPr>
+          <p:cNvSpPr/>
           <p:nvPr/>
         </p:nvSpPr>
         <p:spPr>
           <a:xfrm>
-            <a:off x="6400989" y="5342294"/>
-            <a:ext cx="1737360" cy="201168"/>
+            <a:off x="747655" y="4714966"/>
+            <a:ext cx="731520" cy="164592"/>
           </a:xfrm>
           <a:prstGeom prst="rect">
             <a:avLst/>
           </a:prstGeom>
           <a:noFill/>
+          <a:ln/>
         </p:spPr>
         <p:txBody>
-          <a:bodyPr wrap="square" lIns="0" tIns="0" rIns="0" bIns="0">
-            <a:spAutoFit/>
+          <a:bodyPr wrap="square" lIns="0" tIns="0" rIns="0" bIns="0" rtlCol="0" anchor="ctr">
+            <a:normAutofit/>
           </a:bodyPr>
           <a:lstStyle/>
           <a:p>
-            <a:pPr algn="l">
-              <a:spcAft>
-                <a:spcPts val="0"/>
-              </a:spcAft>
+            <a:pPr marL="0" indent="0">
+              <a:buNone/>
             </a:pPr>
             <a:r>
-              <a:rPr sz="1000" b="1">
+              <a:rPr lang="en-US" sz="900" dirty="0">
                 <a:solidFill>
-                  <a:srgbClr val="0A0A0A"/>
+                  <a:srgbClr val="111827"/>
                 </a:solidFill>
+                <a:latin typeface="微软雅黑" panose="020B0503020204020204" pitchFamily="34" charset="-122"/>
+                <a:ea typeface="微软雅黑" panose="020B0503020204020204" pitchFamily="34" charset="-122"/>
+                <a:cs typeface="Noto Sans CJK SC" pitchFamily="34" charset="-120"/>
               </a:rPr>
-              <a:t>月还款/月收入</a:t>
+              <a:t>预计剩余</a:t>
             </a:r>
-            <a:r>
-              <a:rPr sz="800" b="1">
-                <a:solidFill>
-                  <a:srgbClr val="D6A000"/>
-                </a:solidFill>
-              </a:rPr>
-              <a:t>5.8%</a:t>
-            </a:r>
+            <a:endParaRPr lang="en-US" sz="900" dirty="0">
+              <a:latin typeface="微软雅黑" panose="020B0503020204020204" pitchFamily="34" charset="-122"/>
+              <a:ea typeface="微软雅黑" panose="020B0503020204020204" pitchFamily="34" charset="-122"/>
+            </a:endParaRPr>
           </a:p>
         </p:txBody>
       </p:sp>
       <p:sp>
         <p:nvSpPr>
-          <p:cNvPr id="150" name="用户-b1-2"/>
-          <p:cNvSpPr txBox="1"/>
+          <p:cNvPr id="73" name="Text 81">
+            <a:extLst>
+              <a:ext uri="{FF2B5EF4-FFF2-40B4-BE49-F238E27FC236}">
+                <a16:creationId xmlns:a16="http://schemas.microsoft.com/office/drawing/2014/main" id="{DFBE31E1-EFFA-4D32-A763-F8B7835CC9E4}"/>
+              </a:ext>
+            </a:extLst>
+          </p:cNvPr>
+          <p:cNvSpPr/>
           <p:nvPr/>
         </p:nvSpPr>
         <p:spPr>
           <a:xfrm>
-            <a:off x="8165780" y="5342294"/>
-            <a:ext cx="1737360" cy="201168"/>
+            <a:off x="1542675" y="4714966"/>
+            <a:ext cx="731520" cy="164592"/>
           </a:xfrm>
           <a:prstGeom prst="rect">
             <a:avLst/>
           </a:prstGeom>
           <a:noFill/>
+          <a:ln/>
         </p:spPr>
         <p:txBody>
-          <a:bodyPr wrap="square" lIns="0" tIns="0" rIns="0" bIns="0">
-            <a:spAutoFit/>
+          <a:bodyPr wrap="square" lIns="0" tIns="0" rIns="0" bIns="0" rtlCol="0" anchor="ctr">
+            <a:normAutofit/>
           </a:bodyPr>
           <a:lstStyle/>
           <a:p>
-            <a:pPr algn="l">
-              <a:spcAft>
-                <a:spcPts val="0"/>
-              </a:spcAft>
+            <a:pPr marL="0" indent="0">
+              <a:buNone/>
             </a:pPr>
             <a:r>
-              <a:rPr sz="1000" b="1">
+              <a:rPr lang="en-US" sz="900" b="1" dirty="0">
                 <a:solidFill>
-                  <a:srgbClr val="0A0A0A"/>
+                  <a:srgbClr val="183F73"/>
                 </a:solidFill>
+                <a:latin typeface="微软雅黑" panose="020B0503020204020204" pitchFamily="34" charset="-122"/>
+                <a:ea typeface="微软雅黑" panose="020B0503020204020204" pitchFamily="34" charset="-122"/>
+                <a:cs typeface="Noto Sans CJK SC" pitchFamily="34" charset="-120"/>
               </a:rPr>
-              <a:t>总负债/月收入</a:t>
+              <a:t>4期</a:t>
             </a:r>
-            <a:r>
-              <a:rPr sz="800" b="1">
-                <a:solidFill>
-                  <a:srgbClr val="D6A000"/>
-                </a:solidFill>
-              </a:rPr>
-              <a:t>13.7%</a:t>
-            </a:r>
+            <a:endParaRPr lang="en-US" sz="900" dirty="0">
+              <a:latin typeface="微软雅黑" panose="020B0503020204020204" pitchFamily="34" charset="-122"/>
+              <a:ea typeface="微软雅黑" panose="020B0503020204020204" pitchFamily="34" charset="-122"/>
+            </a:endParaRPr>
           </a:p>
         </p:txBody>
       </p:sp>
       <p:sp>
         <p:nvSpPr>
-          <p:cNvPr id="151" name="用户-b1-3"/>
-          <p:cNvSpPr txBox="1"/>
+          <p:cNvPr id="74" name="Text 82">
+            <a:extLst>
+              <a:ext uri="{FF2B5EF4-FFF2-40B4-BE49-F238E27FC236}">
+                <a16:creationId xmlns:a16="http://schemas.microsoft.com/office/drawing/2014/main" id="{F9A2CD80-57AF-4411-922B-F2D71830E178}"/>
+              </a:ext>
+            </a:extLst>
+          </p:cNvPr>
+          <p:cNvSpPr/>
           <p:nvPr/>
         </p:nvSpPr>
         <p:spPr>
           <a:xfrm>
-            <a:off x="9994392" y="5342294"/>
-            <a:ext cx="1737360" cy="201168"/>
+            <a:off x="747655" y="5003002"/>
+            <a:ext cx="731520" cy="164592"/>
           </a:xfrm>
           <a:prstGeom prst="rect">
             <a:avLst/>
           </a:prstGeom>
           <a:noFill/>
+          <a:ln/>
         </p:spPr>
         <p:txBody>
-          <a:bodyPr wrap="square" lIns="0" tIns="0" rIns="0" bIns="0">
-            <a:spAutoFit/>
+          <a:bodyPr wrap="square" lIns="0" tIns="0" rIns="0" bIns="0" rtlCol="0" anchor="ctr">
+            <a:normAutofit/>
           </a:bodyPr>
           <a:lstStyle/>
           <a:p>
-            <a:pPr algn="l">
-              <a:spcAft>
-                <a:spcPts val="0"/>
-              </a:spcAft>
+            <a:pPr marL="0" indent="0">
+              <a:buNone/>
             </a:pPr>
             <a:r>
-              <a:rPr sz="1000" b="1">
+              <a:rPr lang="en-US" sz="900" dirty="0">
                 <a:solidFill>
-                  <a:srgbClr val="0A0A0A"/>
+                  <a:srgbClr val="111827"/>
                 </a:solidFill>
+                <a:latin typeface="微软雅黑" panose="020B0503020204020204" pitchFamily="34" charset="-122"/>
+                <a:ea typeface="微软雅黑" panose="020B0503020204020204" pitchFamily="34" charset="-122"/>
+                <a:cs typeface="Noto Sans CJK SC" pitchFamily="34" charset="-120"/>
               </a:rPr>
-              <a:t>近 90 天负债变化率</a:t>
+              <a:t>下一还款日</a:t>
             </a:r>
-            <a:r>
-              <a:rPr sz="800" b="1">
-                <a:solidFill>
-                  <a:srgbClr val="D6A000"/>
-                </a:solidFill>
-              </a:rPr>
-              <a:t>+12%</a:t>
-            </a:r>
+            <a:endParaRPr lang="en-US" sz="900" dirty="0">
+              <a:latin typeface="微软雅黑" panose="020B0503020204020204" pitchFamily="34" charset="-122"/>
+              <a:ea typeface="微软雅黑" panose="020B0503020204020204" pitchFamily="34" charset="-122"/>
+            </a:endParaRPr>
           </a:p>
         </p:txBody>
       </p:sp>
       <p:sp>
         <p:nvSpPr>
-          <p:cNvPr id="152" name="用户-b2-1"/>
-          <p:cNvSpPr txBox="1"/>
+          <p:cNvPr id="75" name="Text 83">
+            <a:extLst>
+              <a:ext uri="{FF2B5EF4-FFF2-40B4-BE49-F238E27FC236}">
+                <a16:creationId xmlns:a16="http://schemas.microsoft.com/office/drawing/2014/main" id="{8237D60B-1771-43DE-917B-635809C0AE25}"/>
+              </a:ext>
+            </a:extLst>
+          </p:cNvPr>
+          <p:cNvSpPr/>
           <p:nvPr/>
         </p:nvSpPr>
         <p:spPr>
           <a:xfrm>
-            <a:off x="6400989" y="5580038"/>
-            <a:ext cx="1737360" cy="201168"/>
+            <a:off x="1542675" y="5003002"/>
+            <a:ext cx="731520" cy="164592"/>
           </a:xfrm>
           <a:prstGeom prst="rect">
             <a:avLst/>
           </a:prstGeom>
           <a:noFill/>
+          <a:ln/>
         </p:spPr>
         <p:txBody>
-          <a:bodyPr wrap="square" lIns="0" tIns="0" rIns="0" bIns="0">
-            <a:spAutoFit/>
+          <a:bodyPr wrap="square" lIns="0" tIns="0" rIns="0" bIns="0" rtlCol="0" anchor="ctr">
+            <a:noAutofit/>
           </a:bodyPr>
           <a:lstStyle/>
           <a:p>
-            <a:pPr algn="l">
-              <a:spcAft>
-                <a:spcPts val="0"/>
-              </a:spcAft>
+            <a:pPr marL="0" indent="0">
+              <a:buNone/>
             </a:pPr>
             <a:r>
-              <a:rPr sz="1000" b="1">
+              <a:rPr lang="en-US" sz="900" b="1" dirty="0">
                 <a:solidFill>
-                  <a:srgbClr val="0A0A0A"/>
+                  <a:srgbClr val="183F73"/>
                 </a:solidFill>
+                <a:latin typeface="微软雅黑" panose="020B0503020204020204" pitchFamily="34" charset="-122"/>
+                <a:ea typeface="微软雅黑" panose="020B0503020204020204" pitchFamily="34" charset="-122"/>
+                <a:cs typeface="Noto Sans CJK SC" pitchFamily="34" charset="-120"/>
               </a:rPr>
-              <a:t>正常还款率</a:t>
+              <a:t>2026/05/02</a:t>
             </a:r>
-            <a:r>
-              <a:rPr sz="800" b="0">
-                <a:solidFill>
-                  <a:srgbClr val="606060"/>
-                </a:solidFill>
-              </a:rPr>
-              <a:t>89%</a:t>
-            </a:r>
+            <a:endParaRPr lang="en-US" sz="900" dirty="0">
+              <a:latin typeface="微软雅黑" panose="020B0503020204020204" pitchFamily="34" charset="-122"/>
+              <a:ea typeface="微软雅黑" panose="020B0503020204020204" pitchFamily="34" charset="-122"/>
+            </a:endParaRPr>
           </a:p>
         </p:txBody>
       </p:sp>
       <p:sp>
         <p:nvSpPr>
-          <p:cNvPr id="153" name="用户-b2-2"/>
-          <p:cNvSpPr txBox="1"/>
+          <p:cNvPr id="76" name="Text 84">
+            <a:extLst>
+              <a:ext uri="{FF2B5EF4-FFF2-40B4-BE49-F238E27FC236}">
+                <a16:creationId xmlns:a16="http://schemas.microsoft.com/office/drawing/2014/main" id="{5004B1DF-DB97-446E-BEC7-15F37E5EDDCD}"/>
+              </a:ext>
+            </a:extLst>
+          </p:cNvPr>
+          <p:cNvSpPr/>
           <p:nvPr/>
         </p:nvSpPr>
         <p:spPr>
           <a:xfrm>
-            <a:off x="8165780" y="5580038"/>
-            <a:ext cx="1737360" cy="201168"/>
+            <a:off x="747655" y="5291038"/>
+            <a:ext cx="731520" cy="164592"/>
           </a:xfrm>
           <a:prstGeom prst="rect">
             <a:avLst/>
           </a:prstGeom>
           <a:noFill/>
+          <a:ln/>
         </p:spPr>
         <p:txBody>
-          <a:bodyPr wrap="square" lIns="0" tIns="0" rIns="0" bIns="0">
-            <a:spAutoFit/>
+          <a:bodyPr wrap="square" lIns="0" tIns="0" rIns="0" bIns="0" rtlCol="0" anchor="ctr">
+            <a:noAutofit/>
           </a:bodyPr>
           <a:lstStyle/>
           <a:p>
-            <a:pPr algn="l">
-              <a:spcAft>
-                <a:spcPts val="0"/>
-              </a:spcAft>
+            <a:pPr marL="0" indent="0">
+              <a:buNone/>
             </a:pPr>
             <a:r>
-              <a:rPr sz="1000" b="1">
+              <a:rPr lang="en-US" sz="900" dirty="0">
                 <a:solidFill>
-                  <a:srgbClr val="0A0A0A"/>
+                  <a:srgbClr val="111827"/>
                 </a:solidFill>
+                <a:latin typeface="微软雅黑" panose="020B0503020204020204" pitchFamily="34" charset="-122"/>
+                <a:ea typeface="微软雅黑" panose="020B0503020204020204" pitchFamily="34" charset="-122"/>
+                <a:cs typeface="Noto Sans CJK SC" pitchFamily="34" charset="-120"/>
               </a:rPr>
-              <a:t>历史贷款笔数</a:t>
+              <a:t>90天本笔还款</a:t>
             </a:r>
-            <a:r>
-              <a:rPr sz="800" b="0">
-                <a:solidFill>
-                  <a:srgbClr val="606060"/>
-                </a:solidFill>
-              </a:rPr>
-              <a:t>5 笔</a:t>
-            </a:r>
+            <a:endParaRPr lang="en-US" sz="900" dirty="0">
+              <a:latin typeface="微软雅黑" panose="020B0503020204020204" pitchFamily="34" charset="-122"/>
+              <a:ea typeface="微软雅黑" panose="020B0503020204020204" pitchFamily="34" charset="-122"/>
+            </a:endParaRPr>
           </a:p>
         </p:txBody>
       </p:sp>
       <p:sp>
         <p:nvSpPr>
-          <p:cNvPr id="154" name="用户-b2-3"/>
-          <p:cNvSpPr txBox="1"/>
+          <p:cNvPr id="77" name="Text 85">
+            <a:extLst>
+              <a:ext uri="{FF2B5EF4-FFF2-40B4-BE49-F238E27FC236}">
+                <a16:creationId xmlns:a16="http://schemas.microsoft.com/office/drawing/2014/main" id="{E91ECB8B-DDA8-4CC3-97F9-CA3D61C7F13D}"/>
+              </a:ext>
+            </a:extLst>
+          </p:cNvPr>
+          <p:cNvSpPr/>
           <p:nvPr/>
         </p:nvSpPr>
         <p:spPr>
           <a:xfrm>
-            <a:off x="9994392" y="5580038"/>
-            <a:ext cx="1737360" cy="201168"/>
+            <a:off x="1542675" y="5291038"/>
+            <a:ext cx="731520" cy="164592"/>
           </a:xfrm>
           <a:prstGeom prst="rect">
             <a:avLst/>
           </a:prstGeom>
           <a:noFill/>
+          <a:ln/>
         </p:spPr>
         <p:txBody>
-          <a:bodyPr wrap="square" lIns="0" tIns="0" rIns="0" bIns="0">
-            <a:spAutoFit/>
+          <a:bodyPr wrap="square" lIns="0" tIns="0" rIns="0" bIns="0" rtlCol="0" anchor="ctr">
+            <a:normAutofit/>
           </a:bodyPr>
           <a:lstStyle/>
           <a:p>
-            <a:pPr algn="l">
-              <a:spcAft>
-                <a:spcPts val="0"/>
-              </a:spcAft>
+            <a:pPr marL="0" indent="0">
+              <a:buNone/>
             </a:pPr>
             <a:r>
-              <a:rPr sz="1000" b="1" dirty="0" err="1">
+              <a:rPr lang="en-US" sz="900" b="1" dirty="0">
                 <a:solidFill>
-                  <a:srgbClr val="0A0A0A"/>
+                  <a:srgbClr val="183F73"/>
                 </a:solidFill>
+                <a:latin typeface="微软雅黑" panose="020B0503020204020204" pitchFamily="34" charset="-122"/>
+                <a:ea typeface="微软雅黑" panose="020B0503020204020204" pitchFamily="34" charset="-122"/>
+                <a:cs typeface="Noto Sans CJK SC" pitchFamily="34" charset="-120"/>
               </a:rPr>
-              <a:t>负债结构</a:t>
+              <a:t>5次</a:t>
             </a:r>
-            <a:r>
-              <a:rPr sz="800" b="0" dirty="0" err="1">
-                <a:solidFill>
-                  <a:srgbClr val="606060"/>
-                </a:solidFill>
-              </a:rPr>
-              <a:t>SACC</a:t>
-            </a:r>
-            <a:r>
-              <a:rPr sz="800" b="0" dirty="0">
-                <a:solidFill>
-                  <a:srgbClr val="606060"/>
-                </a:solidFill>
-              </a:rPr>
-              <a:t> 65% / Non-SACC 15%</a:t>
-            </a:r>
-            <a:br>
-              <a:rPr sz="800" b="0" dirty="0">
-                <a:solidFill>
-                  <a:srgbClr val="606060"/>
-                </a:solidFill>
-              </a:rPr>
-            </a:br>
-            <a:r>
-              <a:rPr sz="800" b="0" dirty="0">
-                <a:solidFill>
-                  <a:srgbClr val="606060"/>
-                </a:solidFill>
-              </a:rPr>
-              <a:t>BNPL 20%</a:t>
-            </a:r>
+            <a:endParaRPr lang="en-US" sz="900" dirty="0">
+              <a:latin typeface="微软雅黑" panose="020B0503020204020204" pitchFamily="34" charset="-122"/>
+              <a:ea typeface="微软雅黑" panose="020B0503020204020204" pitchFamily="34" charset="-122"/>
+            </a:endParaRPr>
           </a:p>
         </p:txBody>
       </p:sp>
       <p:sp>
         <p:nvSpPr>
-          <p:cNvPr id="155" name="Fa-c-履约表现-5"/>
-          <p:cNvSpPr txBox="1"/>
+          <p:cNvPr id="80" name="Text 88">
+            <a:extLst>
+              <a:ext uri="{FF2B5EF4-FFF2-40B4-BE49-F238E27FC236}">
+                <a16:creationId xmlns:a16="http://schemas.microsoft.com/office/drawing/2014/main" id="{F0F241B4-917B-4918-8B44-BFF56B8A190B}"/>
+              </a:ext>
+            </a:extLst>
+          </p:cNvPr>
+          <p:cNvSpPr/>
           <p:nvPr/>
         </p:nvSpPr>
         <p:spPr>
           <a:xfrm>
-            <a:off x="2383501" y="4892329"/>
-            <a:ext cx="1609344" cy="182880"/>
+            <a:off x="2503303" y="4138894"/>
+            <a:ext cx="731520" cy="164592"/>
           </a:xfrm>
           <a:prstGeom prst="rect">
             <a:avLst/>
           </a:prstGeom>
           <a:noFill/>
+          <a:ln/>
         </p:spPr>
         <p:txBody>
-          <a:bodyPr wrap="square" lIns="0" tIns="0" rIns="0" bIns="0">
-            <a:spAutoFit/>
+          <a:bodyPr wrap="square" lIns="0" tIns="0" rIns="0" bIns="0" rtlCol="0" anchor="ctr">
+            <a:normAutofit/>
           </a:bodyPr>
           <a:lstStyle/>
           <a:p>
-            <a:pPr algn="l">
-              <a:spcAft>
-                <a:spcPts val="0"/>
-              </a:spcAft>
+            <a:pPr marL="0" indent="0">
+              <a:buNone/>
             </a:pPr>
             <a:r>
-              <a:rPr sz="1000" b="1">
+              <a:rPr lang="en-US" sz="900" dirty="0">
                 <a:solidFill>
-                  <a:srgbClr val="0A0A0A"/>
+                  <a:srgbClr val="111827"/>
                 </a:solidFill>
+                <a:latin typeface="微软雅黑" panose="020B0503020204020204" pitchFamily="34" charset="-122"/>
+                <a:ea typeface="微软雅黑" panose="020B0503020204020204" pitchFamily="34" charset="-122"/>
+                <a:cs typeface="Noto Sans CJK SC" pitchFamily="34" charset="-120"/>
               </a:rPr>
-              <a:t>累计逾期</a:t>
+              <a:t>借款金额</a:t>
             </a:r>
-            <a:r>
-              <a:rPr sz="800" b="1">
-                <a:solidFill>
-                  <a:srgbClr val="D6A000"/>
-                </a:solidFill>
-              </a:rPr>
-              <a:t>1 次</a:t>
-            </a:r>
+            <a:endParaRPr lang="en-US" sz="900" dirty="0">
+              <a:latin typeface="微软雅黑" panose="020B0503020204020204" pitchFamily="34" charset="-122"/>
+              <a:ea typeface="微软雅黑" panose="020B0503020204020204" pitchFamily="34" charset="-122"/>
+            </a:endParaRPr>
           </a:p>
         </p:txBody>
       </p:sp>
       <p:sp>
         <p:nvSpPr>
-          <p:cNvPr id="156" name="Fa-life-进度"/>
-          <p:cNvSpPr txBox="1"/>
+          <p:cNvPr id="81" name="Text 89">
+            <a:extLst>
+              <a:ext uri="{FF2B5EF4-FFF2-40B4-BE49-F238E27FC236}">
+                <a16:creationId xmlns:a16="http://schemas.microsoft.com/office/drawing/2014/main" id="{E0E25EC8-54AB-4725-913A-5C4F1E976D3E}"/>
+              </a:ext>
+            </a:extLst>
+          </p:cNvPr>
+          <p:cNvSpPr/>
           <p:nvPr/>
         </p:nvSpPr>
         <p:spPr>
           <a:xfrm>
-            <a:off x="810733" y="5595747"/>
-            <a:ext cx="1609344" cy="182880"/>
+            <a:off x="3234823" y="4138894"/>
+            <a:ext cx="731520" cy="164592"/>
           </a:xfrm>
           <a:prstGeom prst="rect">
             <a:avLst/>
           </a:prstGeom>
           <a:noFill/>
+          <a:ln/>
         </p:spPr>
         <p:txBody>
-          <a:bodyPr wrap="square" lIns="0" tIns="0" rIns="0" bIns="0">
-            <a:spAutoFit/>
+          <a:bodyPr wrap="square" lIns="0" tIns="0" rIns="0" bIns="0" rtlCol="0" anchor="ctr">
+            <a:normAutofit/>
           </a:bodyPr>
           <a:lstStyle/>
           <a:p>
-            <a:pPr algn="l">
-              <a:spcAft>
-                <a:spcPts val="0"/>
-              </a:spcAft>
+            <a:pPr marL="0" indent="0">
+              <a:buNone/>
             </a:pPr>
             <a:r>
-              <a:rPr sz="1000" b="1">
+              <a:rPr lang="en-US" sz="900" b="1" dirty="0">
                 <a:solidFill>
-                  <a:srgbClr val="0A0A0A"/>
+                  <a:srgbClr val="183F73"/>
                 </a:solidFill>
+                <a:latin typeface="微软雅黑" panose="020B0503020204020204" pitchFamily="34" charset="-122"/>
+                <a:ea typeface="微软雅黑" panose="020B0503020204020204" pitchFamily="34" charset="-122"/>
+                <a:cs typeface="Noto Sans CJK SC" pitchFamily="34" charset="-120"/>
               </a:rPr>
-              <a:t>本金偿还进度</a:t>
+              <a:t>A$1,500</a:t>
             </a:r>
-            <a:r>
-              <a:rPr sz="800" b="0">
-                <a:solidFill>
-                  <a:srgbClr val="606060"/>
-                </a:solidFill>
-              </a:rPr>
-              <a:t>62%</a:t>
-            </a:r>
+            <a:endParaRPr lang="en-US" sz="900" dirty="0">
+              <a:latin typeface="微软雅黑" panose="020B0503020204020204" pitchFamily="34" charset="-122"/>
+              <a:ea typeface="微软雅黑" panose="020B0503020204020204" pitchFamily="34" charset="-122"/>
+            </a:endParaRPr>
           </a:p>
         </p:txBody>
       </p:sp>
       <p:sp>
         <p:nvSpPr>
-          <p:cNvPr id="157" name="Fa-life-期数"/>
-          <p:cNvSpPr txBox="1"/>
+          <p:cNvPr id="88" name="Text 90">
+            <a:extLst>
+              <a:ext uri="{FF2B5EF4-FFF2-40B4-BE49-F238E27FC236}">
+                <a16:creationId xmlns:a16="http://schemas.microsoft.com/office/drawing/2014/main" id="{A5FBEE99-2852-44E1-A651-C54E5CDC7B8F}"/>
+              </a:ext>
+            </a:extLst>
+          </p:cNvPr>
+          <p:cNvSpPr/>
           <p:nvPr/>
         </p:nvSpPr>
         <p:spPr>
           <a:xfrm>
-            <a:off x="2383501" y="5595747"/>
-            <a:ext cx="1609344" cy="182880"/>
+            <a:off x="2503303" y="4426930"/>
+            <a:ext cx="731520" cy="164592"/>
           </a:xfrm>
           <a:prstGeom prst="rect">
             <a:avLst/>
           </a:prstGeom>
           <a:noFill/>
+          <a:ln/>
         </p:spPr>
         <p:txBody>
-          <a:bodyPr wrap="square" lIns="0" tIns="0" rIns="0" bIns="0">
-            <a:spAutoFit/>
+          <a:bodyPr wrap="square" lIns="0" tIns="0" rIns="0" bIns="0" rtlCol="0" anchor="ctr">
+            <a:normAutofit/>
           </a:bodyPr>
           <a:lstStyle/>
           <a:p>
-            <a:pPr algn="l">
-              <a:spcAft>
-                <a:spcPts val="0"/>
-              </a:spcAft>
+            <a:pPr marL="0" indent="0">
+              <a:buNone/>
             </a:pPr>
             <a:r>
-              <a:rPr sz="1000" b="1">
+              <a:rPr lang="en-US" sz="900" dirty="0">
                 <a:solidFill>
-                  <a:srgbClr val="0A0A0A"/>
+                  <a:srgbClr val="111827"/>
                 </a:solidFill>
+                <a:latin typeface="微软雅黑" panose="020B0503020204020204" pitchFamily="34" charset="-122"/>
+                <a:ea typeface="微软雅黑" panose="020B0503020204020204" pitchFamily="34" charset="-122"/>
+                <a:cs typeface="Noto Sans CJK SC" pitchFamily="34" charset="-120"/>
               </a:rPr>
-              <a:t>总期数</a:t>
+              <a:t>已还本金</a:t>
             </a:r>
-            <a:r>
-              <a:rPr sz="800" b="0">
-                <a:solidFill>
-                  <a:srgbClr val="606060"/>
-                </a:solidFill>
-              </a:rPr>
-              <a:t>12 · 已还 8</a:t>
-            </a:r>
+            <a:endParaRPr lang="en-US" sz="900" dirty="0">
+              <a:latin typeface="微软雅黑" panose="020B0503020204020204" pitchFamily="34" charset="-122"/>
+              <a:ea typeface="微软雅黑" panose="020B0503020204020204" pitchFamily="34" charset="-122"/>
+            </a:endParaRPr>
           </a:p>
         </p:txBody>
       </p:sp>
       <p:sp>
         <p:nvSpPr>
-          <p:cNvPr id="158" name="Fa-life-按时率"/>
-          <p:cNvSpPr txBox="1"/>
+          <p:cNvPr id="89" name="Text 91">
+            <a:extLst>
+              <a:ext uri="{FF2B5EF4-FFF2-40B4-BE49-F238E27FC236}">
+                <a16:creationId xmlns:a16="http://schemas.microsoft.com/office/drawing/2014/main" id="{2CDD1955-2737-4CEF-AAE1-265613D9F196}"/>
+              </a:ext>
+            </a:extLst>
+          </p:cNvPr>
+          <p:cNvSpPr/>
           <p:nvPr/>
         </p:nvSpPr>
         <p:spPr>
           <a:xfrm>
-            <a:off x="4102517" y="5595747"/>
-            <a:ext cx="1609344" cy="182880"/>
+            <a:off x="3234823" y="4426930"/>
+            <a:ext cx="731520" cy="164592"/>
           </a:xfrm>
           <a:prstGeom prst="rect">
             <a:avLst/>
           </a:prstGeom>
           <a:noFill/>
+          <a:ln/>
         </p:spPr>
         <p:txBody>
-          <a:bodyPr wrap="square" lIns="0" tIns="0" rIns="0" bIns="0">
-            <a:spAutoFit/>
+          <a:bodyPr wrap="square" lIns="0" tIns="0" rIns="0" bIns="0" rtlCol="0" anchor="ctr">
+            <a:normAutofit/>
           </a:bodyPr>
           <a:lstStyle/>
           <a:p>
-            <a:pPr algn="l">
-              <a:spcAft>
-                <a:spcPts val="0"/>
-              </a:spcAft>
+            <a:pPr marL="0" indent="0">
+              <a:buNone/>
             </a:pPr>
             <a:r>
-              <a:rPr sz="1000" b="1">
+              <a:rPr lang="en-US" sz="900" b="1" dirty="0">
                 <a:solidFill>
-                  <a:srgbClr val="0A0A0A"/>
+                  <a:srgbClr val="183F73"/>
                 </a:solidFill>
+                <a:latin typeface="微软雅黑" panose="020B0503020204020204" pitchFamily="34" charset="-122"/>
+                <a:ea typeface="微软雅黑" panose="020B0503020204020204" pitchFamily="34" charset="-122"/>
+                <a:cs typeface="Noto Sans CJK SC" pitchFamily="34" charset="-120"/>
               </a:rPr>
-              <a:t>按时还款率</a:t>
+              <a:t>A$936</a:t>
             </a:r>
-            <a:r>
-              <a:rPr sz="800" b="1">
-                <a:solidFill>
-                  <a:srgbClr val="D6A000"/>
-                </a:solidFill>
-              </a:rPr>
-              <a:t>83%</a:t>
-            </a:r>
+            <a:endParaRPr lang="en-US" sz="900" dirty="0">
+              <a:latin typeface="微软雅黑" panose="020B0503020204020204" pitchFamily="34" charset="-122"/>
+              <a:ea typeface="微软雅黑" panose="020B0503020204020204" pitchFamily="34" charset="-122"/>
+            </a:endParaRPr>
           </a:p>
         </p:txBody>
       </p:sp>
       <p:sp>
         <p:nvSpPr>
-          <p:cNvPr id="159" name="Fa-life-还款日"/>
-          <p:cNvSpPr txBox="1"/>
+          <p:cNvPr id="90" name="Text 92">
+            <a:extLst>
+              <a:ext uri="{FF2B5EF4-FFF2-40B4-BE49-F238E27FC236}">
+                <a16:creationId xmlns:a16="http://schemas.microsoft.com/office/drawing/2014/main" id="{7F8D2BA9-4E8F-4DAB-AEB2-AC3205256A30}"/>
+              </a:ext>
+            </a:extLst>
+          </p:cNvPr>
+          <p:cNvSpPr/>
           <p:nvPr/>
         </p:nvSpPr>
         <p:spPr>
           <a:xfrm>
-            <a:off x="810733" y="5815203"/>
-            <a:ext cx="1609344" cy="182880"/>
+            <a:off x="2503303" y="4714966"/>
+            <a:ext cx="731520" cy="164592"/>
           </a:xfrm>
           <a:prstGeom prst="rect">
             <a:avLst/>
           </a:prstGeom>
           <a:noFill/>
+          <a:ln/>
         </p:spPr>
         <p:txBody>
-          <a:bodyPr wrap="square" lIns="0" tIns="0" rIns="0" bIns="0">
-            <a:spAutoFit/>
+          <a:bodyPr wrap="square" lIns="0" tIns="0" rIns="0" bIns="0" rtlCol="0" anchor="ctr">
+            <a:normAutofit/>
           </a:bodyPr>
           <a:lstStyle/>
           <a:p>
-            <a:pPr algn="l">
-              <a:spcAft>
-                <a:spcPts val="0"/>
-              </a:spcAft>
+            <a:pPr marL="0" indent="0">
+              <a:buNone/>
             </a:pPr>
             <a:r>
-              <a:rPr sz="1000" b="1">
+              <a:rPr lang="en-US" sz="900" dirty="0">
                 <a:solidFill>
-                  <a:srgbClr val="0A0A0A"/>
+                  <a:srgbClr val="111827"/>
                 </a:solidFill>
+                <a:latin typeface="微软雅黑" panose="020B0503020204020204" pitchFamily="34" charset="-122"/>
+                <a:ea typeface="微软雅黑" panose="020B0503020204020204" pitchFamily="34" charset="-122"/>
+                <a:cs typeface="Noto Sans CJK SC" pitchFamily="34" charset="-120"/>
               </a:rPr>
-              <a:t>下一还款日</a:t>
+              <a:t>剩余本金</a:t>
             </a:r>
-            <a:r>
-              <a:rPr sz="800" b="0">
-                <a:solidFill>
-                  <a:srgbClr val="606060"/>
-                </a:solidFill>
-              </a:rPr>
-              <a:t>2026/05/02</a:t>
-            </a:r>
+            <a:endParaRPr lang="en-US" sz="900" dirty="0">
+              <a:latin typeface="微软雅黑" panose="020B0503020204020204" pitchFamily="34" charset="-122"/>
+              <a:ea typeface="微软雅黑" panose="020B0503020204020204" pitchFamily="34" charset="-122"/>
+            </a:endParaRPr>
           </a:p>
         </p:txBody>
       </p:sp>
       <p:sp>
         <p:nvSpPr>
-          <p:cNvPr id="160" name="Fa-life-逾期额"/>
-          <p:cNvSpPr txBox="1"/>
+          <p:cNvPr id="91" name="Text 93">
+            <a:extLst>
+              <a:ext uri="{FF2B5EF4-FFF2-40B4-BE49-F238E27FC236}">
+                <a16:creationId xmlns:a16="http://schemas.microsoft.com/office/drawing/2014/main" id="{7CEB65BC-87D9-442B-BFE7-3C434F15DEC9}"/>
+              </a:ext>
+            </a:extLst>
+          </p:cNvPr>
+          <p:cNvSpPr/>
           <p:nvPr/>
         </p:nvSpPr>
         <p:spPr>
           <a:xfrm>
-            <a:off x="2383501" y="5815203"/>
-            <a:ext cx="1609344" cy="182880"/>
+            <a:off x="3234823" y="4714966"/>
+            <a:ext cx="731520" cy="164592"/>
           </a:xfrm>
           <a:prstGeom prst="rect">
             <a:avLst/>
           </a:prstGeom>
           <a:noFill/>
+          <a:ln/>
         </p:spPr>
         <p:txBody>
-          <a:bodyPr wrap="square" lIns="0" tIns="0" rIns="0" bIns="0">
-            <a:spAutoFit/>
+          <a:bodyPr wrap="square" lIns="0" tIns="0" rIns="0" bIns="0" rtlCol="0" anchor="ctr">
+            <a:normAutofit/>
           </a:bodyPr>
           <a:lstStyle/>
           <a:p>
-            <a:pPr algn="l">
-              <a:spcAft>
-                <a:spcPts val="0"/>
-              </a:spcAft>
+            <a:pPr marL="0" indent="0">
+              <a:buNone/>
             </a:pPr>
             <a:r>
-              <a:rPr sz="1000" b="1">
+              <a:rPr lang="en-US" sz="900" b="1" dirty="0">
                 <a:solidFill>
-                  <a:srgbClr val="0A0A0A"/>
+                  <a:srgbClr val="183F73"/>
                 </a:solidFill>
+                <a:latin typeface="微软雅黑" panose="020B0503020204020204" pitchFamily="34" charset="-122"/>
+                <a:ea typeface="微软雅黑" panose="020B0503020204020204" pitchFamily="34" charset="-122"/>
+                <a:cs typeface="Noto Sans CJK SC" pitchFamily="34" charset="-120"/>
               </a:rPr>
-              <a:t>当前逾期金额</a:t>
+              <a:t>A$564</a:t>
             </a:r>
-            <a:r>
-              <a:rPr sz="800" b="0">
-                <a:solidFill>
-                  <a:srgbClr val="606060"/>
-                </a:solidFill>
-              </a:rPr>
-              <a:t>A$0</a:t>
-            </a:r>
+            <a:endParaRPr lang="en-US" sz="900" dirty="0">
+              <a:latin typeface="微软雅黑" panose="020B0503020204020204" pitchFamily="34" charset="-122"/>
+              <a:ea typeface="微软雅黑" panose="020B0503020204020204" pitchFamily="34" charset="-122"/>
+            </a:endParaRPr>
           </a:p>
         </p:txBody>
       </p:sp>
       <p:sp>
         <p:nvSpPr>
-          <p:cNvPr id="161" name="Fa-life-状态"/>
-          <p:cNvSpPr txBox="1"/>
+          <p:cNvPr id="92" name="Text 94">
+            <a:extLst>
+              <a:ext uri="{FF2B5EF4-FFF2-40B4-BE49-F238E27FC236}">
+                <a16:creationId xmlns:a16="http://schemas.microsoft.com/office/drawing/2014/main" id="{B9FD79F0-C115-4AB9-B8ED-131C45252F34}"/>
+              </a:ext>
+            </a:extLst>
+          </p:cNvPr>
+          <p:cNvSpPr/>
           <p:nvPr/>
         </p:nvSpPr>
         <p:spPr>
           <a:xfrm>
-            <a:off x="4102517" y="5815203"/>
-            <a:ext cx="1609344" cy="182880"/>
+            <a:off x="2503303" y="5003002"/>
+            <a:ext cx="731520" cy="164592"/>
           </a:xfrm>
           <a:prstGeom prst="rect">
             <a:avLst/>
           </a:prstGeom>
           <a:noFill/>
+          <a:ln/>
         </p:spPr>
         <p:txBody>
-          <a:bodyPr wrap="square" lIns="0" tIns="0" rIns="0" bIns="0">
-            <a:spAutoFit/>
+          <a:bodyPr wrap="square" lIns="0" tIns="0" rIns="0" bIns="0" rtlCol="0" anchor="ctr">
+            <a:normAutofit/>
           </a:bodyPr>
           <a:lstStyle/>
           <a:p>
-            <a:pPr algn="l">
-              <a:spcAft>
-                <a:spcPts val="0"/>
-              </a:spcAft>
+            <a:pPr marL="0" indent="0">
+              <a:buNone/>
             </a:pPr>
             <a:r>
-              <a:rPr sz="1000" b="1">
+              <a:rPr lang="en-US" sz="900" dirty="0">
                 <a:solidFill>
-                  <a:srgbClr val="0A0A0A"/>
+                  <a:srgbClr val="111827"/>
                 </a:solidFill>
+                <a:latin typeface="微软雅黑" panose="020B0503020204020204" pitchFamily="34" charset="-122"/>
+                <a:ea typeface="微软雅黑" panose="020B0503020204020204" pitchFamily="34" charset="-122"/>
+                <a:cs typeface="Noto Sans CJK SC" pitchFamily="34" charset="-120"/>
+              </a:rPr>
+              <a:t>偿还进度</a:t>
+            </a:r>
+            <a:endParaRPr lang="en-US" sz="900" dirty="0">
+              <a:latin typeface="微软雅黑" panose="020B0503020204020204" pitchFamily="34" charset="-122"/>
+              <a:ea typeface="微软雅黑" panose="020B0503020204020204" pitchFamily="34" charset="-122"/>
+            </a:endParaRPr>
+          </a:p>
+        </p:txBody>
+      </p:sp>
+      <p:sp>
+        <p:nvSpPr>
+          <p:cNvPr id="93" name="Text 95">
+            <a:extLst>
+              <a:ext uri="{FF2B5EF4-FFF2-40B4-BE49-F238E27FC236}">
+                <a16:creationId xmlns:a16="http://schemas.microsoft.com/office/drawing/2014/main" id="{6C02DC21-E1C2-4A1A-B31D-18F24FBE5E61}"/>
+              </a:ext>
+            </a:extLst>
+          </p:cNvPr>
+          <p:cNvSpPr/>
+          <p:nvPr/>
+        </p:nvSpPr>
+        <p:spPr>
+          <a:xfrm>
+            <a:off x="3234823" y="5003002"/>
+            <a:ext cx="731520" cy="164592"/>
+          </a:xfrm>
+          <a:prstGeom prst="rect">
+            <a:avLst/>
+          </a:prstGeom>
+          <a:noFill/>
+          <a:ln/>
+        </p:spPr>
+        <p:txBody>
+          <a:bodyPr wrap="square" lIns="0" tIns="0" rIns="0" bIns="0" rtlCol="0" anchor="ctr">
+            <a:normAutofit/>
+          </a:bodyPr>
+          <a:lstStyle/>
+          <a:p>
+            <a:pPr marL="0" indent="0">
+              <a:buNone/>
+            </a:pPr>
+            <a:r>
+              <a:rPr lang="en-US" sz="900" b="1" dirty="0">
+                <a:solidFill>
+                  <a:srgbClr val="183F73"/>
+                </a:solidFill>
+                <a:latin typeface="微软雅黑" panose="020B0503020204020204" pitchFamily="34" charset="-122"/>
+                <a:ea typeface="微软雅黑" panose="020B0503020204020204" pitchFamily="34" charset="-122"/>
+                <a:cs typeface="Noto Sans CJK SC" pitchFamily="34" charset="-120"/>
+              </a:rPr>
+              <a:t>62%</a:t>
+            </a:r>
+            <a:endParaRPr lang="en-US" sz="900" dirty="0">
+              <a:latin typeface="微软雅黑" panose="020B0503020204020204" pitchFamily="34" charset="-122"/>
+              <a:ea typeface="微软雅黑" panose="020B0503020204020204" pitchFamily="34" charset="-122"/>
+            </a:endParaRPr>
+          </a:p>
+        </p:txBody>
+      </p:sp>
+      <p:sp>
+        <p:nvSpPr>
+          <p:cNvPr id="94" name="Text 96">
+            <a:extLst>
+              <a:ext uri="{FF2B5EF4-FFF2-40B4-BE49-F238E27FC236}">
+                <a16:creationId xmlns:a16="http://schemas.microsoft.com/office/drawing/2014/main" id="{6281DCF0-BD4F-49FB-A5CE-0EB40910F3AE}"/>
+              </a:ext>
+            </a:extLst>
+          </p:cNvPr>
+          <p:cNvSpPr/>
+          <p:nvPr/>
+        </p:nvSpPr>
+        <p:spPr>
+          <a:xfrm>
+            <a:off x="2503303" y="5291038"/>
+            <a:ext cx="731520" cy="164592"/>
+          </a:xfrm>
+          <a:prstGeom prst="rect">
+            <a:avLst/>
+          </a:prstGeom>
+          <a:noFill/>
+          <a:ln/>
+        </p:spPr>
+        <p:txBody>
+          <a:bodyPr wrap="square" lIns="0" tIns="0" rIns="0" bIns="0" rtlCol="0" anchor="ctr">
+            <a:normAutofit/>
+          </a:bodyPr>
+          <a:lstStyle/>
+          <a:p>
+            <a:pPr marL="0" indent="0">
+              <a:buNone/>
+            </a:pPr>
+            <a:r>
+              <a:rPr lang="en-US" sz="900" dirty="0">
+                <a:solidFill>
+                  <a:srgbClr val="111827"/>
+                </a:solidFill>
+                <a:latin typeface="微软雅黑" panose="020B0503020204020204" pitchFamily="34" charset="-122"/>
+                <a:ea typeface="微软雅黑" panose="020B0503020204020204" pitchFamily="34" charset="-122"/>
+                <a:cs typeface="Noto Sans CJK SC" pitchFamily="34" charset="-120"/>
+              </a:rPr>
+              <a:t>APR</a:t>
+            </a:r>
+            <a:endParaRPr lang="en-US" sz="900" dirty="0">
+              <a:latin typeface="微软雅黑" panose="020B0503020204020204" pitchFamily="34" charset="-122"/>
+              <a:ea typeface="微软雅黑" panose="020B0503020204020204" pitchFamily="34" charset="-122"/>
+            </a:endParaRPr>
+          </a:p>
+        </p:txBody>
+      </p:sp>
+      <p:sp>
+        <p:nvSpPr>
+          <p:cNvPr id="95" name="Text 97">
+            <a:extLst>
+              <a:ext uri="{FF2B5EF4-FFF2-40B4-BE49-F238E27FC236}">
+                <a16:creationId xmlns:a16="http://schemas.microsoft.com/office/drawing/2014/main" id="{03E0FCBE-AF3A-4BB1-889A-C8E3AEAD4782}"/>
+              </a:ext>
+            </a:extLst>
+          </p:cNvPr>
+          <p:cNvSpPr/>
+          <p:nvPr/>
+        </p:nvSpPr>
+        <p:spPr>
+          <a:xfrm>
+            <a:off x="3234823" y="5291038"/>
+            <a:ext cx="731520" cy="164592"/>
+          </a:xfrm>
+          <a:prstGeom prst="rect">
+            <a:avLst/>
+          </a:prstGeom>
+          <a:noFill/>
+          <a:ln/>
+        </p:spPr>
+        <p:txBody>
+          <a:bodyPr wrap="square" lIns="0" tIns="0" rIns="0" bIns="0" rtlCol="0" anchor="ctr">
+            <a:normAutofit/>
+          </a:bodyPr>
+          <a:lstStyle/>
+          <a:p>
+            <a:pPr marL="0" indent="0">
+              <a:buNone/>
+            </a:pPr>
+            <a:r>
+              <a:rPr lang="en-US" sz="900" b="1" dirty="0">
+                <a:solidFill>
+                  <a:srgbClr val="183F73"/>
+                </a:solidFill>
+                <a:latin typeface="微软雅黑" panose="020B0503020204020204" pitchFamily="34" charset="-122"/>
+                <a:ea typeface="微软雅黑" panose="020B0503020204020204" pitchFamily="34" charset="-122"/>
+                <a:cs typeface="Noto Sans CJK SC" pitchFamily="34" charset="-120"/>
+              </a:rPr>
+              <a:t>42%</a:t>
+            </a:r>
+            <a:endParaRPr lang="en-US" sz="900" dirty="0">
+              <a:latin typeface="微软雅黑" panose="020B0503020204020204" pitchFamily="34" charset="-122"/>
+              <a:ea typeface="微软雅黑" panose="020B0503020204020204" pitchFamily="34" charset="-122"/>
+            </a:endParaRPr>
+          </a:p>
+        </p:txBody>
+      </p:sp>
+      <p:sp>
+        <p:nvSpPr>
+          <p:cNvPr id="96" name="Text 98">
+            <a:extLst>
+              <a:ext uri="{FF2B5EF4-FFF2-40B4-BE49-F238E27FC236}">
+                <a16:creationId xmlns:a16="http://schemas.microsoft.com/office/drawing/2014/main" id="{05926D2D-AFF2-4F95-A8D7-64F4C8818F1F}"/>
+              </a:ext>
+            </a:extLst>
+          </p:cNvPr>
+          <p:cNvSpPr/>
+          <p:nvPr/>
+        </p:nvSpPr>
+        <p:spPr>
+          <a:xfrm>
+            <a:off x="2503303" y="5579074"/>
+            <a:ext cx="731520" cy="164592"/>
+          </a:xfrm>
+          <a:prstGeom prst="rect">
+            <a:avLst/>
+          </a:prstGeom>
+          <a:noFill/>
+          <a:ln/>
+        </p:spPr>
+        <p:txBody>
+          <a:bodyPr wrap="square" lIns="0" tIns="0" rIns="0" bIns="0" rtlCol="0" anchor="ctr">
+            <a:normAutofit/>
+          </a:bodyPr>
+          <a:lstStyle/>
+          <a:p>
+            <a:pPr marL="0" indent="0">
+              <a:buNone/>
+            </a:pPr>
+            <a:r>
+              <a:rPr lang="en-US" sz="900" dirty="0">
+                <a:solidFill>
+                  <a:srgbClr val="111827"/>
+                </a:solidFill>
+                <a:latin typeface="微软雅黑" panose="020B0503020204020204" pitchFamily="34" charset="-122"/>
+                <a:ea typeface="微软雅黑" panose="020B0503020204020204" pitchFamily="34" charset="-122"/>
+                <a:cs typeface="Noto Sans CJK SC" pitchFamily="34" charset="-120"/>
+              </a:rPr>
+              <a:t>预计总还款</a:t>
+            </a:r>
+            <a:endParaRPr lang="en-US" sz="900" dirty="0">
+              <a:latin typeface="微软雅黑" panose="020B0503020204020204" pitchFamily="34" charset="-122"/>
+              <a:ea typeface="微软雅黑" panose="020B0503020204020204" pitchFamily="34" charset="-122"/>
+            </a:endParaRPr>
+          </a:p>
+        </p:txBody>
+      </p:sp>
+      <p:sp>
+        <p:nvSpPr>
+          <p:cNvPr id="97" name="Text 99">
+            <a:extLst>
+              <a:ext uri="{FF2B5EF4-FFF2-40B4-BE49-F238E27FC236}">
+                <a16:creationId xmlns:a16="http://schemas.microsoft.com/office/drawing/2014/main" id="{299E606E-37A1-49BB-BEA7-984421190C4E}"/>
+              </a:ext>
+            </a:extLst>
+          </p:cNvPr>
+          <p:cNvSpPr/>
+          <p:nvPr/>
+        </p:nvSpPr>
+        <p:spPr>
+          <a:xfrm>
+            <a:off x="3234823" y="5579074"/>
+            <a:ext cx="731520" cy="164592"/>
+          </a:xfrm>
+          <a:prstGeom prst="rect">
+            <a:avLst/>
+          </a:prstGeom>
+          <a:noFill/>
+          <a:ln/>
+        </p:spPr>
+        <p:txBody>
+          <a:bodyPr wrap="square" lIns="0" tIns="0" rIns="0" bIns="0" rtlCol="0" anchor="ctr">
+            <a:normAutofit/>
+          </a:bodyPr>
+          <a:lstStyle/>
+          <a:p>
+            <a:pPr marL="0" indent="0">
+              <a:buNone/>
+            </a:pPr>
+            <a:r>
+              <a:rPr lang="en-US" sz="900" b="1" dirty="0">
+                <a:solidFill>
+                  <a:srgbClr val="183F73"/>
+                </a:solidFill>
+                <a:latin typeface="微软雅黑" panose="020B0503020204020204" pitchFamily="34" charset="-122"/>
+                <a:ea typeface="微软雅黑" panose="020B0503020204020204" pitchFamily="34" charset="-122"/>
+                <a:cs typeface="Noto Sans CJK SC" pitchFamily="34" charset="-120"/>
+              </a:rPr>
+              <a:t>A$1,872</a:t>
+            </a:r>
+            <a:endParaRPr lang="en-US" sz="900" dirty="0">
+              <a:latin typeface="微软雅黑" panose="020B0503020204020204" pitchFamily="34" charset="-122"/>
+              <a:ea typeface="微软雅黑" panose="020B0503020204020204" pitchFamily="34" charset="-122"/>
+            </a:endParaRPr>
+          </a:p>
+        </p:txBody>
+      </p:sp>
+      <p:sp>
+        <p:nvSpPr>
+          <p:cNvPr id="98" name="Text 100">
+            <a:extLst>
+              <a:ext uri="{FF2B5EF4-FFF2-40B4-BE49-F238E27FC236}">
+                <a16:creationId xmlns:a16="http://schemas.microsoft.com/office/drawing/2014/main" id="{B400773D-92C3-401C-812A-1073FF7B9F12}"/>
+              </a:ext>
+            </a:extLst>
+          </p:cNvPr>
+          <p:cNvSpPr/>
+          <p:nvPr/>
+        </p:nvSpPr>
+        <p:spPr>
+          <a:xfrm>
+            <a:off x="2503303" y="5867110"/>
+            <a:ext cx="731520" cy="164592"/>
+          </a:xfrm>
+          <a:prstGeom prst="rect">
+            <a:avLst/>
+          </a:prstGeom>
+          <a:noFill/>
+          <a:ln/>
+        </p:spPr>
+        <p:txBody>
+          <a:bodyPr wrap="square" lIns="0" tIns="0" rIns="0" bIns="0" rtlCol="0" anchor="ctr">
+            <a:normAutofit/>
+          </a:bodyPr>
+          <a:lstStyle/>
+          <a:p>
+            <a:pPr marL="0" indent="0">
+              <a:buNone/>
+            </a:pPr>
+            <a:r>
+              <a:rPr lang="en-US" sz="900" dirty="0">
+                <a:solidFill>
+                  <a:srgbClr val="111827"/>
+                </a:solidFill>
+                <a:latin typeface="微软雅黑" panose="020B0503020204020204" pitchFamily="34" charset="-122"/>
+                <a:ea typeface="微软雅黑" panose="020B0503020204020204" pitchFamily="34" charset="-122"/>
+                <a:cs typeface="Noto Sans CJK SC" pitchFamily="34" charset="-120"/>
+              </a:rPr>
+              <a:t>利息成本</a:t>
+            </a:r>
+            <a:endParaRPr lang="en-US" sz="900" dirty="0">
+              <a:latin typeface="微软雅黑" panose="020B0503020204020204" pitchFamily="34" charset="-122"/>
+              <a:ea typeface="微软雅黑" panose="020B0503020204020204" pitchFamily="34" charset="-122"/>
+            </a:endParaRPr>
+          </a:p>
+        </p:txBody>
+      </p:sp>
+      <p:sp>
+        <p:nvSpPr>
+          <p:cNvPr id="99" name="Text 101">
+            <a:extLst>
+              <a:ext uri="{FF2B5EF4-FFF2-40B4-BE49-F238E27FC236}">
+                <a16:creationId xmlns:a16="http://schemas.microsoft.com/office/drawing/2014/main" id="{CA294CE9-8E97-4AE1-93CA-358A3DBE4F5D}"/>
+              </a:ext>
+            </a:extLst>
+          </p:cNvPr>
+          <p:cNvSpPr/>
+          <p:nvPr/>
+        </p:nvSpPr>
+        <p:spPr>
+          <a:xfrm>
+            <a:off x="3234823" y="5867110"/>
+            <a:ext cx="731520" cy="164592"/>
+          </a:xfrm>
+          <a:prstGeom prst="rect">
+            <a:avLst/>
+          </a:prstGeom>
+          <a:noFill/>
+          <a:ln/>
+        </p:spPr>
+        <p:txBody>
+          <a:bodyPr wrap="square" lIns="0" tIns="0" rIns="0" bIns="0" rtlCol="0" anchor="ctr">
+            <a:normAutofit/>
+          </a:bodyPr>
+          <a:lstStyle/>
+          <a:p>
+            <a:pPr marL="0" indent="0">
+              <a:buNone/>
+            </a:pPr>
+            <a:r>
+              <a:rPr lang="en-US" sz="900" b="1" dirty="0">
+                <a:solidFill>
+                  <a:srgbClr val="183F73"/>
+                </a:solidFill>
+                <a:latin typeface="微软雅黑" panose="020B0503020204020204" pitchFamily="34" charset="-122"/>
+                <a:ea typeface="微软雅黑" panose="020B0503020204020204" pitchFamily="34" charset="-122"/>
+                <a:cs typeface="Noto Sans CJK SC" pitchFamily="34" charset="-120"/>
+              </a:rPr>
+              <a:t>A$372</a:t>
+            </a:r>
+            <a:endParaRPr lang="en-US" sz="900" dirty="0">
+              <a:latin typeface="微软雅黑" panose="020B0503020204020204" pitchFamily="34" charset="-122"/>
+              <a:ea typeface="微软雅黑" panose="020B0503020204020204" pitchFamily="34" charset="-122"/>
+            </a:endParaRPr>
+          </a:p>
+        </p:txBody>
+      </p:sp>
+      <p:grpSp>
+        <p:nvGrpSpPr>
+          <p:cNvPr id="5" name="组合 4">
+            <a:extLst>
+              <a:ext uri="{FF2B5EF4-FFF2-40B4-BE49-F238E27FC236}">
+                <a16:creationId xmlns:a16="http://schemas.microsoft.com/office/drawing/2014/main" id="{FF09D450-8F80-484F-BAFB-2EE32790E985}"/>
+              </a:ext>
+            </a:extLst>
+          </p:cNvPr>
+          <p:cNvGrpSpPr/>
+          <p:nvPr/>
+        </p:nvGrpSpPr>
+        <p:grpSpPr>
+          <a:xfrm>
+            <a:off x="683512" y="3743557"/>
+            <a:ext cx="5138928" cy="256032"/>
+            <a:chOff x="751264" y="3861602"/>
+            <a:chExt cx="5138928" cy="256032"/>
+          </a:xfrm>
+        </p:grpSpPr>
+        <p:sp>
+          <p:nvSpPr>
+            <p:cNvPr id="66" name="Shape 74">
+              <a:extLst>
+                <a:ext uri="{FF2B5EF4-FFF2-40B4-BE49-F238E27FC236}">
+                  <a16:creationId xmlns:a16="http://schemas.microsoft.com/office/drawing/2014/main" id="{B05981E9-E178-4CBD-B13E-D58E9E385B87}"/>
+                </a:ext>
+              </a:extLst>
+            </p:cNvPr>
+            <p:cNvSpPr/>
+            <p:nvPr/>
+          </p:nvSpPr>
+          <p:spPr>
+            <a:xfrm>
+              <a:off x="751264" y="3889034"/>
+              <a:ext cx="0" cy="228600"/>
+            </a:xfrm>
+            <a:prstGeom prst="line">
+              <a:avLst/>
+            </a:prstGeom>
+            <a:noFill/>
+            <a:ln w="25400">
+              <a:solidFill>
+                <a:srgbClr val="D99A00"/>
+              </a:solidFill>
+              <a:prstDash val="solid"/>
+            </a:ln>
+          </p:spPr>
+        </p:sp>
+        <p:sp>
+          <p:nvSpPr>
+            <p:cNvPr id="67" name="Text 75">
+              <a:extLst>
+                <a:ext uri="{FF2B5EF4-FFF2-40B4-BE49-F238E27FC236}">
+                  <a16:creationId xmlns:a16="http://schemas.microsoft.com/office/drawing/2014/main" id="{6E969A5F-FBDC-425D-BC2F-BD774DC9B480}"/>
+                </a:ext>
+              </a:extLst>
+            </p:cNvPr>
+            <p:cNvSpPr/>
+            <p:nvPr/>
+          </p:nvSpPr>
+          <p:spPr>
+            <a:xfrm>
+              <a:off x="824416" y="3861602"/>
+              <a:ext cx="1554480" cy="237744"/>
+            </a:xfrm>
+            <a:prstGeom prst="rect">
+              <a:avLst/>
+            </a:prstGeom>
+            <a:noFill/>
+            <a:ln/>
+          </p:spPr>
+          <p:txBody>
+            <a:bodyPr wrap="square" lIns="0" tIns="0" rIns="0" bIns="0" rtlCol="0" anchor="ctr">
+              <a:normAutofit/>
+            </a:bodyPr>
+            <a:lstStyle/>
+            <a:p>
+              <a:pPr marL="0" indent="0">
+                <a:buNone/>
+              </a:pPr>
+              <a:r>
+                <a:rPr lang="en-US" sz="1000" b="1" dirty="0">
+                  <a:solidFill>
+                    <a:srgbClr val="183F73"/>
+                  </a:solidFill>
+                  <a:latin typeface="微软雅黑" panose="020B0503020204020204" pitchFamily="34" charset="-122"/>
+                  <a:ea typeface="微软雅黑" panose="020B0503020204020204" pitchFamily="34" charset="-122"/>
+                  <a:cs typeface="Noto Sans CJK SC" pitchFamily="34" charset="-120"/>
+                </a:rPr>
+                <a:t>还款计划</a:t>
+              </a:r>
+              <a:endParaRPr lang="en-US" sz="1000" dirty="0">
+                <a:latin typeface="微软雅黑" panose="020B0503020204020204" pitchFamily="34" charset="-122"/>
+                <a:ea typeface="微软雅黑" panose="020B0503020204020204" pitchFamily="34" charset="-122"/>
+              </a:endParaRPr>
+            </a:p>
+          </p:txBody>
+        </p:sp>
+        <p:sp>
+          <p:nvSpPr>
+            <p:cNvPr id="78" name="Shape 86">
+              <a:extLst>
+                <a:ext uri="{FF2B5EF4-FFF2-40B4-BE49-F238E27FC236}">
+                  <a16:creationId xmlns:a16="http://schemas.microsoft.com/office/drawing/2014/main" id="{C2D6AF55-6B82-4A16-B7A9-2CB30B178247}"/>
+                </a:ext>
+              </a:extLst>
+            </p:cNvPr>
+            <p:cNvSpPr/>
+            <p:nvPr/>
+          </p:nvSpPr>
+          <p:spPr>
+            <a:xfrm>
+              <a:off x="2506912" y="3889034"/>
+              <a:ext cx="0" cy="228600"/>
+            </a:xfrm>
+            <a:prstGeom prst="line">
+              <a:avLst/>
+            </a:prstGeom>
+            <a:noFill/>
+            <a:ln w="25400">
+              <a:solidFill>
+                <a:srgbClr val="D99A00"/>
+              </a:solidFill>
+              <a:prstDash val="solid"/>
+            </a:ln>
+          </p:spPr>
+        </p:sp>
+        <p:sp>
+          <p:nvSpPr>
+            <p:cNvPr id="79" name="Text 87">
+              <a:extLst>
+                <a:ext uri="{FF2B5EF4-FFF2-40B4-BE49-F238E27FC236}">
+                  <a16:creationId xmlns:a16="http://schemas.microsoft.com/office/drawing/2014/main" id="{27249E61-3286-48E4-A2A5-068CC3B6A741}"/>
+                </a:ext>
+              </a:extLst>
+            </p:cNvPr>
+            <p:cNvSpPr/>
+            <p:nvPr/>
+          </p:nvSpPr>
+          <p:spPr>
+            <a:xfrm>
+              <a:off x="2580064" y="3861602"/>
+              <a:ext cx="1554480" cy="237744"/>
+            </a:xfrm>
+            <a:prstGeom prst="rect">
+              <a:avLst/>
+            </a:prstGeom>
+            <a:noFill/>
+            <a:ln/>
+          </p:spPr>
+          <p:txBody>
+            <a:bodyPr wrap="square" lIns="0" tIns="0" rIns="0" bIns="0" rtlCol="0" anchor="ctr">
+              <a:normAutofit/>
+            </a:bodyPr>
+            <a:lstStyle/>
+            <a:p>
+              <a:pPr marL="0" indent="0">
+                <a:buNone/>
+              </a:pPr>
+              <a:r>
+                <a:rPr lang="en-US" sz="1000" b="1" dirty="0">
+                  <a:solidFill>
+                    <a:srgbClr val="183F73"/>
+                  </a:solidFill>
+                  <a:latin typeface="微软雅黑" panose="020B0503020204020204" pitchFamily="34" charset="-122"/>
+                  <a:ea typeface="微软雅黑" panose="020B0503020204020204" pitchFamily="34" charset="-122"/>
+                  <a:cs typeface="Noto Sans CJK SC" pitchFamily="34" charset="-120"/>
+                </a:rPr>
+                <a:t>本金与定价</a:t>
+              </a:r>
+              <a:endParaRPr lang="en-US" sz="1000" dirty="0">
+                <a:latin typeface="微软雅黑" panose="020B0503020204020204" pitchFamily="34" charset="-122"/>
+                <a:ea typeface="微软雅黑" panose="020B0503020204020204" pitchFamily="34" charset="-122"/>
+              </a:endParaRPr>
+            </a:p>
+          </p:txBody>
+        </p:sp>
+        <p:sp>
+          <p:nvSpPr>
+            <p:cNvPr id="100" name="Shape 102">
+              <a:extLst>
+                <a:ext uri="{FF2B5EF4-FFF2-40B4-BE49-F238E27FC236}">
+                  <a16:creationId xmlns:a16="http://schemas.microsoft.com/office/drawing/2014/main" id="{A42D819D-75FD-42BC-A54C-26D8C8285554}"/>
+                </a:ext>
+              </a:extLst>
+            </p:cNvPr>
+            <p:cNvSpPr/>
+            <p:nvPr/>
+          </p:nvSpPr>
+          <p:spPr>
+            <a:xfrm>
+              <a:off x="4262560" y="3889034"/>
+              <a:ext cx="0" cy="228600"/>
+            </a:xfrm>
+            <a:prstGeom prst="line">
+              <a:avLst/>
+            </a:prstGeom>
+            <a:noFill/>
+            <a:ln w="25400">
+              <a:solidFill>
+                <a:srgbClr val="D99A00"/>
+              </a:solidFill>
+              <a:prstDash val="solid"/>
+            </a:ln>
+          </p:spPr>
+        </p:sp>
+        <p:sp>
+          <p:nvSpPr>
+            <p:cNvPr id="101" name="Text 103">
+              <a:extLst>
+                <a:ext uri="{FF2B5EF4-FFF2-40B4-BE49-F238E27FC236}">
+                  <a16:creationId xmlns:a16="http://schemas.microsoft.com/office/drawing/2014/main" id="{8AE3586E-29B5-4903-AFC6-2B95A8D6005A}"/>
+                </a:ext>
+              </a:extLst>
+            </p:cNvPr>
+            <p:cNvSpPr/>
+            <p:nvPr/>
+          </p:nvSpPr>
+          <p:spPr>
+            <a:xfrm>
+              <a:off x="4335712" y="3861602"/>
+              <a:ext cx="1554480" cy="237744"/>
+            </a:xfrm>
+            <a:prstGeom prst="rect">
+              <a:avLst/>
+            </a:prstGeom>
+            <a:noFill/>
+            <a:ln/>
+          </p:spPr>
+          <p:txBody>
+            <a:bodyPr wrap="square" lIns="0" tIns="0" rIns="0" bIns="0" rtlCol="0" anchor="ctr">
+              <a:normAutofit/>
+            </a:bodyPr>
+            <a:lstStyle/>
+            <a:p>
+              <a:pPr marL="0" indent="0">
+                <a:buNone/>
+              </a:pPr>
+              <a:r>
+                <a:rPr lang="en-US" sz="1000" b="1" dirty="0">
+                  <a:solidFill>
+                    <a:srgbClr val="183F73"/>
+                  </a:solidFill>
+                  <a:latin typeface="微软雅黑" panose="020B0503020204020204" pitchFamily="34" charset="-122"/>
+                  <a:ea typeface="微软雅黑" panose="020B0503020204020204" pitchFamily="34" charset="-122"/>
+                  <a:cs typeface="Noto Sans CJK SC" pitchFamily="34" charset="-120"/>
+                </a:rPr>
+                <a:t>本笔履约</a:t>
+              </a:r>
+              <a:endParaRPr lang="en-US" sz="1000" dirty="0">
+                <a:latin typeface="微软雅黑" panose="020B0503020204020204" pitchFamily="34" charset="-122"/>
+                <a:ea typeface="微软雅黑" panose="020B0503020204020204" pitchFamily="34" charset="-122"/>
+              </a:endParaRPr>
+            </a:p>
+          </p:txBody>
+        </p:sp>
+      </p:grpSp>
+      <p:sp>
+        <p:nvSpPr>
+          <p:cNvPr id="102" name="Text 104">
+            <a:extLst>
+              <a:ext uri="{FF2B5EF4-FFF2-40B4-BE49-F238E27FC236}">
+                <a16:creationId xmlns:a16="http://schemas.microsoft.com/office/drawing/2014/main" id="{33BFD9A6-3172-4F25-B3AB-10799F39FCF6}"/>
+              </a:ext>
+            </a:extLst>
+          </p:cNvPr>
+          <p:cNvSpPr/>
+          <p:nvPr/>
+        </p:nvSpPr>
+        <p:spPr>
+          <a:xfrm>
+            <a:off x="4258951" y="4138894"/>
+            <a:ext cx="731520" cy="164592"/>
+          </a:xfrm>
+          <a:prstGeom prst="rect">
+            <a:avLst/>
+          </a:prstGeom>
+          <a:noFill/>
+          <a:ln/>
+        </p:spPr>
+        <p:txBody>
+          <a:bodyPr wrap="square" lIns="0" tIns="0" rIns="0" bIns="0" rtlCol="0" anchor="ctr">
+            <a:normAutofit/>
+          </a:bodyPr>
+          <a:lstStyle/>
+          <a:p>
+            <a:pPr marL="0" indent="0">
+              <a:buNone/>
+            </a:pPr>
+            <a:r>
+              <a:rPr lang="en-US" sz="900" dirty="0">
+                <a:solidFill>
+                  <a:srgbClr val="111827"/>
+                </a:solidFill>
+                <a:latin typeface="微软雅黑" panose="020B0503020204020204" pitchFamily="34" charset="-122"/>
+                <a:ea typeface="微软雅黑" panose="020B0503020204020204" pitchFamily="34" charset="-122"/>
+                <a:cs typeface="Noto Sans CJK SC" pitchFamily="34" charset="-120"/>
+              </a:rPr>
+              <a:t>产品类型</a:t>
+            </a:r>
+            <a:endParaRPr lang="en-US" sz="900" dirty="0">
+              <a:latin typeface="微软雅黑" panose="020B0503020204020204" pitchFamily="34" charset="-122"/>
+              <a:ea typeface="微软雅黑" panose="020B0503020204020204" pitchFamily="34" charset="-122"/>
+            </a:endParaRPr>
+          </a:p>
+        </p:txBody>
+      </p:sp>
+      <p:sp>
+        <p:nvSpPr>
+          <p:cNvPr id="103" name="Text 105">
+            <a:extLst>
+              <a:ext uri="{FF2B5EF4-FFF2-40B4-BE49-F238E27FC236}">
+                <a16:creationId xmlns:a16="http://schemas.microsoft.com/office/drawing/2014/main" id="{230CA9E7-6CEC-47CD-9BD6-B193F9E6083C}"/>
+              </a:ext>
+            </a:extLst>
+          </p:cNvPr>
+          <p:cNvSpPr/>
+          <p:nvPr/>
+        </p:nvSpPr>
+        <p:spPr>
+          <a:xfrm>
+            <a:off x="5034921" y="4138894"/>
+            <a:ext cx="731520" cy="164592"/>
+          </a:xfrm>
+          <a:prstGeom prst="rect">
+            <a:avLst/>
+          </a:prstGeom>
+          <a:noFill/>
+          <a:ln/>
+        </p:spPr>
+        <p:txBody>
+          <a:bodyPr wrap="square" lIns="0" tIns="0" rIns="0" bIns="0" rtlCol="0" anchor="ctr">
+            <a:normAutofit/>
+          </a:bodyPr>
+          <a:lstStyle/>
+          <a:p>
+            <a:pPr marL="0" indent="0">
+              <a:buNone/>
+            </a:pPr>
+            <a:r>
+              <a:rPr lang="en-US" sz="900" b="1" dirty="0">
+                <a:solidFill>
+                  <a:srgbClr val="183F73"/>
+                </a:solidFill>
+                <a:latin typeface="微软雅黑" panose="020B0503020204020204" pitchFamily="34" charset="-122"/>
+                <a:ea typeface="微软雅黑" panose="020B0503020204020204" pitchFamily="34" charset="-122"/>
+                <a:cs typeface="Noto Sans CJK SC" pitchFamily="34" charset="-120"/>
+              </a:rPr>
+              <a:t>SACC</a:t>
+            </a:r>
+            <a:endParaRPr lang="en-US" sz="900" dirty="0">
+              <a:latin typeface="微软雅黑" panose="020B0503020204020204" pitchFamily="34" charset="-122"/>
+              <a:ea typeface="微软雅黑" panose="020B0503020204020204" pitchFamily="34" charset="-122"/>
+            </a:endParaRPr>
+          </a:p>
+        </p:txBody>
+      </p:sp>
+      <p:sp>
+        <p:nvSpPr>
+          <p:cNvPr id="104" name="Text 106">
+            <a:extLst>
+              <a:ext uri="{FF2B5EF4-FFF2-40B4-BE49-F238E27FC236}">
+                <a16:creationId xmlns:a16="http://schemas.microsoft.com/office/drawing/2014/main" id="{A7E9D5DA-432F-48AC-9BC5-E521D78D6DF2}"/>
+              </a:ext>
+            </a:extLst>
+          </p:cNvPr>
+          <p:cNvSpPr/>
+          <p:nvPr/>
+        </p:nvSpPr>
+        <p:spPr>
+          <a:xfrm>
+            <a:off x="4258951" y="4426930"/>
+            <a:ext cx="731520" cy="164592"/>
+          </a:xfrm>
+          <a:prstGeom prst="rect">
+            <a:avLst/>
+          </a:prstGeom>
+          <a:noFill/>
+          <a:ln/>
+        </p:spPr>
+        <p:txBody>
+          <a:bodyPr wrap="square" lIns="0" tIns="0" rIns="0" bIns="0" rtlCol="0" anchor="ctr">
+            <a:normAutofit/>
+          </a:bodyPr>
+          <a:lstStyle/>
+          <a:p>
+            <a:pPr marL="0" indent="0">
+              <a:buNone/>
+            </a:pPr>
+            <a:r>
+              <a:rPr lang="en-US" sz="900" dirty="0">
+                <a:solidFill>
+                  <a:srgbClr val="111827"/>
+                </a:solidFill>
+                <a:latin typeface="微软雅黑" panose="020B0503020204020204" pitchFamily="34" charset="-122"/>
+                <a:ea typeface="微软雅黑" panose="020B0503020204020204" pitchFamily="34" charset="-122"/>
+                <a:cs typeface="Noto Sans CJK SC" pitchFamily="34" charset="-120"/>
               </a:rPr>
               <a:t>贷款状态</a:t>
             </a:r>
+            <a:endParaRPr lang="en-US" sz="900" dirty="0">
+              <a:latin typeface="微软雅黑" panose="020B0503020204020204" pitchFamily="34" charset="-122"/>
+              <a:ea typeface="微软雅黑" panose="020B0503020204020204" pitchFamily="34" charset="-122"/>
+            </a:endParaRPr>
+          </a:p>
+        </p:txBody>
+      </p:sp>
+      <p:sp>
+        <p:nvSpPr>
+          <p:cNvPr id="105" name="Text 107">
+            <a:extLst>
+              <a:ext uri="{FF2B5EF4-FFF2-40B4-BE49-F238E27FC236}">
+                <a16:creationId xmlns:a16="http://schemas.microsoft.com/office/drawing/2014/main" id="{1E5C877F-E502-4487-9B47-337F0199DC48}"/>
+              </a:ext>
+            </a:extLst>
+          </p:cNvPr>
+          <p:cNvSpPr/>
+          <p:nvPr/>
+        </p:nvSpPr>
+        <p:spPr>
+          <a:xfrm>
+            <a:off x="5034921" y="4426930"/>
+            <a:ext cx="731520" cy="164592"/>
+          </a:xfrm>
+          <a:prstGeom prst="rect">
+            <a:avLst/>
+          </a:prstGeom>
+          <a:noFill/>
+          <a:ln/>
+        </p:spPr>
+        <p:txBody>
+          <a:bodyPr wrap="square" lIns="0" tIns="0" rIns="0" bIns="0" rtlCol="0" anchor="ctr">
+            <a:normAutofit/>
+          </a:bodyPr>
+          <a:lstStyle/>
+          <a:p>
+            <a:pPr marL="0" indent="0">
+              <a:buNone/>
+            </a:pPr>
             <a:r>
-              <a:rPr sz="800" b="0">
+              <a:rPr lang="en-US" sz="900" b="1" dirty="0">
                 <a:solidFill>
-                  <a:srgbClr val="606060"/>
+                  <a:srgbClr val="183F73"/>
                 </a:solidFill>
+                <a:latin typeface="微软雅黑" panose="020B0503020204020204" pitchFamily="34" charset="-122"/>
+                <a:ea typeface="微软雅黑" panose="020B0503020204020204" pitchFamily="34" charset="-122"/>
+                <a:cs typeface="Noto Sans CJK SC" pitchFamily="34" charset="-120"/>
               </a:rPr>
               <a:t>在贷</a:t>
             </a:r>
+            <a:endParaRPr lang="en-US" sz="900" dirty="0">
+              <a:latin typeface="微软雅黑" panose="020B0503020204020204" pitchFamily="34" charset="-122"/>
+              <a:ea typeface="微软雅黑" panose="020B0503020204020204" pitchFamily="34" charset="-122"/>
+            </a:endParaRPr>
           </a:p>
         </p:txBody>
       </p:sp>
+      <p:sp>
+        <p:nvSpPr>
+          <p:cNvPr id="106" name="Text 108">
+            <a:extLst>
+              <a:ext uri="{FF2B5EF4-FFF2-40B4-BE49-F238E27FC236}">
+                <a16:creationId xmlns:a16="http://schemas.microsoft.com/office/drawing/2014/main" id="{18223707-1726-4DEB-9859-40908F2E7A05}"/>
+              </a:ext>
+            </a:extLst>
+          </p:cNvPr>
+          <p:cNvSpPr/>
+          <p:nvPr/>
+        </p:nvSpPr>
+        <p:spPr>
+          <a:xfrm>
+            <a:off x="4258951" y="4714966"/>
+            <a:ext cx="731520" cy="164592"/>
+          </a:xfrm>
+          <a:prstGeom prst="rect">
+            <a:avLst/>
+          </a:prstGeom>
+          <a:noFill/>
+          <a:ln/>
+        </p:spPr>
+        <p:txBody>
+          <a:bodyPr wrap="square" lIns="0" tIns="0" rIns="0" bIns="0" rtlCol="0" anchor="ctr">
+            <a:normAutofit/>
+          </a:bodyPr>
+          <a:lstStyle/>
+          <a:p>
+            <a:pPr marL="0" indent="0">
+              <a:buNone/>
+            </a:pPr>
+            <a:r>
+              <a:rPr lang="en-US" sz="900" dirty="0">
+                <a:solidFill>
+                  <a:srgbClr val="111827"/>
+                </a:solidFill>
+                <a:latin typeface="微软雅黑" panose="020B0503020204020204" pitchFamily="34" charset="-122"/>
+                <a:ea typeface="微软雅黑" panose="020B0503020204020204" pitchFamily="34" charset="-122"/>
+                <a:cs typeface="Noto Sans CJK SC" pitchFamily="34" charset="-120"/>
+              </a:rPr>
+              <a:t>扣款失败</a:t>
+            </a:r>
+            <a:endParaRPr lang="en-US" sz="900" dirty="0">
+              <a:latin typeface="微软雅黑" panose="020B0503020204020204" pitchFamily="34" charset="-122"/>
+              <a:ea typeface="微软雅黑" panose="020B0503020204020204" pitchFamily="34" charset="-122"/>
+            </a:endParaRPr>
+          </a:p>
+        </p:txBody>
+      </p:sp>
+      <p:sp>
+        <p:nvSpPr>
+          <p:cNvPr id="107" name="Text 109">
+            <a:extLst>
+              <a:ext uri="{FF2B5EF4-FFF2-40B4-BE49-F238E27FC236}">
+                <a16:creationId xmlns:a16="http://schemas.microsoft.com/office/drawing/2014/main" id="{FEFD746B-B0F7-452B-A203-41854F75FD2B}"/>
+              </a:ext>
+            </a:extLst>
+          </p:cNvPr>
+          <p:cNvSpPr/>
+          <p:nvPr/>
+        </p:nvSpPr>
+        <p:spPr>
+          <a:xfrm>
+            <a:off x="5034921" y="4714966"/>
+            <a:ext cx="731520" cy="164592"/>
+          </a:xfrm>
+          <a:prstGeom prst="rect">
+            <a:avLst/>
+          </a:prstGeom>
+          <a:noFill/>
+          <a:ln/>
+        </p:spPr>
+        <p:txBody>
+          <a:bodyPr wrap="square" lIns="0" tIns="0" rIns="0" bIns="0" rtlCol="0" anchor="ctr">
+            <a:normAutofit/>
+          </a:bodyPr>
+          <a:lstStyle/>
+          <a:p>
+            <a:pPr marL="0" indent="0">
+              <a:buNone/>
+            </a:pPr>
+            <a:r>
+              <a:rPr lang="en-US" sz="900" b="1" dirty="0">
+                <a:solidFill>
+                  <a:srgbClr val="183F73"/>
+                </a:solidFill>
+                <a:latin typeface="微软雅黑" panose="020B0503020204020204" pitchFamily="34" charset="-122"/>
+                <a:ea typeface="微软雅黑" panose="020B0503020204020204" pitchFamily="34" charset="-122"/>
+                <a:cs typeface="Noto Sans CJK SC" pitchFamily="34" charset="-120"/>
+              </a:rPr>
+              <a:t>1次</a:t>
+            </a:r>
+            <a:endParaRPr lang="en-US" sz="900" dirty="0">
+              <a:latin typeface="微软雅黑" panose="020B0503020204020204" pitchFamily="34" charset="-122"/>
+              <a:ea typeface="微软雅黑" panose="020B0503020204020204" pitchFamily="34" charset="-122"/>
+            </a:endParaRPr>
+          </a:p>
+        </p:txBody>
+      </p:sp>
+      <p:sp>
+        <p:nvSpPr>
+          <p:cNvPr id="108" name="Text 110">
+            <a:extLst>
+              <a:ext uri="{FF2B5EF4-FFF2-40B4-BE49-F238E27FC236}">
+                <a16:creationId xmlns:a16="http://schemas.microsoft.com/office/drawing/2014/main" id="{EE952F57-3791-4D8A-B61A-A42DB918843D}"/>
+              </a:ext>
+            </a:extLst>
+          </p:cNvPr>
+          <p:cNvSpPr/>
+          <p:nvPr/>
+        </p:nvSpPr>
+        <p:spPr>
+          <a:xfrm>
+            <a:off x="4258951" y="5003002"/>
+            <a:ext cx="731520" cy="164592"/>
+          </a:xfrm>
+          <a:prstGeom prst="rect">
+            <a:avLst/>
+          </a:prstGeom>
+          <a:noFill/>
+          <a:ln/>
+        </p:spPr>
+        <p:txBody>
+          <a:bodyPr wrap="square" lIns="0" tIns="0" rIns="0" bIns="0" rtlCol="0" anchor="ctr">
+            <a:normAutofit/>
+          </a:bodyPr>
+          <a:lstStyle/>
+          <a:p>
+            <a:pPr marL="0" indent="0">
+              <a:buNone/>
+            </a:pPr>
+            <a:r>
+              <a:rPr lang="en-US" sz="900" dirty="0">
+                <a:solidFill>
+                  <a:srgbClr val="111827"/>
+                </a:solidFill>
+                <a:latin typeface="微软雅黑" panose="020B0503020204020204" pitchFamily="34" charset="-122"/>
+                <a:ea typeface="微软雅黑" panose="020B0503020204020204" pitchFamily="34" charset="-122"/>
+                <a:cs typeface="Noto Sans CJK SC" pitchFamily="34" charset="-120"/>
+              </a:rPr>
+              <a:t>累计逾期</a:t>
+            </a:r>
+            <a:endParaRPr lang="en-US" sz="900" dirty="0">
+              <a:latin typeface="微软雅黑" panose="020B0503020204020204" pitchFamily="34" charset="-122"/>
+              <a:ea typeface="微软雅黑" panose="020B0503020204020204" pitchFamily="34" charset="-122"/>
+            </a:endParaRPr>
+          </a:p>
+        </p:txBody>
+      </p:sp>
+      <p:sp>
+        <p:nvSpPr>
+          <p:cNvPr id="109" name="Text 111">
+            <a:extLst>
+              <a:ext uri="{FF2B5EF4-FFF2-40B4-BE49-F238E27FC236}">
+                <a16:creationId xmlns:a16="http://schemas.microsoft.com/office/drawing/2014/main" id="{075C5894-394A-491D-AC9C-F7F15DE42C3D}"/>
+              </a:ext>
+            </a:extLst>
+          </p:cNvPr>
+          <p:cNvSpPr/>
+          <p:nvPr/>
+        </p:nvSpPr>
+        <p:spPr>
+          <a:xfrm>
+            <a:off x="5034921" y="5003002"/>
+            <a:ext cx="731520" cy="164592"/>
+          </a:xfrm>
+          <a:prstGeom prst="rect">
+            <a:avLst/>
+          </a:prstGeom>
+          <a:noFill/>
+          <a:ln/>
+        </p:spPr>
+        <p:txBody>
+          <a:bodyPr wrap="square" lIns="0" tIns="0" rIns="0" bIns="0" rtlCol="0" anchor="ctr">
+            <a:normAutofit/>
+          </a:bodyPr>
+          <a:lstStyle/>
+          <a:p>
+            <a:pPr marL="0" indent="0">
+              <a:buNone/>
+            </a:pPr>
+            <a:r>
+              <a:rPr lang="en-US" sz="900" b="1" dirty="0">
+                <a:solidFill>
+                  <a:srgbClr val="183F73"/>
+                </a:solidFill>
+                <a:latin typeface="微软雅黑" panose="020B0503020204020204" pitchFamily="34" charset="-122"/>
+                <a:ea typeface="微软雅黑" panose="020B0503020204020204" pitchFamily="34" charset="-122"/>
+                <a:cs typeface="Noto Sans CJK SC" pitchFamily="34" charset="-120"/>
+              </a:rPr>
+              <a:t>1次</a:t>
+            </a:r>
+            <a:endParaRPr lang="en-US" sz="900" dirty="0">
+              <a:latin typeface="微软雅黑" panose="020B0503020204020204" pitchFamily="34" charset="-122"/>
+              <a:ea typeface="微软雅黑" panose="020B0503020204020204" pitchFamily="34" charset="-122"/>
+            </a:endParaRPr>
+          </a:p>
+        </p:txBody>
+      </p:sp>
+      <p:sp>
+        <p:nvSpPr>
+          <p:cNvPr id="110" name="Text 112">
+            <a:extLst>
+              <a:ext uri="{FF2B5EF4-FFF2-40B4-BE49-F238E27FC236}">
+                <a16:creationId xmlns:a16="http://schemas.microsoft.com/office/drawing/2014/main" id="{D071FDBE-7A25-49E4-97AA-5595430CC2C4}"/>
+              </a:ext>
+            </a:extLst>
+          </p:cNvPr>
+          <p:cNvSpPr/>
+          <p:nvPr/>
+        </p:nvSpPr>
+        <p:spPr>
+          <a:xfrm>
+            <a:off x="4258951" y="5291038"/>
+            <a:ext cx="731520" cy="164592"/>
+          </a:xfrm>
+          <a:prstGeom prst="rect">
+            <a:avLst/>
+          </a:prstGeom>
+          <a:noFill/>
+          <a:ln/>
+        </p:spPr>
+        <p:txBody>
+          <a:bodyPr wrap="square" lIns="0" tIns="0" rIns="0" bIns="0" rtlCol="0" anchor="ctr">
+            <a:normAutofit/>
+          </a:bodyPr>
+          <a:lstStyle/>
+          <a:p>
+            <a:pPr marL="0" indent="0">
+              <a:buNone/>
+            </a:pPr>
+            <a:r>
+              <a:rPr lang="en-US" sz="900" dirty="0">
+                <a:solidFill>
+                  <a:srgbClr val="111827"/>
+                </a:solidFill>
+                <a:latin typeface="微软雅黑" panose="020B0503020204020204" pitchFamily="34" charset="-122"/>
+                <a:ea typeface="微软雅黑" panose="020B0503020204020204" pitchFamily="34" charset="-122"/>
+                <a:cs typeface="Noto Sans CJK SC" pitchFamily="34" charset="-120"/>
+              </a:rPr>
+              <a:t>最长逾期</a:t>
+            </a:r>
+            <a:endParaRPr lang="en-US" sz="900" dirty="0">
+              <a:latin typeface="微软雅黑" panose="020B0503020204020204" pitchFamily="34" charset="-122"/>
+              <a:ea typeface="微软雅黑" panose="020B0503020204020204" pitchFamily="34" charset="-122"/>
+            </a:endParaRPr>
+          </a:p>
+        </p:txBody>
+      </p:sp>
+      <p:sp>
+        <p:nvSpPr>
+          <p:cNvPr id="111" name="Text 113">
+            <a:extLst>
+              <a:ext uri="{FF2B5EF4-FFF2-40B4-BE49-F238E27FC236}">
+                <a16:creationId xmlns:a16="http://schemas.microsoft.com/office/drawing/2014/main" id="{ABBC5529-722A-4FFC-99F2-AB3ECE21C3DF}"/>
+              </a:ext>
+            </a:extLst>
+          </p:cNvPr>
+          <p:cNvSpPr/>
+          <p:nvPr/>
+        </p:nvSpPr>
+        <p:spPr>
+          <a:xfrm>
+            <a:off x="5034921" y="5291038"/>
+            <a:ext cx="731520" cy="164592"/>
+          </a:xfrm>
+          <a:prstGeom prst="rect">
+            <a:avLst/>
+          </a:prstGeom>
+          <a:noFill/>
+          <a:ln/>
+        </p:spPr>
+        <p:txBody>
+          <a:bodyPr wrap="square" lIns="0" tIns="0" rIns="0" bIns="0" rtlCol="0" anchor="ctr">
+            <a:normAutofit/>
+          </a:bodyPr>
+          <a:lstStyle/>
+          <a:p>
+            <a:pPr marL="0" indent="0">
+              <a:buNone/>
+            </a:pPr>
+            <a:r>
+              <a:rPr lang="en-US" sz="900" b="1" dirty="0">
+                <a:solidFill>
+                  <a:srgbClr val="183F73"/>
+                </a:solidFill>
+                <a:latin typeface="微软雅黑" panose="020B0503020204020204" pitchFamily="34" charset="-122"/>
+                <a:ea typeface="微软雅黑" panose="020B0503020204020204" pitchFamily="34" charset="-122"/>
+                <a:cs typeface="Noto Sans CJK SC" pitchFamily="34" charset="-120"/>
+              </a:rPr>
+              <a:t>5天</a:t>
+            </a:r>
+            <a:endParaRPr lang="en-US" sz="900" dirty="0">
+              <a:latin typeface="微软雅黑" panose="020B0503020204020204" pitchFamily="34" charset="-122"/>
+              <a:ea typeface="微软雅黑" panose="020B0503020204020204" pitchFamily="34" charset="-122"/>
+            </a:endParaRPr>
+          </a:p>
+        </p:txBody>
+      </p:sp>
+      <p:sp>
+        <p:nvSpPr>
+          <p:cNvPr id="112" name="Text 114">
+            <a:extLst>
+              <a:ext uri="{FF2B5EF4-FFF2-40B4-BE49-F238E27FC236}">
+                <a16:creationId xmlns:a16="http://schemas.microsoft.com/office/drawing/2014/main" id="{9256A285-677F-4934-9013-48556219BECB}"/>
+              </a:ext>
+            </a:extLst>
+          </p:cNvPr>
+          <p:cNvSpPr/>
+          <p:nvPr/>
+        </p:nvSpPr>
+        <p:spPr>
+          <a:xfrm>
+            <a:off x="4258951" y="5579074"/>
+            <a:ext cx="731520" cy="164592"/>
+          </a:xfrm>
+          <a:prstGeom prst="rect">
+            <a:avLst/>
+          </a:prstGeom>
+          <a:noFill/>
+          <a:ln/>
+        </p:spPr>
+        <p:txBody>
+          <a:bodyPr wrap="square" lIns="0" tIns="0" rIns="0" bIns="0" rtlCol="0" anchor="ctr">
+            <a:noAutofit/>
+          </a:bodyPr>
+          <a:lstStyle/>
+          <a:p>
+            <a:pPr marL="0" indent="0">
+              <a:buNone/>
+            </a:pPr>
+            <a:r>
+              <a:rPr lang="en-US" sz="900" dirty="0">
+                <a:solidFill>
+                  <a:srgbClr val="111827"/>
+                </a:solidFill>
+                <a:latin typeface="微软雅黑" panose="020B0503020204020204" pitchFamily="34" charset="-122"/>
+                <a:ea typeface="微软雅黑" panose="020B0503020204020204" pitchFamily="34" charset="-122"/>
+                <a:cs typeface="Noto Sans CJK SC" pitchFamily="34" charset="-120"/>
+              </a:rPr>
+              <a:t>当前逾期金额</a:t>
+            </a:r>
+            <a:endParaRPr lang="en-US" sz="900" dirty="0">
+              <a:latin typeface="微软雅黑" panose="020B0503020204020204" pitchFamily="34" charset="-122"/>
+              <a:ea typeface="微软雅黑" panose="020B0503020204020204" pitchFamily="34" charset="-122"/>
+            </a:endParaRPr>
+          </a:p>
+        </p:txBody>
+      </p:sp>
+      <p:sp>
+        <p:nvSpPr>
+          <p:cNvPr id="113" name="Text 115">
+            <a:extLst>
+              <a:ext uri="{FF2B5EF4-FFF2-40B4-BE49-F238E27FC236}">
+                <a16:creationId xmlns:a16="http://schemas.microsoft.com/office/drawing/2014/main" id="{F0147BC1-EEE0-4AEB-9A99-51E75BAD06BA}"/>
+              </a:ext>
+            </a:extLst>
+          </p:cNvPr>
+          <p:cNvSpPr/>
+          <p:nvPr/>
+        </p:nvSpPr>
+        <p:spPr>
+          <a:xfrm>
+            <a:off x="5034921" y="5579074"/>
+            <a:ext cx="731520" cy="164592"/>
+          </a:xfrm>
+          <a:prstGeom prst="rect">
+            <a:avLst/>
+          </a:prstGeom>
+          <a:noFill/>
+          <a:ln/>
+        </p:spPr>
+        <p:txBody>
+          <a:bodyPr wrap="square" lIns="0" tIns="0" rIns="0" bIns="0" rtlCol="0" anchor="ctr">
+            <a:normAutofit/>
+          </a:bodyPr>
+          <a:lstStyle/>
+          <a:p>
+            <a:pPr marL="0" indent="0">
+              <a:buNone/>
+            </a:pPr>
+            <a:r>
+              <a:rPr lang="en-US" sz="900" b="1" dirty="0">
+                <a:solidFill>
+                  <a:srgbClr val="183F73"/>
+                </a:solidFill>
+                <a:latin typeface="微软雅黑" panose="020B0503020204020204" pitchFamily="34" charset="-122"/>
+                <a:ea typeface="微软雅黑" panose="020B0503020204020204" pitchFamily="34" charset="-122"/>
+                <a:cs typeface="Noto Sans CJK SC" pitchFamily="34" charset="-120"/>
+              </a:rPr>
+              <a:t>A$0</a:t>
+            </a:r>
+            <a:endParaRPr lang="en-US" sz="900" dirty="0">
+              <a:latin typeface="微软雅黑" panose="020B0503020204020204" pitchFamily="34" charset="-122"/>
+              <a:ea typeface="微软雅黑" panose="020B0503020204020204" pitchFamily="34" charset="-122"/>
+            </a:endParaRPr>
+          </a:p>
+        </p:txBody>
+      </p:sp>
+      <p:sp>
+        <p:nvSpPr>
+          <p:cNvPr id="120" name="Text 118">
+            <a:extLst>
+              <a:ext uri="{FF2B5EF4-FFF2-40B4-BE49-F238E27FC236}">
+                <a16:creationId xmlns:a16="http://schemas.microsoft.com/office/drawing/2014/main" id="{4000C133-829E-4A58-A3E8-6EEC6586B850}"/>
+              </a:ext>
+            </a:extLst>
+          </p:cNvPr>
+          <p:cNvSpPr/>
+          <p:nvPr/>
+        </p:nvSpPr>
+        <p:spPr>
+          <a:xfrm>
+            <a:off x="6364985" y="4117772"/>
+            <a:ext cx="731520" cy="164592"/>
+          </a:xfrm>
+          <a:prstGeom prst="rect">
+            <a:avLst/>
+          </a:prstGeom>
+          <a:noFill/>
+          <a:ln/>
+        </p:spPr>
+        <p:txBody>
+          <a:bodyPr wrap="square" lIns="0" tIns="0" rIns="0" bIns="0" rtlCol="0" anchor="ctr">
+            <a:normAutofit/>
+          </a:bodyPr>
+          <a:lstStyle/>
+          <a:p>
+            <a:pPr marL="0" indent="0">
+              <a:buNone/>
+            </a:pPr>
+            <a:r>
+              <a:rPr lang="en-US" sz="900" dirty="0">
+                <a:solidFill>
+                  <a:srgbClr val="111827"/>
+                </a:solidFill>
+                <a:latin typeface="微软雅黑" panose="020B0503020204020204" pitchFamily="34" charset="-122"/>
+                <a:ea typeface="微软雅黑" panose="020B0503020204020204" pitchFamily="34" charset="-122"/>
+                <a:cs typeface="Noto Sans CJK SC" pitchFamily="34" charset="-120"/>
+              </a:rPr>
+              <a:t>预计待还</a:t>
+            </a:r>
+            <a:endParaRPr lang="en-US" sz="900" dirty="0">
+              <a:latin typeface="微软雅黑" panose="020B0503020204020204" pitchFamily="34" charset="-122"/>
+              <a:ea typeface="微软雅黑" panose="020B0503020204020204" pitchFamily="34" charset="-122"/>
+            </a:endParaRPr>
+          </a:p>
+        </p:txBody>
+      </p:sp>
+      <p:sp>
+        <p:nvSpPr>
+          <p:cNvPr id="125" name="Text 119">
+            <a:extLst>
+              <a:ext uri="{FF2B5EF4-FFF2-40B4-BE49-F238E27FC236}">
+                <a16:creationId xmlns:a16="http://schemas.microsoft.com/office/drawing/2014/main" id="{5ED42BA1-5051-46FE-A7D0-F88D01BCED2E}"/>
+              </a:ext>
+            </a:extLst>
+          </p:cNvPr>
+          <p:cNvSpPr/>
+          <p:nvPr/>
+        </p:nvSpPr>
+        <p:spPr>
+          <a:xfrm>
+            <a:off x="7096505" y="4117772"/>
+            <a:ext cx="768096" cy="164592"/>
+          </a:xfrm>
+          <a:prstGeom prst="rect">
+            <a:avLst/>
+          </a:prstGeom>
+          <a:noFill/>
+          <a:ln/>
+        </p:spPr>
+        <p:txBody>
+          <a:bodyPr wrap="square" lIns="0" tIns="0" rIns="0" bIns="0" rtlCol="0" anchor="ctr">
+            <a:normAutofit/>
+          </a:bodyPr>
+          <a:lstStyle/>
+          <a:p>
+            <a:pPr marL="0" indent="0">
+              <a:buNone/>
+            </a:pPr>
+            <a:r>
+              <a:rPr lang="en-US" sz="900" b="1" dirty="0">
+                <a:solidFill>
+                  <a:srgbClr val="183F73"/>
+                </a:solidFill>
+                <a:latin typeface="微软雅黑" panose="020B0503020204020204" pitchFamily="34" charset="-122"/>
+                <a:ea typeface="微软雅黑" panose="020B0503020204020204" pitchFamily="34" charset="-122"/>
+                <a:cs typeface="Noto Sans CJK SC" pitchFamily="34" charset="-120"/>
+              </a:rPr>
+              <a:t>A$1,016</a:t>
+            </a:r>
+            <a:endParaRPr lang="en-US" sz="900" dirty="0">
+              <a:latin typeface="微软雅黑" panose="020B0503020204020204" pitchFamily="34" charset="-122"/>
+              <a:ea typeface="微软雅黑" panose="020B0503020204020204" pitchFamily="34" charset="-122"/>
+            </a:endParaRPr>
+          </a:p>
+        </p:txBody>
+      </p:sp>
+      <p:sp>
+        <p:nvSpPr>
+          <p:cNvPr id="137" name="Text 120">
+            <a:extLst>
+              <a:ext uri="{FF2B5EF4-FFF2-40B4-BE49-F238E27FC236}">
+                <a16:creationId xmlns:a16="http://schemas.microsoft.com/office/drawing/2014/main" id="{3D776087-B0A1-458A-82D5-02768C9C3EA5}"/>
+              </a:ext>
+            </a:extLst>
+          </p:cNvPr>
+          <p:cNvSpPr/>
+          <p:nvPr/>
+        </p:nvSpPr>
+        <p:spPr>
+          <a:xfrm>
+            <a:off x="6364985" y="4405808"/>
+            <a:ext cx="731520" cy="164592"/>
+          </a:xfrm>
+          <a:prstGeom prst="rect">
+            <a:avLst/>
+          </a:prstGeom>
+          <a:noFill/>
+          <a:ln/>
+        </p:spPr>
+        <p:txBody>
+          <a:bodyPr wrap="square" lIns="0" tIns="0" rIns="0" bIns="0" rtlCol="0" anchor="ctr">
+            <a:normAutofit/>
+          </a:bodyPr>
+          <a:lstStyle/>
+          <a:p>
+            <a:pPr marL="0" indent="0">
+              <a:buNone/>
+            </a:pPr>
+            <a:r>
+              <a:rPr lang="en-US" sz="900" dirty="0">
+                <a:solidFill>
+                  <a:srgbClr val="111827"/>
+                </a:solidFill>
+                <a:latin typeface="微软雅黑" panose="020B0503020204020204" pitchFamily="34" charset="-122"/>
+                <a:ea typeface="微软雅黑" panose="020B0503020204020204" pitchFamily="34" charset="-122"/>
+                <a:cs typeface="Noto Sans CJK SC" pitchFamily="34" charset="-120"/>
+              </a:rPr>
+              <a:t>平均月还款</a:t>
+            </a:r>
+            <a:endParaRPr lang="en-US" sz="900" dirty="0">
+              <a:latin typeface="微软雅黑" panose="020B0503020204020204" pitchFamily="34" charset="-122"/>
+              <a:ea typeface="微软雅黑" panose="020B0503020204020204" pitchFamily="34" charset="-122"/>
+            </a:endParaRPr>
+          </a:p>
+        </p:txBody>
+      </p:sp>
+      <p:sp>
+        <p:nvSpPr>
+          <p:cNvPr id="162" name="Text 121">
+            <a:extLst>
+              <a:ext uri="{FF2B5EF4-FFF2-40B4-BE49-F238E27FC236}">
+                <a16:creationId xmlns:a16="http://schemas.microsoft.com/office/drawing/2014/main" id="{CC34E4D6-9948-4A85-AF19-EB4859269835}"/>
+              </a:ext>
+            </a:extLst>
+          </p:cNvPr>
+          <p:cNvSpPr/>
+          <p:nvPr/>
+        </p:nvSpPr>
+        <p:spPr>
+          <a:xfrm>
+            <a:off x="7096505" y="4405808"/>
+            <a:ext cx="768096" cy="164592"/>
+          </a:xfrm>
+          <a:prstGeom prst="rect">
+            <a:avLst/>
+          </a:prstGeom>
+          <a:noFill/>
+          <a:ln/>
+        </p:spPr>
+        <p:txBody>
+          <a:bodyPr wrap="square" lIns="0" tIns="0" rIns="0" bIns="0" rtlCol="0" anchor="ctr">
+            <a:normAutofit/>
+          </a:bodyPr>
+          <a:lstStyle/>
+          <a:p>
+            <a:pPr marL="0" indent="0">
+              <a:buNone/>
+            </a:pPr>
+            <a:r>
+              <a:rPr lang="en-US" sz="900" b="1" dirty="0">
+                <a:solidFill>
+                  <a:srgbClr val="183F73"/>
+                </a:solidFill>
+                <a:latin typeface="微软雅黑" panose="020B0503020204020204" pitchFamily="34" charset="-122"/>
+                <a:ea typeface="微软雅黑" panose="020B0503020204020204" pitchFamily="34" charset="-122"/>
+                <a:cs typeface="Noto Sans CJK SC" pitchFamily="34" charset="-120"/>
+              </a:rPr>
+              <a:t>A$428</a:t>
+            </a:r>
+            <a:endParaRPr lang="en-US" sz="900" dirty="0">
+              <a:latin typeface="微软雅黑" panose="020B0503020204020204" pitchFamily="34" charset="-122"/>
+              <a:ea typeface="微软雅黑" panose="020B0503020204020204" pitchFamily="34" charset="-122"/>
+            </a:endParaRPr>
+          </a:p>
+        </p:txBody>
+      </p:sp>
+      <p:sp>
+        <p:nvSpPr>
+          <p:cNvPr id="163" name="Text 122">
+            <a:extLst>
+              <a:ext uri="{FF2B5EF4-FFF2-40B4-BE49-F238E27FC236}">
+                <a16:creationId xmlns:a16="http://schemas.microsoft.com/office/drawing/2014/main" id="{9F71F927-F6FB-44A4-B5BD-FAE70AD9E5B1}"/>
+              </a:ext>
+            </a:extLst>
+          </p:cNvPr>
+          <p:cNvSpPr/>
+          <p:nvPr/>
+        </p:nvSpPr>
+        <p:spPr>
+          <a:xfrm>
+            <a:off x="6364985" y="4693844"/>
+            <a:ext cx="731520" cy="164592"/>
+          </a:xfrm>
+          <a:prstGeom prst="rect">
+            <a:avLst/>
+          </a:prstGeom>
+          <a:noFill/>
+          <a:ln/>
+        </p:spPr>
+        <p:txBody>
+          <a:bodyPr wrap="square" lIns="0" tIns="0" rIns="0" bIns="0" rtlCol="0" anchor="ctr">
+            <a:normAutofit/>
+          </a:bodyPr>
+          <a:lstStyle/>
+          <a:p>
+            <a:pPr marL="0" indent="0">
+              <a:buNone/>
+            </a:pPr>
+            <a:r>
+              <a:rPr lang="en-US" sz="900" dirty="0">
+                <a:solidFill>
+                  <a:srgbClr val="111827"/>
+                </a:solidFill>
+                <a:latin typeface="微软雅黑" panose="020B0503020204020204" pitchFamily="34" charset="-122"/>
+                <a:ea typeface="微软雅黑" panose="020B0503020204020204" pitchFamily="34" charset="-122"/>
+                <a:cs typeface="Noto Sans CJK SC" pitchFamily="34" charset="-120"/>
+              </a:rPr>
+              <a:t>负债机构</a:t>
+            </a:r>
+            <a:endParaRPr lang="en-US" sz="900" dirty="0">
+              <a:latin typeface="微软雅黑" panose="020B0503020204020204" pitchFamily="34" charset="-122"/>
+              <a:ea typeface="微软雅黑" panose="020B0503020204020204" pitchFamily="34" charset="-122"/>
+            </a:endParaRPr>
+          </a:p>
+        </p:txBody>
+      </p:sp>
+      <p:sp>
+        <p:nvSpPr>
+          <p:cNvPr id="164" name="Text 123">
+            <a:extLst>
+              <a:ext uri="{FF2B5EF4-FFF2-40B4-BE49-F238E27FC236}">
+                <a16:creationId xmlns:a16="http://schemas.microsoft.com/office/drawing/2014/main" id="{6FD7F718-8A52-46A1-8418-5783CE8F2CD2}"/>
+              </a:ext>
+            </a:extLst>
+          </p:cNvPr>
+          <p:cNvSpPr/>
+          <p:nvPr/>
+        </p:nvSpPr>
+        <p:spPr>
+          <a:xfrm>
+            <a:off x="7096505" y="4693844"/>
+            <a:ext cx="768096" cy="164592"/>
+          </a:xfrm>
+          <a:prstGeom prst="rect">
+            <a:avLst/>
+          </a:prstGeom>
+          <a:noFill/>
+          <a:ln/>
+        </p:spPr>
+        <p:txBody>
+          <a:bodyPr wrap="square" lIns="0" tIns="0" rIns="0" bIns="0" rtlCol="0" anchor="ctr">
+            <a:normAutofit/>
+          </a:bodyPr>
+          <a:lstStyle/>
+          <a:p>
+            <a:pPr marL="0" indent="0">
+              <a:buNone/>
+            </a:pPr>
+            <a:r>
+              <a:rPr lang="en-US" sz="900" b="1" dirty="0">
+                <a:solidFill>
+                  <a:srgbClr val="183F73"/>
+                </a:solidFill>
+                <a:latin typeface="微软雅黑" panose="020B0503020204020204" pitchFamily="34" charset="-122"/>
+                <a:ea typeface="微软雅黑" panose="020B0503020204020204" pitchFamily="34" charset="-122"/>
+                <a:cs typeface="Noto Sans CJK SC" pitchFamily="34" charset="-120"/>
+              </a:rPr>
+              <a:t>2家</a:t>
+            </a:r>
+            <a:endParaRPr lang="en-US" sz="900" dirty="0">
+              <a:latin typeface="微软雅黑" panose="020B0503020204020204" pitchFamily="34" charset="-122"/>
+              <a:ea typeface="微软雅黑" panose="020B0503020204020204" pitchFamily="34" charset="-122"/>
+            </a:endParaRPr>
+          </a:p>
+        </p:txBody>
+      </p:sp>
+      <p:sp>
+        <p:nvSpPr>
+          <p:cNvPr id="165" name="Text 124">
+            <a:extLst>
+              <a:ext uri="{FF2B5EF4-FFF2-40B4-BE49-F238E27FC236}">
+                <a16:creationId xmlns:a16="http://schemas.microsoft.com/office/drawing/2014/main" id="{A6D8E11C-FAAB-46F8-9A61-A1D29098DD41}"/>
+              </a:ext>
+            </a:extLst>
+          </p:cNvPr>
+          <p:cNvSpPr/>
+          <p:nvPr/>
+        </p:nvSpPr>
+        <p:spPr>
+          <a:xfrm>
+            <a:off x="6364985" y="4981880"/>
+            <a:ext cx="731520" cy="164592"/>
+          </a:xfrm>
+          <a:prstGeom prst="rect">
+            <a:avLst/>
+          </a:prstGeom>
+          <a:noFill/>
+          <a:ln/>
+        </p:spPr>
+        <p:txBody>
+          <a:bodyPr wrap="square" lIns="0" tIns="0" rIns="0" bIns="0" rtlCol="0" anchor="ctr">
+            <a:normAutofit/>
+          </a:bodyPr>
+          <a:lstStyle/>
+          <a:p>
+            <a:pPr marL="0" indent="0">
+              <a:buNone/>
+            </a:pPr>
+            <a:r>
+              <a:rPr lang="en-US" sz="900" dirty="0">
+                <a:solidFill>
+                  <a:srgbClr val="111827"/>
+                </a:solidFill>
+                <a:latin typeface="微软雅黑" panose="020B0503020204020204" pitchFamily="34" charset="-122"/>
+                <a:ea typeface="微软雅黑" panose="020B0503020204020204" pitchFamily="34" charset="-122"/>
+                <a:cs typeface="Noto Sans CJK SC" pitchFamily="34" charset="-120"/>
+              </a:rPr>
+              <a:t>在贷笔数</a:t>
+            </a:r>
+            <a:endParaRPr lang="en-US" sz="900" dirty="0">
+              <a:latin typeface="微软雅黑" panose="020B0503020204020204" pitchFamily="34" charset="-122"/>
+              <a:ea typeface="微软雅黑" panose="020B0503020204020204" pitchFamily="34" charset="-122"/>
+            </a:endParaRPr>
+          </a:p>
+        </p:txBody>
+      </p:sp>
+      <p:sp>
+        <p:nvSpPr>
+          <p:cNvPr id="166" name="Text 125">
+            <a:extLst>
+              <a:ext uri="{FF2B5EF4-FFF2-40B4-BE49-F238E27FC236}">
+                <a16:creationId xmlns:a16="http://schemas.microsoft.com/office/drawing/2014/main" id="{2DC3D885-265B-41FB-9BAC-19F69855571B}"/>
+              </a:ext>
+            </a:extLst>
+          </p:cNvPr>
+          <p:cNvSpPr/>
+          <p:nvPr/>
+        </p:nvSpPr>
+        <p:spPr>
+          <a:xfrm>
+            <a:off x="7096505" y="4981880"/>
+            <a:ext cx="768096" cy="164592"/>
+          </a:xfrm>
+          <a:prstGeom prst="rect">
+            <a:avLst/>
+          </a:prstGeom>
+          <a:noFill/>
+          <a:ln/>
+        </p:spPr>
+        <p:txBody>
+          <a:bodyPr wrap="square" lIns="0" tIns="0" rIns="0" bIns="0" rtlCol="0" anchor="ctr">
+            <a:normAutofit/>
+          </a:bodyPr>
+          <a:lstStyle/>
+          <a:p>
+            <a:pPr marL="0" indent="0">
+              <a:buNone/>
+            </a:pPr>
+            <a:r>
+              <a:rPr lang="en-US" sz="900" b="1" dirty="0">
+                <a:solidFill>
+                  <a:srgbClr val="183F73"/>
+                </a:solidFill>
+                <a:latin typeface="微软雅黑" panose="020B0503020204020204" pitchFamily="34" charset="-122"/>
+                <a:ea typeface="微软雅黑" panose="020B0503020204020204" pitchFamily="34" charset="-122"/>
+                <a:cs typeface="Noto Sans CJK SC" pitchFamily="34" charset="-120"/>
+              </a:rPr>
+              <a:t>3笔</a:t>
+            </a:r>
+            <a:endParaRPr lang="en-US" sz="900" dirty="0">
+              <a:latin typeface="微软雅黑" panose="020B0503020204020204" pitchFamily="34" charset="-122"/>
+              <a:ea typeface="微软雅黑" panose="020B0503020204020204" pitchFamily="34" charset="-122"/>
+            </a:endParaRPr>
+          </a:p>
+        </p:txBody>
+      </p:sp>
+      <p:sp>
+        <p:nvSpPr>
+          <p:cNvPr id="167" name="Text 126">
+            <a:extLst>
+              <a:ext uri="{FF2B5EF4-FFF2-40B4-BE49-F238E27FC236}">
+                <a16:creationId xmlns:a16="http://schemas.microsoft.com/office/drawing/2014/main" id="{0C0EDCD6-5589-4CFF-9C00-934CB5FBA5D4}"/>
+              </a:ext>
+            </a:extLst>
+          </p:cNvPr>
+          <p:cNvSpPr/>
+          <p:nvPr/>
+        </p:nvSpPr>
+        <p:spPr>
+          <a:xfrm>
+            <a:off x="6364985" y="5269916"/>
+            <a:ext cx="731520" cy="164592"/>
+          </a:xfrm>
+          <a:prstGeom prst="rect">
+            <a:avLst/>
+          </a:prstGeom>
+          <a:noFill/>
+          <a:ln/>
+        </p:spPr>
+        <p:txBody>
+          <a:bodyPr wrap="square" lIns="0" tIns="0" rIns="0" bIns="0" rtlCol="0" anchor="ctr">
+            <a:normAutofit/>
+          </a:bodyPr>
+          <a:lstStyle/>
+          <a:p>
+            <a:pPr marL="0" indent="0">
+              <a:buNone/>
+            </a:pPr>
+            <a:r>
+              <a:rPr lang="en-US" sz="900" dirty="0">
+                <a:solidFill>
+                  <a:srgbClr val="111827"/>
+                </a:solidFill>
+                <a:latin typeface="微软雅黑" panose="020B0503020204020204" pitchFamily="34" charset="-122"/>
+                <a:ea typeface="微软雅黑" panose="020B0503020204020204" pitchFamily="34" charset="-122"/>
+                <a:cs typeface="Noto Sans CJK SC" pitchFamily="34" charset="-120"/>
+              </a:rPr>
+              <a:t>负债结构</a:t>
+            </a:r>
+            <a:endParaRPr lang="en-US" sz="900" dirty="0">
+              <a:latin typeface="微软雅黑" panose="020B0503020204020204" pitchFamily="34" charset="-122"/>
+              <a:ea typeface="微软雅黑" panose="020B0503020204020204" pitchFamily="34" charset="-122"/>
+            </a:endParaRPr>
+          </a:p>
+        </p:txBody>
+      </p:sp>
+      <p:sp>
+        <p:nvSpPr>
+          <p:cNvPr id="168" name="Text 127">
+            <a:extLst>
+              <a:ext uri="{FF2B5EF4-FFF2-40B4-BE49-F238E27FC236}">
+                <a16:creationId xmlns:a16="http://schemas.microsoft.com/office/drawing/2014/main" id="{06CF59B5-F0FC-47A7-B5DB-50FD84BF7683}"/>
+              </a:ext>
+            </a:extLst>
+          </p:cNvPr>
+          <p:cNvSpPr/>
+          <p:nvPr/>
+        </p:nvSpPr>
+        <p:spPr>
+          <a:xfrm>
+            <a:off x="7087497" y="5468707"/>
+            <a:ext cx="768096" cy="164592"/>
+          </a:xfrm>
+          <a:prstGeom prst="rect">
+            <a:avLst/>
+          </a:prstGeom>
+          <a:noFill/>
+          <a:ln/>
+        </p:spPr>
+        <p:txBody>
+          <a:bodyPr wrap="square" lIns="0" tIns="0" rIns="0" bIns="0" rtlCol="0" anchor="ctr">
+            <a:noAutofit/>
+          </a:bodyPr>
+          <a:lstStyle/>
+          <a:p>
+            <a:pPr marL="0" indent="0">
+              <a:buNone/>
+            </a:pPr>
+            <a:r>
+              <a:rPr lang="en-US" sz="900" b="1" dirty="0">
+                <a:solidFill>
+                  <a:srgbClr val="183F73"/>
+                </a:solidFill>
+                <a:latin typeface="微软雅黑" panose="020B0503020204020204" pitchFamily="34" charset="-122"/>
+                <a:ea typeface="微软雅黑" panose="020B0503020204020204" pitchFamily="34" charset="-122"/>
+                <a:cs typeface="Noto Sans CJK SC" pitchFamily="34" charset="-120"/>
+              </a:rPr>
+              <a:t>SACC 65% / Non-SACC 15% / BNPL 20%</a:t>
+            </a:r>
+            <a:endParaRPr lang="en-US" sz="900" dirty="0">
+              <a:latin typeface="微软雅黑" panose="020B0503020204020204" pitchFamily="34" charset="-122"/>
+              <a:ea typeface="微软雅黑" panose="020B0503020204020204" pitchFamily="34" charset="-122"/>
+            </a:endParaRPr>
+          </a:p>
+        </p:txBody>
+      </p:sp>
+      <p:sp>
+        <p:nvSpPr>
+          <p:cNvPr id="171" name="Text 130">
+            <a:extLst>
+              <a:ext uri="{FF2B5EF4-FFF2-40B4-BE49-F238E27FC236}">
+                <a16:creationId xmlns:a16="http://schemas.microsoft.com/office/drawing/2014/main" id="{F3A813AD-97F8-42F1-B282-F64A1C054131}"/>
+              </a:ext>
+            </a:extLst>
+          </p:cNvPr>
+          <p:cNvSpPr/>
+          <p:nvPr/>
+        </p:nvSpPr>
+        <p:spPr>
+          <a:xfrm>
+            <a:off x="8175497" y="4117772"/>
+            <a:ext cx="890524" cy="164592"/>
+          </a:xfrm>
+          <a:prstGeom prst="rect">
+            <a:avLst/>
+          </a:prstGeom>
+          <a:noFill/>
+          <a:ln/>
+        </p:spPr>
+        <p:txBody>
+          <a:bodyPr wrap="square" lIns="0" tIns="0" rIns="0" bIns="0" rtlCol="0" anchor="ctr">
+            <a:noAutofit/>
+          </a:bodyPr>
+          <a:lstStyle/>
+          <a:p>
+            <a:pPr marL="0" indent="0">
+              <a:buNone/>
+            </a:pPr>
+            <a:r>
+              <a:rPr lang="en-US" sz="900" dirty="0">
+                <a:solidFill>
+                  <a:srgbClr val="111827"/>
+                </a:solidFill>
+                <a:latin typeface="微软雅黑" panose="020B0503020204020204" pitchFamily="34" charset="-122"/>
+                <a:ea typeface="微软雅黑" panose="020B0503020204020204" pitchFamily="34" charset="-122"/>
+                <a:cs typeface="Noto Sans CJK SC" pitchFamily="34" charset="-120"/>
+              </a:rPr>
+              <a:t>近90天新增借款</a:t>
+            </a:r>
+            <a:endParaRPr lang="en-US" sz="900" dirty="0">
+              <a:latin typeface="微软雅黑" panose="020B0503020204020204" pitchFamily="34" charset="-122"/>
+              <a:ea typeface="微软雅黑" panose="020B0503020204020204" pitchFamily="34" charset="-122"/>
+            </a:endParaRPr>
+          </a:p>
+        </p:txBody>
+      </p:sp>
+      <p:sp>
+        <p:nvSpPr>
+          <p:cNvPr id="172" name="Text 131">
+            <a:extLst>
+              <a:ext uri="{FF2B5EF4-FFF2-40B4-BE49-F238E27FC236}">
+                <a16:creationId xmlns:a16="http://schemas.microsoft.com/office/drawing/2014/main" id="{6347F81E-CE45-4051-8BC3-7B7135580484}"/>
+              </a:ext>
+            </a:extLst>
+          </p:cNvPr>
+          <p:cNvSpPr/>
+          <p:nvPr/>
+        </p:nvSpPr>
+        <p:spPr>
+          <a:xfrm>
+            <a:off x="9141967" y="4117772"/>
+            <a:ext cx="768096" cy="164592"/>
+          </a:xfrm>
+          <a:prstGeom prst="rect">
+            <a:avLst/>
+          </a:prstGeom>
+          <a:noFill/>
+          <a:ln/>
+        </p:spPr>
+        <p:txBody>
+          <a:bodyPr wrap="square" lIns="0" tIns="0" rIns="0" bIns="0" rtlCol="0" anchor="ctr">
+            <a:normAutofit/>
+          </a:bodyPr>
+          <a:lstStyle/>
+          <a:p>
+            <a:pPr marL="0" indent="0">
+              <a:buNone/>
+            </a:pPr>
+            <a:r>
+              <a:rPr lang="en-US" sz="900" b="1" dirty="0">
+                <a:solidFill>
+                  <a:srgbClr val="183F73"/>
+                </a:solidFill>
+                <a:latin typeface="微软雅黑" panose="020B0503020204020204" pitchFamily="34" charset="-122"/>
+                <a:ea typeface="微软雅黑" panose="020B0503020204020204" pitchFamily="34" charset="-122"/>
+                <a:cs typeface="Noto Sans CJK SC" pitchFamily="34" charset="-120"/>
+              </a:rPr>
+              <a:t>1笔</a:t>
+            </a:r>
+            <a:endParaRPr lang="en-US" sz="900" dirty="0">
+              <a:latin typeface="微软雅黑" panose="020B0503020204020204" pitchFamily="34" charset="-122"/>
+              <a:ea typeface="微软雅黑" panose="020B0503020204020204" pitchFamily="34" charset="-122"/>
+            </a:endParaRPr>
+          </a:p>
+        </p:txBody>
+      </p:sp>
+      <p:sp>
+        <p:nvSpPr>
+          <p:cNvPr id="173" name="Text 132">
+            <a:extLst>
+              <a:ext uri="{FF2B5EF4-FFF2-40B4-BE49-F238E27FC236}">
+                <a16:creationId xmlns:a16="http://schemas.microsoft.com/office/drawing/2014/main" id="{15E6243C-4958-482A-B54B-7DCA8632358F}"/>
+              </a:ext>
+            </a:extLst>
+          </p:cNvPr>
+          <p:cNvSpPr/>
+          <p:nvPr/>
+        </p:nvSpPr>
+        <p:spPr>
+          <a:xfrm>
+            <a:off x="8175497" y="4405808"/>
+            <a:ext cx="731520" cy="164592"/>
+          </a:xfrm>
+          <a:prstGeom prst="rect">
+            <a:avLst/>
+          </a:prstGeom>
+          <a:noFill/>
+          <a:ln/>
+        </p:spPr>
+        <p:txBody>
+          <a:bodyPr wrap="square" lIns="0" tIns="0" rIns="0" bIns="0" rtlCol="0" anchor="ctr">
+            <a:noAutofit/>
+          </a:bodyPr>
+          <a:lstStyle/>
+          <a:p>
+            <a:pPr marL="0" indent="0">
+              <a:buNone/>
+            </a:pPr>
+            <a:r>
+              <a:rPr lang="en-US" sz="900" dirty="0">
+                <a:solidFill>
+                  <a:srgbClr val="111827"/>
+                </a:solidFill>
+                <a:latin typeface="微软雅黑" panose="020B0503020204020204" pitchFamily="34" charset="-122"/>
+                <a:ea typeface="微软雅黑" panose="020B0503020204020204" pitchFamily="34" charset="-122"/>
+                <a:cs typeface="Noto Sans CJK SC" pitchFamily="34" charset="-120"/>
+              </a:rPr>
+              <a:t>90天借款金额</a:t>
+            </a:r>
+            <a:endParaRPr lang="en-US" sz="900" dirty="0">
+              <a:latin typeface="微软雅黑" panose="020B0503020204020204" pitchFamily="34" charset="-122"/>
+              <a:ea typeface="微软雅黑" panose="020B0503020204020204" pitchFamily="34" charset="-122"/>
+            </a:endParaRPr>
+          </a:p>
+        </p:txBody>
+      </p:sp>
+      <p:sp>
+        <p:nvSpPr>
+          <p:cNvPr id="174" name="Text 133">
+            <a:extLst>
+              <a:ext uri="{FF2B5EF4-FFF2-40B4-BE49-F238E27FC236}">
+                <a16:creationId xmlns:a16="http://schemas.microsoft.com/office/drawing/2014/main" id="{0A5CC1E4-A9EF-4173-81EF-06564456DD66}"/>
+              </a:ext>
+            </a:extLst>
+          </p:cNvPr>
+          <p:cNvSpPr/>
+          <p:nvPr/>
+        </p:nvSpPr>
+        <p:spPr>
+          <a:xfrm>
+            <a:off x="9141967" y="4405808"/>
+            <a:ext cx="768096" cy="164592"/>
+          </a:xfrm>
+          <a:prstGeom prst="rect">
+            <a:avLst/>
+          </a:prstGeom>
+          <a:noFill/>
+          <a:ln/>
+        </p:spPr>
+        <p:txBody>
+          <a:bodyPr wrap="square" lIns="0" tIns="0" rIns="0" bIns="0" rtlCol="0" anchor="ctr">
+            <a:normAutofit/>
+          </a:bodyPr>
+          <a:lstStyle/>
+          <a:p>
+            <a:pPr marL="0" indent="0">
+              <a:buNone/>
+            </a:pPr>
+            <a:r>
+              <a:rPr lang="en-US" sz="900" b="1" dirty="0">
+                <a:solidFill>
+                  <a:srgbClr val="183F73"/>
+                </a:solidFill>
+                <a:latin typeface="微软雅黑" panose="020B0503020204020204" pitchFamily="34" charset="-122"/>
+                <a:ea typeface="微软雅黑" panose="020B0503020204020204" pitchFamily="34" charset="-122"/>
+                <a:cs typeface="Noto Sans CJK SC" pitchFamily="34" charset="-120"/>
+              </a:rPr>
+              <a:t>A$2,300</a:t>
+            </a:r>
+            <a:endParaRPr lang="en-US" sz="900" dirty="0">
+              <a:latin typeface="微软雅黑" panose="020B0503020204020204" pitchFamily="34" charset="-122"/>
+              <a:ea typeface="微软雅黑" panose="020B0503020204020204" pitchFamily="34" charset="-122"/>
+            </a:endParaRPr>
+          </a:p>
+        </p:txBody>
+      </p:sp>
+      <p:sp>
+        <p:nvSpPr>
+          <p:cNvPr id="175" name="Text 134">
+            <a:extLst>
+              <a:ext uri="{FF2B5EF4-FFF2-40B4-BE49-F238E27FC236}">
+                <a16:creationId xmlns:a16="http://schemas.microsoft.com/office/drawing/2014/main" id="{6D94C9CD-69E3-4AC3-BF41-D36352AA2496}"/>
+              </a:ext>
+            </a:extLst>
+          </p:cNvPr>
+          <p:cNvSpPr/>
+          <p:nvPr/>
+        </p:nvSpPr>
+        <p:spPr>
+          <a:xfrm>
+            <a:off x="8175497" y="4693844"/>
+            <a:ext cx="731520" cy="164592"/>
+          </a:xfrm>
+          <a:prstGeom prst="rect">
+            <a:avLst/>
+          </a:prstGeom>
+          <a:noFill/>
+          <a:ln/>
+        </p:spPr>
+        <p:txBody>
+          <a:bodyPr wrap="square" lIns="0" tIns="0" rIns="0" bIns="0" rtlCol="0" anchor="ctr">
+            <a:noAutofit/>
+          </a:bodyPr>
+          <a:lstStyle/>
+          <a:p>
+            <a:pPr marL="0" indent="0">
+              <a:buNone/>
+            </a:pPr>
+            <a:r>
+              <a:rPr lang="en-US" sz="900" dirty="0">
+                <a:solidFill>
+                  <a:srgbClr val="111827"/>
+                </a:solidFill>
+                <a:latin typeface="微软雅黑" panose="020B0503020204020204" pitchFamily="34" charset="-122"/>
+                <a:ea typeface="微软雅黑" panose="020B0503020204020204" pitchFamily="34" charset="-122"/>
+                <a:cs typeface="Noto Sans CJK SC" pitchFamily="34" charset="-120"/>
+              </a:rPr>
+              <a:t>历史贷款笔数</a:t>
+            </a:r>
+            <a:endParaRPr lang="en-US" sz="900" dirty="0">
+              <a:latin typeface="微软雅黑" panose="020B0503020204020204" pitchFamily="34" charset="-122"/>
+              <a:ea typeface="微软雅黑" panose="020B0503020204020204" pitchFamily="34" charset="-122"/>
+            </a:endParaRPr>
+          </a:p>
+        </p:txBody>
+      </p:sp>
+      <p:sp>
+        <p:nvSpPr>
+          <p:cNvPr id="176" name="Text 135">
+            <a:extLst>
+              <a:ext uri="{FF2B5EF4-FFF2-40B4-BE49-F238E27FC236}">
+                <a16:creationId xmlns:a16="http://schemas.microsoft.com/office/drawing/2014/main" id="{AA56E2B0-19E1-49F5-BE4C-541B13BCCA7D}"/>
+              </a:ext>
+            </a:extLst>
+          </p:cNvPr>
+          <p:cNvSpPr/>
+          <p:nvPr/>
+        </p:nvSpPr>
+        <p:spPr>
+          <a:xfrm>
+            <a:off x="9141967" y="4693844"/>
+            <a:ext cx="768096" cy="164592"/>
+          </a:xfrm>
+          <a:prstGeom prst="rect">
+            <a:avLst/>
+          </a:prstGeom>
+          <a:noFill/>
+          <a:ln/>
+        </p:spPr>
+        <p:txBody>
+          <a:bodyPr wrap="square" lIns="0" tIns="0" rIns="0" bIns="0" rtlCol="0" anchor="ctr">
+            <a:normAutofit/>
+          </a:bodyPr>
+          <a:lstStyle/>
+          <a:p>
+            <a:pPr marL="0" indent="0">
+              <a:buNone/>
+            </a:pPr>
+            <a:r>
+              <a:rPr lang="en-US" sz="900" b="1" dirty="0">
+                <a:solidFill>
+                  <a:srgbClr val="183F73"/>
+                </a:solidFill>
+                <a:latin typeface="微软雅黑" panose="020B0503020204020204" pitchFamily="34" charset="-122"/>
+                <a:ea typeface="微软雅黑" panose="020B0503020204020204" pitchFamily="34" charset="-122"/>
+                <a:cs typeface="Noto Sans CJK SC" pitchFamily="34" charset="-120"/>
+              </a:rPr>
+              <a:t>5笔</a:t>
+            </a:r>
+            <a:endParaRPr lang="en-US" sz="900" dirty="0">
+              <a:latin typeface="微软雅黑" panose="020B0503020204020204" pitchFamily="34" charset="-122"/>
+              <a:ea typeface="微软雅黑" panose="020B0503020204020204" pitchFamily="34" charset="-122"/>
+            </a:endParaRPr>
+          </a:p>
+        </p:txBody>
+      </p:sp>
+      <p:sp>
+        <p:nvSpPr>
+          <p:cNvPr id="177" name="Text 136">
+            <a:extLst>
+              <a:ext uri="{FF2B5EF4-FFF2-40B4-BE49-F238E27FC236}">
+                <a16:creationId xmlns:a16="http://schemas.microsoft.com/office/drawing/2014/main" id="{19A2F019-FCA1-44C6-9C3A-8E51F7EECF69}"/>
+              </a:ext>
+            </a:extLst>
+          </p:cNvPr>
+          <p:cNvSpPr/>
+          <p:nvPr/>
+        </p:nvSpPr>
+        <p:spPr>
+          <a:xfrm>
+            <a:off x="8175497" y="4981880"/>
+            <a:ext cx="731520" cy="164592"/>
+          </a:xfrm>
+          <a:prstGeom prst="rect">
+            <a:avLst/>
+          </a:prstGeom>
+          <a:noFill/>
+          <a:ln/>
+        </p:spPr>
+        <p:txBody>
+          <a:bodyPr wrap="square" lIns="0" tIns="0" rIns="0" bIns="0" rtlCol="0" anchor="ctr">
+            <a:noAutofit/>
+          </a:bodyPr>
+          <a:lstStyle/>
+          <a:p>
+            <a:pPr marL="0" indent="0">
+              <a:buNone/>
+            </a:pPr>
+            <a:r>
+              <a:rPr lang="en-US" sz="900" dirty="0">
+                <a:solidFill>
+                  <a:srgbClr val="111827"/>
+                </a:solidFill>
+                <a:latin typeface="微软雅黑" panose="020B0503020204020204" pitchFamily="34" charset="-122"/>
+                <a:ea typeface="微软雅黑" panose="020B0503020204020204" pitchFamily="34" charset="-122"/>
+                <a:cs typeface="Noto Sans CJK SC" pitchFamily="34" charset="-120"/>
+              </a:rPr>
+              <a:t>最早借款距今</a:t>
+            </a:r>
+            <a:endParaRPr lang="en-US" sz="900" dirty="0">
+              <a:latin typeface="微软雅黑" panose="020B0503020204020204" pitchFamily="34" charset="-122"/>
+              <a:ea typeface="微软雅黑" panose="020B0503020204020204" pitchFamily="34" charset="-122"/>
+            </a:endParaRPr>
+          </a:p>
+        </p:txBody>
+      </p:sp>
+      <p:sp>
+        <p:nvSpPr>
+          <p:cNvPr id="178" name="Text 137">
+            <a:extLst>
+              <a:ext uri="{FF2B5EF4-FFF2-40B4-BE49-F238E27FC236}">
+                <a16:creationId xmlns:a16="http://schemas.microsoft.com/office/drawing/2014/main" id="{94B44A55-44E0-4383-A746-77D5D6613E04}"/>
+              </a:ext>
+            </a:extLst>
+          </p:cNvPr>
+          <p:cNvSpPr/>
+          <p:nvPr/>
+        </p:nvSpPr>
+        <p:spPr>
+          <a:xfrm>
+            <a:off x="9141967" y="4981880"/>
+            <a:ext cx="768096" cy="164592"/>
+          </a:xfrm>
+          <a:prstGeom prst="rect">
+            <a:avLst/>
+          </a:prstGeom>
+          <a:noFill/>
+          <a:ln/>
+        </p:spPr>
+        <p:txBody>
+          <a:bodyPr wrap="square" lIns="0" tIns="0" rIns="0" bIns="0" rtlCol="0" anchor="ctr">
+            <a:normAutofit/>
+          </a:bodyPr>
+          <a:lstStyle/>
+          <a:p>
+            <a:pPr marL="0" indent="0">
+              <a:buNone/>
+            </a:pPr>
+            <a:r>
+              <a:rPr lang="en-US" sz="900" b="1" dirty="0">
+                <a:solidFill>
+                  <a:srgbClr val="183F73"/>
+                </a:solidFill>
+                <a:latin typeface="微软雅黑" panose="020B0503020204020204" pitchFamily="34" charset="-122"/>
+                <a:ea typeface="微软雅黑" panose="020B0503020204020204" pitchFamily="34" charset="-122"/>
+                <a:cs typeface="Noto Sans CJK SC" pitchFamily="34" charset="-120"/>
+              </a:rPr>
+              <a:t>45天</a:t>
+            </a:r>
+            <a:endParaRPr lang="en-US" sz="900" dirty="0">
+              <a:latin typeface="微软雅黑" panose="020B0503020204020204" pitchFamily="34" charset="-122"/>
+              <a:ea typeface="微软雅黑" panose="020B0503020204020204" pitchFamily="34" charset="-122"/>
+            </a:endParaRPr>
+          </a:p>
+        </p:txBody>
+      </p:sp>
+      <p:sp>
+        <p:nvSpPr>
+          <p:cNvPr id="179" name="Text 138">
+            <a:extLst>
+              <a:ext uri="{FF2B5EF4-FFF2-40B4-BE49-F238E27FC236}">
+                <a16:creationId xmlns:a16="http://schemas.microsoft.com/office/drawing/2014/main" id="{2C6767C0-B0FF-426A-B659-4E3627B66697}"/>
+              </a:ext>
+            </a:extLst>
+          </p:cNvPr>
+          <p:cNvSpPr/>
+          <p:nvPr/>
+        </p:nvSpPr>
+        <p:spPr>
+          <a:xfrm>
+            <a:off x="8175497" y="5269916"/>
+            <a:ext cx="731520" cy="164592"/>
+          </a:xfrm>
+          <a:prstGeom prst="rect">
+            <a:avLst/>
+          </a:prstGeom>
+          <a:noFill/>
+          <a:ln/>
+        </p:spPr>
+        <p:txBody>
+          <a:bodyPr wrap="square" lIns="0" tIns="0" rIns="0" bIns="0" rtlCol="0" anchor="ctr">
+            <a:normAutofit/>
+          </a:bodyPr>
+          <a:lstStyle/>
+          <a:p>
+            <a:pPr marL="0" indent="0">
+              <a:buNone/>
+            </a:pPr>
+            <a:r>
+              <a:rPr lang="en-US" sz="900" dirty="0">
+                <a:solidFill>
+                  <a:srgbClr val="111827"/>
+                </a:solidFill>
+                <a:latin typeface="微软雅黑" panose="020B0503020204020204" pitchFamily="34" charset="-122"/>
+                <a:ea typeface="微软雅黑" panose="020B0503020204020204" pitchFamily="34" charset="-122"/>
+                <a:cs typeface="Noto Sans CJK SC" pitchFamily="34" charset="-120"/>
+              </a:rPr>
+              <a:t>还款中断</a:t>
+            </a:r>
+            <a:endParaRPr lang="en-US" sz="900" dirty="0">
+              <a:latin typeface="微软雅黑" panose="020B0503020204020204" pitchFamily="34" charset="-122"/>
+              <a:ea typeface="微软雅黑" panose="020B0503020204020204" pitchFamily="34" charset="-122"/>
+            </a:endParaRPr>
+          </a:p>
+        </p:txBody>
+      </p:sp>
+      <p:sp>
+        <p:nvSpPr>
+          <p:cNvPr id="180" name="Text 139">
+            <a:extLst>
+              <a:ext uri="{FF2B5EF4-FFF2-40B4-BE49-F238E27FC236}">
+                <a16:creationId xmlns:a16="http://schemas.microsoft.com/office/drawing/2014/main" id="{FB090E7D-AB3F-4FF1-B888-E3EBF2E3AB82}"/>
+              </a:ext>
+            </a:extLst>
+          </p:cNvPr>
+          <p:cNvSpPr/>
+          <p:nvPr/>
+        </p:nvSpPr>
+        <p:spPr>
+          <a:xfrm>
+            <a:off x="9141967" y="5269916"/>
+            <a:ext cx="768096" cy="164592"/>
+          </a:xfrm>
+          <a:prstGeom prst="rect">
+            <a:avLst/>
+          </a:prstGeom>
+          <a:noFill/>
+          <a:ln/>
+        </p:spPr>
+        <p:txBody>
+          <a:bodyPr wrap="square" lIns="0" tIns="0" rIns="0" bIns="0" rtlCol="0" anchor="ctr">
+            <a:normAutofit/>
+          </a:bodyPr>
+          <a:lstStyle/>
+          <a:p>
+            <a:pPr marL="0" indent="0">
+              <a:buNone/>
+            </a:pPr>
+            <a:r>
+              <a:rPr lang="en-US" sz="900" b="1" dirty="0">
+                <a:solidFill>
+                  <a:srgbClr val="183F73"/>
+                </a:solidFill>
+                <a:latin typeface="微软雅黑" panose="020B0503020204020204" pitchFamily="34" charset="-122"/>
+                <a:ea typeface="微软雅黑" panose="020B0503020204020204" pitchFamily="34" charset="-122"/>
+                <a:cs typeface="Noto Sans CJK SC" pitchFamily="34" charset="-120"/>
+              </a:rPr>
+              <a:t>0次</a:t>
+            </a:r>
+            <a:endParaRPr lang="en-US" sz="900" dirty="0">
+              <a:latin typeface="微软雅黑" panose="020B0503020204020204" pitchFamily="34" charset="-122"/>
+              <a:ea typeface="微软雅黑" panose="020B0503020204020204" pitchFamily="34" charset="-122"/>
+            </a:endParaRPr>
+          </a:p>
+        </p:txBody>
+      </p:sp>
+      <p:grpSp>
+        <p:nvGrpSpPr>
+          <p:cNvPr id="6" name="组合 5">
+            <a:extLst>
+              <a:ext uri="{FF2B5EF4-FFF2-40B4-BE49-F238E27FC236}">
+                <a16:creationId xmlns:a16="http://schemas.microsoft.com/office/drawing/2014/main" id="{853B6FF1-E1E7-4D5A-884F-7D554F438873}"/>
+              </a:ext>
+            </a:extLst>
+          </p:cNvPr>
+          <p:cNvGrpSpPr/>
+          <p:nvPr/>
+        </p:nvGrpSpPr>
+        <p:grpSpPr>
+          <a:xfrm>
+            <a:off x="6291833" y="3744138"/>
+            <a:ext cx="5605272" cy="256032"/>
+            <a:chOff x="6283385" y="3874883"/>
+            <a:chExt cx="5605272" cy="256032"/>
+          </a:xfrm>
+        </p:grpSpPr>
+        <p:sp>
+          <p:nvSpPr>
+            <p:cNvPr id="114" name="Shape 116">
+              <a:extLst>
+                <a:ext uri="{FF2B5EF4-FFF2-40B4-BE49-F238E27FC236}">
+                  <a16:creationId xmlns:a16="http://schemas.microsoft.com/office/drawing/2014/main" id="{79360BE7-9EB9-4203-850E-DA0FDA5684AF}"/>
+                </a:ext>
+              </a:extLst>
+            </p:cNvPr>
+            <p:cNvSpPr/>
+            <p:nvPr/>
+          </p:nvSpPr>
+          <p:spPr>
+            <a:xfrm>
+              <a:off x="6283385" y="3902315"/>
+              <a:ext cx="0" cy="228600"/>
+            </a:xfrm>
+            <a:prstGeom prst="line">
+              <a:avLst/>
+            </a:prstGeom>
+            <a:noFill/>
+            <a:ln w="25400">
+              <a:solidFill>
+                <a:srgbClr val="D99A00"/>
+              </a:solidFill>
+              <a:prstDash val="solid"/>
+            </a:ln>
+          </p:spPr>
+        </p:sp>
+        <p:sp>
+          <p:nvSpPr>
+            <p:cNvPr id="115" name="Text 117">
+              <a:extLst>
+                <a:ext uri="{FF2B5EF4-FFF2-40B4-BE49-F238E27FC236}">
+                  <a16:creationId xmlns:a16="http://schemas.microsoft.com/office/drawing/2014/main" id="{3D3CA811-5D4D-4D41-8CA7-0E6F296925D9}"/>
+                </a:ext>
+              </a:extLst>
+            </p:cNvPr>
+            <p:cNvSpPr/>
+            <p:nvPr/>
+          </p:nvSpPr>
+          <p:spPr>
+            <a:xfrm>
+              <a:off x="6356537" y="3874883"/>
+              <a:ext cx="1591056" cy="237744"/>
+            </a:xfrm>
+            <a:prstGeom prst="rect">
+              <a:avLst/>
+            </a:prstGeom>
+            <a:noFill/>
+            <a:ln/>
+          </p:spPr>
+          <p:txBody>
+            <a:bodyPr wrap="square" lIns="0" tIns="0" rIns="0" bIns="0" rtlCol="0" anchor="ctr">
+              <a:normAutofit/>
+            </a:bodyPr>
+            <a:lstStyle/>
+            <a:p>
+              <a:pPr marL="0" indent="0">
+                <a:buNone/>
+              </a:pPr>
+              <a:r>
+                <a:rPr lang="en-US" sz="1000" b="1" dirty="0">
+                  <a:solidFill>
+                    <a:srgbClr val="183F73"/>
+                  </a:solidFill>
+                  <a:latin typeface="微软雅黑" panose="020B0503020204020204" pitchFamily="34" charset="-122"/>
+                  <a:ea typeface="微软雅黑" panose="020B0503020204020204" pitchFamily="34" charset="-122"/>
+                  <a:cs typeface="Noto Sans CJK SC" pitchFamily="34" charset="-120"/>
+                </a:rPr>
+                <a:t>负债敞口与结构</a:t>
+              </a:r>
+              <a:endParaRPr lang="en-US" sz="1000" dirty="0">
+                <a:latin typeface="微软雅黑" panose="020B0503020204020204" pitchFamily="34" charset="-122"/>
+                <a:ea typeface="微软雅黑" panose="020B0503020204020204" pitchFamily="34" charset="-122"/>
+              </a:endParaRPr>
+            </a:p>
+          </p:txBody>
+        </p:sp>
+        <p:sp>
+          <p:nvSpPr>
+            <p:cNvPr id="169" name="Shape 128">
+              <a:extLst>
+                <a:ext uri="{FF2B5EF4-FFF2-40B4-BE49-F238E27FC236}">
+                  <a16:creationId xmlns:a16="http://schemas.microsoft.com/office/drawing/2014/main" id="{3EC7F01A-1C91-4E34-8CEA-FC75587A9796}"/>
+                </a:ext>
+              </a:extLst>
+            </p:cNvPr>
+            <p:cNvSpPr/>
+            <p:nvPr/>
+          </p:nvSpPr>
+          <p:spPr>
+            <a:xfrm>
+              <a:off x="8093897" y="3902315"/>
+              <a:ext cx="0" cy="228600"/>
+            </a:xfrm>
+            <a:prstGeom prst="line">
+              <a:avLst/>
+            </a:prstGeom>
+            <a:noFill/>
+            <a:ln w="25400">
+              <a:solidFill>
+                <a:srgbClr val="D99A00"/>
+              </a:solidFill>
+              <a:prstDash val="solid"/>
+            </a:ln>
+          </p:spPr>
+        </p:sp>
+        <p:sp>
+          <p:nvSpPr>
+            <p:cNvPr id="170" name="Text 129">
+              <a:extLst>
+                <a:ext uri="{FF2B5EF4-FFF2-40B4-BE49-F238E27FC236}">
+                  <a16:creationId xmlns:a16="http://schemas.microsoft.com/office/drawing/2014/main" id="{FDA29145-8898-4C7B-B2B0-58AFEE0E1891}"/>
+                </a:ext>
+              </a:extLst>
+            </p:cNvPr>
+            <p:cNvSpPr/>
+            <p:nvPr/>
+          </p:nvSpPr>
+          <p:spPr>
+            <a:xfrm>
+              <a:off x="8167049" y="3874883"/>
+              <a:ext cx="1591056" cy="237744"/>
+            </a:xfrm>
+            <a:prstGeom prst="rect">
+              <a:avLst/>
+            </a:prstGeom>
+            <a:noFill/>
+            <a:ln/>
+          </p:spPr>
+          <p:txBody>
+            <a:bodyPr wrap="square" lIns="0" tIns="0" rIns="0" bIns="0" rtlCol="0" anchor="ctr">
+              <a:normAutofit/>
+            </a:bodyPr>
+            <a:lstStyle/>
+            <a:p>
+              <a:pPr marL="0" indent="0">
+                <a:buNone/>
+              </a:pPr>
+              <a:r>
+                <a:rPr lang="en-US" sz="1000" b="1" dirty="0">
+                  <a:solidFill>
+                    <a:srgbClr val="183F73"/>
+                  </a:solidFill>
+                  <a:latin typeface="微软雅黑" panose="020B0503020204020204" pitchFamily="34" charset="-122"/>
+                  <a:ea typeface="微软雅黑" panose="020B0503020204020204" pitchFamily="34" charset="-122"/>
+                  <a:cs typeface="Noto Sans CJK SC" pitchFamily="34" charset="-120"/>
+                </a:rPr>
+                <a:t>近期借贷活跃度</a:t>
+              </a:r>
+              <a:endParaRPr lang="en-US" sz="1000" dirty="0">
+                <a:latin typeface="微软雅黑" panose="020B0503020204020204" pitchFamily="34" charset="-122"/>
+                <a:ea typeface="微软雅黑" panose="020B0503020204020204" pitchFamily="34" charset="-122"/>
+              </a:endParaRPr>
+            </a:p>
+          </p:txBody>
+        </p:sp>
+        <p:sp>
+          <p:nvSpPr>
+            <p:cNvPr id="181" name="Shape 140">
+              <a:extLst>
+                <a:ext uri="{FF2B5EF4-FFF2-40B4-BE49-F238E27FC236}">
+                  <a16:creationId xmlns:a16="http://schemas.microsoft.com/office/drawing/2014/main" id="{E2D92EF8-60C2-4714-B29D-7DCED630816F}"/>
+                </a:ext>
+              </a:extLst>
+            </p:cNvPr>
+            <p:cNvSpPr/>
+            <p:nvPr/>
+          </p:nvSpPr>
+          <p:spPr>
+            <a:xfrm>
+              <a:off x="9904409" y="3902315"/>
+              <a:ext cx="0" cy="228600"/>
+            </a:xfrm>
+            <a:prstGeom prst="line">
+              <a:avLst/>
+            </a:prstGeom>
+            <a:noFill/>
+            <a:ln w="25400">
+              <a:solidFill>
+                <a:srgbClr val="D99A00"/>
+              </a:solidFill>
+              <a:prstDash val="solid"/>
+            </a:ln>
+          </p:spPr>
+        </p:sp>
+        <p:sp>
+          <p:nvSpPr>
+            <p:cNvPr id="182" name="Text 141">
+              <a:extLst>
+                <a:ext uri="{FF2B5EF4-FFF2-40B4-BE49-F238E27FC236}">
+                  <a16:creationId xmlns:a16="http://schemas.microsoft.com/office/drawing/2014/main" id="{5A2A16E4-BE93-4D09-9836-2BF25434F603}"/>
+                </a:ext>
+              </a:extLst>
+            </p:cNvPr>
+            <p:cNvSpPr/>
+            <p:nvPr/>
+          </p:nvSpPr>
+          <p:spPr>
+            <a:xfrm>
+              <a:off x="9977561" y="3874883"/>
+              <a:ext cx="1911096" cy="237744"/>
+            </a:xfrm>
+            <a:prstGeom prst="rect">
+              <a:avLst/>
+            </a:prstGeom>
+            <a:noFill/>
+            <a:ln/>
+          </p:spPr>
+          <p:txBody>
+            <a:bodyPr wrap="square" lIns="0" tIns="0" rIns="0" bIns="0" rtlCol="0" anchor="ctr">
+              <a:normAutofit/>
+            </a:bodyPr>
+            <a:lstStyle/>
+            <a:p>
+              <a:pPr marL="0" indent="0">
+                <a:buNone/>
+              </a:pPr>
+              <a:r>
+                <a:rPr lang="en-US" sz="1000" b="1" dirty="0">
+                  <a:solidFill>
+                    <a:srgbClr val="183F73"/>
+                  </a:solidFill>
+                  <a:latin typeface="微软雅黑" panose="020B0503020204020204" pitchFamily="34" charset="-122"/>
+                  <a:ea typeface="微软雅黑" panose="020B0503020204020204" pitchFamily="34" charset="-122"/>
+                  <a:cs typeface="Noto Sans CJK SC" pitchFamily="34" charset="-120"/>
+                </a:rPr>
+                <a:t>整体偿债稳定性</a:t>
+              </a:r>
+              <a:endParaRPr lang="en-US" sz="1000" dirty="0">
+                <a:latin typeface="微软雅黑" panose="020B0503020204020204" pitchFamily="34" charset="-122"/>
+                <a:ea typeface="微软雅黑" panose="020B0503020204020204" pitchFamily="34" charset="-122"/>
+              </a:endParaRPr>
+            </a:p>
+          </p:txBody>
+        </p:sp>
+      </p:grpSp>
+      <p:sp>
+        <p:nvSpPr>
+          <p:cNvPr id="183" name="Text 142">
+            <a:extLst>
+              <a:ext uri="{FF2B5EF4-FFF2-40B4-BE49-F238E27FC236}">
+                <a16:creationId xmlns:a16="http://schemas.microsoft.com/office/drawing/2014/main" id="{3D8F4A83-F07F-4D69-85E4-17E365BD06D7}"/>
+              </a:ext>
+            </a:extLst>
+          </p:cNvPr>
+          <p:cNvSpPr/>
+          <p:nvPr/>
+        </p:nvSpPr>
+        <p:spPr>
+          <a:xfrm>
+            <a:off x="9986009" y="4117772"/>
+            <a:ext cx="731520" cy="164592"/>
+          </a:xfrm>
+          <a:prstGeom prst="rect">
+            <a:avLst/>
+          </a:prstGeom>
+          <a:noFill/>
+          <a:ln/>
+        </p:spPr>
+        <p:txBody>
+          <a:bodyPr wrap="square" lIns="0" tIns="0" rIns="0" bIns="0" rtlCol="0" anchor="ctr">
+            <a:normAutofit/>
+          </a:bodyPr>
+          <a:lstStyle/>
+          <a:p>
+            <a:pPr marL="0" indent="0">
+              <a:buNone/>
+            </a:pPr>
+            <a:r>
+              <a:rPr lang="en-US" sz="900" dirty="0">
+                <a:solidFill>
+                  <a:srgbClr val="111827"/>
+                </a:solidFill>
+                <a:latin typeface="微软雅黑" panose="020B0503020204020204" pitchFamily="34" charset="-122"/>
+                <a:ea typeface="微软雅黑" panose="020B0503020204020204" pitchFamily="34" charset="-122"/>
+                <a:cs typeface="Noto Sans CJK SC" pitchFamily="34" charset="-120"/>
+              </a:rPr>
+              <a:t>正常还款率</a:t>
+            </a:r>
+            <a:endParaRPr lang="en-US" sz="900" dirty="0">
+              <a:latin typeface="微软雅黑" panose="020B0503020204020204" pitchFamily="34" charset="-122"/>
+              <a:ea typeface="微软雅黑" panose="020B0503020204020204" pitchFamily="34" charset="-122"/>
+            </a:endParaRPr>
+          </a:p>
+        </p:txBody>
+      </p:sp>
+      <p:sp>
+        <p:nvSpPr>
+          <p:cNvPr id="184" name="Text 143">
+            <a:extLst>
+              <a:ext uri="{FF2B5EF4-FFF2-40B4-BE49-F238E27FC236}">
+                <a16:creationId xmlns:a16="http://schemas.microsoft.com/office/drawing/2014/main" id="{620E1B21-2345-4863-9ED2-E4F92B7D9031}"/>
+              </a:ext>
+            </a:extLst>
+          </p:cNvPr>
+          <p:cNvSpPr/>
+          <p:nvPr/>
+        </p:nvSpPr>
+        <p:spPr>
+          <a:xfrm>
+            <a:off x="11077381" y="4082147"/>
+            <a:ext cx="1088136" cy="164592"/>
+          </a:xfrm>
+          <a:prstGeom prst="rect">
+            <a:avLst/>
+          </a:prstGeom>
+          <a:noFill/>
+          <a:ln/>
+        </p:spPr>
+        <p:txBody>
+          <a:bodyPr wrap="square" lIns="0" tIns="0" rIns="0" bIns="0" rtlCol="0" anchor="ctr">
+            <a:normAutofit/>
+          </a:bodyPr>
+          <a:lstStyle/>
+          <a:p>
+            <a:pPr marL="0" indent="0">
+              <a:buNone/>
+            </a:pPr>
+            <a:r>
+              <a:rPr lang="en-US" sz="900" b="1" dirty="0">
+                <a:solidFill>
+                  <a:srgbClr val="183F73"/>
+                </a:solidFill>
+                <a:latin typeface="微软雅黑" panose="020B0503020204020204" pitchFamily="34" charset="-122"/>
+                <a:ea typeface="微软雅黑" panose="020B0503020204020204" pitchFamily="34" charset="-122"/>
+                <a:cs typeface="Noto Sans CJK SC" pitchFamily="34" charset="-120"/>
+              </a:rPr>
+              <a:t>89%</a:t>
+            </a:r>
+            <a:endParaRPr lang="en-US" sz="900" dirty="0">
+              <a:latin typeface="微软雅黑" panose="020B0503020204020204" pitchFamily="34" charset="-122"/>
+              <a:ea typeface="微软雅黑" panose="020B0503020204020204" pitchFamily="34" charset="-122"/>
+            </a:endParaRPr>
+          </a:p>
+        </p:txBody>
+      </p:sp>
+      <p:sp>
+        <p:nvSpPr>
+          <p:cNvPr id="185" name="Text 144">
+            <a:extLst>
+              <a:ext uri="{FF2B5EF4-FFF2-40B4-BE49-F238E27FC236}">
+                <a16:creationId xmlns:a16="http://schemas.microsoft.com/office/drawing/2014/main" id="{51351C0A-4054-4C51-BABD-BDC7EEC0F161}"/>
+              </a:ext>
+            </a:extLst>
+          </p:cNvPr>
+          <p:cNvSpPr/>
+          <p:nvPr/>
+        </p:nvSpPr>
+        <p:spPr>
+          <a:xfrm>
+            <a:off x="9986009" y="4405808"/>
+            <a:ext cx="731520" cy="164592"/>
+          </a:xfrm>
+          <a:prstGeom prst="rect">
+            <a:avLst/>
+          </a:prstGeom>
+          <a:noFill/>
+          <a:ln/>
+        </p:spPr>
+        <p:txBody>
+          <a:bodyPr wrap="square" lIns="0" tIns="0" rIns="0" bIns="0" rtlCol="0" anchor="ctr">
+            <a:normAutofit/>
+          </a:bodyPr>
+          <a:lstStyle/>
+          <a:p>
+            <a:pPr marL="0" indent="0">
+              <a:buNone/>
+            </a:pPr>
+            <a:r>
+              <a:rPr lang="en-US" sz="900" dirty="0">
+                <a:solidFill>
+                  <a:srgbClr val="111827"/>
+                </a:solidFill>
+                <a:latin typeface="微软雅黑" panose="020B0503020204020204" pitchFamily="34" charset="-122"/>
+                <a:ea typeface="微软雅黑" panose="020B0503020204020204" pitchFamily="34" charset="-122"/>
+                <a:cs typeface="Noto Sans CJK SC" pitchFamily="34" charset="-120"/>
+              </a:rPr>
+              <a:t>扣款失败率</a:t>
+            </a:r>
+            <a:endParaRPr lang="en-US" sz="900" dirty="0">
+              <a:latin typeface="微软雅黑" panose="020B0503020204020204" pitchFamily="34" charset="-122"/>
+              <a:ea typeface="微软雅黑" panose="020B0503020204020204" pitchFamily="34" charset="-122"/>
+            </a:endParaRPr>
+          </a:p>
+        </p:txBody>
+      </p:sp>
+      <p:sp>
+        <p:nvSpPr>
+          <p:cNvPr id="186" name="Text 145">
+            <a:extLst>
+              <a:ext uri="{FF2B5EF4-FFF2-40B4-BE49-F238E27FC236}">
+                <a16:creationId xmlns:a16="http://schemas.microsoft.com/office/drawing/2014/main" id="{2E2E1EDC-DD66-4D1D-97C2-0216FEB58692}"/>
+              </a:ext>
+            </a:extLst>
+          </p:cNvPr>
+          <p:cNvSpPr/>
+          <p:nvPr/>
+        </p:nvSpPr>
+        <p:spPr>
+          <a:xfrm>
+            <a:off x="11077381" y="4370183"/>
+            <a:ext cx="1088136" cy="164592"/>
+          </a:xfrm>
+          <a:prstGeom prst="rect">
+            <a:avLst/>
+          </a:prstGeom>
+          <a:noFill/>
+          <a:ln/>
+        </p:spPr>
+        <p:txBody>
+          <a:bodyPr wrap="square" lIns="0" tIns="0" rIns="0" bIns="0" rtlCol="0" anchor="ctr">
+            <a:normAutofit/>
+          </a:bodyPr>
+          <a:lstStyle/>
+          <a:p>
+            <a:pPr marL="0" indent="0">
+              <a:buNone/>
+            </a:pPr>
+            <a:r>
+              <a:rPr lang="en-US" sz="900" b="1" dirty="0">
+                <a:solidFill>
+                  <a:srgbClr val="183F73"/>
+                </a:solidFill>
+                <a:latin typeface="微软雅黑" panose="020B0503020204020204" pitchFamily="34" charset="-122"/>
+                <a:ea typeface="微软雅黑" panose="020B0503020204020204" pitchFamily="34" charset="-122"/>
+                <a:cs typeface="Noto Sans CJK SC" pitchFamily="34" charset="-120"/>
+              </a:rPr>
+              <a:t>11%</a:t>
+            </a:r>
+            <a:endParaRPr lang="en-US" sz="900" dirty="0">
+              <a:latin typeface="微软雅黑" panose="020B0503020204020204" pitchFamily="34" charset="-122"/>
+              <a:ea typeface="微软雅黑" panose="020B0503020204020204" pitchFamily="34" charset="-122"/>
+            </a:endParaRPr>
+          </a:p>
+        </p:txBody>
+      </p:sp>
+      <p:sp>
+        <p:nvSpPr>
+          <p:cNvPr id="187" name="Text 146">
+            <a:extLst>
+              <a:ext uri="{FF2B5EF4-FFF2-40B4-BE49-F238E27FC236}">
+                <a16:creationId xmlns:a16="http://schemas.microsoft.com/office/drawing/2014/main" id="{03968AED-8E96-4495-B88B-162DC782CC91}"/>
+              </a:ext>
+            </a:extLst>
+          </p:cNvPr>
+          <p:cNvSpPr/>
+          <p:nvPr/>
+        </p:nvSpPr>
+        <p:spPr>
+          <a:xfrm>
+            <a:off x="9986009" y="4693844"/>
+            <a:ext cx="731520" cy="164592"/>
+          </a:xfrm>
+          <a:prstGeom prst="rect">
+            <a:avLst/>
+          </a:prstGeom>
+          <a:noFill/>
+          <a:ln/>
+        </p:spPr>
+        <p:txBody>
+          <a:bodyPr wrap="square" lIns="0" tIns="0" rIns="0" bIns="0" rtlCol="0" anchor="ctr">
+            <a:normAutofit/>
+          </a:bodyPr>
+          <a:lstStyle/>
+          <a:p>
+            <a:pPr marL="0" indent="0">
+              <a:buNone/>
+            </a:pPr>
+            <a:r>
+              <a:rPr lang="en-US" sz="900" dirty="0">
+                <a:solidFill>
+                  <a:srgbClr val="111827"/>
+                </a:solidFill>
+                <a:latin typeface="微软雅黑" panose="020B0503020204020204" pitchFamily="34" charset="-122"/>
+                <a:ea typeface="微软雅黑" panose="020B0503020204020204" pitchFamily="34" charset="-122"/>
+                <a:cs typeface="Noto Sans CJK SC" pitchFamily="34" charset="-120"/>
+              </a:rPr>
+              <a:t>轻微逾期</a:t>
+            </a:r>
+            <a:endParaRPr lang="en-US" sz="900" dirty="0">
+              <a:latin typeface="微软雅黑" panose="020B0503020204020204" pitchFamily="34" charset="-122"/>
+              <a:ea typeface="微软雅黑" panose="020B0503020204020204" pitchFamily="34" charset="-122"/>
+            </a:endParaRPr>
+          </a:p>
+        </p:txBody>
+      </p:sp>
+      <p:sp>
+        <p:nvSpPr>
+          <p:cNvPr id="188" name="Text 147">
+            <a:extLst>
+              <a:ext uri="{FF2B5EF4-FFF2-40B4-BE49-F238E27FC236}">
+                <a16:creationId xmlns:a16="http://schemas.microsoft.com/office/drawing/2014/main" id="{B7B4330C-7C6D-4954-A857-C2E291CDEACF}"/>
+              </a:ext>
+            </a:extLst>
+          </p:cNvPr>
+          <p:cNvSpPr/>
+          <p:nvPr/>
+        </p:nvSpPr>
+        <p:spPr>
+          <a:xfrm>
+            <a:off x="11077381" y="4658219"/>
+            <a:ext cx="1088136" cy="164592"/>
+          </a:xfrm>
+          <a:prstGeom prst="rect">
+            <a:avLst/>
+          </a:prstGeom>
+          <a:noFill/>
+          <a:ln/>
+        </p:spPr>
+        <p:txBody>
+          <a:bodyPr wrap="square" lIns="0" tIns="0" rIns="0" bIns="0" rtlCol="0" anchor="ctr">
+            <a:normAutofit/>
+          </a:bodyPr>
+          <a:lstStyle/>
+          <a:p>
+            <a:pPr marL="0" indent="0">
+              <a:buNone/>
+            </a:pPr>
+            <a:r>
+              <a:rPr lang="en-US" sz="900" b="1" dirty="0">
+                <a:solidFill>
+                  <a:srgbClr val="183F73"/>
+                </a:solidFill>
+                <a:latin typeface="微软雅黑" panose="020B0503020204020204" pitchFamily="34" charset="-122"/>
+                <a:ea typeface="微软雅黑" panose="020B0503020204020204" pitchFamily="34" charset="-122"/>
+                <a:cs typeface="Noto Sans CJK SC" pitchFamily="34" charset="-120"/>
+              </a:rPr>
+              <a:t>1次</a:t>
+            </a:r>
+            <a:endParaRPr lang="en-US" sz="900" dirty="0">
+              <a:latin typeface="微软雅黑" panose="020B0503020204020204" pitchFamily="34" charset="-122"/>
+              <a:ea typeface="微软雅黑" panose="020B0503020204020204" pitchFamily="34" charset="-122"/>
+            </a:endParaRPr>
+          </a:p>
+        </p:txBody>
+      </p:sp>
+      <p:sp>
+        <p:nvSpPr>
+          <p:cNvPr id="189" name="Text 148">
+            <a:extLst>
+              <a:ext uri="{FF2B5EF4-FFF2-40B4-BE49-F238E27FC236}">
+                <a16:creationId xmlns:a16="http://schemas.microsoft.com/office/drawing/2014/main" id="{CA0EFD53-E609-4E6A-BF6A-7415D4909593}"/>
+              </a:ext>
+            </a:extLst>
+          </p:cNvPr>
+          <p:cNvSpPr/>
+          <p:nvPr/>
+        </p:nvSpPr>
+        <p:spPr>
+          <a:xfrm>
+            <a:off x="9986009" y="4981880"/>
+            <a:ext cx="731520" cy="164592"/>
+          </a:xfrm>
+          <a:prstGeom prst="rect">
+            <a:avLst/>
+          </a:prstGeom>
+          <a:noFill/>
+          <a:ln/>
+        </p:spPr>
+        <p:txBody>
+          <a:bodyPr wrap="square" lIns="0" tIns="0" rIns="0" bIns="0" rtlCol="0" anchor="ctr">
+            <a:normAutofit/>
+          </a:bodyPr>
+          <a:lstStyle/>
+          <a:p>
+            <a:pPr marL="0" indent="0">
+              <a:buNone/>
+            </a:pPr>
+            <a:r>
+              <a:rPr lang="en-US" sz="900" dirty="0">
+                <a:solidFill>
+                  <a:srgbClr val="111827"/>
+                </a:solidFill>
+                <a:latin typeface="微软雅黑" panose="020B0503020204020204" pitchFamily="34" charset="-122"/>
+                <a:ea typeface="微软雅黑" panose="020B0503020204020204" pitchFamily="34" charset="-122"/>
+                <a:cs typeface="Noto Sans CJK SC" pitchFamily="34" charset="-120"/>
+              </a:rPr>
+              <a:t>历史违约</a:t>
+            </a:r>
+            <a:endParaRPr lang="en-US" sz="900" dirty="0">
+              <a:latin typeface="微软雅黑" panose="020B0503020204020204" pitchFamily="34" charset="-122"/>
+              <a:ea typeface="微软雅黑" panose="020B0503020204020204" pitchFamily="34" charset="-122"/>
+            </a:endParaRPr>
+          </a:p>
+        </p:txBody>
+      </p:sp>
+      <p:sp>
+        <p:nvSpPr>
+          <p:cNvPr id="190" name="Text 149">
+            <a:extLst>
+              <a:ext uri="{FF2B5EF4-FFF2-40B4-BE49-F238E27FC236}">
+                <a16:creationId xmlns:a16="http://schemas.microsoft.com/office/drawing/2014/main" id="{D9B532A6-4EA4-4E7E-B908-CFAD99478830}"/>
+              </a:ext>
+            </a:extLst>
+          </p:cNvPr>
+          <p:cNvSpPr/>
+          <p:nvPr/>
+        </p:nvSpPr>
+        <p:spPr>
+          <a:xfrm>
+            <a:off x="11077381" y="4946255"/>
+            <a:ext cx="1088136" cy="164592"/>
+          </a:xfrm>
+          <a:prstGeom prst="rect">
+            <a:avLst/>
+          </a:prstGeom>
+          <a:noFill/>
+          <a:ln/>
+        </p:spPr>
+        <p:txBody>
+          <a:bodyPr wrap="square" lIns="0" tIns="0" rIns="0" bIns="0" rtlCol="0" anchor="ctr">
+            <a:normAutofit/>
+          </a:bodyPr>
+          <a:lstStyle/>
+          <a:p>
+            <a:pPr marL="0" indent="0">
+              <a:buNone/>
+            </a:pPr>
+            <a:r>
+              <a:rPr lang="en-US" sz="900" b="1" dirty="0">
+                <a:solidFill>
+                  <a:srgbClr val="183F73"/>
+                </a:solidFill>
+                <a:latin typeface="微软雅黑" panose="020B0503020204020204" pitchFamily="34" charset="-122"/>
+                <a:ea typeface="微软雅黑" panose="020B0503020204020204" pitchFamily="34" charset="-122"/>
+                <a:cs typeface="Noto Sans CJK SC" pitchFamily="34" charset="-120"/>
+              </a:rPr>
+              <a:t>0次</a:t>
+            </a:r>
+            <a:endParaRPr lang="en-US" sz="900" dirty="0">
+              <a:latin typeface="微软雅黑" panose="020B0503020204020204" pitchFamily="34" charset="-122"/>
+              <a:ea typeface="微软雅黑" panose="020B0503020204020204" pitchFamily="34" charset="-122"/>
+            </a:endParaRPr>
+          </a:p>
+        </p:txBody>
+      </p:sp>
+      <p:sp>
+        <p:nvSpPr>
+          <p:cNvPr id="191" name="Text 150">
+            <a:extLst>
+              <a:ext uri="{FF2B5EF4-FFF2-40B4-BE49-F238E27FC236}">
+                <a16:creationId xmlns:a16="http://schemas.microsoft.com/office/drawing/2014/main" id="{A1E5C750-FA9B-4C7A-A6B0-5D84C21B81B3}"/>
+              </a:ext>
+            </a:extLst>
+          </p:cNvPr>
+          <p:cNvSpPr/>
+          <p:nvPr/>
+        </p:nvSpPr>
+        <p:spPr>
+          <a:xfrm>
+            <a:off x="9986009" y="5269916"/>
+            <a:ext cx="731520" cy="164592"/>
+          </a:xfrm>
+          <a:prstGeom prst="rect">
+            <a:avLst/>
+          </a:prstGeom>
+          <a:noFill/>
+          <a:ln/>
+        </p:spPr>
+        <p:txBody>
+          <a:bodyPr wrap="square" lIns="0" tIns="0" rIns="0" bIns="0" rtlCol="0" anchor="ctr">
+            <a:noAutofit/>
+          </a:bodyPr>
+          <a:lstStyle/>
+          <a:p>
+            <a:pPr marL="0" indent="0">
+              <a:buNone/>
+            </a:pPr>
+            <a:r>
+              <a:rPr lang="en-US" sz="900" dirty="0">
+                <a:solidFill>
+                  <a:srgbClr val="111827"/>
+                </a:solidFill>
+                <a:latin typeface="微软雅黑" panose="020B0503020204020204" pitchFamily="34" charset="-122"/>
+                <a:ea typeface="微软雅黑" panose="020B0503020204020204" pitchFamily="34" charset="-122"/>
+                <a:cs typeface="Noto Sans CJK SC" pitchFamily="34" charset="-120"/>
+              </a:rPr>
+              <a:t>月还款/月收入</a:t>
+            </a:r>
+            <a:endParaRPr lang="en-US" sz="900" dirty="0">
+              <a:latin typeface="微软雅黑" panose="020B0503020204020204" pitchFamily="34" charset="-122"/>
+              <a:ea typeface="微软雅黑" panose="020B0503020204020204" pitchFamily="34" charset="-122"/>
+            </a:endParaRPr>
+          </a:p>
+        </p:txBody>
+      </p:sp>
+      <p:sp>
+        <p:nvSpPr>
+          <p:cNvPr id="192" name="Text 151">
+            <a:extLst>
+              <a:ext uri="{FF2B5EF4-FFF2-40B4-BE49-F238E27FC236}">
+                <a16:creationId xmlns:a16="http://schemas.microsoft.com/office/drawing/2014/main" id="{C1430E7F-5E66-4EBB-95AD-7FCEABACE9D0}"/>
+              </a:ext>
+            </a:extLst>
+          </p:cNvPr>
+          <p:cNvSpPr/>
+          <p:nvPr/>
+        </p:nvSpPr>
+        <p:spPr>
+          <a:xfrm>
+            <a:off x="11077381" y="5234291"/>
+            <a:ext cx="1088136" cy="164592"/>
+          </a:xfrm>
+          <a:prstGeom prst="rect">
+            <a:avLst/>
+          </a:prstGeom>
+          <a:noFill/>
+          <a:ln/>
+        </p:spPr>
+        <p:txBody>
+          <a:bodyPr wrap="square" lIns="0" tIns="0" rIns="0" bIns="0" rtlCol="0" anchor="ctr">
+            <a:normAutofit/>
+          </a:bodyPr>
+          <a:lstStyle/>
+          <a:p>
+            <a:pPr marL="0" indent="0">
+              <a:buNone/>
+            </a:pPr>
+            <a:r>
+              <a:rPr lang="en-US" sz="900" b="1" dirty="0">
+                <a:solidFill>
+                  <a:srgbClr val="183F73"/>
+                </a:solidFill>
+                <a:latin typeface="微软雅黑" panose="020B0503020204020204" pitchFamily="34" charset="-122"/>
+                <a:ea typeface="微软雅黑" panose="020B0503020204020204" pitchFamily="34" charset="-122"/>
+                <a:cs typeface="Noto Sans CJK SC" pitchFamily="34" charset="-120"/>
+              </a:rPr>
+              <a:t>5.8%</a:t>
+            </a:r>
+            <a:endParaRPr lang="en-US" sz="900" dirty="0">
+              <a:latin typeface="微软雅黑" panose="020B0503020204020204" pitchFamily="34" charset="-122"/>
+              <a:ea typeface="微软雅黑" panose="020B0503020204020204" pitchFamily="34" charset="-122"/>
+            </a:endParaRPr>
+          </a:p>
+        </p:txBody>
+      </p:sp>
+      <p:sp>
+        <p:nvSpPr>
+          <p:cNvPr id="193" name="Text 152">
+            <a:extLst>
+              <a:ext uri="{FF2B5EF4-FFF2-40B4-BE49-F238E27FC236}">
+                <a16:creationId xmlns:a16="http://schemas.microsoft.com/office/drawing/2014/main" id="{BB9B2F4A-8E92-495D-B7EC-4125153C208B}"/>
+              </a:ext>
+            </a:extLst>
+          </p:cNvPr>
+          <p:cNvSpPr/>
+          <p:nvPr/>
+        </p:nvSpPr>
+        <p:spPr>
+          <a:xfrm>
+            <a:off x="9986009" y="5557952"/>
+            <a:ext cx="731520" cy="164592"/>
+          </a:xfrm>
+          <a:prstGeom prst="rect">
+            <a:avLst/>
+          </a:prstGeom>
+          <a:noFill/>
+          <a:ln/>
+        </p:spPr>
+        <p:txBody>
+          <a:bodyPr wrap="square" lIns="0" tIns="0" rIns="0" bIns="0" rtlCol="0" anchor="ctr">
+            <a:normAutofit/>
+          </a:bodyPr>
+          <a:lstStyle/>
+          <a:p>
+            <a:pPr marL="0" indent="0">
+              <a:buNone/>
+            </a:pPr>
+            <a:r>
+              <a:rPr lang="en-US" sz="900" dirty="0">
+                <a:solidFill>
+                  <a:srgbClr val="111827"/>
+                </a:solidFill>
+                <a:latin typeface="微软雅黑" panose="020B0503020204020204" pitchFamily="34" charset="-122"/>
+                <a:ea typeface="微软雅黑" panose="020B0503020204020204" pitchFamily="34" charset="-122"/>
+                <a:cs typeface="Noto Sans CJK SC" pitchFamily="34" charset="-120"/>
+              </a:rPr>
+              <a:t>负债/月收入</a:t>
+            </a:r>
+            <a:endParaRPr lang="en-US" sz="900" dirty="0">
+              <a:latin typeface="微软雅黑" panose="020B0503020204020204" pitchFamily="34" charset="-122"/>
+              <a:ea typeface="微软雅黑" panose="020B0503020204020204" pitchFamily="34" charset="-122"/>
+            </a:endParaRPr>
+          </a:p>
+        </p:txBody>
+      </p:sp>
+      <p:sp>
+        <p:nvSpPr>
+          <p:cNvPr id="194" name="Text 153">
+            <a:extLst>
+              <a:ext uri="{FF2B5EF4-FFF2-40B4-BE49-F238E27FC236}">
+                <a16:creationId xmlns:a16="http://schemas.microsoft.com/office/drawing/2014/main" id="{38BF1123-C538-4D2F-A4BA-F004B349C630}"/>
+              </a:ext>
+            </a:extLst>
+          </p:cNvPr>
+          <p:cNvSpPr/>
+          <p:nvPr/>
+        </p:nvSpPr>
+        <p:spPr>
+          <a:xfrm>
+            <a:off x="11077381" y="5522327"/>
+            <a:ext cx="1088136" cy="164592"/>
+          </a:xfrm>
+          <a:prstGeom prst="rect">
+            <a:avLst/>
+          </a:prstGeom>
+          <a:noFill/>
+          <a:ln/>
+        </p:spPr>
+        <p:txBody>
+          <a:bodyPr wrap="square" lIns="0" tIns="0" rIns="0" bIns="0" rtlCol="0" anchor="ctr">
+            <a:normAutofit/>
+          </a:bodyPr>
+          <a:lstStyle/>
+          <a:p>
+            <a:pPr marL="0" indent="0">
+              <a:buNone/>
+            </a:pPr>
+            <a:r>
+              <a:rPr lang="en-US" sz="900" b="1" dirty="0">
+                <a:solidFill>
+                  <a:srgbClr val="183F73"/>
+                </a:solidFill>
+                <a:latin typeface="微软雅黑" panose="020B0503020204020204" pitchFamily="34" charset="-122"/>
+                <a:ea typeface="微软雅黑" panose="020B0503020204020204" pitchFamily="34" charset="-122"/>
+                <a:cs typeface="Noto Sans CJK SC" pitchFamily="34" charset="-120"/>
+              </a:rPr>
+              <a:t>13.7%</a:t>
+            </a:r>
+            <a:endParaRPr lang="en-US" sz="900" dirty="0">
+              <a:latin typeface="微软雅黑" panose="020B0503020204020204" pitchFamily="34" charset="-122"/>
+              <a:ea typeface="微软雅黑" panose="020B0503020204020204" pitchFamily="34" charset="-122"/>
+            </a:endParaRPr>
+          </a:p>
+        </p:txBody>
+      </p:sp>
+      <p:sp>
+        <p:nvSpPr>
+          <p:cNvPr id="195" name="Text 154">
+            <a:extLst>
+              <a:ext uri="{FF2B5EF4-FFF2-40B4-BE49-F238E27FC236}">
+                <a16:creationId xmlns:a16="http://schemas.microsoft.com/office/drawing/2014/main" id="{5B8F36C9-3AC2-4D85-8180-D8BD708B877E}"/>
+              </a:ext>
+            </a:extLst>
+          </p:cNvPr>
+          <p:cNvSpPr/>
+          <p:nvPr/>
+        </p:nvSpPr>
+        <p:spPr>
+          <a:xfrm>
+            <a:off x="9986008" y="5845988"/>
+            <a:ext cx="963489" cy="164592"/>
+          </a:xfrm>
+          <a:prstGeom prst="rect">
+            <a:avLst/>
+          </a:prstGeom>
+          <a:noFill/>
+          <a:ln/>
+        </p:spPr>
+        <p:txBody>
+          <a:bodyPr wrap="square" lIns="0" tIns="0" rIns="0" bIns="0" rtlCol="0" anchor="ctr">
+            <a:noAutofit/>
+          </a:bodyPr>
+          <a:lstStyle/>
+          <a:p>
+            <a:pPr marL="0" indent="0">
+              <a:buNone/>
+            </a:pPr>
+            <a:r>
+              <a:rPr lang="en-US" sz="900" dirty="0">
+                <a:solidFill>
+                  <a:srgbClr val="111827"/>
+                </a:solidFill>
+                <a:latin typeface="微软雅黑" panose="020B0503020204020204" pitchFamily="34" charset="-122"/>
+                <a:ea typeface="微软雅黑" panose="020B0503020204020204" pitchFamily="34" charset="-122"/>
+                <a:cs typeface="Noto Sans CJK SC" pitchFamily="34" charset="-120"/>
+              </a:rPr>
+              <a:t>近90天负债变化率</a:t>
+            </a:r>
+            <a:endParaRPr lang="en-US" sz="900" dirty="0">
+              <a:latin typeface="微软雅黑" panose="020B0503020204020204" pitchFamily="34" charset="-122"/>
+              <a:ea typeface="微软雅黑" panose="020B0503020204020204" pitchFamily="34" charset="-122"/>
+            </a:endParaRPr>
+          </a:p>
+        </p:txBody>
+      </p:sp>
+      <p:sp>
+        <p:nvSpPr>
+          <p:cNvPr id="196" name="Text 155">
+            <a:extLst>
+              <a:ext uri="{FF2B5EF4-FFF2-40B4-BE49-F238E27FC236}">
+                <a16:creationId xmlns:a16="http://schemas.microsoft.com/office/drawing/2014/main" id="{AADB3053-748C-479C-BE0E-0A54B187CB96}"/>
+              </a:ext>
+            </a:extLst>
+          </p:cNvPr>
+          <p:cNvSpPr/>
+          <p:nvPr/>
+        </p:nvSpPr>
+        <p:spPr>
+          <a:xfrm>
+            <a:off x="11077381" y="5810363"/>
+            <a:ext cx="1088136" cy="164592"/>
+          </a:xfrm>
+          <a:prstGeom prst="rect">
+            <a:avLst/>
+          </a:prstGeom>
+          <a:noFill/>
+          <a:ln/>
+        </p:spPr>
+        <p:txBody>
+          <a:bodyPr wrap="square" lIns="0" tIns="0" rIns="0" bIns="0" rtlCol="0" anchor="ctr">
+            <a:normAutofit/>
+          </a:bodyPr>
+          <a:lstStyle/>
+          <a:p>
+            <a:pPr marL="0" indent="0">
+              <a:buNone/>
+            </a:pPr>
+            <a:r>
+              <a:rPr lang="en-US" sz="900" b="1" dirty="0">
+                <a:solidFill>
+                  <a:srgbClr val="183F73"/>
+                </a:solidFill>
+                <a:latin typeface="微软雅黑" panose="020B0503020204020204" pitchFamily="34" charset="-122"/>
+                <a:ea typeface="微软雅黑" panose="020B0503020204020204" pitchFamily="34" charset="-122"/>
+                <a:cs typeface="Noto Sans CJK SC" pitchFamily="34" charset="-120"/>
+              </a:rPr>
+              <a:t>+12%</a:t>
+            </a:r>
+            <a:endParaRPr lang="en-US" sz="900" dirty="0">
+              <a:latin typeface="微软雅黑" panose="020B0503020204020204" pitchFamily="34" charset="-122"/>
+              <a:ea typeface="微软雅黑" panose="020B0503020204020204" pitchFamily="34" charset="-122"/>
+            </a:endParaRPr>
+          </a:p>
+        </p:txBody>
+      </p:sp>
+      <p:cxnSp>
+        <p:nvCxnSpPr>
+          <p:cNvPr id="8" name="直接连接符 7">
+            <a:extLst>
+              <a:ext uri="{FF2B5EF4-FFF2-40B4-BE49-F238E27FC236}">
+                <a16:creationId xmlns:a16="http://schemas.microsoft.com/office/drawing/2014/main" id="{46ED0182-D914-49D7-9F9F-B3F7EA2828D2}"/>
+              </a:ext>
+            </a:extLst>
+          </p:cNvPr>
+          <p:cNvCxnSpPr>
+            <a:cxnSpLocks/>
+          </p:cNvCxnSpPr>
+          <p:nvPr/>
+        </p:nvCxnSpPr>
+        <p:spPr>
+          <a:xfrm>
+            <a:off x="6096000" y="3535680"/>
+            <a:ext cx="0" cy="2496022"/>
+          </a:xfrm>
+          <a:prstGeom prst="line">
+            <a:avLst/>
+          </a:prstGeom>
+        </p:spPr>
+        <p:style>
+          <a:lnRef idx="1">
+            <a:schemeClr val="accent1"/>
+          </a:lnRef>
+          <a:fillRef idx="0">
+            <a:schemeClr val="accent1"/>
+          </a:fillRef>
+          <a:effectRef idx="0">
+            <a:schemeClr val="accent1"/>
+          </a:effectRef>
+          <a:fontRef idx="minor">
+            <a:schemeClr val="tx1"/>
+          </a:fontRef>
+        </p:style>
+      </p:cxnSp>
     </p:spTree>
     <p:extLst>
       <p:ext uri="{BB962C8B-B14F-4D97-AF65-F5344CB8AC3E}">
@@ -14708,7 +16551,7 @@
           </p:nvPr>
         </p:nvGraphicFramePr>
         <p:xfrm>
-          <a:off x="6311255" y="4100335"/>
+          <a:off x="6311255" y="3538728"/>
           <a:ext cx="5540236" cy="868680"/>
         </p:xfrm>
         <a:graphic>
@@ -14860,7 +16703,7 @@
                           <a:latin typeface="微软雅黑"/>
                           <a:ea typeface="微软雅黑"/>
                         </a:rPr>
-                        <a:t>排除规则过宽，房租、保险、水电被误归为内部转账，导致租金支出在支出计算中漏算</a:t>
+                        <a:t>房租、保险等被内部转账规则误排</a:t>
                       </a:r>
                     </a:p>
                   </a:txBody>
@@ -14945,47 +16788,7 @@
                           <a:latin typeface="微软雅黑"/>
                           <a:ea typeface="微软雅黑"/>
                         </a:rPr>
-                        <a:t>新开业商户或新兴</a:t>
-                      </a:r>
-                      <a:r>
-                        <a:rPr sz="800" b="0" dirty="0">
-                          <a:solidFill>
-                            <a:srgbClr val="3D3C3A"/>
-                          </a:solidFill>
-                          <a:latin typeface="微软雅黑"/>
-                          <a:ea typeface="微软雅黑"/>
-                        </a:rPr>
-                        <a:t> BNPL </a:t>
-                      </a:r>
-                      <a:r>
-                        <a:rPr sz="800" b="0" dirty="0" err="1">
-                          <a:solidFill>
-                            <a:srgbClr val="3D3C3A"/>
-                          </a:solidFill>
-                          <a:latin typeface="微软雅黑"/>
-                          <a:ea typeface="微软雅黑"/>
-                        </a:rPr>
-                        <a:t>平台的交易描述未收录，落入</a:t>
-                      </a:r>
-                      <a:r>
-                        <a:rPr sz="800" b="0" dirty="0">
-                          <a:solidFill>
-                            <a:srgbClr val="3D3C3A"/>
-                          </a:solidFill>
-                          <a:latin typeface="微软雅黑"/>
-                          <a:ea typeface="微软雅黑"/>
-                        </a:rPr>
-                        <a:t> Other </a:t>
-                      </a:r>
-                      <a:r>
-                        <a:rPr sz="800" b="0" dirty="0" err="1">
-                          <a:solidFill>
-                            <a:srgbClr val="3D3C3A"/>
-                          </a:solidFill>
-                          <a:latin typeface="微软雅黑"/>
-                          <a:ea typeface="微软雅黑"/>
-                        </a:rPr>
-                        <a:t>或无法归集为负债流</a:t>
+                        <a:t>新 BNPL 平台缺少商户及关键词</a:t>
                       </a:r>
                       <a:endParaRPr sz="700" b="0" dirty="0">
                         <a:solidFill>
@@ -15081,7 +16884,7 @@
                           <a:latin typeface="微软雅黑"/>
                           <a:ea typeface="微软雅黑"/>
                         </a:rPr>
-                        <a:t>银行返回描述被截断（仅剩 EFTPOS *）、金额与方向矛盾、同一笔交易重复入账</a:t>
+                        <a:t>交易描述截断、方向矛盾</a:t>
                       </a:r>
                     </a:p>
                   </a:txBody>
@@ -15177,47 +16980,7 @@
                           <a:latin typeface="微软雅黑"/>
                           <a:ea typeface="微软雅黑"/>
                         </a:rPr>
-                        <a:t>同一笔</a:t>
-                      </a:r>
-                      <a:r>
-                        <a:rPr sz="800" b="0" dirty="0">
-                          <a:solidFill>
-                            <a:srgbClr val="3D3C3A"/>
-                          </a:solidFill>
-                          <a:latin typeface="微软雅黑"/>
-                          <a:ea typeface="微软雅黑"/>
-                        </a:rPr>
-                        <a:t> BPAY ... 被 Transfer </a:t>
-                      </a:r>
-                      <a:r>
-                        <a:rPr sz="800" b="0" dirty="0" err="1">
-                          <a:solidFill>
-                            <a:srgbClr val="3D3C3A"/>
-                          </a:solidFill>
-                          <a:latin typeface="微软雅黑"/>
-                          <a:ea typeface="微软雅黑"/>
-                        </a:rPr>
-                        <a:t>归为转账、被</a:t>
-                      </a:r>
-                      <a:r>
-                        <a:rPr sz="800" b="0" dirty="0">
-                          <a:solidFill>
-                            <a:srgbClr val="3D3C3A"/>
-                          </a:solidFill>
-                          <a:latin typeface="微软雅黑"/>
-                          <a:ea typeface="微软雅黑"/>
-                        </a:rPr>
-                        <a:t> Liability </a:t>
-                      </a:r>
-                      <a:r>
-                        <a:rPr sz="800" b="0" dirty="0" err="1">
-                          <a:solidFill>
-                            <a:srgbClr val="3D3C3A"/>
-                          </a:solidFill>
-                          <a:latin typeface="微软雅黑"/>
-                          <a:ea typeface="微软雅黑"/>
-                        </a:rPr>
-                        <a:t>识别为还款，需按业务语义裁决</a:t>
+                        <a:t>Transfer 与 Liability 同时命中</a:t>
                       </a:r>
                       <a:endParaRPr sz="800" b="0" dirty="0">
                         <a:solidFill>
@@ -15269,7 +17032,7 @@
         </p:nvSpPr>
         <p:spPr>
           <a:xfrm>
-            <a:off x="6309360" y="5109134"/>
+            <a:off x="6309360" y="4572000"/>
             <a:ext cx="5029200" cy="261610"/>
           </a:xfrm>
           <a:prstGeom prst="rect">
@@ -15319,7 +17082,7 @@
           </p:nvPr>
         </p:nvGraphicFramePr>
         <p:xfrm>
-          <a:off x="6338689" y="5380781"/>
+          <a:off x="6338689" y="4818888"/>
           <a:ext cx="5540234" cy="694944"/>
         </p:xfrm>
         <a:graphic>
@@ -15406,7 +17169,7 @@
                           <a:latin typeface="微软雅黑"/>
                           <a:ea typeface="微软雅黑"/>
                         </a:rPr>
-                        <a:t>问题描述</a:t>
+                        <a:t>问题</a:t>
                       </a:r>
                     </a:p>
                   </a:txBody>
@@ -15441,7 +17204,7 @@
                           <a:latin typeface="微软雅黑"/>
                           <a:ea typeface="微软雅黑"/>
                         </a:rPr>
-                        <a:t>定位原因</a:t>
+                        <a:t>原因</a:t>
                       </a:r>
                     </a:p>
                   </a:txBody>
@@ -15476,7 +17239,7 @@
                           <a:latin typeface="微软雅黑"/>
                           <a:ea typeface="微软雅黑"/>
                         </a:rPr>
-                        <a:t>建议动作</a:t>
+                        <a:t>建议</a:t>
                       </a:r>
                     </a:p>
                   </a:txBody>
@@ -15555,7 +17318,7 @@
                           <a:latin typeface="微软雅黑"/>
                           <a:ea typeface="微软雅黑"/>
                         </a:rPr>
-                        <a:t>房租交易批量被归为内部转账</a:t>
+                        <a:t>房租批量误判</a:t>
                       </a:r>
                     </a:p>
                   </a:txBody>
@@ -15592,7 +17355,7 @@
                           <a:latin typeface="微软雅黑"/>
                           <a:ea typeface="微软雅黑"/>
                         </a:rPr>
-                        <a:t>引擎规则问题</a:t>
+                        <a:t>规则问题</a:t>
                       </a:r>
                     </a:p>
                   </a:txBody>
@@ -15629,7 +17392,7 @@
                           <a:latin typeface="微软雅黑"/>
                           <a:ea typeface="微软雅黑"/>
                         </a:rPr>
-                        <a:t>优化 Transfer 排除规则并补充回归用例</a:t>
+                        <a:t>优化 Transfer 排除规则</a:t>
                       </a:r>
                     </a:p>
                   </a:txBody>
@@ -15714,7 +17477,7 @@
                           <a:latin typeface="微软雅黑"/>
                           <a:ea typeface="微软雅黑"/>
                         </a:rPr>
-                        <a:t>新 BNPL 平台还款未被识别</a:t>
+                        <a:t>新 BNPL 未识别</a:t>
                       </a:r>
                     </a:p>
                   </a:txBody>
@@ -15796,7 +17559,7 @@
                           <a:latin typeface="微软雅黑"/>
                           <a:ea typeface="微软雅黑"/>
                         </a:rPr>
-                        <a:t>补充平台名称及扣款描述关键词</a:t>
+                        <a:t>补充平台及关键词</a:t>
                       </a:r>
                     </a:p>
                   </a:txBody>
@@ -15885,7 +17648,7 @@
                           <a:latin typeface="微软雅黑"/>
                           <a:ea typeface="微软雅黑"/>
                         </a:rPr>
-                        <a:t>某商户 7 月分类占比短期上升</a:t>
+                        <a:t>某商户占比上升</a:t>
                       </a:r>
                     </a:p>
                   </a:txBody>
@@ -15967,7 +17730,7 @@
                           <a:latin typeface="微软雅黑"/>
                           <a:ea typeface="微软雅黑"/>
                         </a:rPr>
-                        <a:t>无需处理，持续观察</a:t>
+                        <a:t>持续观察</a:t>
                       </a:r>
                       <a:endParaRPr sz="700" b="0" dirty="0">
                         <a:solidFill>
@@ -16025,7 +17788,7 @@
         </p:nvSpPr>
         <p:spPr>
           <a:xfrm>
-            <a:off x="6281928" y="3827196"/>
+            <a:off x="6281928" y="3291840"/>
             <a:ext cx="5029200" cy="261610"/>
           </a:xfrm>
           <a:prstGeom prst="rect">
@@ -16065,7 +17828,7 @@
         </p:nvSpPr>
         <p:spPr>
           <a:xfrm>
-            <a:off x="6217920" y="3827196"/>
+            <a:off x="6217920" y="3291840"/>
             <a:ext cx="76200" cy="228600"/>
           </a:xfrm>
           <a:prstGeom prst="rect">
@@ -16110,7 +17873,7 @@
         </p:nvSpPr>
         <p:spPr>
           <a:xfrm>
-            <a:off x="6245352" y="5109134"/>
+            <a:off x="6245352" y="4572000"/>
             <a:ext cx="76200" cy="228600"/>
           </a:xfrm>
           <a:prstGeom prst="rect">
@@ -16155,8 +17918,8 @@
         </p:nvSpPr>
         <p:spPr>
           <a:xfrm>
-            <a:off x="6309360" y="6151550"/>
-            <a:ext cx="5541264" cy="384048"/>
+            <a:off x="6309360" y="5715000"/>
+            <a:ext cx="5541264" cy="365760"/>
           </a:xfrm>
           <a:prstGeom prst="rect">
             <a:avLst/>
@@ -16200,8 +17963,8 @@
         </p:nvSpPr>
         <p:spPr>
           <a:xfrm>
-            <a:off x="6245352" y="6151550"/>
-            <a:ext cx="54864" cy="384048"/>
+            <a:off x="6245352" y="5715000"/>
+            <a:ext cx="54864" cy="365760"/>
           </a:xfrm>
           <a:prstGeom prst="rect">
             <a:avLst/>
@@ -16245,8 +18008,8 @@
         </p:nvSpPr>
         <p:spPr>
           <a:xfrm>
-            <a:off x="6400800" y="6151550"/>
-            <a:ext cx="5349240" cy="384048"/>
+            <a:off x="6400800" y="5715000"/>
+            <a:ext cx="5349240" cy="365760"/>
           </a:xfrm>
           <a:prstGeom prst="rect">
             <a:avLst/>
@@ -16268,7 +18031,7 @@
                 <a:latin typeface="微软雅黑"/>
                 <a:ea typeface="微软雅黑"/>
               </a:rPr>
-              <a:t>知识库随注册商户的新增、变更、失效持续更新，并从真实交易中补齐注册数据未覆盖的支付描述和商户别名。由此形成“分类 → 监控 → 定位 → 输出 → 更新 → 再分类”的持续优化闭环。</a:t>
+              <a:t>形成「监控 → 定位 → 修复 → 再分类」持续优化闭环，推动规则与知识库自动迭代。</a:t>
             </a:r>
           </a:p>
         </p:txBody>
@@ -16281,8 +18044,8 @@
         </p:nvSpPr>
         <p:spPr>
           <a:xfrm>
-            <a:off x="6294120" y="2024460"/>
-            <a:ext cx="5541264" cy="530352"/>
+            <a:off x="6294120" y="2020824"/>
+            <a:ext cx="5541264" cy="292608"/>
           </a:xfrm>
           <a:prstGeom prst="rect">
             <a:avLst/>
@@ -16315,7 +18078,7 @@
           <a:p>
             <a:pPr latinLnBrk="1"/>
             <a:r>
-              <a:rPr lang="zh-CN" sz="1100" b="1" dirty="0">
+              <a:rPr lang="zh-CN" sz="1000" b="1" dirty="0">
                 <a:solidFill>
                   <a:srgbClr val="1F4E79"/>
                 </a:solidFill>
@@ -16325,7 +18088,7 @@
               <a:t>① 监控</a:t>
             </a:r>
             <a:r>
-              <a:rPr lang="zh-CN" altLang="en-US" sz="1100" b="1" dirty="0">
+              <a:rPr lang="zh-CN" altLang="en-US" sz="1000" b="1" dirty="0">
                 <a:solidFill>
                   <a:srgbClr val="1F4E79"/>
                 </a:solidFill>
@@ -16335,14 +18098,14 @@
               <a:t>：</a:t>
             </a:r>
             <a:r>
-              <a:rPr lang="zh-CN" sz="850" b="0" dirty="0">
+              <a:rPr lang="zh-CN" sz="1000" b="0" dirty="0">
                 <a:solidFill>
                   <a:srgbClr val="3D3C3A"/>
                 </a:solidFill>
                 <a:latin typeface="微软雅黑"/>
                 <a:ea typeface="微软雅黑"/>
               </a:rPr>
-              <a:t>捕捉分类批量漂移、同一交易对手归类不一致、覆盖率或命中率明显下降、新描述未被任何引擎识别等异常信号。</a:t>
+              <a:t>识别分类漂移、命中下降、对手方异常等信号</a:t>
             </a:r>
           </a:p>
         </p:txBody>
@@ -16400,8 +18163,8 @@
         </p:nvSpPr>
         <p:spPr>
           <a:xfrm>
-            <a:off x="6309360" y="2587752"/>
-            <a:ext cx="5541264" cy="530352"/>
+            <a:off x="6309360" y="2432304"/>
+            <a:ext cx="5541264" cy="292608"/>
           </a:xfrm>
           <a:prstGeom prst="rect">
             <a:avLst/>
@@ -16434,7 +18197,7 @@
           <a:p>
             <a:pPr latinLnBrk="1"/>
             <a:r>
-              <a:rPr lang="zh-CN" sz="1100" b="1" dirty="0">
+              <a:rPr lang="zh-CN" sz="1000" b="1" dirty="0">
                 <a:solidFill>
                   <a:srgbClr val="1F4E79"/>
                 </a:solidFill>
@@ -16444,7 +18207,7 @@
               <a:t>② 定位</a:t>
             </a:r>
             <a:r>
-              <a:rPr lang="zh-CN" altLang="en-US" sz="1100" b="1" dirty="0">
+              <a:rPr lang="zh-CN" altLang="en-US" sz="1000" b="1" dirty="0">
                 <a:solidFill>
                   <a:srgbClr val="1F4E79"/>
                 </a:solidFill>
@@ -16454,14 +18217,14 @@
               <a:t>：</a:t>
             </a:r>
             <a:r>
-              <a:rPr lang="zh-CN" sz="850" b="0" dirty="0">
+              <a:rPr lang="zh-CN" sz="1000" b="0" dirty="0">
                 <a:solidFill>
                   <a:srgbClr val="3D3C3A"/>
                 </a:solidFill>
                 <a:latin typeface="微软雅黑"/>
                 <a:ea typeface="微软雅黑"/>
               </a:rPr>
-              <a:t>对异常逐笔细挖交易描述、金额、方向、交易对手、命中引擎和分类依据，归类为五类原因。</a:t>
+              <a:t>逐笔分析交易描述、金额、方向、对手方及分类依据</a:t>
             </a:r>
           </a:p>
         </p:txBody>
@@ -16474,7 +18237,7 @@
         </p:nvSpPr>
         <p:spPr>
           <a:xfrm>
-            <a:off x="6309360" y="2587752"/>
+            <a:off x="6309360" y="2386584"/>
             <a:ext cx="5541264" cy="54864"/>
           </a:xfrm>
           <a:prstGeom prst="rect">
@@ -16519,8 +18282,8 @@
         </p:nvSpPr>
         <p:spPr>
           <a:xfrm>
-            <a:off x="6309360" y="3200400"/>
-            <a:ext cx="5541264" cy="530352"/>
+            <a:off x="6309360" y="2843784"/>
+            <a:ext cx="5541264" cy="292608"/>
           </a:xfrm>
           <a:prstGeom prst="rect">
             <a:avLst/>
@@ -16553,7 +18316,7 @@
           <a:p>
             <a:pPr latinLnBrk="1"/>
             <a:r>
-              <a:rPr lang="zh-CN" sz="1100" b="1" dirty="0">
+              <a:rPr lang="zh-CN" sz="1000" b="1" dirty="0">
                 <a:solidFill>
                   <a:srgbClr val="1F4E79"/>
                 </a:solidFill>
@@ -16563,7 +18326,7 @@
               <a:t>③ 输出</a:t>
             </a:r>
             <a:r>
-              <a:rPr lang="zh-CN" altLang="en-US" sz="1100" b="1" dirty="0">
+              <a:rPr lang="zh-CN" altLang="en-US" sz="1000" b="1" dirty="0">
                 <a:solidFill>
                   <a:srgbClr val="1F4E79"/>
                 </a:solidFill>
@@ -16573,14 +18336,14 @@
               <a:t>：</a:t>
             </a:r>
             <a:r>
-              <a:rPr lang="zh-CN" sz="850" b="0" dirty="0">
+              <a:rPr lang="zh-CN" sz="1000" b="0" dirty="0">
                 <a:solidFill>
                   <a:srgbClr val="3D3C3A"/>
                 </a:solidFill>
                 <a:latin typeface="微软雅黑"/>
                 <a:ea typeface="微软雅黑"/>
               </a:rPr>
-              <a:t>生成按优先级排序的诊断报告，直接标明问题引擎、需检查的规则、缺失的商户／关键词及应补充的知识库，供业务确认。</a:t>
+              <a:t>生成问题清单、原因诊断及规则/知识库优化建议</a:t>
             </a:r>
           </a:p>
         </p:txBody>
@@ -16593,7 +18356,7 @@
         </p:nvSpPr>
         <p:spPr>
           <a:xfrm>
-            <a:off x="6309360" y="3200400"/>
+            <a:off x="6309360" y="2798064"/>
             <a:ext cx="5541264" cy="54864"/>
           </a:xfrm>
           <a:prstGeom prst="rect">

--- a/银行流水分享_V2.0.pptx
+++ b/银行流水分享_V2.0.pptx
@@ -2321,7 +2321,7 @@
                 </a:lnSpc>
               </a:pPr>
               <a:r>
-                <a:rPr lang="en-US" sz="1050" b="1" noProof="1">
+                <a:rPr lang="en-US" sz="1400" b="1" noProof="1">
                   <a:solidFill>
                     <a:srgbClr val="3D3C3A"/>
                   </a:solidFill>
@@ -2330,7 +2330,7 @@
                 </a:rPr>
                 <a:t>核心计算逻辑（Serviceability）</a:t>
               </a:r>
-              <a:endParaRPr lang="en-US" sz="1050" noProof="1">
+              <a:endParaRPr lang="en-US" sz="1400" noProof="1">
                 <a:latin typeface="微软雅黑" panose="020B0503020204020204" pitchFamily="34" charset="-122"/>
                 <a:ea typeface="微软雅黑" panose="020B0503020204020204" pitchFamily="34" charset="-122"/>
               </a:endParaRPr>
@@ -2432,7 +2432,7 @@
           <p:nvPr>
             <p:extLst>
               <p:ext uri="{F5677B7D-0D2A-4D9B-9A5C-6D8D7D0E5A5D}">
-                <pptd:line xmlns="" xmlns:a14="http://schemas.microsoft.com/office/drawing/2010/main" xmlns:c="http://schemas.openxmlformats.org/drawingml/2006/chart" xmlns:cx="http://schemas.microsoft.com/office/drawing/2014/chartex" xmlns:m="http://schemas.openxmlformats.org/officeDocument/2006/math" xmlns:mc="http://schemas.openxmlformats.org/markup-compatibility/2006" xmlns:pptd="https://kimi-design.msh.team/pptd/2026" encoding="base64url">eyJ2aWV3Qm94IjpbMSwzNDBdLCJwb2ludHMiOiIwLDAgMCwzNDAifQ</pptd:line>
+                <pptd:line xmlns:pptd="https://kimi-design.msh.team/pptd/2026" xmlns:mc="http://schemas.openxmlformats.org/markup-compatibility/2006" xmlns:m="http://schemas.openxmlformats.org/officeDocument/2006/math" xmlns:cx="http://schemas.microsoft.com/office/drawing/2014/chartex" xmlns:c="http://schemas.openxmlformats.org/drawingml/2006/chart" xmlns:a14="http://schemas.microsoft.com/office/drawing/2010/main" xmlns="" encoding="base64url">eyJ2aWV3Qm94IjpbMSwzNDBdLCJwb2ludHMiOiIwLDAgMCwzNDAifQ</pptd:line>
               </p:ext>
             </p:extLst>
           </p:nvPr>
@@ -2603,7 +2603,7 @@
           <p:nvPr>
             <p:extLst>
               <p:ext uri="{F5677B7D-0D2A-4D9B-9A5C-6D8D7D0E5A5D}">
-                <pptd:line xmlns="" xmlns:a14="http://schemas.microsoft.com/office/drawing/2010/main" xmlns:c="http://schemas.openxmlformats.org/drawingml/2006/chart" xmlns:cx="http://schemas.microsoft.com/office/drawing/2014/chartex" xmlns:m="http://schemas.openxmlformats.org/officeDocument/2006/math" xmlns:mc="http://schemas.openxmlformats.org/markup-compatibility/2006" xmlns:pptd="https://kimi-design.msh.team/pptd/2026" encoding="base64url">eyJ2aWV3Qm94IjpbMzc2LDFdLCJwb2ludHMiOiIwLDAgMzc2LDAifQ</pptd:line>
+                <pptd:line xmlns:pptd="https://kimi-design.msh.team/pptd/2026" xmlns:mc="http://schemas.openxmlformats.org/markup-compatibility/2006" xmlns:m="http://schemas.openxmlformats.org/officeDocument/2006/math" xmlns:cx="http://schemas.microsoft.com/office/drawing/2014/chartex" xmlns:c="http://schemas.openxmlformats.org/drawingml/2006/chart" xmlns:a14="http://schemas.microsoft.com/office/drawing/2010/main" xmlns="" encoding="base64url">eyJ2aWV3Qm94IjpbMzc2LDFdLCJwb2ludHMiOiIwLDAgMzc2LDAifQ</pptd:line>
               </p:ext>
             </p:extLst>
           </p:nvPr>
@@ -2723,7 +2723,7 @@
           <p:nvPr>
             <p:extLst>
               <p:ext uri="{F5677B7D-0D2A-4D9B-9A5C-6D8D7D0E5A5D}">
-                <pptd:line xmlns="" xmlns:a14="http://schemas.microsoft.com/office/drawing/2010/main" xmlns:c="http://schemas.openxmlformats.org/drawingml/2006/chart" xmlns:cx="http://schemas.microsoft.com/office/drawing/2014/chartex" xmlns:m="http://schemas.openxmlformats.org/officeDocument/2006/math" xmlns:mc="http://schemas.openxmlformats.org/markup-compatibility/2006" xmlns:pptd="https://kimi-design.msh.team/pptd/2026" encoding="base64url">eyJ2aWV3Qm94IjpbMzc2LDFdLCJwb2ludHMiOiIwLDAgMzc2LDAifQ</pptd:line>
+                <pptd:line xmlns:pptd="https://kimi-design.msh.team/pptd/2026" xmlns:mc="http://schemas.openxmlformats.org/markup-compatibility/2006" xmlns:m="http://schemas.openxmlformats.org/officeDocument/2006/math" xmlns:cx="http://schemas.microsoft.com/office/drawing/2014/chartex" xmlns:c="http://schemas.openxmlformats.org/drawingml/2006/chart" xmlns:a14="http://schemas.microsoft.com/office/drawing/2010/main" xmlns="" encoding="base64url">eyJ2aWV3Qm94IjpbMzc2LDFdLCJwb2ludHMiOiIwLDAgMzc2LDAifQ</pptd:line>
               </p:ext>
             </p:extLst>
           </p:nvPr>
@@ -2863,7 +2863,7 @@
           <p:nvPr>
             <p:extLst>
               <p:ext uri="{F5677B7D-0D2A-4D9B-9A5C-6D8D7D0E5A5D}">
-                <pptd:line xmlns="" xmlns:a14="http://schemas.microsoft.com/office/drawing/2010/main" xmlns:c="http://schemas.openxmlformats.org/drawingml/2006/chart" xmlns:cx="http://schemas.microsoft.com/office/drawing/2014/chartex" xmlns:m="http://schemas.openxmlformats.org/officeDocument/2006/math" xmlns:mc="http://schemas.openxmlformats.org/markup-compatibility/2006" xmlns:pptd="https://kimi-design.msh.team/pptd/2026" encoding="base64url">eyJ2aWV3Qm94IjpbMzc2LDFdLCJwb2ludHMiOiIwLDAgMzc2LDAifQ</pptd:line>
+                <pptd:line xmlns:pptd="https://kimi-design.msh.team/pptd/2026" xmlns:mc="http://schemas.openxmlformats.org/markup-compatibility/2006" xmlns:m="http://schemas.openxmlformats.org/officeDocument/2006/math" xmlns:cx="http://schemas.microsoft.com/office/drawing/2014/chartex" xmlns:c="http://schemas.openxmlformats.org/drawingml/2006/chart" xmlns:a14="http://schemas.microsoft.com/office/drawing/2010/main" xmlns="" encoding="base64url">eyJ2aWV3Qm94IjpbMzc2LDFdLCJwb2ludHMiOiIwLDAgMzc2LDAifQ</pptd:line>
               </p:ext>
             </p:extLst>
           </p:nvPr>
@@ -3023,7 +3023,7 @@
             <p:nvPr>
               <p:extLst>
                 <p:ext uri="{F5677B7D-0D2A-4D9B-9A5C-6D8D7D0E5A5D}">
-                  <pptd:line xmlns:pptd="https://kimi-design.msh.team/pptd/2026" xmlns:mc="http://schemas.openxmlformats.org/markup-compatibility/2006" xmlns:m="http://schemas.openxmlformats.org/officeDocument/2006/math" xmlns:cx="http://schemas.microsoft.com/office/drawing/2014/chartex" xmlns:c="http://schemas.openxmlformats.org/drawingml/2006/chart" xmlns:a14="http://schemas.microsoft.com/office/drawing/2010/main" xmlns="" encoding="base64url">eyJ2aWV3Qm94IjpbODU2LDFdLCJwb2ludHMiOiIwLDAgODU2LDAifQ</pptd:line>
+                  <pptd:line xmlns="" xmlns:a14="http://schemas.microsoft.com/office/drawing/2010/main" xmlns:c="http://schemas.openxmlformats.org/drawingml/2006/chart" xmlns:cx="http://schemas.microsoft.com/office/drawing/2014/chartex" xmlns:m="http://schemas.openxmlformats.org/officeDocument/2006/math" xmlns:mc="http://schemas.openxmlformats.org/markup-compatibility/2006" xmlns:pptd="https://kimi-design.msh.team/pptd/2026" encoding="base64url">eyJ2aWV3Qm94IjpbODU2LDFdLCJwb2ludHMiOiIwLDAgODU2LDAifQ</pptd:line>
                 </p:ext>
               </p:extLst>
             </p:nvPr>
@@ -6611,14 +6611,14 @@
           <p:nvPr>
             <p:extLst>
               <p:ext uri="{D42A27DB-BD31-4B8C-83A1-F6EECF244321}">
-                <p14:modId xmlns:p14="http://schemas.microsoft.com/office/powerpoint/2010/main" val="2240519333"/>
+                <p14:modId xmlns:p14="http://schemas.microsoft.com/office/powerpoint/2010/main" val="1307832492"/>
               </p:ext>
             </p:extLst>
           </p:nvPr>
         </p:nvGraphicFramePr>
         <p:xfrm>
           <a:off x="617523" y="1439101"/>
-          <a:ext cx="10883342" cy="1335402"/>
+          <a:ext cx="10883342" cy="1405443"/>
         </p:xfrm>
         <a:graphic>
           <a:graphicData uri="http://schemas.openxmlformats.org/drawingml/2006/table">
@@ -6683,7 +6683,7 @@
                     <a:p>
                       <a:pPr algn="ctr"/>
                       <a:r>
-                        <a:rPr sz="800" b="1" dirty="0" err="1">
+                        <a:rPr sz="900" b="1" dirty="0" err="1">
                           <a:solidFill>
                             <a:srgbClr val="0A0A0A"/>
                           </a:solidFill>
@@ -6692,7 +6692,7 @@
                         </a:rPr>
                         <a:t>日期</a:t>
                       </a:r>
-                      <a:endParaRPr sz="800" b="1" dirty="0">
+                      <a:endParaRPr sz="900" b="1" dirty="0">
                         <a:solidFill>
                           <a:srgbClr val="0A0A0A"/>
                         </a:solidFill>
@@ -6701,7 +6701,7 @@
                       </a:endParaRPr>
                     </a:p>
                   </a:txBody>
-                  <a:tcPr marL="27432" marR="27432" marT="9144" marB="9144">
+                  <a:tcPr marL="27432" marR="27432" marT="9144" marB="9144" anchor="ctr">
                     <a:lnL>
                       <a:noFill/>
                     </a:lnL>
@@ -6726,7 +6726,7 @@
                     <a:p>
                       <a:pPr algn="ctr"/>
                       <a:r>
-                        <a:rPr sz="800" b="1" dirty="0" err="1">
+                        <a:rPr sz="900" b="1" dirty="0" err="1">
                           <a:solidFill>
                             <a:srgbClr val="0A0A0A"/>
                           </a:solidFill>
@@ -6735,7 +6735,7 @@
                         </a:rPr>
                         <a:t>交易描述</a:t>
                       </a:r>
-                      <a:endParaRPr sz="800" b="1" dirty="0">
+                      <a:endParaRPr sz="900" b="1" dirty="0">
                         <a:solidFill>
                           <a:srgbClr val="0A0A0A"/>
                         </a:solidFill>
@@ -6744,7 +6744,7 @@
                       </a:endParaRPr>
                     </a:p>
                   </a:txBody>
-                  <a:tcPr marL="27432" marR="27432" marT="9144" marB="9144">
+                  <a:tcPr marL="27432" marR="27432" marT="9144" marB="9144" anchor="ctr">
                     <a:lnL>
                       <a:noFill/>
                     </a:lnL>
@@ -6769,7 +6769,7 @@
                     <a:p>
                       <a:pPr algn="ctr"/>
                       <a:r>
-                        <a:rPr sz="800" b="1" dirty="0" err="1">
+                        <a:rPr sz="900" b="1" dirty="0" err="1">
                           <a:solidFill>
                             <a:srgbClr val="0A0A0A"/>
                           </a:solidFill>
@@ -6778,7 +6778,7 @@
                         </a:rPr>
                         <a:t>交易金额</a:t>
                       </a:r>
-                      <a:endParaRPr sz="800" b="1" dirty="0">
+                      <a:endParaRPr sz="900" b="1" dirty="0">
                         <a:solidFill>
                           <a:srgbClr val="0A0A0A"/>
                         </a:solidFill>
@@ -6787,7 +6787,7 @@
                       </a:endParaRPr>
                     </a:p>
                   </a:txBody>
-                  <a:tcPr marL="27432" marR="27432" marT="9144" marB="9144">
+                  <a:tcPr marL="27432" marR="27432" marT="9144" marB="9144" anchor="ctr">
                     <a:lnL>
                       <a:noFill/>
                     </a:lnL>
@@ -6822,7 +6822,7 @@
                     <a:p>
                       <a:pPr algn="ctr"/>
                       <a:r>
-                        <a:rPr sz="800" b="1" dirty="0" err="1">
+                        <a:rPr sz="900" b="1" dirty="0" err="1">
                           <a:solidFill>
                             <a:srgbClr val="D6A000"/>
                           </a:solidFill>
@@ -6831,7 +6831,7 @@
                         </a:rPr>
                         <a:t>标准交易对手</a:t>
                       </a:r>
-                      <a:endParaRPr sz="800" b="1" dirty="0">
+                      <a:endParaRPr sz="900" b="1" dirty="0">
                         <a:solidFill>
                           <a:srgbClr val="0A0A0A"/>
                         </a:solidFill>
@@ -6840,7 +6840,7 @@
                       </a:endParaRPr>
                     </a:p>
                   </a:txBody>
-                  <a:tcPr marL="27432" marR="27432" marT="9144" marB="9144">
+                  <a:tcPr marL="27432" marR="27432" marT="9144" marB="9144" anchor="ctr">
                     <a:lnL w="12700" cap="flat" cmpd="sng" algn="ctr">
                       <a:solidFill>
                         <a:schemeClr val="tx1"/>
@@ -6877,7 +6877,7 @@
                     <a:p>
                       <a:pPr algn="ctr"/>
                       <a:r>
-                        <a:rPr sz="800" b="1" dirty="0" err="1">
+                        <a:rPr sz="900" b="1" dirty="0" err="1">
                           <a:solidFill>
                             <a:srgbClr val="D6A000"/>
                           </a:solidFill>
@@ -6886,7 +6886,7 @@
                         </a:rPr>
                         <a:t>主体类型</a:t>
                       </a:r>
-                      <a:endParaRPr sz="800" b="1" dirty="0">
+                      <a:endParaRPr sz="900" b="1" dirty="0">
                         <a:solidFill>
                           <a:srgbClr val="0A0A0A"/>
                         </a:solidFill>
@@ -6895,7 +6895,7 @@
                       </a:endParaRPr>
                     </a:p>
                   </a:txBody>
-                  <a:tcPr marL="27432" marR="27432" marT="9144" marB="9144">
+                  <a:tcPr marL="27432" marR="27432" marT="9144" marB="9144" anchor="ctr">
                     <a:lnL>
                       <a:noFill/>
                     </a:lnL>
@@ -6930,7 +6930,7 @@
                     <a:p>
                       <a:pPr algn="ctr"/>
                       <a:r>
-                        <a:rPr sz="800" b="1">
+                        <a:rPr sz="900" b="1">
                           <a:solidFill>
                             <a:srgbClr val="D6A000"/>
                           </a:solidFill>
@@ -6941,7 +6941,7 @@
                       </a:r>
                     </a:p>
                   </a:txBody>
-                  <a:tcPr marL="27432" marR="27432" marT="9144" marB="9144">
+                  <a:tcPr marL="27432" marR="27432" marT="9144" marB="9144" anchor="ctr">
                     <a:lnL>
                       <a:noFill/>
                     </a:lnL>
@@ -6976,7 +6976,7 @@
                     <a:p>
                       <a:pPr algn="ctr"/>
                       <a:r>
-                        <a:rPr sz="800" b="1" dirty="0" err="1">
+                        <a:rPr sz="900" b="1" dirty="0" err="1">
                           <a:solidFill>
                             <a:srgbClr val="D6A000"/>
                           </a:solidFill>
@@ -6985,7 +6985,7 @@
                         </a:rPr>
                         <a:t>分类依据</a:t>
                       </a:r>
-                      <a:endParaRPr sz="800" b="1" dirty="0">
+                      <a:endParaRPr sz="900" b="1" dirty="0">
                         <a:solidFill>
                           <a:srgbClr val="D6A000"/>
                         </a:solidFill>
@@ -6994,7 +6994,7 @@
                       </a:endParaRPr>
                     </a:p>
                   </a:txBody>
-                  <a:tcPr marL="27432" marR="27432" marT="9144" marB="9144">
+                  <a:tcPr marL="27432" marR="27432" marT="9144" marB="9144" anchor="ctr">
                     <a:lnL>
                       <a:noFill/>
                     </a:lnL>
@@ -7042,7 +7042,7 @@
                     <a:p>
                       <a:pPr marL="0" algn="ctr" defTabSz="914400" rtl="0" eaLnBrk="1" latinLnBrk="0" hangingPunct="1"/>
                       <a:r>
-                        <a:rPr sz="800" b="0" kern="1200" dirty="0">
+                        <a:rPr sz="900" b="0" kern="1200" dirty="0">
                           <a:solidFill>
                             <a:srgbClr val="0A0A0A"/>
                           </a:solidFill>
@@ -7054,7 +7054,7 @@
                       </a:r>
                     </a:p>
                   </a:txBody>
-                  <a:tcPr marL="27432" marR="27432" marT="9144" marB="9144">
+                  <a:tcPr marL="27432" marR="27432" marT="9144" marB="9144" anchor="ctr">
                     <a:lnL>
                       <a:noFill/>
                     </a:lnL>
@@ -7085,7 +7085,7 @@
                     <a:p>
                       <a:pPr marL="0" algn="ctr" defTabSz="914400" rtl="0" eaLnBrk="1" latinLnBrk="0" hangingPunct="1"/>
                       <a:r>
-                        <a:rPr sz="800" b="0" kern="1200" dirty="0">
+                        <a:rPr sz="900" b="0" kern="1200" dirty="0">
                           <a:solidFill>
                             <a:srgbClr val="0A0A0A"/>
                           </a:solidFill>
@@ -7097,7 +7097,7 @@
                       </a:r>
                     </a:p>
                   </a:txBody>
-                  <a:tcPr marL="27432" marR="27432" marT="9144" marB="9144">
+                  <a:tcPr marL="27432" marR="27432" marT="9144" marB="9144" anchor="ctr">
                     <a:lnL>
                       <a:noFill/>
                     </a:lnL>
@@ -7128,7 +7128,7 @@
                     <a:p>
                       <a:pPr marL="0" algn="ctr" defTabSz="914400" rtl="0" eaLnBrk="1" latinLnBrk="0" hangingPunct="1"/>
                       <a:r>
-                        <a:rPr sz="800" b="0" kern="1200" dirty="0">
+                        <a:rPr sz="900" b="0" kern="1200" dirty="0">
                           <a:solidFill>
                             <a:srgbClr val="0A0A0A"/>
                           </a:solidFill>
@@ -7140,7 +7140,7 @@
                       </a:r>
                     </a:p>
                   </a:txBody>
-                  <a:tcPr marL="27432" marR="27432" marT="9144" marB="9144">
+                  <a:tcPr marL="27432" marR="27432" marT="9144" marB="9144" anchor="ctr">
                     <a:lnL>
                       <a:noFill/>
                     </a:lnL>
@@ -7181,7 +7181,7 @@
                     <a:p>
                       <a:pPr marL="0" algn="ctr" defTabSz="914400" rtl="0" eaLnBrk="1" latinLnBrk="0" hangingPunct="1"/>
                       <a:r>
-                        <a:rPr sz="800" b="0" kern="1200" dirty="0">
+                        <a:rPr sz="900" b="0" kern="1200" dirty="0">
                           <a:solidFill>
                             <a:srgbClr val="0A0A0A"/>
                           </a:solidFill>
@@ -7193,7 +7193,7 @@
                       </a:r>
                     </a:p>
                   </a:txBody>
-                  <a:tcPr marL="27432" marR="27432" marT="9144" marB="9144">
+                  <a:tcPr marL="27432" marR="27432" marT="9144" marB="9144" anchor="ctr">
                     <a:lnL w="12700" cap="flat" cmpd="sng" algn="ctr">
                       <a:solidFill>
                         <a:schemeClr val="tx1"/>
@@ -7230,7 +7230,7 @@
                     <a:p>
                       <a:pPr marL="0" algn="ctr" defTabSz="914400" rtl="0" eaLnBrk="1" latinLnBrk="0" hangingPunct="1"/>
                       <a:r>
-                        <a:rPr sz="800" b="0" kern="1200" dirty="0" err="1">
+                        <a:rPr sz="900" b="0" kern="1200" dirty="0" err="1">
                           <a:solidFill>
                             <a:srgbClr val="0A0A0A"/>
                           </a:solidFill>
@@ -7240,7 +7240,7 @@
                         </a:rPr>
                         <a:t>小额信贷机构</a:t>
                       </a:r>
-                      <a:endParaRPr sz="800" b="0" kern="1200" dirty="0">
+                      <a:endParaRPr sz="900" b="0" kern="1200" dirty="0">
                         <a:solidFill>
                           <a:srgbClr val="0A0A0A"/>
                         </a:solidFill>
@@ -7250,7 +7250,7 @@
                       </a:endParaRPr>
                     </a:p>
                   </a:txBody>
-                  <a:tcPr marL="27432" marR="27432" marT="9144" marB="9144">
+                  <a:tcPr marL="27432" marR="27432" marT="9144" marB="9144" anchor="ctr">
                     <a:lnL>
                       <a:noFill/>
                     </a:lnL>
@@ -7285,7 +7285,7 @@
                     <a:p>
                       <a:pPr marL="0" algn="ctr" defTabSz="914400" rtl="0" eaLnBrk="1" latinLnBrk="0" hangingPunct="1"/>
                       <a:r>
-                        <a:rPr sz="800" b="0" kern="1200" dirty="0" err="1">
+                        <a:rPr sz="900" b="0" kern="1200" dirty="0" err="1">
                           <a:solidFill>
                             <a:srgbClr val="0A0A0A"/>
                           </a:solidFill>
@@ -7295,7 +7295,7 @@
                         </a:rPr>
                         <a:t>贷款及还款</a:t>
                       </a:r>
-                      <a:endParaRPr sz="800" b="0" kern="1200" dirty="0">
+                      <a:endParaRPr sz="900" b="0" kern="1200" dirty="0">
                         <a:solidFill>
                           <a:srgbClr val="0A0A0A"/>
                         </a:solidFill>
@@ -7305,7 +7305,7 @@
                       </a:endParaRPr>
                     </a:p>
                   </a:txBody>
-                  <a:tcPr marL="27432" marR="27432" marT="9144" marB="9144">
+                  <a:tcPr marL="27432" marR="27432" marT="9144" marB="9144" anchor="ctr">
                     <a:lnL>
                       <a:noFill/>
                     </a:lnL>
@@ -7340,7 +7340,7 @@
                     <a:p>
                       <a:pPr marL="0" algn="ctr" defTabSz="914400" rtl="0" eaLnBrk="1" latinLnBrk="0" hangingPunct="1"/>
                       <a:r>
-                        <a:rPr sz="800" b="0" kern="1200" dirty="0" err="1">
+                        <a:rPr sz="900" b="0" kern="1200" dirty="0" err="1">
                           <a:solidFill>
                             <a:srgbClr val="0A0A0A"/>
                           </a:solidFill>
@@ -7350,7 +7350,7 @@
                         </a:rPr>
                         <a:t>交易方向、机构名称、产品关键词及历史交易模式</a:t>
                       </a:r>
-                      <a:endParaRPr sz="800" b="0" kern="1200" dirty="0">
+                      <a:endParaRPr sz="900" b="0" kern="1200" dirty="0">
                         <a:solidFill>
                           <a:srgbClr val="0A0A0A"/>
                         </a:solidFill>
@@ -7360,7 +7360,7 @@
                       </a:endParaRPr>
                     </a:p>
                   </a:txBody>
-                  <a:tcPr marL="27432" marR="27432" marT="9144" marB="9144">
+                  <a:tcPr marL="27432" marR="27432" marT="9144" marB="9144" anchor="ctr">
                     <a:lnL>
                       <a:noFill/>
                     </a:lnL>
@@ -7408,7 +7408,7 @@
                     <a:p>
                       <a:pPr marL="0" algn="ctr" defTabSz="914400" rtl="0" eaLnBrk="1" latinLnBrk="0" hangingPunct="1"/>
                       <a:r>
-                        <a:rPr sz="800" b="0" kern="1200">
+                        <a:rPr sz="900" b="0" kern="1200">
                           <a:solidFill>
                             <a:srgbClr val="0A0A0A"/>
                           </a:solidFill>
@@ -7420,7 +7420,7 @@
                       </a:r>
                     </a:p>
                   </a:txBody>
-                  <a:tcPr marL="27432" marR="27432" marT="9144" marB="9144">
+                  <a:tcPr marL="27432" marR="27432" marT="9144" marB="9144" anchor="ctr">
                     <a:lnL>
                       <a:noFill/>
                     </a:lnL>
@@ -7451,7 +7451,7 @@
                     <a:p>
                       <a:pPr marL="0" algn="ctr" defTabSz="914400" rtl="0" eaLnBrk="1" latinLnBrk="0" hangingPunct="1"/>
                       <a:r>
-                        <a:rPr sz="800" b="0" kern="1200" dirty="0">
+                        <a:rPr sz="900" b="0" kern="1200" dirty="0">
                           <a:solidFill>
                             <a:srgbClr val="0A0A0A"/>
                           </a:solidFill>
@@ -7463,7 +7463,7 @@
                       </a:r>
                     </a:p>
                   </a:txBody>
-                  <a:tcPr marL="27432" marR="27432" marT="9144" marB="9144">
+                  <a:tcPr marL="27432" marR="27432" marT="9144" marB="9144" anchor="ctr">
                     <a:lnL>
                       <a:noFill/>
                     </a:lnL>
@@ -7494,7 +7494,7 @@
                     <a:p>
                       <a:pPr marL="0" algn="ctr" defTabSz="914400" rtl="0" eaLnBrk="1" latinLnBrk="0" hangingPunct="1"/>
                       <a:r>
-                        <a:rPr sz="800" b="0" kern="1200" dirty="0">
+                        <a:rPr sz="900" b="0" kern="1200" dirty="0">
                           <a:solidFill>
                             <a:srgbClr val="0A0A0A"/>
                           </a:solidFill>
@@ -7506,7 +7506,7 @@
                       </a:r>
                     </a:p>
                   </a:txBody>
-                  <a:tcPr marL="27432" marR="27432" marT="9144" marB="9144">
+                  <a:tcPr marL="27432" marR="27432" marT="9144" marB="9144" anchor="ctr">
                     <a:lnL>
                       <a:noFill/>
                     </a:lnL>
@@ -7547,7 +7547,7 @@
                     <a:p>
                       <a:pPr marL="0" algn="ctr" defTabSz="914400" rtl="0" eaLnBrk="1" latinLnBrk="0" hangingPunct="1"/>
                       <a:r>
-                        <a:rPr sz="800" b="0" kern="1200" dirty="0">
+                        <a:rPr sz="900" b="0" kern="1200" dirty="0">
                           <a:solidFill>
                             <a:srgbClr val="0A0A0A"/>
                           </a:solidFill>
@@ -7559,7 +7559,7 @@
                       </a:r>
                     </a:p>
                   </a:txBody>
-                  <a:tcPr marL="27432" marR="27432" marT="9144" marB="9144">
+                  <a:tcPr marL="27432" marR="27432" marT="9144" marB="9144" anchor="ctr">
                     <a:lnL w="12700" cap="flat" cmpd="sng" algn="ctr">
                       <a:solidFill>
                         <a:schemeClr val="tx1"/>
@@ -7596,7 +7596,7 @@
                     <a:p>
                       <a:pPr marL="0" algn="ctr" defTabSz="914400" rtl="0" eaLnBrk="1" latinLnBrk="0" hangingPunct="1"/>
                       <a:r>
-                        <a:rPr sz="800" b="0" kern="1200" dirty="0" err="1">
+                        <a:rPr sz="900" b="0" kern="1200" dirty="0" err="1">
                           <a:solidFill>
                             <a:srgbClr val="0A0A0A"/>
                           </a:solidFill>
@@ -7606,7 +7606,7 @@
                         </a:rPr>
                         <a:t>商户企业</a:t>
                       </a:r>
-                      <a:endParaRPr sz="800" b="0" kern="1200" dirty="0">
+                      <a:endParaRPr sz="900" b="0" kern="1200" dirty="0">
                         <a:solidFill>
                           <a:srgbClr val="0A0A0A"/>
                         </a:solidFill>
@@ -7616,7 +7616,7 @@
                       </a:endParaRPr>
                     </a:p>
                   </a:txBody>
-                  <a:tcPr marL="27432" marR="27432" marT="9144" marB="9144">
+                  <a:tcPr marL="27432" marR="27432" marT="9144" marB="9144" anchor="ctr">
                     <a:lnL>
                       <a:noFill/>
                     </a:lnL>
@@ -7651,7 +7651,7 @@
                     <a:p>
                       <a:pPr marL="0" algn="ctr" defTabSz="914400" rtl="0" eaLnBrk="1" latinLnBrk="0" hangingPunct="1"/>
                       <a:r>
-                        <a:rPr sz="800" b="0" kern="1200" dirty="0" err="1">
+                        <a:rPr sz="900" b="0" kern="1200" dirty="0" err="1">
                           <a:solidFill>
                             <a:srgbClr val="0A0A0A"/>
                           </a:solidFill>
@@ -7661,7 +7661,7 @@
                         </a:rPr>
                         <a:t>消费</a:t>
                       </a:r>
-                      <a:endParaRPr sz="800" b="0" kern="1200" dirty="0">
+                      <a:endParaRPr sz="900" b="0" kern="1200" dirty="0">
                         <a:solidFill>
                           <a:srgbClr val="0A0A0A"/>
                         </a:solidFill>
@@ -7671,7 +7671,7 @@
                       </a:endParaRPr>
                     </a:p>
                   </a:txBody>
-                  <a:tcPr marL="27432" marR="27432" marT="9144" marB="9144">
+                  <a:tcPr marL="27432" marR="27432" marT="9144" marB="9144" anchor="ctr">
                     <a:lnL>
                       <a:noFill/>
                     </a:lnL>
@@ -7706,7 +7706,7 @@
                     <a:p>
                       <a:pPr marL="0" algn="ctr" defTabSz="914400" rtl="0" eaLnBrk="1" latinLnBrk="0" hangingPunct="1"/>
                       <a:r>
-                        <a:rPr sz="800" b="0" kern="1200" dirty="0" err="1">
+                        <a:rPr sz="900" b="0" kern="1200" dirty="0" err="1">
                           <a:solidFill>
                             <a:srgbClr val="0A0A0A"/>
                           </a:solidFill>
@@ -7716,7 +7716,7 @@
                         </a:rPr>
                         <a:t>商户知识库标准名匹配</a:t>
                       </a:r>
-                      <a:endParaRPr sz="800" b="0" kern="1200" dirty="0">
+                      <a:endParaRPr sz="900" b="0" kern="1200" dirty="0">
                         <a:solidFill>
                           <a:srgbClr val="0A0A0A"/>
                         </a:solidFill>
@@ -7726,7 +7726,7 @@
                       </a:endParaRPr>
                     </a:p>
                   </a:txBody>
-                  <a:tcPr marL="27432" marR="27432" marT="9144" marB="9144">
+                  <a:tcPr marL="27432" marR="27432" marT="9144" marB="9144" anchor="ctr">
                     <a:lnL>
                       <a:noFill/>
                     </a:lnL>
@@ -7774,7 +7774,7 @@
                     <a:p>
                       <a:pPr marL="0" algn="ctr" defTabSz="914400" rtl="0" eaLnBrk="1" latinLnBrk="0" hangingPunct="1"/>
                       <a:r>
-                        <a:rPr sz="800" b="0" kern="1200">
+                        <a:rPr sz="900" b="0" kern="1200">
                           <a:solidFill>
                             <a:srgbClr val="0A0A0A"/>
                           </a:solidFill>
@@ -7786,7 +7786,7 @@
                       </a:r>
                     </a:p>
                   </a:txBody>
-                  <a:tcPr marL="27432" marR="27432" marT="9144" marB="9144">
+                  <a:tcPr marL="27432" marR="27432" marT="9144" marB="9144" anchor="ctr">
                     <a:lnL>
                       <a:noFill/>
                     </a:lnL>
@@ -7817,7 +7817,7 @@
                     <a:p>
                       <a:pPr marL="0" algn="ctr" defTabSz="914400" rtl="0" eaLnBrk="1" latinLnBrk="0" hangingPunct="1"/>
                       <a:r>
-                        <a:rPr sz="800" b="0" kern="1200" dirty="0">
+                        <a:rPr sz="900" b="0" kern="1200" dirty="0">
                           <a:solidFill>
                             <a:srgbClr val="0A0A0A"/>
                           </a:solidFill>
@@ -7829,7 +7829,7 @@
                       </a:r>
                     </a:p>
                   </a:txBody>
-                  <a:tcPr marL="27432" marR="27432" marT="9144" marB="9144">
+                  <a:tcPr marL="27432" marR="27432" marT="9144" marB="9144" anchor="ctr">
                     <a:lnL>
                       <a:noFill/>
                     </a:lnL>
@@ -7860,7 +7860,7 @@
                     <a:p>
                       <a:pPr marL="0" algn="ctr" defTabSz="914400" rtl="0" eaLnBrk="1" latinLnBrk="0" hangingPunct="1"/>
                       <a:r>
-                        <a:rPr sz="800" b="0" kern="1200" dirty="0">
+                        <a:rPr sz="900" b="0" kern="1200" dirty="0">
                           <a:solidFill>
                             <a:srgbClr val="0A0A0A"/>
                           </a:solidFill>
@@ -7872,7 +7872,7 @@
                       </a:r>
                     </a:p>
                   </a:txBody>
-                  <a:tcPr marL="27432" marR="27432" marT="9144" marB="9144">
+                  <a:tcPr marL="27432" marR="27432" marT="9144" marB="9144" anchor="ctr">
                     <a:lnL>
                       <a:noFill/>
                     </a:lnL>
@@ -7913,7 +7913,7 @@
                     <a:p>
                       <a:pPr marL="0" algn="ctr" defTabSz="914400" rtl="0" eaLnBrk="1" latinLnBrk="0" hangingPunct="1"/>
                       <a:r>
-                        <a:rPr sz="800" b="0" kern="1200">
+                        <a:rPr sz="900" b="0" kern="1200">
                           <a:solidFill>
                             <a:srgbClr val="0A0A0A"/>
                           </a:solidFill>
@@ -7925,7 +7925,7 @@
                       </a:r>
                     </a:p>
                   </a:txBody>
-                  <a:tcPr marL="27432" marR="27432" marT="9144" marB="9144">
+                  <a:tcPr marL="27432" marR="27432" marT="9144" marB="9144" anchor="ctr">
                     <a:lnL w="12700" cap="flat" cmpd="sng" algn="ctr">
                       <a:solidFill>
                         <a:schemeClr val="tx1"/>
@@ -7962,7 +7962,7 @@
                     <a:p>
                       <a:pPr marL="0" algn="ctr" defTabSz="914400" rtl="0" eaLnBrk="1" latinLnBrk="0" hangingPunct="1"/>
                       <a:r>
-                        <a:rPr sz="800" b="0" kern="1200" dirty="0" err="1">
+                        <a:rPr sz="900" b="0" kern="1200" dirty="0" err="1">
                           <a:solidFill>
                             <a:srgbClr val="0A0A0A"/>
                           </a:solidFill>
@@ -7972,7 +7972,7 @@
                         </a:rPr>
                         <a:t>商户企业</a:t>
                       </a:r>
-                      <a:endParaRPr sz="800" b="0" kern="1200" dirty="0">
+                      <a:endParaRPr sz="900" b="0" kern="1200" dirty="0">
                         <a:solidFill>
                           <a:srgbClr val="0A0A0A"/>
                         </a:solidFill>
@@ -7982,7 +7982,7 @@
                       </a:endParaRPr>
                     </a:p>
                   </a:txBody>
-                  <a:tcPr marL="27432" marR="27432" marT="9144" marB="9144">
+                  <a:tcPr marL="27432" marR="27432" marT="9144" marB="9144" anchor="ctr">
                     <a:lnL>
                       <a:noFill/>
                     </a:lnL>
@@ -8017,7 +8017,7 @@
                     <a:p>
                       <a:pPr marL="0" algn="ctr" defTabSz="914400" rtl="0" eaLnBrk="1" latinLnBrk="0" hangingPunct="1"/>
                       <a:r>
-                        <a:rPr sz="800" b="0" kern="1200" dirty="0" err="1">
+                        <a:rPr sz="900" b="0" kern="1200" dirty="0" err="1">
                           <a:solidFill>
                             <a:srgbClr val="0A0A0A"/>
                           </a:solidFill>
@@ -8027,7 +8027,7 @@
                         </a:rPr>
                         <a:t>消费</a:t>
                       </a:r>
-                      <a:endParaRPr sz="800" b="0" kern="1200" dirty="0">
+                      <a:endParaRPr sz="900" b="0" kern="1200" dirty="0">
                         <a:solidFill>
                           <a:srgbClr val="0A0A0A"/>
                         </a:solidFill>
@@ -8037,7 +8037,7 @@
                       </a:endParaRPr>
                     </a:p>
                   </a:txBody>
-                  <a:tcPr marL="27432" marR="27432" marT="9144" marB="9144">
+                  <a:tcPr marL="27432" marR="27432" marT="9144" marB="9144" anchor="ctr">
                     <a:lnL>
                       <a:noFill/>
                     </a:lnL>
@@ -8072,7 +8072,7 @@
                     <a:p>
                       <a:pPr marL="0" algn="ctr" defTabSz="914400" rtl="0" eaLnBrk="1" latinLnBrk="0" hangingPunct="1"/>
                       <a:r>
-                        <a:rPr sz="800" b="0" kern="1200" dirty="0" err="1">
+                        <a:rPr sz="900" b="0" kern="1200" dirty="0" err="1">
                           <a:solidFill>
                             <a:srgbClr val="0A0A0A"/>
                           </a:solidFill>
@@ -8082,7 +8082,7 @@
                         </a:rPr>
                         <a:t>商户知识库标准名匹配</a:t>
                       </a:r>
-                      <a:endParaRPr sz="800" b="0" kern="1200" dirty="0">
+                      <a:endParaRPr sz="900" b="0" kern="1200" dirty="0">
                         <a:solidFill>
                           <a:srgbClr val="0A0A0A"/>
                         </a:solidFill>
@@ -8092,7 +8092,7 @@
                       </a:endParaRPr>
                     </a:p>
                   </a:txBody>
-                  <a:tcPr marL="27432" marR="27432" marT="9144" marB="9144">
+                  <a:tcPr marL="27432" marR="27432" marT="9144" marB="9144" anchor="ctr">
                     <a:lnL>
                       <a:noFill/>
                     </a:lnL>
@@ -8140,7 +8140,7 @@
                     <a:p>
                       <a:pPr marL="0" algn="ctr" defTabSz="914400" rtl="0" eaLnBrk="1" latinLnBrk="0" hangingPunct="1"/>
                       <a:r>
-                        <a:rPr sz="800" b="0" kern="1200">
+                        <a:rPr sz="900" b="0" kern="1200">
                           <a:solidFill>
                             <a:srgbClr val="0A0A0A"/>
                           </a:solidFill>
@@ -8152,7 +8152,7 @@
                       </a:r>
                     </a:p>
                   </a:txBody>
-                  <a:tcPr marL="27432" marR="27432" marT="9144" marB="9144">
+                  <a:tcPr marL="27432" marR="27432" marT="9144" marB="9144" anchor="ctr">
                     <a:lnL>
                       <a:noFill/>
                     </a:lnL>
@@ -8183,7 +8183,7 @@
                     <a:p>
                       <a:pPr marL="0" algn="ctr" defTabSz="914400" rtl="0" eaLnBrk="1" latinLnBrk="0" hangingPunct="1"/>
                       <a:r>
-                        <a:rPr sz="800" b="0" kern="1200" dirty="0">
+                        <a:rPr sz="900" b="0" kern="1200" dirty="0">
                           <a:solidFill>
                             <a:srgbClr val="0A0A0A"/>
                           </a:solidFill>
@@ -8195,7 +8195,7 @@
                       </a:r>
                     </a:p>
                   </a:txBody>
-                  <a:tcPr marL="27432" marR="27432" marT="9144" marB="9144">
+                  <a:tcPr marL="27432" marR="27432" marT="9144" marB="9144" anchor="ctr">
                     <a:lnL>
                       <a:noFill/>
                     </a:lnL>
@@ -8226,7 +8226,7 @@
                     <a:p>
                       <a:pPr marL="0" algn="ctr" defTabSz="914400" rtl="0" eaLnBrk="1" latinLnBrk="0" hangingPunct="1"/>
                       <a:r>
-                        <a:rPr sz="800" b="0" kern="1200" dirty="0">
+                        <a:rPr sz="900" b="0" kern="1200" dirty="0">
                           <a:solidFill>
                             <a:srgbClr val="0A0A0A"/>
                           </a:solidFill>
@@ -8238,7 +8238,7 @@
                       </a:r>
                     </a:p>
                   </a:txBody>
-                  <a:tcPr marL="27432" marR="27432" marT="9144" marB="9144">
+                  <a:tcPr marL="27432" marR="27432" marT="9144" marB="9144" anchor="ctr">
                     <a:lnL>
                       <a:noFill/>
                     </a:lnL>
@@ -8279,7 +8279,7 @@
                     <a:p>
                       <a:pPr marL="0" algn="ctr" defTabSz="914400" rtl="0" eaLnBrk="1" latinLnBrk="0" hangingPunct="1"/>
                       <a:r>
-                        <a:rPr sz="800" b="0" kern="1200">
+                        <a:rPr sz="900" b="0" kern="1200">
                           <a:solidFill>
                             <a:srgbClr val="0A0A0A"/>
                           </a:solidFill>
@@ -8291,7 +8291,7 @@
                       </a:r>
                     </a:p>
                   </a:txBody>
-                  <a:tcPr marL="27432" marR="27432" marT="9144" marB="9144">
+                  <a:tcPr marL="27432" marR="27432" marT="9144" marB="9144" anchor="ctr">
                     <a:lnL w="12700" cap="flat" cmpd="sng" algn="ctr">
                       <a:solidFill>
                         <a:schemeClr val="tx1"/>
@@ -8328,7 +8328,7 @@
                     <a:p>
                       <a:pPr marL="0" algn="ctr" defTabSz="914400" rtl="0" eaLnBrk="1" latinLnBrk="0" hangingPunct="1"/>
                       <a:r>
-                        <a:rPr sz="800" b="0" kern="1200" dirty="0" err="1">
+                        <a:rPr sz="900" b="0" kern="1200" dirty="0" err="1">
                           <a:solidFill>
                             <a:srgbClr val="0A0A0A"/>
                           </a:solidFill>
@@ -8338,7 +8338,7 @@
                         </a:rPr>
                         <a:t>商户企业</a:t>
                       </a:r>
-                      <a:endParaRPr sz="800" b="0" kern="1200" dirty="0">
+                      <a:endParaRPr sz="900" b="0" kern="1200" dirty="0">
                         <a:solidFill>
                           <a:srgbClr val="0A0A0A"/>
                         </a:solidFill>
@@ -8348,7 +8348,7 @@
                       </a:endParaRPr>
                     </a:p>
                   </a:txBody>
-                  <a:tcPr marL="27432" marR="27432" marT="9144" marB="9144">
+                  <a:tcPr marL="27432" marR="27432" marT="9144" marB="9144" anchor="ctr">
                     <a:lnL>
                       <a:noFill/>
                     </a:lnL>
@@ -8383,7 +8383,7 @@
                     <a:p>
                       <a:pPr marL="0" algn="ctr" defTabSz="914400" rtl="0" eaLnBrk="1" latinLnBrk="0" hangingPunct="1"/>
                       <a:r>
-                        <a:rPr sz="800" b="0" kern="1200">
+                        <a:rPr sz="900" b="0" kern="1200" dirty="0" err="1">
                           <a:solidFill>
                             <a:srgbClr val="0A0A0A"/>
                           </a:solidFill>
@@ -8393,9 +8393,17 @@
                         </a:rPr>
                         <a:t>订阅</a:t>
                       </a:r>
+                      <a:endParaRPr sz="900" b="0" kern="1200" dirty="0">
+                        <a:solidFill>
+                          <a:srgbClr val="0A0A0A"/>
+                        </a:solidFill>
+                        <a:latin typeface="微软雅黑" panose="020B0503020204020204" pitchFamily="34" charset="-122"/>
+                        <a:ea typeface="微软雅黑" panose="020B0503020204020204" pitchFamily="34" charset="-122"/>
+                        <a:cs typeface="+mn-cs"/>
+                      </a:endParaRPr>
                     </a:p>
                   </a:txBody>
-                  <a:tcPr marL="27432" marR="27432" marT="9144" marB="9144">
+                  <a:tcPr marL="27432" marR="27432" marT="9144" marB="9144" anchor="ctr">
                     <a:lnL>
                       <a:noFill/>
                     </a:lnL>
@@ -8430,7 +8438,7 @@
                     <a:p>
                       <a:pPr marL="0" algn="ctr" defTabSz="914400" rtl="0" eaLnBrk="1" latinLnBrk="0" hangingPunct="1"/>
                       <a:r>
-                        <a:rPr sz="800" b="0" kern="1200" dirty="0" err="1">
+                        <a:rPr sz="900" b="0" kern="1200" dirty="0" err="1">
                           <a:solidFill>
                             <a:srgbClr val="0A0A0A"/>
                           </a:solidFill>
@@ -8440,7 +8448,7 @@
                         </a:rPr>
                         <a:t>商户知识库标准名匹配</a:t>
                       </a:r>
-                      <a:endParaRPr sz="800" b="0" kern="1200" dirty="0">
+                      <a:endParaRPr sz="900" b="0" kern="1200" dirty="0">
                         <a:solidFill>
                           <a:srgbClr val="0A0A0A"/>
                         </a:solidFill>
@@ -8450,7 +8458,7 @@
                       </a:endParaRPr>
                     </a:p>
                   </a:txBody>
-                  <a:tcPr marL="27432" marR="27432" marT="9144" marB="9144">
+                  <a:tcPr marL="27432" marR="27432" marT="9144" marB="9144" anchor="ctr">
                     <a:lnL>
                       <a:noFill/>
                     </a:lnL>
@@ -8498,7 +8506,7 @@
                     <a:p>
                       <a:pPr marL="0" algn="ctr" defTabSz="914400" rtl="0" eaLnBrk="1" latinLnBrk="0" hangingPunct="1"/>
                       <a:r>
-                        <a:rPr sz="800" b="0" kern="1200">
+                        <a:rPr sz="900" b="0" kern="1200">
                           <a:solidFill>
                             <a:srgbClr val="0A0A0A"/>
                           </a:solidFill>
@@ -8510,7 +8518,7 @@
                       </a:r>
                     </a:p>
                   </a:txBody>
-                  <a:tcPr marL="27432" marR="27432" marT="9144" marB="9144">
+                  <a:tcPr marL="27432" marR="27432" marT="9144" marB="9144" anchor="ctr">
                     <a:lnL>
                       <a:noFill/>
                     </a:lnL>
@@ -8541,7 +8549,7 @@
                     <a:p>
                       <a:pPr marL="0" algn="ctr" defTabSz="914400" rtl="0" eaLnBrk="1" latinLnBrk="0" hangingPunct="1"/>
                       <a:r>
-                        <a:rPr sz="800" b="0" kern="1200" dirty="0">
+                        <a:rPr sz="900" b="0" kern="1200" dirty="0">
                           <a:solidFill>
                             <a:srgbClr val="0A0A0A"/>
                           </a:solidFill>
@@ -8553,7 +8561,7 @@
                       </a:r>
                     </a:p>
                   </a:txBody>
-                  <a:tcPr marL="27432" marR="27432" marT="9144" marB="9144">
+                  <a:tcPr marL="27432" marR="27432" marT="9144" marB="9144" anchor="ctr">
                     <a:lnL>
                       <a:noFill/>
                     </a:lnL>
@@ -8584,7 +8592,7 @@
                     <a:p>
                       <a:pPr marL="0" algn="ctr" defTabSz="914400" rtl="0" eaLnBrk="1" latinLnBrk="0" hangingPunct="1"/>
                       <a:r>
-                        <a:rPr sz="800" b="0" kern="1200" dirty="0">
+                        <a:rPr sz="900" b="0" kern="1200" dirty="0">
                           <a:solidFill>
                             <a:srgbClr val="0A0A0A"/>
                           </a:solidFill>
@@ -8596,7 +8604,7 @@
                       </a:r>
                     </a:p>
                   </a:txBody>
-                  <a:tcPr marL="27432" marR="27432" marT="9144" marB="9144">
+                  <a:tcPr marL="27432" marR="27432" marT="9144" marB="9144" anchor="ctr">
                     <a:lnL>
                       <a:noFill/>
                     </a:lnL>
@@ -8633,7 +8641,7 @@
                     <a:p>
                       <a:pPr marL="0" algn="ctr" defTabSz="914400" rtl="0" eaLnBrk="1" latinLnBrk="0" hangingPunct="1"/>
                       <a:r>
-                        <a:rPr sz="800" b="0" kern="1200">
+                        <a:rPr sz="900" b="0" kern="1200" dirty="0">
                           <a:solidFill>
                             <a:srgbClr val="0A0A0A"/>
                           </a:solidFill>
@@ -8645,7 +8653,7 @@
                       </a:r>
                     </a:p>
                   </a:txBody>
-                  <a:tcPr marL="27432" marR="27432" marT="9144" marB="9144">
+                  <a:tcPr marL="27432" marR="27432" marT="9144" marB="9144" anchor="ctr">
                     <a:lnL w="12700" cap="flat" cmpd="sng" algn="ctr">
                       <a:solidFill>
                         <a:schemeClr val="tx1"/>
@@ -8686,7 +8694,7 @@
                     <a:p>
                       <a:pPr marL="0" algn="ctr" defTabSz="914400" rtl="0" eaLnBrk="1" latinLnBrk="0" hangingPunct="1"/>
                       <a:r>
-                        <a:rPr sz="800" b="0" kern="1200" dirty="0" err="1">
+                        <a:rPr sz="900" b="0" kern="1200" dirty="0" err="1">
                           <a:solidFill>
                             <a:srgbClr val="0A0A0A"/>
                           </a:solidFill>
@@ -8697,7 +8705,7 @@
                         <a:t>雇主</a:t>
                       </a:r>
                       <a:r>
-                        <a:rPr sz="800" b="0" kern="1200" dirty="0">
+                        <a:rPr sz="900" b="0" kern="1200" dirty="0">
                           <a:solidFill>
                             <a:srgbClr val="0A0A0A"/>
                           </a:solidFill>
@@ -8708,7 +8716,7 @@
                         <a:t> / </a:t>
                       </a:r>
                       <a:r>
-                        <a:rPr sz="800" b="0" kern="1200" dirty="0" err="1">
+                        <a:rPr sz="900" b="0" kern="1200" dirty="0" err="1">
                           <a:solidFill>
                             <a:srgbClr val="0A0A0A"/>
                           </a:solidFill>
@@ -8718,7 +8726,7 @@
                         </a:rPr>
                         <a:t>收入付款方</a:t>
                       </a:r>
-                      <a:endParaRPr sz="800" b="0" kern="1200" dirty="0">
+                      <a:endParaRPr sz="900" b="0" kern="1200" dirty="0">
                         <a:solidFill>
                           <a:srgbClr val="0A0A0A"/>
                         </a:solidFill>
@@ -8728,7 +8736,7 @@
                       </a:endParaRPr>
                     </a:p>
                   </a:txBody>
-                  <a:tcPr marL="27432" marR="27432" marT="9144" marB="9144">
+                  <a:tcPr marL="27432" marR="27432" marT="9144" marB="9144" anchor="ctr">
                     <a:lnL>
                       <a:noFill/>
                     </a:lnL>
@@ -8763,7 +8771,7 @@
                     <a:p>
                       <a:pPr marL="0" algn="ctr" defTabSz="914400" rtl="0" eaLnBrk="1" latinLnBrk="0" hangingPunct="1"/>
                       <a:r>
-                        <a:rPr sz="800" b="0" kern="1200">
+                        <a:rPr sz="900" b="0" kern="1200">
                           <a:solidFill>
                             <a:srgbClr val="0A0A0A"/>
                           </a:solidFill>
@@ -8775,7 +8783,7 @@
                       </a:r>
                     </a:p>
                   </a:txBody>
-                  <a:tcPr marL="27432" marR="27432" marT="9144" marB="9144">
+                  <a:tcPr marL="27432" marR="27432" marT="9144" marB="9144" anchor="ctr">
                     <a:lnL>
                       <a:noFill/>
                     </a:lnL>
@@ -8810,7 +8818,7 @@
                     <a:p>
                       <a:pPr marL="0" algn="ctr" defTabSz="914400" rtl="0" eaLnBrk="1" latinLnBrk="0" hangingPunct="1"/>
                       <a:r>
-                        <a:rPr sz="800" b="0" kern="1200" dirty="0" err="1">
+                        <a:rPr sz="900" b="0" kern="1200" dirty="0" err="1">
                           <a:solidFill>
                             <a:srgbClr val="0A0A0A"/>
                           </a:solidFill>
@@ -8821,7 +8829,7 @@
                         <a:t>工资文本模式</a:t>
                       </a:r>
                       <a:r>
-                        <a:rPr sz="800" b="0" kern="1200" dirty="0">
+                        <a:rPr sz="900" b="0" kern="1200" dirty="0">
                           <a:solidFill>
                             <a:srgbClr val="0A0A0A"/>
                           </a:solidFill>
@@ -8832,7 +8840,7 @@
                         <a:t> + </a:t>
                       </a:r>
                       <a:r>
-                        <a:rPr sz="800" b="0" kern="1200" dirty="0" err="1">
+                        <a:rPr sz="900" b="0" kern="1200" dirty="0" err="1">
                           <a:solidFill>
                             <a:srgbClr val="0A0A0A"/>
                           </a:solidFill>
@@ -8843,7 +8851,7 @@
                         <a:t>双周周期</a:t>
                       </a:r>
                       <a:r>
-                        <a:rPr sz="800" b="0" kern="1200" dirty="0">
+                        <a:rPr sz="900" b="0" kern="1200" dirty="0">
                           <a:solidFill>
                             <a:srgbClr val="0A0A0A"/>
                           </a:solidFill>
@@ -8854,7 +8862,7 @@
                         <a:t> + </a:t>
                       </a:r>
                       <a:r>
-                        <a:rPr sz="800" b="0" kern="1200" dirty="0" err="1">
+                        <a:rPr sz="900" b="0" kern="1200" dirty="0" err="1">
                           <a:solidFill>
                             <a:srgbClr val="0A0A0A"/>
                           </a:solidFill>
@@ -8864,7 +8872,7 @@
                         </a:rPr>
                         <a:t>稳定金额</a:t>
                       </a:r>
-                      <a:endParaRPr sz="800" b="0" kern="1200" dirty="0">
+                      <a:endParaRPr sz="900" b="0" kern="1200" dirty="0">
                         <a:solidFill>
                           <a:srgbClr val="0A0A0A"/>
                         </a:solidFill>
@@ -8874,7 +8882,7 @@
                       </a:endParaRPr>
                     </a:p>
                   </a:txBody>
-                  <a:tcPr marL="27432" marR="27432" marT="9144" marB="9144">
+                  <a:tcPr marL="27432" marR="27432" marT="9144" marB="9144" anchor="ctr">
                     <a:lnL>
                       <a:noFill/>
                     </a:lnL>
@@ -9309,7 +9317,7 @@
           <a:p>
             <a:pPr algn="l"/>
             <a:r>
-              <a:rPr lang="zh-CN" sz="1050" b="1">
+              <a:rPr lang="zh-CN" sz="1050" b="1" dirty="0">
                 <a:solidFill>
                   <a:srgbClr val="0A0A0A"/>
                 </a:solidFill>
@@ -10603,7 +10611,7 @@
                 <a:buNone/>
               </a:pPr>
               <a:r>
-                <a:rPr lang="en-US" sz="1000" b="1" dirty="0">
+                <a:rPr lang="en-US" sz="1100" b="1" dirty="0">
                   <a:solidFill>
                     <a:srgbClr val="183F73"/>
                   </a:solidFill>
@@ -10613,7 +10621,7 @@
                 </a:rPr>
                 <a:t>还款计划</a:t>
               </a:r>
-              <a:endParaRPr lang="en-US" sz="1000" dirty="0">
+              <a:endParaRPr lang="en-US" sz="1100" dirty="0">
                 <a:latin typeface="微软雅黑" panose="020B0503020204020204" pitchFamily="34" charset="-122"/>
                 <a:ea typeface="微软雅黑" panose="020B0503020204020204" pitchFamily="34" charset="-122"/>
               </a:endParaRPr>
@@ -10682,7 +10690,7 @@
                 <a:buNone/>
               </a:pPr>
               <a:r>
-                <a:rPr lang="en-US" sz="1000" b="1" dirty="0">
+                <a:rPr lang="en-US" sz="1100" b="1" dirty="0">
                   <a:solidFill>
                     <a:srgbClr val="183F73"/>
                   </a:solidFill>
@@ -10692,7 +10700,7 @@
                 </a:rPr>
                 <a:t>本金与定价</a:t>
               </a:r>
-              <a:endParaRPr lang="en-US" sz="1000" dirty="0">
+              <a:endParaRPr lang="en-US" sz="1100" dirty="0">
                 <a:latin typeface="微软雅黑" panose="020B0503020204020204" pitchFamily="34" charset="-122"/>
                 <a:ea typeface="微软雅黑" panose="020B0503020204020204" pitchFamily="34" charset="-122"/>
               </a:endParaRPr>
@@ -10761,7 +10769,7 @@
                 <a:buNone/>
               </a:pPr>
               <a:r>
-                <a:rPr lang="en-US" sz="1000" b="1" dirty="0">
+                <a:rPr lang="en-US" sz="1100" b="1" dirty="0">
                   <a:solidFill>
                     <a:srgbClr val="183F73"/>
                   </a:solidFill>
@@ -10771,7 +10779,7 @@
                 </a:rPr>
                 <a:t>本笔履约</a:t>
               </a:r>
-              <a:endParaRPr lang="en-US" sz="1000" dirty="0">
+              <a:endParaRPr lang="en-US" sz="1100" dirty="0">
                 <a:latin typeface="微软雅黑" panose="020B0503020204020204" pitchFamily="34" charset="-122"/>
                 <a:ea typeface="微软雅黑" panose="020B0503020204020204" pitchFamily="34" charset="-122"/>
               </a:endParaRPr>
@@ -11393,7 +11401,7 @@
         </p:nvSpPr>
         <p:spPr>
           <a:xfrm>
-            <a:off x="6364985" y="4117772"/>
+            <a:off x="6424253" y="4117772"/>
             <a:ext cx="731520" cy="164592"/>
           </a:xfrm>
           <a:prstGeom prst="rect">
@@ -11443,7 +11451,7 @@
         </p:nvSpPr>
         <p:spPr>
           <a:xfrm>
-            <a:off x="7096505" y="4117772"/>
+            <a:off x="7155773" y="4117772"/>
             <a:ext cx="768096" cy="164592"/>
           </a:xfrm>
           <a:prstGeom prst="rect">
@@ -11493,7 +11501,7 @@
         </p:nvSpPr>
         <p:spPr>
           <a:xfrm>
-            <a:off x="6364985" y="4405808"/>
+            <a:off x="6424253" y="4405808"/>
             <a:ext cx="731520" cy="164592"/>
           </a:xfrm>
           <a:prstGeom prst="rect">
@@ -11543,7 +11551,7 @@
         </p:nvSpPr>
         <p:spPr>
           <a:xfrm>
-            <a:off x="7096505" y="4405808"/>
+            <a:off x="7155773" y="4405808"/>
             <a:ext cx="768096" cy="164592"/>
           </a:xfrm>
           <a:prstGeom prst="rect">
@@ -11593,7 +11601,7 @@
         </p:nvSpPr>
         <p:spPr>
           <a:xfrm>
-            <a:off x="6364985" y="4693844"/>
+            <a:off x="6424253" y="4693844"/>
             <a:ext cx="731520" cy="164592"/>
           </a:xfrm>
           <a:prstGeom prst="rect">
@@ -11643,7 +11651,7 @@
         </p:nvSpPr>
         <p:spPr>
           <a:xfrm>
-            <a:off x="7096505" y="4693844"/>
+            <a:off x="7155773" y="4693844"/>
             <a:ext cx="768096" cy="164592"/>
           </a:xfrm>
           <a:prstGeom prst="rect">
@@ -11693,7 +11701,7 @@
         </p:nvSpPr>
         <p:spPr>
           <a:xfrm>
-            <a:off x="6364985" y="4981880"/>
+            <a:off x="6424253" y="4981880"/>
             <a:ext cx="731520" cy="164592"/>
           </a:xfrm>
           <a:prstGeom prst="rect">
@@ -11743,7 +11751,7 @@
         </p:nvSpPr>
         <p:spPr>
           <a:xfrm>
-            <a:off x="7096505" y="4981880"/>
+            <a:off x="7155773" y="4981880"/>
             <a:ext cx="768096" cy="164592"/>
           </a:xfrm>
           <a:prstGeom prst="rect">
@@ -11793,7 +11801,7 @@
         </p:nvSpPr>
         <p:spPr>
           <a:xfrm>
-            <a:off x="6364985" y="5269916"/>
+            <a:off x="6424253" y="5269916"/>
             <a:ext cx="731520" cy="164592"/>
           </a:xfrm>
           <a:prstGeom prst="rect">
@@ -11843,7 +11851,7 @@
         </p:nvSpPr>
         <p:spPr>
           <a:xfrm>
-            <a:off x="7087497" y="5468707"/>
+            <a:off x="7146765" y="5468707"/>
             <a:ext cx="768096" cy="164592"/>
           </a:xfrm>
           <a:prstGeom prst="rect">
@@ -11893,7 +11901,7 @@
         </p:nvSpPr>
         <p:spPr>
           <a:xfrm>
-            <a:off x="8175497" y="4117772"/>
+            <a:off x="8234765" y="4117772"/>
             <a:ext cx="890524" cy="164592"/>
           </a:xfrm>
           <a:prstGeom prst="rect">
@@ -11943,7 +11951,7 @@
         </p:nvSpPr>
         <p:spPr>
           <a:xfrm>
-            <a:off x="9141967" y="4117772"/>
+            <a:off x="9201235" y="4117772"/>
             <a:ext cx="768096" cy="164592"/>
           </a:xfrm>
           <a:prstGeom prst="rect">
@@ -11993,7 +12001,7 @@
         </p:nvSpPr>
         <p:spPr>
           <a:xfrm>
-            <a:off x="8175497" y="4405808"/>
+            <a:off x="8234765" y="4405808"/>
             <a:ext cx="731520" cy="164592"/>
           </a:xfrm>
           <a:prstGeom prst="rect">
@@ -12043,7 +12051,7 @@
         </p:nvSpPr>
         <p:spPr>
           <a:xfrm>
-            <a:off x="9141967" y="4405808"/>
+            <a:off x="9201235" y="4405808"/>
             <a:ext cx="768096" cy="164592"/>
           </a:xfrm>
           <a:prstGeom prst="rect">
@@ -12093,7 +12101,7 @@
         </p:nvSpPr>
         <p:spPr>
           <a:xfrm>
-            <a:off x="8175497" y="4693844"/>
+            <a:off x="8234765" y="4693844"/>
             <a:ext cx="731520" cy="164592"/>
           </a:xfrm>
           <a:prstGeom prst="rect">
@@ -12143,7 +12151,7 @@
         </p:nvSpPr>
         <p:spPr>
           <a:xfrm>
-            <a:off x="9141967" y="4693844"/>
+            <a:off x="9201235" y="4693844"/>
             <a:ext cx="768096" cy="164592"/>
           </a:xfrm>
           <a:prstGeom prst="rect">
@@ -12193,7 +12201,7 @@
         </p:nvSpPr>
         <p:spPr>
           <a:xfrm>
-            <a:off x="8175497" y="4981880"/>
+            <a:off x="8234765" y="4981880"/>
             <a:ext cx="731520" cy="164592"/>
           </a:xfrm>
           <a:prstGeom prst="rect">
@@ -12243,7 +12251,7 @@
         </p:nvSpPr>
         <p:spPr>
           <a:xfrm>
-            <a:off x="9141967" y="4981880"/>
+            <a:off x="9201235" y="4981880"/>
             <a:ext cx="768096" cy="164592"/>
           </a:xfrm>
           <a:prstGeom prst="rect">
@@ -12293,7 +12301,7 @@
         </p:nvSpPr>
         <p:spPr>
           <a:xfrm>
-            <a:off x="8175497" y="5269916"/>
+            <a:off x="8234765" y="5269916"/>
             <a:ext cx="731520" cy="164592"/>
           </a:xfrm>
           <a:prstGeom prst="rect">
@@ -12343,7 +12351,7 @@
         </p:nvSpPr>
         <p:spPr>
           <a:xfrm>
-            <a:off x="9141967" y="5269916"/>
+            <a:off x="9201235" y="5269916"/>
             <a:ext cx="768096" cy="164592"/>
           </a:xfrm>
           <a:prstGeom prst="rect">
@@ -12393,7 +12401,7 @@
         </p:nvGrpSpPr>
         <p:grpSpPr>
           <a:xfrm>
-            <a:off x="6291833" y="3744138"/>
+            <a:off x="6351101" y="3744138"/>
             <a:ext cx="5605272" cy="256032"/>
             <a:chOff x="6283385" y="3874883"/>
             <a:chExt cx="5605272" cy="256032"/>
@@ -12461,7 +12469,7 @@
                 <a:buNone/>
               </a:pPr>
               <a:r>
-                <a:rPr lang="en-US" sz="1000" b="1" dirty="0">
+                <a:rPr lang="en-US" sz="1100" b="1" dirty="0">
                   <a:solidFill>
                     <a:srgbClr val="183F73"/>
                   </a:solidFill>
@@ -12471,7 +12479,7 @@
                 </a:rPr>
                 <a:t>负债敞口与结构</a:t>
               </a:r>
-              <a:endParaRPr lang="en-US" sz="1000" dirty="0">
+              <a:endParaRPr lang="en-US" sz="1100" dirty="0">
                 <a:latin typeface="微软雅黑" panose="020B0503020204020204" pitchFamily="34" charset="-122"/>
                 <a:ea typeface="微软雅黑" panose="020B0503020204020204" pitchFamily="34" charset="-122"/>
               </a:endParaRPr>
@@ -12540,7 +12548,7 @@
                 <a:buNone/>
               </a:pPr>
               <a:r>
-                <a:rPr lang="en-US" sz="1000" b="1" dirty="0">
+                <a:rPr lang="en-US" sz="1100" b="1" dirty="0">
                   <a:solidFill>
                     <a:srgbClr val="183F73"/>
                   </a:solidFill>
@@ -12550,7 +12558,7 @@
                 </a:rPr>
                 <a:t>近期借贷活跃度</a:t>
               </a:r>
-              <a:endParaRPr lang="en-US" sz="1000" dirty="0">
+              <a:endParaRPr lang="en-US" sz="1100" dirty="0">
                 <a:latin typeface="微软雅黑" panose="020B0503020204020204" pitchFamily="34" charset="-122"/>
                 <a:ea typeface="微软雅黑" panose="020B0503020204020204" pitchFamily="34" charset="-122"/>
               </a:endParaRPr>
@@ -12619,7 +12627,7 @@
                 <a:buNone/>
               </a:pPr>
               <a:r>
-                <a:rPr lang="en-US" sz="1000" b="1" dirty="0">
+                <a:rPr lang="en-US" sz="1100" b="1" dirty="0">
                   <a:solidFill>
                     <a:srgbClr val="183F73"/>
                   </a:solidFill>
@@ -12629,7 +12637,7 @@
                 </a:rPr>
                 <a:t>整体偿债稳定性</a:t>
               </a:r>
-              <a:endParaRPr lang="en-US" sz="1000" dirty="0">
+              <a:endParaRPr lang="en-US" sz="1100" dirty="0">
                 <a:latin typeface="微软雅黑" panose="020B0503020204020204" pitchFamily="34" charset="-122"/>
                 <a:ea typeface="微软雅黑" panose="020B0503020204020204" pitchFamily="34" charset="-122"/>
               </a:endParaRPr>
@@ -12651,7 +12659,7 @@
         </p:nvSpPr>
         <p:spPr>
           <a:xfrm>
-            <a:off x="9986009" y="4117772"/>
+            <a:off x="10045277" y="4117772"/>
             <a:ext cx="731520" cy="164592"/>
           </a:xfrm>
           <a:prstGeom prst="rect">
@@ -12701,7 +12709,7 @@
         </p:nvSpPr>
         <p:spPr>
           <a:xfrm>
-            <a:off x="11077381" y="4082147"/>
+            <a:off x="11136649" y="4082147"/>
             <a:ext cx="1088136" cy="164592"/>
           </a:xfrm>
           <a:prstGeom prst="rect">
@@ -12751,7 +12759,7 @@
         </p:nvSpPr>
         <p:spPr>
           <a:xfrm>
-            <a:off x="9986009" y="4405808"/>
+            <a:off x="10045277" y="4405808"/>
             <a:ext cx="731520" cy="164592"/>
           </a:xfrm>
           <a:prstGeom prst="rect">
@@ -12801,7 +12809,7 @@
         </p:nvSpPr>
         <p:spPr>
           <a:xfrm>
-            <a:off x="11077381" y="4370183"/>
+            <a:off x="11136649" y="4370183"/>
             <a:ext cx="1088136" cy="164592"/>
           </a:xfrm>
           <a:prstGeom prst="rect">
@@ -12851,7 +12859,7 @@
         </p:nvSpPr>
         <p:spPr>
           <a:xfrm>
-            <a:off x="9986009" y="4693844"/>
+            <a:off x="10045277" y="4693844"/>
             <a:ext cx="731520" cy="164592"/>
           </a:xfrm>
           <a:prstGeom prst="rect">
@@ -12901,7 +12909,7 @@
         </p:nvSpPr>
         <p:spPr>
           <a:xfrm>
-            <a:off x="11077381" y="4658219"/>
+            <a:off x="11136649" y="4658219"/>
             <a:ext cx="1088136" cy="164592"/>
           </a:xfrm>
           <a:prstGeom prst="rect">
@@ -12951,7 +12959,7 @@
         </p:nvSpPr>
         <p:spPr>
           <a:xfrm>
-            <a:off x="9986009" y="4981880"/>
+            <a:off x="10045277" y="4981880"/>
             <a:ext cx="731520" cy="164592"/>
           </a:xfrm>
           <a:prstGeom prst="rect">
@@ -13001,7 +13009,7 @@
         </p:nvSpPr>
         <p:spPr>
           <a:xfrm>
-            <a:off x="11077381" y="4946255"/>
+            <a:off x="11136649" y="4946255"/>
             <a:ext cx="1088136" cy="164592"/>
           </a:xfrm>
           <a:prstGeom prst="rect">
@@ -13051,7 +13059,7 @@
         </p:nvSpPr>
         <p:spPr>
           <a:xfrm>
-            <a:off x="9986009" y="5269916"/>
+            <a:off x="10045277" y="5269916"/>
             <a:ext cx="731520" cy="164592"/>
           </a:xfrm>
           <a:prstGeom prst="rect">
@@ -13101,7 +13109,7 @@
         </p:nvSpPr>
         <p:spPr>
           <a:xfrm>
-            <a:off x="11077381" y="5234291"/>
+            <a:off x="11136649" y="5234291"/>
             <a:ext cx="1088136" cy="164592"/>
           </a:xfrm>
           <a:prstGeom prst="rect">
@@ -13151,7 +13159,7 @@
         </p:nvSpPr>
         <p:spPr>
           <a:xfrm>
-            <a:off x="9986009" y="5557952"/>
+            <a:off x="10045277" y="5557952"/>
             <a:ext cx="731520" cy="164592"/>
           </a:xfrm>
           <a:prstGeom prst="rect">
@@ -13201,7 +13209,7 @@
         </p:nvSpPr>
         <p:spPr>
           <a:xfrm>
-            <a:off x="11077381" y="5522327"/>
+            <a:off x="11136649" y="5522327"/>
             <a:ext cx="1088136" cy="164592"/>
           </a:xfrm>
           <a:prstGeom prst="rect">
@@ -13251,7 +13259,7 @@
         </p:nvSpPr>
         <p:spPr>
           <a:xfrm>
-            <a:off x="9986008" y="5845988"/>
+            <a:off x="10045276" y="5845988"/>
             <a:ext cx="963489" cy="164592"/>
           </a:xfrm>
           <a:prstGeom prst="rect">
@@ -13301,7 +13309,7 @@
         </p:nvSpPr>
         <p:spPr>
           <a:xfrm>
-            <a:off x="11077381" y="5810363"/>
+            <a:off x="11136649" y="5810363"/>
             <a:ext cx="1088136" cy="164592"/>
           </a:xfrm>
           <a:prstGeom prst="rect">
@@ -13353,12 +13361,19 @@
         </p:nvCxnSpPr>
         <p:spPr>
           <a:xfrm>
-            <a:off x="6096000" y="3535680"/>
+            <a:off x="6062132" y="3535680"/>
             <a:ext cx="0" cy="2496022"/>
           </a:xfrm>
           <a:prstGeom prst="line">
             <a:avLst/>
           </a:prstGeom>
+          <a:ln>
+            <a:solidFill>
+              <a:schemeClr val="bg1">
+                <a:lumMod val="50000"/>
+              </a:schemeClr>
+            </a:solidFill>
+          </a:ln>
         </p:spPr>
         <p:style>
           <a:lnRef idx="1">
@@ -13375,6 +13390,55 @@
           </a:fontRef>
         </p:style>
       </p:cxnSp>
+      <p:sp>
+        <p:nvSpPr>
+          <p:cNvPr id="116" name="Fa-title">
+            <a:extLst>
+              <a:ext uri="{FF2B5EF4-FFF2-40B4-BE49-F238E27FC236}">
+                <a16:creationId xmlns:a16="http://schemas.microsoft.com/office/drawing/2014/main" id="{EAF61F9D-CE56-48FE-ADEC-1CA35490E994}"/>
+              </a:ext>
+            </a:extLst>
+          </p:cNvPr>
+          <p:cNvSpPr txBox="1"/>
+          <p:nvPr/>
+        </p:nvSpPr>
+        <p:spPr>
+          <a:xfrm>
+            <a:off x="8239041" y="1209268"/>
+            <a:ext cx="697738" cy="161583"/>
+          </a:xfrm>
+          <a:prstGeom prst="rect">
+            <a:avLst/>
+          </a:prstGeom>
+          <a:noFill/>
+        </p:spPr>
+        <p:txBody>
+          <a:bodyPr wrap="square" lIns="0" tIns="0" rIns="0" bIns="0">
+            <a:spAutoFit/>
+          </a:bodyPr>
+          <a:lstStyle/>
+          <a:p>
+            <a:pPr algn="l"/>
+            <a:r>
+              <a:rPr lang="zh-CN" altLang="en-US" sz="1050" b="1" dirty="0">
+                <a:solidFill>
+                  <a:srgbClr val="D6A000"/>
+                </a:solidFill>
+                <a:latin typeface="微软雅黑"/>
+                <a:ea typeface="微软雅黑"/>
+              </a:rPr>
+              <a:t>加工字段</a:t>
+            </a:r>
+            <a:endParaRPr lang="zh-CN" sz="1050" b="1" dirty="0">
+              <a:solidFill>
+                <a:srgbClr val="D6A000"/>
+              </a:solidFill>
+              <a:latin typeface="微软雅黑"/>
+              <a:ea typeface="微软雅黑"/>
+            </a:endParaRPr>
+          </a:p>
+        </p:txBody>
+      </p:sp>
     </p:spTree>
     <p:extLst>
       <p:ext uri="{BB962C8B-B14F-4D97-AF65-F5344CB8AC3E}">
@@ -16545,28 +16609,28 @@
           <p:nvPr>
             <p:extLst>
               <p:ext uri="{D42A27DB-BD31-4B8C-83A1-F6EECF244321}">
-                <p14:modId xmlns:p14="http://schemas.microsoft.com/office/powerpoint/2010/main" val="1119405439"/>
+                <p14:modId xmlns:p14="http://schemas.microsoft.com/office/powerpoint/2010/main" val="142959786"/>
               </p:ext>
             </p:extLst>
           </p:nvPr>
         </p:nvGraphicFramePr>
         <p:xfrm>
-          <a:off x="6311255" y="3538728"/>
-          <a:ext cx="5540236" cy="868680"/>
+          <a:off x="6453510" y="3538727"/>
+          <a:ext cx="5222483" cy="1156775"/>
         </p:xfrm>
         <a:graphic>
           <a:graphicData uri="http://schemas.openxmlformats.org/drawingml/2006/table">
             <a:tbl>
               <a:tblPr/>
               <a:tblGrid>
-                <a:gridCol w="923372">
+                <a:gridCol w="870413">
                   <a:extLst>
                     <a:ext uri="{9D8B030D-6E8A-4147-A177-3AD203B41FA5}">
                       <a16:colId xmlns:a16="http://schemas.microsoft.com/office/drawing/2014/main" val="20000"/>
                     </a:ext>
                   </a:extLst>
                 </a:gridCol>
-                <a:gridCol w="4616864">
+                <a:gridCol w="4352070">
                   <a:extLst>
                     <a:ext uri="{9D8B030D-6E8A-4147-A177-3AD203B41FA5}">
                       <a16:colId xmlns:a16="http://schemas.microsoft.com/office/drawing/2014/main" val="20001"/>
@@ -16574,15 +16638,15 @@
                   </a:extLst>
                 </a:gridCol>
               </a:tblGrid>
-              <a:tr h="173736">
+              <a:tr h="231355">
                 <a:tc>
                   <a:txBody>
                     <a:bodyPr/>
                     <a:lstStyle/>
                     <a:p>
-                      <a:pPr algn="l"/>
+                      <a:pPr algn="ctr"/>
                       <a:r>
-                        <a:rPr sz="800" b="1">
+                        <a:rPr sz="900" b="1" dirty="0" err="1">
                           <a:solidFill>
                             <a:srgbClr val="0A0A0A"/>
                           </a:solidFill>
@@ -16591,6 +16655,13 @@
                         </a:rPr>
                         <a:t>定位原因</a:t>
                       </a:r>
+                      <a:endParaRPr sz="900" b="1" dirty="0">
+                        <a:solidFill>
+                          <a:srgbClr val="0A0A0A"/>
+                        </a:solidFill>
+                        <a:latin typeface="微软雅黑"/>
+                        <a:ea typeface="微软雅黑"/>
+                      </a:endParaRPr>
                     </a:p>
                   </a:txBody>
                   <a:tcPr marL="27432" marR="27432" marT="9144" marB="9144">
@@ -16615,9 +16686,9 @@
                     <a:bodyPr/>
                     <a:lstStyle/>
                     <a:p>
-                      <a:pPr algn="l"/>
+                      <a:pPr algn="ctr"/>
                       <a:r>
-                        <a:rPr sz="800" b="1">
+                        <a:rPr sz="900" b="1" dirty="0" err="1">
                           <a:solidFill>
                             <a:srgbClr val="0A0A0A"/>
                           </a:solidFill>
@@ -16626,6 +16697,13 @@
                         </a:rPr>
                         <a:t>示例场景</a:t>
                       </a:r>
+                      <a:endParaRPr sz="900" b="1" dirty="0">
+                        <a:solidFill>
+                          <a:srgbClr val="0A0A0A"/>
+                        </a:solidFill>
+                        <a:latin typeface="微软雅黑"/>
+                        <a:ea typeface="微软雅黑"/>
+                      </a:endParaRPr>
                     </a:p>
                   </a:txBody>
                   <a:tcPr marL="27432" marR="27432" marT="9144" marB="9144">
@@ -16651,15 +16729,15 @@
                   </a:ext>
                 </a:extLst>
               </a:tr>
-              <a:tr h="173736">
+              <a:tr h="231355">
                 <a:tc>
                   <a:txBody>
                     <a:bodyPr/>
                     <a:lstStyle/>
                     <a:p>
-                      <a:pPr algn="l"/>
+                      <a:pPr algn="ctr"/>
                       <a:r>
-                        <a:rPr sz="800" b="1">
+                        <a:rPr sz="900" b="1" dirty="0" err="1">
                           <a:solidFill>
                             <a:srgbClr val="3D3C3A"/>
                           </a:solidFill>
@@ -16668,6 +16746,13 @@
                         </a:rPr>
                         <a:t>引擎规则问题</a:t>
                       </a:r>
+                      <a:endParaRPr sz="900" b="1" dirty="0">
+                        <a:solidFill>
+                          <a:srgbClr val="3D3C3A"/>
+                        </a:solidFill>
+                        <a:latin typeface="微软雅黑"/>
+                        <a:ea typeface="微软雅黑"/>
+                      </a:endParaRPr>
                     </a:p>
                   </a:txBody>
                   <a:tcPr marL="27432" marR="27432" marT="9144" marB="9144">
@@ -16694,9 +16779,9 @@
                     <a:bodyPr/>
                     <a:lstStyle/>
                     <a:p>
-                      <a:pPr algn="l"/>
+                      <a:pPr algn="ctr"/>
                       <a:r>
-                        <a:rPr sz="800" b="0">
+                        <a:rPr sz="900" b="0" dirty="0" err="1">
                           <a:solidFill>
                             <a:srgbClr val="3D3C3A"/>
                           </a:solidFill>
@@ -16705,6 +16790,13 @@
                         </a:rPr>
                         <a:t>房租、保险等被内部转账规则误排</a:t>
                       </a:r>
+                      <a:endParaRPr sz="900" b="0" dirty="0">
+                        <a:solidFill>
+                          <a:srgbClr val="3D3C3A"/>
+                        </a:solidFill>
+                        <a:latin typeface="微软雅黑"/>
+                        <a:ea typeface="微软雅黑"/>
+                      </a:endParaRPr>
                     </a:p>
                   </a:txBody>
                   <a:tcPr marL="27432" marR="27432" marT="9144" marB="9144">
@@ -16732,15 +16824,15 @@
                   </a:ext>
                 </a:extLst>
               </a:tr>
-              <a:tr h="173736">
+              <a:tr h="231355">
                 <a:tc>
                   <a:txBody>
                     <a:bodyPr/>
                     <a:lstStyle/>
                     <a:p>
-                      <a:pPr algn="l"/>
+                      <a:pPr algn="ctr"/>
                       <a:r>
-                        <a:rPr sz="800" b="1">
+                        <a:rPr sz="900" b="1">
                           <a:solidFill>
                             <a:srgbClr val="3D3C3A"/>
                           </a:solidFill>
@@ -16779,9 +16871,9 @@
                     <a:bodyPr/>
                     <a:lstStyle/>
                     <a:p>
-                      <a:pPr algn="l"/>
+                      <a:pPr algn="ctr"/>
                       <a:r>
-                        <a:rPr sz="800" b="0" dirty="0" err="1">
+                        <a:rPr sz="900" b="0" dirty="0" err="1">
                           <a:solidFill>
                             <a:srgbClr val="3D3C3A"/>
                           </a:solidFill>
@@ -16790,7 +16882,7 @@
                         </a:rPr>
                         <a:t>新 BNPL 平台缺少商户及关键词</a:t>
                       </a:r>
-                      <a:endParaRPr sz="700" b="0" dirty="0">
+                      <a:endParaRPr sz="900" b="0" dirty="0">
                         <a:solidFill>
                           <a:srgbClr val="3D3C3A"/>
                         </a:solidFill>
@@ -16828,15 +16920,15 @@
                   </a:ext>
                 </a:extLst>
               </a:tr>
-              <a:tr h="173736">
+              <a:tr h="231355">
                 <a:tc>
                   <a:txBody>
                     <a:bodyPr/>
                     <a:lstStyle/>
                     <a:p>
-                      <a:pPr algn="l"/>
+                      <a:pPr algn="ctr"/>
                       <a:r>
-                        <a:rPr sz="800" b="1">
+                        <a:rPr sz="900" b="1">
                           <a:solidFill>
                             <a:srgbClr val="3D3C3A"/>
                           </a:solidFill>
@@ -16875,9 +16967,9 @@
                     <a:bodyPr/>
                     <a:lstStyle/>
                     <a:p>
-                      <a:pPr algn="l"/>
+                      <a:pPr algn="ctr"/>
                       <a:r>
-                        <a:rPr sz="800" b="0">
+                        <a:rPr sz="900" b="0" dirty="0" err="1">
                           <a:solidFill>
                             <a:srgbClr val="3D3C3A"/>
                           </a:solidFill>
@@ -16886,55 +16978,7 @@
                         </a:rPr>
                         <a:t>交易描述截断、方向矛盾</a:t>
                       </a:r>
-                    </a:p>
-                  </a:txBody>
-                  <a:tcPr marL="27432" marR="27432" marT="9144" marB="9144">
-                    <a:lnL>
-                      <a:noFill/>
-                    </a:lnL>
-                    <a:lnR>
-                      <a:noFill/>
-                    </a:lnR>
-                    <a:lnT w="9525" cap="flat" cmpd="sng" algn="ctr">
-                      <a:solidFill>
-                        <a:srgbClr val="D6D6D6"/>
-                      </a:solidFill>
-                      <a:prstDash val="solid"/>
-                      <a:round/>
-                      <a:headEnd type="none" w="med" len="med"/>
-                      <a:tailEnd type="none" w="med" len="med"/>
-                    </a:lnT>
-                    <a:lnB w="9525" cap="flat">
-                      <a:solidFill>
-                        <a:srgbClr val="D6D6D6"/>
-                      </a:solidFill>
-                    </a:lnB>
-                  </a:tcPr>
-                </a:tc>
-                <a:extLst>
-                  <a:ext uri="{0D108BD9-81ED-4DB2-BD59-A6C34878D82A}">
-                    <a16:rowId xmlns:a16="http://schemas.microsoft.com/office/drawing/2014/main" val="10003"/>
-                  </a:ext>
-                </a:extLst>
-              </a:tr>
-              <a:tr h="173736">
-                <a:tc>
-                  <a:txBody>
-                    <a:bodyPr/>
-                    <a:lstStyle/>
-                    <a:p>
-                      <a:pPr algn="l"/>
-                      <a:r>
-                        <a:rPr sz="800" b="1" dirty="0" err="1">
-                          <a:solidFill>
-                            <a:srgbClr val="3D3C3A"/>
-                          </a:solidFill>
-                          <a:latin typeface="微软雅黑"/>
-                          <a:ea typeface="微软雅黑"/>
-                        </a:rPr>
-                        <a:t>多引擎冲突</a:t>
-                      </a:r>
-                      <a:endParaRPr sz="800" b="1" dirty="0">
+                      <a:endParaRPr sz="900" b="0" dirty="0">
                         <a:solidFill>
                           <a:srgbClr val="3D3C3A"/>
                         </a:solidFill>
@@ -16966,14 +17010,69 @@
                     </a:lnB>
                   </a:tcPr>
                 </a:tc>
+                <a:extLst>
+                  <a:ext uri="{0D108BD9-81ED-4DB2-BD59-A6C34878D82A}">
+                    <a16:rowId xmlns:a16="http://schemas.microsoft.com/office/drawing/2014/main" val="10003"/>
+                  </a:ext>
+                </a:extLst>
+              </a:tr>
+              <a:tr h="231355">
                 <a:tc>
                   <a:txBody>
                     <a:bodyPr/>
                     <a:lstStyle/>
                     <a:p>
-                      <a:pPr algn="l"/>
+                      <a:pPr algn="ctr"/>
                       <a:r>
-                        <a:rPr sz="800" b="0" dirty="0" err="1">
+                        <a:rPr sz="900" b="1" dirty="0" err="1">
+                          <a:solidFill>
+                            <a:srgbClr val="3D3C3A"/>
+                          </a:solidFill>
+                          <a:latin typeface="微软雅黑"/>
+                          <a:ea typeface="微软雅黑"/>
+                        </a:rPr>
+                        <a:t>多引擎冲突</a:t>
+                      </a:r>
+                      <a:endParaRPr sz="900" b="1" dirty="0">
+                        <a:solidFill>
+                          <a:srgbClr val="3D3C3A"/>
+                        </a:solidFill>
+                        <a:latin typeface="微软雅黑"/>
+                        <a:ea typeface="微软雅黑"/>
+                      </a:endParaRPr>
+                    </a:p>
+                  </a:txBody>
+                  <a:tcPr marL="27432" marR="27432" marT="9144" marB="9144">
+                    <a:lnL>
+                      <a:noFill/>
+                    </a:lnL>
+                    <a:lnR>
+                      <a:noFill/>
+                    </a:lnR>
+                    <a:lnT w="9525" cap="flat" cmpd="sng" algn="ctr">
+                      <a:solidFill>
+                        <a:srgbClr val="D6D6D6"/>
+                      </a:solidFill>
+                      <a:prstDash val="solid"/>
+                      <a:round/>
+                      <a:headEnd type="none" w="med" len="med"/>
+                      <a:tailEnd type="none" w="med" len="med"/>
+                    </a:lnT>
+                    <a:lnB w="9525" cap="flat">
+                      <a:solidFill>
+                        <a:srgbClr val="D6D6D6"/>
+                      </a:solidFill>
+                    </a:lnB>
+                  </a:tcPr>
+                </a:tc>
+                <a:tc>
+                  <a:txBody>
+                    <a:bodyPr/>
+                    <a:lstStyle/>
+                    <a:p>
+                      <a:pPr algn="ctr"/>
+                      <a:r>
+                        <a:rPr sz="900" b="0" dirty="0" err="1">
                           <a:solidFill>
                             <a:srgbClr val="3D3C3A"/>
                           </a:solidFill>
@@ -16982,7 +17081,7 @@
                         </a:rPr>
                         <a:t>Transfer 与 Liability 同时命中</a:t>
                       </a:r>
-                      <a:endParaRPr sz="800" b="0" dirty="0">
+                      <a:endParaRPr sz="900" b="0" dirty="0">
                         <a:solidFill>
                           <a:srgbClr val="3D3C3A"/>
                         </a:solidFill>
@@ -17032,7 +17131,7 @@
         </p:nvSpPr>
         <p:spPr>
           <a:xfrm>
-            <a:off x="6309360" y="4572000"/>
+            <a:off x="6309360" y="4782312"/>
             <a:ext cx="5029200" cy="261610"/>
           </a:xfrm>
           <a:prstGeom prst="rect">
@@ -17076,42 +17175,42 @@
           <p:nvPr>
             <p:extLst>
               <p:ext uri="{D42A27DB-BD31-4B8C-83A1-F6EECF244321}">
-                <p14:modId xmlns:p14="http://schemas.microsoft.com/office/powerpoint/2010/main" val="667604934"/>
+                <p14:modId xmlns:p14="http://schemas.microsoft.com/office/powerpoint/2010/main" val="2328166925"/>
               </p:ext>
             </p:extLst>
           </p:nvPr>
         </p:nvGraphicFramePr>
         <p:xfrm>
-          <a:off x="6338689" y="4818888"/>
-          <a:ext cx="5540234" cy="694944"/>
+          <a:off x="6453510" y="5060925"/>
+          <a:ext cx="5222484" cy="1002784"/>
         </p:xfrm>
         <a:graphic>
           <a:graphicData uri="http://schemas.openxmlformats.org/drawingml/2006/table">
             <a:tbl>
               <a:tblPr/>
               <a:tblGrid>
-                <a:gridCol w="554023">
+                <a:gridCol w="522248">
                   <a:extLst>
                     <a:ext uri="{9D8B030D-6E8A-4147-A177-3AD203B41FA5}">
                       <a16:colId xmlns:a16="http://schemas.microsoft.com/office/drawing/2014/main" val="20000"/>
                     </a:ext>
                   </a:extLst>
                 </a:gridCol>
-                <a:gridCol w="1846745">
+                <a:gridCol w="1740828">
                   <a:extLst>
                     <a:ext uri="{9D8B030D-6E8A-4147-A177-3AD203B41FA5}">
                       <a16:colId xmlns:a16="http://schemas.microsoft.com/office/drawing/2014/main" val="20001"/>
                     </a:ext>
                   </a:extLst>
                 </a:gridCol>
-                <a:gridCol w="923372">
+                <a:gridCol w="870414">
                   <a:extLst>
                     <a:ext uri="{9D8B030D-6E8A-4147-A177-3AD203B41FA5}">
                       <a16:colId xmlns:a16="http://schemas.microsoft.com/office/drawing/2014/main" val="20002"/>
                     </a:ext>
                   </a:extLst>
                 </a:gridCol>
-                <a:gridCol w="2216094">
+                <a:gridCol w="2088994">
                   <a:extLst>
                     <a:ext uri="{9D8B030D-6E8A-4147-A177-3AD203B41FA5}">
                       <a16:colId xmlns:a16="http://schemas.microsoft.com/office/drawing/2014/main" val="20003"/>
@@ -17119,15 +17218,15 @@
                   </a:extLst>
                 </a:gridCol>
               </a:tblGrid>
-              <a:tr h="173736">
+              <a:tr h="250696">
                 <a:tc>
                   <a:txBody>
                     <a:bodyPr/>
                     <a:lstStyle/>
                     <a:p>
-                      <a:pPr algn="l"/>
+                      <a:pPr algn="ctr"/>
                       <a:r>
-                        <a:rPr sz="800" b="1">
+                        <a:rPr sz="900" b="1" dirty="0" err="1">
                           <a:solidFill>
                             <a:srgbClr val="0A0A0A"/>
                           </a:solidFill>
@@ -17136,6 +17235,13 @@
                         </a:rPr>
                         <a:t>优先级</a:t>
                       </a:r>
+                      <a:endParaRPr sz="900" b="1" dirty="0">
+                        <a:solidFill>
+                          <a:srgbClr val="0A0A0A"/>
+                        </a:solidFill>
+                        <a:latin typeface="微软雅黑"/>
+                        <a:ea typeface="微软雅黑"/>
+                      </a:endParaRPr>
                     </a:p>
                   </a:txBody>
                   <a:tcPr marL="27432" marR="27432" marT="9144" marB="9144">
@@ -17160,9 +17266,9 @@
                     <a:bodyPr/>
                     <a:lstStyle/>
                     <a:p>
-                      <a:pPr algn="l"/>
+                      <a:pPr algn="ctr"/>
                       <a:r>
-                        <a:rPr sz="800" b="1">
+                        <a:rPr sz="900" b="1" dirty="0" err="1">
                           <a:solidFill>
                             <a:srgbClr val="0A0A0A"/>
                           </a:solidFill>
@@ -17171,6 +17277,13 @@
                         </a:rPr>
                         <a:t>问题</a:t>
                       </a:r>
+                      <a:endParaRPr sz="900" b="1" dirty="0">
+                        <a:solidFill>
+                          <a:srgbClr val="0A0A0A"/>
+                        </a:solidFill>
+                        <a:latin typeface="微软雅黑"/>
+                        <a:ea typeface="微软雅黑"/>
+                      </a:endParaRPr>
                     </a:p>
                   </a:txBody>
                   <a:tcPr marL="27432" marR="27432" marT="9144" marB="9144">
@@ -17195,9 +17308,9 @@
                     <a:bodyPr/>
                     <a:lstStyle/>
                     <a:p>
-                      <a:pPr algn="l"/>
+                      <a:pPr algn="ctr"/>
                       <a:r>
-                        <a:rPr sz="800" b="1">
+                        <a:rPr sz="900" b="1">
                           <a:solidFill>
                             <a:srgbClr val="0A0A0A"/>
                           </a:solidFill>
@@ -17230,9 +17343,9 @@
                     <a:bodyPr/>
                     <a:lstStyle/>
                     <a:p>
-                      <a:pPr algn="l"/>
+                      <a:pPr algn="ctr"/>
                       <a:r>
-                        <a:rPr sz="800" b="1">
+                        <a:rPr sz="900" b="1">
                           <a:solidFill>
                             <a:srgbClr val="0A0A0A"/>
                           </a:solidFill>
@@ -17266,15 +17379,15 @@
                   </a:ext>
                 </a:extLst>
               </a:tr>
-              <a:tr h="173736">
+              <a:tr h="250696">
                 <a:tc>
                   <a:txBody>
                     <a:bodyPr/>
                     <a:lstStyle/>
                     <a:p>
-                      <a:pPr algn="l"/>
+                      <a:pPr algn="ctr"/>
                       <a:r>
-                        <a:rPr sz="800" b="1">
+                        <a:rPr sz="900" b="1">
                           <a:solidFill>
                             <a:srgbClr val="3D3C3A"/>
                           </a:solidFill>
@@ -17309,9 +17422,9 @@
                     <a:bodyPr/>
                     <a:lstStyle/>
                     <a:p>
-                      <a:pPr algn="l"/>
+                      <a:pPr algn="ctr"/>
                       <a:r>
-                        <a:rPr sz="800" b="0">
+                        <a:rPr sz="900" b="0" dirty="0" err="1">
                           <a:solidFill>
                             <a:srgbClr val="3D3C3A"/>
                           </a:solidFill>
@@ -17320,6 +17433,13 @@
                         </a:rPr>
                         <a:t>房租批量误判</a:t>
                       </a:r>
+                      <a:endParaRPr sz="900" b="0" dirty="0">
+                        <a:solidFill>
+                          <a:srgbClr val="3D3C3A"/>
+                        </a:solidFill>
+                        <a:latin typeface="微软雅黑"/>
+                        <a:ea typeface="微软雅黑"/>
+                      </a:endParaRPr>
                     </a:p>
                   </a:txBody>
                   <a:tcPr marL="27432" marR="27432" marT="9144" marB="9144">
@@ -17346,9 +17466,9 @@
                     <a:bodyPr/>
                     <a:lstStyle/>
                     <a:p>
-                      <a:pPr algn="l"/>
+                      <a:pPr algn="ctr"/>
                       <a:r>
-                        <a:rPr sz="800" b="0">
+                        <a:rPr sz="900" b="0">
                           <a:solidFill>
                             <a:srgbClr val="3D3C3A"/>
                           </a:solidFill>
@@ -17383,9 +17503,9 @@
                     <a:bodyPr/>
                     <a:lstStyle/>
                     <a:p>
-                      <a:pPr algn="l"/>
+                      <a:pPr algn="ctr"/>
                       <a:r>
-                        <a:rPr sz="800" b="0">
+                        <a:rPr sz="900" b="0">
                           <a:solidFill>
                             <a:srgbClr val="3D3C3A"/>
                           </a:solidFill>
@@ -17421,15 +17541,15 @@
                   </a:ext>
                 </a:extLst>
               </a:tr>
-              <a:tr h="173736">
+              <a:tr h="250696">
                 <a:tc>
                   <a:txBody>
                     <a:bodyPr/>
                     <a:lstStyle/>
                     <a:p>
-                      <a:pPr algn="l"/>
+                      <a:pPr algn="ctr"/>
                       <a:r>
-                        <a:rPr sz="800" b="1">
+                        <a:rPr sz="900" b="1">
                           <a:solidFill>
                             <a:srgbClr val="3D3C3A"/>
                           </a:solidFill>
@@ -17468,17 +17588,34 @@
                     <a:bodyPr/>
                     <a:lstStyle/>
                     <a:p>
-                      <a:pPr algn="l"/>
+                      <a:pPr algn="ctr"/>
                       <a:r>
-                        <a:rPr sz="800" b="0">
+                        <a:rPr sz="900" b="0" dirty="0">
                           <a:solidFill>
                             <a:srgbClr val="3D3C3A"/>
                           </a:solidFill>
                           <a:latin typeface="微软雅黑"/>
                           <a:ea typeface="微软雅黑"/>
                         </a:rPr>
-                        <a:t>新 BNPL 未识别</a:t>
+                        <a:t>新 BNPL </a:t>
                       </a:r>
+                      <a:r>
+                        <a:rPr sz="900" b="0" dirty="0" err="1">
+                          <a:solidFill>
+                            <a:srgbClr val="3D3C3A"/>
+                          </a:solidFill>
+                          <a:latin typeface="微软雅黑"/>
+                          <a:ea typeface="微软雅黑"/>
+                        </a:rPr>
+                        <a:t>未识别</a:t>
+                      </a:r>
+                      <a:endParaRPr sz="900" b="0" dirty="0">
+                        <a:solidFill>
+                          <a:srgbClr val="3D3C3A"/>
+                        </a:solidFill>
+                        <a:latin typeface="微软雅黑"/>
+                        <a:ea typeface="微软雅黑"/>
+                      </a:endParaRPr>
                     </a:p>
                   </a:txBody>
                   <a:tcPr marL="27432" marR="27432" marT="9144" marB="9144">
@@ -17509,9 +17646,9 @@
                     <a:bodyPr/>
                     <a:lstStyle/>
                     <a:p>
-                      <a:pPr algn="l"/>
+                      <a:pPr algn="ctr"/>
                       <a:r>
-                        <a:rPr sz="800" b="0">
+                        <a:rPr sz="900" b="0" dirty="0" err="1">
                           <a:solidFill>
                             <a:srgbClr val="3D3C3A"/>
                           </a:solidFill>
@@ -17520,6 +17657,13 @@
                         </a:rPr>
                         <a:t>知识库不足</a:t>
                       </a:r>
+                      <a:endParaRPr sz="900" b="0" dirty="0">
+                        <a:solidFill>
+                          <a:srgbClr val="3D3C3A"/>
+                        </a:solidFill>
+                        <a:latin typeface="微软雅黑"/>
+                        <a:ea typeface="微软雅黑"/>
+                      </a:endParaRPr>
                     </a:p>
                   </a:txBody>
                   <a:tcPr marL="27432" marR="27432" marT="9144" marB="9144">
@@ -17550,9 +17694,9 @@
                     <a:bodyPr/>
                     <a:lstStyle/>
                     <a:p>
-                      <a:pPr algn="l"/>
+                      <a:pPr algn="ctr"/>
                       <a:r>
-                        <a:rPr sz="800" b="0">
+                        <a:rPr sz="900" b="0" dirty="0" err="1">
                           <a:solidFill>
                             <a:srgbClr val="3D3C3A"/>
                           </a:solidFill>
@@ -17561,6 +17705,13 @@
                         </a:rPr>
                         <a:t>补充平台及关键词</a:t>
                       </a:r>
+                      <a:endParaRPr sz="900" b="0" dirty="0">
+                        <a:solidFill>
+                          <a:srgbClr val="3D3C3A"/>
+                        </a:solidFill>
+                        <a:latin typeface="微软雅黑"/>
+                        <a:ea typeface="微软雅黑"/>
+                      </a:endParaRPr>
                     </a:p>
                   </a:txBody>
                   <a:tcPr marL="27432" marR="27432" marT="9144" marB="9144">
@@ -17592,15 +17743,15 @@
                   </a:ext>
                 </a:extLst>
               </a:tr>
-              <a:tr h="173736">
+              <a:tr h="250696">
                 <a:tc>
                   <a:txBody>
                     <a:bodyPr/>
                     <a:lstStyle/>
                     <a:p>
-                      <a:pPr algn="l"/>
+                      <a:pPr algn="ctr"/>
                       <a:r>
-                        <a:rPr sz="800" b="1">
+                        <a:rPr sz="900" b="1">
                           <a:solidFill>
                             <a:srgbClr val="3D3C3A"/>
                           </a:solidFill>
@@ -17639,9 +17790,9 @@
                     <a:bodyPr/>
                     <a:lstStyle/>
                     <a:p>
-                      <a:pPr algn="l"/>
+                      <a:pPr algn="ctr"/>
                       <a:r>
-                        <a:rPr sz="800" b="0">
+                        <a:rPr sz="900" b="0" dirty="0" err="1">
                           <a:solidFill>
                             <a:srgbClr val="3D3C3A"/>
                           </a:solidFill>
@@ -17650,6 +17801,13 @@
                         </a:rPr>
                         <a:t>某商户占比上升</a:t>
                       </a:r>
+                      <a:endParaRPr sz="900" b="0" dirty="0">
+                        <a:solidFill>
+                          <a:srgbClr val="3D3C3A"/>
+                        </a:solidFill>
+                        <a:latin typeface="微软雅黑"/>
+                        <a:ea typeface="微软雅黑"/>
+                      </a:endParaRPr>
                     </a:p>
                   </a:txBody>
                   <a:tcPr marL="27432" marR="27432" marT="9144" marB="9144">
@@ -17680,9 +17838,9 @@
                     <a:bodyPr/>
                     <a:lstStyle/>
                     <a:p>
-                      <a:pPr algn="l"/>
+                      <a:pPr algn="ctr"/>
                       <a:r>
-                        <a:rPr sz="800" b="0">
+                        <a:rPr sz="900" b="0">
                           <a:solidFill>
                             <a:srgbClr val="3D3C3A"/>
                           </a:solidFill>
@@ -17721,9 +17879,9 @@
                     <a:bodyPr/>
                     <a:lstStyle/>
                     <a:p>
-                      <a:pPr algn="l"/>
+                      <a:pPr algn="ctr"/>
                       <a:r>
-                        <a:rPr sz="800" b="0" dirty="0" err="1">
+                        <a:rPr sz="900" b="0" dirty="0" err="1">
                           <a:solidFill>
                             <a:srgbClr val="3D3C3A"/>
                           </a:solidFill>
@@ -17732,7 +17890,7 @@
                         </a:rPr>
                         <a:t>持续观察</a:t>
                       </a:r>
-                      <a:endParaRPr sz="700" b="0" dirty="0">
+                      <a:endParaRPr sz="900" b="0" dirty="0">
                         <a:solidFill>
                           <a:srgbClr val="3D3C3A"/>
                         </a:solidFill>
@@ -17873,7 +18031,7 @@
         </p:nvSpPr>
         <p:spPr>
           <a:xfrm>
-            <a:off x="6245352" y="4572000"/>
+            <a:off x="6245352" y="4799246"/>
             <a:ext cx="76200" cy="228600"/>
           </a:xfrm>
           <a:prstGeom prst="rect">
@@ -17918,7 +18076,7 @@
         </p:nvSpPr>
         <p:spPr>
           <a:xfrm>
-            <a:off x="6309360" y="5715000"/>
+            <a:off x="6309360" y="6272784"/>
             <a:ext cx="5541264" cy="365760"/>
           </a:xfrm>
           <a:prstGeom prst="rect">
@@ -17963,7 +18121,7 @@
         </p:nvSpPr>
         <p:spPr>
           <a:xfrm>
-            <a:off x="6245352" y="5715000"/>
+            <a:off x="6245352" y="6272784"/>
             <a:ext cx="54864" cy="365760"/>
           </a:xfrm>
           <a:prstGeom prst="rect">
@@ -18008,7 +18166,7 @@
         </p:nvSpPr>
         <p:spPr>
           <a:xfrm>
-            <a:off x="6400800" y="5715000"/>
+            <a:off x="6400800" y="6272784"/>
             <a:ext cx="5349240" cy="365760"/>
           </a:xfrm>
           <a:prstGeom prst="rect">
@@ -18044,7 +18202,7 @@
         </p:nvSpPr>
         <p:spPr>
           <a:xfrm>
-            <a:off x="6294120" y="2020824"/>
+            <a:off x="6294120" y="2063159"/>
             <a:ext cx="5541264" cy="292608"/>
           </a:xfrm>
           <a:prstGeom prst="rect">
@@ -18098,7 +18256,7 @@
               <a:t>：</a:t>
             </a:r>
             <a:r>
-              <a:rPr lang="zh-CN" sz="1000" b="0" dirty="0">
+              <a:rPr lang="zh-CN" sz="1000" b="1" dirty="0">
                 <a:solidFill>
                   <a:srgbClr val="3D3C3A"/>
                 </a:solidFill>
@@ -18112,58 +18270,13 @@
       </p:sp>
       <p:sp>
         <p:nvSpPr>
-          <p:cNvPr id="39" name="Rectangle 38"/>
-          <p:cNvSpPr/>
-          <p:nvPr/>
-        </p:nvSpPr>
-        <p:spPr>
-          <a:xfrm>
-            <a:off x="6309360" y="1975104"/>
-            <a:ext cx="5541264" cy="54864"/>
-          </a:xfrm>
-          <a:prstGeom prst="rect">
-            <a:avLst/>
-          </a:prstGeom>
-          <a:solidFill>
-            <a:srgbClr val="1F4E79"/>
-          </a:solidFill>
-          <a:ln>
-            <a:noFill/>
-          </a:ln>
-          <a:effectLst/>
-        </p:spPr>
-        <p:style>
-          <a:lnRef idx="1">
-            <a:schemeClr val="accent1"/>
-          </a:lnRef>
-          <a:fillRef idx="3">
-            <a:schemeClr val="accent1"/>
-          </a:fillRef>
-          <a:effectRef idx="2">
-            <a:schemeClr val="accent1"/>
-          </a:effectRef>
-          <a:fontRef idx="minor">
-            <a:schemeClr val="lt1"/>
-          </a:fontRef>
-        </p:style>
-        <p:txBody>
-          <a:bodyPr rtlCol="0" anchor="ctr"/>
-          <a:lstStyle/>
-          <a:p>
-            <a:pPr algn="ctr"/>
-            <a:endParaRPr/>
-          </a:p>
-        </p:txBody>
-      </p:sp>
-      <p:sp>
-        <p:nvSpPr>
           <p:cNvPr id="40" name="Rectangle 39"/>
           <p:cNvSpPr/>
           <p:nvPr/>
         </p:nvSpPr>
         <p:spPr>
           <a:xfrm>
-            <a:off x="6309360" y="2432304"/>
+            <a:off x="6309360" y="2474639"/>
             <a:ext cx="5541264" cy="292608"/>
           </a:xfrm>
           <a:prstGeom prst="rect">
@@ -18217,7 +18330,7 @@
               <a:t>：</a:t>
             </a:r>
             <a:r>
-              <a:rPr lang="zh-CN" sz="1000" b="0" dirty="0">
+              <a:rPr lang="zh-CN" sz="1000" b="1" dirty="0">
                 <a:solidFill>
                   <a:srgbClr val="3D3C3A"/>
                 </a:solidFill>
@@ -18231,58 +18344,13 @@
       </p:sp>
       <p:sp>
         <p:nvSpPr>
-          <p:cNvPr id="41" name="Rectangle 40"/>
-          <p:cNvSpPr/>
-          <p:nvPr/>
-        </p:nvSpPr>
-        <p:spPr>
-          <a:xfrm>
-            <a:off x="6309360" y="2386584"/>
-            <a:ext cx="5541264" cy="54864"/>
-          </a:xfrm>
-          <a:prstGeom prst="rect">
-            <a:avLst/>
-          </a:prstGeom>
-          <a:solidFill>
-            <a:srgbClr val="1F4E79"/>
-          </a:solidFill>
-          <a:ln>
-            <a:noFill/>
-          </a:ln>
-          <a:effectLst/>
-        </p:spPr>
-        <p:style>
-          <a:lnRef idx="1">
-            <a:schemeClr val="accent1"/>
-          </a:lnRef>
-          <a:fillRef idx="3">
-            <a:schemeClr val="accent1"/>
-          </a:fillRef>
-          <a:effectRef idx="2">
-            <a:schemeClr val="accent1"/>
-          </a:effectRef>
-          <a:fontRef idx="minor">
-            <a:schemeClr val="lt1"/>
-          </a:fontRef>
-        </p:style>
-        <p:txBody>
-          <a:bodyPr rtlCol="0" anchor="ctr"/>
-          <a:lstStyle/>
-          <a:p>
-            <a:pPr algn="ctr"/>
-            <a:endParaRPr/>
-          </a:p>
-        </p:txBody>
-      </p:sp>
-      <p:sp>
-        <p:nvSpPr>
           <p:cNvPr id="42" name="Rectangle 41"/>
           <p:cNvSpPr/>
           <p:nvPr/>
         </p:nvSpPr>
         <p:spPr>
           <a:xfrm>
-            <a:off x="6309360" y="2843784"/>
+            <a:off x="6309360" y="2886119"/>
             <a:ext cx="5541264" cy="292608"/>
           </a:xfrm>
           <a:prstGeom prst="rect">
@@ -18336,7 +18404,7 @@
               <a:t>：</a:t>
             </a:r>
             <a:r>
-              <a:rPr lang="zh-CN" sz="1000" b="0" dirty="0">
+              <a:rPr lang="zh-CN" sz="1000" b="1" dirty="0">
                 <a:solidFill>
                   <a:srgbClr val="3D3C3A"/>
                 </a:solidFill>
@@ -18345,51 +18413,6 @@
               </a:rPr>
               <a:t>生成问题清单、原因诊断及规则/知识库优化建议</a:t>
             </a:r>
-          </a:p>
-        </p:txBody>
-      </p:sp>
-      <p:sp>
-        <p:nvSpPr>
-          <p:cNvPr id="43" name="Rectangle 42"/>
-          <p:cNvSpPr/>
-          <p:nvPr/>
-        </p:nvSpPr>
-        <p:spPr>
-          <a:xfrm>
-            <a:off x="6309360" y="2798064"/>
-            <a:ext cx="5541264" cy="54864"/>
-          </a:xfrm>
-          <a:prstGeom prst="rect">
-            <a:avLst/>
-          </a:prstGeom>
-          <a:solidFill>
-            <a:srgbClr val="1F4E79"/>
-          </a:solidFill>
-          <a:ln>
-            <a:noFill/>
-          </a:ln>
-          <a:effectLst/>
-        </p:spPr>
-        <p:style>
-          <a:lnRef idx="1">
-            <a:schemeClr val="accent1"/>
-          </a:lnRef>
-          <a:fillRef idx="3">
-            <a:schemeClr val="accent1"/>
-          </a:fillRef>
-          <a:effectRef idx="2">
-            <a:schemeClr val="accent1"/>
-          </a:effectRef>
-          <a:fontRef idx="minor">
-            <a:schemeClr val="lt1"/>
-          </a:fontRef>
-        </p:style>
-        <p:txBody>
-          <a:bodyPr rtlCol="0" anchor="ctr"/>
-          <a:lstStyle/>
-          <a:p>
-            <a:pPr algn="ctr"/>
-            <a:endParaRPr/>
           </a:p>
         </p:txBody>
       </p:sp>
@@ -18500,11 +18523,17 @@
           <p:cNvGraphicFramePr>
             <a:graphicFrameLocks noGrp="1"/>
           </p:cNvGraphicFramePr>
-          <p:nvPr/>
+          <p:nvPr>
+            <p:extLst>
+              <p:ext uri="{D42A27DB-BD31-4B8C-83A1-F6EECF244321}">
+                <p14:modId xmlns:p14="http://schemas.microsoft.com/office/powerpoint/2010/main" val="1847240092"/>
+              </p:ext>
+            </p:extLst>
+          </p:nvPr>
         </p:nvGraphicFramePr>
         <p:xfrm>
           <a:off x="4681727" y="1591056"/>
-          <a:ext cx="7004304" cy="621792"/>
+          <a:ext cx="7004304" cy="499872"/>
         </p:xfrm>
         <a:graphic>
           <a:graphicData uri="http://schemas.openxmlformats.org/drawingml/2006/table">
@@ -18764,12 +18793,23 @@
                         </a:spcAft>
                       </a:pPr>
                       <a:r>
-                        <a:rPr sz="800" b="1">
+                        <a:rPr lang="en-US" altLang="zh-CN" sz="800" b="1" dirty="0" err="1">
                           <a:latin typeface="微软雅黑"/>
                           <a:ea typeface="微软雅黑"/>
                         </a:rPr>
-                        <a:t>我方分类</a:t>
+                        <a:t>Finv</a:t>
                       </a:r>
+                      <a:r>
+                        <a:rPr sz="800" b="1" dirty="0" err="1">
+                          <a:latin typeface="微软雅黑"/>
+                          <a:ea typeface="微软雅黑"/>
+                        </a:rPr>
+                        <a:t>分类</a:t>
+                      </a:r>
+                      <a:endParaRPr sz="800" b="1" dirty="0">
+                        <a:latin typeface="微软雅黑"/>
+                        <a:ea typeface="微软雅黑"/>
+                      </a:endParaRPr>
                     </a:p>
                   </a:txBody>
                   <a:tcPr marL="45720" marR="45720" marT="18288" marB="18288" anchor="ctr">
@@ -18974,11 +19014,11 @@
                         </a:spcAft>
                       </a:pPr>
                       <a:r>
-                        <a:rPr sz="800" b="0">
+                        <a:rPr sz="800" b="0" dirty="0">
                           <a:latin typeface="微软雅黑"/>
                           <a:ea typeface="微软雅黑"/>
                         </a:rPr>
-                        <a:t>Internal Transfer（内部转账）&lt;br&gt;住房贷款完全遗漏</a:t>
+                        <a:t>Internal Transfer</a:t>
                       </a:r>
                     </a:p>
                   </a:txBody>
@@ -19033,28 +19073,14 @@
                           <a:latin typeface="微软雅黑"/>
                           <a:ea typeface="微软雅黑"/>
                         </a:rPr>
-                        <a:t> Loan）&lt;</a:t>
+                        <a:t> Loan</a:t>
                       </a:r>
                       <a:r>
-                        <a:rPr sz="800" b="0" dirty="0" err="1">
+                        <a:rPr lang="zh-CN" altLang="en-US" sz="800" b="0" dirty="0">
                           <a:latin typeface="微软雅黑"/>
                           <a:ea typeface="微软雅黑"/>
                         </a:rPr>
-                        <a:t>br</a:t>
-                      </a:r>
-                      <a:r>
-                        <a:rPr sz="800" b="0" dirty="0">
-                          <a:latin typeface="微软雅黑"/>
-                          <a:ea typeface="微软雅黑"/>
-                        </a:rPr>
-                        <a:t>&gt;</a:t>
-                      </a:r>
-                      <a:r>
-                        <a:rPr sz="800" b="0" dirty="0" err="1">
-                          <a:latin typeface="微软雅黑"/>
-                          <a:ea typeface="微软雅黑"/>
-                        </a:rPr>
-                        <a:t>按产品关键词判定为贷款</a:t>
+                        <a:t>）</a:t>
                       </a:r>
                       <a:endParaRPr sz="800" b="0" dirty="0">
                         <a:latin typeface="微软雅黑"/>
@@ -19097,7 +19123,13 @@
           <p:cNvGraphicFramePr>
             <a:graphicFrameLocks noGrp="1"/>
           </p:cNvGraphicFramePr>
-          <p:nvPr/>
+          <p:nvPr>
+            <p:extLst>
+              <p:ext uri="{D42A27DB-BD31-4B8C-83A1-F6EECF244321}">
+                <p14:modId xmlns:p14="http://schemas.microsoft.com/office/powerpoint/2010/main" val="209210359"/>
+              </p:ext>
+            </p:extLst>
+          </p:nvPr>
         </p:nvGraphicFramePr>
         <p:xfrm>
           <a:off x="4681727" y="3108960"/>
@@ -19361,12 +19393,23 @@
                         </a:spcAft>
                       </a:pPr>
                       <a:r>
-                        <a:rPr sz="800" b="1">
+                        <a:rPr lang="en-US" altLang="zh-CN" sz="800" b="1" dirty="0" err="1">
                           <a:latin typeface="微软雅黑"/>
                           <a:ea typeface="微软雅黑"/>
                         </a:rPr>
-                        <a:t>我方分类</a:t>
+                        <a:t>Finv</a:t>
                       </a:r>
+                      <a:r>
+                        <a:rPr sz="800" b="1" dirty="0" err="1">
+                          <a:latin typeface="微软雅黑"/>
+                          <a:ea typeface="微软雅黑"/>
+                        </a:rPr>
+                        <a:t>分类</a:t>
+                      </a:r>
+                      <a:endParaRPr sz="800" b="1" dirty="0">
+                        <a:latin typeface="微软雅黑"/>
+                        <a:ea typeface="微软雅黑"/>
+                      </a:endParaRPr>
                     </a:p>
                   </a:txBody>
                   <a:tcPr marL="45720" marR="45720" marT="18288" marB="18288" anchor="ctr">
@@ -20209,7 +20252,13 @@
           <p:cNvGraphicFramePr>
             <a:graphicFrameLocks noGrp="1"/>
           </p:cNvGraphicFramePr>
-          <p:nvPr/>
+          <p:nvPr>
+            <p:extLst>
+              <p:ext uri="{D42A27DB-BD31-4B8C-83A1-F6EECF244321}">
+                <p14:modId xmlns:p14="http://schemas.microsoft.com/office/powerpoint/2010/main" val="4078164297"/>
+              </p:ext>
+            </p:extLst>
+          </p:nvPr>
         </p:nvGraphicFramePr>
         <p:xfrm>
           <a:off x="4681727" y="5010910"/>
@@ -20473,12 +20522,23 @@
                         </a:spcAft>
                       </a:pPr>
                       <a:r>
-                        <a:rPr sz="800" b="1">
+                        <a:rPr lang="en-US" altLang="zh-CN" sz="800" b="1" dirty="0" err="1">
+                          <a:latin typeface="+mn-lt"/>
+                          <a:ea typeface="微软雅黑"/>
+                        </a:rPr>
+                        <a:t>Finv</a:t>
+                      </a:r>
+                      <a:r>
+                        <a:rPr sz="800" b="1" dirty="0" err="1">
                           <a:latin typeface="微软雅黑"/>
                           <a:ea typeface="微软雅黑"/>
                         </a:rPr>
-                        <a:t>我方分类</a:t>
+                        <a:t>分类</a:t>
                       </a:r>
+                      <a:endParaRPr sz="800" b="1" dirty="0">
+                        <a:latin typeface="微软雅黑"/>
+                        <a:ea typeface="微软雅黑"/>
+                      </a:endParaRPr>
                     </a:p>
                   </a:txBody>
                   <a:tcPr marL="45720" marR="45720" marT="18288" marB="18288" anchor="ctr">
@@ -21885,91 +21945,14 @@
       </p:graphicFrame>
       <p:sp>
         <p:nvSpPr>
-          <p:cNvPr id="23" name="Rectangle 22"/>
-          <p:cNvSpPr/>
-          <p:nvPr/>
-        </p:nvSpPr>
-        <p:spPr>
-          <a:xfrm>
-            <a:off x="192023" y="1069849"/>
-            <a:ext cx="64008" cy="256032"/>
-          </a:xfrm>
-          <a:prstGeom prst="rect">
-            <a:avLst/>
-          </a:prstGeom>
-          <a:solidFill>
-            <a:srgbClr val="1F4E79"/>
-          </a:solidFill>
-          <a:ln>
-            <a:noFill/>
-          </a:ln>
-          <a:effectLst/>
-        </p:spPr>
-        <p:style>
-          <a:lnRef idx="1">
-            <a:schemeClr val="accent1"/>
-          </a:lnRef>
-          <a:fillRef idx="3">
-            <a:schemeClr val="accent1"/>
-          </a:fillRef>
-          <a:effectRef idx="2">
-            <a:schemeClr val="accent1"/>
-          </a:effectRef>
-          <a:fontRef idx="minor">
-            <a:schemeClr val="lt1"/>
-          </a:fontRef>
-        </p:style>
-        <p:txBody>
-          <a:bodyPr rtlCol="0" anchor="ctr"/>
-          <a:lstStyle/>
-          <a:p>
-            <a:pPr marL="0" marR="0" lvl="0" indent="0" algn="ctr" defTabSz="914400" rtl="0" eaLnBrk="1" fontAlgn="auto" latinLnBrk="0" hangingPunct="1">
-              <a:lnSpc>
-                <a:spcPct val="100000"/>
-              </a:lnSpc>
-              <a:spcBef>
-                <a:spcPts val="0"/>
-              </a:spcBef>
-              <a:spcAft>
-                <a:spcPts val="0"/>
-              </a:spcAft>
-              <a:buClrTx/>
-              <a:buSzTx/>
-              <a:buFontTx/>
-              <a:buNone/>
-              <a:tabLst/>
-              <a:defRPr>
-                <a:latin typeface="微软雅黑"/>
-                <a:ea typeface="微软雅黑"/>
-              </a:defRPr>
-            </a:pPr>
-            <a:endParaRPr kumimoji="0" sz="1800" b="0" i="0" u="none" strike="noStrike" kern="1200" cap="none" spc="0" normalizeH="0" baseline="0" noProof="0">
-              <a:ln>
-                <a:noFill/>
-              </a:ln>
-              <a:solidFill>
-                <a:prstClr val="white"/>
-              </a:solidFill>
-              <a:effectLst/>
-              <a:uLnTx/>
-              <a:uFillTx/>
-              <a:latin typeface="等线"/>
-              <a:ea typeface="+mn-ea"/>
-              <a:cs typeface="+mn-cs"/>
-            </a:endParaRPr>
-          </a:p>
-        </p:txBody>
-      </p:sp>
-      <p:sp>
-        <p:nvSpPr>
           <p:cNvPr id="24" name="TextBox 23"/>
           <p:cNvSpPr txBox="1"/>
           <p:nvPr/>
         </p:nvSpPr>
         <p:spPr>
           <a:xfrm>
-            <a:off x="329182" y="1051560"/>
-            <a:ext cx="4023359" cy="292608"/>
+            <a:off x="337649" y="1237831"/>
+            <a:ext cx="4023359" cy="307777"/>
           </a:xfrm>
           <a:prstGeom prst="rect">
             <a:avLst/>
@@ -22003,7 +21986,7 @@
               </a:defRPr>
             </a:pPr>
             <a:r>
-              <a:rPr kumimoji="0" sz="1200" b="1" i="0" u="none" strike="noStrike" kern="1200" cap="none" spc="0" normalizeH="0" baseline="0" noProof="0">
+              <a:rPr kumimoji="0" sz="1400" b="1" i="0" u="none" strike="noStrike" kern="1200" cap="none" spc="0" normalizeH="0" baseline="0" noProof="0" dirty="0">
                 <a:ln>
                   <a:noFill/>
                 </a:ln>
@@ -22017,8 +22000,39 @@
                 <a:ea typeface="微软雅黑"/>
                 <a:cs typeface="+mn-cs"/>
               </a:rPr>
-              <a:t>1. 贷款识别覆盖交集：我方漏识别更少</a:t>
+              <a:t>1. </a:t>
             </a:r>
+            <a:r>
+              <a:rPr kumimoji="0" sz="1400" b="1" i="0" u="none" strike="noStrike" kern="1200" cap="none" spc="0" normalizeH="0" baseline="0" noProof="0" dirty="0" err="1">
+                <a:ln>
+                  <a:noFill/>
+                </a:ln>
+                <a:solidFill>
+                  <a:srgbClr val="0A0A0A"/>
+                </a:solidFill>
+                <a:effectLst/>
+                <a:uLnTx/>
+                <a:uFillTx/>
+                <a:latin typeface="微软雅黑"/>
+                <a:ea typeface="微软雅黑"/>
+                <a:cs typeface="+mn-cs"/>
+              </a:rPr>
+              <a:t>贷款识别覆盖交集：我方漏识别更少</a:t>
+            </a:r>
+            <a:endParaRPr kumimoji="0" sz="1400" b="1" i="0" u="none" strike="noStrike" kern="1200" cap="none" spc="0" normalizeH="0" baseline="0" noProof="0" dirty="0">
+              <a:ln>
+                <a:noFill/>
+              </a:ln>
+              <a:solidFill>
+                <a:srgbClr val="0A0A0A"/>
+              </a:solidFill>
+              <a:effectLst/>
+              <a:uLnTx/>
+              <a:uFillTx/>
+              <a:latin typeface="微软雅黑"/>
+              <a:ea typeface="微软雅黑"/>
+              <a:cs typeface="+mn-cs"/>
+            </a:endParaRPr>
           </a:p>
         </p:txBody>
       </p:sp>
@@ -22142,7 +22156,7 @@
               </a:defRPr>
             </a:pPr>
             <a:r>
-              <a:rPr kumimoji="0" sz="850" b="1" i="0" u="none" strike="noStrike" kern="1200" cap="none" spc="0" normalizeH="0" baseline="0" noProof="0">
+              <a:rPr kumimoji="0" sz="850" b="1" i="0" u="none" strike="noStrike" kern="1200" cap="none" spc="0" normalizeH="0" baseline="0" noProof="0" dirty="0">
                 <a:ln>
                   <a:noFill/>
                 </a:ln>
@@ -22204,7 +22218,7 @@
               </a:defRPr>
             </a:pPr>
             <a:r>
-              <a:rPr kumimoji="0" sz="1050" b="1" i="0" u="none" strike="noStrike" kern="1200" cap="none" spc="0" normalizeH="0" baseline="0" noProof="0">
+              <a:rPr kumimoji="0" sz="1200" b="1" i="0" u="none" strike="noStrike" kern="1200" cap="none" spc="0" normalizeH="0" baseline="0" noProof="0" dirty="0" err="1">
                 <a:ln>
                   <a:noFill/>
                 </a:ln>
@@ -22218,8 +22232,90 @@
                 <a:ea typeface="微软雅黑"/>
                 <a:cs typeface="+mn-cs"/>
               </a:rPr>
-              <a:t>覆盖提升：Home Loan 被 illion 漏识别</a:t>
+              <a:t>覆盖提升：Home</a:t>
             </a:r>
+            <a:r>
+              <a:rPr kumimoji="0" sz="1200" b="1" i="0" u="none" strike="noStrike" kern="1200" cap="none" spc="0" normalizeH="0" baseline="0" noProof="0" dirty="0">
+                <a:ln>
+                  <a:noFill/>
+                </a:ln>
+                <a:solidFill>
+                  <a:srgbClr val="0A0A0A"/>
+                </a:solidFill>
+                <a:effectLst/>
+                <a:uLnTx/>
+                <a:uFillTx/>
+                <a:latin typeface="微软雅黑"/>
+                <a:ea typeface="微软雅黑"/>
+                <a:cs typeface="+mn-cs"/>
+              </a:rPr>
+              <a:t> Loan 被 </a:t>
+            </a:r>
+            <a:r>
+              <a:rPr kumimoji="0" sz="1200" b="1" i="0" u="none" strike="noStrike" kern="1200" cap="none" spc="0" normalizeH="0" baseline="0" noProof="0" dirty="0" err="1">
+                <a:ln>
+                  <a:noFill/>
+                </a:ln>
+                <a:solidFill>
+                  <a:srgbClr val="0A0A0A"/>
+                </a:solidFill>
+                <a:effectLst/>
+                <a:uLnTx/>
+                <a:uFillTx/>
+                <a:latin typeface="微软雅黑"/>
+                <a:ea typeface="微软雅黑"/>
+                <a:cs typeface="+mn-cs"/>
+              </a:rPr>
+              <a:t>illion</a:t>
+            </a:r>
+            <a:r>
+              <a:rPr kumimoji="0" sz="1200" b="1" i="0" u="none" strike="noStrike" kern="1200" cap="none" spc="0" normalizeH="0" baseline="0" noProof="0" dirty="0">
+                <a:ln>
+                  <a:noFill/>
+                </a:ln>
+                <a:solidFill>
+                  <a:srgbClr val="0A0A0A"/>
+                </a:solidFill>
+                <a:effectLst/>
+                <a:uLnTx/>
+                <a:uFillTx/>
+                <a:latin typeface="微软雅黑"/>
+                <a:ea typeface="微软雅黑"/>
+                <a:cs typeface="+mn-cs"/>
+              </a:rPr>
+              <a:t> </a:t>
+            </a:r>
+            <a:r>
+              <a:rPr kumimoji="0" sz="1200" b="1" i="0" u="none" strike="noStrike" kern="1200" cap="none" spc="0" normalizeH="0" baseline="0" noProof="0" dirty="0" err="1">
+                <a:ln>
+                  <a:noFill/>
+                </a:ln>
+                <a:solidFill>
+                  <a:srgbClr val="0A0A0A"/>
+                </a:solidFill>
+                <a:effectLst/>
+                <a:uLnTx/>
+                <a:uFillTx/>
+                <a:latin typeface="微软雅黑"/>
+                <a:ea typeface="微软雅黑"/>
+                <a:cs typeface="+mn-cs"/>
+              </a:rPr>
+              <a:t>漏识别</a:t>
+            </a:r>
+            <a:endParaRPr kumimoji="0" sz="1200" b="1" i="0" u="none" strike="noStrike" kern="1200" cap="none" spc="0" normalizeH="0" baseline="0" noProof="0" dirty="0">
+              <a:ln>
+                <a:noFill/>
+              </a:ln>
+              <a:solidFill>
+                <a:srgbClr val="0A0A0A"/>
+              </a:solidFill>
+              <a:effectLst/>
+              <a:uLnTx/>
+              <a:uFillTx/>
+              <a:latin typeface="微软雅黑"/>
+              <a:ea typeface="微软雅黑"/>
+              <a:cs typeface="+mn-cs"/>
+            </a:endParaRPr>
           </a:p>
         </p:txBody>
       </p:sp>
@@ -22293,7 +22389,7 @@
         </p:nvSpPr>
         <p:spPr>
           <a:xfrm>
-            <a:off x="4681727" y="2218945"/>
+            <a:off x="4681727" y="2142745"/>
             <a:ext cx="6958584" cy="274320"/>
           </a:xfrm>
           <a:prstGeom prst="rect">
@@ -22370,7 +22466,7 @@
         </p:nvSpPr>
         <p:spPr>
           <a:xfrm>
-            <a:off x="4681727" y="2218945"/>
+            <a:off x="4681727" y="2142745"/>
             <a:ext cx="76200" cy="228600"/>
           </a:xfrm>
           <a:prstGeom prst="rect">
@@ -22447,7 +22543,7 @@
         </p:nvSpPr>
         <p:spPr>
           <a:xfrm>
-            <a:off x="4809743" y="2255521"/>
+            <a:off x="4809743" y="2179321"/>
             <a:ext cx="6775704" cy="219456"/>
           </a:xfrm>
           <a:prstGeom prst="rect">
@@ -22649,7 +22745,7 @@
         <p:spPr>
           <a:xfrm>
             <a:off x="5303520" y="2578608"/>
-            <a:ext cx="6318504" cy="253916"/>
+            <a:ext cx="6318504" cy="276999"/>
           </a:xfrm>
           <a:prstGeom prst="rect">
             <a:avLst/>
@@ -22662,28 +22758,14 @@
           </a:bodyPr>
           <a:lstStyle/>
           <a:p>
-            <a:pPr marL="0" marR="0" lvl="0" indent="0" algn="l" defTabSz="914400" rtl="0" eaLnBrk="1" fontAlgn="auto" latinLnBrk="0" hangingPunct="1">
-              <a:lnSpc>
-                <a:spcPct val="100000"/>
-              </a:lnSpc>
-              <a:spcBef>
-                <a:spcPts val="0"/>
-              </a:spcBef>
-              <a:spcAft>
-                <a:spcPts val="0"/>
-              </a:spcAft>
-              <a:buClrTx/>
-              <a:buSzTx/>
-              <a:buFontTx/>
-              <a:buNone/>
-              <a:tabLst/>
+            <a:pPr>
               <a:defRPr>
                 <a:latin typeface="微软雅黑"/>
                 <a:ea typeface="微软雅黑"/>
               </a:defRPr>
             </a:pPr>
             <a:r>
-              <a:rPr lang="zh-CN" altLang="en-US" sz="1050" b="1" dirty="0">
+              <a:rPr lang="zh-CN" altLang="en-US" sz="1200" b="1" dirty="0">
                 <a:solidFill>
                   <a:srgbClr val="0A0A0A"/>
                 </a:solidFill>
@@ -22693,104 +22775,62 @@
               <a:t>准确</a:t>
             </a:r>
             <a:r>
-              <a:rPr kumimoji="0" sz="1050" b="1" i="0" u="none" strike="noStrike" kern="1200" cap="none" spc="0" normalizeH="0" baseline="0" noProof="0" dirty="0" err="1">
-                <a:ln>
-                  <a:noFill/>
-                </a:ln>
+              <a:rPr sz="1200" b="1" dirty="0" err="1">
                 <a:solidFill>
                   <a:srgbClr val="0A0A0A"/>
                 </a:solidFill>
-                <a:effectLst/>
-                <a:uLnTx/>
-                <a:uFillTx/>
                 <a:latin typeface="微软雅黑"/>
                 <a:ea typeface="微软雅黑"/>
-                <a:cs typeface="+mn-cs"/>
               </a:rPr>
               <a:t>性：同一贷款流内</a:t>
             </a:r>
             <a:r>
-              <a:rPr kumimoji="0" sz="1050" b="1" i="0" u="none" strike="noStrike" kern="1200" cap="none" spc="0" normalizeH="0" baseline="0" noProof="0" dirty="0">
-                <a:ln>
-                  <a:noFill/>
-                </a:ln>
+              <a:rPr sz="1200" b="1" dirty="0">
                 <a:solidFill>
                   <a:srgbClr val="0A0A0A"/>
                 </a:solidFill>
-                <a:effectLst/>
-                <a:uLnTx/>
-                <a:uFillTx/>
                 <a:latin typeface="微软雅黑"/>
                 <a:ea typeface="微软雅黑"/>
-                <a:cs typeface="+mn-cs"/>
               </a:rPr>
               <a:t> </a:t>
             </a:r>
             <a:r>
-              <a:rPr kumimoji="0" sz="1050" b="1" i="0" u="none" strike="noStrike" kern="1200" cap="none" spc="0" normalizeH="0" baseline="0" noProof="0" dirty="0" err="1">
-                <a:ln>
-                  <a:noFill/>
-                </a:ln>
+              <a:rPr sz="1200" b="1" dirty="0" err="1">
                 <a:solidFill>
                   <a:srgbClr val="0A0A0A"/>
                 </a:solidFill>
-                <a:effectLst/>
-                <a:uLnTx/>
-                <a:uFillTx/>
                 <a:latin typeface="微软雅黑"/>
                 <a:ea typeface="微软雅黑"/>
-                <a:cs typeface="+mn-cs"/>
               </a:rPr>
               <a:t>illion</a:t>
             </a:r>
             <a:r>
-              <a:rPr kumimoji="0" sz="1050" b="1" i="0" u="none" strike="noStrike" kern="1200" cap="none" spc="0" normalizeH="0" baseline="0" noProof="0" dirty="0">
-                <a:ln>
-                  <a:noFill/>
-                </a:ln>
+              <a:rPr sz="1200" b="1" dirty="0">
                 <a:solidFill>
                   <a:srgbClr val="0A0A0A"/>
                 </a:solidFill>
-                <a:effectLst/>
-                <a:uLnTx/>
-                <a:uFillTx/>
                 <a:latin typeface="微软雅黑"/>
                 <a:ea typeface="微软雅黑"/>
-                <a:cs typeface="+mn-cs"/>
               </a:rPr>
               <a:t> </a:t>
             </a:r>
             <a:r>
-              <a:rPr kumimoji="0" sz="1050" b="1" i="0" u="none" strike="noStrike" kern="1200" cap="none" spc="0" normalizeH="0" baseline="0" noProof="0" dirty="0" err="1">
-                <a:ln>
-                  <a:noFill/>
-                </a:ln>
+              <a:rPr sz="1200" b="1" dirty="0" err="1">
                 <a:solidFill>
                   <a:srgbClr val="0A0A0A"/>
                 </a:solidFill>
-                <a:effectLst/>
-                <a:uLnTx/>
-                <a:uFillTx/>
                 <a:latin typeface="微软雅黑"/>
                 <a:ea typeface="微软雅黑"/>
-                <a:cs typeface="+mn-cs"/>
               </a:rPr>
               <a:t>标签自相矛盾（MoneySpot</a:t>
             </a:r>
             <a:r>
-              <a:rPr kumimoji="0" sz="1050" b="1" i="0" u="none" strike="noStrike" kern="1200" cap="none" spc="0" normalizeH="0" baseline="0" noProof="0" dirty="0">
-                <a:ln>
-                  <a:noFill/>
-                </a:ln>
+              <a:rPr sz="1200" b="1" dirty="0">
                 <a:solidFill>
                   <a:srgbClr val="0A0A0A"/>
                 </a:solidFill>
-                <a:effectLst/>
-                <a:uLnTx/>
-                <a:uFillTx/>
                 <a:latin typeface="微软雅黑"/>
                 <a:ea typeface="微软雅黑"/>
-                <a:cs typeface="+mn-cs"/>
               </a:rPr>
               <a:t>）</a:t>
             </a:r>
@@ -23223,7 +23263,7 @@
         <p:spPr>
           <a:xfrm>
             <a:off x="5303520" y="4480559"/>
-            <a:ext cx="6318504" cy="274320"/>
+            <a:ext cx="6318504" cy="276999"/>
           </a:xfrm>
           <a:prstGeom prst="rect">
             <a:avLst/>
@@ -23236,42 +23276,61 @@
           </a:bodyPr>
           <a:lstStyle/>
           <a:p>
-            <a:pPr marL="0" marR="0" lvl="0" indent="0" algn="l" defTabSz="914400" rtl="0" eaLnBrk="1" fontAlgn="auto" latinLnBrk="0" hangingPunct="1">
-              <a:lnSpc>
-                <a:spcPct val="100000"/>
-              </a:lnSpc>
-              <a:spcBef>
-                <a:spcPts val="0"/>
-              </a:spcBef>
-              <a:spcAft>
-                <a:spcPts val="0"/>
-              </a:spcAft>
-              <a:buClrTx/>
-              <a:buSzTx/>
-              <a:buFontTx/>
-              <a:buNone/>
-              <a:tabLst/>
+            <a:pPr>
               <a:defRPr>
                 <a:latin typeface="微软雅黑"/>
                 <a:ea typeface="微软雅黑"/>
               </a:defRPr>
             </a:pPr>
             <a:r>
-              <a:rPr kumimoji="0" sz="1050" b="1" i="0" u="none" strike="noStrike" kern="1200" cap="none" spc="0" normalizeH="0" baseline="0" noProof="0">
-                <a:ln>
-                  <a:noFill/>
-                </a:ln>
+              <a:rPr sz="1200" b="1" dirty="0">
                 <a:solidFill>
                   <a:srgbClr val="0A0A0A"/>
                 </a:solidFill>
-                <a:effectLst/>
-                <a:uLnTx/>
-                <a:uFillTx/>
                 <a:latin typeface="微软雅黑"/>
                 <a:ea typeface="微软雅黑"/>
-                <a:cs typeface="+mn-cs"/>
               </a:rPr>
-              <a:t>分类精度：Credit24 被 illion 泛化为 SACC</a:t>
+              <a:t>分类精度：Credit24 被 </a:t>
+            </a:r>
+            <a:r>
+              <a:rPr sz="1200" b="1" dirty="0" err="1">
+                <a:solidFill>
+                  <a:srgbClr val="0A0A0A"/>
+                </a:solidFill>
+                <a:latin typeface="微软雅黑"/>
+                <a:ea typeface="微软雅黑"/>
+              </a:rPr>
+              <a:t>illion</a:t>
+            </a:r>
+            <a:r>
+              <a:rPr sz="1200" b="1" dirty="0">
+                <a:solidFill>
+                  <a:srgbClr val="0A0A0A"/>
+                </a:solidFill>
+                <a:latin typeface="微软雅黑"/>
+                <a:ea typeface="微软雅黑"/>
+              </a:rPr>
+              <a:t> </a:t>
+            </a:r>
+            <a:r>
+              <a:rPr sz="1200" b="1" dirty="0" err="1">
+                <a:solidFill>
+                  <a:srgbClr val="0A0A0A"/>
+                </a:solidFill>
+                <a:latin typeface="微软雅黑"/>
+                <a:ea typeface="微软雅黑"/>
+              </a:rPr>
+              <a:t>泛化为</a:t>
+            </a:r>
+            <a:r>
+              <a:rPr sz="1200" b="1" dirty="0">
+                <a:solidFill>
+                  <a:srgbClr val="0A0A0A"/>
+                </a:solidFill>
+                <a:latin typeface="微软雅黑"/>
+                <a:ea typeface="微软雅黑"/>
+              </a:rPr>
+              <a:t> SACC</a:t>
             </a:r>
           </a:p>
         </p:txBody>
@@ -23346,7 +23405,7 @@
         </p:nvSpPr>
         <p:spPr>
           <a:xfrm>
-            <a:off x="4718304" y="6215888"/>
+            <a:off x="4718304" y="6273038"/>
             <a:ext cx="6958584" cy="274320"/>
           </a:xfrm>
           <a:prstGeom prst="rect">
@@ -23423,7 +23482,7 @@
         </p:nvSpPr>
         <p:spPr>
           <a:xfrm>
-            <a:off x="4718304" y="6215888"/>
+            <a:off x="4718304" y="6273038"/>
             <a:ext cx="76200" cy="228600"/>
           </a:xfrm>
           <a:prstGeom prst="rect">
@@ -23500,7 +23559,7 @@
         </p:nvSpPr>
         <p:spPr>
           <a:xfrm>
-            <a:off x="4846320" y="6252464"/>
+            <a:off x="4846320" y="6309614"/>
             <a:ext cx="6775704" cy="219456"/>
           </a:xfrm>
           <a:prstGeom prst="rect">
@@ -23660,7 +23719,7 @@
         </p:nvSpPr>
         <p:spPr>
           <a:xfrm>
-            <a:off x="841248" y="1954785"/>
+            <a:off x="460247" y="1890269"/>
             <a:ext cx="1463040" cy="402336"/>
           </a:xfrm>
           <a:prstGeom prst="rect">
@@ -23676,7 +23735,7 @@
           <a:p>
             <a:pPr algn="l"/>
             <a:r>
-              <a:rPr lang="zh-CN" sz="900" b="1" dirty="0">
+              <a:rPr lang="zh-CN" sz="1400" b="1" dirty="0">
                 <a:solidFill>
                   <a:srgbClr val="1F4E79"/>
                 </a:solidFill>
@@ -23689,7 +23748,7 @@
           <a:p>
             <a:pPr algn="l"/>
             <a:r>
-              <a:rPr lang="zh-CN" sz="800" b="0" dirty="0">
+              <a:rPr lang="zh-CN" sz="1200" b="0" dirty="0">
                 <a:solidFill>
                   <a:srgbClr val="606060"/>
                 </a:solidFill>
@@ -23709,7 +23768,7 @@
         </p:nvSpPr>
         <p:spPr>
           <a:xfrm>
-            <a:off x="2711449" y="1930909"/>
+            <a:off x="2744215" y="1853185"/>
             <a:ext cx="1463040" cy="402336"/>
           </a:xfrm>
           <a:prstGeom prst="rect">
@@ -23723,9 +23782,8 @@
           </a:bodyPr>
           <a:lstStyle/>
           <a:p>
-            <a:pPr algn="r"/>
             <a:r>
-              <a:rPr lang="zh-CN" sz="900" b="1" dirty="0">
+              <a:rPr lang="zh-CN" sz="1400" b="1" dirty="0">
                 <a:solidFill>
                   <a:srgbClr val="D6A000"/>
                 </a:solidFill>
@@ -23734,11 +23792,17 @@
               </a:rPr>
               <a:t>illion 识别 5,363</a:t>
             </a:r>
+            <a:endParaRPr lang="en-US" altLang="zh-CN" sz="1400" b="1" dirty="0">
+              <a:solidFill>
+                <a:srgbClr val="D6A000"/>
+              </a:solidFill>
+              <a:latin typeface="微软雅黑"/>
+              <a:ea typeface="微软雅黑"/>
+            </a:endParaRPr>
           </a:p>
           <a:p>
-            <a:pPr algn="r"/>
             <a:r>
-              <a:rPr lang="zh-CN" sz="800" b="0" dirty="0">
+              <a:rPr lang="zh-CN" sz="1200" b="0" dirty="0">
                 <a:solidFill>
                   <a:srgbClr val="606060"/>
                 </a:solidFill>
@@ -23758,8 +23822,8 @@
         </p:nvSpPr>
         <p:spPr>
           <a:xfrm>
-            <a:off x="644653" y="3604261"/>
-            <a:ext cx="822960" cy="365760"/>
+            <a:off x="586452" y="3604261"/>
+            <a:ext cx="939361" cy="215444"/>
           </a:xfrm>
           <a:prstGeom prst="rect">
             <a:avLst/>
@@ -23778,7 +23842,7 @@
               </a:lnSpc>
             </a:pPr>
             <a:r>
-              <a:rPr lang="zh-CN" sz="1200" b="1">
+              <a:rPr lang="zh-CN" sz="1400" b="1" dirty="0">
                 <a:solidFill>
                   <a:srgbClr val="1F4E79"/>
                 </a:solidFill>
@@ -23788,7 +23852,7 @@
               <a:t>6.9%</a:t>
             </a:r>
             <a:r>
-              <a:rPr lang="zh-CN" sz="800" b="0">
+              <a:rPr lang="zh-CN" sz="1400" b="0" dirty="0">
                 <a:solidFill>
                   <a:srgbClr val="606060"/>
                 </a:solidFill>
@@ -23808,8 +23872,8 @@
         </p:nvSpPr>
         <p:spPr>
           <a:xfrm>
-            <a:off x="3177541" y="3604261"/>
-            <a:ext cx="822960" cy="365760"/>
+            <a:off x="3172240" y="3604261"/>
+            <a:ext cx="833563" cy="215444"/>
           </a:xfrm>
           <a:prstGeom prst="rect">
             <a:avLst/>
@@ -23828,7 +23892,7 @@
               </a:lnSpc>
             </a:pPr>
             <a:r>
-              <a:rPr lang="zh-CN" sz="1200" b="1">
+              <a:rPr lang="zh-CN" sz="1400" b="1" dirty="0">
                 <a:solidFill>
                   <a:srgbClr val="D6A000"/>
                 </a:solidFill>
@@ -23838,7 +23902,7 @@
               <a:t>1.4%</a:t>
             </a:r>
             <a:r>
-              <a:rPr lang="zh-CN" sz="800" b="0">
+              <a:rPr lang="zh-CN" sz="1400" b="0" dirty="0">
                 <a:solidFill>
                   <a:srgbClr val="606060"/>
                 </a:solidFill>
@@ -23858,8 +23922,8 @@
         </p:nvSpPr>
         <p:spPr>
           <a:xfrm>
-            <a:off x="1933957" y="3531109"/>
-            <a:ext cx="822960" cy="365760"/>
+            <a:off x="1745914" y="3531109"/>
+            <a:ext cx="1199047" cy="215444"/>
           </a:xfrm>
           <a:prstGeom prst="rect">
             <a:avLst/>
@@ -23878,7 +23942,7 @@
               </a:lnSpc>
             </a:pPr>
             <a:r>
-              <a:rPr lang="zh-CN" sz="1200" b="1" dirty="0">
+              <a:rPr lang="zh-CN" sz="1400" b="1" dirty="0">
                 <a:solidFill>
                   <a:srgbClr val="1F4E79"/>
                 </a:solidFill>
@@ -23888,7 +23952,7 @@
               <a:t>91.8%</a:t>
             </a:r>
             <a:r>
-              <a:rPr lang="zh-CN" sz="800" b="0" dirty="0">
+              <a:rPr lang="zh-CN" sz="1400" b="0" dirty="0">
                 <a:solidFill>
                   <a:srgbClr val="606060"/>
                 </a:solidFill>
@@ -23926,7 +23990,7 @@
               </a:lnSpc>
             </a:pPr>
             <a:r>
-              <a:rPr lang="zh-CN" sz="1800" b="0">
+              <a:rPr lang="zh-CN" sz="1800" b="0" dirty="0">
                 <a:solidFill>
                   <a:srgbClr val="606060"/>
                 </a:solidFill>
@@ -23946,8 +24010,8 @@
         </p:nvSpPr>
         <p:spPr>
           <a:xfrm>
-            <a:off x="841247" y="5200904"/>
-            <a:ext cx="1965960" cy="822960"/>
+            <a:off x="460247" y="5186428"/>
+            <a:ext cx="2177628" cy="605536"/>
           </a:xfrm>
           <a:prstGeom prst="rect">
             <a:avLst/>
@@ -23977,30 +24041,60 @@
             </a:r>
           </a:p>
           <a:p>
-            <a:pPr algn="l">
+            <a:pPr>
               <a:lnSpc>
                 <a:spcPct val="100000"/>
               </a:lnSpc>
             </a:pPr>
             <a:r>
-              <a:rPr lang="zh-CN" sz="900" b="0" dirty="0">
+              <a:rPr lang="en-US" altLang="zh-CN" sz="1200" dirty="0">
                 <a:solidFill>
-                  <a:srgbClr val="0A0A0A"/>
+                  <a:srgbClr val="606060"/>
                 </a:solidFill>
                 <a:latin typeface="微软雅黑"/>
                 <a:ea typeface="微软雅黑"/>
               </a:rPr>
-              <a:t>Finv 对 illion 已识别结果覆盖</a:t>
+              <a:t>Finv </a:t>
+            </a:r>
+            <a:r>
+              <a:rPr lang="zh-CN" altLang="en-US" sz="1200" dirty="0">
+                <a:solidFill>
+                  <a:srgbClr val="606060"/>
+                </a:solidFill>
+                <a:latin typeface="微软雅黑"/>
+                <a:ea typeface="微软雅黑"/>
+              </a:rPr>
+              <a:t>对 </a:t>
+            </a:r>
+            <a:r>
+              <a:rPr lang="en-US" altLang="zh-CN" sz="1200" dirty="0">
+                <a:solidFill>
+                  <a:srgbClr val="606060"/>
+                </a:solidFill>
+                <a:latin typeface="微软雅黑"/>
+                <a:ea typeface="微软雅黑"/>
+              </a:rPr>
+              <a:t>illion </a:t>
+            </a:r>
+            <a:r>
+              <a:rPr lang="zh-CN" altLang="en-US" sz="1200" dirty="0">
+                <a:solidFill>
+                  <a:srgbClr val="606060"/>
+                </a:solidFill>
+                <a:latin typeface="微软雅黑"/>
+                <a:ea typeface="微软雅黑"/>
+              </a:rPr>
+              <a:t>已识别结果覆盖</a:t>
             </a:r>
           </a:p>
           <a:p>
-            <a:pPr algn="l">
+            <a:pPr>
               <a:lnSpc>
                 <a:spcPct val="100000"/>
               </a:lnSpc>
             </a:pPr>
             <a:r>
-              <a:rPr lang="zh-CN" sz="800" b="0" dirty="0">
+              <a:rPr lang="en-US" altLang="zh-CN" sz="1200" dirty="0">
                 <a:solidFill>
                   <a:srgbClr val="606060"/>
                 </a:solidFill>
@@ -24020,7 +24114,7 @@
         </p:nvSpPr>
         <p:spPr>
           <a:xfrm>
-            <a:off x="2971799" y="5200904"/>
+            <a:off x="3264408" y="5152645"/>
             <a:ext cx="1965960" cy="822960"/>
           </a:xfrm>
           <a:prstGeom prst="rect">
@@ -24051,30 +24145,40 @@
             </a:r>
           </a:p>
           <a:p>
-            <a:pPr algn="l">
+            <a:pPr>
               <a:lnSpc>
                 <a:spcPct val="100000"/>
               </a:lnSpc>
             </a:pPr>
             <a:r>
-              <a:rPr lang="zh-CN" sz="900" b="0" dirty="0">
+              <a:rPr lang="en-US" altLang="zh-CN" sz="1200" dirty="0">
                 <a:solidFill>
-                  <a:srgbClr val="0A0A0A"/>
+                  <a:srgbClr val="606060"/>
                 </a:solidFill>
                 <a:latin typeface="微软雅黑"/>
                 <a:ea typeface="微软雅黑"/>
               </a:rPr>
-              <a:t>Finv 净增识别</a:t>
+              <a:t>Finv </a:t>
+            </a:r>
+            <a:r>
+              <a:rPr lang="zh-CN" altLang="en-US" sz="1200" dirty="0">
+                <a:solidFill>
+                  <a:srgbClr val="606060"/>
+                </a:solidFill>
+                <a:latin typeface="微软雅黑"/>
+                <a:ea typeface="微软雅黑"/>
+              </a:rPr>
+              <a:t>净增识别</a:t>
             </a:r>
           </a:p>
           <a:p>
-            <a:pPr algn="l">
+            <a:pPr>
               <a:lnSpc>
                 <a:spcPct val="100000"/>
               </a:lnSpc>
             </a:pPr>
             <a:r>
-              <a:rPr lang="zh-CN" sz="800" b="0" dirty="0">
+              <a:rPr lang="en-US" altLang="zh-CN" sz="1200" dirty="0">
                 <a:solidFill>
                   <a:srgbClr val="606060"/>
                 </a:solidFill>
@@ -24083,6 +24187,41 @@
               </a:rPr>
               <a:t>396 − 79</a:t>
             </a:r>
+          </a:p>
+        </p:txBody>
+      </p:sp>
+      <p:sp>
+        <p:nvSpPr>
+          <p:cNvPr id="39" name="s1-bar">
+            <a:extLst>
+              <a:ext uri="{FF2B5EF4-FFF2-40B4-BE49-F238E27FC236}">
+                <a16:creationId xmlns:a16="http://schemas.microsoft.com/office/drawing/2014/main" id="{A6BDCBD6-ED66-4163-AFBF-F835CEB75D53}"/>
+              </a:ext>
+            </a:extLst>
+          </p:cNvPr>
+          <p:cNvSpPr/>
+          <p:nvPr/>
+        </p:nvSpPr>
+        <p:spPr>
+          <a:xfrm>
+            <a:off x="306253" y="1275786"/>
+            <a:ext cx="76200" cy="228600"/>
+          </a:xfrm>
+          <a:prstGeom prst="rect">
+            <a:avLst/>
+          </a:prstGeom>
+          <a:solidFill>
+            <a:srgbClr val="D6A000"/>
+          </a:solidFill>
+          <a:ln>
+            <a:noFill/>
+          </a:ln>
+        </p:spPr>
+        <p:txBody>
+          <a:bodyPr/>
+          <a:lstStyle/>
+          <a:p>
+            <a:endParaRPr/>
           </a:p>
         </p:txBody>
       </p:sp>
